--- a/samples/Шаблон_презентации_VK_Education__focus.pptx
+++ b/samples/Шаблон_презентации_VK_Education__focus.pptx
@@ -16,8 +16,6 @@
     <p:sldId id="315" r:id="rId68"/>
     <p:sldId id="316" r:id="rId69"/>
     <p:sldId id="317" r:id="rId70"/>
-    <p:sldId id="318" r:id="rId71"/>
-    <p:sldId id="319" r:id="rId72"/>
   </p:sldIdLst>
   <p:sldSz cy="6858000" cx="12192000"/>
   <p:notesSz cx="6858000" cy="9144000"/>
@@ -258,6 +256,380 @@
     </a:lvl9pPr>
   </p:defaultTextStyle>
 </p:presentation>
+</file>
+
+<file path=ppt/charts/chart1.xml><?xml version="1.0" encoding="utf-8"?>
+<c:chartSpace xmlns:c="http://schemas.openxmlformats.org/drawingml/2006/chart" xmlns:a="http://schemas.openxmlformats.org/drawingml/2006/main" xmlns:r="http://schemas.openxmlformats.org/officeDocument/2006/relationships">
+  <c:date1904 val="0"/>
+  <c:chart>
+    <c:autoTitleDeleted val="1"/>
+    <c:plotArea>
+      <c:barChart>
+        <c:barDir val="col"/>
+        <c:grouping val="clustered"/>
+        <c:ser>
+          <c:idx val="0"/>
+          <c:order val="0"/>
+          <c:tx>
+            <c:strRef>
+              <c:f>Sheet1!$B$1</c:f>
+              <c:strCache>
+                <c:ptCount val="1"/>
+                <c:pt idx="0">
+                  <c:v>Время</c:v>
+                </c:pt>
+              </c:strCache>
+            </c:strRef>
+          </c:tx>
+          <c:spPr>
+            <a:solidFill>
+              <a:srgbClr val="0077FF"/>
+            </a:solidFill>
+            <a:ln>
+              <a:solidFill>
+                <a:srgbClr val="0077FF"/>
+              </a:solidFill>
+            </a:ln>
+          </c:spPr>
+          <c:cat>
+            <c:strRef>
+              <c:f>Sheet1!$A$2:$A$3</c:f>
+              <c:strCache>
+                <c:ptCount val="2"/>
+                <c:pt idx="0">
+                  <c:v>Сборка</c:v>
+                </c:pt>
+                <c:pt idx="1">
+                  <c:v>Правки</c:v>
+                </c:pt>
+              </c:strCache>
+            </c:strRef>
+          </c:cat>
+          <c:val>
+            <c:numRef>
+              <c:f>Sheet1!$B$2:$B$3</c:f>
+              <c:numCache>
+                <c:formatCode>General</c:formatCode>
+                <c:ptCount val="2"/>
+                <c:pt idx="0">
+                  <c:v>186.0</c:v>
+                </c:pt>
+                <c:pt idx="1">
+                  <c:v>74.0</c:v>
+                </c:pt>
+              </c:numCache>
+            </c:numRef>
+          </c:val>
+        </c:ser>
+        <c:gapWidth val="60"/>
+        <c:axId val="-2068027336"/>
+        <c:axId val="-2113994440"/>
+      </c:barChart>
+      <c:catAx>
+        <c:axId val="-2068027336"/>
+        <c:scaling>
+          <c:orientation val="minMax"/>
+        </c:scaling>
+        <c:delete val="0"/>
+        <c:axPos val="b"/>
+        <c:majorTickMark val="out"/>
+        <c:minorTickMark val="none"/>
+        <c:tickLblPos val="nextTo"/>
+        <c:txPr>
+          <a:bodyPr/>
+          <a:lstStyle/>
+          <a:p>
+            <a:pPr>
+              <a:defRPr sz="1100" b="0">
+                <a:solidFill>
+                  <a:srgbClr val="000000"/>
+                </a:solidFill>
+                <a:latin typeface="Arial"/>
+                <a:ea typeface="Arial"/>
+                <a:cs typeface="Arial"/>
+              </a:defRPr>
+            </a:pPr>
+          </a:p>
+        </c:txPr>
+        <c:crossAx val="-2113994440"/>
+        <c:crosses val="autoZero"/>
+        <c:auto val="1"/>
+        <c:lblAlgn val="ctr"/>
+        <c:lblOffset val="100"/>
+        <c:noMultiLvlLbl val="0"/>
+      </c:catAx>
+      <c:valAx>
+        <c:axId val="-2113994440"/>
+        <c:scaling/>
+        <c:delete val="0"/>
+        <c:axPos val="l"/>
+        <c:majorGridlines>
+          <c:spPr>
+            <a:ln w="9525">
+              <a:solidFill>
+                <a:srgbClr val="D1D1D1"/>
+              </a:solidFill>
+            </a:ln>
+          </c:spPr>
+        </c:majorGridlines>
+        <c:title>
+          <c:tx>
+            <c:rich>
+              <a:bodyPr/>
+              <a:lstStyle/>
+              <a:p>
+                <a:pPr>
+                  <a:defRPr sz="1100" b="0">
+                    <a:solidFill>
+                      <a:srgbClr val="000000"/>
+                    </a:solidFill>
+                    <a:latin typeface="Arial"/>
+                    <a:ea typeface="Arial"/>
+                    <a:cs typeface="Arial"/>
+                  </a:defRPr>
+                </a:pPr>
+                <a:r>
+                  <a:t>мин</a:t>
+                </a:r>
+              </a:p>
+            </c:rich>
+          </c:tx>
+          <c:layout/>
+          <c:overlay val="0"/>
+        </c:title>
+        <c:majorTickMark val="out"/>
+        <c:minorTickMark val="none"/>
+        <c:tickLblPos val="nextTo"/>
+        <c:txPr>
+          <a:bodyPr/>
+          <a:lstStyle/>
+          <a:p>
+            <a:pPr>
+              <a:defRPr sz="1100" b="0">
+                <a:solidFill>
+                  <a:srgbClr val="000000"/>
+                </a:solidFill>
+                <a:latin typeface="Arial"/>
+                <a:ea typeface="Arial"/>
+                <a:cs typeface="Arial"/>
+              </a:defRPr>
+            </a:pPr>
+          </a:p>
+        </c:txPr>
+        <c:crossAx val="-2068027336"/>
+        <c:crosses val="autoZero"/>
+      </c:valAx>
+    </c:plotArea>
+    <c:dispBlanksAs val="gap"/>
+  </c:chart>
+  <c:txPr>
+    <a:bodyPr/>
+    <a:lstStyle/>
+    <a:p>
+      <a:pPr>
+        <a:defRPr sz="1200" b="0">
+          <a:solidFill>
+            <a:srgbClr val="000000"/>
+          </a:solidFill>
+          <a:latin typeface="Arial"/>
+          <a:ea typeface="Arial"/>
+          <a:cs typeface="Arial"/>
+        </a:defRPr>
+      </a:pPr>
+      <a:endParaRPr lang="en-US"/>
+    </a:p>
+  </c:txPr>
+  <c:externalData r:id="rId1">
+    <c:autoUpdate val="0"/>
+  </c:externalData>
+</c:chartSpace>
+</file>
+
+<file path=ppt/charts/chart2.xml><?xml version="1.0" encoding="utf-8"?>
+<c:chartSpace xmlns:c="http://schemas.openxmlformats.org/drawingml/2006/chart" xmlns:a="http://schemas.openxmlformats.org/drawingml/2006/main" xmlns:r="http://schemas.openxmlformats.org/officeDocument/2006/relationships">
+  <c:date1904 val="0"/>
+  <c:chart>
+    <c:autoTitleDeleted val="1"/>
+    <c:plotArea>
+      <c:barChart>
+        <c:barDir val="col"/>
+        <c:grouping val="clustered"/>
+        <c:ser>
+          <c:idx val="0"/>
+          <c:order val="0"/>
+          <c:tx>
+            <c:strRef>
+              <c:f>Sheet1!$B$1</c:f>
+              <c:strCache>
+                <c:ptCount val="1"/>
+                <c:pt idx="0">
+                  <c:v>Время</c:v>
+                </c:pt>
+              </c:strCache>
+            </c:strRef>
+          </c:tx>
+          <c:spPr>
+            <a:solidFill>
+              <a:srgbClr val="0077FF"/>
+            </a:solidFill>
+            <a:ln>
+              <a:solidFill>
+                <a:srgbClr val="0077FF"/>
+              </a:solidFill>
+            </a:ln>
+          </c:spPr>
+          <c:cat>
+            <c:strRef>
+              <c:f>Sheet1!$A$2:$A$3</c:f>
+              <c:strCache>
+                <c:ptCount val="2"/>
+                <c:pt idx="0">
+                  <c:v>До пилота</c:v>
+                </c:pt>
+                <c:pt idx="1">
+                  <c:v>После пилота</c:v>
+                </c:pt>
+              </c:strCache>
+            </c:strRef>
+          </c:cat>
+          <c:val>
+            <c:numRef>
+              <c:f>Sheet1!$B$2:$B$3</c:f>
+              <c:numCache>
+                <c:formatCode>General</c:formatCode>
+                <c:ptCount val="2"/>
+                <c:pt idx="0">
+                  <c:v>186.0</c:v>
+                </c:pt>
+                <c:pt idx="1">
+                  <c:v>4.0</c:v>
+                </c:pt>
+              </c:numCache>
+            </c:numRef>
+          </c:val>
+        </c:ser>
+        <c:gapWidth val="60"/>
+        <c:axId val="-2068027336"/>
+        <c:axId val="-2113994440"/>
+      </c:barChart>
+      <c:catAx>
+        <c:axId val="-2068027336"/>
+        <c:scaling>
+          <c:orientation val="minMax"/>
+        </c:scaling>
+        <c:delete val="0"/>
+        <c:axPos val="b"/>
+        <c:majorTickMark val="out"/>
+        <c:minorTickMark val="none"/>
+        <c:tickLblPos val="nextTo"/>
+        <c:txPr>
+          <a:bodyPr/>
+          <a:lstStyle/>
+          <a:p>
+            <a:pPr>
+              <a:defRPr sz="1100" b="0">
+                <a:solidFill>
+                  <a:srgbClr val="000000"/>
+                </a:solidFill>
+                <a:latin typeface="Arial"/>
+                <a:ea typeface="Arial"/>
+                <a:cs typeface="Arial"/>
+              </a:defRPr>
+            </a:pPr>
+          </a:p>
+        </c:txPr>
+        <c:crossAx val="-2113994440"/>
+        <c:crosses val="autoZero"/>
+        <c:auto val="1"/>
+        <c:lblAlgn val="ctr"/>
+        <c:lblOffset val="100"/>
+        <c:noMultiLvlLbl val="0"/>
+      </c:catAx>
+      <c:valAx>
+        <c:axId val="-2113994440"/>
+        <c:scaling/>
+        <c:delete val="0"/>
+        <c:axPos val="l"/>
+        <c:majorGridlines>
+          <c:spPr>
+            <a:ln w="9525">
+              <a:solidFill>
+                <a:srgbClr val="D1D1D1"/>
+              </a:solidFill>
+            </a:ln>
+          </c:spPr>
+        </c:majorGridlines>
+        <c:title>
+          <c:tx>
+            <c:rich>
+              <a:bodyPr/>
+              <a:lstStyle/>
+              <a:p>
+                <a:pPr>
+                  <a:defRPr sz="1100" b="0">
+                    <a:solidFill>
+                      <a:srgbClr val="000000"/>
+                    </a:solidFill>
+                    <a:latin typeface="Arial"/>
+                    <a:ea typeface="Arial"/>
+                    <a:cs typeface="Arial"/>
+                  </a:defRPr>
+                </a:pPr>
+                <a:r>
+                  <a:t>мин</a:t>
+                </a:r>
+              </a:p>
+            </c:rich>
+          </c:tx>
+          <c:layout/>
+          <c:overlay val="0"/>
+        </c:title>
+        <c:majorTickMark val="out"/>
+        <c:minorTickMark val="none"/>
+        <c:tickLblPos val="nextTo"/>
+        <c:txPr>
+          <a:bodyPr/>
+          <a:lstStyle/>
+          <a:p>
+            <a:pPr>
+              <a:defRPr sz="1100" b="0">
+                <a:solidFill>
+                  <a:srgbClr val="000000"/>
+                </a:solidFill>
+                <a:latin typeface="Arial"/>
+                <a:ea typeface="Arial"/>
+                <a:cs typeface="Arial"/>
+              </a:defRPr>
+            </a:pPr>
+          </a:p>
+        </c:txPr>
+        <c:crossAx val="-2068027336"/>
+        <c:crosses val="autoZero"/>
+      </c:valAx>
+    </c:plotArea>
+    <c:dispBlanksAs val="gap"/>
+  </c:chart>
+  <c:txPr>
+    <a:bodyPr/>
+    <a:lstStyle/>
+    <a:p>
+      <a:pPr>
+        <a:defRPr sz="1200" b="0">
+          <a:solidFill>
+            <a:srgbClr val="000000"/>
+          </a:solidFill>
+          <a:latin typeface="Arial"/>
+          <a:ea typeface="Arial"/>
+          <a:cs typeface="Arial"/>
+        </a:defRPr>
+      </a:pPr>
+      <a:endParaRPr lang="en-US"/>
+    </a:p>
+  </c:txPr>
+  <c:externalData r:id="rId1">
+    <c:autoUpdate val="0"/>
+  </c:externalData>
+</c:chartSpace>
 </file>
 
 <file path=ppt/notesMasters/notesMaster1.xml><?xml version="1.0" encoding="utf-8"?>
@@ -1888,1420 +2260,6 @@
     <a:masterClrMapping/>
   </p:clrMapOvr>
 </p:notes>
-</file>
-
-<file path=ppt/notesSlides/notesSlide63.xml><?xml version="1.0" encoding="utf-8"?>
-<p:notes xmlns:a="http://schemas.openxmlformats.org/drawingml/2006/main" xmlns:p="http://schemas.openxmlformats.org/presentationml/2006/main" xmlns:r="http://schemas.openxmlformats.org/officeDocument/2006/relationships">
-  <p:cSld>
-    <p:spTree>
-      <p:nvGrpSpPr>
-        <p:cNvPr id="1" name=""/>
-        <p:cNvGrpSpPr/>
-        <p:nvPr/>
-      </p:nvGrpSpPr>
-      <p:grpSpPr>
-        <a:xfrm>
-          <a:off x="0" y="0"/>
-          <a:ext cx="0" cy="0"/>
-          <a:chOff x="0" y="0"/>
-          <a:chExt cx="0" cy="0"/>
-        </a:xfrm>
-      </p:grpSpPr>
-      <p:sp>
-        <p:nvSpPr>
-          <p:cNvPr id="2" name="Slide Image Placeholder 1"/>
-          <p:cNvSpPr>
-            <a:spLocks noGrp="1"/>
-          </p:cNvSpPr>
-          <p:nvPr>
-            <p:ph type="sldImg" idx="3"/>
-          </p:nvPr>
-        </p:nvSpPr>
-        <p:spPr/>
-      </p:sp>
-      <p:sp>
-        <p:nvSpPr>
-          <p:cNvPr id="3" name="Notes Placeholder 2"/>
-          <p:cNvSpPr>
-            <a:spLocks noGrp="1"/>
-          </p:cNvSpPr>
-          <p:nvPr>
-            <p:ph type="body" idx="1"/>
-          </p:nvPr>
-        </p:nvSpPr>
-        <p:spPr/>
-        <p:txBody>
-          <a:bodyPr/>
-          <a:lstStyle/>
-          <a:p/>
-        </p:txBody>
-      </p:sp>
-      <p:sp>
-        <p:nvSpPr>
-          <p:cNvPr id="4" name="Slide Number Placeholder 3"/>
-          <p:cNvSpPr>
-            <a:spLocks noGrp="1"/>
-          </p:cNvSpPr>
-          <p:nvPr>
-            <p:ph type="sldNum" idx="12"/>
-          </p:nvPr>
-        </p:nvSpPr>
-        <p:spPr/>
-      </p:sp>
-    </p:spTree>
-  </p:cSld>
-  <p:clrMapOvr>
-    <a:masterClrMapping/>
-  </p:clrMapOvr>
-</p:notes>
-</file>
-
-<file path=ppt/notesSlides/notesSlide64.xml><?xml version="1.0" encoding="utf-8"?>
-<p:notes xmlns:a="http://schemas.openxmlformats.org/drawingml/2006/main" xmlns:p="http://schemas.openxmlformats.org/presentationml/2006/main" xmlns:r="http://schemas.openxmlformats.org/officeDocument/2006/relationships">
-  <p:cSld>
-    <p:spTree>
-      <p:nvGrpSpPr>
-        <p:cNvPr id="1" name=""/>
-        <p:cNvGrpSpPr/>
-        <p:nvPr/>
-      </p:nvGrpSpPr>
-      <p:grpSpPr>
-        <a:xfrm>
-          <a:off x="0" y="0"/>
-          <a:ext cx="0" cy="0"/>
-          <a:chOff x="0" y="0"/>
-          <a:chExt cx="0" cy="0"/>
-        </a:xfrm>
-      </p:grpSpPr>
-      <p:sp>
-        <p:nvSpPr>
-          <p:cNvPr id="2" name="Slide Image Placeholder 1"/>
-          <p:cNvSpPr>
-            <a:spLocks noGrp="1"/>
-          </p:cNvSpPr>
-          <p:nvPr>
-            <p:ph type="sldImg" idx="3"/>
-          </p:nvPr>
-        </p:nvSpPr>
-        <p:spPr/>
-      </p:sp>
-      <p:sp>
-        <p:nvSpPr>
-          <p:cNvPr id="3" name="Notes Placeholder 2"/>
-          <p:cNvSpPr>
-            <a:spLocks noGrp="1"/>
-          </p:cNvSpPr>
-          <p:nvPr>
-            <p:ph type="body" idx="1"/>
-          </p:nvPr>
-        </p:nvSpPr>
-        <p:spPr/>
-        <p:txBody>
-          <a:bodyPr/>
-          <a:lstStyle/>
-          <a:p/>
-        </p:txBody>
-      </p:sp>
-      <p:sp>
-        <p:nvSpPr>
-          <p:cNvPr id="4" name="Slide Number Placeholder 3"/>
-          <p:cNvSpPr>
-            <a:spLocks noGrp="1"/>
-          </p:cNvSpPr>
-          <p:nvPr>
-            <p:ph type="sldNum" idx="12"/>
-          </p:nvPr>
-        </p:nvSpPr>
-        <p:spPr/>
-      </p:sp>
-    </p:spTree>
-  </p:cSld>
-  <p:clrMapOvr>
-    <a:masterClrMapping/>
-  </p:clrMapOvr>
-</p:notes>
-</file>
-
-<file path=ppt/slideLayouts/slideLayout10.xml><?xml version="1.0" encoding="utf-8"?>
-<p:sldLayout xmlns:a="http://schemas.openxmlformats.org/drawingml/2006/main" xmlns:r="http://schemas.openxmlformats.org/officeDocument/2006/relationships" xmlns:mc="http://schemas.openxmlformats.org/markup-compatibility/2006" xmlns:mv="urn:schemas-microsoft-com:mac:vml" xmlns:p="http://schemas.openxmlformats.org/presentationml/2006/main" xmlns:c="http://schemas.openxmlformats.org/drawingml/2006/chart" xmlns:dgm="http://schemas.openxmlformats.org/drawingml/2006/diagram" xmlns:o="urn:schemas-microsoft-com:office:office" xmlns:v="urn:schemas-microsoft-com:vml" xmlns:pvml="urn:schemas-microsoft-com:office:powerpoint" xmlns:com="http://schemas.openxmlformats.org/drawingml/2006/compatibility" xmlns:p14="http://schemas.microsoft.com/office/powerpoint/2010/main" xmlns:p15="http://schemas.microsoft.com/office/powerpoint/2012/main" xmlns:ahyp="http://schemas.microsoft.com/office/drawing/2018/hyperlinkcolor" matchingName="2 фактоида + текст">
-  <p:cSld name="2 фактоида + текст">
-    <p:spTree>
-      <p:nvGrpSpPr>
-        <p:cNvPr id="93" name="Shape 93"/>
-        <p:cNvGrpSpPr/>
-        <p:nvPr/>
-      </p:nvGrpSpPr>
-      <p:grpSpPr>
-        <a:xfrm>
-          <a:off x="0" y="0"/>
-          <a:ext cx="0" cy="0"/>
-          <a:chOff x="0" y="0"/>
-          <a:chExt cx="0" cy="0"/>
-        </a:xfrm>
-      </p:grpSpPr>
-      <p:sp>
-        <p:nvSpPr>
-          <p:cNvPr id="94" name="Google Shape;94;p11"/>
-          <p:cNvSpPr txBox="1"/>
-          <p:nvPr>
-            <p:ph idx="1" type="body"/>
-          </p:nvPr>
-        </p:nvSpPr>
-        <p:spPr>
-          <a:xfrm>
-            <a:off x="671514" y="1773238"/>
-            <a:ext cx="5135728" cy="4427537"/>
-          </a:xfrm>
-          <a:prstGeom prst="rect">
-            <a:avLst/>
-          </a:prstGeom>
-          <a:noFill/>
-          <a:ln>
-            <a:noFill/>
-          </a:ln>
-        </p:spPr>
-        <p:txBody>
-          <a:bodyPr anchorCtr="0" anchor="t" bIns="0" lIns="0" spcFirstLastPara="1" rIns="0" wrap="square" tIns="0">
-            <a:normAutofit/>
-          </a:bodyPr>
-          <a:lstStyle>
-            <a:lvl1pPr indent="-228600" lvl="0" marL="457200" algn="l">
-              <a:lnSpc>
-                <a:spcPct val="110000"/>
-              </a:lnSpc>
-              <a:spcBef>
-                <a:spcPts val="1000"/>
-              </a:spcBef>
-              <a:spcAft>
-                <a:spcPts val="0"/>
-              </a:spcAft>
-              <a:buClr>
-                <a:schemeClr val="dk1"/>
-              </a:buClr>
-              <a:buSzPts val="1800"/>
-              <a:buNone/>
-              <a:defRPr/>
-            </a:lvl1pPr>
-            <a:lvl2pPr indent="-342900" lvl="1" marL="914400" algn="l">
-              <a:lnSpc>
-                <a:spcPct val="110000"/>
-              </a:lnSpc>
-              <a:spcBef>
-                <a:spcPts val="500"/>
-              </a:spcBef>
-              <a:spcAft>
-                <a:spcPts val="0"/>
-              </a:spcAft>
-              <a:buSzPts val="1800"/>
-              <a:buChar char="•"/>
-              <a:defRPr/>
-            </a:lvl2pPr>
-            <a:lvl3pPr indent="-342900" lvl="2" marL="1371600" algn="l">
-              <a:lnSpc>
-                <a:spcPct val="110000"/>
-              </a:lnSpc>
-              <a:spcBef>
-                <a:spcPts val="500"/>
-              </a:spcBef>
-              <a:spcAft>
-                <a:spcPts val="0"/>
-              </a:spcAft>
-              <a:buClr>
-                <a:schemeClr val="dk1"/>
-              </a:buClr>
-              <a:buSzPts val="1800"/>
-              <a:buChar char="−"/>
-              <a:defRPr/>
-            </a:lvl3pPr>
-            <a:lvl4pPr indent="-342900" lvl="3" marL="1828800" algn="l">
-              <a:lnSpc>
-                <a:spcPct val="90000"/>
-              </a:lnSpc>
-              <a:spcBef>
-                <a:spcPts val="500"/>
-              </a:spcBef>
-              <a:spcAft>
-                <a:spcPts val="0"/>
-              </a:spcAft>
-              <a:buClr>
-                <a:schemeClr val="dk1"/>
-              </a:buClr>
-              <a:buSzPts val="1800"/>
-              <a:buChar char="•"/>
-              <a:defRPr/>
-            </a:lvl4pPr>
-            <a:lvl5pPr indent="-342900" lvl="4" marL="2286000" algn="l">
-              <a:lnSpc>
-                <a:spcPct val="90000"/>
-              </a:lnSpc>
-              <a:spcBef>
-                <a:spcPts val="500"/>
-              </a:spcBef>
-              <a:spcAft>
-                <a:spcPts val="0"/>
-              </a:spcAft>
-              <a:buClr>
-                <a:schemeClr val="dk1"/>
-              </a:buClr>
-              <a:buSzPts val="1800"/>
-              <a:buChar char="•"/>
-              <a:defRPr/>
-            </a:lvl5pPr>
-            <a:lvl6pPr indent="-342900" lvl="5" marL="2743200" algn="l">
-              <a:lnSpc>
-                <a:spcPct val="90000"/>
-              </a:lnSpc>
-              <a:spcBef>
-                <a:spcPts val="500"/>
-              </a:spcBef>
-              <a:spcAft>
-                <a:spcPts val="0"/>
-              </a:spcAft>
-              <a:buClr>
-                <a:schemeClr val="dk1"/>
-              </a:buClr>
-              <a:buSzPts val="1800"/>
-              <a:buChar char="•"/>
-              <a:defRPr/>
-            </a:lvl6pPr>
-            <a:lvl7pPr indent="-342900" lvl="6" marL="3200400" algn="l">
-              <a:lnSpc>
-                <a:spcPct val="90000"/>
-              </a:lnSpc>
-              <a:spcBef>
-                <a:spcPts val="500"/>
-              </a:spcBef>
-              <a:spcAft>
-                <a:spcPts val="0"/>
-              </a:spcAft>
-              <a:buClr>
-                <a:schemeClr val="dk1"/>
-              </a:buClr>
-              <a:buSzPts val="1800"/>
-              <a:buChar char="•"/>
-              <a:defRPr/>
-            </a:lvl7pPr>
-            <a:lvl8pPr indent="-342900" lvl="7" marL="3657600" algn="l">
-              <a:lnSpc>
-                <a:spcPct val="90000"/>
-              </a:lnSpc>
-              <a:spcBef>
-                <a:spcPts val="500"/>
-              </a:spcBef>
-              <a:spcAft>
-                <a:spcPts val="0"/>
-              </a:spcAft>
-              <a:buClr>
-                <a:schemeClr val="dk1"/>
-              </a:buClr>
-              <a:buSzPts val="1800"/>
-              <a:buChar char="•"/>
-              <a:defRPr/>
-            </a:lvl8pPr>
-            <a:lvl9pPr indent="-342900" lvl="8" marL="4114800" algn="l">
-              <a:lnSpc>
-                <a:spcPct val="90000"/>
-              </a:lnSpc>
-              <a:spcBef>
-                <a:spcPts val="500"/>
-              </a:spcBef>
-              <a:spcAft>
-                <a:spcPts val="0"/>
-              </a:spcAft>
-              <a:buClr>
-                <a:schemeClr val="dk1"/>
-              </a:buClr>
-              <a:buSzPts val="1800"/>
-              <a:buChar char="•"/>
-              <a:defRPr/>
-            </a:lvl9pPr>
-          </a:lstStyle>
-          <a:p/>
-        </p:txBody>
-      </p:sp>
-      <p:sp>
-        <p:nvSpPr>
-          <p:cNvPr id="95" name="Google Shape;95;p11"/>
-          <p:cNvSpPr txBox="1"/>
-          <p:nvPr>
-            <p:ph type="title"/>
-          </p:nvPr>
-        </p:nvSpPr>
-        <p:spPr>
-          <a:xfrm>
-            <a:off x="677334" y="692150"/>
-            <a:ext cx="10855854" cy="644241"/>
-          </a:xfrm>
-          <a:prstGeom prst="rect">
-            <a:avLst/>
-          </a:prstGeom>
-          <a:noFill/>
-          <a:ln>
-            <a:noFill/>
-          </a:ln>
-        </p:spPr>
-        <p:txBody>
-          <a:bodyPr anchorCtr="0" anchor="t" bIns="0" lIns="0" spcFirstLastPara="1" rIns="0" wrap="square" tIns="0">
-            <a:noAutofit/>
-          </a:bodyPr>
-          <a:lstStyle>
-            <a:lvl1pPr lvl="0" algn="l">
-              <a:lnSpc>
-                <a:spcPct val="90000"/>
-              </a:lnSpc>
-              <a:spcBef>
-                <a:spcPts val="0"/>
-              </a:spcBef>
-              <a:spcAft>
-                <a:spcPts val="0"/>
-              </a:spcAft>
-              <a:buClr>
-                <a:schemeClr val="accent1"/>
-              </a:buClr>
-              <a:buSzPts val="3600"/>
-              <a:buFont typeface="Play"/>
-              <a:buNone/>
-              <a:defRPr>
-                <a:solidFill>
-                  <a:schemeClr val="accent1"/>
-                </a:solidFill>
-              </a:defRPr>
-            </a:lvl1pPr>
-            <a:lvl2pPr lvl="1">
-              <a:spcBef>
-                <a:spcPts val="0"/>
-              </a:spcBef>
-              <a:spcAft>
-                <a:spcPts val="0"/>
-              </a:spcAft>
-              <a:buSzPts val="1400"/>
-              <a:buNone/>
-              <a:defRPr/>
-            </a:lvl2pPr>
-            <a:lvl3pPr lvl="2">
-              <a:spcBef>
-                <a:spcPts val="0"/>
-              </a:spcBef>
-              <a:spcAft>
-                <a:spcPts val="0"/>
-              </a:spcAft>
-              <a:buSzPts val="1400"/>
-              <a:buNone/>
-              <a:defRPr/>
-            </a:lvl3pPr>
-            <a:lvl4pPr lvl="3">
-              <a:spcBef>
-                <a:spcPts val="0"/>
-              </a:spcBef>
-              <a:spcAft>
-                <a:spcPts val="0"/>
-              </a:spcAft>
-              <a:buSzPts val="1400"/>
-              <a:buNone/>
-              <a:defRPr/>
-            </a:lvl4pPr>
-            <a:lvl5pPr lvl="4">
-              <a:spcBef>
-                <a:spcPts val="0"/>
-              </a:spcBef>
-              <a:spcAft>
-                <a:spcPts val="0"/>
-              </a:spcAft>
-              <a:buSzPts val="1400"/>
-              <a:buNone/>
-              <a:defRPr/>
-            </a:lvl5pPr>
-            <a:lvl6pPr lvl="5">
-              <a:spcBef>
-                <a:spcPts val="0"/>
-              </a:spcBef>
-              <a:spcAft>
-                <a:spcPts val="0"/>
-              </a:spcAft>
-              <a:buSzPts val="1400"/>
-              <a:buNone/>
-              <a:defRPr/>
-            </a:lvl6pPr>
-            <a:lvl7pPr lvl="6">
-              <a:spcBef>
-                <a:spcPts val="0"/>
-              </a:spcBef>
-              <a:spcAft>
-                <a:spcPts val="0"/>
-              </a:spcAft>
-              <a:buSzPts val="1400"/>
-              <a:buNone/>
-              <a:defRPr/>
-            </a:lvl7pPr>
-            <a:lvl8pPr lvl="7">
-              <a:spcBef>
-                <a:spcPts val="0"/>
-              </a:spcBef>
-              <a:spcAft>
-                <a:spcPts val="0"/>
-              </a:spcAft>
-              <a:buSzPts val="1400"/>
-              <a:buNone/>
-              <a:defRPr/>
-            </a:lvl8pPr>
-            <a:lvl9pPr lvl="8">
-              <a:spcBef>
-                <a:spcPts val="0"/>
-              </a:spcBef>
-              <a:spcAft>
-                <a:spcPts val="0"/>
-              </a:spcAft>
-              <a:buSzPts val="1400"/>
-              <a:buNone/>
-              <a:defRPr/>
-            </a:lvl9pPr>
-          </a:lstStyle>
-          <a:p/>
-        </p:txBody>
-      </p:sp>
-      <p:sp>
-        <p:nvSpPr>
-          <p:cNvPr id="96" name="Google Shape;96;p11"/>
-          <p:cNvSpPr txBox="1"/>
-          <p:nvPr>
-            <p:ph idx="11" type="ftr"/>
-          </p:nvPr>
-        </p:nvSpPr>
-        <p:spPr>
-          <a:xfrm>
-            <a:off x="671513" y="167981"/>
-            <a:ext cx="10874375" cy="241437"/>
-          </a:xfrm>
-          <a:prstGeom prst="rect">
-            <a:avLst/>
-          </a:prstGeom>
-          <a:noFill/>
-          <a:ln>
-            <a:noFill/>
-          </a:ln>
-        </p:spPr>
-        <p:txBody>
-          <a:bodyPr anchorCtr="0" anchor="t" bIns="45700" lIns="0" spcFirstLastPara="1" rIns="91425" wrap="square" tIns="45700">
-            <a:noAutofit/>
-          </a:bodyPr>
-          <a:lstStyle>
-            <a:lvl1pPr lvl="0" marR="0" rtl="0" algn="l">
-              <a:spcBef>
-                <a:spcPts val="0"/>
-              </a:spcBef>
-              <a:spcAft>
-                <a:spcPts val="0"/>
-              </a:spcAft>
-              <a:buSzPts val="1400"/>
-              <a:buNone/>
-              <a:defRPr b="0" i="0" sz="1800" u="none" cap="none" strike="noStrike">
-                <a:solidFill>
-                  <a:schemeClr val="dk1"/>
-                </a:solidFill>
-                <a:latin typeface="Arial"/>
-                <a:ea typeface="Arial"/>
-                <a:cs typeface="Arial"/>
-                <a:sym typeface="Arial"/>
-              </a:defRPr>
-            </a:lvl1pPr>
-            <a:lvl2pPr lvl="1" marR="0" rtl="0" algn="l">
-              <a:spcBef>
-                <a:spcPts val="0"/>
-              </a:spcBef>
-              <a:spcAft>
-                <a:spcPts val="0"/>
-              </a:spcAft>
-              <a:buSzPts val="1400"/>
-              <a:buNone/>
-              <a:defRPr b="0" i="0" sz="1800" u="none" cap="none" strike="noStrike">
-                <a:solidFill>
-                  <a:schemeClr val="dk1"/>
-                </a:solidFill>
-                <a:latin typeface="Arial"/>
-                <a:ea typeface="Arial"/>
-                <a:cs typeface="Arial"/>
-                <a:sym typeface="Arial"/>
-              </a:defRPr>
-            </a:lvl2pPr>
-            <a:lvl3pPr lvl="2" marR="0" rtl="0" algn="l">
-              <a:spcBef>
-                <a:spcPts val="0"/>
-              </a:spcBef>
-              <a:spcAft>
-                <a:spcPts val="0"/>
-              </a:spcAft>
-              <a:buSzPts val="1400"/>
-              <a:buNone/>
-              <a:defRPr b="0" i="0" sz="1800" u="none" cap="none" strike="noStrike">
-                <a:solidFill>
-                  <a:schemeClr val="dk1"/>
-                </a:solidFill>
-                <a:latin typeface="Arial"/>
-                <a:ea typeface="Arial"/>
-                <a:cs typeface="Arial"/>
-                <a:sym typeface="Arial"/>
-              </a:defRPr>
-            </a:lvl3pPr>
-            <a:lvl4pPr lvl="3" marR="0" rtl="0" algn="l">
-              <a:spcBef>
-                <a:spcPts val="0"/>
-              </a:spcBef>
-              <a:spcAft>
-                <a:spcPts val="0"/>
-              </a:spcAft>
-              <a:buSzPts val="1400"/>
-              <a:buNone/>
-              <a:defRPr b="0" i="0" sz="1800" u="none" cap="none" strike="noStrike">
-                <a:solidFill>
-                  <a:schemeClr val="dk1"/>
-                </a:solidFill>
-                <a:latin typeface="Arial"/>
-                <a:ea typeface="Arial"/>
-                <a:cs typeface="Arial"/>
-                <a:sym typeface="Arial"/>
-              </a:defRPr>
-            </a:lvl4pPr>
-            <a:lvl5pPr lvl="4" marR="0" rtl="0" algn="l">
-              <a:spcBef>
-                <a:spcPts val="0"/>
-              </a:spcBef>
-              <a:spcAft>
-                <a:spcPts val="0"/>
-              </a:spcAft>
-              <a:buSzPts val="1400"/>
-              <a:buNone/>
-              <a:defRPr b="0" i="0" sz="1800" u="none" cap="none" strike="noStrike">
-                <a:solidFill>
-                  <a:schemeClr val="dk1"/>
-                </a:solidFill>
-                <a:latin typeface="Arial"/>
-                <a:ea typeface="Arial"/>
-                <a:cs typeface="Arial"/>
-                <a:sym typeface="Arial"/>
-              </a:defRPr>
-            </a:lvl5pPr>
-            <a:lvl6pPr lvl="5" marR="0" rtl="0" algn="l">
-              <a:spcBef>
-                <a:spcPts val="0"/>
-              </a:spcBef>
-              <a:spcAft>
-                <a:spcPts val="0"/>
-              </a:spcAft>
-              <a:buSzPts val="1400"/>
-              <a:buNone/>
-              <a:defRPr b="0" i="0" sz="1800" u="none" cap="none" strike="noStrike">
-                <a:solidFill>
-                  <a:schemeClr val="dk1"/>
-                </a:solidFill>
-                <a:latin typeface="Arial"/>
-                <a:ea typeface="Arial"/>
-                <a:cs typeface="Arial"/>
-                <a:sym typeface="Arial"/>
-              </a:defRPr>
-            </a:lvl6pPr>
-            <a:lvl7pPr lvl="6" marR="0" rtl="0" algn="l">
-              <a:spcBef>
-                <a:spcPts val="0"/>
-              </a:spcBef>
-              <a:spcAft>
-                <a:spcPts val="0"/>
-              </a:spcAft>
-              <a:buSzPts val="1400"/>
-              <a:buNone/>
-              <a:defRPr b="0" i="0" sz="1800" u="none" cap="none" strike="noStrike">
-                <a:solidFill>
-                  <a:schemeClr val="dk1"/>
-                </a:solidFill>
-                <a:latin typeface="Arial"/>
-                <a:ea typeface="Arial"/>
-                <a:cs typeface="Arial"/>
-                <a:sym typeface="Arial"/>
-              </a:defRPr>
-            </a:lvl7pPr>
-            <a:lvl8pPr lvl="7" marR="0" rtl="0" algn="l">
-              <a:spcBef>
-                <a:spcPts val="0"/>
-              </a:spcBef>
-              <a:spcAft>
-                <a:spcPts val="0"/>
-              </a:spcAft>
-              <a:buSzPts val="1400"/>
-              <a:buNone/>
-              <a:defRPr b="0" i="0" sz="1800" u="none" cap="none" strike="noStrike">
-                <a:solidFill>
-                  <a:schemeClr val="dk1"/>
-                </a:solidFill>
-                <a:latin typeface="Arial"/>
-                <a:ea typeface="Arial"/>
-                <a:cs typeface="Arial"/>
-                <a:sym typeface="Arial"/>
-              </a:defRPr>
-            </a:lvl8pPr>
-            <a:lvl9pPr lvl="8" marR="0" rtl="0" algn="l">
-              <a:spcBef>
-                <a:spcPts val="0"/>
-              </a:spcBef>
-              <a:spcAft>
-                <a:spcPts val="0"/>
-              </a:spcAft>
-              <a:buSzPts val="1400"/>
-              <a:buNone/>
-              <a:defRPr b="0" i="0" sz="1800" u="none" cap="none" strike="noStrike">
-                <a:solidFill>
-                  <a:schemeClr val="dk1"/>
-                </a:solidFill>
-                <a:latin typeface="Arial"/>
-                <a:ea typeface="Arial"/>
-                <a:cs typeface="Arial"/>
-                <a:sym typeface="Arial"/>
-              </a:defRPr>
-            </a:lvl9pPr>
-          </a:lstStyle>
-          <a:p/>
-        </p:txBody>
-      </p:sp>
-      <p:sp>
-        <p:nvSpPr>
-          <p:cNvPr id="97" name="Google Shape;97;p11"/>
-          <p:cNvSpPr txBox="1"/>
-          <p:nvPr>
-            <p:ph idx="2" type="body"/>
-          </p:nvPr>
-        </p:nvSpPr>
-        <p:spPr>
-          <a:xfrm>
-            <a:off x="6097339" y="3864033"/>
-            <a:ext cx="5417327" cy="1080000"/>
-          </a:xfrm>
-          <a:prstGeom prst="rect">
-            <a:avLst/>
-          </a:prstGeom>
-          <a:noFill/>
-          <a:ln>
-            <a:noFill/>
-          </a:ln>
-        </p:spPr>
-        <p:txBody>
-          <a:bodyPr anchorCtr="0" anchor="b" bIns="0" lIns="0" spcFirstLastPara="1" rIns="0" wrap="square" tIns="0">
-            <a:noAutofit/>
-          </a:bodyPr>
-          <a:lstStyle>
-            <a:lvl1pPr indent="-228600" lvl="0" marL="457200" algn="l">
-              <a:lnSpc>
-                <a:spcPct val="100000"/>
-              </a:lnSpc>
-              <a:spcBef>
-                <a:spcPts val="1000"/>
-              </a:spcBef>
-              <a:spcAft>
-                <a:spcPts val="0"/>
-              </a:spcAft>
-              <a:buClr>
-                <a:schemeClr val="dk1"/>
-              </a:buClr>
-              <a:buSzPts val="8800"/>
-              <a:buNone/>
-              <a:defRPr b="1" i="0" sz="8800">
-                <a:solidFill>
-                  <a:schemeClr val="dk1"/>
-                </a:solidFill>
-                <a:latin typeface="Play"/>
-                <a:ea typeface="Play"/>
-                <a:cs typeface="Play"/>
-                <a:sym typeface="Play"/>
-              </a:defRPr>
-            </a:lvl1pPr>
-            <a:lvl2pPr indent="-342900" lvl="1" marL="914400" algn="l">
-              <a:lnSpc>
-                <a:spcPct val="110000"/>
-              </a:lnSpc>
-              <a:spcBef>
-                <a:spcPts val="500"/>
-              </a:spcBef>
-              <a:spcAft>
-                <a:spcPts val="0"/>
-              </a:spcAft>
-              <a:buSzPts val="1800"/>
-              <a:buChar char="•"/>
-              <a:defRPr/>
-            </a:lvl2pPr>
-            <a:lvl3pPr indent="-342900" lvl="2" marL="1371600" algn="l">
-              <a:lnSpc>
-                <a:spcPct val="110000"/>
-              </a:lnSpc>
-              <a:spcBef>
-                <a:spcPts val="500"/>
-              </a:spcBef>
-              <a:spcAft>
-                <a:spcPts val="0"/>
-              </a:spcAft>
-              <a:buClr>
-                <a:schemeClr val="dk1"/>
-              </a:buClr>
-              <a:buSzPts val="1800"/>
-              <a:buChar char="−"/>
-              <a:defRPr/>
-            </a:lvl3pPr>
-            <a:lvl4pPr indent="-342900" lvl="3" marL="1828800" algn="l">
-              <a:lnSpc>
-                <a:spcPct val="90000"/>
-              </a:lnSpc>
-              <a:spcBef>
-                <a:spcPts val="500"/>
-              </a:spcBef>
-              <a:spcAft>
-                <a:spcPts val="0"/>
-              </a:spcAft>
-              <a:buClr>
-                <a:schemeClr val="dk1"/>
-              </a:buClr>
-              <a:buSzPts val="1800"/>
-              <a:buChar char="•"/>
-              <a:defRPr/>
-            </a:lvl4pPr>
-            <a:lvl5pPr indent="-342900" lvl="4" marL="2286000" algn="l">
-              <a:lnSpc>
-                <a:spcPct val="90000"/>
-              </a:lnSpc>
-              <a:spcBef>
-                <a:spcPts val="500"/>
-              </a:spcBef>
-              <a:spcAft>
-                <a:spcPts val="0"/>
-              </a:spcAft>
-              <a:buClr>
-                <a:schemeClr val="dk1"/>
-              </a:buClr>
-              <a:buSzPts val="1800"/>
-              <a:buChar char="•"/>
-              <a:defRPr/>
-            </a:lvl5pPr>
-            <a:lvl6pPr indent="-342900" lvl="5" marL="2743200" algn="l">
-              <a:lnSpc>
-                <a:spcPct val="90000"/>
-              </a:lnSpc>
-              <a:spcBef>
-                <a:spcPts val="500"/>
-              </a:spcBef>
-              <a:spcAft>
-                <a:spcPts val="0"/>
-              </a:spcAft>
-              <a:buClr>
-                <a:schemeClr val="dk1"/>
-              </a:buClr>
-              <a:buSzPts val="1800"/>
-              <a:buChar char="•"/>
-              <a:defRPr/>
-            </a:lvl6pPr>
-            <a:lvl7pPr indent="-342900" lvl="6" marL="3200400" algn="l">
-              <a:lnSpc>
-                <a:spcPct val="90000"/>
-              </a:lnSpc>
-              <a:spcBef>
-                <a:spcPts val="500"/>
-              </a:spcBef>
-              <a:spcAft>
-                <a:spcPts val="0"/>
-              </a:spcAft>
-              <a:buClr>
-                <a:schemeClr val="dk1"/>
-              </a:buClr>
-              <a:buSzPts val="1800"/>
-              <a:buChar char="•"/>
-              <a:defRPr/>
-            </a:lvl7pPr>
-            <a:lvl8pPr indent="-342900" lvl="7" marL="3657600" algn="l">
-              <a:lnSpc>
-                <a:spcPct val="90000"/>
-              </a:lnSpc>
-              <a:spcBef>
-                <a:spcPts val="500"/>
-              </a:spcBef>
-              <a:spcAft>
-                <a:spcPts val="0"/>
-              </a:spcAft>
-              <a:buClr>
-                <a:schemeClr val="dk1"/>
-              </a:buClr>
-              <a:buSzPts val="1800"/>
-              <a:buChar char="•"/>
-              <a:defRPr/>
-            </a:lvl8pPr>
-            <a:lvl9pPr indent="-342900" lvl="8" marL="4114800" algn="l">
-              <a:lnSpc>
-                <a:spcPct val="90000"/>
-              </a:lnSpc>
-              <a:spcBef>
-                <a:spcPts val="500"/>
-              </a:spcBef>
-              <a:spcAft>
-                <a:spcPts val="0"/>
-              </a:spcAft>
-              <a:buClr>
-                <a:schemeClr val="dk1"/>
-              </a:buClr>
-              <a:buSzPts val="1800"/>
-              <a:buChar char="•"/>
-              <a:defRPr/>
-            </a:lvl9pPr>
-          </a:lstStyle>
-          <a:p/>
-        </p:txBody>
-      </p:sp>
-      <p:sp>
-        <p:nvSpPr>
-          <p:cNvPr id="98" name="Google Shape;98;p11"/>
-          <p:cNvSpPr txBox="1"/>
-          <p:nvPr>
-            <p:ph idx="3" type="body"/>
-          </p:nvPr>
-        </p:nvSpPr>
-        <p:spPr>
-          <a:xfrm>
-            <a:off x="6097338" y="5058095"/>
-            <a:ext cx="5417327" cy="356617"/>
-          </a:xfrm>
-          <a:prstGeom prst="rect">
-            <a:avLst/>
-          </a:prstGeom>
-          <a:noFill/>
-          <a:ln>
-            <a:noFill/>
-          </a:ln>
-        </p:spPr>
-        <p:txBody>
-          <a:bodyPr anchorCtr="0" anchor="t" bIns="0" lIns="0" spcFirstLastPara="1" rIns="0" wrap="square" tIns="0">
-            <a:normAutofit/>
-          </a:bodyPr>
-          <a:lstStyle>
-            <a:lvl1pPr indent="-228600" lvl="0" marL="457200" algn="l">
-              <a:lnSpc>
-                <a:spcPct val="110000"/>
-              </a:lnSpc>
-              <a:spcBef>
-                <a:spcPts val="1000"/>
-              </a:spcBef>
-              <a:spcAft>
-                <a:spcPts val="0"/>
-              </a:spcAft>
-              <a:buClr>
-                <a:schemeClr val="dk1"/>
-              </a:buClr>
-              <a:buSzPts val="1800"/>
-              <a:buNone/>
-              <a:defRPr sz="1800"/>
-            </a:lvl1pPr>
-            <a:lvl2pPr indent="-342900" lvl="1" marL="914400" algn="l">
-              <a:lnSpc>
-                <a:spcPct val="110000"/>
-              </a:lnSpc>
-              <a:spcBef>
-                <a:spcPts val="500"/>
-              </a:spcBef>
-              <a:spcAft>
-                <a:spcPts val="0"/>
-              </a:spcAft>
-              <a:buSzPts val="1800"/>
-              <a:buChar char="•"/>
-              <a:defRPr/>
-            </a:lvl2pPr>
-            <a:lvl3pPr indent="-342900" lvl="2" marL="1371600" algn="l">
-              <a:lnSpc>
-                <a:spcPct val="110000"/>
-              </a:lnSpc>
-              <a:spcBef>
-                <a:spcPts val="500"/>
-              </a:spcBef>
-              <a:spcAft>
-                <a:spcPts val="0"/>
-              </a:spcAft>
-              <a:buClr>
-                <a:schemeClr val="dk1"/>
-              </a:buClr>
-              <a:buSzPts val="1800"/>
-              <a:buChar char="−"/>
-              <a:defRPr/>
-            </a:lvl3pPr>
-            <a:lvl4pPr indent="-342900" lvl="3" marL="1828800" algn="l">
-              <a:lnSpc>
-                <a:spcPct val="90000"/>
-              </a:lnSpc>
-              <a:spcBef>
-                <a:spcPts val="500"/>
-              </a:spcBef>
-              <a:spcAft>
-                <a:spcPts val="0"/>
-              </a:spcAft>
-              <a:buClr>
-                <a:schemeClr val="dk1"/>
-              </a:buClr>
-              <a:buSzPts val="1800"/>
-              <a:buChar char="•"/>
-              <a:defRPr/>
-            </a:lvl4pPr>
-            <a:lvl5pPr indent="-342900" lvl="4" marL="2286000" algn="l">
-              <a:lnSpc>
-                <a:spcPct val="90000"/>
-              </a:lnSpc>
-              <a:spcBef>
-                <a:spcPts val="500"/>
-              </a:spcBef>
-              <a:spcAft>
-                <a:spcPts val="0"/>
-              </a:spcAft>
-              <a:buClr>
-                <a:schemeClr val="dk1"/>
-              </a:buClr>
-              <a:buSzPts val="1800"/>
-              <a:buChar char="•"/>
-              <a:defRPr/>
-            </a:lvl5pPr>
-            <a:lvl6pPr indent="-342900" lvl="5" marL="2743200" algn="l">
-              <a:lnSpc>
-                <a:spcPct val="90000"/>
-              </a:lnSpc>
-              <a:spcBef>
-                <a:spcPts val="500"/>
-              </a:spcBef>
-              <a:spcAft>
-                <a:spcPts val="0"/>
-              </a:spcAft>
-              <a:buClr>
-                <a:schemeClr val="dk1"/>
-              </a:buClr>
-              <a:buSzPts val="1800"/>
-              <a:buChar char="•"/>
-              <a:defRPr/>
-            </a:lvl6pPr>
-            <a:lvl7pPr indent="-342900" lvl="6" marL="3200400" algn="l">
-              <a:lnSpc>
-                <a:spcPct val="90000"/>
-              </a:lnSpc>
-              <a:spcBef>
-                <a:spcPts val="500"/>
-              </a:spcBef>
-              <a:spcAft>
-                <a:spcPts val="0"/>
-              </a:spcAft>
-              <a:buClr>
-                <a:schemeClr val="dk1"/>
-              </a:buClr>
-              <a:buSzPts val="1800"/>
-              <a:buChar char="•"/>
-              <a:defRPr/>
-            </a:lvl7pPr>
-            <a:lvl8pPr indent="-342900" lvl="7" marL="3657600" algn="l">
-              <a:lnSpc>
-                <a:spcPct val="90000"/>
-              </a:lnSpc>
-              <a:spcBef>
-                <a:spcPts val="500"/>
-              </a:spcBef>
-              <a:spcAft>
-                <a:spcPts val="0"/>
-              </a:spcAft>
-              <a:buClr>
-                <a:schemeClr val="dk1"/>
-              </a:buClr>
-              <a:buSzPts val="1800"/>
-              <a:buChar char="•"/>
-              <a:defRPr/>
-            </a:lvl8pPr>
-            <a:lvl9pPr indent="-342900" lvl="8" marL="4114800" algn="l">
-              <a:lnSpc>
-                <a:spcPct val="90000"/>
-              </a:lnSpc>
-              <a:spcBef>
-                <a:spcPts val="500"/>
-              </a:spcBef>
-              <a:spcAft>
-                <a:spcPts val="0"/>
-              </a:spcAft>
-              <a:buClr>
-                <a:schemeClr val="dk1"/>
-              </a:buClr>
-              <a:buSzPts val="1800"/>
-              <a:buChar char="•"/>
-              <a:defRPr/>
-            </a:lvl9pPr>
-          </a:lstStyle>
-          <a:p/>
-        </p:txBody>
-      </p:sp>
-      <p:sp>
-        <p:nvSpPr>
-          <p:cNvPr id="99" name="Google Shape;99;p11"/>
-          <p:cNvSpPr txBox="1"/>
-          <p:nvPr>
-            <p:ph idx="4" type="body"/>
-          </p:nvPr>
-        </p:nvSpPr>
-        <p:spPr>
-          <a:xfrm>
-            <a:off x="6096000" y="1773238"/>
-            <a:ext cx="5417327" cy="1080000"/>
-          </a:xfrm>
-          <a:prstGeom prst="rect">
-            <a:avLst/>
-          </a:prstGeom>
-          <a:noFill/>
-          <a:ln>
-            <a:noFill/>
-          </a:ln>
-        </p:spPr>
-        <p:txBody>
-          <a:bodyPr anchorCtr="0" anchor="b" bIns="0" lIns="0" spcFirstLastPara="1" rIns="0" wrap="square" tIns="0">
-            <a:noAutofit/>
-          </a:bodyPr>
-          <a:lstStyle>
-            <a:lvl1pPr indent="-228600" lvl="0" marL="457200" algn="l">
-              <a:lnSpc>
-                <a:spcPct val="100000"/>
-              </a:lnSpc>
-              <a:spcBef>
-                <a:spcPts val="1000"/>
-              </a:spcBef>
-              <a:spcAft>
-                <a:spcPts val="0"/>
-              </a:spcAft>
-              <a:buClr>
-                <a:schemeClr val="dk1"/>
-              </a:buClr>
-              <a:buSzPts val="8800"/>
-              <a:buNone/>
-              <a:defRPr b="1" i="0" sz="8800">
-                <a:solidFill>
-                  <a:schemeClr val="dk1"/>
-                </a:solidFill>
-                <a:latin typeface="Play"/>
-                <a:ea typeface="Play"/>
-                <a:cs typeface="Play"/>
-                <a:sym typeface="Play"/>
-              </a:defRPr>
-            </a:lvl1pPr>
-            <a:lvl2pPr indent="-342900" lvl="1" marL="914400" algn="l">
-              <a:lnSpc>
-                <a:spcPct val="110000"/>
-              </a:lnSpc>
-              <a:spcBef>
-                <a:spcPts val="500"/>
-              </a:spcBef>
-              <a:spcAft>
-                <a:spcPts val="0"/>
-              </a:spcAft>
-              <a:buSzPts val="1800"/>
-              <a:buChar char="•"/>
-              <a:defRPr/>
-            </a:lvl2pPr>
-            <a:lvl3pPr indent="-342900" lvl="2" marL="1371600" algn="l">
-              <a:lnSpc>
-                <a:spcPct val="110000"/>
-              </a:lnSpc>
-              <a:spcBef>
-                <a:spcPts val="500"/>
-              </a:spcBef>
-              <a:spcAft>
-                <a:spcPts val="0"/>
-              </a:spcAft>
-              <a:buClr>
-                <a:schemeClr val="dk1"/>
-              </a:buClr>
-              <a:buSzPts val="1800"/>
-              <a:buChar char="−"/>
-              <a:defRPr/>
-            </a:lvl3pPr>
-            <a:lvl4pPr indent="-342900" lvl="3" marL="1828800" algn="l">
-              <a:lnSpc>
-                <a:spcPct val="90000"/>
-              </a:lnSpc>
-              <a:spcBef>
-                <a:spcPts val="500"/>
-              </a:spcBef>
-              <a:spcAft>
-                <a:spcPts val="0"/>
-              </a:spcAft>
-              <a:buClr>
-                <a:schemeClr val="dk1"/>
-              </a:buClr>
-              <a:buSzPts val="1800"/>
-              <a:buChar char="•"/>
-              <a:defRPr/>
-            </a:lvl4pPr>
-            <a:lvl5pPr indent="-342900" lvl="4" marL="2286000" algn="l">
-              <a:lnSpc>
-                <a:spcPct val="90000"/>
-              </a:lnSpc>
-              <a:spcBef>
-                <a:spcPts val="500"/>
-              </a:spcBef>
-              <a:spcAft>
-                <a:spcPts val="0"/>
-              </a:spcAft>
-              <a:buClr>
-                <a:schemeClr val="dk1"/>
-              </a:buClr>
-              <a:buSzPts val="1800"/>
-              <a:buChar char="•"/>
-              <a:defRPr/>
-            </a:lvl5pPr>
-            <a:lvl6pPr indent="-342900" lvl="5" marL="2743200" algn="l">
-              <a:lnSpc>
-                <a:spcPct val="90000"/>
-              </a:lnSpc>
-              <a:spcBef>
-                <a:spcPts val="500"/>
-              </a:spcBef>
-              <a:spcAft>
-                <a:spcPts val="0"/>
-              </a:spcAft>
-              <a:buClr>
-                <a:schemeClr val="dk1"/>
-              </a:buClr>
-              <a:buSzPts val="1800"/>
-              <a:buChar char="•"/>
-              <a:defRPr/>
-            </a:lvl6pPr>
-            <a:lvl7pPr indent="-342900" lvl="6" marL="3200400" algn="l">
-              <a:lnSpc>
-                <a:spcPct val="90000"/>
-              </a:lnSpc>
-              <a:spcBef>
-                <a:spcPts val="500"/>
-              </a:spcBef>
-              <a:spcAft>
-                <a:spcPts val="0"/>
-              </a:spcAft>
-              <a:buClr>
-                <a:schemeClr val="dk1"/>
-              </a:buClr>
-              <a:buSzPts val="1800"/>
-              <a:buChar char="•"/>
-              <a:defRPr/>
-            </a:lvl7pPr>
-            <a:lvl8pPr indent="-342900" lvl="7" marL="3657600" algn="l">
-              <a:lnSpc>
-                <a:spcPct val="90000"/>
-              </a:lnSpc>
-              <a:spcBef>
-                <a:spcPts val="500"/>
-              </a:spcBef>
-              <a:spcAft>
-                <a:spcPts val="0"/>
-              </a:spcAft>
-              <a:buClr>
-                <a:schemeClr val="dk1"/>
-              </a:buClr>
-              <a:buSzPts val="1800"/>
-              <a:buChar char="•"/>
-              <a:defRPr/>
-            </a:lvl8pPr>
-            <a:lvl9pPr indent="-342900" lvl="8" marL="4114800" algn="l">
-              <a:lnSpc>
-                <a:spcPct val="90000"/>
-              </a:lnSpc>
-              <a:spcBef>
-                <a:spcPts val="500"/>
-              </a:spcBef>
-              <a:spcAft>
-                <a:spcPts val="0"/>
-              </a:spcAft>
-              <a:buClr>
-                <a:schemeClr val="dk1"/>
-              </a:buClr>
-              <a:buSzPts val="1800"/>
-              <a:buChar char="•"/>
-              <a:defRPr/>
-            </a:lvl9pPr>
-          </a:lstStyle>
-          <a:p/>
-        </p:txBody>
-      </p:sp>
-      <p:sp>
-        <p:nvSpPr>
-          <p:cNvPr id="100" name="Google Shape;100;p11"/>
-          <p:cNvSpPr txBox="1"/>
-          <p:nvPr>
-            <p:ph idx="5" type="body"/>
-          </p:nvPr>
-        </p:nvSpPr>
-        <p:spPr>
-          <a:xfrm>
-            <a:off x="6096000" y="2967300"/>
-            <a:ext cx="5417327" cy="356617"/>
-          </a:xfrm>
-          <a:prstGeom prst="rect">
-            <a:avLst/>
-          </a:prstGeom>
-          <a:noFill/>
-          <a:ln>
-            <a:noFill/>
-          </a:ln>
-        </p:spPr>
-        <p:txBody>
-          <a:bodyPr anchorCtr="0" anchor="t" bIns="0" lIns="0" spcFirstLastPara="1" rIns="0" wrap="square" tIns="0">
-            <a:normAutofit/>
-          </a:bodyPr>
-          <a:lstStyle>
-            <a:lvl1pPr indent="-228600" lvl="0" marL="457200" algn="l">
-              <a:lnSpc>
-                <a:spcPct val="110000"/>
-              </a:lnSpc>
-              <a:spcBef>
-                <a:spcPts val="1000"/>
-              </a:spcBef>
-              <a:spcAft>
-                <a:spcPts val="0"/>
-              </a:spcAft>
-              <a:buClr>
-                <a:schemeClr val="dk1"/>
-              </a:buClr>
-              <a:buSzPts val="1800"/>
-              <a:buNone/>
-              <a:defRPr sz="1800"/>
-            </a:lvl1pPr>
-            <a:lvl2pPr indent="-342900" lvl="1" marL="914400" algn="l">
-              <a:lnSpc>
-                <a:spcPct val="110000"/>
-              </a:lnSpc>
-              <a:spcBef>
-                <a:spcPts val="500"/>
-              </a:spcBef>
-              <a:spcAft>
-                <a:spcPts val="0"/>
-              </a:spcAft>
-              <a:buSzPts val="1800"/>
-              <a:buChar char="•"/>
-              <a:defRPr/>
-            </a:lvl2pPr>
-            <a:lvl3pPr indent="-342900" lvl="2" marL="1371600" algn="l">
-              <a:lnSpc>
-                <a:spcPct val="110000"/>
-              </a:lnSpc>
-              <a:spcBef>
-                <a:spcPts val="500"/>
-              </a:spcBef>
-              <a:spcAft>
-                <a:spcPts val="0"/>
-              </a:spcAft>
-              <a:buClr>
-                <a:schemeClr val="dk1"/>
-              </a:buClr>
-              <a:buSzPts val="1800"/>
-              <a:buChar char="−"/>
-              <a:defRPr/>
-            </a:lvl3pPr>
-            <a:lvl4pPr indent="-342900" lvl="3" marL="1828800" algn="l">
-              <a:lnSpc>
-                <a:spcPct val="90000"/>
-              </a:lnSpc>
-              <a:spcBef>
-                <a:spcPts val="500"/>
-              </a:spcBef>
-              <a:spcAft>
-                <a:spcPts val="0"/>
-              </a:spcAft>
-              <a:buClr>
-                <a:schemeClr val="dk1"/>
-              </a:buClr>
-              <a:buSzPts val="1800"/>
-              <a:buChar char="•"/>
-              <a:defRPr/>
-            </a:lvl4pPr>
-            <a:lvl5pPr indent="-342900" lvl="4" marL="2286000" algn="l">
-              <a:lnSpc>
-                <a:spcPct val="90000"/>
-              </a:lnSpc>
-              <a:spcBef>
-                <a:spcPts val="500"/>
-              </a:spcBef>
-              <a:spcAft>
-                <a:spcPts val="0"/>
-              </a:spcAft>
-              <a:buClr>
-                <a:schemeClr val="dk1"/>
-              </a:buClr>
-              <a:buSzPts val="1800"/>
-              <a:buChar char="•"/>
-              <a:defRPr/>
-            </a:lvl5pPr>
-            <a:lvl6pPr indent="-342900" lvl="5" marL="2743200" algn="l">
-              <a:lnSpc>
-                <a:spcPct val="90000"/>
-              </a:lnSpc>
-              <a:spcBef>
-                <a:spcPts val="500"/>
-              </a:spcBef>
-              <a:spcAft>
-                <a:spcPts val="0"/>
-              </a:spcAft>
-              <a:buClr>
-                <a:schemeClr val="dk1"/>
-              </a:buClr>
-              <a:buSzPts val="1800"/>
-              <a:buChar char="•"/>
-              <a:defRPr/>
-            </a:lvl6pPr>
-            <a:lvl7pPr indent="-342900" lvl="6" marL="3200400" algn="l">
-              <a:lnSpc>
-                <a:spcPct val="90000"/>
-              </a:lnSpc>
-              <a:spcBef>
-                <a:spcPts val="500"/>
-              </a:spcBef>
-              <a:spcAft>
-                <a:spcPts val="0"/>
-              </a:spcAft>
-              <a:buClr>
-                <a:schemeClr val="dk1"/>
-              </a:buClr>
-              <a:buSzPts val="1800"/>
-              <a:buChar char="•"/>
-              <a:defRPr/>
-            </a:lvl7pPr>
-            <a:lvl8pPr indent="-342900" lvl="7" marL="3657600" algn="l">
-              <a:lnSpc>
-                <a:spcPct val="90000"/>
-              </a:lnSpc>
-              <a:spcBef>
-                <a:spcPts val="500"/>
-              </a:spcBef>
-              <a:spcAft>
-                <a:spcPts val="0"/>
-              </a:spcAft>
-              <a:buClr>
-                <a:schemeClr val="dk1"/>
-              </a:buClr>
-              <a:buSzPts val="1800"/>
-              <a:buChar char="•"/>
-              <a:defRPr/>
-            </a:lvl8pPr>
-            <a:lvl9pPr indent="-342900" lvl="8" marL="4114800" algn="l">
-              <a:lnSpc>
-                <a:spcPct val="90000"/>
-              </a:lnSpc>
-              <a:spcBef>
-                <a:spcPts val="500"/>
-              </a:spcBef>
-              <a:spcAft>
-                <a:spcPts val="0"/>
-              </a:spcAft>
-              <a:buClr>
-                <a:schemeClr val="dk1"/>
-              </a:buClr>
-              <a:buSzPts val="1800"/>
-              <a:buChar char="•"/>
-              <a:defRPr/>
-            </a:lvl9pPr>
-          </a:lstStyle>
-          <a:p/>
-        </p:txBody>
-      </p:sp>
-    </p:spTree>
-  </p:cSld>
-  <p:clrMapOvr>
-    <a:masterClrMapping/>
-  </p:clrMapOvr>
-</p:sldLayout>
 </file>
 
 <file path=ppt/slideLayouts/slideLayout12.xml><?xml version="1.0" encoding="utf-8"?>
@@ -5493,7 +4451,6 @@
   <p:clrMap accent1="accent1" accent2="accent2" accent3="accent3" accent4="accent4" accent5="accent5" accent6="accent6" bg1="lt1" bg2="dk2" tx1="dk1" tx2="lt2" folHlink="folHlink" hlink="hlink"/>
   <p:sldLayoutIdLst>
     <p:sldLayoutId id="2147483653" r:id="rId6"/>
-    <p:sldLayoutId id="2147483657" r:id="rId10"/>
     <p:sldLayoutId id="2147483659" r:id="rId12"/>
   </p:sldLayoutIdLst>
   <p:hf dt="0" ftr="0" hdr="0" sldNum="0"/>
@@ -8427,342 +7384,6 @@
       <p:grpSpPr/>
       <p:sp>
         <p:nvSpPr>
-          <p:cNvPr id="795" name="Google Shape;795;p60"/>
-          <p:cNvSpPr txBox="1"/>
-          <p:nvPr/>
-        </p:nvSpPr>
-        <p:spPr>
-          <a:xfrm>
-            <a:off x="18692059" y="4674436"/>
-            <a:ext cx="4304330" cy="678198"/>
-          </a:xfrm>
-          <a:prstGeom prst="rect">
-            <a:avLst/>
-          </a:prstGeom>
-          <a:noFill/>
-          <a:ln>
-            <a:noFill/>
-          </a:ln>
-        </p:spPr>
-        <p:txBody>
-          <a:bodyPr anchorCtr="0" anchor="t" bIns="45700" lIns="91425" spcFirstLastPara="1" rIns="91425" wrap="square" tIns="45700">
-            <a:noAutofit/>
-          </a:bodyPr>
-          <a:lstStyle/>
-          <a:p>
-            <a:pPr indent="0" lvl="0" marL="0" marR="0" rtl="0" algn="l">
-              <a:lnSpc>
-                <a:spcPct val="110000"/>
-              </a:lnSpc>
-              <a:spcBef>
-                <a:spcPts val="0"/>
-              </a:spcBef>
-              <a:spcAft>
-                <a:spcPts val="0"/>
-              </a:spcAft>
-              <a:buClr>
-                <a:schemeClr val="dk1"/>
-              </a:buClr>
-              <a:buSzPts val="1600"/>
-              <a:buFont typeface="Arial"/>
-              <a:buNone/>
-            </a:pPr>
-            <a:r>
-              <a:t/>
-            </a:r>
-            <a:endParaRPr sz="1600">
-              <a:solidFill>
-                <a:schemeClr val="dk1"/>
-              </a:solidFill>
-              <a:latin typeface="Arial"/>
-              <a:ea typeface="Arial"/>
-              <a:cs typeface="Arial"/>
-              <a:sym typeface="Arial"/>
-            </a:endParaRPr>
-          </a:p>
-        </p:txBody>
-      </p:sp>
-      <p:pic>
-        <p:nvPicPr>
-          <p:cNvPr id="797" name="Google Shape;797;p60"/>
-          <p:cNvPicPr preferRelativeResize="0"/>
-          <p:nvPr/>
-        </p:nvPicPr>
-        <p:blipFill rotWithShape="1">
-          <a:blip r:embed="rId3">
-            <a:alphaModFix/>
-          </a:blip>
-          <a:srcRect b="0" l="0" r="0" t="0"/>
-          <a:stretch/>
-        </p:blipFill>
-        <p:spPr>
-          <a:xfrm>
-            <a:off x="669096" y="2601017"/>
-            <a:ext cx="450850" cy="450850"/>
-          </a:xfrm>
-          <a:prstGeom prst="rect">
-            <a:avLst/>
-          </a:prstGeom>
-          <a:noFill/>
-          <a:ln>
-            <a:noFill/>
-          </a:ln>
-        </p:spPr>
-      </p:pic>
-      <p:pic>
-        <p:nvPicPr>
-          <p:cNvPr id="798" name="Google Shape;798;p60"/>
-          <p:cNvPicPr preferRelativeResize="0"/>
-          <p:nvPr/>
-        </p:nvPicPr>
-        <p:blipFill rotWithShape="1">
-          <a:blip r:embed="rId4">
-            <a:alphaModFix/>
-          </a:blip>
-          <a:srcRect b="0" l="0" r="0" t="0"/>
-          <a:stretch/>
-        </p:blipFill>
-        <p:spPr>
-          <a:xfrm>
-            <a:off x="8097007" y="2603210"/>
-            <a:ext cx="450851" cy="450851"/>
-          </a:xfrm>
-          <a:prstGeom prst="rect">
-            <a:avLst/>
-          </a:prstGeom>
-          <a:noFill/>
-          <a:ln>
-            <a:noFill/>
-          </a:ln>
-        </p:spPr>
-      </p:pic>
-      <p:pic>
-        <p:nvPicPr>
-          <p:cNvPr id="799" name="Google Shape;799;p60"/>
-          <p:cNvPicPr preferRelativeResize="0"/>
-          <p:nvPr/>
-        </p:nvPicPr>
-        <p:blipFill rotWithShape="1">
-          <a:blip r:embed="rId5">
-            <a:alphaModFix/>
-          </a:blip>
-          <a:srcRect b="0" l="0" r="0" t="0"/>
-          <a:stretch/>
-        </p:blipFill>
-        <p:spPr>
-          <a:xfrm>
-            <a:off x="4383052" y="2601017"/>
-            <a:ext cx="450850" cy="450850"/>
-          </a:xfrm>
-          <a:prstGeom prst="rect">
-            <a:avLst/>
-          </a:prstGeom>
-          <a:noFill/>
-          <a:ln>
-            <a:noFill/>
-          </a:ln>
-        </p:spPr>
-      </p:pic>
-      <p:sp>
-        <p:nvSpPr>
-          <p:cNvPr id="800" name="title"/>
-          <p:cNvSpPr txBox="1"/>
-          <p:nvPr/>
-        </p:nvSpPr>
-        <p:spPr>
-          <a:xfrm>
-            <a:off x="677387" y="692177"/>
-            <a:ext cx="10855878" cy="1447800"/>
-          </a:xfrm>
-          <a:prstGeom prst="rect">
-            <a:avLst/>
-          </a:prstGeom>
-          <a:noFill/>
-        </p:spPr>
-        <p:txBody>
-          <a:bodyPr wrap="square" lIns="76200" rIns="76200" tIns="50800" bIns="50800">
-            <a:spAutoFit/>
-          </a:bodyPr>
-          <a:lstStyle/>
-          <a:p>
-            <a:pPr algn="l">
-              <a:spcAft>
-                <a:spcPts val="300"/>
-              </a:spcAft>
-              <a:defRPr sz="4000">
-                <a:solidFill>
-                  <a:srgbClr val="000000"/>
-                </a:solidFill>
-                <a:latin typeface="Arial"/>
-                <a:ea typeface="Arial"/>
-                <a:cs typeface="Arial"/>
-              </a:defRPr>
-            </a:pPr>
-            <a:r>
-              <a:rPr sz="4000">
-                <a:solidFill>
-                  <a:srgbClr val="000000"/>
-                </a:solidFill>
-                <a:latin typeface="Arial"/>
-                <a:ea typeface="Arial"/>
-                <a:cs typeface="Arial"/>
-              </a:rPr>
-              <a:t>Текущее состояние: ручная сборка презентаций</a:t>
-            </a:r>
-          </a:p>
-        </p:txBody>
-      </p:sp>
-      <p:sp>
-        <p:nvSpPr>
-          <p:cNvPr id="801" name="lead"/>
-          <p:cNvSpPr txBox="1"/>
-          <p:nvPr/>
-        </p:nvSpPr>
-        <p:spPr>
-          <a:xfrm>
-            <a:off x="1762975" y="3054073"/>
-            <a:ext cx="8684702" cy="982387"/>
-          </a:xfrm>
-          <a:prstGeom prst="rect">
-            <a:avLst/>
-          </a:prstGeom>
-          <a:noFill/>
-        </p:spPr>
-        <p:txBody>
-          <a:bodyPr wrap="square" lIns="76200" rIns="76200" tIns="50800" bIns="50800">
-            <a:spAutoFit/>
-          </a:bodyPr>
-          <a:lstStyle/>
-          <a:p>
-            <a:pPr algn="l">
-              <a:spcAft>
-                <a:spcPts val="300"/>
-              </a:spcAft>
-              <a:defRPr sz="2400">
-                <a:solidFill>
-                  <a:srgbClr val="000000"/>
-                </a:solidFill>
-                <a:latin typeface="Arial"/>
-                <a:ea typeface="Arial"/>
-                <a:cs typeface="Arial"/>
-              </a:defRPr>
-            </a:pPr>
-            <a:r>
-              <a:rPr sz="2400">
-                <a:solidFill>
-                  <a:srgbClr val="000000"/>
-                </a:solidFill>
-                <a:latin typeface="Arial"/>
-                <a:ea typeface="Arial"/>
-                <a:cs typeface="Arial"/>
-              </a:rPr>
-              <a:t>Сборка одной колоды 12 слайдов занимает 186 минут</a:t>
-            </a:r>
-          </a:p>
-        </p:txBody>
-      </p:sp>
-      <p:sp>
-        <p:nvSpPr>
-          <p:cNvPr id="802" name="body"/>
-          <p:cNvSpPr txBox="1"/>
-          <p:nvPr/>
-        </p:nvSpPr>
-        <p:spPr>
-          <a:xfrm>
-            <a:off x="1762975" y="4232938"/>
-            <a:ext cx="8684702" cy="2095760"/>
-          </a:xfrm>
-          <a:prstGeom prst="rect">
-            <a:avLst/>
-          </a:prstGeom>
-          <a:noFill/>
-        </p:spPr>
-        <p:txBody>
-          <a:bodyPr wrap="square" lIns="76200" rIns="76200" tIns="50800" bIns="50800">
-            <a:spAutoFit/>
-          </a:bodyPr>
-          <a:lstStyle/>
-          <a:p>
-            <a:pPr algn="l">
-              <a:spcAft>
-                <a:spcPts val="300"/>
-              </a:spcAft>
-              <a:defRPr sz="2400">
-                <a:solidFill>
-                  <a:srgbClr val="000000"/>
-                </a:solidFill>
-                <a:latin typeface="Arial"/>
-                <a:ea typeface="Arial"/>
-                <a:cs typeface="Arial"/>
-              </a:defRPr>
-            </a:pPr>
-            <a:r>
-              <a:rPr sz="2400">
-                <a:solidFill>
-                  <a:srgbClr val="000000"/>
-                </a:solidFill>
-                <a:latin typeface="Arial"/>
-                <a:ea typeface="Arial"/>
-                <a:cs typeface="Arial"/>
-              </a:rPr>
-              <a:t>• Правки после ревью дизайнера 74 минуты</a:t>
-            </a:r>
-          </a:p>
-          <a:p>
-            <a:pPr algn="l">
-              <a:spcAft>
-                <a:spcPts val="300"/>
-              </a:spcAft>
-              <a:defRPr sz="2400">
-                <a:solidFill>
-                  <a:srgbClr val="000000"/>
-                </a:solidFill>
-                <a:latin typeface="Arial"/>
-                <a:ea typeface="Arial"/>
-                <a:cs typeface="Arial"/>
-              </a:defRPr>
-            </a:pPr>
-            <a:r>
-              <a:rPr sz="2400">
-                <a:solidFill>
-                  <a:srgbClr val="000000"/>
-                </a:solidFill>
-                <a:latin typeface="Arial"/>
-                <a:ea typeface="Arial"/>
-                <a:cs typeface="Arial"/>
-              </a:rPr>
-              <a:t>• 19 из 42 колод нарушают фирменный стиль</a:t>
-            </a:r>
-          </a:p>
-        </p:txBody>
-      </p:sp>
-    </p:spTree>
-  </p:cSld>
-  <p:clrMapOvr>
-    <a:masterClrMapping/>
-  </p:clrMapOvr>
-</p:sld>
-</file>
-
-<file path=ppt/slides/slide57.xml><?xml version="1.0" encoding="utf-8"?>
-<p:sld xmlns:a="http://schemas.openxmlformats.org/drawingml/2006/main" xmlns:p="http://schemas.openxmlformats.org/presentationml/2006/main" xmlns:r="http://schemas.openxmlformats.org/officeDocument/2006/relationships">
-  <p:cSld>
-    <p:bg>
-      <p:bgPr>
-        <a:solidFill>
-          <a:schemeClr val="lt2"/>
-        </a:solidFill>
-      </p:bgPr>
-    </p:bg>
-    <p:spTree>
-      <p:nvGrpSpPr>
-        <p:cNvPr id="1" name=""/>
-        <p:cNvGrpSpPr/>
-        <p:nvPr/>
-      </p:nvGrpSpPr>
-      <p:grpSpPr/>
-      <p:sp>
-        <p:nvSpPr>
           <p:cNvPr id="2" name="title"/>
           <p:cNvSpPr txBox="1"/>
           <p:nvPr/>
@@ -8805,105 +7426,7 @@
                 <a:ea typeface="Arial"/>
                 <a:cs typeface="Arial"/>
               </a:rPr>
-              <a:t>Ограничения команды дизайна</a:t>
-            </a:r>
-          </a:p>
-        </p:txBody>
-      </p:sp>
-      <p:sp>
-        <p:nvSpPr>
-          <p:cNvPr id="3" name="lead"/>
-          <p:cNvSpPr txBox="1"/>
-          <p:nvPr/>
-        </p:nvSpPr>
-        <p:spPr>
-          <a:xfrm>
-            <a:off x="1762975" y="2888294"/>
-            <a:ext cx="8684702" cy="497840"/>
-          </a:xfrm>
-          <a:prstGeom prst="rect">
-            <a:avLst/>
-          </a:prstGeom>
-          <a:noFill/>
-        </p:spPr>
-        <p:txBody>
-          <a:bodyPr wrap="square" lIns="76200" rIns="76200" tIns="50800" bIns="50800">
-            <a:spAutoFit/>
-          </a:bodyPr>
-          <a:lstStyle/>
-          <a:p>
-            <a:pPr algn="l">
-              <a:spcAft>
-                <a:spcPts val="300"/>
-              </a:spcAft>
-              <a:defRPr sz="2400">
-                <a:solidFill>
-                  <a:srgbClr val="000000"/>
-                </a:solidFill>
-                <a:latin typeface="Arial"/>
-                <a:ea typeface="Arial"/>
-                <a:cs typeface="Arial"/>
-              </a:defRPr>
-            </a:pPr>
-            <a:r>
-              <a:rPr sz="2400">
-                <a:solidFill>
-                  <a:srgbClr val="000000"/>
-                </a:solidFill>
-                <a:latin typeface="Arial"/>
-                <a:ea typeface="Arial"/>
-                <a:cs typeface="Arial"/>
-              </a:rPr>
-              <a:t>4 дизайнера закрывают 11 запросов в неделю из 27</a:t>
-            </a:r>
-          </a:p>
-        </p:txBody>
-      </p:sp>
-      <p:sp>
-        <p:nvSpPr>
-          <p:cNvPr id="4" name="body"/>
-          <p:cNvSpPr txBox="1"/>
-          <p:nvPr/>
-        </p:nvSpPr>
-        <p:spPr>
-          <a:xfrm>
-            <a:off x="1762975" y="4328244"/>
-            <a:ext cx="8684702" cy="497840"/>
-          </a:xfrm>
-          <a:prstGeom prst="rect">
-            <a:avLst/>
-          </a:prstGeom>
-          <a:noFill/>
-        </p:spPr>
-        <p:txBody>
-          <a:bodyPr wrap="square" lIns="76200" rIns="76200" tIns="50800" bIns="50800">
-            <a:spAutoFit/>
-          </a:bodyPr>
-          <a:lstStyle/>
-          <a:p>
-            <a:pPr algn="l">
-              <a:spcAft>
-                <a:spcPts val="300"/>
-              </a:spcAft>
-              <a:defRPr sz="2400">
-                <a:solidFill>
-                  <a:srgbClr val="000000"/>
-                </a:solidFill>
-                <a:latin typeface="Arial"/>
-                <a:ea typeface="Arial"/>
-                <a:cs typeface="Arial"/>
-              </a:defRPr>
-            </a:pPr>
-            <a:r>
-              <a:rPr sz="2400">
-                <a:solidFill>
-                  <a:srgbClr val="000000"/>
-                </a:solidFill>
-                <a:latin typeface="Arial"/>
-                <a:ea typeface="Arial"/>
-                <a:cs typeface="Arial"/>
-              </a:rPr>
-              <a:t>Средний срок ожидания 6 рабочих дней</a:t>
+              <a:t>Автоматическая вёрстка презентаций</a:t>
             </a:r>
           </a:p>
         </p:txBody>
@@ -8916,448 +7439,7 @@
 </p:sld>
 </file>
 
-<file path=ppt/slides/slide58.xml><?xml version="1.0" encoding="utf-8"?>
-<p:sld xmlns:a="http://schemas.openxmlformats.org/drawingml/2006/main" xmlns:p="http://schemas.openxmlformats.org/presentationml/2006/main" xmlns:r="http://schemas.openxmlformats.org/officeDocument/2006/relationships">
-  <p:cSld>
-    <p:bg>
-      <p:bgPr>
-        <a:solidFill>
-          <a:schemeClr val="lt2"/>
-        </a:solidFill>
-      </p:bgPr>
-    </p:bg>
-    <p:spTree>
-      <p:nvGrpSpPr>
-        <p:cNvPr id="1" name=""/>
-        <p:cNvGrpSpPr/>
-        <p:nvPr/>
-      </p:nvGrpSpPr>
-      <p:grpSpPr/>
-      <p:pic>
-        <p:nvPicPr>
-          <p:cNvPr id="762" name="Google Shape;762;p58"/>
-          <p:cNvPicPr preferRelativeResize="0"/>
-          <p:nvPr/>
-        </p:nvPicPr>
-        <p:blipFill rotWithShape="1">
-          <a:blip r:embed="rId2">
-            <a:alphaModFix/>
-          </a:blip>
-          <a:srcRect b="0" l="0" r="0" t="0"/>
-          <a:stretch/>
-        </p:blipFill>
-        <p:spPr>
-          <a:xfrm>
-            <a:off x="8105070" y="2562300"/>
-            <a:ext cx="866700" cy="866700"/>
-          </a:xfrm>
-          <a:prstGeom prst="rect">
-            <a:avLst/>
-          </a:prstGeom>
-          <a:noFill/>
-          <a:ln>
-            <a:noFill/>
-          </a:ln>
-        </p:spPr>
-      </p:pic>
-      <p:sp>
-        <p:nvSpPr>
-          <p:cNvPr id="764" name="Google Shape;764;p58"/>
-          <p:cNvSpPr txBox="1"/>
-          <p:nvPr/>
-        </p:nvSpPr>
-        <p:spPr>
-          <a:xfrm>
-            <a:off x="18692059" y="4674436"/>
-            <a:ext cx="4304330" cy="678198"/>
-          </a:xfrm>
-          <a:prstGeom prst="rect">
-            <a:avLst/>
-          </a:prstGeom>
-          <a:noFill/>
-          <a:ln>
-            <a:noFill/>
-          </a:ln>
-        </p:spPr>
-        <p:txBody>
-          <a:bodyPr anchorCtr="0" anchor="t" bIns="45700" lIns="91425" spcFirstLastPara="1" rIns="91425" wrap="square" tIns="45700">
-            <a:noAutofit/>
-          </a:bodyPr>
-          <a:lstStyle/>
-          <a:p>
-            <a:pPr indent="0" lvl="0" marL="0" marR="0" rtl="0" algn="l">
-              <a:lnSpc>
-                <a:spcPct val="110000"/>
-              </a:lnSpc>
-              <a:spcBef>
-                <a:spcPts val="0"/>
-              </a:spcBef>
-              <a:spcAft>
-                <a:spcPts val="0"/>
-              </a:spcAft>
-              <a:buClr>
-                <a:schemeClr val="dk1"/>
-              </a:buClr>
-              <a:buSzPts val="1600"/>
-              <a:buFont typeface="Arial"/>
-              <a:buNone/>
-            </a:pPr>
-            <a:r>
-              <a:t/>
-            </a:r>
-            <a:endParaRPr sz="1600">
-              <a:solidFill>
-                <a:schemeClr val="dk1"/>
-              </a:solidFill>
-              <a:latin typeface="Arial"/>
-              <a:ea typeface="Arial"/>
-              <a:cs typeface="Arial"/>
-              <a:sym typeface="Arial"/>
-            </a:endParaRPr>
-          </a:p>
-        </p:txBody>
-      </p:sp>
-      <p:sp>
-        <p:nvSpPr>
-          <p:cNvPr id="768" name="Google Shape;768;p58"/>
-          <p:cNvSpPr/>
-          <p:nvPr/>
-        </p:nvSpPr>
-        <p:spPr>
-          <a:xfrm>
-            <a:off x="671513" y="2562300"/>
-            <a:ext cx="866700" cy="866700"/>
-          </a:xfrm>
-          <a:prstGeom prst="ellipse">
-            <a:avLst/>
-          </a:prstGeom>
-          <a:solidFill>
-            <a:schemeClr val="accent1"/>
-          </a:solidFill>
-          <a:ln>
-            <a:noFill/>
-          </a:ln>
-        </p:spPr>
-        <p:txBody>
-          <a:bodyPr anchorCtr="0" anchor="ctr" bIns="45700" lIns="91425" spcFirstLastPara="1" rIns="91425" wrap="square" tIns="45700">
-            <a:noAutofit/>
-          </a:bodyPr>
-          <a:lstStyle/>
-          <a:p>
-            <a:pPr indent="0" lvl="0" marL="0" marR="0" rtl="0" algn="ctr">
-              <a:spcBef>
-                <a:spcPts val="0"/>
-              </a:spcBef>
-              <a:spcAft>
-                <a:spcPts val="0"/>
-              </a:spcAft>
-              <a:buNone/>
-            </a:pPr>
-            <a:r>
-              <a:t/>
-            </a:r>
-            <a:endParaRPr sz="3200">
-              <a:solidFill>
-                <a:schemeClr val="lt1"/>
-              </a:solidFill>
-              <a:latin typeface="Play"/>
-              <a:ea typeface="Play"/>
-              <a:cs typeface="Play"/>
-              <a:sym typeface="Play"/>
-            </a:endParaRPr>
-          </a:p>
-        </p:txBody>
-      </p:sp>
-      <p:pic>
-        <p:nvPicPr>
-          <p:cNvPr id="769" name="Google Shape;769;p58"/>
-          <p:cNvPicPr preferRelativeResize="0"/>
-          <p:nvPr/>
-        </p:nvPicPr>
-        <p:blipFill rotWithShape="1">
-          <a:blip r:embed="rId3">
-            <a:alphaModFix/>
-          </a:blip>
-          <a:srcRect b="0" l="0" r="0" t="0"/>
-          <a:stretch/>
-        </p:blipFill>
-        <p:spPr>
-          <a:xfrm>
-            <a:off x="879438" y="2770225"/>
-            <a:ext cx="450850" cy="450850"/>
-          </a:xfrm>
-          <a:prstGeom prst="rect">
-            <a:avLst/>
-          </a:prstGeom>
-          <a:noFill/>
-          <a:ln>
-            <a:noFill/>
-          </a:ln>
-        </p:spPr>
-      </p:pic>
-      <p:pic>
-        <p:nvPicPr>
-          <p:cNvPr id="770" name="Google Shape;770;p58"/>
-          <p:cNvPicPr preferRelativeResize="0"/>
-          <p:nvPr/>
-        </p:nvPicPr>
-        <p:blipFill rotWithShape="1">
-          <a:blip r:embed="rId4">
-            <a:alphaModFix/>
-          </a:blip>
-          <a:srcRect b="0" l="0" r="0" t="0"/>
-          <a:stretch/>
-        </p:blipFill>
-        <p:spPr>
-          <a:xfrm>
-            <a:off x="8307349" y="2772418"/>
-            <a:ext cx="450851" cy="450851"/>
-          </a:xfrm>
-          <a:prstGeom prst="rect">
-            <a:avLst/>
-          </a:prstGeom>
-          <a:noFill/>
-          <a:ln>
-            <a:noFill/>
-          </a:ln>
-        </p:spPr>
-      </p:pic>
-      <p:pic>
-        <p:nvPicPr>
-          <p:cNvPr id="771" name="Google Shape;771;p58"/>
-          <p:cNvPicPr preferRelativeResize="0"/>
-          <p:nvPr/>
-        </p:nvPicPr>
-        <p:blipFill rotWithShape="1">
-          <a:blip r:embed="rId5">
-            <a:alphaModFix/>
-          </a:blip>
-          <a:srcRect b="0" l="0" r="0" t="0"/>
-          <a:stretch/>
-        </p:blipFill>
-        <p:spPr>
-          <a:xfrm>
-            <a:off x="4385469" y="2562300"/>
-            <a:ext cx="866700" cy="866700"/>
-          </a:xfrm>
-          <a:prstGeom prst="rect">
-            <a:avLst/>
-          </a:prstGeom>
-          <a:noFill/>
-          <a:ln>
-            <a:noFill/>
-          </a:ln>
-        </p:spPr>
-      </p:pic>
-      <p:pic>
-        <p:nvPicPr>
-          <p:cNvPr id="772" name="Google Shape;772;p58"/>
-          <p:cNvPicPr preferRelativeResize="0"/>
-          <p:nvPr/>
-        </p:nvPicPr>
-        <p:blipFill rotWithShape="1">
-          <a:blip r:embed="rId6">
-            <a:alphaModFix/>
-          </a:blip>
-          <a:srcRect b="0" l="0" r="0" t="0"/>
-          <a:stretch/>
-        </p:blipFill>
-        <p:spPr>
-          <a:xfrm>
-            <a:off x="4593394" y="2770225"/>
-            <a:ext cx="450850" cy="450850"/>
-          </a:xfrm>
-          <a:prstGeom prst="rect">
-            <a:avLst/>
-          </a:prstGeom>
-          <a:noFill/>
-          <a:ln>
-            <a:noFill/>
-          </a:ln>
-        </p:spPr>
-      </p:pic>
-      <p:sp>
-        <p:nvSpPr>
-          <p:cNvPr id="773" name="title"/>
-          <p:cNvSpPr txBox="1"/>
-          <p:nvPr/>
-        </p:nvSpPr>
-        <p:spPr>
-          <a:xfrm>
-            <a:off x="677387" y="692177"/>
-            <a:ext cx="10855878" cy="1447800"/>
-          </a:xfrm>
-          <a:prstGeom prst="rect">
-            <a:avLst/>
-          </a:prstGeom>
-          <a:noFill/>
-        </p:spPr>
-        <p:txBody>
-          <a:bodyPr wrap="square" lIns="76200" rIns="76200" tIns="50800" bIns="50800">
-            <a:spAutoFit/>
-          </a:bodyPr>
-          <a:lstStyle/>
-          <a:p>
-            <a:pPr algn="l">
-              <a:spcAft>
-                <a:spcPts val="300"/>
-              </a:spcAft>
-              <a:defRPr sz="4000">
-                <a:solidFill>
-                  <a:srgbClr val="000000"/>
-                </a:solidFill>
-                <a:latin typeface="Arial"/>
-                <a:ea typeface="Arial"/>
-                <a:cs typeface="Arial"/>
-              </a:defRPr>
-            </a:pPr>
-            <a:r>
-              <a:rPr sz="4000">
-                <a:solidFill>
-                  <a:srgbClr val="000000"/>
-                </a:solidFill>
-                <a:latin typeface="Arial"/>
-                <a:ea typeface="Arial"/>
-                <a:cs typeface="Arial"/>
-              </a:rPr>
-              <a:t>Предлагаемый сервис: автоматическая вёрстка</a:t>
-            </a:r>
-          </a:p>
-        </p:txBody>
-      </p:sp>
-      <p:sp>
-        <p:nvSpPr>
-          <p:cNvPr id="774" name="lead"/>
-          <p:cNvSpPr txBox="1"/>
-          <p:nvPr/>
-        </p:nvSpPr>
-        <p:spPr>
-          <a:xfrm>
-            <a:off x="1762975" y="3429000"/>
-            <a:ext cx="8684702" cy="869909"/>
-          </a:xfrm>
-          <a:prstGeom prst="rect">
-            <a:avLst/>
-          </a:prstGeom>
-          <a:noFill/>
-        </p:spPr>
-        <p:txBody>
-          <a:bodyPr wrap="square" lIns="76200" rIns="76200" tIns="50800" bIns="50800">
-            <a:spAutoFit/>
-          </a:bodyPr>
-          <a:lstStyle/>
-          <a:p>
-            <a:pPr algn="l">
-              <a:spcAft>
-                <a:spcPts val="300"/>
-              </a:spcAft>
-              <a:defRPr sz="2000">
-                <a:solidFill>
-                  <a:srgbClr val="000000"/>
-                </a:solidFill>
-                <a:latin typeface="Arial"/>
-                <a:ea typeface="Arial"/>
-                <a:cs typeface="Arial"/>
-              </a:defRPr>
-            </a:pPr>
-            <a:r>
-              <a:rPr sz="2000">
-                <a:solidFill>
-                  <a:srgbClr val="000000"/>
-                </a:solidFill>
-                <a:latin typeface="Arial"/>
-                <a:ea typeface="Arial"/>
-                <a:cs typeface="Arial"/>
-              </a:rPr>
-              <a:t>Принимает шаблон pptx и материалы: документы, таблицы, заметки</a:t>
-            </a:r>
-          </a:p>
-        </p:txBody>
-      </p:sp>
-      <p:sp>
-        <p:nvSpPr>
-          <p:cNvPr id="775" name="body"/>
-          <p:cNvSpPr txBox="1"/>
-          <p:nvPr/>
-        </p:nvSpPr>
-        <p:spPr>
-          <a:xfrm>
-            <a:off x="1762975" y="4472891"/>
-            <a:ext cx="8684702" cy="1855807"/>
-          </a:xfrm>
-          <a:prstGeom prst="rect">
-            <a:avLst/>
-          </a:prstGeom>
-          <a:noFill/>
-        </p:spPr>
-        <p:txBody>
-          <a:bodyPr wrap="square" lIns="76200" rIns="76200" tIns="50800" bIns="50800">
-            <a:spAutoFit/>
-          </a:bodyPr>
-          <a:lstStyle/>
-          <a:p>
-            <a:pPr algn="l">
-              <a:spcAft>
-                <a:spcPts val="300"/>
-              </a:spcAft>
-              <a:defRPr sz="2400">
-                <a:solidFill>
-                  <a:srgbClr val="000000"/>
-                </a:solidFill>
-                <a:latin typeface="Arial"/>
-                <a:ea typeface="Arial"/>
-                <a:cs typeface="Arial"/>
-              </a:defRPr>
-            </a:pPr>
-            <a:r>
-              <a:rPr sz="2400">
-                <a:solidFill>
-                  <a:srgbClr val="000000"/>
-                </a:solidFill>
-                <a:latin typeface="Arial"/>
-                <a:ea typeface="Arial"/>
-                <a:cs typeface="Arial"/>
-              </a:rPr>
-              <a:t>• Генерирует колоду по дизайн-системе и аудит качества</a:t>
-            </a:r>
-          </a:p>
-          <a:p>
-            <a:pPr algn="l">
-              <a:spcAft>
-                <a:spcPts val="300"/>
-              </a:spcAft>
-              <a:defRPr sz="2400">
-                <a:solidFill>
-                  <a:srgbClr val="000000"/>
-                </a:solidFill>
-                <a:latin typeface="Arial"/>
-                <a:ea typeface="Arial"/>
-                <a:cs typeface="Arial"/>
-              </a:defRPr>
-            </a:pPr>
-            <a:r>
-              <a:rPr sz="2400">
-                <a:solidFill>
-                  <a:srgbClr val="000000"/>
-                </a:solidFill>
-                <a:latin typeface="Arial"/>
-                <a:ea typeface="Arial"/>
-                <a:cs typeface="Arial"/>
-              </a:rPr>
-              <a:t>• Экспорт в pptx, pdf, html, слайды редактируемы</a:t>
-            </a:r>
-          </a:p>
-        </p:txBody>
-      </p:sp>
-    </p:spTree>
-  </p:cSld>
-  <p:clrMapOvr>
-    <a:masterClrMapping/>
-  </p:clrMapOvr>
-</p:sld>
-</file>
-
-<file path=ppt/slides/slide59.xml><?xml version="1.0" encoding="utf-8"?>
+<file path=ppt/slides/slide57.xml><?xml version="1.0" encoding="utf-8"?>
 <p:sld xmlns:a="http://schemas.openxmlformats.org/drawingml/2006/main" xmlns:p="http://schemas.openxmlformats.org/presentationml/2006/main" xmlns:r="http://schemas.openxmlformats.org/officeDocument/2006/relationships">
   <p:cSld>
     <p:spTree>
@@ -9402,7 +7484,7 @@
         <p:spPr>
           <a:xfrm>
             <a:off x="677387" y="692177"/>
-            <a:ext cx="10855878" cy="822960"/>
+            <a:ext cx="10855878" cy="1447800"/>
           </a:xfrm>
           <a:prstGeom prst="rect">
             <a:avLst/>
@@ -9437,23 +7519,216 @@
                 <a:ea typeface="Arial"/>
                 <a:cs typeface="Arial"/>
               </a:rPr>
-              <a:t>Ключевые возможности сервиса</a:t>
+              <a:t>Сейчас сборка презентаций занимает 186 минут</a:t>
+            </a:r>
+          </a:p>
+        </p:txBody>
+      </p:sp>
+      <p:graphicFrame>
+        <p:nvGraphicFramePr>
+          <p:cNvPr id="988" name="Chart 987"/>
+          <p:cNvGraphicFramePr>
+            <a:graphicFrameLocks noGrp="1"/>
+          </p:cNvGraphicFramePr>
+          <p:nvPr/>
+        </p:nvGraphicFramePr>
+        <p:xfrm>
+          <a:off x="677387" y="3591534"/>
+          <a:ext cx="10855878" cy="581517"/>
+        </p:xfrm>
+        <a:graphic>
+          <a:graphicData uri="http://schemas.openxmlformats.org/drawingml/2006/chart">
+            <c:chart xmlns:c="http://schemas.openxmlformats.org/drawingml/2006/chart" r:id="rId2"/>
+          </a:graphicData>
+        </a:graphic>
+      </p:graphicFrame>
+      <p:sp>
+        <p:nvSpPr>
+          <p:cNvPr id="989" name="body"/>
+          <p:cNvSpPr txBox="1"/>
+          <p:nvPr/>
+        </p:nvSpPr>
+        <p:spPr>
+          <a:xfrm>
+            <a:off x="677387" y="4344501"/>
+            <a:ext cx="10855878" cy="501978"/>
+          </a:xfrm>
+          <a:prstGeom prst="rect">
+            <a:avLst/>
+          </a:prstGeom>
+          <a:noFill/>
+        </p:spPr>
+        <p:txBody>
+          <a:bodyPr wrap="square" lIns="76200" rIns="76200" tIns="50800" bIns="50800">
+            <a:spAutoFit/>
+          </a:bodyPr>
+          <a:lstStyle/>
+          <a:p>
+            <a:pPr algn="l">
+              <a:spcAft>
+                <a:spcPts val="300"/>
+              </a:spcAft>
+              <a:defRPr sz="1200">
+                <a:solidFill>
+                  <a:srgbClr val="000000"/>
+                </a:solidFill>
+                <a:latin typeface="Arial"/>
+                <a:ea typeface="Arial"/>
+                <a:cs typeface="Arial"/>
+              </a:defRPr>
+            </a:pPr>
+            <a:r>
+              <a:rPr sz="1200">
+                <a:solidFill>
+                  <a:srgbClr val="000000"/>
+                </a:solidFill>
+                <a:latin typeface="Arial"/>
+                <a:ea typeface="Arial"/>
+                <a:cs typeface="Arial"/>
+              </a:rPr>
+              <a:t>• Отдел маркетинга вручную собирает 42 колоды за квартал</a:t>
+            </a:r>
+          </a:p>
+          <a:p>
+            <a:pPr algn="l">
+              <a:spcAft>
+                <a:spcPts val="300"/>
+              </a:spcAft>
+              <a:defRPr sz="1200">
+                <a:solidFill>
+                  <a:srgbClr val="000000"/>
+                </a:solidFill>
+                <a:latin typeface="Arial"/>
+                <a:ea typeface="Arial"/>
+                <a:cs typeface="Arial"/>
+              </a:defRPr>
+            </a:pPr>
+            <a:r>
+              <a:rPr sz="1200">
+                <a:solidFill>
+                  <a:srgbClr val="000000"/>
+                </a:solidFill>
+                <a:latin typeface="Arial"/>
+                <a:ea typeface="Arial"/>
+                <a:cs typeface="Arial"/>
+              </a:rPr>
+              <a:t>• 74 минуты уходит на правки после ревью дизайнера</a:t>
+            </a:r>
+          </a:p>
+          <a:p>
+            <a:pPr algn="l">
+              <a:spcAft>
+                <a:spcPts val="300"/>
+              </a:spcAft>
+              <a:defRPr sz="1200">
+                <a:solidFill>
+                  <a:srgbClr val="000000"/>
+                </a:solidFill>
+                <a:latin typeface="Arial"/>
+                <a:ea typeface="Arial"/>
+                <a:cs typeface="Arial"/>
+              </a:defRPr>
+            </a:pPr>
+            <a:r>
+              <a:rPr sz="1200">
+                <a:solidFill>
+                  <a:srgbClr val="000000"/>
+                </a:solidFill>
+                <a:latin typeface="Arial"/>
+                <a:ea typeface="Arial"/>
+                <a:cs typeface="Arial"/>
+              </a:rPr>
+              <a:t>• 19 колод нарушают фирменный стиль</a:t>
+            </a:r>
+          </a:p>
+        </p:txBody>
+      </p:sp>
+    </p:spTree>
+  </p:cSld>
+  <p:clrMapOvr>
+    <a:masterClrMapping/>
+  </p:clrMapOvr>
+</p:sld>
+</file>
+
+<file path=ppt/slides/slide58.xml><?xml version="1.0" encoding="utf-8"?>
+<p:sld xmlns:a="http://schemas.openxmlformats.org/drawingml/2006/main" xmlns:p="http://schemas.openxmlformats.org/presentationml/2006/main" xmlns:r="http://schemas.openxmlformats.org/officeDocument/2006/relationships">
+  <p:cSld>
+    <p:bg>
+      <p:bgPr>
+        <a:solidFill>
+          <a:schemeClr val="lt2"/>
+        </a:solidFill>
+      </p:bgPr>
+    </p:bg>
+    <p:spTree>
+      <p:nvGrpSpPr>
+        <p:cNvPr id="1" name=""/>
+        <p:cNvGrpSpPr/>
+        <p:nvPr/>
+      </p:nvGrpSpPr>
+      <p:grpSpPr/>
+      <p:sp>
+        <p:nvSpPr>
+          <p:cNvPr id="2" name="title"/>
+          <p:cNvSpPr txBox="1"/>
+          <p:nvPr/>
+        </p:nvSpPr>
+        <p:spPr>
+          <a:xfrm>
+            <a:off x="677387" y="692177"/>
+            <a:ext cx="10855878" cy="1447800"/>
+          </a:xfrm>
+          <a:prstGeom prst="rect">
+            <a:avLst/>
+          </a:prstGeom>
+          <a:noFill/>
+        </p:spPr>
+        <p:txBody>
+          <a:bodyPr wrap="square" lIns="76200" rIns="76200" tIns="50800" bIns="50800">
+            <a:spAutoFit/>
+          </a:bodyPr>
+          <a:lstStyle/>
+          <a:p>
+            <a:pPr algn="l">
+              <a:spcAft>
+                <a:spcPts val="300"/>
+              </a:spcAft>
+              <a:defRPr sz="4000">
+                <a:solidFill>
+                  <a:srgbClr val="000000"/>
+                </a:solidFill>
+                <a:latin typeface="Arial"/>
+                <a:ea typeface="Arial"/>
+                <a:cs typeface="Arial"/>
+              </a:defRPr>
+            </a:pPr>
+            <a:r>
+              <a:rPr sz="4000">
+                <a:solidFill>
+                  <a:srgbClr val="000000"/>
+                </a:solidFill>
+                <a:latin typeface="Arial"/>
+                <a:ea typeface="Arial"/>
+                <a:cs typeface="Arial"/>
+              </a:rPr>
+              <a:t>Сервис автоматически вёрстит презентации за 4 минуты</a:t>
             </a:r>
           </a:p>
         </p:txBody>
       </p:sp>
       <p:sp>
         <p:nvSpPr>
-          <p:cNvPr id="988" name="Document 987"/>
+          <p:cNvPr id="3" name="Pentagon 2"/>
           <p:cNvSpPr/>
           <p:nvPr/>
         </p:nvSpPr>
         <p:spPr>
           <a:xfrm>
-            <a:off x="1437601" y="2262123"/>
-            <a:ext cx="581269" cy="642455"/>
+            <a:off x="677387" y="2841924"/>
+            <a:ext cx="2066959" cy="1281514"/>
           </a:xfrm>
-          <a:prstGeom prst="flowChartDocument">
+          <a:prstGeom prst="homePlate">
             <a:avLst/>
           </a:prstGeom>
           <a:solidFill>
@@ -9478,39 +7753,13 @@
           </a:fontRef>
         </p:style>
         <p:txBody>
-          <a:bodyPr rtlCol="0" anchor="ctr"/>
-          <a:lstStyle/>
-          <a:p>
-            <a:pPr algn="ctr"/>
-          </a:p>
-        </p:txBody>
-      </p:sp>
-      <p:sp>
-        <p:nvSpPr>
-          <p:cNvPr id="989" name="TextBox 988"/>
-          <p:cNvSpPr txBox="1"/>
-          <p:nvPr/>
-        </p:nvSpPr>
-        <p:spPr>
-          <a:xfrm>
-            <a:off x="677387" y="3049200"/>
-            <a:ext cx="2101697" cy="542332"/>
-          </a:xfrm>
-          <a:prstGeom prst="rect">
-            <a:avLst/>
-          </a:prstGeom>
-          <a:noFill/>
-        </p:spPr>
-        <p:txBody>
-          <a:bodyPr wrap="square">
-            <a:spAutoFit/>
-          </a:bodyPr>
+          <a:bodyPr rtlCol="0" anchor="ctr" wrap="square" lIns="12700" rIns="12700" tIns="12700" bIns="12700"/>
           <a:lstStyle/>
           <a:p>
             <a:pPr algn="ctr">
-              <a:defRPr sz="1200" b="0">
-                <a:solidFill>
-                  <a:srgbClr val="000000"/>
+              <a:defRPr sz="1300" b="0">
+                <a:solidFill>
+                  <a:srgbClr val="FFFFFF"/>
                 </a:solidFill>
                 <a:latin typeface="Arial"/>
                 <a:ea typeface="Arial"/>
@@ -9518,9 +7767,9 @@
               </a:defRPr>
             </a:pPr>
             <a:r>
-              <a:rPr sz="1200" b="0">
-                <a:solidFill>
-                  <a:srgbClr val="000000"/>
+              <a:rPr sz="1300" b="0">
+                <a:solidFill>
+                  <a:srgbClr val="FFFFFF"/>
                 </a:solidFill>
                 <a:latin typeface="Arial"/>
                 <a:ea typeface="Arial"/>
@@ -9533,16 +7782,16 @@
       </p:sp>
       <p:sp>
         <p:nvSpPr>
-          <p:cNvPr id="990" name="Document 989"/>
+          <p:cNvPr id="4" name="Chevron 3"/>
           <p:cNvSpPr/>
           <p:nvPr/>
         </p:nvSpPr>
         <p:spPr>
           <a:xfrm>
-            <a:off x="3626146" y="2262123"/>
-            <a:ext cx="581269" cy="642455"/>
+            <a:off x="2874616" y="2841924"/>
+            <a:ext cx="2066959" cy="1281514"/>
           </a:xfrm>
-          <a:prstGeom prst="flowChartDocument">
+          <a:prstGeom prst="chevron">
             <a:avLst/>
           </a:prstGeom>
           <a:solidFill>
@@ -9567,39 +7816,13 @@
           </a:fontRef>
         </p:style>
         <p:txBody>
-          <a:bodyPr rtlCol="0" anchor="ctr"/>
-          <a:lstStyle/>
-          <a:p>
-            <a:pPr algn="ctr"/>
-          </a:p>
-        </p:txBody>
-      </p:sp>
-      <p:sp>
-        <p:nvSpPr>
-          <p:cNvPr id="991" name="TextBox 990"/>
-          <p:cNvSpPr txBox="1"/>
-          <p:nvPr/>
-        </p:nvSpPr>
-        <p:spPr>
-          <a:xfrm>
-            <a:off x="2865932" y="3049200"/>
-            <a:ext cx="2101697" cy="542332"/>
-          </a:xfrm>
-          <a:prstGeom prst="rect">
-            <a:avLst/>
-          </a:prstGeom>
-          <a:noFill/>
-        </p:spPr>
-        <p:txBody>
-          <a:bodyPr wrap="square">
-            <a:spAutoFit/>
-          </a:bodyPr>
+          <a:bodyPr rtlCol="0" anchor="ctr" wrap="square" lIns="12700" rIns="12700" tIns="12700" bIns="12700"/>
           <a:lstStyle/>
           <a:p>
             <a:pPr algn="ctr">
-              <a:defRPr sz="1200" b="0">
-                <a:solidFill>
-                  <a:srgbClr val="000000"/>
+              <a:defRPr sz="1300" b="0">
+                <a:solidFill>
+                  <a:srgbClr val="FFFFFF"/>
                 </a:solidFill>
                 <a:latin typeface="Arial"/>
                 <a:ea typeface="Arial"/>
@@ -9607,31 +7830,31 @@
               </a:defRPr>
             </a:pPr>
             <a:r>
-              <a:rPr sz="1200" b="0">
-                <a:solidFill>
-                  <a:srgbClr val="000000"/>
+              <a:rPr sz="1300" b="0">
+                <a:solidFill>
+                  <a:srgbClr val="FFFFFF"/>
                 </a:solidFill>
                 <a:latin typeface="Arial"/>
                 <a:ea typeface="Arial"/>
                 <a:cs typeface="Arial"/>
               </a:rPr>
-              <a:t>Материалы</a:t>
+              <a:t>План</a:t>
             </a:r>
           </a:p>
         </p:txBody>
       </p:sp>
       <p:sp>
         <p:nvSpPr>
-          <p:cNvPr id="992" name="Gear 6 991"/>
+          <p:cNvPr id="5" name="Chevron 4"/>
           <p:cNvSpPr/>
           <p:nvPr/>
         </p:nvSpPr>
         <p:spPr>
           <a:xfrm>
-            <a:off x="5753505" y="2231530"/>
-            <a:ext cx="474193" cy="474193"/>
+            <a:off x="5071846" y="2841924"/>
+            <a:ext cx="2066959" cy="1281514"/>
           </a:xfrm>
-          <a:prstGeom prst="gear6">
+          <a:prstGeom prst="chevron">
             <a:avLst/>
           </a:prstGeom>
           <a:solidFill>
@@ -9656,25 +7879,45 @@
           </a:fontRef>
         </p:style>
         <p:txBody>
-          <a:bodyPr rtlCol="0" anchor="ctr"/>
+          <a:bodyPr rtlCol="0" anchor="ctr" wrap="square" lIns="12700" rIns="12700" tIns="12700" bIns="12700"/>
           <a:lstStyle/>
           <a:p>
-            <a:pPr algn="ctr"/>
+            <a:pPr algn="ctr">
+              <a:defRPr sz="1165" b="0">
+                <a:solidFill>
+                  <a:srgbClr val="FFFFFF"/>
+                </a:solidFill>
+                <a:latin typeface="Arial"/>
+                <a:ea typeface="Arial"/>
+                <a:cs typeface="Arial"/>
+              </a:defRPr>
+            </a:pPr>
+            <a:r>
+              <a:rPr sz="1165" b="0">
+                <a:solidFill>
+                  <a:srgbClr val="FFFFFF"/>
+                </a:solidFill>
+                <a:latin typeface="Arial"/>
+                <a:ea typeface="Arial"/>
+                <a:cs typeface="Arial"/>
+              </a:rPr>
+              <a:t>Вёрстка</a:t>
+            </a:r>
           </a:p>
         </p:txBody>
       </p:sp>
       <p:sp>
         <p:nvSpPr>
-          <p:cNvPr id="993" name="Gear 6 992"/>
+          <p:cNvPr id="6" name="Chevron 5"/>
           <p:cNvSpPr/>
           <p:nvPr/>
         </p:nvSpPr>
         <p:spPr>
           <a:xfrm>
-            <a:off x="6074732" y="2522164"/>
-            <a:ext cx="382413" cy="382413"/>
+            <a:off x="7269076" y="2841924"/>
+            <a:ext cx="2066959" cy="1281514"/>
           </a:xfrm>
-          <a:prstGeom prst="gear6">
+          <a:prstGeom prst="chevron">
             <a:avLst/>
           </a:prstGeom>
           <a:solidFill>
@@ -9699,39 +7942,13 @@
           </a:fontRef>
         </p:style>
         <p:txBody>
-          <a:bodyPr rtlCol="0" anchor="ctr"/>
-          <a:lstStyle/>
-          <a:p>
-            <a:pPr algn="ctr"/>
-          </a:p>
-        </p:txBody>
-      </p:sp>
-      <p:sp>
-        <p:nvSpPr>
-          <p:cNvPr id="994" name="TextBox 993"/>
-          <p:cNvSpPr txBox="1"/>
-          <p:nvPr/>
-        </p:nvSpPr>
-        <p:spPr>
-          <a:xfrm>
-            <a:off x="5054477" y="3049200"/>
-            <a:ext cx="2101697" cy="542332"/>
-          </a:xfrm>
-          <a:prstGeom prst="rect">
-            <a:avLst/>
-          </a:prstGeom>
-          <a:noFill/>
-        </p:spPr>
-        <p:txBody>
-          <a:bodyPr wrap="square">
-            <a:spAutoFit/>
-          </a:bodyPr>
+          <a:bodyPr rtlCol="0" anchor="ctr" wrap="square" lIns="12700" rIns="12700" tIns="12700" bIns="12700"/>
           <a:lstStyle/>
           <a:p>
             <a:pPr algn="ctr">
-              <a:defRPr sz="1200" b="0">
-                <a:solidFill>
-                  <a:srgbClr val="000000"/>
+              <a:defRPr sz="1300" b="0">
+                <a:solidFill>
+                  <a:srgbClr val="FFFFFF"/>
                 </a:solidFill>
                 <a:latin typeface="Arial"/>
                 <a:ea typeface="Arial"/>
@@ -9739,31 +7956,31 @@
               </a:defRPr>
             </a:pPr>
             <a:r>
-              <a:rPr sz="1200" b="0">
-                <a:solidFill>
-                  <a:srgbClr val="000000"/>
+              <a:rPr sz="1300" b="0">
+                <a:solidFill>
+                  <a:srgbClr val="FFFFFF"/>
                 </a:solidFill>
                 <a:latin typeface="Arial"/>
                 <a:ea typeface="Arial"/>
                 <a:cs typeface="Arial"/>
               </a:rPr>
-              <a:t>Генерация</a:t>
+              <a:t>Аудит</a:t>
             </a:r>
           </a:p>
         </p:txBody>
       </p:sp>
       <p:sp>
         <p:nvSpPr>
-          <p:cNvPr id="995" name="Document 994"/>
+          <p:cNvPr id="7" name="Chevron 6"/>
           <p:cNvSpPr/>
           <p:nvPr/>
         </p:nvSpPr>
         <p:spPr>
           <a:xfrm>
-            <a:off x="8003236" y="2262123"/>
-            <a:ext cx="581269" cy="642455"/>
+            <a:off x="9466305" y="2841924"/>
+            <a:ext cx="2066959" cy="1281514"/>
           </a:xfrm>
-          <a:prstGeom prst="flowChartDocument">
+          <a:prstGeom prst="chevron">
             <a:avLst/>
           </a:prstGeom>
           <a:solidFill>
@@ -9788,39 +8005,13 @@
           </a:fontRef>
         </p:style>
         <p:txBody>
-          <a:bodyPr rtlCol="0" anchor="ctr"/>
-          <a:lstStyle/>
-          <a:p>
-            <a:pPr algn="ctr"/>
-          </a:p>
-        </p:txBody>
-      </p:sp>
-      <p:sp>
-        <p:nvSpPr>
-          <p:cNvPr id="996" name="TextBox 995"/>
-          <p:cNvSpPr txBox="1"/>
-          <p:nvPr/>
-        </p:nvSpPr>
-        <p:spPr>
-          <a:xfrm>
-            <a:off x="7243022" y="3049200"/>
-            <a:ext cx="2101697" cy="542332"/>
-          </a:xfrm>
-          <a:prstGeom prst="rect">
-            <a:avLst/>
-          </a:prstGeom>
-          <a:noFill/>
-        </p:spPr>
-        <p:txBody>
-          <a:bodyPr wrap="square">
-            <a:spAutoFit/>
-          </a:bodyPr>
+          <a:bodyPr rtlCol="0" anchor="ctr" wrap="square" lIns="12700" rIns="12700" tIns="12700" bIns="12700"/>
           <a:lstStyle/>
           <a:p>
             <a:pPr algn="ctr">
-              <a:defRPr sz="1200" b="0">
-                <a:solidFill>
-                  <a:srgbClr val="000000"/>
+              <a:defRPr sz="1165" b="0">
+                <a:solidFill>
+                  <a:srgbClr val="FFFFFF"/>
                 </a:solidFill>
                 <a:latin typeface="Arial"/>
                 <a:ea typeface="Arial"/>
@@ -9828,9 +8019,9 @@
               </a:defRPr>
             </a:pPr>
             <a:r>
-              <a:rPr sz="1200" b="0">
-                <a:solidFill>
-                  <a:srgbClr val="000000"/>
+              <a:rPr sz="1165" b="0">
+                <a:solidFill>
+                  <a:srgbClr val="FFFFFF"/>
                 </a:solidFill>
                 <a:latin typeface="Arial"/>
                 <a:ea typeface="Arial"/>
@@ -9843,57 +8034,14 @@
       </p:sp>
       <p:sp>
         <p:nvSpPr>
-          <p:cNvPr id="997" name="Oval 996"/>
-          <p:cNvSpPr/>
-          <p:nvPr/>
-        </p:nvSpPr>
-        <p:spPr>
-          <a:xfrm>
-            <a:off x="10176484" y="2277419"/>
-            <a:ext cx="611862" cy="611862"/>
-          </a:xfrm>
-          <a:prstGeom prst="ellipse">
-            <a:avLst/>
-          </a:prstGeom>
-          <a:solidFill>
-            <a:srgbClr val="0077FF"/>
-          </a:solidFill>
-          <a:ln>
-            <a:noFill/>
-          </a:ln>
-        </p:spPr>
-        <p:style>
-          <a:lnRef idx="1">
-            <a:schemeClr val="accent1"/>
-          </a:lnRef>
-          <a:fillRef idx="3">
-            <a:schemeClr val="accent1"/>
-          </a:fillRef>
-          <a:effectRef idx="2">
-            <a:schemeClr val="accent1"/>
-          </a:effectRef>
-          <a:fontRef idx="minor">
-            <a:schemeClr val="lt1"/>
-          </a:fontRef>
-        </p:style>
-        <p:txBody>
-          <a:bodyPr rtlCol="0" anchor="ctr"/>
-          <a:lstStyle/>
-          <a:p>
-            <a:pPr algn="ctr"/>
-          </a:p>
-        </p:txBody>
-      </p:sp>
-      <p:sp>
-        <p:nvSpPr>
-          <p:cNvPr id="998" name="TextBox 997"/>
+          <p:cNvPr id="8" name="body"/>
           <p:cNvSpPr txBox="1"/>
           <p:nvPr/>
         </p:nvSpPr>
         <p:spPr>
           <a:xfrm>
-            <a:off x="9431567" y="3049200"/>
-            <a:ext cx="2101697" cy="542332"/>
+            <a:off x="677387" y="4859677"/>
+            <a:ext cx="10855878" cy="1341120"/>
           </a:xfrm>
           <a:prstGeom prst="rect">
             <a:avLst/>
@@ -9901,13 +8049,16 @@
           <a:noFill/>
         </p:spPr>
         <p:txBody>
-          <a:bodyPr wrap="square">
+          <a:bodyPr wrap="square" lIns="76200" rIns="76200" tIns="50800" bIns="50800">
             <a:spAutoFit/>
           </a:bodyPr>
           <a:lstStyle/>
           <a:p>
-            <a:pPr algn="ctr">
-              <a:defRPr sz="1200" b="0">
+            <a:pPr algn="l">
+              <a:spcAft>
+                <a:spcPts val="300"/>
+              </a:spcAft>
+              <a:defRPr sz="1800">
                 <a:solidFill>
                   <a:srgbClr val="000000"/>
                 </a:solidFill>
@@ -9917,7 +8068,7 @@
               </a:defRPr>
             </a:pPr>
             <a:r>
-              <a:rPr sz="1200" b="0">
+              <a:rPr sz="1800">
                 <a:solidFill>
                   <a:srgbClr val="000000"/>
                 </a:solidFill>
@@ -9925,7 +8076,252 @@
                 <a:ea typeface="Arial"/>
                 <a:cs typeface="Arial"/>
               </a:rPr>
-              <a:t>Редактируемость</a:t>
+              <a:t>• Принимает шаблон pptx и материалы</a:t>
+            </a:r>
+          </a:p>
+          <a:p>
+            <a:pPr algn="l">
+              <a:spcAft>
+                <a:spcPts val="300"/>
+              </a:spcAft>
+              <a:defRPr sz="1800">
+                <a:solidFill>
+                  <a:srgbClr val="000000"/>
+                </a:solidFill>
+                <a:latin typeface="Arial"/>
+                <a:ea typeface="Arial"/>
+                <a:cs typeface="Arial"/>
+              </a:defRPr>
+            </a:pPr>
+            <a:r>
+              <a:rPr sz="1800">
+                <a:solidFill>
+                  <a:srgbClr val="000000"/>
+                </a:solidFill>
+                <a:latin typeface="Arial"/>
+                <a:ea typeface="Arial"/>
+                <a:cs typeface="Arial"/>
+              </a:rPr>
+              <a:t>• Автоматически формирует план колоды</a:t>
+            </a:r>
+          </a:p>
+          <a:p>
+            <a:pPr algn="l">
+              <a:spcAft>
+                <a:spcPts val="300"/>
+              </a:spcAft>
+              <a:defRPr sz="1800">
+                <a:solidFill>
+                  <a:srgbClr val="000000"/>
+                </a:solidFill>
+                <a:latin typeface="Arial"/>
+                <a:ea typeface="Arial"/>
+                <a:cs typeface="Arial"/>
+              </a:defRPr>
+            </a:pPr>
+            <a:r>
+              <a:rPr sz="1800">
+                <a:solidFill>
+                  <a:srgbClr val="000000"/>
+                </a:solidFill>
+                <a:latin typeface="Arial"/>
+                <a:ea typeface="Arial"/>
+                <a:cs typeface="Arial"/>
+              </a:rPr>
+              <a:t>• Экспорт в pptx, pdf, html</a:t>
+            </a:r>
+          </a:p>
+        </p:txBody>
+      </p:sp>
+    </p:spTree>
+  </p:cSld>
+  <p:clrMapOvr>
+    <a:masterClrMapping/>
+  </p:clrMapOvr>
+</p:sld>
+</file>
+
+<file path=ppt/slides/slide59.xml><?xml version="1.0" encoding="utf-8"?>
+<p:sld xmlns:a="http://schemas.openxmlformats.org/drawingml/2006/main" xmlns:p="http://schemas.openxmlformats.org/presentationml/2006/main" xmlns:r="http://schemas.openxmlformats.org/officeDocument/2006/relationships">
+  <p:cSld>
+    <p:bg>
+      <p:bgPr>
+        <a:solidFill>
+          <a:schemeClr val="lt2"/>
+        </a:solidFill>
+      </p:bgPr>
+    </p:bg>
+    <p:spTree>
+      <p:nvGrpSpPr>
+        <p:cNvPr id="1" name=""/>
+        <p:cNvGrpSpPr/>
+        <p:nvPr/>
+      </p:nvGrpSpPr>
+      <p:grpSpPr/>
+      <p:sp>
+        <p:nvSpPr>
+          <p:cNvPr id="2" name="title"/>
+          <p:cNvSpPr txBox="1"/>
+          <p:nvPr/>
+        </p:nvSpPr>
+        <p:spPr>
+          <a:xfrm>
+            <a:off x="677387" y="692177"/>
+            <a:ext cx="10855878" cy="1447800"/>
+          </a:xfrm>
+          <a:prstGeom prst="rect">
+            <a:avLst/>
+          </a:prstGeom>
+          <a:noFill/>
+        </p:spPr>
+        <p:txBody>
+          <a:bodyPr wrap="square" lIns="76200" rIns="76200" tIns="50800" bIns="50800">
+            <a:spAutoFit/>
+          </a:bodyPr>
+          <a:lstStyle/>
+          <a:p>
+            <a:pPr algn="l">
+              <a:spcAft>
+                <a:spcPts val="300"/>
+              </a:spcAft>
+              <a:defRPr sz="4000">
+                <a:solidFill>
+                  <a:srgbClr val="000000"/>
+                </a:solidFill>
+                <a:latin typeface="Arial"/>
+                <a:ea typeface="Arial"/>
+                <a:cs typeface="Arial"/>
+              </a:defRPr>
+            </a:pPr>
+            <a:r>
+              <a:rPr sz="4000">
+                <a:solidFill>
+                  <a:srgbClr val="000000"/>
+                </a:solidFill>
+                <a:latin typeface="Arial"/>
+                <a:ea typeface="Arial"/>
+                <a:cs typeface="Arial"/>
+              </a:rPr>
+              <a:t>Пилот сократил время сборки до 4 минут</a:t>
+            </a:r>
+          </a:p>
+        </p:txBody>
+      </p:sp>
+      <p:graphicFrame>
+        <p:nvGraphicFramePr>
+          <p:cNvPr id="3" name="Chart 2"/>
+          <p:cNvGraphicFramePr>
+            <a:graphicFrameLocks noGrp="1"/>
+          </p:cNvGraphicFramePr>
+          <p:nvPr/>
+        </p:nvGraphicFramePr>
+        <p:xfrm>
+          <a:off x="677387" y="2277137"/>
+          <a:ext cx="10855878" cy="2411089"/>
+        </p:xfrm>
+        <a:graphic>
+          <a:graphicData uri="http://schemas.openxmlformats.org/drawingml/2006/chart">
+            <c:chart xmlns:c="http://schemas.openxmlformats.org/drawingml/2006/chart" r:id="rId2"/>
+          </a:graphicData>
+        </a:graphic>
+      </p:graphicFrame>
+      <p:sp>
+        <p:nvSpPr>
+          <p:cNvPr id="4" name="body"/>
+          <p:cNvSpPr txBox="1"/>
+          <p:nvPr/>
+        </p:nvSpPr>
+        <p:spPr>
+          <a:xfrm>
+            <a:off x="677387" y="4859677"/>
+            <a:ext cx="10855878" cy="1341120"/>
+          </a:xfrm>
+          <a:prstGeom prst="rect">
+            <a:avLst/>
+          </a:prstGeom>
+          <a:noFill/>
+        </p:spPr>
+        <p:txBody>
+          <a:bodyPr wrap="square" lIns="76200" rIns="76200" tIns="50800" bIns="50800">
+            <a:spAutoFit/>
+          </a:bodyPr>
+          <a:lstStyle/>
+          <a:p>
+            <a:pPr algn="l">
+              <a:spcAft>
+                <a:spcPts val="300"/>
+              </a:spcAft>
+              <a:defRPr sz="1600">
+                <a:solidFill>
+                  <a:srgbClr val="000000"/>
+                </a:solidFill>
+                <a:latin typeface="Arial"/>
+                <a:ea typeface="Arial"/>
+                <a:cs typeface="Arial"/>
+              </a:defRPr>
+            </a:pPr>
+            <a:r>
+              <a:rPr sz="1600">
+                <a:solidFill>
+                  <a:srgbClr val="000000"/>
+                </a:solidFill>
+                <a:latin typeface="Arial"/>
+                <a:ea typeface="Arial"/>
+                <a:cs typeface="Arial"/>
+              </a:rPr>
+              <a:t>• Среднее время 4 минуты вместо 186</a:t>
+            </a:r>
+          </a:p>
+          <a:p>
+            <a:pPr algn="l">
+              <a:spcAft>
+                <a:spcPts val="300"/>
+              </a:spcAft>
+              <a:defRPr sz="1600">
+                <a:solidFill>
+                  <a:srgbClr val="000000"/>
+                </a:solidFill>
+                <a:latin typeface="Arial"/>
+                <a:ea typeface="Arial"/>
+                <a:cs typeface="Arial"/>
+              </a:defRPr>
+            </a:pPr>
+            <a:r>
+              <a:rPr sz="1600">
+                <a:solidFill>
+                  <a:srgbClr val="000000"/>
+                </a:solidFill>
+                <a:latin typeface="Arial"/>
+                <a:ea typeface="Arial"/>
+                <a:cs typeface="Arial"/>
+              </a:rPr>
+              <a:t>• Срок до первой версии сократился с 6 дней до 1</a:t>
+            </a:r>
+          </a:p>
+          <a:p>
+            <a:pPr algn="l">
+              <a:spcAft>
+                <a:spcPts val="300"/>
+              </a:spcAft>
+              <a:defRPr sz="1600">
+                <a:solidFill>
+                  <a:srgbClr val="000000"/>
+                </a:solidFill>
+                <a:latin typeface="Arial"/>
+                <a:ea typeface="Arial"/>
+                <a:cs typeface="Arial"/>
+              </a:defRPr>
+            </a:pPr>
+            <a:r>
+              <a:rPr sz="1600">
+                <a:solidFill>
+                  <a:srgbClr val="000000"/>
+                </a:solidFill>
+                <a:latin typeface="Arial"/>
+                <a:ea typeface="Arial"/>
+                <a:cs typeface="Arial"/>
+              </a:rPr>
+              <a:t>• Нарушений стиля 2 из 68</a:t>
             </a:r>
           </a:p>
         </p:txBody>
@@ -9941,6 +8337,13 @@
 <file path=ppt/slides/slide60.xml><?xml version="1.0" encoding="utf-8"?>
 <p:sld xmlns:a="http://schemas.openxmlformats.org/drawingml/2006/main" xmlns:p="http://schemas.openxmlformats.org/presentationml/2006/main" xmlns:r="http://schemas.openxmlformats.org/officeDocument/2006/relationships">
   <p:cSld>
+    <p:bg>
+      <p:bgPr>
+        <a:solidFill>
+          <a:schemeClr val="lt2"/>
+        </a:solidFill>
+      </p:bgPr>
+    </p:bg>
     <p:spTree>
       <p:nvGrpSpPr>
         <p:cNvPr id="1" name=""/>
@@ -9950,66 +8353,7 @@
       <p:grpSpPr/>
       <p:sp>
         <p:nvSpPr>
-          <p:cNvPr id="443" name="Google Shape;443;p50"/>
-          <p:cNvSpPr/>
-          <p:nvPr/>
-        </p:nvSpPr>
-        <p:spPr>
-          <a:xfrm>
-            <a:off x="658813" y="1794065"/>
-            <a:ext cx="6130294" cy="4406709"/>
-          </a:xfrm>
-          <a:prstGeom prst="roundRect">
-            <a:avLst>
-              <a:gd fmla="val 4444" name="adj"/>
-            </a:avLst>
-          </a:prstGeom>
-          <a:solidFill>
-            <a:schemeClr val="lt2"/>
-          </a:solidFill>
-          <a:ln cap="flat" cmpd="sng" w="19050">
-            <a:solidFill>
-              <a:schemeClr val="dk2"/>
-            </a:solidFill>
-            <a:prstDash val="solid"/>
-            <a:miter lim="8000"/>
-            <a:headEnd len="sm" w="sm" type="none"/>
-            <a:tailEnd len="sm" w="sm" type="none"/>
-          </a:ln>
-        </p:spPr>
-        <p:txBody>
-          <a:bodyPr anchorCtr="0" anchor="ctr" bIns="45700" lIns="91425" spcFirstLastPara="1" rIns="91425" wrap="square" tIns="45700">
-            <a:noAutofit/>
-          </a:bodyPr>
-          <a:lstStyle/>
-          <a:p>
-            <a:pPr indent="0" lvl="0" marL="0" marR="0" rtl="0" algn="ctr">
-              <a:spcBef>
-                <a:spcPts val="0"/>
-              </a:spcBef>
-              <a:spcAft>
-                <a:spcPts val="0"/>
-              </a:spcAft>
-              <a:buNone/>
-            </a:pPr>
-            <a:r>
-              <a:t/>
-            </a:r>
-            <a:endParaRPr b="0" i="0" sz="1800" u="none" cap="none" strike="noStrike">
-              <a:solidFill>
-                <a:schemeClr val="lt1"/>
-              </a:solidFill>
-              <a:latin typeface="Arial"/>
-              <a:ea typeface="Arial"/>
-              <a:cs typeface="Arial"/>
-              <a:sym typeface="Arial"/>
-            </a:endParaRPr>
-          </a:p>
-        </p:txBody>
-      </p:sp>
-      <p:sp>
-        <p:nvSpPr>
-          <p:cNvPr id="449" name="Google Shape;449;p50"/>
+          <p:cNvPr id="795" name="Google Shape;795;p60"/>
           <p:cNvSpPr txBox="1"/>
           <p:nvPr/>
         </p:nvSpPr>
@@ -10052,7 +8396,7 @@
             <a:r>
               <a:t/>
             </a:r>
-            <a:endParaRPr b="0" i="0" sz="1600" u="none" cap="none" strike="noStrike">
+            <a:endParaRPr sz="1600">
               <a:solidFill>
                 <a:schemeClr val="dk1"/>
               </a:solidFill>
@@ -10066,14 +8410,14 @@
       </p:sp>
       <p:sp>
         <p:nvSpPr>
-          <p:cNvPr id="450" name="title"/>
+          <p:cNvPr id="796" name="title"/>
           <p:cNvSpPr txBox="1"/>
           <p:nvPr/>
         </p:nvSpPr>
         <p:spPr>
           <a:xfrm>
             <a:off x="677387" y="692177"/>
-            <a:ext cx="10855878" cy="822960"/>
+            <a:ext cx="10855878" cy="1447800"/>
           </a:xfrm>
           <a:prstGeom prst="rect">
             <a:avLst/>
@@ -10108,21 +8452,21 @@
                 <a:ea typeface="Arial"/>
                 <a:cs typeface="Arial"/>
               </a:rPr>
-              <a:t>Сокращение времени сборки</a:t>
+              <a:t>Для запуска требуется 2 vCPU, 2 ГБ RAM и 1 400 руб. за инференс</a:t>
             </a:r>
           </a:p>
         </p:txBody>
       </p:sp>
       <p:sp>
         <p:nvSpPr>
-          <p:cNvPr id="451" name="lead"/>
+          <p:cNvPr id="797" name="lead"/>
           <p:cNvSpPr txBox="1"/>
           <p:nvPr/>
         </p:nvSpPr>
         <p:spPr>
           <a:xfrm>
-            <a:off x="1264859" y="2200937"/>
-            <a:ext cx="4699772" cy="1248471"/>
+            <a:off x="677387" y="2825777"/>
+            <a:ext cx="10855878" cy="1050876"/>
           </a:xfrm>
           <a:prstGeom prst="rect">
             <a:avLst/>
@@ -10139,7 +8483,7 @@
               <a:spcAft>
                 <a:spcPts val="300"/>
               </a:spcAft>
-              <a:defRPr sz="2400" b="1">
+              <a:defRPr sz="2400">
                 <a:solidFill>
                   <a:srgbClr val="000000"/>
                 </a:solidFill>
@@ -10149,7 +8493,7 @@
               </a:defRPr>
             </a:pPr>
             <a:r>
-              <a:rPr sz="2400" b="1">
+              <a:rPr sz="2400">
                 <a:solidFill>
                   <a:srgbClr val="000000"/>
                 </a:solidFill>
@@ -10157,21 +8501,21 @@
                 <a:ea typeface="Arial"/>
                 <a:cs typeface="Arial"/>
               </a:rPr>
-              <a:t>Средняя сборка колоды 12 слайдов 4 минуты вместо 186</a:t>
+              <a:t>Сервис работает на одной машине</a:t>
             </a:r>
           </a:p>
         </p:txBody>
       </p:sp>
       <p:sp>
         <p:nvSpPr>
-          <p:cNvPr id="452" name="body"/>
+          <p:cNvPr id="798" name="body"/>
           <p:cNvSpPr txBox="1"/>
           <p:nvPr/>
         </p:nvSpPr>
         <p:spPr>
           <a:xfrm>
-            <a:off x="1264859" y="3699103"/>
-            <a:ext cx="4699772" cy="2663405"/>
+            <a:off x="677387" y="4086829"/>
+            <a:ext cx="10855878" cy="2241869"/>
           </a:xfrm>
           <a:prstGeom prst="rect">
             <a:avLst/>
@@ -10188,7 +8532,7 @@
               <a:spcAft>
                 <a:spcPts val="300"/>
               </a:spcAft>
-              <a:defRPr sz="4000" b="1">
+              <a:defRPr sz="2400">
                 <a:solidFill>
                   <a:srgbClr val="000000"/>
                 </a:solidFill>
@@ -10198,7 +8542,7 @@
               </a:defRPr>
             </a:pPr>
             <a:r>
-              <a:rPr sz="4000" b="1">
+              <a:rPr sz="2400">
                 <a:solidFill>
                   <a:srgbClr val="000000"/>
                 </a:solidFill>
@@ -10206,7 +8550,33 @@
                 <a:ea typeface="Arial"/>
                 <a:cs typeface="Arial"/>
               </a:rPr>
-              <a:t>Время до первой версии сократилось с 6 дней до 1</a:t>
+              <a:t>• Модель gpt-oss-20b подключается по OpenAI</a:t>
+            </a:r>
+          </a:p>
+          <a:p>
+            <a:pPr algn="l">
+              <a:spcAft>
+                <a:spcPts val="300"/>
+              </a:spcAft>
+              <a:defRPr sz="2400">
+                <a:solidFill>
+                  <a:srgbClr val="000000"/>
+                </a:solidFill>
+                <a:latin typeface="Arial"/>
+                <a:ea typeface="Arial"/>
+                <a:cs typeface="Arial"/>
+              </a:defRPr>
+            </a:pPr>
+            <a:r>
+              <a:rPr sz="2400">
+                <a:solidFill>
+                  <a:srgbClr val="000000"/>
+                </a:solidFill>
+                <a:latin typeface="Arial"/>
+                <a:ea typeface="Arial"/>
+                <a:cs typeface="Arial"/>
+              </a:rPr>
+              <a:t>• План запуска: Q3 2026 подключить 4 команды</a:t>
             </a:r>
           </a:p>
         </p:txBody>
@@ -10238,14 +8608,71 @@
       <p:grpSpPr/>
       <p:sp>
         <p:nvSpPr>
-          <p:cNvPr id="2" name="title"/>
+          <p:cNvPr id="764" name="Google Shape;764;p58"/>
+          <p:cNvSpPr txBox="1"/>
+          <p:nvPr/>
+        </p:nvSpPr>
+        <p:spPr>
+          <a:xfrm>
+            <a:off x="18692059" y="4674436"/>
+            <a:ext cx="4304330" cy="678198"/>
+          </a:xfrm>
+          <a:prstGeom prst="rect">
+            <a:avLst/>
+          </a:prstGeom>
+          <a:noFill/>
+          <a:ln>
+            <a:noFill/>
+          </a:ln>
+        </p:spPr>
+        <p:txBody>
+          <a:bodyPr anchorCtr="0" anchor="t" bIns="45700" lIns="91425" spcFirstLastPara="1" rIns="91425" wrap="square" tIns="45700">
+            <a:noAutofit/>
+          </a:bodyPr>
+          <a:lstStyle/>
+          <a:p>
+            <a:pPr indent="0" lvl="0" marL="0" marR="0" rtl="0" algn="l">
+              <a:lnSpc>
+                <a:spcPct val="110000"/>
+              </a:lnSpc>
+              <a:spcBef>
+                <a:spcPts val="0"/>
+              </a:spcBef>
+              <a:spcAft>
+                <a:spcPts val="0"/>
+              </a:spcAft>
+              <a:buClr>
+                <a:schemeClr val="dk1"/>
+              </a:buClr>
+              <a:buSzPts val="1600"/>
+              <a:buFont typeface="Arial"/>
+              <a:buNone/>
+            </a:pPr>
+            <a:r>
+              <a:t/>
+            </a:r>
+            <a:endParaRPr sz="1600">
+              <a:solidFill>
+                <a:schemeClr val="dk1"/>
+              </a:solidFill>
+              <a:latin typeface="Arial"/>
+              <a:ea typeface="Arial"/>
+              <a:cs typeface="Arial"/>
+              <a:sym typeface="Arial"/>
+            </a:endParaRPr>
+          </a:p>
+        </p:txBody>
+      </p:sp>
+      <p:sp>
+        <p:nvSpPr>
+          <p:cNvPr id="765" name="title"/>
           <p:cNvSpPr txBox="1"/>
           <p:nvPr/>
         </p:nvSpPr>
         <p:spPr>
           <a:xfrm>
             <a:off x="677387" y="692177"/>
-            <a:ext cx="10855878" cy="822960"/>
+            <a:ext cx="10855878" cy="1447800"/>
           </a:xfrm>
           <a:prstGeom prst="rect">
             <a:avLst/>
@@ -10280,21 +8707,21 @@
                 <a:ea typeface="Arial"/>
                 <a:cs typeface="Arial"/>
               </a:rPr>
-              <a:t>Улучшение качества и стиля</a:t>
+              <a:t>Пилот собрал 68 презентаций за 6 недель</a:t>
             </a:r>
           </a:p>
         </p:txBody>
       </p:sp>
       <p:sp>
         <p:nvSpPr>
-          <p:cNvPr id="3" name="lead"/>
+          <p:cNvPr id="766" name="lead"/>
           <p:cNvSpPr txBox="1"/>
           <p:nvPr/>
         </p:nvSpPr>
         <p:spPr>
           <a:xfrm>
-            <a:off x="1762975" y="2200937"/>
-            <a:ext cx="8684702" cy="1199957"/>
+            <a:off x="677387" y="2825777"/>
+            <a:ext cx="10855878" cy="1050876"/>
           </a:xfrm>
           <a:prstGeom prst="rect">
             <a:avLst/>
@@ -10329,21 +8756,21 @@
                 <a:ea typeface="Arial"/>
                 <a:cs typeface="Arial"/>
               </a:rPr>
-              <a:t>Нарушений фирменного стиля в пилоте 2 из 68, исправлены автоматически</a:t>
+              <a:t>Дизайнеры закрыли 38 запросов вместо 11</a:t>
             </a:r>
           </a:p>
         </p:txBody>
       </p:sp>
       <p:sp>
         <p:nvSpPr>
-          <p:cNvPr id="4" name="body"/>
+          <p:cNvPr id="767" name="body"/>
           <p:cNvSpPr txBox="1"/>
           <p:nvPr/>
         </p:nvSpPr>
         <p:spPr>
           <a:xfrm>
-            <a:off x="1762975" y="3640887"/>
-            <a:ext cx="8684702" cy="2559910"/>
+            <a:off x="677387" y="4086829"/>
+            <a:ext cx="10855878" cy="2241869"/>
           </a:xfrm>
           <a:prstGeom prst="rect">
             <a:avLst/>
@@ -10378,7 +8805,33 @@
                 <a:ea typeface="Arial"/>
                 <a:cs typeface="Arial"/>
               </a:rPr>
-              <a:t>Дизайнеры закрыли 38 запросов вместо 11 за 6 недель</a:t>
+              <a:t>• Рутина вёрстки ушла в сервис</a:t>
+            </a:r>
+          </a:p>
+          <a:p>
+            <a:pPr algn="l">
+              <a:spcAft>
+                <a:spcPts val="300"/>
+              </a:spcAft>
+              <a:defRPr sz="2400">
+                <a:solidFill>
+                  <a:srgbClr val="000000"/>
+                </a:solidFill>
+                <a:latin typeface="Arial"/>
+                <a:ea typeface="Arial"/>
+                <a:cs typeface="Arial"/>
+              </a:defRPr>
+            </a:pPr>
+            <a:r>
+              <a:rPr sz="2400">
+                <a:solidFill>
+                  <a:srgbClr val="000000"/>
+                </a:solidFill>
+                <a:latin typeface="Arial"/>
+                <a:ea typeface="Arial"/>
+                <a:cs typeface="Arial"/>
+              </a:rPr>
+              <a:t>• Нагрузка выше 20 задач требует внешней очереди</a:t>
             </a:r>
           </a:p>
         </p:txBody>
@@ -10410,972 +8863,6 @@
       <p:grpSpPr/>
       <p:sp>
         <p:nvSpPr>
-          <p:cNvPr id="2" name="title"/>
-          <p:cNvSpPr txBox="1"/>
-          <p:nvPr/>
-        </p:nvSpPr>
-        <p:spPr>
-          <a:xfrm>
-            <a:off x="677387" y="692177"/>
-            <a:ext cx="10855878" cy="822960"/>
-          </a:xfrm>
-          <a:prstGeom prst="rect">
-            <a:avLst/>
-          </a:prstGeom>
-          <a:noFill/>
-        </p:spPr>
-        <p:txBody>
-          <a:bodyPr wrap="square" lIns="76200" rIns="76200" tIns="50800" bIns="50800">
-            <a:spAutoFit/>
-          </a:bodyPr>
-          <a:lstStyle/>
-          <a:p>
-            <a:pPr algn="l">
-              <a:spcAft>
-                <a:spcPts val="300"/>
-              </a:spcAft>
-              <a:defRPr sz="4000">
-                <a:solidFill>
-                  <a:srgbClr val="000000"/>
-                </a:solidFill>
-                <a:latin typeface="Arial"/>
-                <a:ea typeface="Arial"/>
-                <a:cs typeface="Arial"/>
-              </a:defRPr>
-            </a:pPr>
-            <a:r>
-              <a:rPr sz="4000">
-                <a:solidFill>
-                  <a:srgbClr val="000000"/>
-                </a:solidFill>
-                <a:latin typeface="Arial"/>
-                <a:ea typeface="Arial"/>
-                <a:cs typeface="Arial"/>
-              </a:rPr>
-              <a:t>Ресурсы и сроки запуска</a:t>
-            </a:r>
-          </a:p>
-        </p:txBody>
-      </p:sp>
-      <p:sp>
-        <p:nvSpPr>
-          <p:cNvPr id="3" name="Rectangle 2"/>
-          <p:cNvSpPr/>
-          <p:nvPr/>
-        </p:nvSpPr>
-        <p:spPr>
-          <a:xfrm>
-            <a:off x="677387" y="3809896"/>
-            <a:ext cx="10855878" cy="132827"/>
-          </a:xfrm>
-          <a:prstGeom prst="rect">
-            <a:avLst/>
-          </a:prstGeom>
-          <a:solidFill>
-            <a:srgbClr val="0077FF"/>
-          </a:solidFill>
-          <a:ln>
-            <a:noFill/>
-          </a:ln>
-        </p:spPr>
-        <p:style>
-          <a:lnRef idx="1">
-            <a:schemeClr val="accent1"/>
-          </a:lnRef>
-          <a:fillRef idx="3">
-            <a:schemeClr val="accent1"/>
-          </a:fillRef>
-          <a:effectRef idx="2">
-            <a:schemeClr val="accent1"/>
-          </a:effectRef>
-          <a:fontRef idx="minor">
-            <a:schemeClr val="lt1"/>
-          </a:fontRef>
-        </p:style>
-        <p:txBody>
-          <a:bodyPr rtlCol="0" anchor="ctr"/>
-          <a:lstStyle/>
-          <a:p>
-            <a:pPr algn="ctr"/>
-          </a:p>
-        </p:txBody>
-      </p:sp>
-      <p:sp>
-        <p:nvSpPr>
-          <p:cNvPr id="4" name="Oval 3"/>
-          <p:cNvSpPr/>
-          <p:nvPr/>
-        </p:nvSpPr>
-        <p:spPr>
-          <a:xfrm>
-            <a:off x="1999664" y="3389275"/>
-            <a:ext cx="974070" cy="974070"/>
-          </a:xfrm>
-          <a:prstGeom prst="ellipse">
-            <a:avLst/>
-          </a:prstGeom>
-          <a:solidFill>
-            <a:srgbClr val="0077FF"/>
-          </a:solidFill>
-          <a:ln>
-            <a:noFill/>
-          </a:ln>
-        </p:spPr>
-        <p:style>
-          <a:lnRef idx="1">
-            <a:schemeClr val="accent1"/>
-          </a:lnRef>
-          <a:fillRef idx="3">
-            <a:schemeClr val="accent1"/>
-          </a:fillRef>
-          <a:effectRef idx="2">
-            <a:schemeClr val="accent1"/>
-          </a:effectRef>
-          <a:fontRef idx="minor">
-            <a:schemeClr val="lt1"/>
-          </a:fontRef>
-        </p:style>
-        <p:txBody>
-          <a:bodyPr rtlCol="0" anchor="ctr"/>
-          <a:lstStyle/>
-          <a:p>
-            <a:pPr algn="ctr"/>
-          </a:p>
-        </p:txBody>
-      </p:sp>
-      <p:sp>
-        <p:nvSpPr>
-          <p:cNvPr id="5" name="TextBox 4"/>
-          <p:cNvSpPr txBox="1"/>
-          <p:nvPr/>
-        </p:nvSpPr>
-        <p:spPr>
-          <a:xfrm>
-            <a:off x="677387" y="1773204"/>
-            <a:ext cx="3618626" cy="1682485"/>
-          </a:xfrm>
-          <a:prstGeom prst="rect">
-            <a:avLst/>
-          </a:prstGeom>
-          <a:noFill/>
-        </p:spPr>
-        <p:txBody>
-          <a:bodyPr wrap="square">
-            <a:spAutoFit/>
-          </a:bodyPr>
-          <a:lstStyle/>
-          <a:p>
-            <a:pPr algn="ctr">
-              <a:defRPr sz="1200" b="0">
-                <a:solidFill>
-                  <a:srgbClr val="000000"/>
-                </a:solidFill>
-                <a:latin typeface="Arial"/>
-                <a:ea typeface="Arial"/>
-                <a:cs typeface="Arial"/>
-              </a:defRPr>
-            </a:pPr>
-            <a:r>
-              <a:rPr sz="1200" b="0">
-                <a:solidFill>
-                  <a:srgbClr val="000000"/>
-                </a:solidFill>
-                <a:latin typeface="Arial"/>
-                <a:ea typeface="Arial"/>
-                <a:cs typeface="Arial"/>
-              </a:rPr>
-              <a:t>Подключение 4 команд</a:t>
-            </a:r>
-          </a:p>
-        </p:txBody>
-      </p:sp>
-      <p:sp>
-        <p:nvSpPr>
-          <p:cNvPr id="6" name="Oval 5"/>
-          <p:cNvSpPr/>
-          <p:nvPr/>
-        </p:nvSpPr>
-        <p:spPr>
-          <a:xfrm>
-            <a:off x="5618290" y="3389275"/>
-            <a:ext cx="974070" cy="974070"/>
-          </a:xfrm>
-          <a:prstGeom prst="ellipse">
-            <a:avLst/>
-          </a:prstGeom>
-          <a:solidFill>
-            <a:srgbClr val="0077FF"/>
-          </a:solidFill>
-          <a:ln>
-            <a:noFill/>
-          </a:ln>
-        </p:spPr>
-        <p:style>
-          <a:lnRef idx="1">
-            <a:schemeClr val="accent1"/>
-          </a:lnRef>
-          <a:fillRef idx="3">
-            <a:schemeClr val="accent1"/>
-          </a:fillRef>
-          <a:effectRef idx="2">
-            <a:schemeClr val="accent1"/>
-          </a:effectRef>
-          <a:fontRef idx="minor">
-            <a:schemeClr val="lt1"/>
-          </a:fontRef>
-        </p:style>
-        <p:txBody>
-          <a:bodyPr rtlCol="0" anchor="ctr"/>
-          <a:lstStyle/>
-          <a:p>
-            <a:pPr algn="ctr"/>
-          </a:p>
-        </p:txBody>
-      </p:sp>
-      <p:sp>
-        <p:nvSpPr>
-          <p:cNvPr id="7" name="TextBox 6"/>
-          <p:cNvSpPr txBox="1"/>
-          <p:nvPr/>
-        </p:nvSpPr>
-        <p:spPr>
-          <a:xfrm>
-            <a:off x="4296013" y="4783967"/>
-            <a:ext cx="3618626" cy="1682485"/>
-          </a:xfrm>
-          <a:prstGeom prst="rect">
-            <a:avLst/>
-          </a:prstGeom>
-          <a:noFill/>
-        </p:spPr>
-        <p:txBody>
-          <a:bodyPr wrap="square">
-            <a:spAutoFit/>
-          </a:bodyPr>
-          <a:lstStyle/>
-          <a:p>
-            <a:pPr algn="ctr">
-              <a:defRPr sz="1200" b="0">
-                <a:solidFill>
-                  <a:srgbClr val="000000"/>
-                </a:solidFill>
-                <a:latin typeface="Arial"/>
-                <a:ea typeface="Arial"/>
-                <a:cs typeface="Arial"/>
-              </a:defRPr>
-            </a:pPr>
-            <a:r>
-              <a:rPr sz="1200" b="0">
-                <a:solidFill>
-                  <a:srgbClr val="000000"/>
-                </a:solidFill>
-                <a:latin typeface="Arial"/>
-                <a:ea typeface="Arial"/>
-                <a:cs typeface="Arial"/>
-              </a:rPr>
-              <a:t>Доступ всей компании</a:t>
-            </a:r>
-          </a:p>
-        </p:txBody>
-      </p:sp>
-      <p:sp>
-        <p:nvSpPr>
-          <p:cNvPr id="8" name="Oval 7"/>
-          <p:cNvSpPr/>
-          <p:nvPr/>
-        </p:nvSpPr>
-        <p:spPr>
-          <a:xfrm>
-            <a:off x="9236916" y="3389275"/>
-            <a:ext cx="974070" cy="974070"/>
-          </a:xfrm>
-          <a:prstGeom prst="ellipse">
-            <a:avLst/>
-          </a:prstGeom>
-          <a:solidFill>
-            <a:srgbClr val="0077FF"/>
-          </a:solidFill>
-          <a:ln>
-            <a:noFill/>
-          </a:ln>
-        </p:spPr>
-        <p:style>
-          <a:lnRef idx="1">
-            <a:schemeClr val="accent1"/>
-          </a:lnRef>
-          <a:fillRef idx="3">
-            <a:schemeClr val="accent1"/>
-          </a:fillRef>
-          <a:effectRef idx="2">
-            <a:schemeClr val="accent1"/>
-          </a:effectRef>
-          <a:fontRef idx="minor">
-            <a:schemeClr val="lt1"/>
-          </a:fontRef>
-        </p:style>
-        <p:txBody>
-          <a:bodyPr rtlCol="0" anchor="ctr"/>
-          <a:lstStyle/>
-          <a:p>
-            <a:pPr algn="ctr"/>
-          </a:p>
-        </p:txBody>
-      </p:sp>
-      <p:sp>
-        <p:nvSpPr>
-          <p:cNvPr id="9" name="TextBox 8"/>
-          <p:cNvSpPr txBox="1"/>
-          <p:nvPr/>
-        </p:nvSpPr>
-        <p:spPr>
-          <a:xfrm>
-            <a:off x="7914639" y="1773204"/>
-            <a:ext cx="3618626" cy="1682485"/>
-          </a:xfrm>
-          <a:prstGeom prst="rect">
-            <a:avLst/>
-          </a:prstGeom>
-          <a:noFill/>
-        </p:spPr>
-        <p:txBody>
-          <a:bodyPr wrap="square">
-            <a:spAutoFit/>
-          </a:bodyPr>
-          <a:lstStyle/>
-          <a:p>
-            <a:pPr algn="ctr">
-              <a:defRPr sz="1200" b="0">
-                <a:solidFill>
-                  <a:srgbClr val="000000"/>
-                </a:solidFill>
-                <a:latin typeface="Arial"/>
-                <a:ea typeface="Arial"/>
-                <a:cs typeface="Arial"/>
-              </a:defRPr>
-            </a:pPr>
-            <a:r>
-              <a:rPr sz="1200" b="0">
-                <a:solidFill>
-                  <a:srgbClr val="000000"/>
-                </a:solidFill>
-                <a:latin typeface="Arial"/>
-                <a:ea typeface="Arial"/>
-                <a:cs typeface="Arial"/>
-              </a:rPr>
-              <a:t>Генерация иллюстраций</a:t>
-            </a:r>
-          </a:p>
-        </p:txBody>
-      </p:sp>
-    </p:spTree>
-  </p:cSld>
-  <p:clrMapOvr>
-    <a:masterClrMapping/>
-  </p:clrMapOvr>
-</p:sld>
-</file>
-
-<file path=ppt/slides/slide63.xml><?xml version="1.0" encoding="utf-8"?>
-<p:sld xmlns:a="http://schemas.openxmlformats.org/drawingml/2006/main" xmlns:p="http://schemas.openxmlformats.org/presentationml/2006/main" xmlns:r="http://schemas.openxmlformats.org/officeDocument/2006/relationships">
-  <p:cSld>
-    <p:bg>
-      <p:bgPr>
-        <a:solidFill>
-          <a:schemeClr val="lt2"/>
-        </a:solidFill>
-      </p:bgPr>
-    </p:bg>
-    <p:spTree>
-      <p:nvGrpSpPr>
-        <p:cNvPr id="1" name=""/>
-        <p:cNvGrpSpPr/>
-        <p:nvPr/>
-      </p:nvGrpSpPr>
-      <p:grpSpPr/>
-      <p:sp>
-        <p:nvSpPr>
-          <p:cNvPr id="2" name="title"/>
-          <p:cNvSpPr txBox="1"/>
-          <p:nvPr/>
-        </p:nvSpPr>
-        <p:spPr>
-          <a:xfrm>
-            <a:off x="677387" y="692177"/>
-            <a:ext cx="10855878" cy="822960"/>
-          </a:xfrm>
-          <a:prstGeom prst="rect">
-            <a:avLst/>
-          </a:prstGeom>
-          <a:noFill/>
-        </p:spPr>
-        <p:txBody>
-          <a:bodyPr wrap="square" lIns="76200" rIns="76200" tIns="50800" bIns="50800">
-            <a:spAutoFit/>
-          </a:bodyPr>
-          <a:lstStyle/>
-          <a:p>
-            <a:pPr algn="l">
-              <a:spcAft>
-                <a:spcPts val="300"/>
-              </a:spcAft>
-              <a:defRPr sz="4000">
-                <a:solidFill>
-                  <a:srgbClr val="000000"/>
-                </a:solidFill>
-                <a:latin typeface="Arial"/>
-                <a:ea typeface="Arial"/>
-                <a:cs typeface="Arial"/>
-              </a:defRPr>
-            </a:pPr>
-            <a:r>
-              <a:rPr sz="4000">
-                <a:solidFill>
-                  <a:srgbClr val="000000"/>
-                </a:solidFill>
-                <a:latin typeface="Arial"/>
-                <a:ea typeface="Arial"/>
-                <a:cs typeface="Arial"/>
-              </a:rPr>
-              <a:t>Пилотные результаты</a:t>
-            </a:r>
-          </a:p>
-        </p:txBody>
-      </p:sp>
-      <p:graphicFrame>
-        <p:nvGraphicFramePr>
-          <p:cNvPr id="3" name="Table 2"/>
-          <p:cNvGraphicFramePr>
-            <a:graphicFrameLocks noGrp="1"/>
-          </p:cNvGraphicFramePr>
-          <p:nvPr/>
-        </p:nvGraphicFramePr>
-        <p:xfrm>
-          <a:off x="677387" y="1773204"/>
-          <a:ext cx="10855878" cy="4427593"/>
-        </p:xfrm>
-        <a:graphic>
-          <a:graphicData uri="http://schemas.openxmlformats.org/drawingml/2006/table">
-            <a:tbl>
-              <a:tblPr firstRow="1" bandRow="1">
-                <a:tableStyleId>{5C22544A-7EE6-4342-B048-85BDC9FD1C3A}</a:tableStyleId>
-              </a:tblPr>
-              <a:tblGrid>
-                <a:gridCol w="3618626"/>
-                <a:gridCol w="3618626"/>
-                <a:gridCol w="3618626"/>
-              </a:tblGrid>
-              <a:tr h="885518">
-                <a:tc>
-                  <a:txBody>
-                    <a:bodyPr/>
-                    <a:lstStyle/>
-                    <a:p>
-                      <a:pPr>
-                        <a:defRPr sz="1300" b="1">
-                          <a:solidFill>
-                            <a:srgbClr val="FFFFFF"/>
-                          </a:solidFill>
-                          <a:latin typeface="Arial"/>
-                          <a:ea typeface="Arial"/>
-                          <a:cs typeface="Arial"/>
-                        </a:defRPr>
-                      </a:pPr>
-                      <a:r>
-                        <a:t>Метрика</a:t>
-                      </a:r>
-                    </a:p>
-                  </a:txBody>
-                  <a:tcPr>
-                    <a:solidFill>
-                      <a:srgbClr val="0077FF"/>
-                    </a:solidFill>
-                  </a:tcPr>
-                </a:tc>
-                <a:tc>
-                  <a:txBody>
-                    <a:bodyPr/>
-                    <a:lstStyle/>
-                    <a:p>
-                      <a:pPr>
-                        <a:defRPr sz="1300" b="1">
-                          <a:solidFill>
-                            <a:srgbClr val="FFFFFF"/>
-                          </a:solidFill>
-                          <a:latin typeface="Arial"/>
-                          <a:ea typeface="Arial"/>
-                          <a:cs typeface="Arial"/>
-                        </a:defRPr>
-                      </a:pPr>
-                      <a:r>
-                        <a:t>До</a:t>
-                      </a:r>
-                    </a:p>
-                  </a:txBody>
-                  <a:tcPr>
-                    <a:solidFill>
-                      <a:srgbClr val="0077FF"/>
-                    </a:solidFill>
-                  </a:tcPr>
-                </a:tc>
-                <a:tc>
-                  <a:txBody>
-                    <a:bodyPr/>
-                    <a:lstStyle/>
-                    <a:p>
-                      <a:pPr>
-                        <a:defRPr sz="1300" b="1">
-                          <a:solidFill>
-                            <a:srgbClr val="FFFFFF"/>
-                          </a:solidFill>
-                          <a:latin typeface="Arial"/>
-                          <a:ea typeface="Arial"/>
-                          <a:cs typeface="Arial"/>
-                        </a:defRPr>
-                      </a:pPr>
-                      <a:r>
-                        <a:t>После</a:t>
-                      </a:r>
-                    </a:p>
-                  </a:txBody>
-                  <a:tcPr>
-                    <a:solidFill>
-                      <a:srgbClr val="0077FF"/>
-                    </a:solidFill>
-                  </a:tcPr>
-                </a:tc>
-              </a:tr>
-              <a:tr h="885518">
-                <a:tc>
-                  <a:txBody>
-                    <a:bodyPr/>
-                    <a:lstStyle/>
-                    <a:p>
-                      <a:pPr>
-                        <a:defRPr sz="1300" b="0">
-                          <a:solidFill>
-                            <a:srgbClr val="000000"/>
-                          </a:solidFill>
-                          <a:latin typeface="Arial"/>
-                          <a:ea typeface="Arial"/>
-                          <a:cs typeface="Arial"/>
-                        </a:defRPr>
-                      </a:pPr>
-                      <a:r>
-                        <a:t>Сборка (мин)</a:t>
-                      </a:r>
-                    </a:p>
-                  </a:txBody>
-                  <a:tcPr>
-                    <a:solidFill>
-                      <a:srgbClr val="FFFFFF"/>
-                    </a:solidFill>
-                  </a:tcPr>
-                </a:tc>
-                <a:tc>
-                  <a:txBody>
-                    <a:bodyPr/>
-                    <a:lstStyle/>
-                    <a:p>
-                      <a:pPr>
-                        <a:defRPr sz="1300" b="0">
-                          <a:solidFill>
-                            <a:srgbClr val="000000"/>
-                          </a:solidFill>
-                          <a:latin typeface="Arial"/>
-                          <a:ea typeface="Arial"/>
-                          <a:cs typeface="Arial"/>
-                        </a:defRPr>
-                      </a:pPr>
-                      <a:r>
-                        <a:t>186</a:t>
-                      </a:r>
-                    </a:p>
-                  </a:txBody>
-                  <a:tcPr>
-                    <a:solidFill>
-                      <a:srgbClr val="FFFFFF"/>
-                    </a:solidFill>
-                  </a:tcPr>
-                </a:tc>
-                <a:tc>
-                  <a:txBody>
-                    <a:bodyPr/>
-                    <a:lstStyle/>
-                    <a:p>
-                      <a:pPr>
-                        <a:defRPr sz="1300" b="0">
-                          <a:solidFill>
-                            <a:srgbClr val="000000"/>
-                          </a:solidFill>
-                          <a:latin typeface="Arial"/>
-                          <a:ea typeface="Arial"/>
-                          <a:cs typeface="Arial"/>
-                        </a:defRPr>
-                      </a:pPr>
-                      <a:r>
-                        <a:t>4</a:t>
-                      </a:r>
-                    </a:p>
-                  </a:txBody>
-                  <a:tcPr>
-                    <a:solidFill>
-                      <a:srgbClr val="FFFFFF"/>
-                    </a:solidFill>
-                  </a:tcPr>
-                </a:tc>
-              </a:tr>
-              <a:tr h="885518">
-                <a:tc>
-                  <a:txBody>
-                    <a:bodyPr/>
-                    <a:lstStyle/>
-                    <a:p>
-                      <a:pPr>
-                        <a:defRPr sz="1300" b="0">
-                          <a:solidFill>
-                            <a:srgbClr val="000000"/>
-                          </a:solidFill>
-                          <a:latin typeface="Arial"/>
-                          <a:ea typeface="Arial"/>
-                          <a:cs typeface="Arial"/>
-                        </a:defRPr>
-                      </a:pPr>
-                      <a:r>
-                        <a:t>Время до первой версии (дней)</a:t>
-                      </a:r>
-                    </a:p>
-                  </a:txBody>
-                  <a:tcPr>
-                    <a:solidFill>
-                      <a:srgbClr val="FFFFFF"/>
-                    </a:solidFill>
-                  </a:tcPr>
-                </a:tc>
-                <a:tc>
-                  <a:txBody>
-                    <a:bodyPr/>
-                    <a:lstStyle/>
-                    <a:p>
-                      <a:pPr>
-                        <a:defRPr sz="1300" b="0">
-                          <a:solidFill>
-                            <a:srgbClr val="000000"/>
-                          </a:solidFill>
-                          <a:latin typeface="Arial"/>
-                          <a:ea typeface="Arial"/>
-                          <a:cs typeface="Arial"/>
-                        </a:defRPr>
-                      </a:pPr>
-                      <a:r>
-                        <a:t>6</a:t>
-                      </a:r>
-                    </a:p>
-                  </a:txBody>
-                  <a:tcPr>
-                    <a:solidFill>
-                      <a:srgbClr val="FFFFFF"/>
-                    </a:solidFill>
-                  </a:tcPr>
-                </a:tc>
-                <a:tc>
-                  <a:txBody>
-                    <a:bodyPr/>
-                    <a:lstStyle/>
-                    <a:p>
-                      <a:pPr>
-                        <a:defRPr sz="1300" b="0">
-                          <a:solidFill>
-                            <a:srgbClr val="000000"/>
-                          </a:solidFill>
-                          <a:latin typeface="Arial"/>
-                          <a:ea typeface="Arial"/>
-                          <a:cs typeface="Arial"/>
-                        </a:defRPr>
-                      </a:pPr>
-                      <a:r>
-                        <a:t>1</a:t>
-                      </a:r>
-                    </a:p>
-                  </a:txBody>
-                  <a:tcPr>
-                    <a:solidFill>
-                      <a:srgbClr val="FFFFFF"/>
-                    </a:solidFill>
-                  </a:tcPr>
-                </a:tc>
-              </a:tr>
-              <a:tr h="885518">
-                <a:tc>
-                  <a:txBody>
-                    <a:bodyPr/>
-                    <a:lstStyle/>
-                    <a:p>
-                      <a:pPr>
-                        <a:defRPr sz="1300" b="0">
-                          <a:solidFill>
-                            <a:srgbClr val="000000"/>
-                          </a:solidFill>
-                          <a:latin typeface="Arial"/>
-                          <a:ea typeface="Arial"/>
-                          <a:cs typeface="Arial"/>
-                        </a:defRPr>
-                      </a:pPr>
-                      <a:r>
-                        <a:t>Нарушения</a:t>
-                      </a:r>
-                    </a:p>
-                  </a:txBody>
-                  <a:tcPr>
-                    <a:solidFill>
-                      <a:srgbClr val="FFFFFF"/>
-                    </a:solidFill>
-                  </a:tcPr>
-                </a:tc>
-                <a:tc>
-                  <a:txBody>
-                    <a:bodyPr/>
-                    <a:lstStyle/>
-                    <a:p>
-                      <a:pPr>
-                        <a:defRPr sz="1300" b="0">
-                          <a:solidFill>
-                            <a:srgbClr val="000000"/>
-                          </a:solidFill>
-                          <a:latin typeface="Arial"/>
-                          <a:ea typeface="Arial"/>
-                          <a:cs typeface="Arial"/>
-                        </a:defRPr>
-                      </a:pPr>
-                      <a:r>
-                        <a:t>19</a:t>
-                      </a:r>
-                    </a:p>
-                  </a:txBody>
-                  <a:tcPr>
-                    <a:solidFill>
-                      <a:srgbClr val="FFFFFF"/>
-                    </a:solidFill>
-                  </a:tcPr>
-                </a:tc>
-                <a:tc>
-                  <a:txBody>
-                    <a:bodyPr/>
-                    <a:lstStyle/>
-                    <a:p>
-                      <a:pPr>
-                        <a:defRPr sz="1300" b="0">
-                          <a:solidFill>
-                            <a:srgbClr val="000000"/>
-                          </a:solidFill>
-                          <a:latin typeface="Arial"/>
-                          <a:ea typeface="Arial"/>
-                          <a:cs typeface="Arial"/>
-                        </a:defRPr>
-                      </a:pPr>
-                      <a:r>
-                        <a:t>2</a:t>
-                      </a:r>
-                    </a:p>
-                  </a:txBody>
-                  <a:tcPr>
-                    <a:solidFill>
-                      <a:srgbClr val="FFFFFF"/>
-                    </a:solidFill>
-                  </a:tcPr>
-                </a:tc>
-              </a:tr>
-              <a:tr h="885521">
-                <a:tc>
-                  <a:txBody>
-                    <a:bodyPr/>
-                    <a:lstStyle/>
-                    <a:p>
-                      <a:pPr>
-                        <a:defRPr sz="1300" b="0">
-                          <a:solidFill>
-                            <a:srgbClr val="000000"/>
-                          </a:solidFill>
-                          <a:latin typeface="Arial"/>
-                          <a:ea typeface="Arial"/>
-                          <a:cs typeface="Arial"/>
-                        </a:defRPr>
-                      </a:pPr>
-                      <a:r>
-                        <a:t>Запросы дизайнеров</a:t>
-                      </a:r>
-                    </a:p>
-                  </a:txBody>
-                  <a:tcPr>
-                    <a:solidFill>
-                      <a:srgbClr val="FFFFFF"/>
-                    </a:solidFill>
-                  </a:tcPr>
-                </a:tc>
-                <a:tc>
-                  <a:txBody>
-                    <a:bodyPr/>
-                    <a:lstStyle/>
-                    <a:p>
-                      <a:pPr>
-                        <a:defRPr sz="1300" b="0">
-                          <a:solidFill>
-                            <a:srgbClr val="000000"/>
-                          </a:solidFill>
-                          <a:latin typeface="Arial"/>
-                          <a:ea typeface="Arial"/>
-                          <a:cs typeface="Arial"/>
-                        </a:defRPr>
-                      </a:pPr>
-                      <a:r>
-                        <a:t>11</a:t>
-                      </a:r>
-                    </a:p>
-                  </a:txBody>
-                  <a:tcPr>
-                    <a:solidFill>
-                      <a:srgbClr val="FFFFFF"/>
-                    </a:solidFill>
-                  </a:tcPr>
-                </a:tc>
-                <a:tc>
-                  <a:txBody>
-                    <a:bodyPr/>
-                    <a:lstStyle/>
-                    <a:p>
-                      <a:pPr>
-                        <a:defRPr sz="1300" b="0">
-                          <a:solidFill>
-                            <a:srgbClr val="000000"/>
-                          </a:solidFill>
-                          <a:latin typeface="Arial"/>
-                          <a:ea typeface="Arial"/>
-                          <a:cs typeface="Arial"/>
-                        </a:defRPr>
-                      </a:pPr>
-                      <a:r>
-                        <a:t>38</a:t>
-                      </a:r>
-                    </a:p>
-                  </a:txBody>
-                  <a:tcPr>
-                    <a:solidFill>
-                      <a:srgbClr val="FFFFFF"/>
-                    </a:solidFill>
-                  </a:tcPr>
-                </a:tc>
-              </a:tr>
-            </a:tbl>
-          </a:graphicData>
-        </a:graphic>
-      </p:graphicFrame>
-    </p:spTree>
-  </p:cSld>
-  <p:clrMapOvr>
-    <a:masterClrMapping/>
-  </p:clrMapOvr>
-</p:sld>
-</file>
-
-<file path=ppt/slides/slide64.xml><?xml version="1.0" encoding="utf-8"?>
-<p:sld xmlns:a="http://schemas.openxmlformats.org/drawingml/2006/main" xmlns:p="http://schemas.openxmlformats.org/presentationml/2006/main" xmlns:r="http://schemas.openxmlformats.org/officeDocument/2006/relationships">
-  <p:cSld>
-    <p:bg>
-      <p:bgPr>
-        <a:solidFill>
-          <a:schemeClr val="lt2"/>
-        </a:solidFill>
-      </p:bgPr>
-    </p:bg>
-    <p:spTree>
-      <p:nvGrpSpPr>
-        <p:cNvPr id="1" name=""/>
-        <p:cNvGrpSpPr/>
-        <p:nvPr/>
-      </p:nvGrpSpPr>
-      <p:grpSpPr/>
-      <p:pic>
-        <p:nvPicPr>
-          <p:cNvPr id="778" name="Google Shape;778;p59"/>
-          <p:cNvPicPr preferRelativeResize="0"/>
-          <p:nvPr/>
-        </p:nvPicPr>
-        <p:blipFill rotWithShape="1">
-          <a:blip r:embed="rId2">
-            <a:alphaModFix/>
-          </a:blip>
-          <a:srcRect b="0" l="0" r="0" t="0"/>
-          <a:stretch/>
-        </p:blipFill>
-        <p:spPr>
-          <a:xfrm>
-            <a:off x="8099424" y="2562300"/>
-            <a:ext cx="866700" cy="866700"/>
-          </a:xfrm>
-          <a:prstGeom prst="rect">
-            <a:avLst/>
-          </a:prstGeom>
-          <a:noFill/>
-          <a:ln>
-            <a:noFill/>
-          </a:ln>
-        </p:spPr>
-      </p:pic>
-      <p:pic>
-        <p:nvPicPr>
-          <p:cNvPr id="779" name="Google Shape;779;p59"/>
-          <p:cNvPicPr preferRelativeResize="0"/>
-          <p:nvPr/>
-        </p:nvPicPr>
-        <p:blipFill rotWithShape="1">
-          <a:blip r:embed="rId3">
-            <a:alphaModFix/>
-          </a:blip>
-          <a:srcRect b="0" l="0" r="0" t="0"/>
-          <a:stretch/>
-        </p:blipFill>
-        <p:spPr>
-          <a:xfrm>
-            <a:off x="4385469" y="2562300"/>
-            <a:ext cx="866700" cy="866700"/>
-          </a:xfrm>
-          <a:prstGeom prst="rect">
-            <a:avLst/>
-          </a:prstGeom>
-          <a:noFill/>
-          <a:ln>
-            <a:noFill/>
-          </a:ln>
-        </p:spPr>
-      </p:pic>
-      <p:pic>
-        <p:nvPicPr>
-          <p:cNvPr id="780" name="Google Shape;780;p59"/>
-          <p:cNvPicPr preferRelativeResize="0"/>
-          <p:nvPr/>
-        </p:nvPicPr>
-        <p:blipFill rotWithShape="1">
-          <a:blip r:embed="rId5">
-            <a:alphaModFix/>
-          </a:blip>
-          <a:srcRect b="0" l="0" r="0" t="0"/>
-          <a:stretch/>
-        </p:blipFill>
-        <p:spPr>
-          <a:xfrm>
-            <a:off x="671513" y="2562300"/>
-            <a:ext cx="866700" cy="866700"/>
-          </a:xfrm>
-          <a:prstGeom prst="rect">
-            <a:avLst/>
-          </a:prstGeom>
-          <a:noFill/>
-          <a:ln>
-            <a:noFill/>
-          </a:ln>
-        </p:spPr>
-      </p:pic>
-      <p:sp>
-        <p:nvSpPr>
           <p:cNvPr id="782" name="Google Shape;782;p59"/>
           <p:cNvSpPr txBox="1"/>
           <p:nvPr/>
@@ -11431,97 +8918,16 @@
           </a:p>
         </p:txBody>
       </p:sp>
-      <p:pic>
-        <p:nvPicPr>
-          <p:cNvPr id="783" name="Google Shape;783;p59"/>
-          <p:cNvPicPr preferRelativeResize="0"/>
-          <p:nvPr/>
-        </p:nvPicPr>
-        <p:blipFill rotWithShape="1">
-          <a:blip r:embed="rId6">
-            <a:alphaModFix/>
-          </a:blip>
-          <a:srcRect b="0" l="0" r="0" t="0"/>
-          <a:stretch/>
-        </p:blipFill>
-        <p:spPr>
-          <a:xfrm>
-            <a:off x="879438" y="2770225"/>
-            <a:ext cx="450850" cy="450850"/>
-          </a:xfrm>
-          <a:prstGeom prst="rect">
-            <a:avLst/>
-          </a:prstGeom>
-          <a:noFill/>
-          <a:ln>
-            <a:noFill/>
-          </a:ln>
-        </p:spPr>
-      </p:pic>
-      <p:pic>
-        <p:nvPicPr>
-          <p:cNvPr id="784" name="Google Shape;784;p59"/>
-          <p:cNvPicPr preferRelativeResize="0"/>
-          <p:nvPr/>
-        </p:nvPicPr>
-        <p:blipFill rotWithShape="1">
-          <a:blip r:embed="rId7">
-            <a:alphaModFix/>
-          </a:blip>
-          <a:srcRect b="0" l="0" r="0" t="0"/>
-          <a:stretch/>
-        </p:blipFill>
-        <p:spPr>
-          <a:xfrm>
-            <a:off x="8316973" y="2791669"/>
-            <a:ext cx="450851" cy="450851"/>
-          </a:xfrm>
-          <a:prstGeom prst="rect">
-            <a:avLst/>
-          </a:prstGeom>
-          <a:noFill/>
-          <a:ln>
-            <a:noFill/>
-          </a:ln>
-        </p:spPr>
-      </p:pic>
-      <p:pic>
-        <p:nvPicPr>
-          <p:cNvPr id="785" name="Google Shape;785;p59"/>
-          <p:cNvPicPr preferRelativeResize="0"/>
-          <p:nvPr/>
-        </p:nvPicPr>
-        <p:blipFill rotWithShape="1">
-          <a:blip r:embed="rId8">
-            <a:alphaModFix/>
-          </a:blip>
-          <a:srcRect b="0" l="0" r="0" t="0"/>
-          <a:stretch/>
-        </p:blipFill>
-        <p:spPr>
-          <a:xfrm>
-            <a:off x="4574144" y="2770225"/>
-            <a:ext cx="450850" cy="450850"/>
-          </a:xfrm>
-          <a:prstGeom prst="rect">
-            <a:avLst/>
-          </a:prstGeom>
-          <a:noFill/>
-          <a:ln>
-            <a:noFill/>
-          </a:ln>
-        </p:spPr>
-      </p:pic>
       <p:sp>
         <p:nvSpPr>
-          <p:cNvPr id="786" name="title"/>
+          <p:cNvPr id="783" name="title"/>
           <p:cNvSpPr txBox="1"/>
           <p:nvPr/>
         </p:nvSpPr>
         <p:spPr>
           <a:xfrm>
             <a:off x="677387" y="692177"/>
-            <a:ext cx="10855878" cy="822960"/>
+            <a:ext cx="10855878" cy="1447800"/>
           </a:xfrm>
           <a:prstGeom prst="rect">
             <a:avLst/>
@@ -11556,21 +8962,21 @@
                 <a:ea typeface="Arial"/>
                 <a:cs typeface="Arial"/>
               </a:rPr>
-              <a:t>Запрос решения руководства</a:t>
+              <a:t>Решение о запуске сервиса на всю компанию</a:t>
             </a:r>
           </a:p>
         </p:txBody>
       </p:sp>
       <p:sp>
         <p:nvSpPr>
-          <p:cNvPr id="787" name="lead"/>
+          <p:cNvPr id="784" name="lead"/>
           <p:cNvSpPr txBox="1"/>
           <p:nvPr/>
         </p:nvSpPr>
         <p:spPr>
           <a:xfrm>
-            <a:off x="1762975" y="3429000"/>
-            <a:ext cx="8684702" cy="869909"/>
+            <a:off x="677387" y="2825777"/>
+            <a:ext cx="10855878" cy="1050876"/>
           </a:xfrm>
           <a:prstGeom prst="rect">
             <a:avLst/>
@@ -11605,21 +9011,21 @@
                 <a:ea typeface="Arial"/>
                 <a:cs typeface="Arial"/>
               </a:rPr>
-              <a:t>Одобрить запуск сервиса на всю компанию</a:t>
+              <a:t>Запрос одобрения на масштабирование</a:t>
             </a:r>
           </a:p>
         </p:txBody>
       </p:sp>
       <p:sp>
         <p:nvSpPr>
-          <p:cNvPr id="788" name="body"/>
+          <p:cNvPr id="785" name="body"/>
           <p:cNvSpPr txBox="1"/>
           <p:nvPr/>
         </p:nvSpPr>
         <p:spPr>
           <a:xfrm>
-            <a:off x="1762975" y="4472891"/>
-            <a:ext cx="8684702" cy="1855807"/>
+            <a:off x="677387" y="4086829"/>
+            <a:ext cx="10855878" cy="2241869"/>
           </a:xfrm>
           <a:prstGeom prst="rect">
             <a:avLst/>
@@ -11654,7 +9060,7 @@
                 <a:ea typeface="Arial"/>
                 <a:cs typeface="Arial"/>
               </a:rPr>
-              <a:t>• Выделить ресурсы для интеграции с хранилищем</a:t>
+              <a:t>• Подключение к корпоративному хранилищу</a:t>
             </a:r>
           </a:p>
           <a:p>
@@ -11680,7 +9086,7 @@
                 <a:ea typeface="Arial"/>
                 <a:cs typeface="Arial"/>
               </a:rPr>
-              <a:t>• Поддержка модели и масштабирование</a:t>
+              <a:t>• Интеграция с доменом и HTTPS</a:t>
             </a:r>
           </a:p>
         </p:txBody>

--- a/samples/Шаблон_презентации_VK_Education__focus.pptx
+++ b/samples/Шаблон_презентации_VK_Education__focus.pptx
@@ -276,7 +276,7 @@
               <c:strCache>
                 <c:ptCount val="1"/>
                 <c:pt idx="0">
-                  <c:v>Время</c:v>
+                  <c:v>До</c:v>
                 </c:pt>
               </c:strCache>
             </c:strRef>
@@ -293,34 +293,127 @@
           </c:spPr>
           <c:cat>
             <c:strRef>
-              <c:f>Sheet1!$A$2:$A$3</c:f>
+              <c:f>Sheet1!$A$2:$A$4</c:f>
               <c:strCache>
-                <c:ptCount val="2"/>
+                <c:ptCount val="3"/>
                 <c:pt idx="0">
-                  <c:v>Сборка</c:v>
+                  <c:v>Сборка колоды</c:v>
                 </c:pt>
                 <c:pt idx="1">
-                  <c:v>Правки</c:v>
+                  <c:v>Время до первой версии</c:v>
+                </c:pt>
+                <c:pt idx="2">
+                  <c:v>Запросы/неделя</c:v>
                 </c:pt>
               </c:strCache>
             </c:strRef>
           </c:cat>
           <c:val>
             <c:numRef>
-              <c:f>Sheet1!$B$2:$B$3</c:f>
+              <c:f>Sheet1!$B$2:$B$4</c:f>
               <c:numCache>
                 <c:formatCode>General</c:formatCode>
-                <c:ptCount val="2"/>
+                <c:ptCount val="3"/>
                 <c:pt idx="0">
                   <c:v>186.0</c:v>
                 </c:pt>
                 <c:pt idx="1">
-                  <c:v>74.0</c:v>
+                  <c:v>6.0</c:v>
+                </c:pt>
+                <c:pt idx="2">
+                  <c:v>11.0</c:v>
                 </c:pt>
               </c:numCache>
             </c:numRef>
           </c:val>
         </c:ser>
+        <c:ser>
+          <c:idx val="1"/>
+          <c:order val="1"/>
+          <c:tx>
+            <c:strRef>
+              <c:f>Sheet1!$C$1</c:f>
+              <c:strCache>
+                <c:ptCount val="1"/>
+                <c:pt idx="0">
+                  <c:v>После</c:v>
+                </c:pt>
+              </c:strCache>
+            </c:strRef>
+          </c:tx>
+          <c:spPr>
+            <a:solidFill>
+              <a:srgbClr val="FF3885"/>
+            </a:solidFill>
+            <a:ln>
+              <a:solidFill>
+                <a:srgbClr val="FF3885"/>
+              </a:solidFill>
+            </a:ln>
+          </c:spPr>
+          <c:cat>
+            <c:strRef>
+              <c:f>Sheet1!$A$2:$A$4</c:f>
+              <c:strCache>
+                <c:ptCount val="3"/>
+                <c:pt idx="0">
+                  <c:v>Сборка колоды</c:v>
+                </c:pt>
+                <c:pt idx="1">
+                  <c:v>Время до первой версии</c:v>
+                </c:pt>
+                <c:pt idx="2">
+                  <c:v>Запросы/неделя</c:v>
+                </c:pt>
+              </c:strCache>
+            </c:strRef>
+          </c:cat>
+          <c:val>
+            <c:numRef>
+              <c:f>Sheet1!$C$2:$C$4</c:f>
+              <c:numCache>
+                <c:formatCode>General</c:formatCode>
+                <c:ptCount val="3"/>
+                <c:pt idx="0">
+                  <c:v>4.0</c:v>
+                </c:pt>
+                <c:pt idx="1">
+                  <c:v>1.0</c:v>
+                </c:pt>
+                <c:pt idx="2">
+                  <c:v>38.0</c:v>
+                </c:pt>
+              </c:numCache>
+            </c:numRef>
+          </c:val>
+        </c:ser>
+        <c:dLbls>
+          <c:numFmt formatCode="0&quot; единицы&quot;" sourceLinked="0"/>
+          <c:txPr>
+            <a:bodyPr wrap="none"/>
+            <a:lstStyle/>
+            <a:p>
+              <a:pPr>
+                <a:defRPr sz="1100" b="0">
+                  <a:solidFill>
+                    <a:srgbClr val="000000"/>
+                  </a:solidFill>
+                  <a:latin typeface="Play"/>
+                  <a:ea typeface="Play"/>
+                  <a:cs typeface="Play"/>
+                </a:defRPr>
+              </a:pPr>
+            </a:p>
+          </c:txPr>
+          <c:dLblPos val="outEnd"/>
+          <c:showLegendKey val="0"/>
+          <c:showVal val="1"/>
+          <c:showCatName val="0"/>
+          <c:showSerName val="0"/>
+          <c:showPercent val="0"/>
+          <c:showBubbleSize val="0"/>
+          <c:showLeaderLines val="1"/>
+        </c:dLbls>
         <c:gapWidth val="60"/>
         <c:axId val="-2068027336"/>
         <c:axId val="-2113994440"/>
@@ -344,9 +437,9 @@
                 <a:solidFill>
                   <a:srgbClr val="000000"/>
                 </a:solidFill>
-                <a:latin typeface="Arial"/>
-                <a:ea typeface="Arial"/>
-                <a:cs typeface="Arial"/>
+                <a:latin typeface="Play"/>
+                <a:ea typeface="Play"/>
+                <a:cs typeface="Play"/>
               </a:defRPr>
             </a:pPr>
           </a:p>
@@ -375,7 +468,7 @@
         <c:title>
           <c:tx>
             <c:rich>
-              <a:bodyPr/>
+              <a:bodyPr rot="0" vert="horz"/>
               <a:lstStyle/>
               <a:p>
                 <a:pPr>
@@ -383,13 +476,13 @@
                     <a:solidFill>
                       <a:srgbClr val="000000"/>
                     </a:solidFill>
-                    <a:latin typeface="Arial"/>
-                    <a:ea typeface="Arial"/>
-                    <a:cs typeface="Arial"/>
+                    <a:latin typeface="Play"/>
+                    <a:ea typeface="Play"/>
+                    <a:cs typeface="Play"/>
                   </a:defRPr>
                 </a:pPr>
                 <a:r>
-                  <a:t>мин</a:t>
+                  <a:t>единицы</a:t>
                 </a:r>
               </a:p>
             </c:rich>
@@ -409,9 +502,9 @@
                 <a:solidFill>
                   <a:srgbClr val="000000"/>
                 </a:solidFill>
-                <a:latin typeface="Arial"/>
-                <a:ea typeface="Arial"/>
-                <a:cs typeface="Arial"/>
+                <a:latin typeface="Play"/>
+                <a:ea typeface="Play"/>
+                <a:cs typeface="Play"/>
               </a:defRPr>
             </a:pPr>
           </a:p>
@@ -420,6 +513,10 @@
         <c:crosses val="autoZero"/>
       </c:valAx>
     </c:plotArea>
+    <c:legend>
+      <c:legendPos val="b"/>
+      <c:overlay val="0"/>
+    </c:legend>
     <c:dispBlanksAs val="gap"/>
   </c:chart>
   <c:txPr>
@@ -431,196 +528,9 @@
           <a:solidFill>
             <a:srgbClr val="000000"/>
           </a:solidFill>
-          <a:latin typeface="Arial"/>
-          <a:ea typeface="Arial"/>
-          <a:cs typeface="Arial"/>
-        </a:defRPr>
-      </a:pPr>
-      <a:endParaRPr lang="en-US"/>
-    </a:p>
-  </c:txPr>
-  <c:externalData r:id="rId1">
-    <c:autoUpdate val="0"/>
-  </c:externalData>
-</c:chartSpace>
-</file>
-
-<file path=ppt/charts/chart2.xml><?xml version="1.0" encoding="utf-8"?>
-<c:chartSpace xmlns:c="http://schemas.openxmlformats.org/drawingml/2006/chart" xmlns:a="http://schemas.openxmlformats.org/drawingml/2006/main" xmlns:r="http://schemas.openxmlformats.org/officeDocument/2006/relationships">
-  <c:date1904 val="0"/>
-  <c:chart>
-    <c:autoTitleDeleted val="1"/>
-    <c:plotArea>
-      <c:barChart>
-        <c:barDir val="col"/>
-        <c:grouping val="clustered"/>
-        <c:ser>
-          <c:idx val="0"/>
-          <c:order val="0"/>
-          <c:tx>
-            <c:strRef>
-              <c:f>Sheet1!$B$1</c:f>
-              <c:strCache>
-                <c:ptCount val="1"/>
-                <c:pt idx="0">
-                  <c:v>Время</c:v>
-                </c:pt>
-              </c:strCache>
-            </c:strRef>
-          </c:tx>
-          <c:spPr>
-            <a:solidFill>
-              <a:srgbClr val="0077FF"/>
-            </a:solidFill>
-            <a:ln>
-              <a:solidFill>
-                <a:srgbClr val="0077FF"/>
-              </a:solidFill>
-            </a:ln>
-          </c:spPr>
-          <c:cat>
-            <c:strRef>
-              <c:f>Sheet1!$A$2:$A$3</c:f>
-              <c:strCache>
-                <c:ptCount val="2"/>
-                <c:pt idx="0">
-                  <c:v>До пилота</c:v>
-                </c:pt>
-                <c:pt idx="1">
-                  <c:v>После пилота</c:v>
-                </c:pt>
-              </c:strCache>
-            </c:strRef>
-          </c:cat>
-          <c:val>
-            <c:numRef>
-              <c:f>Sheet1!$B$2:$B$3</c:f>
-              <c:numCache>
-                <c:formatCode>General</c:formatCode>
-                <c:ptCount val="2"/>
-                <c:pt idx="0">
-                  <c:v>186.0</c:v>
-                </c:pt>
-                <c:pt idx="1">
-                  <c:v>4.0</c:v>
-                </c:pt>
-              </c:numCache>
-            </c:numRef>
-          </c:val>
-        </c:ser>
-        <c:gapWidth val="60"/>
-        <c:axId val="-2068027336"/>
-        <c:axId val="-2113994440"/>
-      </c:barChart>
-      <c:catAx>
-        <c:axId val="-2068027336"/>
-        <c:scaling>
-          <c:orientation val="minMax"/>
-        </c:scaling>
-        <c:delete val="0"/>
-        <c:axPos val="b"/>
-        <c:majorTickMark val="out"/>
-        <c:minorTickMark val="none"/>
-        <c:tickLblPos val="nextTo"/>
-        <c:txPr>
-          <a:bodyPr/>
-          <a:lstStyle/>
-          <a:p>
-            <a:pPr>
-              <a:defRPr sz="1100" b="0">
-                <a:solidFill>
-                  <a:srgbClr val="000000"/>
-                </a:solidFill>
-                <a:latin typeface="Arial"/>
-                <a:ea typeface="Arial"/>
-                <a:cs typeface="Arial"/>
-              </a:defRPr>
-            </a:pPr>
-          </a:p>
-        </c:txPr>
-        <c:crossAx val="-2113994440"/>
-        <c:crosses val="autoZero"/>
-        <c:auto val="1"/>
-        <c:lblAlgn val="ctr"/>
-        <c:lblOffset val="100"/>
-        <c:noMultiLvlLbl val="0"/>
-      </c:catAx>
-      <c:valAx>
-        <c:axId val="-2113994440"/>
-        <c:scaling/>
-        <c:delete val="0"/>
-        <c:axPos val="l"/>
-        <c:majorGridlines>
-          <c:spPr>
-            <a:ln w="9525">
-              <a:solidFill>
-                <a:srgbClr val="D1D1D1"/>
-              </a:solidFill>
-            </a:ln>
-          </c:spPr>
-        </c:majorGridlines>
-        <c:title>
-          <c:tx>
-            <c:rich>
-              <a:bodyPr/>
-              <a:lstStyle/>
-              <a:p>
-                <a:pPr>
-                  <a:defRPr sz="1100" b="0">
-                    <a:solidFill>
-                      <a:srgbClr val="000000"/>
-                    </a:solidFill>
-                    <a:latin typeface="Arial"/>
-                    <a:ea typeface="Arial"/>
-                    <a:cs typeface="Arial"/>
-                  </a:defRPr>
-                </a:pPr>
-                <a:r>
-                  <a:t>мин</a:t>
-                </a:r>
-              </a:p>
-            </c:rich>
-          </c:tx>
-          <c:layout/>
-          <c:overlay val="0"/>
-        </c:title>
-        <c:majorTickMark val="out"/>
-        <c:minorTickMark val="none"/>
-        <c:tickLblPos val="nextTo"/>
-        <c:txPr>
-          <a:bodyPr/>
-          <a:lstStyle/>
-          <a:p>
-            <a:pPr>
-              <a:defRPr sz="1100" b="0">
-                <a:solidFill>
-                  <a:srgbClr val="000000"/>
-                </a:solidFill>
-                <a:latin typeface="Arial"/>
-                <a:ea typeface="Arial"/>
-                <a:cs typeface="Arial"/>
-              </a:defRPr>
-            </a:pPr>
-          </a:p>
-        </c:txPr>
-        <c:crossAx val="-2068027336"/>
-        <c:crosses val="autoZero"/>
-      </c:valAx>
-    </c:plotArea>
-    <c:dispBlanksAs val="gap"/>
-  </c:chart>
-  <c:txPr>
-    <a:bodyPr/>
-    <a:lstStyle/>
-    <a:p>
-      <a:pPr>
-        <a:defRPr sz="1200" b="0">
-          <a:solidFill>
-            <a:srgbClr val="000000"/>
-          </a:solidFill>
-          <a:latin typeface="Arial"/>
-          <a:ea typeface="Arial"/>
-          <a:cs typeface="Arial"/>
+          <a:latin typeface="Play"/>
+          <a:ea typeface="Play"/>
+          <a:cs typeface="Play"/>
         </a:defRPr>
       </a:pPr>
       <a:endParaRPr lang="en-US"/>
@@ -7391,7 +7301,7 @@
         <p:spPr>
           <a:xfrm>
             <a:off x="677387" y="692177"/>
-            <a:ext cx="10855878" cy="822960"/>
+            <a:ext cx="10855878" cy="1447800"/>
           </a:xfrm>
           <a:prstGeom prst="rect">
             <a:avLst/>
@@ -7426,7 +7336,7 @@
                 <a:ea typeface="Arial"/>
                 <a:cs typeface="Arial"/>
               </a:rPr>
-              <a:t>Автоматическая вёрстка презентаций</a:t>
+              <a:t>Защита инициативы: сервис автоматической вёрстки презентаций</a:t>
             </a:r>
           </a:p>
         </p:txBody>
@@ -7484,7 +7394,7 @@
         <p:spPr>
           <a:xfrm>
             <a:off x="677387" y="692177"/>
-            <a:ext cx="10855878" cy="1447800"/>
+            <a:ext cx="10855878" cy="822960"/>
           </a:xfrm>
           <a:prstGeom prst="rect">
             <a:avLst/>
@@ -7519,26 +7429,412 @@
                 <a:ea typeface="Arial"/>
                 <a:cs typeface="Arial"/>
               </a:rPr>
-              <a:t>Сейчас сборка презентаций занимает 186 минут</a:t>
+              <a:t>Контекст и возможность</a:t>
             </a:r>
           </a:p>
         </p:txBody>
       </p:sp>
       <p:graphicFrame>
         <p:nvGraphicFramePr>
-          <p:cNvPr id="988" name="Chart 987"/>
+          <p:cNvPr id="988" name="Table 987"/>
           <p:cNvGraphicFramePr>
             <a:graphicFrameLocks noGrp="1"/>
           </p:cNvGraphicFramePr>
           <p:nvPr/>
         </p:nvGraphicFramePr>
         <p:xfrm>
-          <a:off x="677387" y="3591534"/>
-          <a:ext cx="10855878" cy="581517"/>
+          <a:off x="677387" y="2200937"/>
+          <a:ext cx="10855878" cy="662907"/>
         </p:xfrm>
         <a:graphic>
-          <a:graphicData uri="http://schemas.openxmlformats.org/drawingml/2006/chart">
-            <c:chart xmlns:c="http://schemas.openxmlformats.org/drawingml/2006/chart" r:id="rId2"/>
+          <a:graphicData uri="http://schemas.openxmlformats.org/drawingml/2006/table">
+            <a:tbl>
+              <a:tblPr firstRow="1" bandRow="1">
+                <a:tableStyleId>{5C22544A-7EE6-4342-B048-85BDC9FD1C3A}</a:tableStyleId>
+              </a:tblPr>
+              <a:tblGrid>
+                <a:gridCol w="5427939"/>
+                <a:gridCol w="5427939"/>
+              </a:tblGrid>
+              <a:tr h="94701">
+                <a:tc>
+                  <a:txBody>
+                    <a:bodyPr/>
+                    <a:lstStyle/>
+                    <a:p>
+                      <a:pPr>
+                        <a:defRPr sz="1300" b="1">
+                          <a:solidFill>
+                            <a:srgbClr val="FFFFFF"/>
+                          </a:solidFill>
+                          <a:latin typeface="Play"/>
+                          <a:ea typeface="Play"/>
+                          <a:cs typeface="Play"/>
+                        </a:defRPr>
+                      </a:pPr>
+                      <a:r>
+                        <a:t>Показатель</a:t>
+                      </a:r>
+                    </a:p>
+                  </a:txBody>
+                  <a:tcPr>
+                    <a:solidFill>
+                      <a:srgbClr val="0077FF"/>
+                    </a:solidFill>
+                  </a:tcPr>
+                </a:tc>
+                <a:tc>
+                  <a:txBody>
+                    <a:bodyPr/>
+                    <a:lstStyle/>
+                    <a:p>
+                      <a:pPr>
+                        <a:defRPr sz="1300" b="1">
+                          <a:solidFill>
+                            <a:srgbClr val="FFFFFF"/>
+                          </a:solidFill>
+                          <a:latin typeface="Play"/>
+                          <a:ea typeface="Play"/>
+                          <a:cs typeface="Play"/>
+                        </a:defRPr>
+                      </a:pPr>
+                      <a:r>
+                        <a:t>Значение</a:t>
+                      </a:r>
+                    </a:p>
+                  </a:txBody>
+                  <a:tcPr>
+                    <a:solidFill>
+                      <a:srgbClr val="0077FF"/>
+                    </a:solidFill>
+                  </a:tcPr>
+                </a:tc>
+              </a:tr>
+              <a:tr h="94701">
+                <a:tc>
+                  <a:txBody>
+                    <a:bodyPr/>
+                    <a:lstStyle/>
+                    <a:p>
+                      <a:pPr>
+                        <a:defRPr sz="1300" b="0">
+                          <a:solidFill>
+                            <a:srgbClr val="000000"/>
+                          </a:solidFill>
+                          <a:latin typeface="Play"/>
+                          <a:ea typeface="Play"/>
+                          <a:cs typeface="Play"/>
+                        </a:defRPr>
+                      </a:pPr>
+                      <a:r>
+                        <a:t>Колоды</a:t>
+                      </a:r>
+                    </a:p>
+                  </a:txBody>
+                  <a:tcPr>
+                    <a:solidFill>
+                      <a:srgbClr val="FFFFFF"/>
+                    </a:solidFill>
+                  </a:tcPr>
+                </a:tc>
+                <a:tc>
+                  <a:txBody>
+                    <a:bodyPr/>
+                    <a:lstStyle/>
+                    <a:p>
+                      <a:pPr>
+                        <a:defRPr sz="1300" b="0">
+                          <a:solidFill>
+                            <a:srgbClr val="000000"/>
+                          </a:solidFill>
+                          <a:latin typeface="Play"/>
+                          <a:ea typeface="Play"/>
+                          <a:cs typeface="Play"/>
+                        </a:defRPr>
+                      </a:pPr>
+                      <a:r>
+                        <a:t>42</a:t>
+                      </a:r>
+                    </a:p>
+                  </a:txBody>
+                  <a:tcPr>
+                    <a:solidFill>
+                      <a:srgbClr val="FFFFFF"/>
+                    </a:solidFill>
+                  </a:tcPr>
+                </a:tc>
+              </a:tr>
+              <a:tr h="94701">
+                <a:tc>
+                  <a:txBody>
+                    <a:bodyPr/>
+                    <a:lstStyle/>
+                    <a:p>
+                      <a:pPr>
+                        <a:defRPr sz="1300" b="0">
+                          <a:solidFill>
+                            <a:srgbClr val="000000"/>
+                          </a:solidFill>
+                          <a:latin typeface="Play"/>
+                          <a:ea typeface="Play"/>
+                          <a:cs typeface="Play"/>
+                        </a:defRPr>
+                      </a:pPr>
+                      <a:r>
+                        <a:t>Сборка колоды</a:t>
+                      </a:r>
+                    </a:p>
+                  </a:txBody>
+                  <a:tcPr>
+                    <a:solidFill>
+                      <a:srgbClr val="FFFFFF"/>
+                    </a:solidFill>
+                  </a:tcPr>
+                </a:tc>
+                <a:tc>
+                  <a:txBody>
+                    <a:bodyPr/>
+                    <a:lstStyle/>
+                    <a:p>
+                      <a:pPr>
+                        <a:defRPr sz="1300" b="0">
+                          <a:solidFill>
+                            <a:srgbClr val="000000"/>
+                          </a:solidFill>
+                          <a:latin typeface="Play"/>
+                          <a:ea typeface="Play"/>
+                          <a:cs typeface="Play"/>
+                        </a:defRPr>
+                      </a:pPr>
+                      <a:r>
+                        <a:t>186 мин</a:t>
+                      </a:r>
+                    </a:p>
+                  </a:txBody>
+                  <a:tcPr>
+                    <a:solidFill>
+                      <a:srgbClr val="FFFFFF"/>
+                    </a:solidFill>
+                  </a:tcPr>
+                </a:tc>
+              </a:tr>
+              <a:tr h="94701">
+                <a:tc>
+                  <a:txBody>
+                    <a:bodyPr/>
+                    <a:lstStyle/>
+                    <a:p>
+                      <a:pPr>
+                        <a:defRPr sz="1300" b="0">
+                          <a:solidFill>
+                            <a:srgbClr val="000000"/>
+                          </a:solidFill>
+                          <a:latin typeface="Play"/>
+                          <a:ea typeface="Play"/>
+                          <a:cs typeface="Play"/>
+                        </a:defRPr>
+                      </a:pPr>
+                      <a:r>
+                        <a:t>Правки</a:t>
+                      </a:r>
+                    </a:p>
+                  </a:txBody>
+                  <a:tcPr>
+                    <a:solidFill>
+                      <a:srgbClr val="FFFFFF"/>
+                    </a:solidFill>
+                  </a:tcPr>
+                </a:tc>
+                <a:tc>
+                  <a:txBody>
+                    <a:bodyPr/>
+                    <a:lstStyle/>
+                    <a:p>
+                      <a:pPr>
+                        <a:defRPr sz="1300" b="0">
+                          <a:solidFill>
+                            <a:srgbClr val="000000"/>
+                          </a:solidFill>
+                          <a:latin typeface="Play"/>
+                          <a:ea typeface="Play"/>
+                          <a:cs typeface="Play"/>
+                        </a:defRPr>
+                      </a:pPr>
+                      <a:r>
+                        <a:t>74 мин</a:t>
+                      </a:r>
+                    </a:p>
+                  </a:txBody>
+                  <a:tcPr>
+                    <a:solidFill>
+                      <a:srgbClr val="FFFFFF"/>
+                    </a:solidFill>
+                  </a:tcPr>
+                </a:tc>
+              </a:tr>
+              <a:tr h="94701">
+                <a:tc>
+                  <a:txBody>
+                    <a:bodyPr/>
+                    <a:lstStyle/>
+                    <a:p>
+                      <a:pPr>
+                        <a:defRPr sz="1300" b="0">
+                          <a:solidFill>
+                            <a:srgbClr val="000000"/>
+                          </a:solidFill>
+                          <a:latin typeface="Play"/>
+                          <a:ea typeface="Play"/>
+                          <a:cs typeface="Play"/>
+                        </a:defRPr>
+                      </a:pPr>
+                      <a:r>
+                        <a:t>Нарушения стиля</a:t>
+                      </a:r>
+                    </a:p>
+                  </a:txBody>
+                  <a:tcPr>
+                    <a:solidFill>
+                      <a:srgbClr val="FFFFFF"/>
+                    </a:solidFill>
+                  </a:tcPr>
+                </a:tc>
+                <a:tc>
+                  <a:txBody>
+                    <a:bodyPr/>
+                    <a:lstStyle/>
+                    <a:p>
+                      <a:pPr>
+                        <a:defRPr sz="1300" b="0">
+                          <a:solidFill>
+                            <a:srgbClr val="000000"/>
+                          </a:solidFill>
+                          <a:latin typeface="Play"/>
+                          <a:ea typeface="Play"/>
+                          <a:cs typeface="Play"/>
+                        </a:defRPr>
+                      </a:pPr>
+                      <a:r>
+                        <a:t>19/42</a:t>
+                      </a:r>
+                    </a:p>
+                  </a:txBody>
+                  <a:tcPr>
+                    <a:solidFill>
+                      <a:srgbClr val="FFFFFF"/>
+                    </a:solidFill>
+                  </a:tcPr>
+                </a:tc>
+              </a:tr>
+              <a:tr h="94701">
+                <a:tc>
+                  <a:txBody>
+                    <a:bodyPr/>
+                    <a:lstStyle/>
+                    <a:p>
+                      <a:pPr>
+                        <a:defRPr sz="1300" b="0">
+                          <a:solidFill>
+                            <a:srgbClr val="000000"/>
+                          </a:solidFill>
+                          <a:latin typeface="Play"/>
+                          <a:ea typeface="Play"/>
+                          <a:cs typeface="Play"/>
+                        </a:defRPr>
+                      </a:pPr>
+                      <a:r>
+                        <a:t>Запросы/неделя</a:t>
+                      </a:r>
+                    </a:p>
+                  </a:txBody>
+                  <a:tcPr>
+                    <a:solidFill>
+                      <a:srgbClr val="FFFFFF"/>
+                    </a:solidFill>
+                  </a:tcPr>
+                </a:tc>
+                <a:tc>
+                  <a:txBody>
+                    <a:bodyPr/>
+                    <a:lstStyle/>
+                    <a:p>
+                      <a:pPr>
+                        <a:defRPr sz="1300" b="0">
+                          <a:solidFill>
+                            <a:srgbClr val="000000"/>
+                          </a:solidFill>
+                          <a:latin typeface="Play"/>
+                          <a:ea typeface="Play"/>
+                          <a:cs typeface="Play"/>
+                        </a:defRPr>
+                      </a:pPr>
+                      <a:r>
+                        <a:t>11/27</a:t>
+                      </a:r>
+                    </a:p>
+                  </a:txBody>
+                  <a:tcPr>
+                    <a:solidFill>
+                      <a:srgbClr val="FFFFFF"/>
+                    </a:solidFill>
+                  </a:tcPr>
+                </a:tc>
+              </a:tr>
+              <a:tr h="94701">
+                <a:tc>
+                  <a:txBody>
+                    <a:bodyPr/>
+                    <a:lstStyle/>
+                    <a:p>
+                      <a:pPr>
+                        <a:defRPr sz="1300" b="0">
+                          <a:solidFill>
+                            <a:srgbClr val="000000"/>
+                          </a:solidFill>
+                          <a:latin typeface="Play"/>
+                          <a:ea typeface="Play"/>
+                          <a:cs typeface="Play"/>
+                        </a:defRPr>
+                      </a:pPr>
+                      <a:r>
+                        <a:t>Время ожидания</a:t>
+                      </a:r>
+                    </a:p>
+                  </a:txBody>
+                  <a:tcPr>
+                    <a:solidFill>
+                      <a:srgbClr val="FFFFFF"/>
+                    </a:solidFill>
+                  </a:tcPr>
+                </a:tc>
+                <a:tc>
+                  <a:txBody>
+                    <a:bodyPr/>
+                    <a:lstStyle/>
+                    <a:p>
+                      <a:pPr>
+                        <a:defRPr sz="1300" b="0">
+                          <a:solidFill>
+                            <a:srgbClr val="000000"/>
+                          </a:solidFill>
+                          <a:latin typeface="Play"/>
+                          <a:ea typeface="Play"/>
+                          <a:cs typeface="Play"/>
+                        </a:defRPr>
+                      </a:pPr>
+                      <a:r>
+                        <a:t>6 дней</a:t>
+                      </a:r>
+                    </a:p>
+                  </a:txBody>
+                  <a:tcPr>
+                    <a:solidFill>
+                      <a:srgbClr val="FFFFFF"/>
+                    </a:solidFill>
+                  </a:tcPr>
+                </a:tc>
+              </a:tr>
+            </a:tbl>
           </a:graphicData>
         </a:graphic>
       </p:graphicFrame>
@@ -7550,8 +7846,8 @@
         </p:nvSpPr>
         <p:spPr>
           <a:xfrm>
-            <a:off x="677387" y="4344501"/>
-            <a:ext cx="10855878" cy="501978"/>
+            <a:off x="677387" y="2863845"/>
+            <a:ext cx="10855878" cy="727688"/>
           </a:xfrm>
           <a:prstGeom prst="rect">
             <a:avLst/>
@@ -7572,9 +7868,9 @@
                 <a:solidFill>
                   <a:srgbClr val="000000"/>
                 </a:solidFill>
-                <a:latin typeface="Arial"/>
-                <a:ea typeface="Arial"/>
-                <a:cs typeface="Arial"/>
+                <a:latin typeface="Play"/>
+                <a:ea typeface="Play"/>
+                <a:cs typeface="Play"/>
               </a:defRPr>
             </a:pPr>
             <a:r>
@@ -7582,11 +7878,11 @@
                 <a:solidFill>
                   <a:srgbClr val="000000"/>
                 </a:solidFill>
-                <a:latin typeface="Arial"/>
-                <a:ea typeface="Arial"/>
-                <a:cs typeface="Arial"/>
+                <a:latin typeface="Play"/>
+                <a:ea typeface="Play"/>
+                <a:cs typeface="Play"/>
               </a:rPr>
-              <a:t>• Отдел маркетинга вручную собирает 42 колоды за квартал</a:t>
+              <a:t>• 42 колоды собраны вручную 2026</a:t>
             </a:r>
           </a:p>
           <a:p>
@@ -7598,9 +7894,9 @@
                 <a:solidFill>
                   <a:srgbClr val="000000"/>
                 </a:solidFill>
-                <a:latin typeface="Arial"/>
-                <a:ea typeface="Arial"/>
-                <a:cs typeface="Arial"/>
+                <a:latin typeface="Play"/>
+                <a:ea typeface="Play"/>
+                <a:cs typeface="Play"/>
               </a:defRPr>
             </a:pPr>
             <a:r>
@@ -7608,11 +7904,11 @@
                 <a:solidFill>
                   <a:srgbClr val="000000"/>
                 </a:solidFill>
-                <a:latin typeface="Arial"/>
-                <a:ea typeface="Arial"/>
-                <a:cs typeface="Arial"/>
+                <a:latin typeface="Play"/>
+                <a:ea typeface="Play"/>
+                <a:cs typeface="Play"/>
               </a:rPr>
-              <a:t>• 74 минуты уходит на правки после ревью дизайнера</a:t>
+              <a:t>• Сборка колоды занимает 186 мин</a:t>
             </a:r>
           </a:p>
           <a:p>
@@ -7624,9 +7920,9 @@
                 <a:solidFill>
                   <a:srgbClr val="000000"/>
                 </a:solidFill>
-                <a:latin typeface="Arial"/>
-                <a:ea typeface="Arial"/>
-                <a:cs typeface="Arial"/>
+                <a:latin typeface="Play"/>
+                <a:ea typeface="Play"/>
+                <a:cs typeface="Play"/>
               </a:defRPr>
             </a:pPr>
             <a:r>
@@ -7634,11 +7930,63 @@
                 <a:solidFill>
                   <a:srgbClr val="000000"/>
                 </a:solidFill>
-                <a:latin typeface="Arial"/>
-                <a:ea typeface="Arial"/>
-                <a:cs typeface="Arial"/>
+                <a:latin typeface="Play"/>
+                <a:ea typeface="Play"/>
+                <a:cs typeface="Play"/>
               </a:rPr>
-              <a:t>• 19 колод нарушают фирменный стиль</a:t>
+              <a:t>• Правки ревью добавляют 74 мин</a:t>
+            </a:r>
+          </a:p>
+          <a:p>
+            <a:pPr algn="l">
+              <a:spcAft>
+                <a:spcPts val="300"/>
+              </a:spcAft>
+              <a:defRPr sz="1200">
+                <a:solidFill>
+                  <a:srgbClr val="000000"/>
+                </a:solidFill>
+                <a:latin typeface="Play"/>
+                <a:ea typeface="Play"/>
+                <a:cs typeface="Play"/>
+              </a:defRPr>
+            </a:pPr>
+            <a:r>
+              <a:rPr sz="1200">
+                <a:solidFill>
+                  <a:srgbClr val="000000"/>
+                </a:solidFill>
+                <a:latin typeface="Play"/>
+                <a:ea typeface="Play"/>
+                <a:cs typeface="Play"/>
+              </a:rPr>
+              <a:t>• 19/42 колод нарушают стиль</a:t>
+            </a:r>
+          </a:p>
+          <a:p>
+            <a:pPr algn="l">
+              <a:spcAft>
+                <a:spcPts val="300"/>
+              </a:spcAft>
+              <a:defRPr sz="1200">
+                <a:solidFill>
+                  <a:srgbClr val="000000"/>
+                </a:solidFill>
+                <a:latin typeface="Play"/>
+                <a:ea typeface="Play"/>
+                <a:cs typeface="Play"/>
+              </a:defRPr>
+            </a:pPr>
+            <a:r>
+              <a:rPr sz="1200">
+                <a:solidFill>
+                  <a:srgbClr val="000000"/>
+                </a:solidFill>
+                <a:latin typeface="Play"/>
+                <a:ea typeface="Play"/>
+                <a:cs typeface="Play"/>
+              </a:rPr>
+              <a:t>• Дизайн‑отдел 4 закрывает 11 запросов/нед.</a:t>
             </a:r>
           </a:p>
         </p:txBody>
@@ -7677,7 +8025,7 @@
         <p:spPr>
           <a:xfrm>
             <a:off x="677387" y="692177"/>
-            <a:ext cx="10855878" cy="1447800"/>
+            <a:ext cx="10855878" cy="822960"/>
           </a:xfrm>
           <a:prstGeom prst="rect">
             <a:avLst/>
@@ -7712,7 +8060,7 @@
                 <a:ea typeface="Arial"/>
                 <a:cs typeface="Arial"/>
               </a:rPr>
-              <a:t>Сервис автоматически вёрстит презентации за 4 минуты</a:t>
+              <a:t>Предложение</a:t>
             </a:r>
           </a:p>
         </p:txBody>
@@ -7725,8 +8073,8 @@
         </p:nvSpPr>
         <p:spPr>
           <a:xfrm>
-            <a:off x="677387" y="2841924"/>
-            <a:ext cx="2066959" cy="1281514"/>
+            <a:off x="677387" y="1802589"/>
+            <a:ext cx="10855878" cy="361025"/>
           </a:xfrm>
           <a:prstGeom prst="homePlate">
             <a:avLst/>
@@ -7757,25 +8105,25 @@
           <a:lstStyle/>
           <a:p>
             <a:pPr algn="ctr">
-              <a:defRPr sz="1300" b="0">
+              <a:defRPr sz="1400" b="0">
                 <a:solidFill>
                   <a:srgbClr val="FFFFFF"/>
                 </a:solidFill>
-                <a:latin typeface="Arial"/>
-                <a:ea typeface="Arial"/>
-                <a:cs typeface="Arial"/>
+                <a:latin typeface="Play"/>
+                <a:ea typeface="Play"/>
+                <a:cs typeface="Play"/>
               </a:defRPr>
             </a:pPr>
             <a:r>
-              <a:rPr sz="1300" b="0">
+              <a:rPr sz="1400" b="0">
                 <a:solidFill>
                   <a:srgbClr val="FFFFFF"/>
                 </a:solidFill>
-                <a:latin typeface="Arial"/>
-                <a:ea typeface="Arial"/>
-                <a:cs typeface="Arial"/>
+                <a:latin typeface="Play"/>
+                <a:ea typeface="Play"/>
+                <a:cs typeface="Play"/>
               </a:rPr>
-              <a:t>Шаблон</a:t>
+              <a:t>Ввод шаблона</a:t>
             </a:r>
           </a:p>
         </p:txBody>
@@ -7788,8 +8136,8 @@
         </p:nvSpPr>
         <p:spPr>
           <a:xfrm>
-            <a:off x="2874616" y="2841924"/>
-            <a:ext cx="2066959" cy="1281514"/>
+            <a:off x="677387" y="2222386"/>
+            <a:ext cx="10855878" cy="361025"/>
           </a:xfrm>
           <a:prstGeom prst="chevron">
             <a:avLst/>
@@ -7820,25 +8168,25 @@
           <a:lstStyle/>
           <a:p>
             <a:pPr algn="ctr">
-              <a:defRPr sz="1300" b="0">
+              <a:defRPr sz="1400" b="0">
                 <a:solidFill>
                   <a:srgbClr val="FFFFFF"/>
                 </a:solidFill>
-                <a:latin typeface="Arial"/>
-                <a:ea typeface="Arial"/>
-                <a:cs typeface="Arial"/>
+                <a:latin typeface="Play"/>
+                <a:ea typeface="Play"/>
+                <a:cs typeface="Play"/>
               </a:defRPr>
             </a:pPr>
             <a:r>
-              <a:rPr sz="1300" b="0">
+              <a:rPr sz="1400" b="0">
                 <a:solidFill>
                   <a:srgbClr val="FFFFFF"/>
                 </a:solidFill>
-                <a:latin typeface="Arial"/>
-                <a:ea typeface="Arial"/>
-                <a:cs typeface="Arial"/>
+                <a:latin typeface="Play"/>
+                <a:ea typeface="Play"/>
+                <a:cs typeface="Play"/>
               </a:rPr>
-              <a:t>План</a:t>
+              <a:t>Анализ</a:t>
             </a:r>
           </a:p>
         </p:txBody>
@@ -7851,8 +8199,8 @@
         </p:nvSpPr>
         <p:spPr>
           <a:xfrm>
-            <a:off x="5071846" y="2841924"/>
-            <a:ext cx="2066959" cy="1281514"/>
+            <a:off x="677387" y="2642184"/>
+            <a:ext cx="10855878" cy="361025"/>
           </a:xfrm>
           <a:prstGeom prst="chevron">
             <a:avLst/>
@@ -7883,25 +8231,25 @@
           <a:lstStyle/>
           <a:p>
             <a:pPr algn="ctr">
-              <a:defRPr sz="1165" b="0">
+              <a:defRPr sz="1400" b="0">
                 <a:solidFill>
                   <a:srgbClr val="FFFFFF"/>
                 </a:solidFill>
-                <a:latin typeface="Arial"/>
-                <a:ea typeface="Arial"/>
-                <a:cs typeface="Arial"/>
+                <a:latin typeface="Play"/>
+                <a:ea typeface="Play"/>
+                <a:cs typeface="Play"/>
               </a:defRPr>
             </a:pPr>
             <a:r>
-              <a:rPr sz="1165" b="0">
+              <a:rPr sz="1400" b="0">
                 <a:solidFill>
                   <a:srgbClr val="FFFFFF"/>
                 </a:solidFill>
-                <a:latin typeface="Arial"/>
-                <a:ea typeface="Arial"/>
-                <a:cs typeface="Arial"/>
+                <a:latin typeface="Play"/>
+                <a:ea typeface="Play"/>
+                <a:cs typeface="Play"/>
               </a:rPr>
-              <a:t>Вёрстка</a:t>
+              <a:t>План колоды</a:t>
             </a:r>
           </a:p>
         </p:txBody>
@@ -7914,8 +8262,8 @@
         </p:nvSpPr>
         <p:spPr>
           <a:xfrm>
-            <a:off x="7269076" y="2841924"/>
-            <a:ext cx="2066959" cy="1281514"/>
+            <a:off x="677387" y="3061981"/>
+            <a:ext cx="10855878" cy="361025"/>
           </a:xfrm>
           <a:prstGeom prst="chevron">
             <a:avLst/>
@@ -7946,25 +8294,25 @@
           <a:lstStyle/>
           <a:p>
             <a:pPr algn="ctr">
-              <a:defRPr sz="1300" b="0">
+              <a:defRPr sz="1400" b="0">
                 <a:solidFill>
                   <a:srgbClr val="FFFFFF"/>
                 </a:solidFill>
-                <a:latin typeface="Arial"/>
-                <a:ea typeface="Arial"/>
-                <a:cs typeface="Arial"/>
+                <a:latin typeface="Play"/>
+                <a:ea typeface="Play"/>
+                <a:cs typeface="Play"/>
               </a:defRPr>
             </a:pPr>
             <a:r>
-              <a:rPr sz="1300" b="0">
+              <a:rPr sz="1400" b="0">
                 <a:solidFill>
                   <a:srgbClr val="FFFFFF"/>
                 </a:solidFill>
-                <a:latin typeface="Arial"/>
-                <a:ea typeface="Arial"/>
-                <a:cs typeface="Arial"/>
+                <a:latin typeface="Play"/>
+                <a:ea typeface="Play"/>
+                <a:cs typeface="Play"/>
               </a:rPr>
-              <a:t>Аудит</a:t>
+              <a:t>Вёрстка</a:t>
             </a:r>
           </a:p>
         </p:txBody>
@@ -7977,8 +8325,8 @@
         </p:nvSpPr>
         <p:spPr>
           <a:xfrm>
-            <a:off x="9466305" y="2841924"/>
-            <a:ext cx="2066959" cy="1281514"/>
+            <a:off x="677387" y="3481778"/>
+            <a:ext cx="10855878" cy="361025"/>
           </a:xfrm>
           <a:prstGeom prst="chevron">
             <a:avLst/>
@@ -8009,23 +8357,86 @@
           <a:lstStyle/>
           <a:p>
             <a:pPr algn="ctr">
-              <a:defRPr sz="1165" b="0">
+              <a:defRPr sz="1400" b="0">
                 <a:solidFill>
                   <a:srgbClr val="FFFFFF"/>
                 </a:solidFill>
-                <a:latin typeface="Arial"/>
-                <a:ea typeface="Arial"/>
-                <a:cs typeface="Arial"/>
+                <a:latin typeface="Play"/>
+                <a:ea typeface="Play"/>
+                <a:cs typeface="Play"/>
               </a:defRPr>
             </a:pPr>
             <a:r>
-              <a:rPr sz="1165" b="0">
+              <a:rPr sz="1400" b="0">
                 <a:solidFill>
                   <a:srgbClr val="FFFFFF"/>
                 </a:solidFill>
-                <a:latin typeface="Arial"/>
-                <a:ea typeface="Arial"/>
-                <a:cs typeface="Arial"/>
+                <a:latin typeface="Play"/>
+                <a:ea typeface="Play"/>
+                <a:cs typeface="Play"/>
+              </a:rPr>
+              <a:t>Аудит</a:t>
+            </a:r>
+          </a:p>
+        </p:txBody>
+      </p:sp>
+      <p:sp>
+        <p:nvSpPr>
+          <p:cNvPr id="8" name="Chevron 7"/>
+          <p:cNvSpPr/>
+          <p:nvPr/>
+        </p:nvSpPr>
+        <p:spPr>
+          <a:xfrm>
+            <a:off x="677387" y="3901575"/>
+            <a:ext cx="10855878" cy="361025"/>
+          </a:xfrm>
+          <a:prstGeom prst="chevron">
+            <a:avLst/>
+          </a:prstGeom>
+          <a:solidFill>
+            <a:srgbClr val="0077FF"/>
+          </a:solidFill>
+          <a:ln>
+            <a:noFill/>
+          </a:ln>
+        </p:spPr>
+        <p:style>
+          <a:lnRef idx="1">
+            <a:schemeClr val="accent1"/>
+          </a:lnRef>
+          <a:fillRef idx="3">
+            <a:schemeClr val="accent1"/>
+          </a:fillRef>
+          <a:effectRef idx="2">
+            <a:schemeClr val="accent1"/>
+          </a:effectRef>
+          <a:fontRef idx="minor">
+            <a:schemeClr val="lt1"/>
+          </a:fontRef>
+        </p:style>
+        <p:txBody>
+          <a:bodyPr rtlCol="0" anchor="ctr" wrap="square" lIns="12700" rIns="12700" tIns="12700" bIns="12700"/>
+          <a:lstStyle/>
+          <a:p>
+            <a:pPr algn="ctr">
+              <a:defRPr sz="1400" b="0">
+                <a:solidFill>
+                  <a:srgbClr val="FFFFFF"/>
+                </a:solidFill>
+                <a:latin typeface="Play"/>
+                <a:ea typeface="Play"/>
+                <a:cs typeface="Play"/>
+              </a:defRPr>
+            </a:pPr>
+            <a:r>
+              <a:rPr sz="1400" b="0">
+                <a:solidFill>
+                  <a:srgbClr val="FFFFFF"/>
+                </a:solidFill>
+                <a:latin typeface="Play"/>
+                <a:ea typeface="Play"/>
+                <a:cs typeface="Play"/>
               </a:rPr>
               <a:t>Экспорт</a:t>
             </a:r>
@@ -8034,14 +8445,14 @@
       </p:sp>
       <p:sp>
         <p:nvSpPr>
-          <p:cNvPr id="8" name="body"/>
+          <p:cNvPr id="9" name="body"/>
           <p:cNvSpPr txBox="1"/>
           <p:nvPr/>
         </p:nvSpPr>
         <p:spPr>
           <a:xfrm>
-            <a:off x="677387" y="4859677"/>
-            <a:ext cx="10855878" cy="1341120"/>
+            <a:off x="677387" y="4463437"/>
+            <a:ext cx="10855878" cy="1737360"/>
           </a:xfrm>
           <a:prstGeom prst="rect">
             <a:avLst/>
@@ -8062,9 +8473,9 @@
                 <a:solidFill>
                   <a:srgbClr val="000000"/>
                 </a:solidFill>
-                <a:latin typeface="Arial"/>
-                <a:ea typeface="Arial"/>
-                <a:cs typeface="Arial"/>
+                <a:latin typeface="Play"/>
+                <a:ea typeface="Play"/>
+                <a:cs typeface="Play"/>
               </a:defRPr>
             </a:pPr>
             <a:r>
@@ -8072,11 +8483,11 @@
                 <a:solidFill>
                   <a:srgbClr val="000000"/>
                 </a:solidFill>
-                <a:latin typeface="Arial"/>
-                <a:ea typeface="Arial"/>
-                <a:cs typeface="Arial"/>
+                <a:latin typeface="Play"/>
+                <a:ea typeface="Play"/>
+                <a:cs typeface="Play"/>
               </a:rPr>
-              <a:t>• Принимает шаблон pptx и материалы</a:t>
+              <a:t>• Сервис принимает шаблон pptx и материалы</a:t>
             </a:r>
           </a:p>
           <a:p>
@@ -8088,9 +8499,9 @@
                 <a:solidFill>
                   <a:srgbClr val="000000"/>
                 </a:solidFill>
-                <a:latin typeface="Arial"/>
-                <a:ea typeface="Arial"/>
-                <a:cs typeface="Arial"/>
+                <a:latin typeface="Play"/>
+                <a:ea typeface="Play"/>
+                <a:cs typeface="Play"/>
               </a:defRPr>
             </a:pPr>
             <a:r>
@@ -8098,11 +8509,11 @@
                 <a:solidFill>
                   <a:srgbClr val="000000"/>
                 </a:solidFill>
-                <a:latin typeface="Arial"/>
-                <a:ea typeface="Arial"/>
-                <a:cs typeface="Arial"/>
+                <a:latin typeface="Play"/>
+                <a:ea typeface="Play"/>
+                <a:cs typeface="Play"/>
               </a:rPr>
-              <a:t>• Автоматически формирует план колоды</a:t>
+              <a:t>• Автоматически строит план колоды и вёрстку по дизайн‑системе</a:t>
             </a:r>
           </a:p>
           <a:p>
@@ -8114,9 +8525,9 @@
                 <a:solidFill>
                   <a:srgbClr val="000000"/>
                 </a:solidFill>
-                <a:latin typeface="Arial"/>
-                <a:ea typeface="Arial"/>
-                <a:cs typeface="Arial"/>
+                <a:latin typeface="Play"/>
+                <a:ea typeface="Play"/>
+                <a:cs typeface="Play"/>
               </a:defRPr>
             </a:pPr>
             <a:r>
@@ -8124,11 +8535,37 @@
                 <a:solidFill>
                   <a:srgbClr val="000000"/>
                 </a:solidFill>
-                <a:latin typeface="Arial"/>
-                <a:ea typeface="Arial"/>
-                <a:cs typeface="Arial"/>
+                <a:latin typeface="Play"/>
+                <a:ea typeface="Play"/>
+                <a:cs typeface="Play"/>
               </a:rPr>
-              <a:t>• Экспорт в pptx, pdf, html</a:t>
+              <a:t>• Аудит качества проверяет все цифры и стили</a:t>
+            </a:r>
+          </a:p>
+          <a:p>
+            <a:pPr algn="l">
+              <a:spcAft>
+                <a:spcPts val="300"/>
+              </a:spcAft>
+              <a:defRPr sz="1800">
+                <a:solidFill>
+                  <a:srgbClr val="000000"/>
+                </a:solidFill>
+                <a:latin typeface="Play"/>
+                <a:ea typeface="Play"/>
+                <a:cs typeface="Play"/>
+              </a:defRPr>
+            </a:pPr>
+            <a:r>
+              <a:rPr sz="1800">
+                <a:solidFill>
+                  <a:srgbClr val="000000"/>
+                </a:solidFill>
+                <a:latin typeface="Play"/>
+                <a:ea typeface="Play"/>
+                <a:cs typeface="Play"/>
+              </a:rPr>
+              <a:t>• Экспорт в pptx, pdf и html без картинок</a:t>
             </a:r>
           </a:p>
         </p:txBody>
@@ -8167,7 +8604,7 @@
         <p:spPr>
           <a:xfrm>
             <a:off x="677387" y="692177"/>
-            <a:ext cx="10855878" cy="1447800"/>
+            <a:ext cx="10855878" cy="822960"/>
           </a:xfrm>
           <a:prstGeom prst="rect">
             <a:avLst/>
@@ -8202,7 +8639,7 @@
                 <a:ea typeface="Arial"/>
                 <a:cs typeface="Arial"/>
               </a:rPr>
-              <a:t>Пилот сократил время сборки до 4 минут</a:t>
+              <a:t>Ожидаемый эффект</a:t>
             </a:r>
           </a:p>
         </p:txBody>
@@ -8216,8 +8653,8 @@
           <p:nvPr/>
         </p:nvGraphicFramePr>
         <p:xfrm>
-          <a:off x="677387" y="2277137"/>
-          <a:ext cx="10855878" cy="2411089"/>
+          <a:off x="677387" y="1773204"/>
+          <a:ext cx="10855878" cy="2518783"/>
         </p:xfrm>
         <a:graphic>
           <a:graphicData uri="http://schemas.openxmlformats.org/drawingml/2006/chart">
@@ -8233,8 +8670,8 @@
         </p:nvSpPr>
         <p:spPr>
           <a:xfrm>
-            <a:off x="677387" y="4859677"/>
-            <a:ext cx="10855878" cy="1341120"/>
+            <a:off x="677387" y="4463437"/>
+            <a:ext cx="10855878" cy="1737360"/>
           </a:xfrm>
           <a:prstGeom prst="rect">
             <a:avLst/>
@@ -8255,9 +8692,9 @@
                 <a:solidFill>
                   <a:srgbClr val="000000"/>
                 </a:solidFill>
-                <a:latin typeface="Arial"/>
-                <a:ea typeface="Arial"/>
-                <a:cs typeface="Arial"/>
+                <a:latin typeface="Play"/>
+                <a:ea typeface="Play"/>
+                <a:cs typeface="Play"/>
               </a:defRPr>
             </a:pPr>
             <a:r>
@@ -8265,11 +8702,11 @@
                 <a:solidFill>
                   <a:srgbClr val="000000"/>
                 </a:solidFill>
-                <a:latin typeface="Arial"/>
-                <a:ea typeface="Arial"/>
-                <a:cs typeface="Arial"/>
+                <a:latin typeface="Play"/>
+                <a:ea typeface="Play"/>
+                <a:cs typeface="Play"/>
               </a:rPr>
-              <a:t>• Среднее время 4 минуты вместо 186</a:t>
+              <a:t>• Средняя сборка колоды 4 минуты вместо 186</a:t>
             </a:r>
           </a:p>
           <a:p>
@@ -8281,9 +8718,9 @@
                 <a:solidFill>
                   <a:srgbClr val="000000"/>
                 </a:solidFill>
-                <a:latin typeface="Arial"/>
-                <a:ea typeface="Arial"/>
-                <a:cs typeface="Arial"/>
+                <a:latin typeface="Play"/>
+                <a:ea typeface="Play"/>
+                <a:cs typeface="Play"/>
               </a:defRPr>
             </a:pPr>
             <a:r>
@@ -8291,11 +8728,11 @@
                 <a:solidFill>
                   <a:srgbClr val="000000"/>
                 </a:solidFill>
-                <a:latin typeface="Arial"/>
-                <a:ea typeface="Arial"/>
-                <a:cs typeface="Arial"/>
+                <a:latin typeface="Play"/>
+                <a:ea typeface="Play"/>
+                <a:cs typeface="Play"/>
               </a:rPr>
-              <a:t>• Срок до первой версии сократился с 6 дней до 1</a:t>
+              <a:t>• Время до первой версии сократилось с 6 дней до 1</a:t>
             </a:r>
           </a:p>
           <a:p>
@@ -8307,9 +8744,9 @@
                 <a:solidFill>
                   <a:srgbClr val="000000"/>
                 </a:solidFill>
-                <a:latin typeface="Arial"/>
-                <a:ea typeface="Arial"/>
-                <a:cs typeface="Arial"/>
+                <a:latin typeface="Play"/>
+                <a:ea typeface="Play"/>
+                <a:cs typeface="Play"/>
               </a:defRPr>
             </a:pPr>
             <a:r>
@@ -8317,11 +8754,37 @@
                 <a:solidFill>
                   <a:srgbClr val="000000"/>
                 </a:solidFill>
-                <a:latin typeface="Arial"/>
-                <a:ea typeface="Arial"/>
-                <a:cs typeface="Arial"/>
+                <a:latin typeface="Play"/>
+                <a:ea typeface="Play"/>
+                <a:cs typeface="Play"/>
               </a:rPr>
-              <a:t>• Нарушений стиля 2 из 68</a:t>
+              <a:t>• Нарушения фирменного стиля снизились до 2 из 68</a:t>
+            </a:r>
+          </a:p>
+          <a:p>
+            <a:pPr algn="l">
+              <a:spcAft>
+                <a:spcPts val="300"/>
+              </a:spcAft>
+              <a:defRPr sz="1600">
+                <a:solidFill>
+                  <a:srgbClr val="000000"/>
+                </a:solidFill>
+                <a:latin typeface="Play"/>
+                <a:ea typeface="Play"/>
+                <a:cs typeface="Play"/>
+              </a:defRPr>
+            </a:pPr>
+            <a:r>
+              <a:rPr sz="1600">
+                <a:solidFill>
+                  <a:srgbClr val="000000"/>
+                </a:solidFill>
+                <a:latin typeface="Play"/>
+                <a:ea typeface="Play"/>
+                <a:cs typeface="Play"/>
+              </a:rPr>
+              <a:t>• Дизайнеры закрыли 38 запросов вместо 11 в неделю</a:t>
             </a:r>
           </a:p>
         </p:txBody>
@@ -8335,6 +8798,614 @@
 </file>
 
 <file path=ppt/slides/slide60.xml><?xml version="1.0" encoding="utf-8"?>
+<p:sld xmlns:a="http://schemas.openxmlformats.org/drawingml/2006/main" xmlns:p="http://schemas.openxmlformats.org/presentationml/2006/main" xmlns:r="http://schemas.openxmlformats.org/officeDocument/2006/relationships">
+  <p:cSld>
+    <p:spTree>
+      <p:nvGrpSpPr>
+        <p:cNvPr id="1" name=""/>
+        <p:cNvGrpSpPr/>
+        <p:nvPr/>
+      </p:nvGrpSpPr>
+      <p:grpSpPr/>
+      <p:cxnSp>
+        <p:nvCxnSpPr>
+          <p:cNvPr id="918" name="Google Shape;918;p74"/>
+          <p:cNvCxnSpPr/>
+          <p:nvPr/>
+        </p:nvCxnSpPr>
+        <p:spPr>
+          <a:xfrm rot="10800000">
+            <a:off x="658813" y="2199500"/>
+            <a:ext cx="11533187" cy="0"/>
+          </a:xfrm>
+          <a:prstGeom prst="straightConnector1">
+            <a:avLst/>
+          </a:prstGeom>
+          <a:noFill/>
+          <a:ln cap="flat" cmpd="sng" w="19050">
+            <a:solidFill>
+              <a:schemeClr val="accent4"/>
+            </a:solidFill>
+            <a:prstDash val="solid"/>
+            <a:miter lim="8000"/>
+            <a:headEnd len="sm" w="sm" type="none"/>
+            <a:tailEnd len="sm" w="sm" type="none"/>
+          </a:ln>
+        </p:spPr>
+      </p:cxnSp>
+      <p:cxnSp>
+        <p:nvCxnSpPr>
+          <p:cNvPr id="919" name="Google Shape;919;p74"/>
+          <p:cNvCxnSpPr/>
+          <p:nvPr/>
+        </p:nvCxnSpPr>
+        <p:spPr>
+          <a:xfrm flipH="1">
+            <a:off x="1" y="4351265"/>
+            <a:ext cx="8112124" cy="42098"/>
+          </a:xfrm>
+          <a:prstGeom prst="straightConnector1">
+            <a:avLst/>
+          </a:prstGeom>
+          <a:noFill/>
+          <a:ln cap="flat" cmpd="sng" w="19050">
+            <a:solidFill>
+              <a:schemeClr val="accent4"/>
+            </a:solidFill>
+            <a:prstDash val="solid"/>
+            <a:miter lim="8000"/>
+            <a:headEnd len="lg" w="lg" type="stealth"/>
+            <a:tailEnd len="sm" w="sm" type="none"/>
+          </a:ln>
+        </p:spPr>
+      </p:cxnSp>
+      <p:sp>
+        <p:nvSpPr>
+          <p:cNvPr id="920" name="title"/>
+          <p:cNvSpPr txBox="1"/>
+          <p:nvPr/>
+        </p:nvSpPr>
+        <p:spPr>
+          <a:xfrm>
+            <a:off x="677387" y="692177"/>
+            <a:ext cx="10855878" cy="822960"/>
+          </a:xfrm>
+          <a:prstGeom prst="rect">
+            <a:avLst/>
+          </a:prstGeom>
+          <a:noFill/>
+        </p:spPr>
+        <p:txBody>
+          <a:bodyPr wrap="square" lIns="76200" rIns="76200" tIns="50800" bIns="50800">
+            <a:spAutoFit/>
+          </a:bodyPr>
+          <a:lstStyle/>
+          <a:p>
+            <a:pPr algn="l">
+              <a:spcAft>
+                <a:spcPts val="300"/>
+              </a:spcAft>
+              <a:defRPr sz="4000">
+                <a:solidFill>
+                  <a:srgbClr val="000000"/>
+                </a:solidFill>
+                <a:latin typeface="Arial"/>
+                <a:ea typeface="Arial"/>
+                <a:cs typeface="Arial"/>
+              </a:defRPr>
+            </a:pPr>
+            <a:r>
+              <a:rPr sz="4000">
+                <a:solidFill>
+                  <a:srgbClr val="000000"/>
+                </a:solidFill>
+                <a:latin typeface="Arial"/>
+                <a:ea typeface="Arial"/>
+                <a:cs typeface="Arial"/>
+              </a:rPr>
+              <a:t>Ресурсы и сроки</a:t>
+            </a:r>
+          </a:p>
+        </p:txBody>
+      </p:sp>
+      <p:sp>
+        <p:nvSpPr>
+          <p:cNvPr id="921" name="Rectangle 920"/>
+          <p:cNvSpPr/>
+          <p:nvPr/>
+        </p:nvSpPr>
+        <p:spPr>
+          <a:xfrm>
+            <a:off x="677387" y="2715559"/>
+            <a:ext cx="10855878" cy="33562"/>
+          </a:xfrm>
+          <a:prstGeom prst="rect">
+            <a:avLst/>
+          </a:prstGeom>
+          <a:solidFill>
+            <a:srgbClr val="0077FF"/>
+          </a:solidFill>
+          <a:ln>
+            <a:noFill/>
+          </a:ln>
+        </p:spPr>
+        <p:style>
+          <a:lnRef idx="1">
+            <a:schemeClr val="accent1"/>
+          </a:lnRef>
+          <a:fillRef idx="3">
+            <a:schemeClr val="accent1"/>
+          </a:fillRef>
+          <a:effectRef idx="2">
+            <a:schemeClr val="accent1"/>
+          </a:effectRef>
+          <a:fontRef idx="minor">
+            <a:schemeClr val="lt1"/>
+          </a:fontRef>
+        </p:style>
+        <p:txBody>
+          <a:bodyPr rtlCol="0" anchor="ctr"/>
+          <a:lstStyle/>
+          <a:p>
+            <a:pPr algn="ctr"/>
+          </a:p>
+        </p:txBody>
+      </p:sp>
+      <p:sp>
+        <p:nvSpPr>
+          <p:cNvPr id="922" name="Oval 921"/>
+          <p:cNvSpPr/>
+          <p:nvPr/>
+        </p:nvSpPr>
+        <p:spPr>
+          <a:xfrm>
+            <a:off x="2363638" y="2609278"/>
+            <a:ext cx="246123" cy="246123"/>
+          </a:xfrm>
+          <a:prstGeom prst="ellipse">
+            <a:avLst/>
+          </a:prstGeom>
+          <a:solidFill>
+            <a:srgbClr val="0077FF"/>
+          </a:solidFill>
+          <a:ln>
+            <a:noFill/>
+          </a:ln>
+        </p:spPr>
+        <p:style>
+          <a:lnRef idx="1">
+            <a:schemeClr val="accent1"/>
+          </a:lnRef>
+          <a:fillRef idx="3">
+            <a:schemeClr val="accent1"/>
+          </a:fillRef>
+          <a:effectRef idx="2">
+            <a:schemeClr val="accent1"/>
+          </a:effectRef>
+          <a:fontRef idx="minor">
+            <a:schemeClr val="lt1"/>
+          </a:fontRef>
+        </p:style>
+        <p:txBody>
+          <a:bodyPr rtlCol="0" anchor="ctr"/>
+          <a:lstStyle/>
+          <a:p>
+            <a:pPr algn="ctr"/>
+          </a:p>
+        </p:txBody>
+      </p:sp>
+      <p:sp>
+        <p:nvSpPr>
+          <p:cNvPr id="923" name="TextBox 922"/>
+          <p:cNvSpPr txBox="1"/>
+          <p:nvPr/>
+        </p:nvSpPr>
+        <p:spPr>
+          <a:xfrm>
+            <a:off x="677387" y="2200937"/>
+            <a:ext cx="5427939" cy="425123"/>
+          </a:xfrm>
+          <a:prstGeom prst="rect">
+            <a:avLst/>
+          </a:prstGeom>
+          <a:noFill/>
+        </p:spPr>
+        <p:txBody>
+          <a:bodyPr wrap="square" lIns="12700" rIns="12700" tIns="12700" bIns="12700">
+            <a:spAutoFit/>
+          </a:bodyPr>
+          <a:lstStyle/>
+          <a:p>
+            <a:pPr algn="ctr">
+              <a:defRPr sz="1400" b="0">
+                <a:solidFill>
+                  <a:srgbClr val="000000"/>
+                </a:solidFill>
+                <a:latin typeface="Play"/>
+                <a:ea typeface="Play"/>
+                <a:cs typeface="Play"/>
+              </a:defRPr>
+            </a:pPr>
+            <a:r>
+              <a:rPr sz="1400" b="0">
+                <a:solidFill>
+                  <a:srgbClr val="000000"/>
+                </a:solidFill>
+                <a:latin typeface="Play"/>
+                <a:ea typeface="Play"/>
+                <a:cs typeface="Play"/>
+              </a:rPr>
+              <a:t>Третий квартал 2026</a:t>
+            </a:r>
+          </a:p>
+        </p:txBody>
+      </p:sp>
+      <p:sp>
+        <p:nvSpPr>
+          <p:cNvPr id="924" name="Oval 923"/>
+          <p:cNvSpPr/>
+          <p:nvPr/>
+        </p:nvSpPr>
+        <p:spPr>
+          <a:xfrm>
+            <a:off x="5982264" y="2609278"/>
+            <a:ext cx="246123" cy="246123"/>
+          </a:xfrm>
+          <a:prstGeom prst="ellipse">
+            <a:avLst/>
+          </a:prstGeom>
+          <a:solidFill>
+            <a:srgbClr val="0077FF"/>
+          </a:solidFill>
+          <a:ln>
+            <a:noFill/>
+          </a:ln>
+        </p:spPr>
+        <p:style>
+          <a:lnRef idx="1">
+            <a:schemeClr val="accent1"/>
+          </a:lnRef>
+          <a:fillRef idx="3">
+            <a:schemeClr val="accent1"/>
+          </a:fillRef>
+          <a:effectRef idx="2">
+            <a:schemeClr val="accent1"/>
+          </a:effectRef>
+          <a:fontRef idx="minor">
+            <a:schemeClr val="lt1"/>
+          </a:fontRef>
+        </p:style>
+        <p:txBody>
+          <a:bodyPr rtlCol="0" anchor="ctr"/>
+          <a:lstStyle/>
+          <a:p>
+            <a:pPr algn="ctr"/>
+          </a:p>
+        </p:txBody>
+      </p:sp>
+      <p:sp>
+        <p:nvSpPr>
+          <p:cNvPr id="925" name="TextBox 924"/>
+          <p:cNvSpPr txBox="1"/>
+          <p:nvPr/>
+        </p:nvSpPr>
+        <p:spPr>
+          <a:xfrm>
+            <a:off x="3391356" y="2961683"/>
+            <a:ext cx="5427939" cy="425123"/>
+          </a:xfrm>
+          <a:prstGeom prst="rect">
+            <a:avLst/>
+          </a:prstGeom>
+          <a:noFill/>
+        </p:spPr>
+        <p:txBody>
+          <a:bodyPr wrap="square" lIns="12700" rIns="12700" tIns="12700" bIns="12700">
+            <a:spAutoFit/>
+          </a:bodyPr>
+          <a:lstStyle/>
+          <a:p>
+            <a:pPr algn="ctr">
+              <a:defRPr sz="1400" b="0">
+                <a:solidFill>
+                  <a:srgbClr val="000000"/>
+                </a:solidFill>
+                <a:latin typeface="Play"/>
+                <a:ea typeface="Play"/>
+                <a:cs typeface="Play"/>
+              </a:defRPr>
+            </a:pPr>
+            <a:r>
+              <a:rPr sz="1400" b="0">
+                <a:solidFill>
+                  <a:srgbClr val="000000"/>
+                </a:solidFill>
+                <a:latin typeface="Play"/>
+                <a:ea typeface="Play"/>
+                <a:cs typeface="Play"/>
+              </a:rPr>
+              <a:t>Четвёртый квартал 2026</a:t>
+            </a:r>
+          </a:p>
+        </p:txBody>
+      </p:sp>
+      <p:sp>
+        <p:nvSpPr>
+          <p:cNvPr id="926" name="Oval 925"/>
+          <p:cNvSpPr/>
+          <p:nvPr/>
+        </p:nvSpPr>
+        <p:spPr>
+          <a:xfrm>
+            <a:off x="9600890" y="2609278"/>
+            <a:ext cx="246123" cy="246123"/>
+          </a:xfrm>
+          <a:prstGeom prst="ellipse">
+            <a:avLst/>
+          </a:prstGeom>
+          <a:solidFill>
+            <a:srgbClr val="0077FF"/>
+          </a:solidFill>
+          <a:ln>
+            <a:noFill/>
+          </a:ln>
+        </p:spPr>
+        <p:style>
+          <a:lnRef idx="1">
+            <a:schemeClr val="accent1"/>
+          </a:lnRef>
+          <a:fillRef idx="3">
+            <a:schemeClr val="accent1"/>
+          </a:fillRef>
+          <a:effectRef idx="2">
+            <a:schemeClr val="accent1"/>
+          </a:effectRef>
+          <a:fontRef idx="minor">
+            <a:schemeClr val="lt1"/>
+          </a:fontRef>
+        </p:style>
+        <p:txBody>
+          <a:bodyPr rtlCol="0" anchor="ctr"/>
+          <a:lstStyle/>
+          <a:p>
+            <a:pPr algn="ctr"/>
+          </a:p>
+        </p:txBody>
+      </p:sp>
+      <p:sp>
+        <p:nvSpPr>
+          <p:cNvPr id="927" name="TextBox 926"/>
+          <p:cNvSpPr txBox="1"/>
+          <p:nvPr/>
+        </p:nvSpPr>
+        <p:spPr>
+          <a:xfrm>
+            <a:off x="6105326" y="2200937"/>
+            <a:ext cx="5427939" cy="425123"/>
+          </a:xfrm>
+          <a:prstGeom prst="rect">
+            <a:avLst/>
+          </a:prstGeom>
+          <a:noFill/>
+        </p:spPr>
+        <p:txBody>
+          <a:bodyPr wrap="square" lIns="12700" rIns="12700" tIns="12700" bIns="12700">
+            <a:spAutoFit/>
+          </a:bodyPr>
+          <a:lstStyle/>
+          <a:p>
+            <a:pPr algn="ctr">
+              <a:defRPr sz="1400" b="0">
+                <a:solidFill>
+                  <a:srgbClr val="000000"/>
+                </a:solidFill>
+                <a:latin typeface="Play"/>
+                <a:ea typeface="Play"/>
+                <a:cs typeface="Play"/>
+              </a:defRPr>
+            </a:pPr>
+            <a:r>
+              <a:rPr sz="1400" b="0">
+                <a:solidFill>
+                  <a:srgbClr val="000000"/>
+                </a:solidFill>
+                <a:latin typeface="Play"/>
+                <a:ea typeface="Play"/>
+                <a:cs typeface="Play"/>
+              </a:rPr>
+              <a:t>Первый квартал 2027</a:t>
+            </a:r>
+          </a:p>
+        </p:txBody>
+      </p:sp>
+      <p:sp>
+        <p:nvSpPr>
+          <p:cNvPr id="928" name="body"/>
+          <p:cNvSpPr txBox="1"/>
+          <p:nvPr/>
+        </p:nvSpPr>
+        <p:spPr>
+          <a:xfrm>
+            <a:off x="677387" y="3319683"/>
+            <a:ext cx="10855878" cy="1031580"/>
+          </a:xfrm>
+          <a:prstGeom prst="rect">
+            <a:avLst/>
+          </a:prstGeom>
+          <a:noFill/>
+        </p:spPr>
+        <p:txBody>
+          <a:bodyPr wrap="square" lIns="76200" rIns="76200" tIns="50800" bIns="50800">
+            <a:spAutoFit/>
+          </a:bodyPr>
+          <a:lstStyle/>
+          <a:p>
+            <a:pPr algn="l">
+              <a:spcAft>
+                <a:spcPts val="300"/>
+              </a:spcAft>
+              <a:defRPr sz="1200">
+                <a:solidFill>
+                  <a:srgbClr val="000000"/>
+                </a:solidFill>
+                <a:latin typeface="Play"/>
+                <a:ea typeface="Play"/>
+                <a:cs typeface="Play"/>
+              </a:defRPr>
+            </a:pPr>
+            <a:r>
+              <a:rPr sz="1200">
+                <a:solidFill>
+                  <a:srgbClr val="000000"/>
+                </a:solidFill>
+                <a:latin typeface="Play"/>
+                <a:ea typeface="Play"/>
+                <a:cs typeface="Play"/>
+              </a:rPr>
+              <a:t>• 2 vCPU / 2 ГБ RAM</a:t>
+            </a:r>
+          </a:p>
+          <a:p>
+            <a:pPr algn="l">
+              <a:spcAft>
+                <a:spcPts val="300"/>
+              </a:spcAft>
+              <a:defRPr sz="1200">
+                <a:solidFill>
+                  <a:srgbClr val="000000"/>
+                </a:solidFill>
+                <a:latin typeface="Play"/>
+                <a:ea typeface="Play"/>
+                <a:cs typeface="Play"/>
+              </a:defRPr>
+            </a:pPr>
+            <a:r>
+              <a:rPr sz="1200">
+                <a:solidFill>
+                  <a:srgbClr val="000000"/>
+                </a:solidFill>
+                <a:latin typeface="Play"/>
+                <a:ea typeface="Play"/>
+                <a:cs typeface="Play"/>
+              </a:rPr>
+              <a:t>• gpt-oss-20b подключен протоколу</a:t>
+            </a:r>
+          </a:p>
+          <a:p>
+            <a:pPr algn="l">
+              <a:spcAft>
+                <a:spcPts val="300"/>
+              </a:spcAft>
+              <a:defRPr sz="1200">
+                <a:solidFill>
+                  <a:srgbClr val="000000"/>
+                </a:solidFill>
+                <a:latin typeface="Play"/>
+                <a:ea typeface="Play"/>
+                <a:cs typeface="Play"/>
+              </a:defRPr>
+            </a:pPr>
+            <a:r>
+              <a:rPr sz="1200">
+                <a:solidFill>
+                  <a:srgbClr val="000000"/>
+                </a:solidFill>
+                <a:latin typeface="Play"/>
+                <a:ea typeface="Play"/>
+                <a:cs typeface="Play"/>
+              </a:rPr>
+              <a:t>• Инференс 6 недель 1 400 руб.</a:t>
+            </a:r>
+          </a:p>
+          <a:p>
+            <a:pPr algn="l">
+              <a:spcAft>
+                <a:spcPts val="300"/>
+              </a:spcAft>
+              <a:defRPr sz="1200">
+                <a:solidFill>
+                  <a:srgbClr val="000000"/>
+                </a:solidFill>
+                <a:latin typeface="Play"/>
+                <a:ea typeface="Play"/>
+                <a:cs typeface="Play"/>
+              </a:defRPr>
+            </a:pPr>
+            <a:r>
+              <a:rPr sz="1200">
+                <a:solidFill>
+                  <a:srgbClr val="000000"/>
+                </a:solidFill>
+                <a:latin typeface="Play"/>
+                <a:ea typeface="Play"/>
+                <a:cs typeface="Play"/>
+              </a:rPr>
+              <a:t>• Квартал 2026: 4 команды, домен, HTTPS</a:t>
+            </a:r>
+          </a:p>
+          <a:p>
+            <a:pPr algn="l">
+              <a:spcAft>
+                <a:spcPts val="300"/>
+              </a:spcAft>
+              <a:defRPr sz="1200">
+                <a:solidFill>
+                  <a:srgbClr val="000000"/>
+                </a:solidFill>
+                <a:latin typeface="Play"/>
+                <a:ea typeface="Play"/>
+                <a:cs typeface="Play"/>
+              </a:defRPr>
+            </a:pPr>
+            <a:r>
+              <a:rPr sz="1200">
+                <a:solidFill>
+                  <a:srgbClr val="000000"/>
+                </a:solidFill>
+                <a:latin typeface="Play"/>
+                <a:ea typeface="Play"/>
+                <a:cs typeface="Play"/>
+              </a:rPr>
+              <a:t>• Квартал 2026: доступ, интеграция хранилища</a:t>
+            </a:r>
+          </a:p>
+          <a:p>
+            <a:pPr algn="l">
+              <a:spcAft>
+                <a:spcPts val="300"/>
+              </a:spcAft>
+              <a:defRPr sz="1200">
+                <a:solidFill>
+                  <a:srgbClr val="000000"/>
+                </a:solidFill>
+                <a:latin typeface="Play"/>
+                <a:ea typeface="Play"/>
+                <a:cs typeface="Play"/>
+              </a:defRPr>
+            </a:pPr>
+            <a:r>
+              <a:rPr sz="1200">
+                <a:solidFill>
+                  <a:srgbClr val="000000"/>
+                </a:solidFill>
+                <a:latin typeface="Play"/>
+                <a:ea typeface="Play"/>
+                <a:cs typeface="Play"/>
+              </a:rPr>
+              <a:t>• 2027: генерация иллюстраций в стиле шаблона</a:t>
+            </a:r>
+          </a:p>
+        </p:txBody>
+      </p:sp>
+    </p:spTree>
+  </p:cSld>
+  <p:clrMapOvr>
+    <a:masterClrMapping/>
+  </p:clrMapOvr>
+</p:sld>
+</file>
+
+<file path=ppt/slides/slide61.xml><?xml version="1.0" encoding="utf-8"?>
 <p:sld xmlns:a="http://schemas.openxmlformats.org/drawingml/2006/main" xmlns:p="http://schemas.openxmlformats.org/presentationml/2006/main" xmlns:r="http://schemas.openxmlformats.org/officeDocument/2006/relationships">
   <p:cSld>
     <p:bg>
@@ -8417,7 +9488,7 @@
         <p:spPr>
           <a:xfrm>
             <a:off x="677387" y="692177"/>
-            <a:ext cx="10855878" cy="1447800"/>
+            <a:ext cx="10855878" cy="822960"/>
           </a:xfrm>
           <a:prstGeom prst="rect">
             <a:avLst/>
@@ -8452,7 +9523,7 @@
                 <a:ea typeface="Arial"/>
                 <a:cs typeface="Arial"/>
               </a:rPr>
-              <a:t>Для запуска требуется 2 vCPU, 2 ГБ RAM и 1 400 руб. за инференс</a:t>
+              <a:t>План пилота</a:t>
             </a:r>
           </a:p>
         </p:txBody>
@@ -8465,8 +9536,8 @@
         </p:nvSpPr>
         <p:spPr>
           <a:xfrm>
-            <a:off x="677387" y="2825777"/>
-            <a:ext cx="10855878" cy="1050876"/>
+            <a:off x="677387" y="2200937"/>
+            <a:ext cx="10855878" cy="1969531"/>
           </a:xfrm>
           <a:prstGeom prst="rect">
             <a:avLst/>
@@ -8483,25 +9554,25 @@
               <a:spcAft>
                 <a:spcPts val="300"/>
               </a:spcAft>
-              <a:defRPr sz="2400">
+              <a:defRPr sz="4800">
                 <a:solidFill>
                   <a:srgbClr val="000000"/>
                 </a:solidFill>
-                <a:latin typeface="Arial"/>
-                <a:ea typeface="Arial"/>
-                <a:cs typeface="Arial"/>
+                <a:latin typeface="Play"/>
+                <a:ea typeface="Play"/>
+                <a:cs typeface="Play"/>
               </a:defRPr>
             </a:pPr>
             <a:r>
-              <a:rPr sz="2400">
+              <a:rPr sz="4800">
                 <a:solidFill>
                   <a:srgbClr val="000000"/>
                 </a:solidFill>
-                <a:latin typeface="Arial"/>
-                <a:ea typeface="Arial"/>
-                <a:cs typeface="Arial"/>
+                <a:latin typeface="Play"/>
+                <a:ea typeface="Play"/>
+                <a:cs typeface="Play"/>
               </a:rPr>
-              <a:t>Сервис работает на одной машине</a:t>
+              <a:t>Пилот шёл 6 недель на двух командах</a:t>
             </a:r>
           </a:p>
         </p:txBody>
@@ -8514,8 +9585,8 @@
         </p:nvSpPr>
         <p:spPr>
           <a:xfrm>
-            <a:off x="677387" y="4086829"/>
-            <a:ext cx="10855878" cy="2241869"/>
+            <a:off x="677387" y="4418135"/>
+            <a:ext cx="10855878" cy="1910563"/>
           </a:xfrm>
           <a:prstGeom prst="rect">
             <a:avLst/>
@@ -8532,25 +9603,25 @@
               <a:spcAft>
                 <a:spcPts val="300"/>
               </a:spcAft>
-              <a:defRPr sz="2400">
+              <a:defRPr sz="3200">
                 <a:solidFill>
                   <a:srgbClr val="000000"/>
                 </a:solidFill>
-                <a:latin typeface="Arial"/>
-                <a:ea typeface="Arial"/>
-                <a:cs typeface="Arial"/>
+                <a:latin typeface="Play"/>
+                <a:ea typeface="Play"/>
+                <a:cs typeface="Play"/>
               </a:defRPr>
             </a:pPr>
             <a:r>
-              <a:rPr sz="2400">
+              <a:rPr sz="3200">
                 <a:solidFill>
                   <a:srgbClr val="000000"/>
                 </a:solidFill>
-                <a:latin typeface="Arial"/>
-                <a:ea typeface="Arial"/>
-                <a:cs typeface="Arial"/>
+                <a:latin typeface="Play"/>
+                <a:ea typeface="Play"/>
+                <a:cs typeface="Play"/>
               </a:rPr>
-              <a:t>• Модель gpt-oss-20b подключается по OpenAI</a:t>
+              <a:t>• Собрано 68 презентаций</a:t>
             </a:r>
           </a:p>
           <a:p>
@@ -8558,280 +9629,25 @@
               <a:spcAft>
                 <a:spcPts val="300"/>
               </a:spcAft>
-              <a:defRPr sz="2400">
+              <a:defRPr sz="3200">
                 <a:solidFill>
                   <a:srgbClr val="000000"/>
                 </a:solidFill>
-                <a:latin typeface="Arial"/>
-                <a:ea typeface="Arial"/>
-                <a:cs typeface="Arial"/>
+                <a:latin typeface="Play"/>
+                <a:ea typeface="Play"/>
+                <a:cs typeface="Play"/>
               </a:defRPr>
             </a:pPr>
             <a:r>
-              <a:rPr sz="2400">
+              <a:rPr sz="3200">
                 <a:solidFill>
                   <a:srgbClr val="000000"/>
                 </a:solidFill>
-                <a:latin typeface="Arial"/>
-                <a:ea typeface="Arial"/>
-                <a:cs typeface="Arial"/>
+                <a:latin typeface="Play"/>
+                <a:ea typeface="Play"/>
+                <a:cs typeface="Play"/>
               </a:rPr>
-              <a:t>• План запуска: Q3 2026 подключить 4 команды</a:t>
-            </a:r>
-          </a:p>
-        </p:txBody>
-      </p:sp>
-    </p:spTree>
-  </p:cSld>
-  <p:clrMapOvr>
-    <a:masterClrMapping/>
-  </p:clrMapOvr>
-</p:sld>
-</file>
-
-<file path=ppt/slides/slide61.xml><?xml version="1.0" encoding="utf-8"?>
-<p:sld xmlns:a="http://schemas.openxmlformats.org/drawingml/2006/main" xmlns:p="http://schemas.openxmlformats.org/presentationml/2006/main" xmlns:r="http://schemas.openxmlformats.org/officeDocument/2006/relationships">
-  <p:cSld>
-    <p:bg>
-      <p:bgPr>
-        <a:solidFill>
-          <a:schemeClr val="lt2"/>
-        </a:solidFill>
-      </p:bgPr>
-    </p:bg>
-    <p:spTree>
-      <p:nvGrpSpPr>
-        <p:cNvPr id="1" name=""/>
-        <p:cNvGrpSpPr/>
-        <p:nvPr/>
-      </p:nvGrpSpPr>
-      <p:grpSpPr/>
-      <p:sp>
-        <p:nvSpPr>
-          <p:cNvPr id="764" name="Google Shape;764;p58"/>
-          <p:cNvSpPr txBox="1"/>
-          <p:nvPr/>
-        </p:nvSpPr>
-        <p:spPr>
-          <a:xfrm>
-            <a:off x="18692059" y="4674436"/>
-            <a:ext cx="4304330" cy="678198"/>
-          </a:xfrm>
-          <a:prstGeom prst="rect">
-            <a:avLst/>
-          </a:prstGeom>
-          <a:noFill/>
-          <a:ln>
-            <a:noFill/>
-          </a:ln>
-        </p:spPr>
-        <p:txBody>
-          <a:bodyPr anchorCtr="0" anchor="t" bIns="45700" lIns="91425" spcFirstLastPara="1" rIns="91425" wrap="square" tIns="45700">
-            <a:noAutofit/>
-          </a:bodyPr>
-          <a:lstStyle/>
-          <a:p>
-            <a:pPr indent="0" lvl="0" marL="0" marR="0" rtl="0" algn="l">
-              <a:lnSpc>
-                <a:spcPct val="110000"/>
-              </a:lnSpc>
-              <a:spcBef>
-                <a:spcPts val="0"/>
-              </a:spcBef>
-              <a:spcAft>
-                <a:spcPts val="0"/>
-              </a:spcAft>
-              <a:buClr>
-                <a:schemeClr val="dk1"/>
-              </a:buClr>
-              <a:buSzPts val="1600"/>
-              <a:buFont typeface="Arial"/>
-              <a:buNone/>
-            </a:pPr>
-            <a:r>
-              <a:t/>
-            </a:r>
-            <a:endParaRPr sz="1600">
-              <a:solidFill>
-                <a:schemeClr val="dk1"/>
-              </a:solidFill>
-              <a:latin typeface="Arial"/>
-              <a:ea typeface="Arial"/>
-              <a:cs typeface="Arial"/>
-              <a:sym typeface="Arial"/>
-            </a:endParaRPr>
-          </a:p>
-        </p:txBody>
-      </p:sp>
-      <p:sp>
-        <p:nvSpPr>
-          <p:cNvPr id="765" name="title"/>
-          <p:cNvSpPr txBox="1"/>
-          <p:nvPr/>
-        </p:nvSpPr>
-        <p:spPr>
-          <a:xfrm>
-            <a:off x="677387" y="692177"/>
-            <a:ext cx="10855878" cy="1447800"/>
-          </a:xfrm>
-          <a:prstGeom prst="rect">
-            <a:avLst/>
-          </a:prstGeom>
-          <a:noFill/>
-        </p:spPr>
-        <p:txBody>
-          <a:bodyPr wrap="square" lIns="76200" rIns="76200" tIns="50800" bIns="50800">
-            <a:spAutoFit/>
-          </a:bodyPr>
-          <a:lstStyle/>
-          <a:p>
-            <a:pPr algn="l">
-              <a:spcAft>
-                <a:spcPts val="300"/>
-              </a:spcAft>
-              <a:defRPr sz="4000">
-                <a:solidFill>
-                  <a:srgbClr val="000000"/>
-                </a:solidFill>
-                <a:latin typeface="Arial"/>
-                <a:ea typeface="Arial"/>
-                <a:cs typeface="Arial"/>
-              </a:defRPr>
-            </a:pPr>
-            <a:r>
-              <a:rPr sz="4000">
-                <a:solidFill>
-                  <a:srgbClr val="000000"/>
-                </a:solidFill>
-                <a:latin typeface="Arial"/>
-                <a:ea typeface="Arial"/>
-                <a:cs typeface="Arial"/>
-              </a:rPr>
-              <a:t>Пилот собрал 68 презентаций за 6 недель</a:t>
-            </a:r>
-          </a:p>
-        </p:txBody>
-      </p:sp>
-      <p:sp>
-        <p:nvSpPr>
-          <p:cNvPr id="766" name="lead"/>
-          <p:cNvSpPr txBox="1"/>
-          <p:nvPr/>
-        </p:nvSpPr>
-        <p:spPr>
-          <a:xfrm>
-            <a:off x="677387" y="2825777"/>
-            <a:ext cx="10855878" cy="1050876"/>
-          </a:xfrm>
-          <a:prstGeom prst="rect">
-            <a:avLst/>
-          </a:prstGeom>
-          <a:noFill/>
-        </p:spPr>
-        <p:txBody>
-          <a:bodyPr wrap="square" lIns="76200" rIns="76200" tIns="50800" bIns="50800">
-            <a:spAutoFit/>
-          </a:bodyPr>
-          <a:lstStyle/>
-          <a:p>
-            <a:pPr algn="l">
-              <a:spcAft>
-                <a:spcPts val="300"/>
-              </a:spcAft>
-              <a:defRPr sz="2400">
-                <a:solidFill>
-                  <a:srgbClr val="000000"/>
-                </a:solidFill>
-                <a:latin typeface="Arial"/>
-                <a:ea typeface="Arial"/>
-                <a:cs typeface="Arial"/>
-              </a:defRPr>
-            </a:pPr>
-            <a:r>
-              <a:rPr sz="2400">
-                <a:solidFill>
-                  <a:srgbClr val="000000"/>
-                </a:solidFill>
-                <a:latin typeface="Arial"/>
-                <a:ea typeface="Arial"/>
-                <a:cs typeface="Arial"/>
-              </a:rPr>
-              <a:t>Дизайнеры закрыли 38 запросов вместо 11</a:t>
-            </a:r>
-          </a:p>
-        </p:txBody>
-      </p:sp>
-      <p:sp>
-        <p:nvSpPr>
-          <p:cNvPr id="767" name="body"/>
-          <p:cNvSpPr txBox="1"/>
-          <p:nvPr/>
-        </p:nvSpPr>
-        <p:spPr>
-          <a:xfrm>
-            <a:off x="677387" y="4086829"/>
-            <a:ext cx="10855878" cy="2241869"/>
-          </a:xfrm>
-          <a:prstGeom prst="rect">
-            <a:avLst/>
-          </a:prstGeom>
-          <a:noFill/>
-        </p:spPr>
-        <p:txBody>
-          <a:bodyPr wrap="square" lIns="76200" rIns="76200" tIns="50800" bIns="50800">
-            <a:spAutoFit/>
-          </a:bodyPr>
-          <a:lstStyle/>
-          <a:p>
-            <a:pPr algn="l">
-              <a:spcAft>
-                <a:spcPts val="300"/>
-              </a:spcAft>
-              <a:defRPr sz="2400">
-                <a:solidFill>
-                  <a:srgbClr val="000000"/>
-                </a:solidFill>
-                <a:latin typeface="Arial"/>
-                <a:ea typeface="Arial"/>
-                <a:cs typeface="Arial"/>
-              </a:defRPr>
-            </a:pPr>
-            <a:r>
-              <a:rPr sz="2400">
-                <a:solidFill>
-                  <a:srgbClr val="000000"/>
-                </a:solidFill>
-                <a:latin typeface="Arial"/>
-                <a:ea typeface="Arial"/>
-                <a:cs typeface="Arial"/>
-              </a:rPr>
-              <a:t>• Рутина вёрстки ушла в сервис</a:t>
-            </a:r>
-          </a:p>
-          <a:p>
-            <a:pPr algn="l">
-              <a:spcAft>
-                <a:spcPts val="300"/>
-              </a:spcAft>
-              <a:defRPr sz="2400">
-                <a:solidFill>
-                  <a:srgbClr val="000000"/>
-                </a:solidFill>
-                <a:latin typeface="Arial"/>
-                <a:ea typeface="Arial"/>
-                <a:cs typeface="Arial"/>
-              </a:defRPr>
-            </a:pPr>
-            <a:r>
-              <a:rPr sz="2400">
-                <a:solidFill>
-                  <a:srgbClr val="000000"/>
-                </a:solidFill>
-                <a:latin typeface="Arial"/>
-                <a:ea typeface="Arial"/>
-                <a:cs typeface="Arial"/>
-              </a:rPr>
-              <a:t>• Нагрузка выше 20 задач требует внешней очереди</a:t>
+              <a:t>• Средняя сборка колоды 4 минуты вместо 186</a:t>
             </a:r>
           </a:p>
         </p:txBody>
@@ -8863,71 +9679,14 @@
       <p:grpSpPr/>
       <p:sp>
         <p:nvSpPr>
-          <p:cNvPr id="782" name="Google Shape;782;p59"/>
+          <p:cNvPr id="2" name="title"/>
           <p:cNvSpPr txBox="1"/>
           <p:nvPr/>
         </p:nvSpPr>
         <p:spPr>
           <a:xfrm>
-            <a:off x="18692059" y="4674436"/>
-            <a:ext cx="4304330" cy="678198"/>
-          </a:xfrm>
-          <a:prstGeom prst="rect">
-            <a:avLst/>
-          </a:prstGeom>
-          <a:noFill/>
-          <a:ln>
-            <a:noFill/>
-          </a:ln>
-        </p:spPr>
-        <p:txBody>
-          <a:bodyPr anchorCtr="0" anchor="t" bIns="45700" lIns="91425" spcFirstLastPara="1" rIns="91425" wrap="square" tIns="45700">
-            <a:noAutofit/>
-          </a:bodyPr>
-          <a:lstStyle/>
-          <a:p>
-            <a:pPr indent="0" lvl="0" marL="0" marR="0" rtl="0" algn="l">
-              <a:lnSpc>
-                <a:spcPct val="110000"/>
-              </a:lnSpc>
-              <a:spcBef>
-                <a:spcPts val="0"/>
-              </a:spcBef>
-              <a:spcAft>
-                <a:spcPts val="0"/>
-              </a:spcAft>
-              <a:buClr>
-                <a:schemeClr val="dk1"/>
-              </a:buClr>
-              <a:buSzPts val="1600"/>
-              <a:buFont typeface="Arial"/>
-              <a:buNone/>
-            </a:pPr>
-            <a:r>
-              <a:t/>
-            </a:r>
-            <a:endParaRPr sz="1600">
-              <a:solidFill>
-                <a:schemeClr val="dk1"/>
-              </a:solidFill>
-              <a:latin typeface="Arial"/>
-              <a:ea typeface="Arial"/>
-              <a:cs typeface="Arial"/>
-              <a:sym typeface="Arial"/>
-            </a:endParaRPr>
-          </a:p>
-        </p:txBody>
-      </p:sp>
-      <p:sp>
-        <p:nvSpPr>
-          <p:cNvPr id="783" name="title"/>
-          <p:cNvSpPr txBox="1"/>
-          <p:nvPr/>
-        </p:nvSpPr>
-        <p:spPr>
-          <a:xfrm>
-            <a:off x="677387" y="692177"/>
-            <a:ext cx="10855878" cy="1447800"/>
+            <a:off x="677875" y="692177"/>
+            <a:ext cx="10855391" cy="822960"/>
           </a:xfrm>
           <a:prstGeom prst="rect">
             <a:avLst/>
@@ -8962,21 +9721,21 @@
                 <a:ea typeface="Arial"/>
                 <a:cs typeface="Arial"/>
               </a:rPr>
-              <a:t>Решение о запуске сервиса на всю компанию</a:t>
+              <a:t>Что мы просим решить</a:t>
             </a:r>
           </a:p>
         </p:txBody>
       </p:sp>
       <p:sp>
         <p:nvSpPr>
-          <p:cNvPr id="784" name="lead"/>
+          <p:cNvPr id="3" name="lead"/>
           <p:cNvSpPr txBox="1"/>
           <p:nvPr/>
         </p:nvSpPr>
         <p:spPr>
           <a:xfrm>
-            <a:off x="677387" y="2825777"/>
-            <a:ext cx="10855878" cy="1050876"/>
+            <a:off x="677875" y="2716257"/>
+            <a:ext cx="10855391" cy="1686560"/>
           </a:xfrm>
           <a:prstGeom prst="rect">
             <a:avLst/>
@@ -8989,104 +9748,29 @@
           </a:bodyPr>
           <a:lstStyle/>
           <a:p>
-            <a:pPr algn="l">
+            <a:pPr algn="ctr">
               <a:spcAft>
                 <a:spcPts val="300"/>
               </a:spcAft>
-              <a:defRPr sz="2400">
+              <a:defRPr sz="4800">
                 <a:solidFill>
                   <a:srgbClr val="000000"/>
                 </a:solidFill>
-                <a:latin typeface="Arial"/>
-                <a:ea typeface="Arial"/>
-                <a:cs typeface="Arial"/>
+                <a:latin typeface="Play"/>
+                <a:ea typeface="Play"/>
+                <a:cs typeface="Play"/>
               </a:defRPr>
             </a:pPr>
             <a:r>
-              <a:rPr sz="2400">
+              <a:rPr sz="4800">
                 <a:solidFill>
                   <a:srgbClr val="000000"/>
                 </a:solidFill>
-                <a:latin typeface="Arial"/>
-                <a:ea typeface="Arial"/>
-                <a:cs typeface="Arial"/>
+                <a:latin typeface="Play"/>
+                <a:ea typeface="Play"/>
+                <a:cs typeface="Play"/>
               </a:rPr>
-              <a:t>Запрос одобрения на масштабирование</a:t>
-            </a:r>
-          </a:p>
-        </p:txBody>
-      </p:sp>
-      <p:sp>
-        <p:nvSpPr>
-          <p:cNvPr id="785" name="body"/>
-          <p:cNvSpPr txBox="1"/>
-          <p:nvPr/>
-        </p:nvSpPr>
-        <p:spPr>
-          <a:xfrm>
-            <a:off x="677387" y="4086829"/>
-            <a:ext cx="10855878" cy="2241869"/>
-          </a:xfrm>
-          <a:prstGeom prst="rect">
-            <a:avLst/>
-          </a:prstGeom>
-          <a:noFill/>
-        </p:spPr>
-        <p:txBody>
-          <a:bodyPr wrap="square" lIns="76200" rIns="76200" tIns="50800" bIns="50800">
-            <a:spAutoFit/>
-          </a:bodyPr>
-          <a:lstStyle/>
-          <a:p>
-            <a:pPr algn="l">
-              <a:spcAft>
-                <a:spcPts val="300"/>
-              </a:spcAft>
-              <a:defRPr sz="2400">
-                <a:solidFill>
-                  <a:srgbClr val="000000"/>
-                </a:solidFill>
-                <a:latin typeface="Arial"/>
-                <a:ea typeface="Arial"/>
-                <a:cs typeface="Arial"/>
-              </a:defRPr>
-            </a:pPr>
-            <a:r>
-              <a:rPr sz="2400">
-                <a:solidFill>
-                  <a:srgbClr val="000000"/>
-                </a:solidFill>
-                <a:latin typeface="Arial"/>
-                <a:ea typeface="Arial"/>
-                <a:cs typeface="Arial"/>
-              </a:rPr>
-              <a:t>• Подключение к корпоративному хранилищу</a:t>
-            </a:r>
-          </a:p>
-          <a:p>
-            <a:pPr algn="l">
-              <a:spcAft>
-                <a:spcPts val="300"/>
-              </a:spcAft>
-              <a:defRPr sz="2400">
-                <a:solidFill>
-                  <a:srgbClr val="000000"/>
-                </a:solidFill>
-                <a:latin typeface="Arial"/>
-                <a:ea typeface="Arial"/>
-                <a:cs typeface="Arial"/>
-              </a:defRPr>
-            </a:pPr>
-            <a:r>
-              <a:rPr sz="2400">
-                <a:solidFill>
-                  <a:srgbClr val="000000"/>
-                </a:solidFill>
-                <a:latin typeface="Arial"/>
-                <a:ea typeface="Arial"/>
-                <a:cs typeface="Arial"/>
-              </a:rPr>
-              <a:t>• Интеграция с доменом и HTTPS</a:t>
+              <a:t>Принять решение о запуске сервиса на всю компанию</a:t>
             </a:r>
           </a:p>
         </p:txBody>

--- a/samples/Шаблон_презентации_VK_Education__focus.pptx
+++ b/samples/Шаблон_презентации_VK_Education__focus.pptx
@@ -16,6 +16,9 @@
     <p:sldId id="315" r:id="rId68"/>
     <p:sldId id="316" r:id="rId69"/>
     <p:sldId id="317" r:id="rId70"/>
+    <p:sldId id="318" r:id="rId71"/>
+    <p:sldId id="319" r:id="rId72"/>
+    <p:sldId id="320" r:id="rId73"/>
   </p:sldIdLst>
   <p:sldSz cy="6858000" cx="12192000"/>
   <p:notesSz cx="6858000" cy="9144000"/>
@@ -276,7 +279,7 @@
               <c:strCache>
                 <c:ptCount val="1"/>
                 <c:pt idx="0">
-                  <c:v>До</c:v>
+                  <c:v>Время</c:v>
                 </c:pt>
               </c:strCache>
             </c:strRef>
@@ -293,102 +296,36 @@
           </c:spPr>
           <c:cat>
             <c:strRef>
-              <c:f>Sheet1!$A$2:$A$4</c:f>
+              <c:f>Sheet1!$A$2:$A$3</c:f>
               <c:strCache>
-                <c:ptCount val="3"/>
+                <c:ptCount val="2"/>
                 <c:pt idx="0">
-                  <c:v>Сборка колоды</c:v>
+                  <c:v>Сборка</c:v>
                 </c:pt>
                 <c:pt idx="1">
-                  <c:v>Время до первой версии</c:v>
-                </c:pt>
-                <c:pt idx="2">
-                  <c:v>Запросы/неделя</c:v>
+                  <c:v>Правки</c:v>
                 </c:pt>
               </c:strCache>
             </c:strRef>
           </c:cat>
           <c:val>
             <c:numRef>
-              <c:f>Sheet1!$B$2:$B$4</c:f>
+              <c:f>Sheet1!$B$2:$B$3</c:f>
               <c:numCache>
                 <c:formatCode>General</c:formatCode>
-                <c:ptCount val="3"/>
+                <c:ptCount val="2"/>
                 <c:pt idx="0">
                   <c:v>186.0</c:v>
                 </c:pt>
                 <c:pt idx="1">
-                  <c:v>6.0</c:v>
-                </c:pt>
-                <c:pt idx="2">
-                  <c:v>11.0</c:v>
-                </c:pt>
-              </c:numCache>
-            </c:numRef>
-          </c:val>
-        </c:ser>
-        <c:ser>
-          <c:idx val="1"/>
-          <c:order val="1"/>
-          <c:tx>
-            <c:strRef>
-              <c:f>Sheet1!$C$1</c:f>
-              <c:strCache>
-                <c:ptCount val="1"/>
-                <c:pt idx="0">
-                  <c:v>После</c:v>
-                </c:pt>
-              </c:strCache>
-            </c:strRef>
-          </c:tx>
-          <c:spPr>
-            <a:solidFill>
-              <a:srgbClr val="FF3885"/>
-            </a:solidFill>
-            <a:ln>
-              <a:solidFill>
-                <a:srgbClr val="FF3885"/>
-              </a:solidFill>
-            </a:ln>
-          </c:spPr>
-          <c:cat>
-            <c:strRef>
-              <c:f>Sheet1!$A$2:$A$4</c:f>
-              <c:strCache>
-                <c:ptCount val="3"/>
-                <c:pt idx="0">
-                  <c:v>Сборка колоды</c:v>
-                </c:pt>
-                <c:pt idx="1">
-                  <c:v>Время до первой версии</c:v>
-                </c:pt>
-                <c:pt idx="2">
-                  <c:v>Запросы/неделя</c:v>
-                </c:pt>
-              </c:strCache>
-            </c:strRef>
-          </c:cat>
-          <c:val>
-            <c:numRef>
-              <c:f>Sheet1!$C$2:$C$4</c:f>
-              <c:numCache>
-                <c:formatCode>General</c:formatCode>
-                <c:ptCount val="3"/>
-                <c:pt idx="0">
-                  <c:v>4.0</c:v>
-                </c:pt>
-                <c:pt idx="1">
-                  <c:v>1.0</c:v>
-                </c:pt>
-                <c:pt idx="2">
-                  <c:v>38.0</c:v>
+                  <c:v>74.0</c:v>
                 </c:pt>
               </c:numCache>
             </c:numRef>
           </c:val>
         </c:ser>
         <c:dLbls>
-          <c:numFmt formatCode="0&quot; единицы&quot;" sourceLinked="0"/>
+          <c:numFmt formatCode="0&quot; мин&quot;" sourceLinked="0"/>
           <c:txPr>
             <a:bodyPr wrap="none"/>
             <a:lstStyle/>
@@ -482,7 +419,7 @@
                   </a:defRPr>
                 </a:pPr>
                 <a:r>
-                  <a:t>единицы</a:t>
+                  <a:t>Время, мин</a:t>
                 </a:r>
               </a:p>
             </c:rich>
@@ -513,10 +450,220 @@
         <c:crosses val="autoZero"/>
       </c:valAx>
     </c:plotArea>
-    <c:legend>
-      <c:legendPos val="b"/>
-      <c:overlay val="0"/>
-    </c:legend>
+    <c:dispBlanksAs val="gap"/>
+  </c:chart>
+  <c:txPr>
+    <a:bodyPr/>
+    <a:lstStyle/>
+    <a:p>
+      <a:pPr>
+        <a:defRPr sz="1200" b="0">
+          <a:solidFill>
+            <a:srgbClr val="000000"/>
+          </a:solidFill>
+          <a:latin typeface="Play"/>
+          <a:ea typeface="Play"/>
+          <a:cs typeface="Play"/>
+        </a:defRPr>
+      </a:pPr>
+      <a:endParaRPr lang="en-US"/>
+    </a:p>
+  </c:txPr>
+  <c:externalData r:id="rId1">
+    <c:autoUpdate val="0"/>
+  </c:externalData>
+</c:chartSpace>
+</file>
+
+<file path=ppt/charts/chart2.xml><?xml version="1.0" encoding="utf-8"?>
+<c:chartSpace xmlns:c="http://schemas.openxmlformats.org/drawingml/2006/chart" xmlns:a="http://schemas.openxmlformats.org/drawingml/2006/main" xmlns:r="http://schemas.openxmlformats.org/officeDocument/2006/relationships">
+  <c:date1904 val="0"/>
+  <c:chart>
+    <c:autoTitleDeleted val="1"/>
+    <c:plotArea>
+      <c:barChart>
+        <c:barDir val="col"/>
+        <c:grouping val="clustered"/>
+        <c:ser>
+          <c:idx val="0"/>
+          <c:order val="0"/>
+          <c:tx>
+            <c:strRef>
+              <c:f>Sheet1!$B$1</c:f>
+              <c:strCache>
+                <c:ptCount val="1"/>
+                <c:pt idx="0">
+                  <c:v>Значения</c:v>
+                </c:pt>
+              </c:strCache>
+            </c:strRef>
+          </c:tx>
+          <c:spPr>
+            <a:solidFill>
+              <a:srgbClr val="0077FF"/>
+            </a:solidFill>
+            <a:ln>
+              <a:solidFill>
+                <a:srgbClr val="0077FF"/>
+              </a:solidFill>
+            </a:ln>
+          </c:spPr>
+          <c:cat>
+            <c:strRef>
+              <c:f>Sheet1!$A$2:$A$3</c:f>
+              <c:strCache>
+                <c:ptCount val="2"/>
+                <c:pt idx="0">
+                  <c:v>Сборка</c:v>
+                </c:pt>
+                <c:pt idx="1">
+                  <c:v>Запросы дизайнеров</c:v>
+                </c:pt>
+              </c:strCache>
+            </c:strRef>
+          </c:cat>
+          <c:val>
+            <c:numRef>
+              <c:f>Sheet1!$B$2:$B$3</c:f>
+              <c:numCache>
+                <c:formatCode>General</c:formatCode>
+                <c:ptCount val="2"/>
+                <c:pt idx="0">
+                  <c:v>4.0</c:v>
+                </c:pt>
+                <c:pt idx="1">
+                  <c:v>38.0</c:v>
+                </c:pt>
+              </c:numCache>
+            </c:numRef>
+          </c:val>
+        </c:ser>
+        <c:dLbls>
+          <c:numFmt formatCode="0&quot; значений&quot;" sourceLinked="0"/>
+          <c:txPr>
+            <a:bodyPr wrap="none"/>
+            <a:lstStyle/>
+            <a:p>
+              <a:pPr>
+                <a:defRPr sz="1100" b="0">
+                  <a:solidFill>
+                    <a:srgbClr val="000000"/>
+                  </a:solidFill>
+                  <a:latin typeface="Play"/>
+                  <a:ea typeface="Play"/>
+                  <a:cs typeface="Play"/>
+                </a:defRPr>
+              </a:pPr>
+            </a:p>
+          </c:txPr>
+          <c:dLblPos val="outEnd"/>
+          <c:showLegendKey val="0"/>
+          <c:showVal val="1"/>
+          <c:showCatName val="0"/>
+          <c:showSerName val="0"/>
+          <c:showPercent val="0"/>
+          <c:showBubbleSize val="0"/>
+          <c:showLeaderLines val="1"/>
+        </c:dLbls>
+        <c:gapWidth val="60"/>
+        <c:axId val="-2068027336"/>
+        <c:axId val="-2113994440"/>
+      </c:barChart>
+      <c:catAx>
+        <c:axId val="-2068027336"/>
+        <c:scaling>
+          <c:orientation val="minMax"/>
+        </c:scaling>
+        <c:delete val="0"/>
+        <c:axPos val="b"/>
+        <c:majorTickMark val="out"/>
+        <c:minorTickMark val="none"/>
+        <c:tickLblPos val="nextTo"/>
+        <c:txPr>
+          <a:bodyPr/>
+          <a:lstStyle/>
+          <a:p>
+            <a:pPr>
+              <a:defRPr sz="1100" b="0">
+                <a:solidFill>
+                  <a:srgbClr val="000000"/>
+                </a:solidFill>
+                <a:latin typeface="Play"/>
+                <a:ea typeface="Play"/>
+                <a:cs typeface="Play"/>
+              </a:defRPr>
+            </a:pPr>
+          </a:p>
+        </c:txPr>
+        <c:crossAx val="-2113994440"/>
+        <c:crosses val="autoZero"/>
+        <c:auto val="1"/>
+        <c:lblAlgn val="ctr"/>
+        <c:lblOffset val="100"/>
+        <c:noMultiLvlLbl val="0"/>
+      </c:catAx>
+      <c:valAx>
+        <c:axId val="-2113994440"/>
+        <c:scaling/>
+        <c:delete val="0"/>
+        <c:axPos val="l"/>
+        <c:majorGridlines>
+          <c:spPr>
+            <a:ln w="9525">
+              <a:solidFill>
+                <a:srgbClr val="D1D1D1"/>
+              </a:solidFill>
+            </a:ln>
+          </c:spPr>
+        </c:majorGridlines>
+        <c:title>
+          <c:tx>
+            <c:rich>
+              <a:bodyPr rot="0" vert="horz"/>
+              <a:lstStyle/>
+              <a:p>
+                <a:pPr>
+                  <a:defRPr sz="1100" b="0">
+                    <a:solidFill>
+                      <a:srgbClr val="000000"/>
+                    </a:solidFill>
+                    <a:latin typeface="Play"/>
+                    <a:ea typeface="Play"/>
+                    <a:cs typeface="Play"/>
+                  </a:defRPr>
+                </a:pPr>
+                <a:r>
+                  <a:t>Значения, значений</a:t>
+                </a:r>
+              </a:p>
+            </c:rich>
+          </c:tx>
+          <c:layout/>
+          <c:overlay val="0"/>
+        </c:title>
+        <c:majorTickMark val="out"/>
+        <c:minorTickMark val="none"/>
+        <c:tickLblPos val="nextTo"/>
+        <c:txPr>
+          <a:bodyPr/>
+          <a:lstStyle/>
+          <a:p>
+            <a:pPr>
+              <a:defRPr sz="1100" b="0">
+                <a:solidFill>
+                  <a:srgbClr val="000000"/>
+                </a:solidFill>
+                <a:latin typeface="Play"/>
+                <a:ea typeface="Play"/>
+                <a:cs typeface="Play"/>
+              </a:defRPr>
+            </a:pPr>
+          </a:p>
+        </c:txPr>
+        <c:crossAx val="-2068027336"/>
+        <c:crosses val="autoZero"/>
+      </c:valAx>
+    </c:plotArea>
     <c:dispBlanksAs val="gap"/>
   </c:chart>
   <c:txPr>
@@ -2107,6 +2254,204 @@
 </file>
 
 <file path=ppt/notesSlides/notesSlide62.xml><?xml version="1.0" encoding="utf-8"?>
+<p:notes xmlns:a="http://schemas.openxmlformats.org/drawingml/2006/main" xmlns:p="http://schemas.openxmlformats.org/presentationml/2006/main" xmlns:r="http://schemas.openxmlformats.org/officeDocument/2006/relationships">
+  <p:cSld>
+    <p:spTree>
+      <p:nvGrpSpPr>
+        <p:cNvPr id="1" name=""/>
+        <p:cNvGrpSpPr/>
+        <p:nvPr/>
+      </p:nvGrpSpPr>
+      <p:grpSpPr>
+        <a:xfrm>
+          <a:off x="0" y="0"/>
+          <a:ext cx="0" cy="0"/>
+          <a:chOff x="0" y="0"/>
+          <a:chExt cx="0" cy="0"/>
+        </a:xfrm>
+      </p:grpSpPr>
+      <p:sp>
+        <p:nvSpPr>
+          <p:cNvPr id="2" name="Slide Image Placeholder 1"/>
+          <p:cNvSpPr>
+            <a:spLocks noGrp="1"/>
+          </p:cNvSpPr>
+          <p:nvPr>
+            <p:ph type="sldImg" idx="3"/>
+          </p:nvPr>
+        </p:nvSpPr>
+        <p:spPr/>
+      </p:sp>
+      <p:sp>
+        <p:nvSpPr>
+          <p:cNvPr id="3" name="Notes Placeholder 2"/>
+          <p:cNvSpPr>
+            <a:spLocks noGrp="1"/>
+          </p:cNvSpPr>
+          <p:nvPr>
+            <p:ph type="body" idx="1"/>
+          </p:nvPr>
+        </p:nvSpPr>
+        <p:spPr/>
+        <p:txBody>
+          <a:bodyPr/>
+          <a:lstStyle/>
+          <a:p/>
+        </p:txBody>
+      </p:sp>
+      <p:sp>
+        <p:nvSpPr>
+          <p:cNvPr id="4" name="Slide Number Placeholder 3"/>
+          <p:cNvSpPr>
+            <a:spLocks noGrp="1"/>
+          </p:cNvSpPr>
+          <p:nvPr>
+            <p:ph type="sldNum" idx="12"/>
+          </p:nvPr>
+        </p:nvSpPr>
+        <p:spPr/>
+      </p:sp>
+    </p:spTree>
+  </p:cSld>
+  <p:clrMapOvr>
+    <a:masterClrMapping/>
+  </p:clrMapOvr>
+</p:notes>
+</file>
+
+<file path=ppt/notesSlides/notesSlide63.xml><?xml version="1.0" encoding="utf-8"?>
+<p:notes xmlns:a="http://schemas.openxmlformats.org/drawingml/2006/main" xmlns:p="http://schemas.openxmlformats.org/presentationml/2006/main" xmlns:r="http://schemas.openxmlformats.org/officeDocument/2006/relationships">
+  <p:cSld>
+    <p:spTree>
+      <p:nvGrpSpPr>
+        <p:cNvPr id="1" name=""/>
+        <p:cNvGrpSpPr/>
+        <p:nvPr/>
+      </p:nvGrpSpPr>
+      <p:grpSpPr>
+        <a:xfrm>
+          <a:off x="0" y="0"/>
+          <a:ext cx="0" cy="0"/>
+          <a:chOff x="0" y="0"/>
+          <a:chExt cx="0" cy="0"/>
+        </a:xfrm>
+      </p:grpSpPr>
+      <p:sp>
+        <p:nvSpPr>
+          <p:cNvPr id="2" name="Slide Image Placeholder 1"/>
+          <p:cNvSpPr>
+            <a:spLocks noGrp="1"/>
+          </p:cNvSpPr>
+          <p:nvPr>
+            <p:ph type="sldImg" idx="3"/>
+          </p:nvPr>
+        </p:nvSpPr>
+        <p:spPr/>
+      </p:sp>
+      <p:sp>
+        <p:nvSpPr>
+          <p:cNvPr id="3" name="Notes Placeholder 2"/>
+          <p:cNvSpPr>
+            <a:spLocks noGrp="1"/>
+          </p:cNvSpPr>
+          <p:nvPr>
+            <p:ph type="body" idx="1"/>
+          </p:nvPr>
+        </p:nvSpPr>
+        <p:spPr/>
+        <p:txBody>
+          <a:bodyPr/>
+          <a:lstStyle/>
+          <a:p/>
+        </p:txBody>
+      </p:sp>
+      <p:sp>
+        <p:nvSpPr>
+          <p:cNvPr id="4" name="Slide Number Placeholder 3"/>
+          <p:cNvSpPr>
+            <a:spLocks noGrp="1"/>
+          </p:cNvSpPr>
+          <p:nvPr>
+            <p:ph type="sldNum" idx="12"/>
+          </p:nvPr>
+        </p:nvSpPr>
+        <p:spPr/>
+      </p:sp>
+    </p:spTree>
+  </p:cSld>
+  <p:clrMapOvr>
+    <a:masterClrMapping/>
+  </p:clrMapOvr>
+</p:notes>
+</file>
+
+<file path=ppt/notesSlides/notesSlide64.xml><?xml version="1.0" encoding="utf-8"?>
+<p:notes xmlns:a="http://schemas.openxmlformats.org/drawingml/2006/main" xmlns:p="http://schemas.openxmlformats.org/presentationml/2006/main" xmlns:r="http://schemas.openxmlformats.org/officeDocument/2006/relationships">
+  <p:cSld>
+    <p:spTree>
+      <p:nvGrpSpPr>
+        <p:cNvPr id="1" name=""/>
+        <p:cNvGrpSpPr/>
+        <p:nvPr/>
+      </p:nvGrpSpPr>
+      <p:grpSpPr>
+        <a:xfrm>
+          <a:off x="0" y="0"/>
+          <a:ext cx="0" cy="0"/>
+          <a:chOff x="0" y="0"/>
+          <a:chExt cx="0" cy="0"/>
+        </a:xfrm>
+      </p:grpSpPr>
+      <p:sp>
+        <p:nvSpPr>
+          <p:cNvPr id="2" name="Slide Image Placeholder 1"/>
+          <p:cNvSpPr>
+            <a:spLocks noGrp="1"/>
+          </p:cNvSpPr>
+          <p:nvPr>
+            <p:ph type="sldImg" idx="3"/>
+          </p:nvPr>
+        </p:nvSpPr>
+        <p:spPr/>
+      </p:sp>
+      <p:sp>
+        <p:nvSpPr>
+          <p:cNvPr id="3" name="Notes Placeholder 2"/>
+          <p:cNvSpPr>
+            <a:spLocks noGrp="1"/>
+          </p:cNvSpPr>
+          <p:nvPr>
+            <p:ph type="body" idx="1"/>
+          </p:nvPr>
+        </p:nvSpPr>
+        <p:spPr/>
+        <p:txBody>
+          <a:bodyPr/>
+          <a:lstStyle/>
+          <a:p/>
+        </p:txBody>
+      </p:sp>
+      <p:sp>
+        <p:nvSpPr>
+          <p:cNvPr id="4" name="Slide Number Placeholder 3"/>
+          <p:cNvSpPr>
+            <a:spLocks noGrp="1"/>
+          </p:cNvSpPr>
+          <p:nvPr>
+            <p:ph type="sldNum" idx="12"/>
+          </p:nvPr>
+        </p:nvSpPr>
+        <p:spPr/>
+      </p:sp>
+    </p:spTree>
+  </p:cSld>
+  <p:clrMapOvr>
+    <a:masterClrMapping/>
+  </p:clrMapOvr>
+</p:notes>
+</file>
+
+<file path=ppt/notesSlides/notesSlide65.xml><?xml version="1.0" encoding="utf-8"?>
 <p:notes xmlns:a="http://schemas.openxmlformats.org/drawingml/2006/main" xmlns:p="http://schemas.openxmlformats.org/presentationml/2006/main" xmlns:r="http://schemas.openxmlformats.org/officeDocument/2006/relationships">
   <p:cSld>
     <p:spTree>
@@ -7336,7 +7681,7 @@
                 <a:ea typeface="Arial"/>
                 <a:cs typeface="Arial"/>
               </a:rPr>
-              <a:t>Защита инициативы: сервис автоматической вёрстки презентаций</a:t>
+              <a:t>Автоматическая вёрстка презентаций: пилот и запуск</a:t>
             </a:r>
           </a:p>
         </p:txBody>
@@ -7350,6 +7695,1026 @@
 </file>
 
 <file path=ppt/slides/slide57.xml><?xml version="1.0" encoding="utf-8"?>
+<p:sld xmlns:a="http://schemas.openxmlformats.org/drawingml/2006/main" xmlns:p="http://schemas.openxmlformats.org/presentationml/2006/main" xmlns:r="http://schemas.openxmlformats.org/officeDocument/2006/relationships">
+  <p:cSld>
+    <p:bg>
+      <p:bgPr>
+        <a:solidFill>
+          <a:schemeClr val="lt2"/>
+        </a:solidFill>
+      </p:bgPr>
+    </p:bg>
+    <p:spTree>
+      <p:nvGrpSpPr>
+        <p:cNvPr id="1" name=""/>
+        <p:cNvGrpSpPr/>
+        <p:nvPr/>
+      </p:nvGrpSpPr>
+      <p:grpSpPr/>
+      <p:sp>
+        <p:nvSpPr>
+          <p:cNvPr id="795" name="Google Shape;795;p60"/>
+          <p:cNvSpPr txBox="1"/>
+          <p:nvPr/>
+        </p:nvSpPr>
+        <p:spPr>
+          <a:xfrm>
+            <a:off x="18692059" y="4674436"/>
+            <a:ext cx="4304330" cy="678198"/>
+          </a:xfrm>
+          <a:prstGeom prst="rect">
+            <a:avLst/>
+          </a:prstGeom>
+          <a:noFill/>
+          <a:ln>
+            <a:noFill/>
+          </a:ln>
+        </p:spPr>
+        <p:txBody>
+          <a:bodyPr anchorCtr="0" anchor="t" bIns="45700" lIns="91425" spcFirstLastPara="1" rIns="91425" wrap="square" tIns="45700">
+            <a:noAutofit/>
+          </a:bodyPr>
+          <a:lstStyle/>
+          <a:p>
+            <a:pPr indent="0" lvl="0" marL="0" marR="0" rtl="0" algn="l">
+              <a:lnSpc>
+                <a:spcPct val="110000"/>
+              </a:lnSpc>
+              <a:spcBef>
+                <a:spcPts val="0"/>
+              </a:spcBef>
+              <a:spcAft>
+                <a:spcPts val="0"/>
+              </a:spcAft>
+              <a:buClr>
+                <a:schemeClr val="dk1"/>
+              </a:buClr>
+              <a:buSzPts val="1600"/>
+              <a:buFont typeface="Arial"/>
+              <a:buNone/>
+            </a:pPr>
+            <a:r>
+              <a:t/>
+            </a:r>
+            <a:endParaRPr sz="1600">
+              <a:solidFill>
+                <a:schemeClr val="dk1"/>
+              </a:solidFill>
+              <a:latin typeface="Arial"/>
+              <a:ea typeface="Arial"/>
+              <a:cs typeface="Arial"/>
+              <a:sym typeface="Arial"/>
+            </a:endParaRPr>
+          </a:p>
+        </p:txBody>
+      </p:sp>
+      <p:sp>
+        <p:nvSpPr>
+          <p:cNvPr id="796" name="title"/>
+          <p:cNvSpPr txBox="1"/>
+          <p:nvPr/>
+        </p:nvSpPr>
+        <p:spPr>
+          <a:xfrm>
+            <a:off x="677387" y="692177"/>
+            <a:ext cx="10855878" cy="1447800"/>
+          </a:xfrm>
+          <a:prstGeom prst="rect">
+            <a:avLst/>
+          </a:prstGeom>
+          <a:noFill/>
+        </p:spPr>
+        <p:txBody>
+          <a:bodyPr wrap="square" lIns="76200" rIns="76200" tIns="50800" bIns="50800">
+            <a:spAutoFit/>
+          </a:bodyPr>
+          <a:lstStyle/>
+          <a:p>
+            <a:pPr algn="l">
+              <a:spcAft>
+                <a:spcPts val="300"/>
+              </a:spcAft>
+              <a:defRPr sz="4000">
+                <a:solidFill>
+                  <a:srgbClr val="000000"/>
+                </a:solidFill>
+                <a:latin typeface="Arial"/>
+                <a:ea typeface="Arial"/>
+                <a:cs typeface="Arial"/>
+              </a:defRPr>
+            </a:pPr>
+            <a:r>
+              <a:rPr sz="4000">
+                <a:solidFill>
+                  <a:srgbClr val="000000"/>
+                </a:solidFill>
+                <a:latin typeface="Arial"/>
+                <a:ea typeface="Arial"/>
+                <a:cs typeface="Arial"/>
+              </a:rPr>
+              <a:t>Текущее состояние: ручная сборка и проблемы</a:t>
+            </a:r>
+          </a:p>
+        </p:txBody>
+      </p:sp>
+      <p:sp>
+        <p:nvSpPr>
+          <p:cNvPr id="797" name="lead"/>
+          <p:cNvSpPr txBox="1"/>
+          <p:nvPr/>
+        </p:nvSpPr>
+        <p:spPr>
+          <a:xfrm>
+            <a:off x="677387" y="2825777"/>
+            <a:ext cx="10855878" cy="1566761"/>
+          </a:xfrm>
+          <a:prstGeom prst="rect">
+            <a:avLst/>
+          </a:prstGeom>
+          <a:noFill/>
+        </p:spPr>
+        <p:txBody>
+          <a:bodyPr wrap="square" lIns="76200" rIns="76200" tIns="50800" bIns="50800">
+            <a:spAutoFit/>
+          </a:bodyPr>
+          <a:lstStyle/>
+          <a:p>
+            <a:pPr algn="l">
+              <a:spcAft>
+                <a:spcPts val="300"/>
+              </a:spcAft>
+              <a:defRPr sz="4000">
+                <a:solidFill>
+                  <a:srgbClr val="000000"/>
+                </a:solidFill>
+                <a:latin typeface="Play"/>
+                <a:ea typeface="Play"/>
+                <a:cs typeface="Play"/>
+              </a:defRPr>
+            </a:pPr>
+            <a:r>
+              <a:rPr sz="4000">
+                <a:solidFill>
+                  <a:srgbClr val="000000"/>
+                </a:solidFill>
+                <a:latin typeface="Play"/>
+                <a:ea typeface="Play"/>
+                <a:cs typeface="Play"/>
+              </a:rPr>
+              <a:t>12-слайдовая колода занимает 186 мин</a:t>
+            </a:r>
+          </a:p>
+        </p:txBody>
+      </p:sp>
+      <p:sp>
+        <p:nvSpPr>
+          <p:cNvPr id="798" name="body"/>
+          <p:cNvSpPr txBox="1"/>
+          <p:nvPr/>
+        </p:nvSpPr>
+        <p:spPr>
+          <a:xfrm>
+            <a:off x="677387" y="4602714"/>
+            <a:ext cx="10855878" cy="1725985"/>
+          </a:xfrm>
+          <a:prstGeom prst="rect">
+            <a:avLst/>
+          </a:prstGeom>
+          <a:noFill/>
+        </p:spPr>
+        <p:txBody>
+          <a:bodyPr wrap="square" lIns="76200" rIns="76200" tIns="50800" bIns="50800">
+            <a:spAutoFit/>
+          </a:bodyPr>
+          <a:lstStyle/>
+          <a:p>
+            <a:pPr algn="l">
+              <a:spcAft>
+                <a:spcPts val="300"/>
+              </a:spcAft>
+              <a:defRPr sz="3200">
+                <a:solidFill>
+                  <a:srgbClr val="000000"/>
+                </a:solidFill>
+                <a:latin typeface="Play"/>
+                <a:ea typeface="Play"/>
+                <a:cs typeface="Play"/>
+              </a:defRPr>
+            </a:pPr>
+            <a:r>
+              <a:rPr sz="3200">
+                <a:solidFill>
+                  <a:srgbClr val="000000"/>
+                </a:solidFill>
+                <a:latin typeface="Play"/>
+                <a:ea typeface="Play"/>
+                <a:cs typeface="Play"/>
+              </a:rPr>
+              <a:t>• Правки после ревью добавляют 74 мин</a:t>
+            </a:r>
+          </a:p>
+          <a:p>
+            <a:pPr algn="l">
+              <a:spcAft>
+                <a:spcPts val="300"/>
+              </a:spcAft>
+              <a:defRPr sz="3200">
+                <a:solidFill>
+                  <a:srgbClr val="000000"/>
+                </a:solidFill>
+                <a:latin typeface="Play"/>
+                <a:ea typeface="Play"/>
+                <a:cs typeface="Play"/>
+              </a:defRPr>
+            </a:pPr>
+            <a:r>
+              <a:rPr sz="3200">
+                <a:solidFill>
+                  <a:srgbClr val="000000"/>
+                </a:solidFill>
+                <a:latin typeface="Play"/>
+                <a:ea typeface="Play"/>
+                <a:cs typeface="Play"/>
+              </a:rPr>
+              <a:t>• 19 из 42 колод нарушают фирменный стиль</a:t>
+            </a:r>
+          </a:p>
+        </p:txBody>
+      </p:sp>
+    </p:spTree>
+  </p:cSld>
+  <p:clrMapOvr>
+    <a:masterClrMapping/>
+  </p:clrMapOvr>
+</p:sld>
+</file>
+
+<file path=ppt/slides/slide58.xml><?xml version="1.0" encoding="utf-8"?>
+<p:sld xmlns:a="http://schemas.openxmlformats.org/drawingml/2006/main" xmlns:p="http://schemas.openxmlformats.org/presentationml/2006/main" xmlns:r="http://schemas.openxmlformats.org/officeDocument/2006/relationships">
+  <p:cSld>
+    <p:bg>
+      <p:bgPr>
+        <a:solidFill>
+          <a:schemeClr val="lt2"/>
+        </a:solidFill>
+      </p:bgPr>
+    </p:bg>
+    <p:spTree>
+      <p:nvGrpSpPr>
+        <p:cNvPr id="1" name=""/>
+        <p:cNvGrpSpPr/>
+        <p:nvPr/>
+      </p:nvGrpSpPr>
+      <p:grpSpPr/>
+      <p:sp>
+        <p:nvSpPr>
+          <p:cNvPr id="764" name="Google Shape;764;p58"/>
+          <p:cNvSpPr txBox="1"/>
+          <p:nvPr/>
+        </p:nvSpPr>
+        <p:spPr>
+          <a:xfrm>
+            <a:off x="18692059" y="4674436"/>
+            <a:ext cx="4304330" cy="678198"/>
+          </a:xfrm>
+          <a:prstGeom prst="rect">
+            <a:avLst/>
+          </a:prstGeom>
+          <a:noFill/>
+          <a:ln>
+            <a:noFill/>
+          </a:ln>
+        </p:spPr>
+        <p:txBody>
+          <a:bodyPr anchorCtr="0" anchor="t" bIns="45700" lIns="91425" spcFirstLastPara="1" rIns="91425" wrap="square" tIns="45700">
+            <a:noAutofit/>
+          </a:bodyPr>
+          <a:lstStyle/>
+          <a:p>
+            <a:pPr indent="0" lvl="0" marL="0" marR="0" rtl="0" algn="l">
+              <a:lnSpc>
+                <a:spcPct val="110000"/>
+              </a:lnSpc>
+              <a:spcBef>
+                <a:spcPts val="0"/>
+              </a:spcBef>
+              <a:spcAft>
+                <a:spcPts val="0"/>
+              </a:spcAft>
+              <a:buClr>
+                <a:schemeClr val="dk1"/>
+              </a:buClr>
+              <a:buSzPts val="1600"/>
+              <a:buFont typeface="Arial"/>
+              <a:buNone/>
+            </a:pPr>
+            <a:r>
+              <a:t/>
+            </a:r>
+            <a:endParaRPr sz="1600">
+              <a:solidFill>
+                <a:schemeClr val="dk1"/>
+              </a:solidFill>
+              <a:latin typeface="Arial"/>
+              <a:ea typeface="Arial"/>
+              <a:cs typeface="Arial"/>
+              <a:sym typeface="Arial"/>
+            </a:endParaRPr>
+          </a:p>
+        </p:txBody>
+      </p:sp>
+      <p:sp>
+        <p:nvSpPr>
+          <p:cNvPr id="765" name="title"/>
+          <p:cNvSpPr txBox="1"/>
+          <p:nvPr/>
+        </p:nvSpPr>
+        <p:spPr>
+          <a:xfrm>
+            <a:off x="677387" y="692177"/>
+            <a:ext cx="10855878" cy="1447800"/>
+          </a:xfrm>
+          <a:prstGeom prst="rect">
+            <a:avLst/>
+          </a:prstGeom>
+          <a:noFill/>
+        </p:spPr>
+        <p:txBody>
+          <a:bodyPr wrap="square" lIns="76200" rIns="76200" tIns="50800" bIns="50800">
+            <a:spAutoFit/>
+          </a:bodyPr>
+          <a:lstStyle/>
+          <a:p>
+            <a:pPr algn="l">
+              <a:spcAft>
+                <a:spcPts val="300"/>
+              </a:spcAft>
+              <a:defRPr sz="4000">
+                <a:solidFill>
+                  <a:srgbClr val="000000"/>
+                </a:solidFill>
+                <a:latin typeface="Arial"/>
+                <a:ea typeface="Arial"/>
+                <a:cs typeface="Arial"/>
+              </a:defRPr>
+            </a:pPr>
+            <a:r>
+              <a:rPr sz="4000">
+                <a:solidFill>
+                  <a:srgbClr val="000000"/>
+                </a:solidFill>
+                <a:latin typeface="Arial"/>
+                <a:ea typeface="Arial"/>
+                <a:cs typeface="Arial"/>
+              </a:rPr>
+              <a:t>Предлагаемый сервис: автоматизация от шаблона до аудита</a:t>
+            </a:r>
+          </a:p>
+        </p:txBody>
+      </p:sp>
+      <p:sp>
+        <p:nvSpPr>
+          <p:cNvPr id="766" name="lead"/>
+          <p:cNvSpPr txBox="1"/>
+          <p:nvPr/>
+        </p:nvSpPr>
+        <p:spPr>
+          <a:xfrm>
+            <a:off x="677387" y="2825777"/>
+            <a:ext cx="10855878" cy="1465998"/>
+          </a:xfrm>
+          <a:prstGeom prst="rect">
+            <a:avLst/>
+          </a:prstGeom>
+          <a:noFill/>
+        </p:spPr>
+        <p:txBody>
+          <a:bodyPr wrap="square" lIns="76200" rIns="76200" tIns="50800" bIns="50800">
+            <a:spAutoFit/>
+          </a:bodyPr>
+          <a:lstStyle/>
+          <a:p>
+            <a:pPr algn="l">
+              <a:spcAft>
+                <a:spcPts val="300"/>
+              </a:spcAft>
+              <a:defRPr sz="4000">
+                <a:solidFill>
+                  <a:srgbClr val="000000"/>
+                </a:solidFill>
+                <a:latin typeface="Play"/>
+                <a:ea typeface="Play"/>
+                <a:cs typeface="Play"/>
+              </a:defRPr>
+            </a:pPr>
+            <a:r>
+              <a:rPr sz="4000">
+                <a:solidFill>
+                  <a:srgbClr val="000000"/>
+                </a:solidFill>
+                <a:latin typeface="Play"/>
+                <a:ea typeface="Play"/>
+                <a:cs typeface="Play"/>
+              </a:rPr>
+              <a:t>Сервис принимает pptx шаблон и материалы</a:t>
+            </a:r>
+          </a:p>
+        </p:txBody>
+      </p:sp>
+      <p:sp>
+        <p:nvSpPr>
+          <p:cNvPr id="767" name="body"/>
+          <p:cNvSpPr txBox="1"/>
+          <p:nvPr/>
+        </p:nvSpPr>
+        <p:spPr>
+          <a:xfrm>
+            <a:off x="677387" y="4501952"/>
+            <a:ext cx="10855878" cy="1826747"/>
+          </a:xfrm>
+          <a:prstGeom prst="rect">
+            <a:avLst/>
+          </a:prstGeom>
+          <a:noFill/>
+        </p:spPr>
+        <p:txBody>
+          <a:bodyPr wrap="square" lIns="76200" rIns="76200" tIns="50800" bIns="50800">
+            <a:spAutoFit/>
+          </a:bodyPr>
+          <a:lstStyle/>
+          <a:p>
+            <a:pPr algn="l">
+              <a:spcAft>
+                <a:spcPts val="300"/>
+              </a:spcAft>
+              <a:defRPr sz="3200">
+                <a:solidFill>
+                  <a:srgbClr val="000000"/>
+                </a:solidFill>
+                <a:latin typeface="Play"/>
+                <a:ea typeface="Play"/>
+                <a:cs typeface="Play"/>
+              </a:defRPr>
+            </a:pPr>
+            <a:r>
+              <a:rPr sz="3200">
+                <a:solidFill>
+                  <a:srgbClr val="000000"/>
+                </a:solidFill>
+                <a:latin typeface="Play"/>
+                <a:ea typeface="Play"/>
+                <a:cs typeface="Play"/>
+              </a:rPr>
+              <a:t>• Автоматически формирует дизайн-систему и план колоды</a:t>
+            </a:r>
+          </a:p>
+          <a:p>
+            <a:pPr algn="l">
+              <a:spcAft>
+                <a:spcPts val="300"/>
+              </a:spcAft>
+              <a:defRPr sz="3200">
+                <a:solidFill>
+                  <a:srgbClr val="000000"/>
+                </a:solidFill>
+                <a:latin typeface="Play"/>
+                <a:ea typeface="Play"/>
+                <a:cs typeface="Play"/>
+              </a:defRPr>
+            </a:pPr>
+            <a:r>
+              <a:rPr sz="3200">
+                <a:solidFill>
+                  <a:srgbClr val="000000"/>
+                </a:solidFill>
+                <a:latin typeface="Play"/>
+                <a:ea typeface="Play"/>
+                <a:cs typeface="Play"/>
+              </a:rPr>
+              <a:t>• Результат – редактируемый pptx, pdf и html</a:t>
+            </a:r>
+          </a:p>
+        </p:txBody>
+      </p:sp>
+    </p:spTree>
+  </p:cSld>
+  <p:clrMapOvr>
+    <a:masterClrMapping/>
+  </p:clrMapOvr>
+</p:sld>
+</file>
+
+<file path=ppt/slides/slide59.xml><?xml version="1.0" encoding="utf-8"?>
+<p:sld xmlns:a="http://schemas.openxmlformats.org/drawingml/2006/main" xmlns:p="http://schemas.openxmlformats.org/presentationml/2006/main" xmlns:r="http://schemas.openxmlformats.org/officeDocument/2006/relationships">
+  <p:cSld>
+    <p:bg>
+      <p:bgPr>
+        <a:solidFill>
+          <a:schemeClr val="lt2"/>
+        </a:solidFill>
+      </p:bgPr>
+    </p:bg>
+    <p:spTree>
+      <p:nvGrpSpPr>
+        <p:cNvPr id="1" name=""/>
+        <p:cNvGrpSpPr/>
+        <p:nvPr/>
+      </p:nvGrpSpPr>
+      <p:grpSpPr/>
+      <p:sp>
+        <p:nvSpPr>
+          <p:cNvPr id="782" name="Google Shape;782;p59"/>
+          <p:cNvSpPr txBox="1"/>
+          <p:nvPr/>
+        </p:nvSpPr>
+        <p:spPr>
+          <a:xfrm>
+            <a:off x="18692059" y="4674436"/>
+            <a:ext cx="4304330" cy="678198"/>
+          </a:xfrm>
+          <a:prstGeom prst="rect">
+            <a:avLst/>
+          </a:prstGeom>
+          <a:noFill/>
+          <a:ln>
+            <a:noFill/>
+          </a:ln>
+        </p:spPr>
+        <p:txBody>
+          <a:bodyPr anchorCtr="0" anchor="t" bIns="45700" lIns="91425" spcFirstLastPara="1" rIns="91425" wrap="square" tIns="45700">
+            <a:noAutofit/>
+          </a:bodyPr>
+          <a:lstStyle/>
+          <a:p>
+            <a:pPr indent="0" lvl="0" marL="0" marR="0" rtl="0" algn="l">
+              <a:lnSpc>
+                <a:spcPct val="110000"/>
+              </a:lnSpc>
+              <a:spcBef>
+                <a:spcPts val="0"/>
+              </a:spcBef>
+              <a:spcAft>
+                <a:spcPts val="0"/>
+              </a:spcAft>
+              <a:buClr>
+                <a:schemeClr val="dk1"/>
+              </a:buClr>
+              <a:buSzPts val="1600"/>
+              <a:buFont typeface="Arial"/>
+              <a:buNone/>
+            </a:pPr>
+            <a:r>
+              <a:t/>
+            </a:r>
+            <a:endParaRPr sz="1600">
+              <a:solidFill>
+                <a:schemeClr val="dk1"/>
+              </a:solidFill>
+              <a:latin typeface="Arial"/>
+              <a:ea typeface="Arial"/>
+              <a:cs typeface="Arial"/>
+              <a:sym typeface="Arial"/>
+            </a:endParaRPr>
+          </a:p>
+        </p:txBody>
+      </p:sp>
+      <p:sp>
+        <p:nvSpPr>
+          <p:cNvPr id="783" name="title"/>
+          <p:cNvSpPr txBox="1"/>
+          <p:nvPr/>
+        </p:nvSpPr>
+        <p:spPr>
+          <a:xfrm>
+            <a:off x="677387" y="692177"/>
+            <a:ext cx="10855878" cy="1447800"/>
+          </a:xfrm>
+          <a:prstGeom prst="rect">
+            <a:avLst/>
+          </a:prstGeom>
+          <a:noFill/>
+        </p:spPr>
+        <p:txBody>
+          <a:bodyPr wrap="square" lIns="76200" rIns="76200" tIns="50800" bIns="50800">
+            <a:spAutoFit/>
+          </a:bodyPr>
+          <a:lstStyle/>
+          <a:p>
+            <a:pPr algn="l">
+              <a:spcAft>
+                <a:spcPts val="300"/>
+              </a:spcAft>
+              <a:defRPr sz="4000">
+                <a:solidFill>
+                  <a:srgbClr val="000000"/>
+                </a:solidFill>
+                <a:latin typeface="Arial"/>
+                <a:ea typeface="Arial"/>
+                <a:cs typeface="Arial"/>
+              </a:defRPr>
+            </a:pPr>
+            <a:r>
+              <a:rPr sz="4000">
+                <a:solidFill>
+                  <a:srgbClr val="000000"/>
+                </a:solidFill>
+                <a:latin typeface="Arial"/>
+                <a:ea typeface="Arial"/>
+                <a:cs typeface="Arial"/>
+              </a:rPr>
+              <a:t>Ожидаемый эффект: ускорение и качество</a:t>
+            </a:r>
+          </a:p>
+        </p:txBody>
+      </p:sp>
+      <p:sp>
+        <p:nvSpPr>
+          <p:cNvPr id="784" name="lead"/>
+          <p:cNvSpPr txBox="1"/>
+          <p:nvPr/>
+        </p:nvSpPr>
+        <p:spPr>
+          <a:xfrm>
+            <a:off x="677387" y="2825777"/>
+            <a:ext cx="10855878" cy="1637154"/>
+          </a:xfrm>
+          <a:prstGeom prst="rect">
+            <a:avLst/>
+          </a:prstGeom>
+          <a:noFill/>
+        </p:spPr>
+        <p:txBody>
+          <a:bodyPr wrap="square" lIns="76200" rIns="76200" tIns="50800" bIns="50800">
+            <a:spAutoFit/>
+          </a:bodyPr>
+          <a:lstStyle/>
+          <a:p>
+            <a:pPr algn="l">
+              <a:spcAft>
+                <a:spcPts val="300"/>
+              </a:spcAft>
+              <a:defRPr sz="4000">
+                <a:solidFill>
+                  <a:srgbClr val="000000"/>
+                </a:solidFill>
+                <a:latin typeface="Play"/>
+                <a:ea typeface="Play"/>
+                <a:cs typeface="Play"/>
+              </a:defRPr>
+            </a:pPr>
+            <a:r>
+              <a:rPr sz="4000">
+                <a:solidFill>
+                  <a:srgbClr val="000000"/>
+                </a:solidFill>
+                <a:latin typeface="Play"/>
+                <a:ea typeface="Play"/>
+                <a:cs typeface="Play"/>
+              </a:rPr>
+              <a:t>Время сборки сократилось до 4 мин</a:t>
+            </a:r>
+          </a:p>
+        </p:txBody>
+      </p:sp>
+      <p:sp>
+        <p:nvSpPr>
+          <p:cNvPr id="785" name="body"/>
+          <p:cNvSpPr txBox="1"/>
+          <p:nvPr/>
+        </p:nvSpPr>
+        <p:spPr>
+          <a:xfrm>
+            <a:off x="677387" y="4673108"/>
+            <a:ext cx="10855878" cy="1655591"/>
+          </a:xfrm>
+          <a:prstGeom prst="rect">
+            <a:avLst/>
+          </a:prstGeom>
+          <a:noFill/>
+        </p:spPr>
+        <p:txBody>
+          <a:bodyPr wrap="square" lIns="76200" rIns="76200" tIns="50800" bIns="50800">
+            <a:spAutoFit/>
+          </a:bodyPr>
+          <a:lstStyle/>
+          <a:p>
+            <a:pPr algn="l">
+              <a:spcAft>
+                <a:spcPts val="300"/>
+              </a:spcAft>
+              <a:defRPr sz="3200">
+                <a:solidFill>
+                  <a:srgbClr val="000000"/>
+                </a:solidFill>
+                <a:latin typeface="Play"/>
+                <a:ea typeface="Play"/>
+                <a:cs typeface="Play"/>
+              </a:defRPr>
+            </a:pPr>
+            <a:r>
+              <a:rPr sz="3200">
+                <a:solidFill>
+                  <a:srgbClr val="000000"/>
+                </a:solidFill>
+                <a:latin typeface="Play"/>
+                <a:ea typeface="Play"/>
+                <a:cs typeface="Play"/>
+              </a:rPr>
+              <a:t>• Первый вариант готов за 1 день</a:t>
+            </a:r>
+          </a:p>
+          <a:p>
+            <a:pPr algn="l">
+              <a:spcAft>
+                <a:spcPts val="300"/>
+              </a:spcAft>
+              <a:defRPr sz="3200">
+                <a:solidFill>
+                  <a:srgbClr val="000000"/>
+                </a:solidFill>
+                <a:latin typeface="Play"/>
+                <a:ea typeface="Play"/>
+                <a:cs typeface="Play"/>
+              </a:defRPr>
+            </a:pPr>
+            <a:r>
+              <a:rPr sz="3200">
+                <a:solidFill>
+                  <a:srgbClr val="000000"/>
+                </a:solidFill>
+                <a:latin typeface="Play"/>
+                <a:ea typeface="Play"/>
+                <a:cs typeface="Play"/>
+              </a:rPr>
+              <a:t>• Стиль-нарушения упали до 2 из 68</a:t>
+            </a:r>
+          </a:p>
+        </p:txBody>
+      </p:sp>
+    </p:spTree>
+  </p:cSld>
+  <p:clrMapOvr>
+    <a:masterClrMapping/>
+  </p:clrMapOvr>
+</p:sld>
+</file>
+
+<file path=ppt/slides/slide60.xml><?xml version="1.0" encoding="utf-8"?>
+<p:sld xmlns:a="http://schemas.openxmlformats.org/drawingml/2006/main" xmlns:p="http://schemas.openxmlformats.org/presentationml/2006/main" xmlns:r="http://schemas.openxmlformats.org/officeDocument/2006/relationships">
+  <p:cSld>
+    <p:bg>
+      <p:bgPr>
+        <a:solidFill>
+          <a:schemeClr val="lt2"/>
+        </a:solidFill>
+      </p:bgPr>
+    </p:bg>
+    <p:spTree>
+      <p:nvGrpSpPr>
+        <p:cNvPr id="1" name=""/>
+        <p:cNvGrpSpPr/>
+        <p:nvPr/>
+      </p:nvGrpSpPr>
+      <p:grpSpPr/>
+      <p:sp>
+        <p:nvSpPr>
+          <p:cNvPr id="795" name="Google Shape;795;p60"/>
+          <p:cNvSpPr txBox="1"/>
+          <p:nvPr/>
+        </p:nvSpPr>
+        <p:spPr>
+          <a:xfrm>
+            <a:off x="18692059" y="4674436"/>
+            <a:ext cx="4304330" cy="678198"/>
+          </a:xfrm>
+          <a:prstGeom prst="rect">
+            <a:avLst/>
+          </a:prstGeom>
+          <a:noFill/>
+          <a:ln>
+            <a:noFill/>
+          </a:ln>
+        </p:spPr>
+        <p:txBody>
+          <a:bodyPr anchorCtr="0" anchor="t" bIns="45700" lIns="91425" spcFirstLastPara="1" rIns="91425" wrap="square" tIns="45700">
+            <a:noAutofit/>
+          </a:bodyPr>
+          <a:lstStyle/>
+          <a:p>
+            <a:pPr indent="0" lvl="0" marL="0" marR="0" rtl="0" algn="l">
+              <a:lnSpc>
+                <a:spcPct val="110000"/>
+              </a:lnSpc>
+              <a:spcBef>
+                <a:spcPts val="0"/>
+              </a:spcBef>
+              <a:spcAft>
+                <a:spcPts val="0"/>
+              </a:spcAft>
+              <a:buClr>
+                <a:schemeClr val="dk1"/>
+              </a:buClr>
+              <a:buSzPts val="1600"/>
+              <a:buFont typeface="Arial"/>
+              <a:buNone/>
+            </a:pPr>
+            <a:r>
+              <a:t/>
+            </a:r>
+            <a:endParaRPr sz="1600">
+              <a:solidFill>
+                <a:schemeClr val="dk1"/>
+              </a:solidFill>
+              <a:latin typeface="Arial"/>
+              <a:ea typeface="Arial"/>
+              <a:cs typeface="Arial"/>
+              <a:sym typeface="Arial"/>
+            </a:endParaRPr>
+          </a:p>
+        </p:txBody>
+      </p:sp>
+      <p:sp>
+        <p:nvSpPr>
+          <p:cNvPr id="796" name="title"/>
+          <p:cNvSpPr txBox="1"/>
+          <p:nvPr/>
+        </p:nvSpPr>
+        <p:spPr>
+          <a:xfrm>
+            <a:off x="677387" y="692177"/>
+            <a:ext cx="10855878" cy="1447800"/>
+          </a:xfrm>
+          <a:prstGeom prst="rect">
+            <a:avLst/>
+          </a:prstGeom>
+          <a:noFill/>
+        </p:spPr>
+        <p:txBody>
+          <a:bodyPr wrap="square" lIns="76200" rIns="76200" tIns="50800" bIns="50800">
+            <a:spAutoFit/>
+          </a:bodyPr>
+          <a:lstStyle/>
+          <a:p>
+            <a:pPr algn="l">
+              <a:spcAft>
+                <a:spcPts val="300"/>
+              </a:spcAft>
+              <a:defRPr sz="4000">
+                <a:solidFill>
+                  <a:srgbClr val="000000"/>
+                </a:solidFill>
+                <a:latin typeface="Arial"/>
+                <a:ea typeface="Arial"/>
+                <a:cs typeface="Arial"/>
+              </a:defRPr>
+            </a:pPr>
+            <a:r>
+              <a:rPr sz="4000">
+                <a:solidFill>
+                  <a:srgbClr val="000000"/>
+                </a:solidFill>
+                <a:latin typeface="Arial"/>
+                <a:ea typeface="Arial"/>
+                <a:cs typeface="Arial"/>
+              </a:rPr>
+              <a:t>Ресурсы и сроки: инфраструктура и стоимость</a:t>
+            </a:r>
+          </a:p>
+        </p:txBody>
+      </p:sp>
+      <p:sp>
+        <p:nvSpPr>
+          <p:cNvPr id="797" name="lead"/>
+          <p:cNvSpPr txBox="1"/>
+          <p:nvPr/>
+        </p:nvSpPr>
+        <p:spPr>
+          <a:xfrm>
+            <a:off x="677387" y="2825777"/>
+            <a:ext cx="10855878" cy="1445595"/>
+          </a:xfrm>
+          <a:prstGeom prst="rect">
+            <a:avLst/>
+          </a:prstGeom>
+          <a:noFill/>
+        </p:spPr>
+        <p:txBody>
+          <a:bodyPr wrap="square" lIns="76200" rIns="76200" tIns="50800" bIns="50800">
+            <a:spAutoFit/>
+          </a:bodyPr>
+          <a:lstStyle/>
+          <a:p>
+            <a:pPr algn="l">
+              <a:spcAft>
+                <a:spcPts val="300"/>
+              </a:spcAft>
+              <a:defRPr sz="4000">
+                <a:solidFill>
+                  <a:srgbClr val="000000"/>
+                </a:solidFill>
+                <a:latin typeface="Play"/>
+                <a:ea typeface="Play"/>
+                <a:cs typeface="Play"/>
+              </a:defRPr>
+            </a:pPr>
+            <a:r>
+              <a:rPr sz="4000">
+                <a:solidFill>
+                  <a:srgbClr val="000000"/>
+                </a:solidFill>
+                <a:latin typeface="Play"/>
+                <a:ea typeface="Play"/>
+                <a:cs typeface="Play"/>
+              </a:rPr>
+              <a:t>Сервис работает на 2 vCPU / 2 GB RAM</a:t>
+            </a:r>
+          </a:p>
+        </p:txBody>
+      </p:sp>
+      <p:sp>
+        <p:nvSpPr>
+          <p:cNvPr id="798" name="body"/>
+          <p:cNvSpPr txBox="1"/>
+          <p:nvPr/>
+        </p:nvSpPr>
+        <p:spPr>
+          <a:xfrm>
+            <a:off x="677387" y="4481549"/>
+            <a:ext cx="10855878" cy="1847150"/>
+          </a:xfrm>
+          <a:prstGeom prst="rect">
+            <a:avLst/>
+          </a:prstGeom>
+          <a:noFill/>
+        </p:spPr>
+        <p:txBody>
+          <a:bodyPr wrap="square" lIns="76200" rIns="76200" tIns="50800" bIns="50800">
+            <a:spAutoFit/>
+          </a:bodyPr>
+          <a:lstStyle/>
+          <a:p>
+            <a:pPr algn="l">
+              <a:spcAft>
+                <a:spcPts val="300"/>
+              </a:spcAft>
+              <a:defRPr sz="3200">
+                <a:solidFill>
+                  <a:srgbClr val="000000"/>
+                </a:solidFill>
+                <a:latin typeface="Play"/>
+                <a:ea typeface="Play"/>
+                <a:cs typeface="Play"/>
+              </a:defRPr>
+            </a:pPr>
+            <a:r>
+              <a:rPr sz="3200">
+                <a:solidFill>
+                  <a:srgbClr val="000000"/>
+                </a:solidFill>
+                <a:latin typeface="Play"/>
+                <a:ea typeface="Play"/>
+                <a:cs typeface="Play"/>
+              </a:rPr>
+              <a:t>• Модель gpt-oss-20b, инференс 1400 руб за 6 недель</a:t>
+            </a:r>
+          </a:p>
+          <a:p>
+            <a:pPr algn="l">
+              <a:spcAft>
+                <a:spcPts val="300"/>
+              </a:spcAft>
+              <a:defRPr sz="3200">
+                <a:solidFill>
+                  <a:srgbClr val="000000"/>
+                </a:solidFill>
+                <a:latin typeface="Play"/>
+                <a:ea typeface="Play"/>
+                <a:cs typeface="Play"/>
+              </a:defRPr>
+            </a:pPr>
+            <a:r>
+              <a:rPr sz="3200">
+                <a:solidFill>
+                  <a:srgbClr val="000000"/>
+                </a:solidFill>
+                <a:latin typeface="Play"/>
+                <a:ea typeface="Play"/>
+                <a:cs typeface="Play"/>
+              </a:rPr>
+              <a:t>• Параллельность до 20 задач без очереди</a:t>
+            </a:r>
+          </a:p>
+        </p:txBody>
+      </p:sp>
+    </p:spTree>
+  </p:cSld>
+  <p:clrMapOvr>
+    <a:masterClrMapping/>
+  </p:clrMapOvr>
+</p:sld>
+</file>
+
+<file path=ppt/slides/slide61.xml><?xml version="1.0" encoding="utf-8"?>
 <p:sld xmlns:a="http://schemas.openxmlformats.org/drawingml/2006/main" xmlns:p="http://schemas.openxmlformats.org/presentationml/2006/main" xmlns:r="http://schemas.openxmlformats.org/officeDocument/2006/relationships">
   <p:cSld>
     <p:spTree>
@@ -7394,7 +8759,7 @@
         <p:spPr>
           <a:xfrm>
             <a:off x="677387" y="692177"/>
-            <a:ext cx="10855878" cy="822960"/>
+            <a:ext cx="10855878" cy="1447800"/>
           </a:xfrm>
           <a:prstGeom prst="rect">
             <a:avLst/>
@@ -7429,425 +8794,331 @@
                 <a:ea typeface="Arial"/>
                 <a:cs typeface="Arial"/>
               </a:rPr>
-              <a:t>Контекст и возможность</a:t>
+              <a:t>Пилотный план: 6 недель, 2 команды, 68 колод</a:t>
             </a:r>
           </a:p>
         </p:txBody>
       </p:sp>
-      <p:graphicFrame>
-        <p:nvGraphicFramePr>
-          <p:cNvPr id="988" name="Table 987"/>
-          <p:cNvGraphicFramePr>
-            <a:graphicFrameLocks noGrp="1"/>
-          </p:cNvGraphicFramePr>
-          <p:nvPr/>
-        </p:nvGraphicFramePr>
-        <p:xfrm>
-          <a:off x="677387" y="2200937"/>
-          <a:ext cx="10855878" cy="662907"/>
-        </p:xfrm>
-        <a:graphic>
-          <a:graphicData uri="http://schemas.openxmlformats.org/drawingml/2006/table">
-            <a:tbl>
-              <a:tblPr firstRow="1" bandRow="1">
-                <a:tableStyleId>{5C22544A-7EE6-4342-B048-85BDC9FD1C3A}</a:tableStyleId>
-              </a:tblPr>
-              <a:tblGrid>
-                <a:gridCol w="5427939"/>
-                <a:gridCol w="5427939"/>
-              </a:tblGrid>
-              <a:tr h="94701">
-                <a:tc>
-                  <a:txBody>
-                    <a:bodyPr/>
-                    <a:lstStyle/>
-                    <a:p>
-                      <a:pPr>
-                        <a:defRPr sz="1300" b="1">
-                          <a:solidFill>
-                            <a:srgbClr val="FFFFFF"/>
-                          </a:solidFill>
-                          <a:latin typeface="Play"/>
-                          <a:ea typeface="Play"/>
-                          <a:cs typeface="Play"/>
-                        </a:defRPr>
-                      </a:pPr>
-                      <a:r>
-                        <a:t>Показатель</a:t>
-                      </a:r>
-                    </a:p>
-                  </a:txBody>
-                  <a:tcPr>
-                    <a:solidFill>
-                      <a:srgbClr val="0077FF"/>
-                    </a:solidFill>
-                  </a:tcPr>
-                </a:tc>
-                <a:tc>
-                  <a:txBody>
-                    <a:bodyPr/>
-                    <a:lstStyle/>
-                    <a:p>
-                      <a:pPr>
-                        <a:defRPr sz="1300" b="1">
-                          <a:solidFill>
-                            <a:srgbClr val="FFFFFF"/>
-                          </a:solidFill>
-                          <a:latin typeface="Play"/>
-                          <a:ea typeface="Play"/>
-                          <a:cs typeface="Play"/>
-                        </a:defRPr>
-                      </a:pPr>
-                      <a:r>
-                        <a:t>Значение</a:t>
-                      </a:r>
-                    </a:p>
-                  </a:txBody>
-                  <a:tcPr>
-                    <a:solidFill>
-                      <a:srgbClr val="0077FF"/>
-                    </a:solidFill>
-                  </a:tcPr>
-                </a:tc>
-              </a:tr>
-              <a:tr h="94701">
-                <a:tc>
-                  <a:txBody>
-                    <a:bodyPr/>
-                    <a:lstStyle/>
-                    <a:p>
-                      <a:pPr>
-                        <a:defRPr sz="1300" b="0">
-                          <a:solidFill>
-                            <a:srgbClr val="000000"/>
-                          </a:solidFill>
-                          <a:latin typeface="Play"/>
-                          <a:ea typeface="Play"/>
-                          <a:cs typeface="Play"/>
-                        </a:defRPr>
-                      </a:pPr>
-                      <a:r>
-                        <a:t>Колоды</a:t>
-                      </a:r>
-                    </a:p>
-                  </a:txBody>
-                  <a:tcPr>
-                    <a:solidFill>
-                      <a:srgbClr val="FFFFFF"/>
-                    </a:solidFill>
-                  </a:tcPr>
-                </a:tc>
-                <a:tc>
-                  <a:txBody>
-                    <a:bodyPr/>
-                    <a:lstStyle/>
-                    <a:p>
-                      <a:pPr>
-                        <a:defRPr sz="1300" b="0">
-                          <a:solidFill>
-                            <a:srgbClr val="000000"/>
-                          </a:solidFill>
-                          <a:latin typeface="Play"/>
-                          <a:ea typeface="Play"/>
-                          <a:cs typeface="Play"/>
-                        </a:defRPr>
-                      </a:pPr>
-                      <a:r>
-                        <a:t>42</a:t>
-                      </a:r>
-                    </a:p>
-                  </a:txBody>
-                  <a:tcPr>
-                    <a:solidFill>
-                      <a:srgbClr val="FFFFFF"/>
-                    </a:solidFill>
-                  </a:tcPr>
-                </a:tc>
-              </a:tr>
-              <a:tr h="94701">
-                <a:tc>
-                  <a:txBody>
-                    <a:bodyPr/>
-                    <a:lstStyle/>
-                    <a:p>
-                      <a:pPr>
-                        <a:defRPr sz="1300" b="0">
-                          <a:solidFill>
-                            <a:srgbClr val="000000"/>
-                          </a:solidFill>
-                          <a:latin typeface="Play"/>
-                          <a:ea typeface="Play"/>
-                          <a:cs typeface="Play"/>
-                        </a:defRPr>
-                      </a:pPr>
-                      <a:r>
-                        <a:t>Сборка колоды</a:t>
-                      </a:r>
-                    </a:p>
-                  </a:txBody>
-                  <a:tcPr>
-                    <a:solidFill>
-                      <a:srgbClr val="FFFFFF"/>
-                    </a:solidFill>
-                  </a:tcPr>
-                </a:tc>
-                <a:tc>
-                  <a:txBody>
-                    <a:bodyPr/>
-                    <a:lstStyle/>
-                    <a:p>
-                      <a:pPr>
-                        <a:defRPr sz="1300" b="0">
-                          <a:solidFill>
-                            <a:srgbClr val="000000"/>
-                          </a:solidFill>
-                          <a:latin typeface="Play"/>
-                          <a:ea typeface="Play"/>
-                          <a:cs typeface="Play"/>
-                        </a:defRPr>
-                      </a:pPr>
-                      <a:r>
-                        <a:t>186 мин</a:t>
-                      </a:r>
-                    </a:p>
-                  </a:txBody>
-                  <a:tcPr>
-                    <a:solidFill>
-                      <a:srgbClr val="FFFFFF"/>
-                    </a:solidFill>
-                  </a:tcPr>
-                </a:tc>
-              </a:tr>
-              <a:tr h="94701">
-                <a:tc>
-                  <a:txBody>
-                    <a:bodyPr/>
-                    <a:lstStyle/>
-                    <a:p>
-                      <a:pPr>
-                        <a:defRPr sz="1300" b="0">
-                          <a:solidFill>
-                            <a:srgbClr val="000000"/>
-                          </a:solidFill>
-                          <a:latin typeface="Play"/>
-                          <a:ea typeface="Play"/>
-                          <a:cs typeface="Play"/>
-                        </a:defRPr>
-                      </a:pPr>
-                      <a:r>
-                        <a:t>Правки</a:t>
-                      </a:r>
-                    </a:p>
-                  </a:txBody>
-                  <a:tcPr>
-                    <a:solidFill>
-                      <a:srgbClr val="FFFFFF"/>
-                    </a:solidFill>
-                  </a:tcPr>
-                </a:tc>
-                <a:tc>
-                  <a:txBody>
-                    <a:bodyPr/>
-                    <a:lstStyle/>
-                    <a:p>
-                      <a:pPr>
-                        <a:defRPr sz="1300" b="0">
-                          <a:solidFill>
-                            <a:srgbClr val="000000"/>
-                          </a:solidFill>
-                          <a:latin typeface="Play"/>
-                          <a:ea typeface="Play"/>
-                          <a:cs typeface="Play"/>
-                        </a:defRPr>
-                      </a:pPr>
-                      <a:r>
-                        <a:t>74 мин</a:t>
-                      </a:r>
-                    </a:p>
-                  </a:txBody>
-                  <a:tcPr>
-                    <a:solidFill>
-                      <a:srgbClr val="FFFFFF"/>
-                    </a:solidFill>
-                  </a:tcPr>
-                </a:tc>
-              </a:tr>
-              <a:tr h="94701">
-                <a:tc>
-                  <a:txBody>
-                    <a:bodyPr/>
-                    <a:lstStyle/>
-                    <a:p>
-                      <a:pPr>
-                        <a:defRPr sz="1300" b="0">
-                          <a:solidFill>
-                            <a:srgbClr val="000000"/>
-                          </a:solidFill>
-                          <a:latin typeface="Play"/>
-                          <a:ea typeface="Play"/>
-                          <a:cs typeface="Play"/>
-                        </a:defRPr>
-                      </a:pPr>
-                      <a:r>
-                        <a:t>Нарушения стиля</a:t>
-                      </a:r>
-                    </a:p>
-                  </a:txBody>
-                  <a:tcPr>
-                    <a:solidFill>
-                      <a:srgbClr val="FFFFFF"/>
-                    </a:solidFill>
-                  </a:tcPr>
-                </a:tc>
-                <a:tc>
-                  <a:txBody>
-                    <a:bodyPr/>
-                    <a:lstStyle/>
-                    <a:p>
-                      <a:pPr>
-                        <a:defRPr sz="1300" b="0">
-                          <a:solidFill>
-                            <a:srgbClr val="000000"/>
-                          </a:solidFill>
-                          <a:latin typeface="Play"/>
-                          <a:ea typeface="Play"/>
-                          <a:cs typeface="Play"/>
-                        </a:defRPr>
-                      </a:pPr>
-                      <a:r>
-                        <a:t>19/42</a:t>
-                      </a:r>
-                    </a:p>
-                  </a:txBody>
-                  <a:tcPr>
-                    <a:solidFill>
-                      <a:srgbClr val="FFFFFF"/>
-                    </a:solidFill>
-                  </a:tcPr>
-                </a:tc>
-              </a:tr>
-              <a:tr h="94701">
-                <a:tc>
-                  <a:txBody>
-                    <a:bodyPr/>
-                    <a:lstStyle/>
-                    <a:p>
-                      <a:pPr>
-                        <a:defRPr sz="1300" b="0">
-                          <a:solidFill>
-                            <a:srgbClr val="000000"/>
-                          </a:solidFill>
-                          <a:latin typeface="Play"/>
-                          <a:ea typeface="Play"/>
-                          <a:cs typeface="Play"/>
-                        </a:defRPr>
-                      </a:pPr>
-                      <a:r>
-                        <a:t>Запросы/неделя</a:t>
-                      </a:r>
-                    </a:p>
-                  </a:txBody>
-                  <a:tcPr>
-                    <a:solidFill>
-                      <a:srgbClr val="FFFFFF"/>
-                    </a:solidFill>
-                  </a:tcPr>
-                </a:tc>
-                <a:tc>
-                  <a:txBody>
-                    <a:bodyPr/>
-                    <a:lstStyle/>
-                    <a:p>
-                      <a:pPr>
-                        <a:defRPr sz="1300" b="0">
-                          <a:solidFill>
-                            <a:srgbClr val="000000"/>
-                          </a:solidFill>
-                          <a:latin typeface="Play"/>
-                          <a:ea typeface="Play"/>
-                          <a:cs typeface="Play"/>
-                        </a:defRPr>
-                      </a:pPr>
-                      <a:r>
-                        <a:t>11/27</a:t>
-                      </a:r>
-                    </a:p>
-                  </a:txBody>
-                  <a:tcPr>
-                    <a:solidFill>
-                      <a:srgbClr val="FFFFFF"/>
-                    </a:solidFill>
-                  </a:tcPr>
-                </a:tc>
-              </a:tr>
-              <a:tr h="94701">
-                <a:tc>
-                  <a:txBody>
-                    <a:bodyPr/>
-                    <a:lstStyle/>
-                    <a:p>
-                      <a:pPr>
-                        <a:defRPr sz="1300" b="0">
-                          <a:solidFill>
-                            <a:srgbClr val="000000"/>
-                          </a:solidFill>
-                          <a:latin typeface="Play"/>
-                          <a:ea typeface="Play"/>
-                          <a:cs typeface="Play"/>
-                        </a:defRPr>
-                      </a:pPr>
-                      <a:r>
-                        <a:t>Время ожидания</a:t>
-                      </a:r>
-                    </a:p>
-                  </a:txBody>
-                  <a:tcPr>
-                    <a:solidFill>
-                      <a:srgbClr val="FFFFFF"/>
-                    </a:solidFill>
-                  </a:tcPr>
-                </a:tc>
-                <a:tc>
-                  <a:txBody>
-                    <a:bodyPr/>
-                    <a:lstStyle/>
-                    <a:p>
-                      <a:pPr>
-                        <a:defRPr sz="1300" b="0">
-                          <a:solidFill>
-                            <a:srgbClr val="000000"/>
-                          </a:solidFill>
-                          <a:latin typeface="Play"/>
-                          <a:ea typeface="Play"/>
-                          <a:cs typeface="Play"/>
-                        </a:defRPr>
-                      </a:pPr>
-                      <a:r>
-                        <a:t>6 дней</a:t>
-                      </a:r>
-                    </a:p>
-                  </a:txBody>
-                  <a:tcPr>
-                    <a:solidFill>
-                      <a:srgbClr val="FFFFFF"/>
-                    </a:solidFill>
-                  </a:tcPr>
-                </a:tc>
-              </a:tr>
-            </a:tbl>
-          </a:graphicData>
-        </a:graphic>
-      </p:graphicFrame>
       <p:sp>
         <p:nvSpPr>
-          <p:cNvPr id="989" name="body"/>
+          <p:cNvPr id="988" name="Rectangle 987"/>
+          <p:cNvSpPr/>
+          <p:nvPr/>
+        </p:nvSpPr>
+        <p:spPr>
+          <a:xfrm>
+            <a:off x="677387" y="3859031"/>
+            <a:ext cx="10855878" cy="17445"/>
+          </a:xfrm>
+          <a:prstGeom prst="rect">
+            <a:avLst/>
+          </a:prstGeom>
+          <a:solidFill>
+            <a:srgbClr val="0077FF"/>
+          </a:solidFill>
+          <a:ln>
+            <a:noFill/>
+          </a:ln>
+        </p:spPr>
+        <p:style>
+          <a:lnRef idx="1">
+            <a:schemeClr val="accent1"/>
+          </a:lnRef>
+          <a:fillRef idx="3">
+            <a:schemeClr val="accent1"/>
+          </a:fillRef>
+          <a:effectRef idx="2">
+            <a:schemeClr val="accent1"/>
+          </a:effectRef>
+          <a:fontRef idx="minor">
+            <a:schemeClr val="lt1"/>
+          </a:fontRef>
+        </p:style>
+        <p:txBody>
+          <a:bodyPr rtlCol="0" anchor="ctr"/>
+          <a:lstStyle/>
+          <a:p>
+            <a:pPr algn="ctr"/>
+          </a:p>
+        </p:txBody>
+      </p:sp>
+      <p:sp>
+        <p:nvSpPr>
+          <p:cNvPr id="989" name="Oval 988"/>
+          <p:cNvSpPr/>
+          <p:nvPr/>
+        </p:nvSpPr>
+        <p:spPr>
+          <a:xfrm>
+            <a:off x="2422733" y="3803787"/>
+            <a:ext cx="127933" cy="127933"/>
+          </a:xfrm>
+          <a:prstGeom prst="ellipse">
+            <a:avLst/>
+          </a:prstGeom>
+          <a:solidFill>
+            <a:srgbClr val="0077FF"/>
+          </a:solidFill>
+          <a:ln>
+            <a:noFill/>
+          </a:ln>
+        </p:spPr>
+        <p:style>
+          <a:lnRef idx="1">
+            <a:schemeClr val="accent1"/>
+          </a:lnRef>
+          <a:fillRef idx="3">
+            <a:schemeClr val="accent1"/>
+          </a:fillRef>
+          <a:effectRef idx="2">
+            <a:schemeClr val="accent1"/>
+          </a:effectRef>
+          <a:fontRef idx="minor">
+            <a:schemeClr val="lt1"/>
+          </a:fontRef>
+        </p:style>
+        <p:txBody>
+          <a:bodyPr rtlCol="0" anchor="ctr"/>
+          <a:lstStyle/>
+          <a:p>
+            <a:pPr algn="ctr"/>
+          </a:p>
+        </p:txBody>
+      </p:sp>
+      <p:sp>
+        <p:nvSpPr>
+          <p:cNvPr id="990" name="TextBox 989"/>
           <p:cNvSpPr txBox="1"/>
           <p:nvPr/>
         </p:nvSpPr>
         <p:spPr>
           <a:xfrm>
-            <a:off x="677387" y="2863845"/>
-            <a:ext cx="10855878" cy="727688"/>
+            <a:off x="677387" y="3591534"/>
+            <a:ext cx="5427939" cy="220976"/>
+          </a:xfrm>
+          <a:prstGeom prst="rect">
+            <a:avLst/>
+          </a:prstGeom>
+          <a:noFill/>
+        </p:spPr>
+        <p:txBody>
+          <a:bodyPr wrap="square" lIns="12700" rIns="12700" tIns="12700" bIns="12700">
+            <a:spAutoFit/>
+          </a:bodyPr>
+          <a:lstStyle/>
+          <a:p>
+            <a:pPr algn="ctr">
+              <a:defRPr sz="1400" b="0">
+                <a:solidFill>
+                  <a:srgbClr val="000000"/>
+                </a:solidFill>
+                <a:latin typeface="Play"/>
+                <a:ea typeface="Play"/>
+                <a:cs typeface="Play"/>
+              </a:defRPr>
+            </a:pPr>
+            <a:r>
+              <a:rPr sz="1400" b="0">
+                <a:solidFill>
+                  <a:srgbClr val="000000"/>
+                </a:solidFill>
+                <a:latin typeface="Play"/>
+                <a:ea typeface="Play"/>
+                <a:cs typeface="Play"/>
+              </a:rPr>
+              <a:t>Третий квартал 2026</a:t>
+            </a:r>
+          </a:p>
+        </p:txBody>
+      </p:sp>
+      <p:sp>
+        <p:nvSpPr>
+          <p:cNvPr id="991" name="Oval 990"/>
+          <p:cNvSpPr/>
+          <p:nvPr/>
+        </p:nvSpPr>
+        <p:spPr>
+          <a:xfrm>
+            <a:off x="6041359" y="3803787"/>
+            <a:ext cx="127933" cy="127933"/>
+          </a:xfrm>
+          <a:prstGeom prst="ellipse">
+            <a:avLst/>
+          </a:prstGeom>
+          <a:solidFill>
+            <a:srgbClr val="0077FF"/>
+          </a:solidFill>
+          <a:ln>
+            <a:noFill/>
+          </a:ln>
+        </p:spPr>
+        <p:style>
+          <a:lnRef idx="1">
+            <a:schemeClr val="accent1"/>
+          </a:lnRef>
+          <a:fillRef idx="3">
+            <a:schemeClr val="accent1"/>
+          </a:fillRef>
+          <a:effectRef idx="2">
+            <a:schemeClr val="accent1"/>
+          </a:effectRef>
+          <a:fontRef idx="minor">
+            <a:schemeClr val="lt1"/>
+          </a:fontRef>
+        </p:style>
+        <p:txBody>
+          <a:bodyPr rtlCol="0" anchor="ctr"/>
+          <a:lstStyle/>
+          <a:p>
+            <a:pPr algn="ctr"/>
+          </a:p>
+        </p:txBody>
+      </p:sp>
+      <p:sp>
+        <p:nvSpPr>
+          <p:cNvPr id="992" name="TextBox 991"/>
+          <p:cNvSpPr txBox="1"/>
+          <p:nvPr/>
+        </p:nvSpPr>
+        <p:spPr>
+          <a:xfrm>
+            <a:off x="3391356" y="3986965"/>
+            <a:ext cx="5427939" cy="220976"/>
+          </a:xfrm>
+          <a:prstGeom prst="rect">
+            <a:avLst/>
+          </a:prstGeom>
+          <a:noFill/>
+        </p:spPr>
+        <p:txBody>
+          <a:bodyPr wrap="square" lIns="12700" rIns="12700" tIns="12700" bIns="12700">
+            <a:spAutoFit/>
+          </a:bodyPr>
+          <a:lstStyle/>
+          <a:p>
+            <a:pPr algn="ctr">
+              <a:defRPr sz="1400" b="0">
+                <a:solidFill>
+                  <a:srgbClr val="000000"/>
+                </a:solidFill>
+                <a:latin typeface="Play"/>
+                <a:ea typeface="Play"/>
+                <a:cs typeface="Play"/>
+              </a:defRPr>
+            </a:pPr>
+            <a:r>
+              <a:rPr sz="1400" b="0">
+                <a:solidFill>
+                  <a:srgbClr val="000000"/>
+                </a:solidFill>
+                <a:latin typeface="Play"/>
+                <a:ea typeface="Play"/>
+                <a:cs typeface="Play"/>
+              </a:rPr>
+              <a:t>Четвёртый квартал 2026</a:t>
+            </a:r>
+          </a:p>
+        </p:txBody>
+      </p:sp>
+      <p:sp>
+        <p:nvSpPr>
+          <p:cNvPr id="993" name="Oval 992"/>
+          <p:cNvSpPr/>
+          <p:nvPr/>
+        </p:nvSpPr>
+        <p:spPr>
+          <a:xfrm>
+            <a:off x="9659985" y="3803787"/>
+            <a:ext cx="127933" cy="127933"/>
+          </a:xfrm>
+          <a:prstGeom prst="ellipse">
+            <a:avLst/>
+          </a:prstGeom>
+          <a:solidFill>
+            <a:srgbClr val="0077FF"/>
+          </a:solidFill>
+          <a:ln>
+            <a:noFill/>
+          </a:ln>
+        </p:spPr>
+        <p:style>
+          <a:lnRef idx="1">
+            <a:schemeClr val="accent1"/>
+          </a:lnRef>
+          <a:fillRef idx="3">
+            <a:schemeClr val="accent1"/>
+          </a:fillRef>
+          <a:effectRef idx="2">
+            <a:schemeClr val="accent1"/>
+          </a:effectRef>
+          <a:fontRef idx="minor">
+            <a:schemeClr val="lt1"/>
+          </a:fontRef>
+        </p:style>
+        <p:txBody>
+          <a:bodyPr rtlCol="0" anchor="ctr"/>
+          <a:lstStyle/>
+          <a:p>
+            <a:pPr algn="ctr"/>
+          </a:p>
+        </p:txBody>
+      </p:sp>
+      <p:sp>
+        <p:nvSpPr>
+          <p:cNvPr id="994" name="TextBox 993"/>
+          <p:cNvSpPr txBox="1"/>
+          <p:nvPr/>
+        </p:nvSpPr>
+        <p:spPr>
+          <a:xfrm>
+            <a:off x="6105326" y="3591534"/>
+            <a:ext cx="5427939" cy="220976"/>
+          </a:xfrm>
+          <a:prstGeom prst="rect">
+            <a:avLst/>
+          </a:prstGeom>
+          <a:noFill/>
+        </p:spPr>
+        <p:txBody>
+          <a:bodyPr wrap="square" lIns="12700" rIns="12700" tIns="12700" bIns="12700">
+            <a:spAutoFit/>
+          </a:bodyPr>
+          <a:lstStyle/>
+          <a:p>
+            <a:pPr algn="ctr">
+              <a:defRPr sz="1400" b="0">
+                <a:solidFill>
+                  <a:srgbClr val="000000"/>
+                </a:solidFill>
+                <a:latin typeface="Play"/>
+                <a:ea typeface="Play"/>
+                <a:cs typeface="Play"/>
+              </a:defRPr>
+            </a:pPr>
+            <a:r>
+              <a:rPr sz="1400" b="0">
+                <a:solidFill>
+                  <a:srgbClr val="000000"/>
+                </a:solidFill>
+                <a:latin typeface="Play"/>
+                <a:ea typeface="Play"/>
+                <a:cs typeface="Play"/>
+              </a:rPr>
+              <a:t>Первый квартал 2027</a:t>
+            </a:r>
+          </a:p>
+        </p:txBody>
+      </p:sp>
+      <p:sp>
+        <p:nvSpPr>
+          <p:cNvPr id="995" name="body"/>
+          <p:cNvSpPr txBox="1"/>
+          <p:nvPr/>
+        </p:nvSpPr>
+        <p:spPr>
+          <a:xfrm>
+            <a:off x="677387" y="4173051"/>
+            <a:ext cx="10855878" cy="673428"/>
           </a:xfrm>
           <a:prstGeom prst="rect">
             <a:avLst/>
@@ -7882,7 +9153,7 @@
                 <a:ea typeface="Play"/>
                 <a:cs typeface="Play"/>
               </a:rPr>
-              <a:t>• 42 колоды собраны вручную 2026</a:t>
+              <a:t>• Пилот 6 недель, 2 команды, 68 презентаций</a:t>
             </a:r>
           </a:p>
           <a:p>
@@ -7908,7 +9179,7 @@
                 <a:ea typeface="Play"/>
                 <a:cs typeface="Play"/>
               </a:rPr>
-              <a:t>• Сборка колоды занимает 186 мин</a:t>
+              <a:t>• Дизайнеры закрыли 38 запросов вместо 11</a:t>
             </a:r>
           </a:p>
           <a:p>
@@ -7934,59 +9205,7 @@
                 <a:ea typeface="Play"/>
                 <a:cs typeface="Play"/>
               </a:rPr>
-              <a:t>• Правки ревью добавляют 74 мин</a:t>
-            </a:r>
-          </a:p>
-          <a:p>
-            <a:pPr algn="l">
-              <a:spcAft>
-                <a:spcPts val="300"/>
-              </a:spcAft>
-              <a:defRPr sz="1200">
-                <a:solidFill>
-                  <a:srgbClr val="000000"/>
-                </a:solidFill>
-                <a:latin typeface="Play"/>
-                <a:ea typeface="Play"/>
-                <a:cs typeface="Play"/>
-              </a:defRPr>
-            </a:pPr>
-            <a:r>
-              <a:rPr sz="1200">
-                <a:solidFill>
-                  <a:srgbClr val="000000"/>
-                </a:solidFill>
-                <a:latin typeface="Play"/>
-                <a:ea typeface="Play"/>
-                <a:cs typeface="Play"/>
-              </a:rPr>
-              <a:t>• 19/42 колод нарушают стиль</a:t>
-            </a:r>
-          </a:p>
-          <a:p>
-            <a:pPr algn="l">
-              <a:spcAft>
-                <a:spcPts val="300"/>
-              </a:spcAft>
-              <a:defRPr sz="1200">
-                <a:solidFill>
-                  <a:srgbClr val="000000"/>
-                </a:solidFill>
-                <a:latin typeface="Play"/>
-                <a:ea typeface="Play"/>
-                <a:cs typeface="Play"/>
-              </a:defRPr>
-            </a:pPr>
-            <a:r>
-              <a:rPr sz="1200">
-                <a:solidFill>
-                  <a:srgbClr val="000000"/>
-                </a:solidFill>
-                <a:latin typeface="Play"/>
-                <a:ea typeface="Play"/>
-                <a:cs typeface="Play"/>
-              </a:rPr>
-              <a:t>• Дизайн‑отдел 4 закрывает 11 запросов/нед.</a:t>
+              <a:t>• План расширения: 4 команды в 3-м квартале</a:t>
             </a:r>
           </a:p>
         </p:txBody>
@@ -7999,7 +9218,262 @@
 </p:sld>
 </file>
 
-<file path=ppt/slides/slide58.xml><?xml version="1.0" encoding="utf-8"?>
+<file path=ppt/slides/slide62.xml><?xml version="1.0" encoding="utf-8"?>
+<p:sld xmlns:a="http://schemas.openxmlformats.org/drawingml/2006/main" xmlns:p="http://schemas.openxmlformats.org/presentationml/2006/main" xmlns:r="http://schemas.openxmlformats.org/officeDocument/2006/relationships">
+  <p:cSld>
+    <p:bg>
+      <p:bgPr>
+        <a:solidFill>
+          <a:schemeClr val="lt2"/>
+        </a:solidFill>
+      </p:bgPr>
+    </p:bg>
+    <p:spTree>
+      <p:nvGrpSpPr>
+        <p:cNvPr id="1" name=""/>
+        <p:cNvGrpSpPr/>
+        <p:nvPr/>
+      </p:nvGrpSpPr>
+      <p:grpSpPr/>
+      <p:sp>
+        <p:nvSpPr>
+          <p:cNvPr id="764" name="Google Shape;764;p58"/>
+          <p:cNvSpPr txBox="1"/>
+          <p:nvPr/>
+        </p:nvSpPr>
+        <p:spPr>
+          <a:xfrm>
+            <a:off x="18692059" y="4674436"/>
+            <a:ext cx="4304330" cy="678198"/>
+          </a:xfrm>
+          <a:prstGeom prst="rect">
+            <a:avLst/>
+          </a:prstGeom>
+          <a:noFill/>
+          <a:ln>
+            <a:noFill/>
+          </a:ln>
+        </p:spPr>
+        <p:txBody>
+          <a:bodyPr anchorCtr="0" anchor="t" bIns="45700" lIns="91425" spcFirstLastPara="1" rIns="91425" wrap="square" tIns="45700">
+            <a:noAutofit/>
+          </a:bodyPr>
+          <a:lstStyle/>
+          <a:p>
+            <a:pPr indent="0" lvl="0" marL="0" marR="0" rtl="0" algn="l">
+              <a:lnSpc>
+                <a:spcPct val="110000"/>
+              </a:lnSpc>
+              <a:spcBef>
+                <a:spcPts val="0"/>
+              </a:spcBef>
+              <a:spcAft>
+                <a:spcPts val="0"/>
+              </a:spcAft>
+              <a:buClr>
+                <a:schemeClr val="dk1"/>
+              </a:buClr>
+              <a:buSzPts val="1600"/>
+              <a:buFont typeface="Arial"/>
+              <a:buNone/>
+            </a:pPr>
+            <a:r>
+              <a:t/>
+            </a:r>
+            <a:endParaRPr sz="1600">
+              <a:solidFill>
+                <a:schemeClr val="dk1"/>
+              </a:solidFill>
+              <a:latin typeface="Arial"/>
+              <a:ea typeface="Arial"/>
+              <a:cs typeface="Arial"/>
+              <a:sym typeface="Arial"/>
+            </a:endParaRPr>
+          </a:p>
+        </p:txBody>
+      </p:sp>
+      <p:sp>
+        <p:nvSpPr>
+          <p:cNvPr id="765" name="title"/>
+          <p:cNvSpPr txBox="1"/>
+          <p:nvPr/>
+        </p:nvSpPr>
+        <p:spPr>
+          <a:xfrm>
+            <a:off x="677387" y="692177"/>
+            <a:ext cx="10855878" cy="1447800"/>
+          </a:xfrm>
+          <a:prstGeom prst="rect">
+            <a:avLst/>
+          </a:prstGeom>
+          <a:noFill/>
+        </p:spPr>
+        <p:txBody>
+          <a:bodyPr wrap="square" lIns="76200" rIns="76200" tIns="50800" bIns="50800">
+            <a:spAutoFit/>
+          </a:bodyPr>
+          <a:lstStyle/>
+          <a:p>
+            <a:pPr algn="l">
+              <a:spcAft>
+                <a:spcPts val="300"/>
+              </a:spcAft>
+              <a:defRPr sz="4000">
+                <a:solidFill>
+                  <a:srgbClr val="000000"/>
+                </a:solidFill>
+                <a:latin typeface="Arial"/>
+                <a:ea typeface="Arial"/>
+                <a:cs typeface="Arial"/>
+              </a:defRPr>
+            </a:pPr>
+            <a:r>
+              <a:rPr sz="4000">
+                <a:solidFill>
+                  <a:srgbClr val="000000"/>
+                </a:solidFill>
+                <a:latin typeface="Arial"/>
+                <a:ea typeface="Arial"/>
+                <a:cs typeface="Arial"/>
+              </a:rPr>
+              <a:t>Запрос к руководству: одобрение и интеграцию</a:t>
+            </a:r>
+          </a:p>
+        </p:txBody>
+      </p:sp>
+      <p:sp>
+        <p:nvSpPr>
+          <p:cNvPr id="766" name="lead"/>
+          <p:cNvSpPr txBox="1"/>
+          <p:nvPr/>
+        </p:nvSpPr>
+        <p:spPr>
+          <a:xfrm>
+            <a:off x="677387" y="2825777"/>
+            <a:ext cx="10855878" cy="1506256"/>
+          </a:xfrm>
+          <a:prstGeom prst="rect">
+            <a:avLst/>
+          </a:prstGeom>
+          <a:noFill/>
+        </p:spPr>
+        <p:txBody>
+          <a:bodyPr wrap="square" lIns="76200" rIns="76200" tIns="50800" bIns="50800">
+            <a:spAutoFit/>
+          </a:bodyPr>
+          <a:lstStyle/>
+          <a:p>
+            <a:pPr algn="l">
+              <a:spcAft>
+                <a:spcPts val="300"/>
+              </a:spcAft>
+              <a:defRPr sz="4800">
+                <a:solidFill>
+                  <a:srgbClr val="000000"/>
+                </a:solidFill>
+                <a:latin typeface="Play"/>
+                <a:ea typeface="Play"/>
+                <a:cs typeface="Play"/>
+              </a:defRPr>
+            </a:pPr>
+            <a:r>
+              <a:rPr sz="4800">
+                <a:solidFill>
+                  <a:srgbClr val="000000"/>
+                </a:solidFill>
+                <a:latin typeface="Play"/>
+                <a:ea typeface="Play"/>
+                <a:cs typeface="Play"/>
+              </a:rPr>
+              <a:t>Одобрить запуск на всю компанию</a:t>
+            </a:r>
+          </a:p>
+        </p:txBody>
+      </p:sp>
+      <p:sp>
+        <p:nvSpPr>
+          <p:cNvPr id="767" name="body"/>
+          <p:cNvSpPr txBox="1"/>
+          <p:nvPr/>
+        </p:nvSpPr>
+        <p:spPr>
+          <a:xfrm>
+            <a:off x="677387" y="4542209"/>
+            <a:ext cx="10855878" cy="1786490"/>
+          </a:xfrm>
+          <a:prstGeom prst="rect">
+            <a:avLst/>
+          </a:prstGeom>
+          <a:noFill/>
+        </p:spPr>
+        <p:txBody>
+          <a:bodyPr wrap="square" lIns="76200" rIns="76200" tIns="50800" bIns="50800">
+            <a:spAutoFit/>
+          </a:bodyPr>
+          <a:lstStyle/>
+          <a:p>
+            <a:pPr algn="l">
+              <a:spcAft>
+                <a:spcPts val="300"/>
+              </a:spcAft>
+              <a:defRPr sz="3200">
+                <a:solidFill>
+                  <a:srgbClr val="000000"/>
+                </a:solidFill>
+                <a:latin typeface="Play"/>
+                <a:ea typeface="Play"/>
+                <a:cs typeface="Play"/>
+              </a:defRPr>
+            </a:pPr>
+            <a:r>
+              <a:rPr sz="3200">
+                <a:solidFill>
+                  <a:srgbClr val="000000"/>
+                </a:solidFill>
+                <a:latin typeface="Play"/>
+                <a:ea typeface="Play"/>
+                <a:cs typeface="Play"/>
+              </a:rPr>
+              <a:t>• Интеграцию с хранилищем документов</a:t>
+            </a:r>
+          </a:p>
+          <a:p>
+            <a:pPr algn="l">
+              <a:spcAft>
+                <a:spcPts val="300"/>
+              </a:spcAft>
+              <a:defRPr sz="3200">
+                <a:solidFill>
+                  <a:srgbClr val="000000"/>
+                </a:solidFill>
+                <a:latin typeface="Play"/>
+                <a:ea typeface="Play"/>
+                <a:cs typeface="Play"/>
+              </a:defRPr>
+            </a:pPr>
+            <a:r>
+              <a:rPr sz="3200">
+                <a:solidFill>
+                  <a:srgbClr val="000000"/>
+                </a:solidFill>
+                <a:latin typeface="Play"/>
+                <a:ea typeface="Play"/>
+                <a:cs typeface="Play"/>
+              </a:rPr>
+              <a:t>• Финансирование дальнейшего развития</a:t>
+            </a:r>
+          </a:p>
+        </p:txBody>
+      </p:sp>
+    </p:spTree>
+  </p:cSld>
+  <p:clrMapOvr>
+    <a:masterClrMapping/>
+  </p:clrMapOvr>
+</p:sld>
+</file>
+
+<file path=ppt/slides/slide63.xml><?xml version="1.0" encoding="utf-8"?>
 <p:sld xmlns:a="http://schemas.openxmlformats.org/drawingml/2006/main" xmlns:p="http://schemas.openxmlformats.org/presentationml/2006/main" xmlns:r="http://schemas.openxmlformats.org/officeDocument/2006/relationships">
   <p:cSld>
     <p:bg>
@@ -8025,7 +9499,7 @@
         <p:spPr>
           <a:xfrm>
             <a:off x="677387" y="692177"/>
-            <a:ext cx="10855878" cy="822960"/>
+            <a:ext cx="10855878" cy="1447800"/>
           </a:xfrm>
           <a:prstGeom prst="rect">
             <a:avLst/>
@@ -8060,516 +9534,29 @@
                 <a:ea typeface="Arial"/>
                 <a:cs typeface="Arial"/>
               </a:rPr>
-              <a:t>Предложение</a:t>
+              <a:t>Текущее время сборки: 186 мин + 74 мин правок</a:t>
             </a:r>
           </a:p>
         </p:txBody>
       </p:sp>
-      <p:sp>
-        <p:nvSpPr>
-          <p:cNvPr id="3" name="Pentagon 2"/>
-          <p:cNvSpPr/>
+      <p:graphicFrame>
+        <p:nvGraphicFramePr>
+          <p:cNvPr id="3" name="Chart 2"/>
+          <p:cNvGraphicFramePr>
+            <a:graphicFrameLocks noGrp="1"/>
+          </p:cNvGraphicFramePr>
           <p:nvPr/>
-        </p:nvSpPr>
-        <p:spPr>
-          <a:xfrm>
-            <a:off x="677387" y="1802589"/>
-            <a:ext cx="10855878" cy="361025"/>
-          </a:xfrm>
-          <a:prstGeom prst="homePlate">
-            <a:avLst/>
-          </a:prstGeom>
-          <a:solidFill>
-            <a:srgbClr val="0077FF"/>
-          </a:solidFill>
-          <a:ln>
-            <a:noFill/>
-          </a:ln>
-        </p:spPr>
-        <p:style>
-          <a:lnRef idx="1">
-            <a:schemeClr val="accent1"/>
-          </a:lnRef>
-          <a:fillRef idx="3">
-            <a:schemeClr val="accent1"/>
-          </a:fillRef>
-          <a:effectRef idx="2">
-            <a:schemeClr val="accent1"/>
-          </a:effectRef>
-          <a:fontRef idx="minor">
-            <a:schemeClr val="lt1"/>
-          </a:fontRef>
-        </p:style>
-        <p:txBody>
-          <a:bodyPr rtlCol="0" anchor="ctr" wrap="square" lIns="12700" rIns="12700" tIns="12700" bIns="12700"/>
-          <a:lstStyle/>
-          <a:p>
-            <a:pPr algn="ctr">
-              <a:defRPr sz="1400" b="0">
-                <a:solidFill>
-                  <a:srgbClr val="FFFFFF"/>
-                </a:solidFill>
-                <a:latin typeface="Play"/>
-                <a:ea typeface="Play"/>
-                <a:cs typeface="Play"/>
-              </a:defRPr>
-            </a:pPr>
-            <a:r>
-              <a:rPr sz="1400" b="0">
-                <a:solidFill>
-                  <a:srgbClr val="FFFFFF"/>
-                </a:solidFill>
-                <a:latin typeface="Play"/>
-                <a:ea typeface="Play"/>
-                <a:cs typeface="Play"/>
-              </a:rPr>
-              <a:t>Ввод шаблона</a:t>
-            </a:r>
-          </a:p>
-        </p:txBody>
-      </p:sp>
-      <p:sp>
-        <p:nvSpPr>
-          <p:cNvPr id="4" name="Chevron 3"/>
-          <p:cNvSpPr/>
-          <p:nvPr/>
-        </p:nvSpPr>
-        <p:spPr>
-          <a:xfrm>
-            <a:off x="677387" y="2222386"/>
-            <a:ext cx="10855878" cy="361025"/>
-          </a:xfrm>
-          <a:prstGeom prst="chevron">
-            <a:avLst/>
-          </a:prstGeom>
-          <a:solidFill>
-            <a:srgbClr val="0077FF"/>
-          </a:solidFill>
-          <a:ln>
-            <a:noFill/>
-          </a:ln>
-        </p:spPr>
-        <p:style>
-          <a:lnRef idx="1">
-            <a:schemeClr val="accent1"/>
-          </a:lnRef>
-          <a:fillRef idx="3">
-            <a:schemeClr val="accent1"/>
-          </a:fillRef>
-          <a:effectRef idx="2">
-            <a:schemeClr val="accent1"/>
-          </a:effectRef>
-          <a:fontRef idx="minor">
-            <a:schemeClr val="lt1"/>
-          </a:fontRef>
-        </p:style>
-        <p:txBody>
-          <a:bodyPr rtlCol="0" anchor="ctr" wrap="square" lIns="12700" rIns="12700" tIns="12700" bIns="12700"/>
-          <a:lstStyle/>
-          <a:p>
-            <a:pPr algn="ctr">
-              <a:defRPr sz="1400" b="0">
-                <a:solidFill>
-                  <a:srgbClr val="FFFFFF"/>
-                </a:solidFill>
-                <a:latin typeface="Play"/>
-                <a:ea typeface="Play"/>
-                <a:cs typeface="Play"/>
-              </a:defRPr>
-            </a:pPr>
-            <a:r>
-              <a:rPr sz="1400" b="0">
-                <a:solidFill>
-                  <a:srgbClr val="FFFFFF"/>
-                </a:solidFill>
-                <a:latin typeface="Play"/>
-                <a:ea typeface="Play"/>
-                <a:cs typeface="Play"/>
-              </a:rPr>
-              <a:t>Анализ</a:t>
-            </a:r>
-          </a:p>
-        </p:txBody>
-      </p:sp>
-      <p:sp>
-        <p:nvSpPr>
-          <p:cNvPr id="5" name="Chevron 4"/>
-          <p:cNvSpPr/>
-          <p:nvPr/>
-        </p:nvSpPr>
-        <p:spPr>
-          <a:xfrm>
-            <a:off x="677387" y="2642184"/>
-            <a:ext cx="10855878" cy="361025"/>
-          </a:xfrm>
-          <a:prstGeom prst="chevron">
-            <a:avLst/>
-          </a:prstGeom>
-          <a:solidFill>
-            <a:srgbClr val="0077FF"/>
-          </a:solidFill>
-          <a:ln>
-            <a:noFill/>
-          </a:ln>
-        </p:spPr>
-        <p:style>
-          <a:lnRef idx="1">
-            <a:schemeClr val="accent1"/>
-          </a:lnRef>
-          <a:fillRef idx="3">
-            <a:schemeClr val="accent1"/>
-          </a:fillRef>
-          <a:effectRef idx="2">
-            <a:schemeClr val="accent1"/>
-          </a:effectRef>
-          <a:fontRef idx="minor">
-            <a:schemeClr val="lt1"/>
-          </a:fontRef>
-        </p:style>
-        <p:txBody>
-          <a:bodyPr rtlCol="0" anchor="ctr" wrap="square" lIns="12700" rIns="12700" tIns="12700" bIns="12700"/>
-          <a:lstStyle/>
-          <a:p>
-            <a:pPr algn="ctr">
-              <a:defRPr sz="1400" b="0">
-                <a:solidFill>
-                  <a:srgbClr val="FFFFFF"/>
-                </a:solidFill>
-                <a:latin typeface="Play"/>
-                <a:ea typeface="Play"/>
-                <a:cs typeface="Play"/>
-              </a:defRPr>
-            </a:pPr>
-            <a:r>
-              <a:rPr sz="1400" b="0">
-                <a:solidFill>
-                  <a:srgbClr val="FFFFFF"/>
-                </a:solidFill>
-                <a:latin typeface="Play"/>
-                <a:ea typeface="Play"/>
-                <a:cs typeface="Play"/>
-              </a:rPr>
-              <a:t>План колоды</a:t>
-            </a:r>
-          </a:p>
-        </p:txBody>
-      </p:sp>
-      <p:sp>
-        <p:nvSpPr>
-          <p:cNvPr id="6" name="Chevron 5"/>
-          <p:cNvSpPr/>
-          <p:nvPr/>
-        </p:nvSpPr>
-        <p:spPr>
-          <a:xfrm>
-            <a:off x="677387" y="3061981"/>
-            <a:ext cx="10855878" cy="361025"/>
-          </a:xfrm>
-          <a:prstGeom prst="chevron">
-            <a:avLst/>
-          </a:prstGeom>
-          <a:solidFill>
-            <a:srgbClr val="0077FF"/>
-          </a:solidFill>
-          <a:ln>
-            <a:noFill/>
-          </a:ln>
-        </p:spPr>
-        <p:style>
-          <a:lnRef idx="1">
-            <a:schemeClr val="accent1"/>
-          </a:lnRef>
-          <a:fillRef idx="3">
-            <a:schemeClr val="accent1"/>
-          </a:fillRef>
-          <a:effectRef idx="2">
-            <a:schemeClr val="accent1"/>
-          </a:effectRef>
-          <a:fontRef idx="minor">
-            <a:schemeClr val="lt1"/>
-          </a:fontRef>
-        </p:style>
-        <p:txBody>
-          <a:bodyPr rtlCol="0" anchor="ctr" wrap="square" lIns="12700" rIns="12700" tIns="12700" bIns="12700"/>
-          <a:lstStyle/>
-          <a:p>
-            <a:pPr algn="ctr">
-              <a:defRPr sz="1400" b="0">
-                <a:solidFill>
-                  <a:srgbClr val="FFFFFF"/>
-                </a:solidFill>
-                <a:latin typeface="Play"/>
-                <a:ea typeface="Play"/>
-                <a:cs typeface="Play"/>
-              </a:defRPr>
-            </a:pPr>
-            <a:r>
-              <a:rPr sz="1400" b="0">
-                <a:solidFill>
-                  <a:srgbClr val="FFFFFF"/>
-                </a:solidFill>
-                <a:latin typeface="Play"/>
-                <a:ea typeface="Play"/>
-                <a:cs typeface="Play"/>
-              </a:rPr>
-              <a:t>Вёрстка</a:t>
-            </a:r>
-          </a:p>
-        </p:txBody>
-      </p:sp>
-      <p:sp>
-        <p:nvSpPr>
-          <p:cNvPr id="7" name="Chevron 6"/>
-          <p:cNvSpPr/>
-          <p:nvPr/>
-        </p:nvSpPr>
-        <p:spPr>
-          <a:xfrm>
-            <a:off x="677387" y="3481778"/>
-            <a:ext cx="10855878" cy="361025"/>
-          </a:xfrm>
-          <a:prstGeom prst="chevron">
-            <a:avLst/>
-          </a:prstGeom>
-          <a:solidFill>
-            <a:srgbClr val="0077FF"/>
-          </a:solidFill>
-          <a:ln>
-            <a:noFill/>
-          </a:ln>
-        </p:spPr>
-        <p:style>
-          <a:lnRef idx="1">
-            <a:schemeClr val="accent1"/>
-          </a:lnRef>
-          <a:fillRef idx="3">
-            <a:schemeClr val="accent1"/>
-          </a:fillRef>
-          <a:effectRef idx="2">
-            <a:schemeClr val="accent1"/>
-          </a:effectRef>
-          <a:fontRef idx="minor">
-            <a:schemeClr val="lt1"/>
-          </a:fontRef>
-        </p:style>
-        <p:txBody>
-          <a:bodyPr rtlCol="0" anchor="ctr" wrap="square" lIns="12700" rIns="12700" tIns="12700" bIns="12700"/>
-          <a:lstStyle/>
-          <a:p>
-            <a:pPr algn="ctr">
-              <a:defRPr sz="1400" b="0">
-                <a:solidFill>
-                  <a:srgbClr val="FFFFFF"/>
-                </a:solidFill>
-                <a:latin typeface="Play"/>
-                <a:ea typeface="Play"/>
-                <a:cs typeface="Play"/>
-              </a:defRPr>
-            </a:pPr>
-            <a:r>
-              <a:rPr sz="1400" b="0">
-                <a:solidFill>
-                  <a:srgbClr val="FFFFFF"/>
-                </a:solidFill>
-                <a:latin typeface="Play"/>
-                <a:ea typeface="Play"/>
-                <a:cs typeface="Play"/>
-              </a:rPr>
-              <a:t>Аудит</a:t>
-            </a:r>
-          </a:p>
-        </p:txBody>
-      </p:sp>
-      <p:sp>
-        <p:nvSpPr>
-          <p:cNvPr id="8" name="Chevron 7"/>
-          <p:cNvSpPr/>
-          <p:nvPr/>
-        </p:nvSpPr>
-        <p:spPr>
-          <a:xfrm>
-            <a:off x="677387" y="3901575"/>
-            <a:ext cx="10855878" cy="361025"/>
-          </a:xfrm>
-          <a:prstGeom prst="chevron">
-            <a:avLst/>
-          </a:prstGeom>
-          <a:solidFill>
-            <a:srgbClr val="0077FF"/>
-          </a:solidFill>
-          <a:ln>
-            <a:noFill/>
-          </a:ln>
-        </p:spPr>
-        <p:style>
-          <a:lnRef idx="1">
-            <a:schemeClr val="accent1"/>
-          </a:lnRef>
-          <a:fillRef idx="3">
-            <a:schemeClr val="accent1"/>
-          </a:fillRef>
-          <a:effectRef idx="2">
-            <a:schemeClr val="accent1"/>
-          </a:effectRef>
-          <a:fontRef idx="minor">
-            <a:schemeClr val="lt1"/>
-          </a:fontRef>
-        </p:style>
-        <p:txBody>
-          <a:bodyPr rtlCol="0" anchor="ctr" wrap="square" lIns="12700" rIns="12700" tIns="12700" bIns="12700"/>
-          <a:lstStyle/>
-          <a:p>
-            <a:pPr algn="ctr">
-              <a:defRPr sz="1400" b="0">
-                <a:solidFill>
-                  <a:srgbClr val="FFFFFF"/>
-                </a:solidFill>
-                <a:latin typeface="Play"/>
-                <a:ea typeface="Play"/>
-                <a:cs typeface="Play"/>
-              </a:defRPr>
-            </a:pPr>
-            <a:r>
-              <a:rPr sz="1400" b="0">
-                <a:solidFill>
-                  <a:srgbClr val="FFFFFF"/>
-                </a:solidFill>
-                <a:latin typeface="Play"/>
-                <a:ea typeface="Play"/>
-                <a:cs typeface="Play"/>
-              </a:rPr>
-              <a:t>Экспорт</a:t>
-            </a:r>
-          </a:p>
-        </p:txBody>
-      </p:sp>
-      <p:sp>
-        <p:nvSpPr>
-          <p:cNvPr id="9" name="body"/>
-          <p:cNvSpPr txBox="1"/>
-          <p:nvPr/>
-        </p:nvSpPr>
-        <p:spPr>
-          <a:xfrm>
-            <a:off x="677387" y="4463437"/>
-            <a:ext cx="10855878" cy="1737360"/>
-          </a:xfrm>
-          <a:prstGeom prst="rect">
-            <a:avLst/>
-          </a:prstGeom>
-          <a:noFill/>
-        </p:spPr>
-        <p:txBody>
-          <a:bodyPr wrap="square" lIns="76200" rIns="76200" tIns="50800" bIns="50800">
-            <a:spAutoFit/>
-          </a:bodyPr>
-          <a:lstStyle/>
-          <a:p>
-            <a:pPr algn="l">
-              <a:spcAft>
-                <a:spcPts val="300"/>
-              </a:spcAft>
-              <a:defRPr sz="1800">
-                <a:solidFill>
-                  <a:srgbClr val="000000"/>
-                </a:solidFill>
-                <a:latin typeface="Play"/>
-                <a:ea typeface="Play"/>
-                <a:cs typeface="Play"/>
-              </a:defRPr>
-            </a:pPr>
-            <a:r>
-              <a:rPr sz="1800">
-                <a:solidFill>
-                  <a:srgbClr val="000000"/>
-                </a:solidFill>
-                <a:latin typeface="Play"/>
-                <a:ea typeface="Play"/>
-                <a:cs typeface="Play"/>
-              </a:rPr>
-              <a:t>• Сервис принимает шаблон pptx и материалы</a:t>
-            </a:r>
-          </a:p>
-          <a:p>
-            <a:pPr algn="l">
-              <a:spcAft>
-                <a:spcPts val="300"/>
-              </a:spcAft>
-              <a:defRPr sz="1800">
-                <a:solidFill>
-                  <a:srgbClr val="000000"/>
-                </a:solidFill>
-                <a:latin typeface="Play"/>
-                <a:ea typeface="Play"/>
-                <a:cs typeface="Play"/>
-              </a:defRPr>
-            </a:pPr>
-            <a:r>
-              <a:rPr sz="1800">
-                <a:solidFill>
-                  <a:srgbClr val="000000"/>
-                </a:solidFill>
-                <a:latin typeface="Play"/>
-                <a:ea typeface="Play"/>
-                <a:cs typeface="Play"/>
-              </a:rPr>
-              <a:t>• Автоматически строит план колоды и вёрстку по дизайн‑системе</a:t>
-            </a:r>
-          </a:p>
-          <a:p>
-            <a:pPr algn="l">
-              <a:spcAft>
-                <a:spcPts val="300"/>
-              </a:spcAft>
-              <a:defRPr sz="1800">
-                <a:solidFill>
-                  <a:srgbClr val="000000"/>
-                </a:solidFill>
-                <a:latin typeface="Play"/>
-                <a:ea typeface="Play"/>
-                <a:cs typeface="Play"/>
-              </a:defRPr>
-            </a:pPr>
-            <a:r>
-              <a:rPr sz="1800">
-                <a:solidFill>
-                  <a:srgbClr val="000000"/>
-                </a:solidFill>
-                <a:latin typeface="Play"/>
-                <a:ea typeface="Play"/>
-                <a:cs typeface="Play"/>
-              </a:rPr>
-              <a:t>• Аудит качества проверяет все цифры и стили</a:t>
-            </a:r>
-          </a:p>
-          <a:p>
-            <a:pPr algn="l">
-              <a:spcAft>
-                <a:spcPts val="300"/>
-              </a:spcAft>
-              <a:defRPr sz="1800">
-                <a:solidFill>
-                  <a:srgbClr val="000000"/>
-                </a:solidFill>
-                <a:latin typeface="Play"/>
-                <a:ea typeface="Play"/>
-                <a:cs typeface="Play"/>
-              </a:defRPr>
-            </a:pPr>
-            <a:r>
-              <a:rPr sz="1800">
-                <a:solidFill>
-                  <a:srgbClr val="000000"/>
-                </a:solidFill>
-                <a:latin typeface="Play"/>
-                <a:ea typeface="Play"/>
-                <a:cs typeface="Play"/>
-              </a:rPr>
-              <a:t>• Экспорт в pptx, pdf и html без картинок</a:t>
-            </a:r>
-          </a:p>
-        </p:txBody>
-      </p:sp>
+        </p:nvGraphicFramePr>
+        <p:xfrm>
+          <a:off x="677387" y="2277137"/>
+          <a:ext cx="10855878" cy="3923659"/>
+        </p:xfrm>
+        <a:graphic>
+          <a:graphicData uri="http://schemas.openxmlformats.org/drawingml/2006/chart">
+            <c:chart xmlns:c="http://schemas.openxmlformats.org/drawingml/2006/chart" r:id="rId2"/>
+          </a:graphicData>
+        </a:graphic>
+      </p:graphicFrame>
     </p:spTree>
   </p:cSld>
   <p:clrMapOvr>
@@ -8578,7 +9565,7 @@
 </p:sld>
 </file>
 
-<file path=ppt/slides/slide59.xml><?xml version="1.0" encoding="utf-8"?>
+<file path=ppt/slides/slide64.xml><?xml version="1.0" encoding="utf-8"?>
 <p:sld xmlns:a="http://schemas.openxmlformats.org/drawingml/2006/main" xmlns:p="http://schemas.openxmlformats.org/presentationml/2006/main" xmlns:r="http://schemas.openxmlformats.org/officeDocument/2006/relationships">
   <p:cSld>
     <p:bg>
@@ -8604,7 +9591,7 @@
         <p:spPr>
           <a:xfrm>
             <a:off x="677387" y="692177"/>
-            <a:ext cx="10855878" cy="822960"/>
+            <a:ext cx="10855878" cy="1447800"/>
           </a:xfrm>
           <a:prstGeom prst="rect">
             <a:avLst/>
@@ -8639,7 +9626,7 @@
                 <a:ea typeface="Arial"/>
                 <a:cs typeface="Arial"/>
               </a:rPr>
-              <a:t>Ожидаемый эффект</a:t>
+              <a:t>Улучшения в пилоте: 4 мин сборки, 38 запросов</a:t>
             </a:r>
           </a:p>
         </p:txBody>
@@ -8653,8 +9640,8 @@
           <p:nvPr/>
         </p:nvGraphicFramePr>
         <p:xfrm>
-          <a:off x="677387" y="1773204"/>
-          <a:ext cx="10855878" cy="2518783"/>
+          <a:off x="677387" y="2277137"/>
+          <a:ext cx="10855878" cy="3923659"/>
         </p:xfrm>
         <a:graphic>
           <a:graphicData uri="http://schemas.openxmlformats.org/drawingml/2006/chart">
@@ -8662,133 +9649,6 @@
           </a:graphicData>
         </a:graphic>
       </p:graphicFrame>
-      <p:sp>
-        <p:nvSpPr>
-          <p:cNvPr id="4" name="body"/>
-          <p:cNvSpPr txBox="1"/>
-          <p:nvPr/>
-        </p:nvSpPr>
-        <p:spPr>
-          <a:xfrm>
-            <a:off x="677387" y="4463437"/>
-            <a:ext cx="10855878" cy="1737360"/>
-          </a:xfrm>
-          <a:prstGeom prst="rect">
-            <a:avLst/>
-          </a:prstGeom>
-          <a:noFill/>
-        </p:spPr>
-        <p:txBody>
-          <a:bodyPr wrap="square" lIns="76200" rIns="76200" tIns="50800" bIns="50800">
-            <a:spAutoFit/>
-          </a:bodyPr>
-          <a:lstStyle/>
-          <a:p>
-            <a:pPr algn="l">
-              <a:spcAft>
-                <a:spcPts val="300"/>
-              </a:spcAft>
-              <a:defRPr sz="1600">
-                <a:solidFill>
-                  <a:srgbClr val="000000"/>
-                </a:solidFill>
-                <a:latin typeface="Play"/>
-                <a:ea typeface="Play"/>
-                <a:cs typeface="Play"/>
-              </a:defRPr>
-            </a:pPr>
-            <a:r>
-              <a:rPr sz="1600">
-                <a:solidFill>
-                  <a:srgbClr val="000000"/>
-                </a:solidFill>
-                <a:latin typeface="Play"/>
-                <a:ea typeface="Play"/>
-                <a:cs typeface="Play"/>
-              </a:rPr>
-              <a:t>• Средняя сборка колоды 4 минуты вместо 186</a:t>
-            </a:r>
-          </a:p>
-          <a:p>
-            <a:pPr algn="l">
-              <a:spcAft>
-                <a:spcPts val="300"/>
-              </a:spcAft>
-              <a:defRPr sz="1600">
-                <a:solidFill>
-                  <a:srgbClr val="000000"/>
-                </a:solidFill>
-                <a:latin typeface="Play"/>
-                <a:ea typeface="Play"/>
-                <a:cs typeface="Play"/>
-              </a:defRPr>
-            </a:pPr>
-            <a:r>
-              <a:rPr sz="1600">
-                <a:solidFill>
-                  <a:srgbClr val="000000"/>
-                </a:solidFill>
-                <a:latin typeface="Play"/>
-                <a:ea typeface="Play"/>
-                <a:cs typeface="Play"/>
-              </a:rPr>
-              <a:t>• Время до первой версии сократилось с 6 дней до 1</a:t>
-            </a:r>
-          </a:p>
-          <a:p>
-            <a:pPr algn="l">
-              <a:spcAft>
-                <a:spcPts val="300"/>
-              </a:spcAft>
-              <a:defRPr sz="1600">
-                <a:solidFill>
-                  <a:srgbClr val="000000"/>
-                </a:solidFill>
-                <a:latin typeface="Play"/>
-                <a:ea typeface="Play"/>
-                <a:cs typeface="Play"/>
-              </a:defRPr>
-            </a:pPr>
-            <a:r>
-              <a:rPr sz="1600">
-                <a:solidFill>
-                  <a:srgbClr val="000000"/>
-                </a:solidFill>
-                <a:latin typeface="Play"/>
-                <a:ea typeface="Play"/>
-                <a:cs typeface="Play"/>
-              </a:rPr>
-              <a:t>• Нарушения фирменного стиля снизились до 2 из 68</a:t>
-            </a:r>
-          </a:p>
-          <a:p>
-            <a:pPr algn="l">
-              <a:spcAft>
-                <a:spcPts val="300"/>
-              </a:spcAft>
-              <a:defRPr sz="1600">
-                <a:solidFill>
-                  <a:srgbClr val="000000"/>
-                </a:solidFill>
-                <a:latin typeface="Play"/>
-                <a:ea typeface="Play"/>
-                <a:cs typeface="Play"/>
-              </a:defRPr>
-            </a:pPr>
-            <a:r>
-              <a:rPr sz="1600">
-                <a:solidFill>
-                  <a:srgbClr val="000000"/>
-                </a:solidFill>
-                <a:latin typeface="Play"/>
-                <a:ea typeface="Play"/>
-                <a:cs typeface="Play"/>
-              </a:rPr>
-              <a:t>• Дизайнеры закрыли 38 запросов вместо 11 в неделю</a:t>
-            </a:r>
-          </a:p>
-        </p:txBody>
-      </p:sp>
     </p:spTree>
   </p:cSld>
   <p:clrMapOvr>
@@ -8797,7 +9657,7 @@
 </p:sld>
 </file>
 
-<file path=ppt/slides/slide60.xml><?xml version="1.0" encoding="utf-8"?>
+<file path=ppt/slides/slide65.xml><?xml version="1.0" encoding="utf-8"?>
 <p:sld xmlns:a="http://schemas.openxmlformats.org/drawingml/2006/main" xmlns:p="http://schemas.openxmlformats.org/presentationml/2006/main" xmlns:r="http://schemas.openxmlformats.org/officeDocument/2006/relationships">
   <p:cSld>
     <p:spTree>
@@ -8868,7 +9728,7 @@
         <p:spPr>
           <a:xfrm>
             <a:off x="677387" y="692177"/>
-            <a:ext cx="10855878" cy="822960"/>
+            <a:ext cx="10855878" cy="1447800"/>
           </a:xfrm>
           <a:prstGeom prst="rect">
             <a:avLst/>
@@ -8903,874 +9763,7 @@
                 <a:ea typeface="Arial"/>
                 <a:cs typeface="Arial"/>
               </a:rPr>
-              <a:t>Ресурсы и сроки</a:t>
-            </a:r>
-          </a:p>
-        </p:txBody>
-      </p:sp>
-      <p:sp>
-        <p:nvSpPr>
-          <p:cNvPr id="921" name="Rectangle 920"/>
-          <p:cNvSpPr/>
-          <p:nvPr/>
-        </p:nvSpPr>
-        <p:spPr>
-          <a:xfrm>
-            <a:off x="677387" y="2715559"/>
-            <a:ext cx="10855878" cy="33562"/>
-          </a:xfrm>
-          <a:prstGeom prst="rect">
-            <a:avLst/>
-          </a:prstGeom>
-          <a:solidFill>
-            <a:srgbClr val="0077FF"/>
-          </a:solidFill>
-          <a:ln>
-            <a:noFill/>
-          </a:ln>
-        </p:spPr>
-        <p:style>
-          <a:lnRef idx="1">
-            <a:schemeClr val="accent1"/>
-          </a:lnRef>
-          <a:fillRef idx="3">
-            <a:schemeClr val="accent1"/>
-          </a:fillRef>
-          <a:effectRef idx="2">
-            <a:schemeClr val="accent1"/>
-          </a:effectRef>
-          <a:fontRef idx="minor">
-            <a:schemeClr val="lt1"/>
-          </a:fontRef>
-        </p:style>
-        <p:txBody>
-          <a:bodyPr rtlCol="0" anchor="ctr"/>
-          <a:lstStyle/>
-          <a:p>
-            <a:pPr algn="ctr"/>
-          </a:p>
-        </p:txBody>
-      </p:sp>
-      <p:sp>
-        <p:nvSpPr>
-          <p:cNvPr id="922" name="Oval 921"/>
-          <p:cNvSpPr/>
-          <p:nvPr/>
-        </p:nvSpPr>
-        <p:spPr>
-          <a:xfrm>
-            <a:off x="2363638" y="2609278"/>
-            <a:ext cx="246123" cy="246123"/>
-          </a:xfrm>
-          <a:prstGeom prst="ellipse">
-            <a:avLst/>
-          </a:prstGeom>
-          <a:solidFill>
-            <a:srgbClr val="0077FF"/>
-          </a:solidFill>
-          <a:ln>
-            <a:noFill/>
-          </a:ln>
-        </p:spPr>
-        <p:style>
-          <a:lnRef idx="1">
-            <a:schemeClr val="accent1"/>
-          </a:lnRef>
-          <a:fillRef idx="3">
-            <a:schemeClr val="accent1"/>
-          </a:fillRef>
-          <a:effectRef idx="2">
-            <a:schemeClr val="accent1"/>
-          </a:effectRef>
-          <a:fontRef idx="minor">
-            <a:schemeClr val="lt1"/>
-          </a:fontRef>
-        </p:style>
-        <p:txBody>
-          <a:bodyPr rtlCol="0" anchor="ctr"/>
-          <a:lstStyle/>
-          <a:p>
-            <a:pPr algn="ctr"/>
-          </a:p>
-        </p:txBody>
-      </p:sp>
-      <p:sp>
-        <p:nvSpPr>
-          <p:cNvPr id="923" name="TextBox 922"/>
-          <p:cNvSpPr txBox="1"/>
-          <p:nvPr/>
-        </p:nvSpPr>
-        <p:spPr>
-          <a:xfrm>
-            <a:off x="677387" y="2200937"/>
-            <a:ext cx="5427939" cy="425123"/>
-          </a:xfrm>
-          <a:prstGeom prst="rect">
-            <a:avLst/>
-          </a:prstGeom>
-          <a:noFill/>
-        </p:spPr>
-        <p:txBody>
-          <a:bodyPr wrap="square" lIns="12700" rIns="12700" tIns="12700" bIns="12700">
-            <a:spAutoFit/>
-          </a:bodyPr>
-          <a:lstStyle/>
-          <a:p>
-            <a:pPr algn="ctr">
-              <a:defRPr sz="1400" b="0">
-                <a:solidFill>
-                  <a:srgbClr val="000000"/>
-                </a:solidFill>
-                <a:latin typeface="Play"/>
-                <a:ea typeface="Play"/>
-                <a:cs typeface="Play"/>
-              </a:defRPr>
-            </a:pPr>
-            <a:r>
-              <a:rPr sz="1400" b="0">
-                <a:solidFill>
-                  <a:srgbClr val="000000"/>
-                </a:solidFill>
-                <a:latin typeface="Play"/>
-                <a:ea typeface="Play"/>
-                <a:cs typeface="Play"/>
-              </a:rPr>
-              <a:t>Третий квартал 2026</a:t>
-            </a:r>
-          </a:p>
-        </p:txBody>
-      </p:sp>
-      <p:sp>
-        <p:nvSpPr>
-          <p:cNvPr id="924" name="Oval 923"/>
-          <p:cNvSpPr/>
-          <p:nvPr/>
-        </p:nvSpPr>
-        <p:spPr>
-          <a:xfrm>
-            <a:off x="5982264" y="2609278"/>
-            <a:ext cx="246123" cy="246123"/>
-          </a:xfrm>
-          <a:prstGeom prst="ellipse">
-            <a:avLst/>
-          </a:prstGeom>
-          <a:solidFill>
-            <a:srgbClr val="0077FF"/>
-          </a:solidFill>
-          <a:ln>
-            <a:noFill/>
-          </a:ln>
-        </p:spPr>
-        <p:style>
-          <a:lnRef idx="1">
-            <a:schemeClr val="accent1"/>
-          </a:lnRef>
-          <a:fillRef idx="3">
-            <a:schemeClr val="accent1"/>
-          </a:fillRef>
-          <a:effectRef idx="2">
-            <a:schemeClr val="accent1"/>
-          </a:effectRef>
-          <a:fontRef idx="minor">
-            <a:schemeClr val="lt1"/>
-          </a:fontRef>
-        </p:style>
-        <p:txBody>
-          <a:bodyPr rtlCol="0" anchor="ctr"/>
-          <a:lstStyle/>
-          <a:p>
-            <a:pPr algn="ctr"/>
-          </a:p>
-        </p:txBody>
-      </p:sp>
-      <p:sp>
-        <p:nvSpPr>
-          <p:cNvPr id="925" name="TextBox 924"/>
-          <p:cNvSpPr txBox="1"/>
-          <p:nvPr/>
-        </p:nvSpPr>
-        <p:spPr>
-          <a:xfrm>
-            <a:off x="3391356" y="2961683"/>
-            <a:ext cx="5427939" cy="425123"/>
-          </a:xfrm>
-          <a:prstGeom prst="rect">
-            <a:avLst/>
-          </a:prstGeom>
-          <a:noFill/>
-        </p:spPr>
-        <p:txBody>
-          <a:bodyPr wrap="square" lIns="12700" rIns="12700" tIns="12700" bIns="12700">
-            <a:spAutoFit/>
-          </a:bodyPr>
-          <a:lstStyle/>
-          <a:p>
-            <a:pPr algn="ctr">
-              <a:defRPr sz="1400" b="0">
-                <a:solidFill>
-                  <a:srgbClr val="000000"/>
-                </a:solidFill>
-                <a:latin typeface="Play"/>
-                <a:ea typeface="Play"/>
-                <a:cs typeface="Play"/>
-              </a:defRPr>
-            </a:pPr>
-            <a:r>
-              <a:rPr sz="1400" b="0">
-                <a:solidFill>
-                  <a:srgbClr val="000000"/>
-                </a:solidFill>
-                <a:latin typeface="Play"/>
-                <a:ea typeface="Play"/>
-                <a:cs typeface="Play"/>
-              </a:rPr>
-              <a:t>Четвёртый квартал 2026</a:t>
-            </a:r>
-          </a:p>
-        </p:txBody>
-      </p:sp>
-      <p:sp>
-        <p:nvSpPr>
-          <p:cNvPr id="926" name="Oval 925"/>
-          <p:cNvSpPr/>
-          <p:nvPr/>
-        </p:nvSpPr>
-        <p:spPr>
-          <a:xfrm>
-            <a:off x="9600890" y="2609278"/>
-            <a:ext cx="246123" cy="246123"/>
-          </a:xfrm>
-          <a:prstGeom prst="ellipse">
-            <a:avLst/>
-          </a:prstGeom>
-          <a:solidFill>
-            <a:srgbClr val="0077FF"/>
-          </a:solidFill>
-          <a:ln>
-            <a:noFill/>
-          </a:ln>
-        </p:spPr>
-        <p:style>
-          <a:lnRef idx="1">
-            <a:schemeClr val="accent1"/>
-          </a:lnRef>
-          <a:fillRef idx="3">
-            <a:schemeClr val="accent1"/>
-          </a:fillRef>
-          <a:effectRef idx="2">
-            <a:schemeClr val="accent1"/>
-          </a:effectRef>
-          <a:fontRef idx="minor">
-            <a:schemeClr val="lt1"/>
-          </a:fontRef>
-        </p:style>
-        <p:txBody>
-          <a:bodyPr rtlCol="0" anchor="ctr"/>
-          <a:lstStyle/>
-          <a:p>
-            <a:pPr algn="ctr"/>
-          </a:p>
-        </p:txBody>
-      </p:sp>
-      <p:sp>
-        <p:nvSpPr>
-          <p:cNvPr id="927" name="TextBox 926"/>
-          <p:cNvSpPr txBox="1"/>
-          <p:nvPr/>
-        </p:nvSpPr>
-        <p:spPr>
-          <a:xfrm>
-            <a:off x="6105326" y="2200937"/>
-            <a:ext cx="5427939" cy="425123"/>
-          </a:xfrm>
-          <a:prstGeom prst="rect">
-            <a:avLst/>
-          </a:prstGeom>
-          <a:noFill/>
-        </p:spPr>
-        <p:txBody>
-          <a:bodyPr wrap="square" lIns="12700" rIns="12700" tIns="12700" bIns="12700">
-            <a:spAutoFit/>
-          </a:bodyPr>
-          <a:lstStyle/>
-          <a:p>
-            <a:pPr algn="ctr">
-              <a:defRPr sz="1400" b="0">
-                <a:solidFill>
-                  <a:srgbClr val="000000"/>
-                </a:solidFill>
-                <a:latin typeface="Play"/>
-                <a:ea typeface="Play"/>
-                <a:cs typeface="Play"/>
-              </a:defRPr>
-            </a:pPr>
-            <a:r>
-              <a:rPr sz="1400" b="0">
-                <a:solidFill>
-                  <a:srgbClr val="000000"/>
-                </a:solidFill>
-                <a:latin typeface="Play"/>
-                <a:ea typeface="Play"/>
-                <a:cs typeface="Play"/>
-              </a:rPr>
-              <a:t>Первый квартал 2027</a:t>
-            </a:r>
-          </a:p>
-        </p:txBody>
-      </p:sp>
-      <p:sp>
-        <p:nvSpPr>
-          <p:cNvPr id="928" name="body"/>
-          <p:cNvSpPr txBox="1"/>
-          <p:nvPr/>
-        </p:nvSpPr>
-        <p:spPr>
-          <a:xfrm>
-            <a:off x="677387" y="3319683"/>
-            <a:ext cx="10855878" cy="1031580"/>
-          </a:xfrm>
-          <a:prstGeom prst="rect">
-            <a:avLst/>
-          </a:prstGeom>
-          <a:noFill/>
-        </p:spPr>
-        <p:txBody>
-          <a:bodyPr wrap="square" lIns="76200" rIns="76200" tIns="50800" bIns="50800">
-            <a:spAutoFit/>
-          </a:bodyPr>
-          <a:lstStyle/>
-          <a:p>
-            <a:pPr algn="l">
-              <a:spcAft>
-                <a:spcPts val="300"/>
-              </a:spcAft>
-              <a:defRPr sz="1200">
-                <a:solidFill>
-                  <a:srgbClr val="000000"/>
-                </a:solidFill>
-                <a:latin typeface="Play"/>
-                <a:ea typeface="Play"/>
-                <a:cs typeface="Play"/>
-              </a:defRPr>
-            </a:pPr>
-            <a:r>
-              <a:rPr sz="1200">
-                <a:solidFill>
-                  <a:srgbClr val="000000"/>
-                </a:solidFill>
-                <a:latin typeface="Play"/>
-                <a:ea typeface="Play"/>
-                <a:cs typeface="Play"/>
-              </a:rPr>
-              <a:t>• 2 vCPU / 2 ГБ RAM</a:t>
-            </a:r>
-          </a:p>
-          <a:p>
-            <a:pPr algn="l">
-              <a:spcAft>
-                <a:spcPts val="300"/>
-              </a:spcAft>
-              <a:defRPr sz="1200">
-                <a:solidFill>
-                  <a:srgbClr val="000000"/>
-                </a:solidFill>
-                <a:latin typeface="Play"/>
-                <a:ea typeface="Play"/>
-                <a:cs typeface="Play"/>
-              </a:defRPr>
-            </a:pPr>
-            <a:r>
-              <a:rPr sz="1200">
-                <a:solidFill>
-                  <a:srgbClr val="000000"/>
-                </a:solidFill>
-                <a:latin typeface="Play"/>
-                <a:ea typeface="Play"/>
-                <a:cs typeface="Play"/>
-              </a:rPr>
-              <a:t>• gpt-oss-20b подключен протоколу</a:t>
-            </a:r>
-          </a:p>
-          <a:p>
-            <a:pPr algn="l">
-              <a:spcAft>
-                <a:spcPts val="300"/>
-              </a:spcAft>
-              <a:defRPr sz="1200">
-                <a:solidFill>
-                  <a:srgbClr val="000000"/>
-                </a:solidFill>
-                <a:latin typeface="Play"/>
-                <a:ea typeface="Play"/>
-                <a:cs typeface="Play"/>
-              </a:defRPr>
-            </a:pPr>
-            <a:r>
-              <a:rPr sz="1200">
-                <a:solidFill>
-                  <a:srgbClr val="000000"/>
-                </a:solidFill>
-                <a:latin typeface="Play"/>
-                <a:ea typeface="Play"/>
-                <a:cs typeface="Play"/>
-              </a:rPr>
-              <a:t>• Инференс 6 недель 1 400 руб.</a:t>
-            </a:r>
-          </a:p>
-          <a:p>
-            <a:pPr algn="l">
-              <a:spcAft>
-                <a:spcPts val="300"/>
-              </a:spcAft>
-              <a:defRPr sz="1200">
-                <a:solidFill>
-                  <a:srgbClr val="000000"/>
-                </a:solidFill>
-                <a:latin typeface="Play"/>
-                <a:ea typeface="Play"/>
-                <a:cs typeface="Play"/>
-              </a:defRPr>
-            </a:pPr>
-            <a:r>
-              <a:rPr sz="1200">
-                <a:solidFill>
-                  <a:srgbClr val="000000"/>
-                </a:solidFill>
-                <a:latin typeface="Play"/>
-                <a:ea typeface="Play"/>
-                <a:cs typeface="Play"/>
-              </a:rPr>
-              <a:t>• Квартал 2026: 4 команды, домен, HTTPS</a:t>
-            </a:r>
-          </a:p>
-          <a:p>
-            <a:pPr algn="l">
-              <a:spcAft>
-                <a:spcPts val="300"/>
-              </a:spcAft>
-              <a:defRPr sz="1200">
-                <a:solidFill>
-                  <a:srgbClr val="000000"/>
-                </a:solidFill>
-                <a:latin typeface="Play"/>
-                <a:ea typeface="Play"/>
-                <a:cs typeface="Play"/>
-              </a:defRPr>
-            </a:pPr>
-            <a:r>
-              <a:rPr sz="1200">
-                <a:solidFill>
-                  <a:srgbClr val="000000"/>
-                </a:solidFill>
-                <a:latin typeface="Play"/>
-                <a:ea typeface="Play"/>
-                <a:cs typeface="Play"/>
-              </a:rPr>
-              <a:t>• Квартал 2026: доступ, интеграция хранилища</a:t>
-            </a:r>
-          </a:p>
-          <a:p>
-            <a:pPr algn="l">
-              <a:spcAft>
-                <a:spcPts val="300"/>
-              </a:spcAft>
-              <a:defRPr sz="1200">
-                <a:solidFill>
-                  <a:srgbClr val="000000"/>
-                </a:solidFill>
-                <a:latin typeface="Play"/>
-                <a:ea typeface="Play"/>
-                <a:cs typeface="Play"/>
-              </a:defRPr>
-            </a:pPr>
-            <a:r>
-              <a:rPr sz="1200">
-                <a:solidFill>
-                  <a:srgbClr val="000000"/>
-                </a:solidFill>
-                <a:latin typeface="Play"/>
-                <a:ea typeface="Play"/>
-                <a:cs typeface="Play"/>
-              </a:rPr>
-              <a:t>• 2027: генерация иллюстраций в стиле шаблона</a:t>
-            </a:r>
-          </a:p>
-        </p:txBody>
-      </p:sp>
-    </p:spTree>
-  </p:cSld>
-  <p:clrMapOvr>
-    <a:masterClrMapping/>
-  </p:clrMapOvr>
-</p:sld>
-</file>
-
-<file path=ppt/slides/slide61.xml><?xml version="1.0" encoding="utf-8"?>
-<p:sld xmlns:a="http://schemas.openxmlformats.org/drawingml/2006/main" xmlns:p="http://schemas.openxmlformats.org/presentationml/2006/main" xmlns:r="http://schemas.openxmlformats.org/officeDocument/2006/relationships">
-  <p:cSld>
-    <p:bg>
-      <p:bgPr>
-        <a:solidFill>
-          <a:schemeClr val="lt2"/>
-        </a:solidFill>
-      </p:bgPr>
-    </p:bg>
-    <p:spTree>
-      <p:nvGrpSpPr>
-        <p:cNvPr id="1" name=""/>
-        <p:cNvGrpSpPr/>
-        <p:nvPr/>
-      </p:nvGrpSpPr>
-      <p:grpSpPr/>
-      <p:sp>
-        <p:nvSpPr>
-          <p:cNvPr id="795" name="Google Shape;795;p60"/>
-          <p:cNvSpPr txBox="1"/>
-          <p:nvPr/>
-        </p:nvSpPr>
-        <p:spPr>
-          <a:xfrm>
-            <a:off x="18692059" y="4674436"/>
-            <a:ext cx="4304330" cy="678198"/>
-          </a:xfrm>
-          <a:prstGeom prst="rect">
-            <a:avLst/>
-          </a:prstGeom>
-          <a:noFill/>
-          <a:ln>
-            <a:noFill/>
-          </a:ln>
-        </p:spPr>
-        <p:txBody>
-          <a:bodyPr anchorCtr="0" anchor="t" bIns="45700" lIns="91425" spcFirstLastPara="1" rIns="91425" wrap="square" tIns="45700">
-            <a:noAutofit/>
-          </a:bodyPr>
-          <a:lstStyle/>
-          <a:p>
-            <a:pPr indent="0" lvl="0" marL="0" marR="0" rtl="0" algn="l">
-              <a:lnSpc>
-                <a:spcPct val="110000"/>
-              </a:lnSpc>
-              <a:spcBef>
-                <a:spcPts val="0"/>
-              </a:spcBef>
-              <a:spcAft>
-                <a:spcPts val="0"/>
-              </a:spcAft>
-              <a:buClr>
-                <a:schemeClr val="dk1"/>
-              </a:buClr>
-              <a:buSzPts val="1600"/>
-              <a:buFont typeface="Arial"/>
-              <a:buNone/>
-            </a:pPr>
-            <a:r>
-              <a:t/>
-            </a:r>
-            <a:endParaRPr sz="1600">
-              <a:solidFill>
-                <a:schemeClr val="dk1"/>
-              </a:solidFill>
-              <a:latin typeface="Arial"/>
-              <a:ea typeface="Arial"/>
-              <a:cs typeface="Arial"/>
-              <a:sym typeface="Arial"/>
-            </a:endParaRPr>
-          </a:p>
-        </p:txBody>
-      </p:sp>
-      <p:sp>
-        <p:nvSpPr>
-          <p:cNvPr id="796" name="title"/>
-          <p:cNvSpPr txBox="1"/>
-          <p:nvPr/>
-        </p:nvSpPr>
-        <p:spPr>
-          <a:xfrm>
-            <a:off x="677387" y="692177"/>
-            <a:ext cx="10855878" cy="822960"/>
-          </a:xfrm>
-          <a:prstGeom prst="rect">
-            <a:avLst/>
-          </a:prstGeom>
-          <a:noFill/>
-        </p:spPr>
-        <p:txBody>
-          <a:bodyPr wrap="square" lIns="76200" rIns="76200" tIns="50800" bIns="50800">
-            <a:spAutoFit/>
-          </a:bodyPr>
-          <a:lstStyle/>
-          <a:p>
-            <a:pPr algn="l">
-              <a:spcAft>
-                <a:spcPts val="300"/>
-              </a:spcAft>
-              <a:defRPr sz="4000">
-                <a:solidFill>
-                  <a:srgbClr val="000000"/>
-                </a:solidFill>
-                <a:latin typeface="Arial"/>
-                <a:ea typeface="Arial"/>
-                <a:cs typeface="Arial"/>
-              </a:defRPr>
-            </a:pPr>
-            <a:r>
-              <a:rPr sz="4000">
-                <a:solidFill>
-                  <a:srgbClr val="000000"/>
-                </a:solidFill>
-                <a:latin typeface="Arial"/>
-                <a:ea typeface="Arial"/>
-                <a:cs typeface="Arial"/>
-              </a:rPr>
-              <a:t>План пилота</a:t>
-            </a:r>
-          </a:p>
-        </p:txBody>
-      </p:sp>
-      <p:sp>
-        <p:nvSpPr>
-          <p:cNvPr id="797" name="lead"/>
-          <p:cNvSpPr txBox="1"/>
-          <p:nvPr/>
-        </p:nvSpPr>
-        <p:spPr>
-          <a:xfrm>
-            <a:off x="677387" y="2200937"/>
-            <a:ext cx="10855878" cy="1969531"/>
-          </a:xfrm>
-          <a:prstGeom prst="rect">
-            <a:avLst/>
-          </a:prstGeom>
-          <a:noFill/>
-        </p:spPr>
-        <p:txBody>
-          <a:bodyPr wrap="square" lIns="76200" rIns="76200" tIns="50800" bIns="50800">
-            <a:spAutoFit/>
-          </a:bodyPr>
-          <a:lstStyle/>
-          <a:p>
-            <a:pPr algn="l">
-              <a:spcAft>
-                <a:spcPts val="300"/>
-              </a:spcAft>
-              <a:defRPr sz="4800">
-                <a:solidFill>
-                  <a:srgbClr val="000000"/>
-                </a:solidFill>
-                <a:latin typeface="Play"/>
-                <a:ea typeface="Play"/>
-                <a:cs typeface="Play"/>
-              </a:defRPr>
-            </a:pPr>
-            <a:r>
-              <a:rPr sz="4800">
-                <a:solidFill>
-                  <a:srgbClr val="000000"/>
-                </a:solidFill>
-                <a:latin typeface="Play"/>
-                <a:ea typeface="Play"/>
-                <a:cs typeface="Play"/>
-              </a:rPr>
-              <a:t>Пилот шёл 6 недель на двух командах</a:t>
-            </a:r>
-          </a:p>
-        </p:txBody>
-      </p:sp>
-      <p:sp>
-        <p:nvSpPr>
-          <p:cNvPr id="798" name="body"/>
-          <p:cNvSpPr txBox="1"/>
-          <p:nvPr/>
-        </p:nvSpPr>
-        <p:spPr>
-          <a:xfrm>
-            <a:off x="677387" y="4418135"/>
-            <a:ext cx="10855878" cy="1910563"/>
-          </a:xfrm>
-          <a:prstGeom prst="rect">
-            <a:avLst/>
-          </a:prstGeom>
-          <a:noFill/>
-        </p:spPr>
-        <p:txBody>
-          <a:bodyPr wrap="square" lIns="76200" rIns="76200" tIns="50800" bIns="50800">
-            <a:spAutoFit/>
-          </a:bodyPr>
-          <a:lstStyle/>
-          <a:p>
-            <a:pPr algn="l">
-              <a:spcAft>
-                <a:spcPts val="300"/>
-              </a:spcAft>
-              <a:defRPr sz="3200">
-                <a:solidFill>
-                  <a:srgbClr val="000000"/>
-                </a:solidFill>
-                <a:latin typeface="Play"/>
-                <a:ea typeface="Play"/>
-                <a:cs typeface="Play"/>
-              </a:defRPr>
-            </a:pPr>
-            <a:r>
-              <a:rPr sz="3200">
-                <a:solidFill>
-                  <a:srgbClr val="000000"/>
-                </a:solidFill>
-                <a:latin typeface="Play"/>
-                <a:ea typeface="Play"/>
-                <a:cs typeface="Play"/>
-              </a:rPr>
-              <a:t>• Собрано 68 презентаций</a:t>
-            </a:r>
-          </a:p>
-          <a:p>
-            <a:pPr algn="l">
-              <a:spcAft>
-                <a:spcPts val="300"/>
-              </a:spcAft>
-              <a:defRPr sz="3200">
-                <a:solidFill>
-                  <a:srgbClr val="000000"/>
-                </a:solidFill>
-                <a:latin typeface="Play"/>
-                <a:ea typeface="Play"/>
-                <a:cs typeface="Play"/>
-              </a:defRPr>
-            </a:pPr>
-            <a:r>
-              <a:rPr sz="3200">
-                <a:solidFill>
-                  <a:srgbClr val="000000"/>
-                </a:solidFill>
-                <a:latin typeface="Play"/>
-                <a:ea typeface="Play"/>
-                <a:cs typeface="Play"/>
-              </a:rPr>
-              <a:t>• Средняя сборка колоды 4 минуты вместо 186</a:t>
-            </a:r>
-          </a:p>
-        </p:txBody>
-      </p:sp>
-    </p:spTree>
-  </p:cSld>
-  <p:clrMapOvr>
-    <a:masterClrMapping/>
-  </p:clrMapOvr>
-</p:sld>
-</file>
-
-<file path=ppt/slides/slide62.xml><?xml version="1.0" encoding="utf-8"?>
-<p:sld xmlns:a="http://schemas.openxmlformats.org/drawingml/2006/main" xmlns:p="http://schemas.openxmlformats.org/presentationml/2006/main" xmlns:r="http://schemas.openxmlformats.org/officeDocument/2006/relationships">
-  <p:cSld>
-    <p:bg>
-      <p:bgPr>
-        <a:solidFill>
-          <a:schemeClr val="lt2"/>
-        </a:solidFill>
-      </p:bgPr>
-    </p:bg>
-    <p:spTree>
-      <p:nvGrpSpPr>
-        <p:cNvPr id="1" name=""/>
-        <p:cNvGrpSpPr/>
-        <p:nvPr/>
-      </p:nvGrpSpPr>
-      <p:grpSpPr/>
-      <p:sp>
-        <p:nvSpPr>
-          <p:cNvPr id="2" name="title"/>
-          <p:cNvSpPr txBox="1"/>
-          <p:nvPr/>
-        </p:nvSpPr>
-        <p:spPr>
-          <a:xfrm>
-            <a:off x="677875" y="692177"/>
-            <a:ext cx="10855391" cy="822960"/>
-          </a:xfrm>
-          <a:prstGeom prst="rect">
-            <a:avLst/>
-          </a:prstGeom>
-          <a:noFill/>
-        </p:spPr>
-        <p:txBody>
-          <a:bodyPr wrap="square" lIns="76200" rIns="76200" tIns="50800" bIns="50800">
-            <a:spAutoFit/>
-          </a:bodyPr>
-          <a:lstStyle/>
-          <a:p>
-            <a:pPr algn="l">
-              <a:spcAft>
-                <a:spcPts val="300"/>
-              </a:spcAft>
-              <a:defRPr sz="4000">
-                <a:solidFill>
-                  <a:srgbClr val="000000"/>
-                </a:solidFill>
-                <a:latin typeface="Arial"/>
-                <a:ea typeface="Arial"/>
-                <a:cs typeface="Arial"/>
-              </a:defRPr>
-            </a:pPr>
-            <a:r>
-              <a:rPr sz="4000">
-                <a:solidFill>
-                  <a:srgbClr val="000000"/>
-                </a:solidFill>
-                <a:latin typeface="Arial"/>
-                <a:ea typeface="Arial"/>
-                <a:cs typeface="Arial"/>
-              </a:rPr>
-              <a:t>Что мы просим решить</a:t>
-            </a:r>
-          </a:p>
-        </p:txBody>
-      </p:sp>
-      <p:sp>
-        <p:nvSpPr>
-          <p:cNvPr id="3" name="lead"/>
-          <p:cNvSpPr txBox="1"/>
-          <p:nvPr/>
-        </p:nvSpPr>
-        <p:spPr>
-          <a:xfrm>
-            <a:off x="677875" y="2716257"/>
-            <a:ext cx="10855391" cy="1686560"/>
-          </a:xfrm>
-          <a:prstGeom prst="rect">
-            <a:avLst/>
-          </a:prstGeom>
-          <a:noFill/>
-        </p:spPr>
-        <p:txBody>
-          <a:bodyPr wrap="square" lIns="76200" rIns="76200" tIns="50800" bIns="50800">
-            <a:spAutoFit/>
-          </a:bodyPr>
-          <a:lstStyle/>
-          <a:p>
-            <a:pPr algn="ctr">
-              <a:spcAft>
-                <a:spcPts val="300"/>
-              </a:spcAft>
-              <a:defRPr sz="4800">
-                <a:solidFill>
-                  <a:srgbClr val="000000"/>
-                </a:solidFill>
-                <a:latin typeface="Play"/>
-                <a:ea typeface="Play"/>
-                <a:cs typeface="Play"/>
-              </a:defRPr>
-            </a:pPr>
-            <a:r>
-              <a:rPr sz="4800">
-                <a:solidFill>
-                  <a:srgbClr val="000000"/>
-                </a:solidFill>
-                <a:latin typeface="Play"/>
-                <a:ea typeface="Play"/>
-                <a:cs typeface="Play"/>
-              </a:rPr>
-              <a:t>Принять решение о запуске сервиса на всю компанию</a:t>
+              <a:t>Риски и меры: модель, шаблон, нагрузка</a:t>
             </a:r>
           </a:p>
         </p:txBody>

--- a/samples/Шаблон_презентации_VK_Education__focus.pptx
+++ b/samples/Шаблон_презентации_VK_Education__focus.pptx
@@ -259,434 +259,6 @@
     </a:lvl9pPr>
   </p:defaultTextStyle>
 </p:presentation>
-</file>
-
-<file path=ppt/charts/chart1.xml><?xml version="1.0" encoding="utf-8"?>
-<c:chartSpace xmlns:c="http://schemas.openxmlformats.org/drawingml/2006/chart" xmlns:a="http://schemas.openxmlformats.org/drawingml/2006/main" xmlns:r="http://schemas.openxmlformats.org/officeDocument/2006/relationships">
-  <c:date1904 val="0"/>
-  <c:chart>
-    <c:autoTitleDeleted val="1"/>
-    <c:plotArea>
-      <c:barChart>
-        <c:barDir val="col"/>
-        <c:grouping val="clustered"/>
-        <c:ser>
-          <c:idx val="0"/>
-          <c:order val="0"/>
-          <c:tx>
-            <c:strRef>
-              <c:f>Sheet1!$B$1</c:f>
-              <c:strCache>
-                <c:ptCount val="1"/>
-                <c:pt idx="0">
-                  <c:v>Время</c:v>
-                </c:pt>
-              </c:strCache>
-            </c:strRef>
-          </c:tx>
-          <c:spPr>
-            <a:solidFill>
-              <a:srgbClr val="0077FF"/>
-            </a:solidFill>
-            <a:ln>
-              <a:solidFill>
-                <a:srgbClr val="0077FF"/>
-              </a:solidFill>
-            </a:ln>
-          </c:spPr>
-          <c:cat>
-            <c:strRef>
-              <c:f>Sheet1!$A$2:$A$3</c:f>
-              <c:strCache>
-                <c:ptCount val="2"/>
-                <c:pt idx="0">
-                  <c:v>Сборка</c:v>
-                </c:pt>
-                <c:pt idx="1">
-                  <c:v>Правки</c:v>
-                </c:pt>
-              </c:strCache>
-            </c:strRef>
-          </c:cat>
-          <c:val>
-            <c:numRef>
-              <c:f>Sheet1!$B$2:$B$3</c:f>
-              <c:numCache>
-                <c:formatCode>General</c:formatCode>
-                <c:ptCount val="2"/>
-                <c:pt idx="0">
-                  <c:v>186.0</c:v>
-                </c:pt>
-                <c:pt idx="1">
-                  <c:v>74.0</c:v>
-                </c:pt>
-              </c:numCache>
-            </c:numRef>
-          </c:val>
-        </c:ser>
-        <c:dLbls>
-          <c:numFmt formatCode="0&quot; мин&quot;" sourceLinked="0"/>
-          <c:txPr>
-            <a:bodyPr wrap="none"/>
-            <a:lstStyle/>
-            <a:p>
-              <a:pPr>
-                <a:defRPr sz="1100" b="0">
-                  <a:solidFill>
-                    <a:srgbClr val="000000"/>
-                  </a:solidFill>
-                  <a:latin typeface="Play"/>
-                  <a:ea typeface="Play"/>
-                  <a:cs typeface="Play"/>
-                </a:defRPr>
-              </a:pPr>
-            </a:p>
-          </c:txPr>
-          <c:dLblPos val="outEnd"/>
-          <c:showLegendKey val="0"/>
-          <c:showVal val="1"/>
-          <c:showCatName val="0"/>
-          <c:showSerName val="0"/>
-          <c:showPercent val="0"/>
-          <c:showBubbleSize val="0"/>
-          <c:showLeaderLines val="1"/>
-        </c:dLbls>
-        <c:gapWidth val="60"/>
-        <c:axId val="-2068027336"/>
-        <c:axId val="-2113994440"/>
-      </c:barChart>
-      <c:catAx>
-        <c:axId val="-2068027336"/>
-        <c:scaling>
-          <c:orientation val="minMax"/>
-        </c:scaling>
-        <c:delete val="0"/>
-        <c:axPos val="b"/>
-        <c:majorTickMark val="out"/>
-        <c:minorTickMark val="none"/>
-        <c:tickLblPos val="nextTo"/>
-        <c:txPr>
-          <a:bodyPr/>
-          <a:lstStyle/>
-          <a:p>
-            <a:pPr>
-              <a:defRPr sz="1100" b="0">
-                <a:solidFill>
-                  <a:srgbClr val="000000"/>
-                </a:solidFill>
-                <a:latin typeface="Play"/>
-                <a:ea typeface="Play"/>
-                <a:cs typeface="Play"/>
-              </a:defRPr>
-            </a:pPr>
-          </a:p>
-        </c:txPr>
-        <c:crossAx val="-2113994440"/>
-        <c:crosses val="autoZero"/>
-        <c:auto val="1"/>
-        <c:lblAlgn val="ctr"/>
-        <c:lblOffset val="100"/>
-        <c:noMultiLvlLbl val="0"/>
-      </c:catAx>
-      <c:valAx>
-        <c:axId val="-2113994440"/>
-        <c:scaling/>
-        <c:delete val="0"/>
-        <c:axPos val="l"/>
-        <c:majorGridlines>
-          <c:spPr>
-            <a:ln w="9525">
-              <a:solidFill>
-                <a:srgbClr val="D1D1D1"/>
-              </a:solidFill>
-            </a:ln>
-          </c:spPr>
-        </c:majorGridlines>
-        <c:title>
-          <c:tx>
-            <c:rich>
-              <a:bodyPr rot="0" vert="horz"/>
-              <a:lstStyle/>
-              <a:p>
-                <a:pPr>
-                  <a:defRPr sz="1100" b="0">
-                    <a:solidFill>
-                      <a:srgbClr val="000000"/>
-                    </a:solidFill>
-                    <a:latin typeface="Play"/>
-                    <a:ea typeface="Play"/>
-                    <a:cs typeface="Play"/>
-                  </a:defRPr>
-                </a:pPr>
-                <a:r>
-                  <a:t>Время, мин</a:t>
-                </a:r>
-              </a:p>
-            </c:rich>
-          </c:tx>
-          <c:layout/>
-          <c:overlay val="0"/>
-        </c:title>
-        <c:majorTickMark val="out"/>
-        <c:minorTickMark val="none"/>
-        <c:tickLblPos val="nextTo"/>
-        <c:txPr>
-          <a:bodyPr/>
-          <a:lstStyle/>
-          <a:p>
-            <a:pPr>
-              <a:defRPr sz="1100" b="0">
-                <a:solidFill>
-                  <a:srgbClr val="000000"/>
-                </a:solidFill>
-                <a:latin typeface="Play"/>
-                <a:ea typeface="Play"/>
-                <a:cs typeface="Play"/>
-              </a:defRPr>
-            </a:pPr>
-          </a:p>
-        </c:txPr>
-        <c:crossAx val="-2068027336"/>
-        <c:crosses val="autoZero"/>
-      </c:valAx>
-    </c:plotArea>
-    <c:dispBlanksAs val="gap"/>
-  </c:chart>
-  <c:txPr>
-    <a:bodyPr/>
-    <a:lstStyle/>
-    <a:p>
-      <a:pPr>
-        <a:defRPr sz="1200" b="0">
-          <a:solidFill>
-            <a:srgbClr val="000000"/>
-          </a:solidFill>
-          <a:latin typeface="Play"/>
-          <a:ea typeface="Play"/>
-          <a:cs typeface="Play"/>
-        </a:defRPr>
-      </a:pPr>
-      <a:endParaRPr lang="en-US"/>
-    </a:p>
-  </c:txPr>
-  <c:externalData r:id="rId1">
-    <c:autoUpdate val="0"/>
-  </c:externalData>
-</c:chartSpace>
-</file>
-
-<file path=ppt/charts/chart2.xml><?xml version="1.0" encoding="utf-8"?>
-<c:chartSpace xmlns:c="http://schemas.openxmlformats.org/drawingml/2006/chart" xmlns:a="http://schemas.openxmlformats.org/drawingml/2006/main" xmlns:r="http://schemas.openxmlformats.org/officeDocument/2006/relationships">
-  <c:date1904 val="0"/>
-  <c:chart>
-    <c:autoTitleDeleted val="1"/>
-    <c:plotArea>
-      <c:barChart>
-        <c:barDir val="col"/>
-        <c:grouping val="clustered"/>
-        <c:ser>
-          <c:idx val="0"/>
-          <c:order val="0"/>
-          <c:tx>
-            <c:strRef>
-              <c:f>Sheet1!$B$1</c:f>
-              <c:strCache>
-                <c:ptCount val="1"/>
-                <c:pt idx="0">
-                  <c:v>Значения</c:v>
-                </c:pt>
-              </c:strCache>
-            </c:strRef>
-          </c:tx>
-          <c:spPr>
-            <a:solidFill>
-              <a:srgbClr val="0077FF"/>
-            </a:solidFill>
-            <a:ln>
-              <a:solidFill>
-                <a:srgbClr val="0077FF"/>
-              </a:solidFill>
-            </a:ln>
-          </c:spPr>
-          <c:cat>
-            <c:strRef>
-              <c:f>Sheet1!$A$2:$A$3</c:f>
-              <c:strCache>
-                <c:ptCount val="2"/>
-                <c:pt idx="0">
-                  <c:v>Сборка</c:v>
-                </c:pt>
-                <c:pt idx="1">
-                  <c:v>Запросы дизайнеров</c:v>
-                </c:pt>
-              </c:strCache>
-            </c:strRef>
-          </c:cat>
-          <c:val>
-            <c:numRef>
-              <c:f>Sheet1!$B$2:$B$3</c:f>
-              <c:numCache>
-                <c:formatCode>General</c:formatCode>
-                <c:ptCount val="2"/>
-                <c:pt idx="0">
-                  <c:v>4.0</c:v>
-                </c:pt>
-                <c:pt idx="1">
-                  <c:v>38.0</c:v>
-                </c:pt>
-              </c:numCache>
-            </c:numRef>
-          </c:val>
-        </c:ser>
-        <c:dLbls>
-          <c:numFmt formatCode="0&quot; значений&quot;" sourceLinked="0"/>
-          <c:txPr>
-            <a:bodyPr wrap="none"/>
-            <a:lstStyle/>
-            <a:p>
-              <a:pPr>
-                <a:defRPr sz="1100" b="0">
-                  <a:solidFill>
-                    <a:srgbClr val="000000"/>
-                  </a:solidFill>
-                  <a:latin typeface="Play"/>
-                  <a:ea typeface="Play"/>
-                  <a:cs typeface="Play"/>
-                </a:defRPr>
-              </a:pPr>
-            </a:p>
-          </c:txPr>
-          <c:dLblPos val="outEnd"/>
-          <c:showLegendKey val="0"/>
-          <c:showVal val="1"/>
-          <c:showCatName val="0"/>
-          <c:showSerName val="0"/>
-          <c:showPercent val="0"/>
-          <c:showBubbleSize val="0"/>
-          <c:showLeaderLines val="1"/>
-        </c:dLbls>
-        <c:gapWidth val="60"/>
-        <c:axId val="-2068027336"/>
-        <c:axId val="-2113994440"/>
-      </c:barChart>
-      <c:catAx>
-        <c:axId val="-2068027336"/>
-        <c:scaling>
-          <c:orientation val="minMax"/>
-        </c:scaling>
-        <c:delete val="0"/>
-        <c:axPos val="b"/>
-        <c:majorTickMark val="out"/>
-        <c:minorTickMark val="none"/>
-        <c:tickLblPos val="nextTo"/>
-        <c:txPr>
-          <a:bodyPr/>
-          <a:lstStyle/>
-          <a:p>
-            <a:pPr>
-              <a:defRPr sz="1100" b="0">
-                <a:solidFill>
-                  <a:srgbClr val="000000"/>
-                </a:solidFill>
-                <a:latin typeface="Play"/>
-                <a:ea typeface="Play"/>
-                <a:cs typeface="Play"/>
-              </a:defRPr>
-            </a:pPr>
-          </a:p>
-        </c:txPr>
-        <c:crossAx val="-2113994440"/>
-        <c:crosses val="autoZero"/>
-        <c:auto val="1"/>
-        <c:lblAlgn val="ctr"/>
-        <c:lblOffset val="100"/>
-        <c:noMultiLvlLbl val="0"/>
-      </c:catAx>
-      <c:valAx>
-        <c:axId val="-2113994440"/>
-        <c:scaling/>
-        <c:delete val="0"/>
-        <c:axPos val="l"/>
-        <c:majorGridlines>
-          <c:spPr>
-            <a:ln w="9525">
-              <a:solidFill>
-                <a:srgbClr val="D1D1D1"/>
-              </a:solidFill>
-            </a:ln>
-          </c:spPr>
-        </c:majorGridlines>
-        <c:title>
-          <c:tx>
-            <c:rich>
-              <a:bodyPr rot="0" vert="horz"/>
-              <a:lstStyle/>
-              <a:p>
-                <a:pPr>
-                  <a:defRPr sz="1100" b="0">
-                    <a:solidFill>
-                      <a:srgbClr val="000000"/>
-                    </a:solidFill>
-                    <a:latin typeface="Play"/>
-                    <a:ea typeface="Play"/>
-                    <a:cs typeface="Play"/>
-                  </a:defRPr>
-                </a:pPr>
-                <a:r>
-                  <a:t>Значения, значений</a:t>
-                </a:r>
-              </a:p>
-            </c:rich>
-          </c:tx>
-          <c:layout/>
-          <c:overlay val="0"/>
-        </c:title>
-        <c:majorTickMark val="out"/>
-        <c:minorTickMark val="none"/>
-        <c:tickLblPos val="nextTo"/>
-        <c:txPr>
-          <a:bodyPr/>
-          <a:lstStyle/>
-          <a:p>
-            <a:pPr>
-              <a:defRPr sz="1100" b="0">
-                <a:solidFill>
-                  <a:srgbClr val="000000"/>
-                </a:solidFill>
-                <a:latin typeface="Play"/>
-                <a:ea typeface="Play"/>
-                <a:cs typeface="Play"/>
-              </a:defRPr>
-            </a:pPr>
-          </a:p>
-        </c:txPr>
-        <c:crossAx val="-2068027336"/>
-        <c:crosses val="autoZero"/>
-      </c:valAx>
-    </c:plotArea>
-    <c:dispBlanksAs val="gap"/>
-  </c:chart>
-  <c:txPr>
-    <a:bodyPr/>
-    <a:lstStyle/>
-    <a:p>
-      <a:pPr>
-        <a:defRPr sz="1200" b="0">
-          <a:solidFill>
-            <a:srgbClr val="000000"/>
-          </a:solidFill>
-          <a:latin typeface="Play"/>
-          <a:ea typeface="Play"/>
-          <a:cs typeface="Play"/>
-        </a:defRPr>
-      </a:pPr>
-      <a:endParaRPr lang="en-US"/>
-    </a:p>
-  </c:txPr>
-  <c:externalData r:id="rId1">
-    <c:autoUpdate val="0"/>
-  </c:externalData>
-</c:chartSpace>
 </file>
 
 <file path=ppt/notesMasters/notesMaster1.xml><?xml version="1.0" encoding="utf-8"?>
@@ -2517,19 +2089,19 @@
 </p:notes>
 </file>
 
-<file path=ppt/slideLayouts/slideLayout12.xml><?xml version="1.0" encoding="utf-8"?>
-<p:sldLayout xmlns:a="http://schemas.openxmlformats.org/drawingml/2006/main" xmlns:r="http://schemas.openxmlformats.org/officeDocument/2006/relationships" xmlns:mc="http://schemas.openxmlformats.org/markup-compatibility/2006" xmlns:mv="urn:schemas-microsoft-com:mac:vml" xmlns:p="http://schemas.openxmlformats.org/presentationml/2006/main" xmlns:c="http://schemas.openxmlformats.org/drawingml/2006/chart" xmlns:dgm="http://schemas.openxmlformats.org/drawingml/2006/diagram" xmlns:o="urn:schemas-microsoft-com:office:office" xmlns:v="urn:schemas-microsoft-com:vml" xmlns:pvml="urn:schemas-microsoft-com:office:powerpoint" xmlns:com="http://schemas.openxmlformats.org/drawingml/2006/compatibility" xmlns:p14="http://schemas.microsoft.com/office/powerpoint/2010/main" xmlns:p15="http://schemas.microsoft.com/office/powerpoint/2012/main" xmlns:ahyp="http://schemas.microsoft.com/office/drawing/2018/hyperlinkcolor" matchingName="2_Заголовок + текст в две колонки">
-  <p:cSld name="2_Заголовок + текст в две колонки">
+<file path=ppt/slideLayouts/slideLayout18.xml><?xml version="1.0" encoding="utf-8"?>
+<p:sldLayout xmlns:a="http://schemas.openxmlformats.org/drawingml/2006/main" xmlns:r="http://schemas.openxmlformats.org/officeDocument/2006/relationships" xmlns:mc="http://schemas.openxmlformats.org/markup-compatibility/2006" xmlns:mv="urn:schemas-microsoft-com:mac:vml" xmlns:p="http://schemas.openxmlformats.org/presentationml/2006/main" xmlns:c="http://schemas.openxmlformats.org/drawingml/2006/chart" xmlns:dgm="http://schemas.openxmlformats.org/drawingml/2006/diagram" xmlns:o="urn:schemas-microsoft-com:office:office" xmlns:v="urn:schemas-microsoft-com:vml" xmlns:pvml="urn:schemas-microsoft-com:office:powerpoint" xmlns:com="http://schemas.openxmlformats.org/drawingml/2006/compatibility" xmlns:p14="http://schemas.microsoft.com/office/powerpoint/2010/main" xmlns:p15="http://schemas.microsoft.com/office/powerpoint/2012/main" xmlns:ahyp="http://schemas.microsoft.com/office/drawing/2018/hyperlinkcolor" matchingName="Финальный с QR + подпись">
+  <p:cSld name="Финальный с QR + подпись">
     <p:bg>
       <p:bgPr>
         <a:solidFill>
-          <a:schemeClr val="lt2"/>
+          <a:schemeClr val="accent1"/>
         </a:solidFill>
       </p:bgPr>
     </p:bg>
     <p:spTree>
       <p:nvGrpSpPr>
-        <p:cNvPr id="107" name="Shape 107"/>
+        <p:cNvPr id="132" name="Shape 132"/>
         <p:cNvGrpSpPr/>
         <p:nvPr/>
       </p:nvGrpSpPr>
@@ -2541,9 +2113,198 @@
           <a:chExt cx="0" cy="0"/>
         </a:xfrm>
       </p:grpSpPr>
+      <p:pic>
+        <p:nvPicPr>
+          <p:cNvPr id="133" name="Google Shape;133;p19"/>
+          <p:cNvPicPr preferRelativeResize="0"/>
+          <p:nvPr/>
+        </p:nvPicPr>
+        <p:blipFill rotWithShape="1">
+          <a:blip r:embed="rId2">
+            <a:alphaModFix/>
+          </a:blip>
+          <a:srcRect b="0" l="0" r="0" t="0"/>
+          <a:stretch/>
+        </p:blipFill>
+        <p:spPr>
+          <a:xfrm>
+            <a:off x="6023251" y="692149"/>
+            <a:ext cx="6168749" cy="6168749"/>
+          </a:xfrm>
+          <a:prstGeom prst="rect">
+            <a:avLst/>
+          </a:prstGeom>
+          <a:noFill/>
+          <a:ln>
+            <a:noFill/>
+          </a:ln>
+        </p:spPr>
+      </p:pic>
       <p:sp>
         <p:nvSpPr>
-          <p:cNvPr id="108" name="Google Shape;108;p13"/>
+          <p:cNvPr id="134" name="Google Shape;134;p19"/>
+          <p:cNvSpPr txBox="1"/>
+          <p:nvPr>
+            <p:ph type="title"/>
+          </p:nvPr>
+        </p:nvSpPr>
+        <p:spPr>
+          <a:xfrm>
+            <a:off x="620713" y="2483712"/>
+            <a:ext cx="5475287" cy="1477328"/>
+          </a:xfrm>
+          <a:prstGeom prst="rect">
+            <a:avLst/>
+          </a:prstGeom>
+          <a:noFill/>
+          <a:ln>
+            <a:noFill/>
+          </a:ln>
+        </p:spPr>
+        <p:txBody>
+          <a:bodyPr anchorCtr="0" anchor="b" bIns="0" lIns="0" spcFirstLastPara="1" rIns="0" wrap="square" tIns="0">
+            <a:spAutoFit/>
+          </a:bodyPr>
+          <a:lstStyle>
+            <a:lvl1pPr lvl="0" algn="l">
+              <a:lnSpc>
+                <a:spcPct val="80000"/>
+              </a:lnSpc>
+              <a:spcBef>
+                <a:spcPts val="0"/>
+              </a:spcBef>
+              <a:spcAft>
+                <a:spcPts val="0"/>
+              </a:spcAft>
+              <a:buClr>
+                <a:schemeClr val="lt2"/>
+              </a:buClr>
+              <a:buSzPts val="6000"/>
+              <a:buFont typeface="Play"/>
+              <a:buNone/>
+              <a:defRPr sz="6000">
+                <a:solidFill>
+                  <a:schemeClr val="lt2"/>
+                </a:solidFill>
+              </a:defRPr>
+            </a:lvl1pPr>
+            <a:lvl2pPr lvl="1">
+              <a:spcBef>
+                <a:spcPts val="0"/>
+              </a:spcBef>
+              <a:spcAft>
+                <a:spcPts val="0"/>
+              </a:spcAft>
+              <a:buSzPts val="1400"/>
+              <a:buNone/>
+              <a:defRPr/>
+            </a:lvl2pPr>
+            <a:lvl3pPr lvl="2">
+              <a:spcBef>
+                <a:spcPts val="0"/>
+              </a:spcBef>
+              <a:spcAft>
+                <a:spcPts val="0"/>
+              </a:spcAft>
+              <a:buSzPts val="1400"/>
+              <a:buNone/>
+              <a:defRPr/>
+            </a:lvl3pPr>
+            <a:lvl4pPr lvl="3">
+              <a:spcBef>
+                <a:spcPts val="0"/>
+              </a:spcBef>
+              <a:spcAft>
+                <a:spcPts val="0"/>
+              </a:spcAft>
+              <a:buSzPts val="1400"/>
+              <a:buNone/>
+              <a:defRPr/>
+            </a:lvl4pPr>
+            <a:lvl5pPr lvl="4">
+              <a:spcBef>
+                <a:spcPts val="0"/>
+              </a:spcBef>
+              <a:spcAft>
+                <a:spcPts val="0"/>
+              </a:spcAft>
+              <a:buSzPts val="1400"/>
+              <a:buNone/>
+              <a:defRPr/>
+            </a:lvl5pPr>
+            <a:lvl6pPr lvl="5">
+              <a:spcBef>
+                <a:spcPts val="0"/>
+              </a:spcBef>
+              <a:spcAft>
+                <a:spcPts val="0"/>
+              </a:spcAft>
+              <a:buSzPts val="1400"/>
+              <a:buNone/>
+              <a:defRPr/>
+            </a:lvl6pPr>
+            <a:lvl7pPr lvl="6">
+              <a:spcBef>
+                <a:spcPts val="0"/>
+              </a:spcBef>
+              <a:spcAft>
+                <a:spcPts val="0"/>
+              </a:spcAft>
+              <a:buSzPts val="1400"/>
+              <a:buNone/>
+              <a:defRPr/>
+            </a:lvl7pPr>
+            <a:lvl8pPr lvl="7">
+              <a:spcBef>
+                <a:spcPts val="0"/>
+              </a:spcBef>
+              <a:spcAft>
+                <a:spcPts val="0"/>
+              </a:spcAft>
+              <a:buSzPts val="1400"/>
+              <a:buNone/>
+              <a:defRPr/>
+            </a:lvl8pPr>
+            <a:lvl9pPr lvl="8">
+              <a:spcBef>
+                <a:spcPts val="0"/>
+              </a:spcBef>
+              <a:spcAft>
+                <a:spcPts val="0"/>
+              </a:spcAft>
+              <a:buSzPts val="1400"/>
+              <a:buNone/>
+              <a:defRPr/>
+            </a:lvl9pPr>
+          </a:lstStyle>
+          <a:p/>
+        </p:txBody>
+      </p:sp>
+      <p:sp>
+        <p:nvSpPr>
+          <p:cNvPr id="135" name="Google Shape;135;p19"/>
+          <p:cNvSpPr/>
+          <p:nvPr>
+            <p:ph idx="2" type="pic"/>
+          </p:nvPr>
+        </p:nvSpPr>
+        <p:spPr>
+          <a:xfrm>
+            <a:off x="658813" y="692150"/>
+            <a:ext cx="1081088" cy="1081088"/>
+          </a:xfrm>
+          <a:prstGeom prst="rect">
+            <a:avLst/>
+          </a:prstGeom>
+          <a:noFill/>
+          <a:ln>
+            <a:noFill/>
+          </a:ln>
+        </p:spPr>
+      </p:sp>
+      <p:sp>
+        <p:nvSpPr>
+          <p:cNvPr id="136" name="Google Shape;136;p19"/>
           <p:cNvSpPr txBox="1"/>
           <p:nvPr>
             <p:ph idx="1" type="body"/>
@@ -2551,8 +2312,8 @@
         </p:nvSpPr>
         <p:spPr>
           <a:xfrm>
-            <a:off x="677334" y="1773238"/>
-            <a:ext cx="5304365" cy="4427537"/>
+            <a:off x="658813" y="4161565"/>
+            <a:ext cx="5437187" cy="355600"/>
           </a:xfrm>
           <a:prstGeom prst="rect">
             <a:avLst/>
@@ -2578,18 +2339,21 @@
                 <a:spcPts val="0"/>
               </a:spcAft>
               <a:buClr>
-                <a:schemeClr val="dk1"/>
+                <a:schemeClr val="lt2"/>
               </a:buClr>
               <a:buSzPts val="1600"/>
               <a:buNone/>
               <a:defRPr b="0" i="0">
+                <a:solidFill>
+                  <a:schemeClr val="lt2"/>
+                </a:solidFill>
                 <a:latin typeface="Play"/>
                 <a:ea typeface="Play"/>
                 <a:cs typeface="Play"/>
                 <a:sym typeface="Play"/>
               </a:defRPr>
             </a:lvl1pPr>
-            <a:lvl2pPr indent="-317500" lvl="1" marL="914400" algn="l">
+            <a:lvl2pPr indent="-342900" lvl="1" marL="914400" algn="l">
               <a:lnSpc>
                 <a:spcPct val="110000"/>
               </a:lnSpc>
@@ -2599,16 +2363,11 @@
               <a:spcAft>
                 <a:spcPts val="0"/>
               </a:spcAft>
-              <a:buSzPts val="1400"/>
+              <a:buSzPts val="1800"/>
               <a:buChar char="•"/>
-              <a:defRPr b="0" i="0">
-                <a:latin typeface="Play"/>
-                <a:ea typeface="Play"/>
-                <a:cs typeface="Play"/>
-                <a:sym typeface="Play"/>
-              </a:defRPr>
+              <a:defRPr/>
             </a:lvl2pPr>
-            <a:lvl3pPr indent="-304800" lvl="2" marL="1371600" algn="l">
+            <a:lvl3pPr indent="-342900" lvl="2" marL="1371600" algn="l">
               <a:lnSpc>
                 <a:spcPct val="110000"/>
               </a:lnSpc>
@@ -2621,14 +2380,253 @@
               <a:buClr>
                 <a:schemeClr val="dk1"/>
               </a:buClr>
-              <a:buSzPts val="1200"/>
+              <a:buSzPts val="1800"/>
               <a:buChar char="−"/>
-              <a:defRPr b="0" i="0">
-                <a:latin typeface="Play"/>
-                <a:ea typeface="Play"/>
-                <a:cs typeface="Play"/>
-                <a:sym typeface="Play"/>
+              <a:defRPr/>
+            </a:lvl3pPr>
+            <a:lvl4pPr indent="-342900" lvl="3" marL="1828800" algn="l">
+              <a:lnSpc>
+                <a:spcPct val="90000"/>
+              </a:lnSpc>
+              <a:spcBef>
+                <a:spcPts val="500"/>
+              </a:spcBef>
+              <a:spcAft>
+                <a:spcPts val="0"/>
+              </a:spcAft>
+              <a:buClr>
+                <a:schemeClr val="dk1"/>
+              </a:buClr>
+              <a:buSzPts val="1800"/>
+              <a:buChar char="•"/>
+              <a:defRPr/>
+            </a:lvl4pPr>
+            <a:lvl5pPr indent="-342900" lvl="4" marL="2286000" algn="l">
+              <a:lnSpc>
+                <a:spcPct val="90000"/>
+              </a:lnSpc>
+              <a:spcBef>
+                <a:spcPts val="500"/>
+              </a:spcBef>
+              <a:spcAft>
+                <a:spcPts val="0"/>
+              </a:spcAft>
+              <a:buClr>
+                <a:schemeClr val="dk1"/>
+              </a:buClr>
+              <a:buSzPts val="1800"/>
+              <a:buChar char="•"/>
+              <a:defRPr/>
+            </a:lvl5pPr>
+            <a:lvl6pPr indent="-342900" lvl="5" marL="2743200" algn="l">
+              <a:lnSpc>
+                <a:spcPct val="90000"/>
+              </a:lnSpc>
+              <a:spcBef>
+                <a:spcPts val="500"/>
+              </a:spcBef>
+              <a:spcAft>
+                <a:spcPts val="0"/>
+              </a:spcAft>
+              <a:buClr>
+                <a:schemeClr val="dk1"/>
+              </a:buClr>
+              <a:buSzPts val="1800"/>
+              <a:buChar char="•"/>
+              <a:defRPr/>
+            </a:lvl6pPr>
+            <a:lvl7pPr indent="-342900" lvl="6" marL="3200400" algn="l">
+              <a:lnSpc>
+                <a:spcPct val="90000"/>
+              </a:lnSpc>
+              <a:spcBef>
+                <a:spcPts val="500"/>
+              </a:spcBef>
+              <a:spcAft>
+                <a:spcPts val="0"/>
+              </a:spcAft>
+              <a:buClr>
+                <a:schemeClr val="dk1"/>
+              </a:buClr>
+              <a:buSzPts val="1800"/>
+              <a:buChar char="•"/>
+              <a:defRPr/>
+            </a:lvl7pPr>
+            <a:lvl8pPr indent="-342900" lvl="7" marL="3657600" algn="l">
+              <a:lnSpc>
+                <a:spcPct val="90000"/>
+              </a:lnSpc>
+              <a:spcBef>
+                <a:spcPts val="500"/>
+              </a:spcBef>
+              <a:spcAft>
+                <a:spcPts val="0"/>
+              </a:spcAft>
+              <a:buClr>
+                <a:schemeClr val="dk1"/>
+              </a:buClr>
+              <a:buSzPts val="1800"/>
+              <a:buChar char="•"/>
+              <a:defRPr/>
+            </a:lvl8pPr>
+            <a:lvl9pPr indent="-342900" lvl="8" marL="4114800" algn="l">
+              <a:lnSpc>
+                <a:spcPct val="90000"/>
+              </a:lnSpc>
+              <a:spcBef>
+                <a:spcPts val="500"/>
+              </a:spcBef>
+              <a:spcAft>
+                <a:spcPts val="0"/>
+              </a:spcAft>
+              <a:buClr>
+                <a:schemeClr val="dk1"/>
+              </a:buClr>
+              <a:buSzPts val="1800"/>
+              <a:buChar char="•"/>
+              <a:defRPr/>
+            </a:lvl9pPr>
+          </a:lstStyle>
+          <a:p/>
+        </p:txBody>
+      </p:sp>
+      <p:pic>
+        <p:nvPicPr>
+          <p:cNvPr id="137" name="Google Shape;137;p19"/>
+          <p:cNvPicPr preferRelativeResize="0"/>
+          <p:nvPr/>
+        </p:nvPicPr>
+        <p:blipFill rotWithShape="1">
+          <a:blip r:embed="rId3">
+            <a:alphaModFix/>
+          </a:blip>
+          <a:srcRect b="0" l="0" r="0" t="0"/>
+          <a:stretch/>
+        </p:blipFill>
+        <p:spPr>
+          <a:xfrm>
+            <a:off x="658813" y="5711140"/>
+            <a:ext cx="2772297" cy="489635"/>
+          </a:xfrm>
+          <a:prstGeom prst="rect">
+            <a:avLst/>
+          </a:prstGeom>
+          <a:noFill/>
+          <a:ln>
+            <a:noFill/>
+          </a:ln>
+        </p:spPr>
+      </p:pic>
+    </p:spTree>
+  </p:cSld>
+  <p:clrMapOvr>
+    <a:masterClrMapping/>
+  </p:clrMapOvr>
+</p:sldLayout>
+</file>
+
+<file path=ppt/slideLayouts/slideLayout2.xml><?xml version="1.0" encoding="utf-8"?>
+<p:sldLayout xmlns:a="http://schemas.openxmlformats.org/drawingml/2006/main" xmlns:r="http://schemas.openxmlformats.org/officeDocument/2006/relationships" xmlns:mc="http://schemas.openxmlformats.org/markup-compatibility/2006" xmlns:mv="urn:schemas-microsoft-com:mac:vml" xmlns:p="http://schemas.openxmlformats.org/presentationml/2006/main" xmlns:c="http://schemas.openxmlformats.org/drawingml/2006/chart" xmlns:dgm="http://schemas.openxmlformats.org/drawingml/2006/diagram" xmlns:o="urn:schemas-microsoft-com:office:office" xmlns:v="urn:schemas-microsoft-com:vml" xmlns:pvml="urn:schemas-microsoft-com:office:powerpoint" xmlns:com="http://schemas.openxmlformats.org/drawingml/2006/compatibility" xmlns:p14="http://schemas.microsoft.com/office/powerpoint/2010/main" xmlns:p15="http://schemas.microsoft.com/office/powerpoint/2012/main" xmlns:ahyp="http://schemas.microsoft.com/office/drawing/2018/hyperlinkcolor" matchingName="3_Титульный слайд">
+  <p:cSld name="3_Титульный слайд">
+    <p:bg>
+      <p:bgPr>
+        <a:solidFill>
+          <a:schemeClr val="accent1"/>
+        </a:solidFill>
+      </p:bgPr>
+    </p:bg>
+    <p:spTree>
+      <p:nvGrpSpPr>
+        <p:cNvPr id="58" name="Shape 58"/>
+        <p:cNvGrpSpPr/>
+        <p:nvPr/>
+      </p:nvGrpSpPr>
+      <p:grpSpPr>
+        <a:xfrm>
+          <a:off x="0" y="0"/>
+          <a:ext cx="0" cy="0"/>
+          <a:chOff x="0" y="0"/>
+          <a:chExt cx="0" cy="0"/>
+        </a:xfrm>
+      </p:grpSpPr>
+      <p:sp>
+        <p:nvSpPr>
+          <p:cNvPr id="59" name="Google Shape;59;p3"/>
+          <p:cNvSpPr txBox="1"/>
+          <p:nvPr>
+            <p:ph idx="1" type="body"/>
+          </p:nvPr>
+        </p:nvSpPr>
+        <p:spPr>
+          <a:xfrm>
+            <a:off x="658813" y="4728001"/>
+            <a:ext cx="5012644" cy="553998"/>
+          </a:xfrm>
+          <a:prstGeom prst="rect">
+            <a:avLst/>
+          </a:prstGeom>
+          <a:noFill/>
+          <a:ln>
+            <a:noFill/>
+          </a:ln>
+        </p:spPr>
+        <p:txBody>
+          <a:bodyPr anchorCtr="0" anchor="t" bIns="0" lIns="0" spcFirstLastPara="1" rIns="0" wrap="square" tIns="0">
+            <a:spAutoFit/>
+          </a:bodyPr>
+          <a:lstStyle>
+            <a:lvl1pPr indent="-228600" lvl="0" marL="457200" marR="0" algn="l">
+              <a:lnSpc>
+                <a:spcPct val="100000"/>
+              </a:lnSpc>
+              <a:spcBef>
+                <a:spcPts val="0"/>
+              </a:spcBef>
+              <a:spcAft>
+                <a:spcPts val="0"/>
+              </a:spcAft>
+              <a:buClr>
+                <a:schemeClr val="lt2"/>
+              </a:buClr>
+              <a:buSzPts val="2000"/>
+              <a:buFont typeface="Arial"/>
+              <a:buNone/>
+              <a:defRPr sz="2000">
+                <a:solidFill>
+                  <a:schemeClr val="lt2"/>
+                </a:solidFill>
               </a:defRPr>
+            </a:lvl1pPr>
+            <a:lvl2pPr indent="-342900" lvl="1" marL="914400" algn="l">
+              <a:lnSpc>
+                <a:spcPct val="110000"/>
+              </a:lnSpc>
+              <a:spcBef>
+                <a:spcPts val="500"/>
+              </a:spcBef>
+              <a:spcAft>
+                <a:spcPts val="0"/>
+              </a:spcAft>
+              <a:buSzPts val="1800"/>
+              <a:buChar char="•"/>
+              <a:defRPr/>
+            </a:lvl2pPr>
+            <a:lvl3pPr indent="-342900" lvl="2" marL="1371600" algn="l">
+              <a:lnSpc>
+                <a:spcPct val="110000"/>
+              </a:lnSpc>
+              <a:spcBef>
+                <a:spcPts val="500"/>
+              </a:spcBef>
+              <a:spcAft>
+                <a:spcPts val="0"/>
+              </a:spcAft>
+              <a:buClr>
+                <a:schemeClr val="dk1"/>
+              </a:buClr>
+              <a:buSzPts val="1800"/>
+              <a:buChar char="−"/>
+              <a:defRPr/>
             </a:lvl3pPr>
             <a:lvl4pPr indent="-342900" lvl="3" marL="1828800" algn="l">
               <a:lnSpc>
@@ -2738,16 +2736,16 @@
       </p:sp>
       <p:sp>
         <p:nvSpPr>
-          <p:cNvPr id="109" name="Google Shape;109;p13"/>
+          <p:cNvPr id="60" name="Google Shape;60;p3"/>
           <p:cNvSpPr txBox="1"/>
           <p:nvPr>
-            <p:ph idx="2" type="body"/>
+            <p:ph type="title"/>
           </p:nvPr>
         </p:nvSpPr>
         <p:spPr>
           <a:xfrm>
-            <a:off x="6228824" y="1773239"/>
-            <a:ext cx="5304364" cy="4427537"/>
+            <a:off x="622261" y="2598003"/>
+            <a:ext cx="10220325" cy="1661993"/>
           </a:xfrm>
           <a:prstGeom prst="rect">
             <a:avLst/>
@@ -2758,173 +2756,118 @@
           </a:ln>
         </p:spPr>
         <p:txBody>
-          <a:bodyPr anchorCtr="0" anchor="t" bIns="0" lIns="0" spcFirstLastPara="1" rIns="0" wrap="square" tIns="0">
-            <a:normAutofit/>
+          <a:bodyPr anchorCtr="0" anchor="b" bIns="0" lIns="0" spcFirstLastPara="1" rIns="0" wrap="square" tIns="0">
+            <a:spAutoFit/>
           </a:bodyPr>
           <a:lstStyle>
-            <a:lvl1pPr indent="-228600" lvl="0" marL="457200" algn="l">
-              <a:lnSpc>
-                <a:spcPct val="110000"/>
-              </a:lnSpc>
-              <a:spcBef>
-                <a:spcPts val="1000"/>
-              </a:spcBef>
-              <a:spcAft>
-                <a:spcPts val="0"/>
-              </a:spcAft>
-              <a:buClr>
-                <a:schemeClr val="dk1"/>
-              </a:buClr>
-              <a:buSzPts val="1600"/>
-              <a:buNone/>
-              <a:defRPr b="0" i="0">
-                <a:latin typeface="Play"/>
-                <a:ea typeface="Play"/>
-                <a:cs typeface="Play"/>
-                <a:sym typeface="Play"/>
-              </a:defRPr>
-            </a:lvl1pPr>
-            <a:lvl2pPr indent="-317500" lvl="1" marL="914400" algn="l">
-              <a:lnSpc>
-                <a:spcPct val="110000"/>
-              </a:lnSpc>
-              <a:spcBef>
-                <a:spcPts val="500"/>
-              </a:spcBef>
-              <a:spcAft>
-                <a:spcPts val="0"/>
-              </a:spcAft>
-              <a:buSzPts val="1400"/>
-              <a:buChar char="•"/>
-              <a:defRPr b="0" i="0">
-                <a:latin typeface="Play"/>
-                <a:ea typeface="Play"/>
-                <a:cs typeface="Play"/>
-                <a:sym typeface="Play"/>
-              </a:defRPr>
-            </a:lvl2pPr>
-            <a:lvl3pPr indent="-304800" lvl="2" marL="1371600" algn="l">
-              <a:lnSpc>
-                <a:spcPct val="110000"/>
-              </a:lnSpc>
-              <a:spcBef>
-                <a:spcPts val="500"/>
-              </a:spcBef>
-              <a:spcAft>
-                <a:spcPts val="0"/>
-              </a:spcAft>
-              <a:buClr>
-                <a:schemeClr val="dk1"/>
-              </a:buClr>
-              <a:buSzPts val="1200"/>
-              <a:buChar char="−"/>
-              <a:defRPr b="0" i="0">
-                <a:latin typeface="Play"/>
-                <a:ea typeface="Play"/>
-                <a:cs typeface="Play"/>
-                <a:sym typeface="Play"/>
-              </a:defRPr>
-            </a:lvl3pPr>
-            <a:lvl4pPr indent="-342900" lvl="3" marL="1828800" algn="l">
+            <a:lvl1pPr lvl="0" algn="l">
               <a:lnSpc>
                 <a:spcPct val="90000"/>
               </a:lnSpc>
               <a:spcBef>
-                <a:spcPts val="500"/>
+                <a:spcPts val="0"/>
               </a:spcBef>
               <a:spcAft>
                 <a:spcPts val="0"/>
               </a:spcAft>
               <a:buClr>
-                <a:schemeClr val="dk1"/>
+                <a:schemeClr val="lt2"/>
               </a:buClr>
-              <a:buSzPts val="1800"/>
-              <a:buChar char="•"/>
+              <a:buSzPts val="6000"/>
+              <a:buFont typeface="Play"/>
+              <a:buNone/>
+              <a:defRPr sz="6000">
+                <a:solidFill>
+                  <a:schemeClr val="lt2"/>
+                </a:solidFill>
+              </a:defRPr>
+            </a:lvl1pPr>
+            <a:lvl2pPr lvl="1">
+              <a:spcBef>
+                <a:spcPts val="0"/>
+              </a:spcBef>
+              <a:spcAft>
+                <a:spcPts val="0"/>
+              </a:spcAft>
+              <a:buSzPts val="1400"/>
+              <a:buNone/>
+              <a:defRPr/>
+            </a:lvl2pPr>
+            <a:lvl3pPr lvl="2">
+              <a:spcBef>
+                <a:spcPts val="0"/>
+              </a:spcBef>
+              <a:spcAft>
+                <a:spcPts val="0"/>
+              </a:spcAft>
+              <a:buSzPts val="1400"/>
+              <a:buNone/>
+              <a:defRPr/>
+            </a:lvl3pPr>
+            <a:lvl4pPr lvl="3">
+              <a:spcBef>
+                <a:spcPts val="0"/>
+              </a:spcBef>
+              <a:spcAft>
+                <a:spcPts val="0"/>
+              </a:spcAft>
+              <a:buSzPts val="1400"/>
+              <a:buNone/>
               <a:defRPr/>
             </a:lvl4pPr>
-            <a:lvl5pPr indent="-342900" lvl="4" marL="2286000" algn="l">
-              <a:lnSpc>
-                <a:spcPct val="90000"/>
-              </a:lnSpc>
-              <a:spcBef>
-                <a:spcPts val="500"/>
-              </a:spcBef>
-              <a:spcAft>
-                <a:spcPts val="0"/>
-              </a:spcAft>
-              <a:buClr>
-                <a:schemeClr val="dk1"/>
-              </a:buClr>
-              <a:buSzPts val="1800"/>
-              <a:buChar char="•"/>
+            <a:lvl5pPr lvl="4">
+              <a:spcBef>
+                <a:spcPts val="0"/>
+              </a:spcBef>
+              <a:spcAft>
+                <a:spcPts val="0"/>
+              </a:spcAft>
+              <a:buSzPts val="1400"/>
+              <a:buNone/>
               <a:defRPr/>
             </a:lvl5pPr>
-            <a:lvl6pPr indent="-342900" lvl="5" marL="2743200" algn="l">
-              <a:lnSpc>
-                <a:spcPct val="90000"/>
-              </a:lnSpc>
-              <a:spcBef>
-                <a:spcPts val="500"/>
-              </a:spcBef>
-              <a:spcAft>
-                <a:spcPts val="0"/>
-              </a:spcAft>
-              <a:buClr>
-                <a:schemeClr val="dk1"/>
-              </a:buClr>
-              <a:buSzPts val="1800"/>
-              <a:buChar char="•"/>
+            <a:lvl6pPr lvl="5">
+              <a:spcBef>
+                <a:spcPts val="0"/>
+              </a:spcBef>
+              <a:spcAft>
+                <a:spcPts val="0"/>
+              </a:spcAft>
+              <a:buSzPts val="1400"/>
+              <a:buNone/>
               <a:defRPr/>
             </a:lvl6pPr>
-            <a:lvl7pPr indent="-342900" lvl="6" marL="3200400" algn="l">
-              <a:lnSpc>
-                <a:spcPct val="90000"/>
-              </a:lnSpc>
-              <a:spcBef>
-                <a:spcPts val="500"/>
-              </a:spcBef>
-              <a:spcAft>
-                <a:spcPts val="0"/>
-              </a:spcAft>
-              <a:buClr>
-                <a:schemeClr val="dk1"/>
-              </a:buClr>
-              <a:buSzPts val="1800"/>
-              <a:buChar char="•"/>
+            <a:lvl7pPr lvl="6">
+              <a:spcBef>
+                <a:spcPts val="0"/>
+              </a:spcBef>
+              <a:spcAft>
+                <a:spcPts val="0"/>
+              </a:spcAft>
+              <a:buSzPts val="1400"/>
+              <a:buNone/>
               <a:defRPr/>
             </a:lvl7pPr>
-            <a:lvl8pPr indent="-342900" lvl="7" marL="3657600" algn="l">
-              <a:lnSpc>
-                <a:spcPct val="90000"/>
-              </a:lnSpc>
-              <a:spcBef>
-                <a:spcPts val="500"/>
-              </a:spcBef>
-              <a:spcAft>
-                <a:spcPts val="0"/>
-              </a:spcAft>
-              <a:buClr>
-                <a:schemeClr val="dk1"/>
-              </a:buClr>
-              <a:buSzPts val="1800"/>
-              <a:buChar char="•"/>
+            <a:lvl8pPr lvl="7">
+              <a:spcBef>
+                <a:spcPts val="0"/>
+              </a:spcBef>
+              <a:spcAft>
+                <a:spcPts val="0"/>
+              </a:spcAft>
+              <a:buSzPts val="1400"/>
+              <a:buNone/>
               <a:defRPr/>
             </a:lvl8pPr>
-            <a:lvl9pPr indent="-342900" lvl="8" marL="4114800" algn="l">
-              <a:lnSpc>
-                <a:spcPct val="90000"/>
-              </a:lnSpc>
-              <a:spcBef>
-                <a:spcPts val="500"/>
-              </a:spcBef>
-              <a:spcAft>
-                <a:spcPts val="0"/>
-              </a:spcAft>
-              <a:buClr>
-                <a:schemeClr val="dk1"/>
-              </a:buClr>
-              <a:buSzPts val="1800"/>
-              <a:buChar char="•"/>
+            <a:lvl9pPr lvl="8">
+              <a:spcBef>
+                <a:spcPts val="0"/>
+              </a:spcBef>
+              <a:spcAft>
+                <a:spcPts val="0"/>
+              </a:spcAft>
+              <a:buSzPts val="1400"/>
+              <a:buNone/>
               <a:defRPr/>
             </a:lvl9pPr>
           </a:lstStyle>
@@ -2933,16 +2876,14 @@
       </p:sp>
       <p:sp>
         <p:nvSpPr>
-          <p:cNvPr id="110" name="Google Shape;110;p13"/>
+          <p:cNvPr id="61" name="Google Shape;61;p3"/>
           <p:cNvSpPr txBox="1"/>
-          <p:nvPr>
-            <p:ph type="title"/>
-          </p:nvPr>
+          <p:nvPr/>
         </p:nvSpPr>
         <p:spPr>
           <a:xfrm>
-            <a:off x="677334" y="692150"/>
-            <a:ext cx="10855854" cy="644241"/>
+            <a:off x="3358342" y="482138"/>
+            <a:ext cx="72768" cy="362141"/>
           </a:xfrm>
           <a:prstGeom prst="rect">
             <a:avLst/>
@@ -2953,13 +2894,14 @@
           </a:ln>
         </p:spPr>
         <p:txBody>
-          <a:bodyPr anchorCtr="0" anchor="t" bIns="0" lIns="0" spcFirstLastPara="1" rIns="0" wrap="square" tIns="0">
-            <a:noAutofit/>
+          <a:bodyPr anchorCtr="0" anchor="t" bIns="36000" lIns="36000" spcFirstLastPara="1" rIns="36000" wrap="square" tIns="36000">
+            <a:spAutoFit/>
           </a:bodyPr>
-          <a:lstStyle>
-            <a:lvl1pPr lvl="0" algn="l">
+          <a:lstStyle/>
+          <a:p>
+            <a:pPr indent="0" lvl="0" marL="0" marR="0" rtl="0" algn="l">
               <a:lnSpc>
-                <a:spcPct val="90000"/>
+                <a:spcPct val="110000"/>
               </a:lnSpc>
               <a:spcBef>
                 <a:spcPts val="0"/>
@@ -2967,110 +2909,77 @@
               <a:spcAft>
                 <a:spcPts val="0"/>
               </a:spcAft>
-              <a:buClr>
-                <a:schemeClr val="accent1"/>
-              </a:buClr>
-              <a:buSzPts val="3600"/>
-              <a:buFont typeface="Play"/>
               <a:buNone/>
-              <a:defRPr>
-                <a:solidFill>
-                  <a:schemeClr val="accent1"/>
-                </a:solidFill>
-              </a:defRPr>
-            </a:lvl1pPr>
-            <a:lvl2pPr lvl="1">
-              <a:spcBef>
-                <a:spcPts val="0"/>
-              </a:spcBef>
-              <a:spcAft>
-                <a:spcPts val="0"/>
-              </a:spcAft>
-              <a:buSzPts val="1400"/>
-              <a:buNone/>
-              <a:defRPr/>
-            </a:lvl2pPr>
-            <a:lvl3pPr lvl="2">
-              <a:spcBef>
-                <a:spcPts val="0"/>
-              </a:spcBef>
-              <a:spcAft>
-                <a:spcPts val="0"/>
-              </a:spcAft>
-              <a:buSzPts val="1400"/>
-              <a:buNone/>
-              <a:defRPr/>
-            </a:lvl3pPr>
-            <a:lvl4pPr lvl="3">
-              <a:spcBef>
-                <a:spcPts val="0"/>
-              </a:spcBef>
-              <a:spcAft>
-                <a:spcPts val="0"/>
-              </a:spcAft>
-              <a:buSzPts val="1400"/>
-              <a:buNone/>
-              <a:defRPr/>
-            </a:lvl4pPr>
-            <a:lvl5pPr lvl="4">
-              <a:spcBef>
-                <a:spcPts val="0"/>
-              </a:spcBef>
-              <a:spcAft>
-                <a:spcPts val="0"/>
-              </a:spcAft>
-              <a:buSzPts val="1400"/>
-              <a:buNone/>
-              <a:defRPr/>
-            </a:lvl5pPr>
-            <a:lvl6pPr lvl="5">
-              <a:spcBef>
-                <a:spcPts val="0"/>
-              </a:spcBef>
-              <a:spcAft>
-                <a:spcPts val="0"/>
-              </a:spcAft>
-              <a:buSzPts val="1400"/>
-              <a:buNone/>
-              <a:defRPr/>
-            </a:lvl6pPr>
-            <a:lvl7pPr lvl="6">
-              <a:spcBef>
-                <a:spcPts val="0"/>
-              </a:spcBef>
-              <a:spcAft>
-                <a:spcPts val="0"/>
-              </a:spcAft>
-              <a:buSzPts val="1400"/>
-              <a:buNone/>
-              <a:defRPr/>
-            </a:lvl7pPr>
-            <a:lvl8pPr lvl="7">
-              <a:spcBef>
-                <a:spcPts val="0"/>
-              </a:spcBef>
-              <a:spcAft>
-                <a:spcPts val="0"/>
-              </a:spcAft>
-              <a:buSzPts val="1400"/>
-              <a:buNone/>
-              <a:defRPr/>
-            </a:lvl8pPr>
-            <a:lvl9pPr lvl="8">
-              <a:spcBef>
-                <a:spcPts val="0"/>
-              </a:spcBef>
-              <a:spcAft>
-                <a:spcPts val="0"/>
-              </a:spcAft>
-              <a:buSzPts val="1400"/>
-              <a:buNone/>
-              <a:defRPr/>
-            </a:lvl9pPr>
-          </a:lstStyle>
-          <a:p/>
+            </a:pPr>
+            <a:r>
+              <a:t/>
+            </a:r>
+            <a:endParaRPr b="0" i="0" sz="1800" u="none" cap="none" strike="noStrike">
+              <a:solidFill>
+                <a:schemeClr val="dk1"/>
+              </a:solidFill>
+              <a:latin typeface="Arial"/>
+              <a:ea typeface="Arial"/>
+              <a:cs typeface="Arial"/>
+              <a:sym typeface="Arial"/>
+            </a:endParaRPr>
+          </a:p>
         </p:txBody>
       </p:sp>
+      <p:pic>
+        <p:nvPicPr>
+          <p:cNvPr id="62" name="Google Shape;62;p3"/>
+          <p:cNvPicPr preferRelativeResize="0"/>
+          <p:nvPr/>
+        </p:nvPicPr>
+        <p:blipFill rotWithShape="1">
+          <a:blip r:embed="rId2">
+            <a:alphaModFix/>
+          </a:blip>
+          <a:srcRect b="0" l="0" r="0" t="0"/>
+          <a:stretch/>
+        </p:blipFill>
+        <p:spPr>
+          <a:xfrm>
+            <a:off x="658813" y="692150"/>
+            <a:ext cx="2772297" cy="489635"/>
+          </a:xfrm>
+          <a:prstGeom prst="rect">
+            <a:avLst/>
+          </a:prstGeom>
+          <a:noFill/>
+          <a:ln>
+            <a:noFill/>
+          </a:ln>
+        </p:spPr>
+      </p:pic>
+      <p:pic>
+        <p:nvPicPr>
+          <p:cNvPr id="63" name="Google Shape;63;p3"/>
+          <p:cNvPicPr preferRelativeResize="0"/>
+          <p:nvPr/>
+        </p:nvPicPr>
+        <p:blipFill rotWithShape="1">
+          <a:blip r:embed="rId3">
+            <a:alphaModFix/>
+          </a:blip>
+          <a:srcRect b="0" l="0" r="0" t="0"/>
+          <a:stretch/>
+        </p:blipFill>
+        <p:spPr>
+          <a:xfrm>
+            <a:off x="8803845" y="0"/>
+            <a:ext cx="3397780" cy="6858000"/>
+          </a:xfrm>
+          <a:prstGeom prst="rect">
+            <a:avLst/>
+          </a:prstGeom>
+          <a:noFill/>
+          <a:ln>
+            <a:noFill/>
+          </a:ln>
+        </p:spPr>
+      </p:pic>
     </p:spTree>
   </p:cSld>
   <p:clrMapOvr>
@@ -4705,8 +4614,9 @@
   </p:cSld>
   <p:clrMap accent1="accent1" accent2="accent2" accent3="accent3" accent4="accent4" accent5="accent5" accent6="accent6" bg1="lt1" bg2="dk2" tx1="dk1" tx2="lt2" folHlink="folHlink" hlink="hlink"/>
   <p:sldLayoutIdLst>
+    <p:sldLayoutId id="2147483649" r:id="rId2"/>
     <p:sldLayoutId id="2147483653" r:id="rId6"/>
-    <p:sldLayoutId id="2147483659" r:id="rId12"/>
+    <p:sldLayoutId id="2147483665" r:id="rId18"/>
   </p:sldLayoutIdLst>
   <p:hf dt="0" ftr="0" hdr="0" sldNum="0"/>
   <p:txStyles>
@@ -7623,13 +7533,6 @@
 <file path=ppt/slides/slide56.xml><?xml version="1.0" encoding="utf-8"?>
 <p:sld xmlns:a="http://schemas.openxmlformats.org/drawingml/2006/main" xmlns:p="http://schemas.openxmlformats.org/presentationml/2006/main" xmlns:r="http://schemas.openxmlformats.org/officeDocument/2006/relationships">
   <p:cSld>
-    <p:bg>
-      <p:bgPr>
-        <a:solidFill>
-          <a:schemeClr val="lt2"/>
-        </a:solidFill>
-      </p:bgPr>
-    </p:bg>
     <p:spTree>
       <p:nvGrpSpPr>
         <p:cNvPr id="1" name=""/>
@@ -7645,8 +7548,8 @@
         </p:nvSpPr>
         <p:spPr>
           <a:xfrm>
-            <a:off x="677387" y="692177"/>
-            <a:ext cx="10855878" cy="1447800"/>
+            <a:off x="622279" y="2598016"/>
+            <a:ext cx="7535387" cy="1661967"/>
           </a:xfrm>
           <a:prstGeom prst="rect">
             <a:avLst/>
@@ -7663,7 +7566,7 @@
               <a:spcAft>
                 <a:spcPts val="300"/>
               </a:spcAft>
-              <a:defRPr sz="4000">
+              <a:defRPr sz="3200" b="0">
                 <a:solidFill>
                   <a:srgbClr val="000000"/>
                 </a:solidFill>
@@ -7673,7 +7576,7 @@
               </a:defRPr>
             </a:pPr>
             <a:r>
-              <a:rPr sz="4000">
+              <a:rPr sz="3200" b="0">
                 <a:solidFill>
                   <a:srgbClr val="000000"/>
                 </a:solidFill>
@@ -7681,7 +7584,7 @@
                 <a:ea typeface="Arial"/>
                 <a:cs typeface="Arial"/>
               </a:rPr>
-              <a:t>Автоматическая вёрстка презентаций: пилот и запуск</a:t>
+              <a:t>Защита инициативы: сервис автоматической вёрстки презентаций</a:t>
             </a:r>
           </a:p>
         </p:txBody>
@@ -7695,1026 +7598,6 @@
 </file>
 
 <file path=ppt/slides/slide57.xml><?xml version="1.0" encoding="utf-8"?>
-<p:sld xmlns:a="http://schemas.openxmlformats.org/drawingml/2006/main" xmlns:p="http://schemas.openxmlformats.org/presentationml/2006/main" xmlns:r="http://schemas.openxmlformats.org/officeDocument/2006/relationships">
-  <p:cSld>
-    <p:bg>
-      <p:bgPr>
-        <a:solidFill>
-          <a:schemeClr val="lt2"/>
-        </a:solidFill>
-      </p:bgPr>
-    </p:bg>
-    <p:spTree>
-      <p:nvGrpSpPr>
-        <p:cNvPr id="1" name=""/>
-        <p:cNvGrpSpPr/>
-        <p:nvPr/>
-      </p:nvGrpSpPr>
-      <p:grpSpPr/>
-      <p:sp>
-        <p:nvSpPr>
-          <p:cNvPr id="795" name="Google Shape;795;p60"/>
-          <p:cNvSpPr txBox="1"/>
-          <p:nvPr/>
-        </p:nvSpPr>
-        <p:spPr>
-          <a:xfrm>
-            <a:off x="18692059" y="4674436"/>
-            <a:ext cx="4304330" cy="678198"/>
-          </a:xfrm>
-          <a:prstGeom prst="rect">
-            <a:avLst/>
-          </a:prstGeom>
-          <a:noFill/>
-          <a:ln>
-            <a:noFill/>
-          </a:ln>
-        </p:spPr>
-        <p:txBody>
-          <a:bodyPr anchorCtr="0" anchor="t" bIns="45700" lIns="91425" spcFirstLastPara="1" rIns="91425" wrap="square" tIns="45700">
-            <a:noAutofit/>
-          </a:bodyPr>
-          <a:lstStyle/>
-          <a:p>
-            <a:pPr indent="0" lvl="0" marL="0" marR="0" rtl="0" algn="l">
-              <a:lnSpc>
-                <a:spcPct val="110000"/>
-              </a:lnSpc>
-              <a:spcBef>
-                <a:spcPts val="0"/>
-              </a:spcBef>
-              <a:spcAft>
-                <a:spcPts val="0"/>
-              </a:spcAft>
-              <a:buClr>
-                <a:schemeClr val="dk1"/>
-              </a:buClr>
-              <a:buSzPts val="1600"/>
-              <a:buFont typeface="Arial"/>
-              <a:buNone/>
-            </a:pPr>
-            <a:r>
-              <a:t/>
-            </a:r>
-            <a:endParaRPr sz="1600">
-              <a:solidFill>
-                <a:schemeClr val="dk1"/>
-              </a:solidFill>
-              <a:latin typeface="Arial"/>
-              <a:ea typeface="Arial"/>
-              <a:cs typeface="Arial"/>
-              <a:sym typeface="Arial"/>
-            </a:endParaRPr>
-          </a:p>
-        </p:txBody>
-      </p:sp>
-      <p:sp>
-        <p:nvSpPr>
-          <p:cNvPr id="796" name="title"/>
-          <p:cNvSpPr txBox="1"/>
-          <p:nvPr/>
-        </p:nvSpPr>
-        <p:spPr>
-          <a:xfrm>
-            <a:off x="677387" y="692177"/>
-            <a:ext cx="10855878" cy="1447800"/>
-          </a:xfrm>
-          <a:prstGeom prst="rect">
-            <a:avLst/>
-          </a:prstGeom>
-          <a:noFill/>
-        </p:spPr>
-        <p:txBody>
-          <a:bodyPr wrap="square" lIns="76200" rIns="76200" tIns="50800" bIns="50800">
-            <a:spAutoFit/>
-          </a:bodyPr>
-          <a:lstStyle/>
-          <a:p>
-            <a:pPr algn="l">
-              <a:spcAft>
-                <a:spcPts val="300"/>
-              </a:spcAft>
-              <a:defRPr sz="4000">
-                <a:solidFill>
-                  <a:srgbClr val="000000"/>
-                </a:solidFill>
-                <a:latin typeface="Arial"/>
-                <a:ea typeface="Arial"/>
-                <a:cs typeface="Arial"/>
-              </a:defRPr>
-            </a:pPr>
-            <a:r>
-              <a:rPr sz="4000">
-                <a:solidFill>
-                  <a:srgbClr val="000000"/>
-                </a:solidFill>
-                <a:latin typeface="Arial"/>
-                <a:ea typeface="Arial"/>
-                <a:cs typeface="Arial"/>
-              </a:rPr>
-              <a:t>Текущее состояние: ручная сборка и проблемы</a:t>
-            </a:r>
-          </a:p>
-        </p:txBody>
-      </p:sp>
-      <p:sp>
-        <p:nvSpPr>
-          <p:cNvPr id="797" name="lead"/>
-          <p:cNvSpPr txBox="1"/>
-          <p:nvPr/>
-        </p:nvSpPr>
-        <p:spPr>
-          <a:xfrm>
-            <a:off x="677387" y="2825777"/>
-            <a:ext cx="10855878" cy="1566761"/>
-          </a:xfrm>
-          <a:prstGeom prst="rect">
-            <a:avLst/>
-          </a:prstGeom>
-          <a:noFill/>
-        </p:spPr>
-        <p:txBody>
-          <a:bodyPr wrap="square" lIns="76200" rIns="76200" tIns="50800" bIns="50800">
-            <a:spAutoFit/>
-          </a:bodyPr>
-          <a:lstStyle/>
-          <a:p>
-            <a:pPr algn="l">
-              <a:spcAft>
-                <a:spcPts val="300"/>
-              </a:spcAft>
-              <a:defRPr sz="4000">
-                <a:solidFill>
-                  <a:srgbClr val="000000"/>
-                </a:solidFill>
-                <a:latin typeface="Play"/>
-                <a:ea typeface="Play"/>
-                <a:cs typeface="Play"/>
-              </a:defRPr>
-            </a:pPr>
-            <a:r>
-              <a:rPr sz="4000">
-                <a:solidFill>
-                  <a:srgbClr val="000000"/>
-                </a:solidFill>
-                <a:latin typeface="Play"/>
-                <a:ea typeface="Play"/>
-                <a:cs typeface="Play"/>
-              </a:rPr>
-              <a:t>12-слайдовая колода занимает 186 мин</a:t>
-            </a:r>
-          </a:p>
-        </p:txBody>
-      </p:sp>
-      <p:sp>
-        <p:nvSpPr>
-          <p:cNvPr id="798" name="body"/>
-          <p:cNvSpPr txBox="1"/>
-          <p:nvPr/>
-        </p:nvSpPr>
-        <p:spPr>
-          <a:xfrm>
-            <a:off x="677387" y="4602714"/>
-            <a:ext cx="10855878" cy="1725985"/>
-          </a:xfrm>
-          <a:prstGeom prst="rect">
-            <a:avLst/>
-          </a:prstGeom>
-          <a:noFill/>
-        </p:spPr>
-        <p:txBody>
-          <a:bodyPr wrap="square" lIns="76200" rIns="76200" tIns="50800" bIns="50800">
-            <a:spAutoFit/>
-          </a:bodyPr>
-          <a:lstStyle/>
-          <a:p>
-            <a:pPr algn="l">
-              <a:spcAft>
-                <a:spcPts val="300"/>
-              </a:spcAft>
-              <a:defRPr sz="3200">
-                <a:solidFill>
-                  <a:srgbClr val="000000"/>
-                </a:solidFill>
-                <a:latin typeface="Play"/>
-                <a:ea typeface="Play"/>
-                <a:cs typeface="Play"/>
-              </a:defRPr>
-            </a:pPr>
-            <a:r>
-              <a:rPr sz="3200">
-                <a:solidFill>
-                  <a:srgbClr val="000000"/>
-                </a:solidFill>
-                <a:latin typeface="Play"/>
-                <a:ea typeface="Play"/>
-                <a:cs typeface="Play"/>
-              </a:rPr>
-              <a:t>• Правки после ревью добавляют 74 мин</a:t>
-            </a:r>
-          </a:p>
-          <a:p>
-            <a:pPr algn="l">
-              <a:spcAft>
-                <a:spcPts val="300"/>
-              </a:spcAft>
-              <a:defRPr sz="3200">
-                <a:solidFill>
-                  <a:srgbClr val="000000"/>
-                </a:solidFill>
-                <a:latin typeface="Play"/>
-                <a:ea typeface="Play"/>
-                <a:cs typeface="Play"/>
-              </a:defRPr>
-            </a:pPr>
-            <a:r>
-              <a:rPr sz="3200">
-                <a:solidFill>
-                  <a:srgbClr val="000000"/>
-                </a:solidFill>
-                <a:latin typeface="Play"/>
-                <a:ea typeface="Play"/>
-                <a:cs typeface="Play"/>
-              </a:rPr>
-              <a:t>• 19 из 42 колод нарушают фирменный стиль</a:t>
-            </a:r>
-          </a:p>
-        </p:txBody>
-      </p:sp>
-    </p:spTree>
-  </p:cSld>
-  <p:clrMapOvr>
-    <a:masterClrMapping/>
-  </p:clrMapOvr>
-</p:sld>
-</file>
-
-<file path=ppt/slides/slide58.xml><?xml version="1.0" encoding="utf-8"?>
-<p:sld xmlns:a="http://schemas.openxmlformats.org/drawingml/2006/main" xmlns:p="http://schemas.openxmlformats.org/presentationml/2006/main" xmlns:r="http://schemas.openxmlformats.org/officeDocument/2006/relationships">
-  <p:cSld>
-    <p:bg>
-      <p:bgPr>
-        <a:solidFill>
-          <a:schemeClr val="lt2"/>
-        </a:solidFill>
-      </p:bgPr>
-    </p:bg>
-    <p:spTree>
-      <p:nvGrpSpPr>
-        <p:cNvPr id="1" name=""/>
-        <p:cNvGrpSpPr/>
-        <p:nvPr/>
-      </p:nvGrpSpPr>
-      <p:grpSpPr/>
-      <p:sp>
-        <p:nvSpPr>
-          <p:cNvPr id="764" name="Google Shape;764;p58"/>
-          <p:cNvSpPr txBox="1"/>
-          <p:nvPr/>
-        </p:nvSpPr>
-        <p:spPr>
-          <a:xfrm>
-            <a:off x="18692059" y="4674436"/>
-            <a:ext cx="4304330" cy="678198"/>
-          </a:xfrm>
-          <a:prstGeom prst="rect">
-            <a:avLst/>
-          </a:prstGeom>
-          <a:noFill/>
-          <a:ln>
-            <a:noFill/>
-          </a:ln>
-        </p:spPr>
-        <p:txBody>
-          <a:bodyPr anchorCtr="0" anchor="t" bIns="45700" lIns="91425" spcFirstLastPara="1" rIns="91425" wrap="square" tIns="45700">
-            <a:noAutofit/>
-          </a:bodyPr>
-          <a:lstStyle/>
-          <a:p>
-            <a:pPr indent="0" lvl="0" marL="0" marR="0" rtl="0" algn="l">
-              <a:lnSpc>
-                <a:spcPct val="110000"/>
-              </a:lnSpc>
-              <a:spcBef>
-                <a:spcPts val="0"/>
-              </a:spcBef>
-              <a:spcAft>
-                <a:spcPts val="0"/>
-              </a:spcAft>
-              <a:buClr>
-                <a:schemeClr val="dk1"/>
-              </a:buClr>
-              <a:buSzPts val="1600"/>
-              <a:buFont typeface="Arial"/>
-              <a:buNone/>
-            </a:pPr>
-            <a:r>
-              <a:t/>
-            </a:r>
-            <a:endParaRPr sz="1600">
-              <a:solidFill>
-                <a:schemeClr val="dk1"/>
-              </a:solidFill>
-              <a:latin typeface="Arial"/>
-              <a:ea typeface="Arial"/>
-              <a:cs typeface="Arial"/>
-              <a:sym typeface="Arial"/>
-            </a:endParaRPr>
-          </a:p>
-        </p:txBody>
-      </p:sp>
-      <p:sp>
-        <p:nvSpPr>
-          <p:cNvPr id="765" name="title"/>
-          <p:cNvSpPr txBox="1"/>
-          <p:nvPr/>
-        </p:nvSpPr>
-        <p:spPr>
-          <a:xfrm>
-            <a:off x="677387" y="692177"/>
-            <a:ext cx="10855878" cy="1447800"/>
-          </a:xfrm>
-          <a:prstGeom prst="rect">
-            <a:avLst/>
-          </a:prstGeom>
-          <a:noFill/>
-        </p:spPr>
-        <p:txBody>
-          <a:bodyPr wrap="square" lIns="76200" rIns="76200" tIns="50800" bIns="50800">
-            <a:spAutoFit/>
-          </a:bodyPr>
-          <a:lstStyle/>
-          <a:p>
-            <a:pPr algn="l">
-              <a:spcAft>
-                <a:spcPts val="300"/>
-              </a:spcAft>
-              <a:defRPr sz="4000">
-                <a:solidFill>
-                  <a:srgbClr val="000000"/>
-                </a:solidFill>
-                <a:latin typeface="Arial"/>
-                <a:ea typeface="Arial"/>
-                <a:cs typeface="Arial"/>
-              </a:defRPr>
-            </a:pPr>
-            <a:r>
-              <a:rPr sz="4000">
-                <a:solidFill>
-                  <a:srgbClr val="000000"/>
-                </a:solidFill>
-                <a:latin typeface="Arial"/>
-                <a:ea typeface="Arial"/>
-                <a:cs typeface="Arial"/>
-              </a:rPr>
-              <a:t>Предлагаемый сервис: автоматизация от шаблона до аудита</a:t>
-            </a:r>
-          </a:p>
-        </p:txBody>
-      </p:sp>
-      <p:sp>
-        <p:nvSpPr>
-          <p:cNvPr id="766" name="lead"/>
-          <p:cNvSpPr txBox="1"/>
-          <p:nvPr/>
-        </p:nvSpPr>
-        <p:spPr>
-          <a:xfrm>
-            <a:off x="677387" y="2825777"/>
-            <a:ext cx="10855878" cy="1465998"/>
-          </a:xfrm>
-          <a:prstGeom prst="rect">
-            <a:avLst/>
-          </a:prstGeom>
-          <a:noFill/>
-        </p:spPr>
-        <p:txBody>
-          <a:bodyPr wrap="square" lIns="76200" rIns="76200" tIns="50800" bIns="50800">
-            <a:spAutoFit/>
-          </a:bodyPr>
-          <a:lstStyle/>
-          <a:p>
-            <a:pPr algn="l">
-              <a:spcAft>
-                <a:spcPts val="300"/>
-              </a:spcAft>
-              <a:defRPr sz="4000">
-                <a:solidFill>
-                  <a:srgbClr val="000000"/>
-                </a:solidFill>
-                <a:latin typeface="Play"/>
-                <a:ea typeface="Play"/>
-                <a:cs typeface="Play"/>
-              </a:defRPr>
-            </a:pPr>
-            <a:r>
-              <a:rPr sz="4000">
-                <a:solidFill>
-                  <a:srgbClr val="000000"/>
-                </a:solidFill>
-                <a:latin typeface="Play"/>
-                <a:ea typeface="Play"/>
-                <a:cs typeface="Play"/>
-              </a:rPr>
-              <a:t>Сервис принимает pptx шаблон и материалы</a:t>
-            </a:r>
-          </a:p>
-        </p:txBody>
-      </p:sp>
-      <p:sp>
-        <p:nvSpPr>
-          <p:cNvPr id="767" name="body"/>
-          <p:cNvSpPr txBox="1"/>
-          <p:nvPr/>
-        </p:nvSpPr>
-        <p:spPr>
-          <a:xfrm>
-            <a:off x="677387" y="4501952"/>
-            <a:ext cx="10855878" cy="1826747"/>
-          </a:xfrm>
-          <a:prstGeom prst="rect">
-            <a:avLst/>
-          </a:prstGeom>
-          <a:noFill/>
-        </p:spPr>
-        <p:txBody>
-          <a:bodyPr wrap="square" lIns="76200" rIns="76200" tIns="50800" bIns="50800">
-            <a:spAutoFit/>
-          </a:bodyPr>
-          <a:lstStyle/>
-          <a:p>
-            <a:pPr algn="l">
-              <a:spcAft>
-                <a:spcPts val="300"/>
-              </a:spcAft>
-              <a:defRPr sz="3200">
-                <a:solidFill>
-                  <a:srgbClr val="000000"/>
-                </a:solidFill>
-                <a:latin typeface="Play"/>
-                <a:ea typeface="Play"/>
-                <a:cs typeface="Play"/>
-              </a:defRPr>
-            </a:pPr>
-            <a:r>
-              <a:rPr sz="3200">
-                <a:solidFill>
-                  <a:srgbClr val="000000"/>
-                </a:solidFill>
-                <a:latin typeface="Play"/>
-                <a:ea typeface="Play"/>
-                <a:cs typeface="Play"/>
-              </a:rPr>
-              <a:t>• Автоматически формирует дизайн-систему и план колоды</a:t>
-            </a:r>
-          </a:p>
-          <a:p>
-            <a:pPr algn="l">
-              <a:spcAft>
-                <a:spcPts val="300"/>
-              </a:spcAft>
-              <a:defRPr sz="3200">
-                <a:solidFill>
-                  <a:srgbClr val="000000"/>
-                </a:solidFill>
-                <a:latin typeface="Play"/>
-                <a:ea typeface="Play"/>
-                <a:cs typeface="Play"/>
-              </a:defRPr>
-            </a:pPr>
-            <a:r>
-              <a:rPr sz="3200">
-                <a:solidFill>
-                  <a:srgbClr val="000000"/>
-                </a:solidFill>
-                <a:latin typeface="Play"/>
-                <a:ea typeface="Play"/>
-                <a:cs typeface="Play"/>
-              </a:rPr>
-              <a:t>• Результат – редактируемый pptx, pdf и html</a:t>
-            </a:r>
-          </a:p>
-        </p:txBody>
-      </p:sp>
-    </p:spTree>
-  </p:cSld>
-  <p:clrMapOvr>
-    <a:masterClrMapping/>
-  </p:clrMapOvr>
-</p:sld>
-</file>
-
-<file path=ppt/slides/slide59.xml><?xml version="1.0" encoding="utf-8"?>
-<p:sld xmlns:a="http://schemas.openxmlformats.org/drawingml/2006/main" xmlns:p="http://schemas.openxmlformats.org/presentationml/2006/main" xmlns:r="http://schemas.openxmlformats.org/officeDocument/2006/relationships">
-  <p:cSld>
-    <p:bg>
-      <p:bgPr>
-        <a:solidFill>
-          <a:schemeClr val="lt2"/>
-        </a:solidFill>
-      </p:bgPr>
-    </p:bg>
-    <p:spTree>
-      <p:nvGrpSpPr>
-        <p:cNvPr id="1" name=""/>
-        <p:cNvGrpSpPr/>
-        <p:nvPr/>
-      </p:nvGrpSpPr>
-      <p:grpSpPr/>
-      <p:sp>
-        <p:nvSpPr>
-          <p:cNvPr id="782" name="Google Shape;782;p59"/>
-          <p:cNvSpPr txBox="1"/>
-          <p:nvPr/>
-        </p:nvSpPr>
-        <p:spPr>
-          <a:xfrm>
-            <a:off x="18692059" y="4674436"/>
-            <a:ext cx="4304330" cy="678198"/>
-          </a:xfrm>
-          <a:prstGeom prst="rect">
-            <a:avLst/>
-          </a:prstGeom>
-          <a:noFill/>
-          <a:ln>
-            <a:noFill/>
-          </a:ln>
-        </p:spPr>
-        <p:txBody>
-          <a:bodyPr anchorCtr="0" anchor="t" bIns="45700" lIns="91425" spcFirstLastPara="1" rIns="91425" wrap="square" tIns="45700">
-            <a:noAutofit/>
-          </a:bodyPr>
-          <a:lstStyle/>
-          <a:p>
-            <a:pPr indent="0" lvl="0" marL="0" marR="0" rtl="0" algn="l">
-              <a:lnSpc>
-                <a:spcPct val="110000"/>
-              </a:lnSpc>
-              <a:spcBef>
-                <a:spcPts val="0"/>
-              </a:spcBef>
-              <a:spcAft>
-                <a:spcPts val="0"/>
-              </a:spcAft>
-              <a:buClr>
-                <a:schemeClr val="dk1"/>
-              </a:buClr>
-              <a:buSzPts val="1600"/>
-              <a:buFont typeface="Arial"/>
-              <a:buNone/>
-            </a:pPr>
-            <a:r>
-              <a:t/>
-            </a:r>
-            <a:endParaRPr sz="1600">
-              <a:solidFill>
-                <a:schemeClr val="dk1"/>
-              </a:solidFill>
-              <a:latin typeface="Arial"/>
-              <a:ea typeface="Arial"/>
-              <a:cs typeface="Arial"/>
-              <a:sym typeface="Arial"/>
-            </a:endParaRPr>
-          </a:p>
-        </p:txBody>
-      </p:sp>
-      <p:sp>
-        <p:nvSpPr>
-          <p:cNvPr id="783" name="title"/>
-          <p:cNvSpPr txBox="1"/>
-          <p:nvPr/>
-        </p:nvSpPr>
-        <p:spPr>
-          <a:xfrm>
-            <a:off x="677387" y="692177"/>
-            <a:ext cx="10855878" cy="1447800"/>
-          </a:xfrm>
-          <a:prstGeom prst="rect">
-            <a:avLst/>
-          </a:prstGeom>
-          <a:noFill/>
-        </p:spPr>
-        <p:txBody>
-          <a:bodyPr wrap="square" lIns="76200" rIns="76200" tIns="50800" bIns="50800">
-            <a:spAutoFit/>
-          </a:bodyPr>
-          <a:lstStyle/>
-          <a:p>
-            <a:pPr algn="l">
-              <a:spcAft>
-                <a:spcPts val="300"/>
-              </a:spcAft>
-              <a:defRPr sz="4000">
-                <a:solidFill>
-                  <a:srgbClr val="000000"/>
-                </a:solidFill>
-                <a:latin typeface="Arial"/>
-                <a:ea typeface="Arial"/>
-                <a:cs typeface="Arial"/>
-              </a:defRPr>
-            </a:pPr>
-            <a:r>
-              <a:rPr sz="4000">
-                <a:solidFill>
-                  <a:srgbClr val="000000"/>
-                </a:solidFill>
-                <a:latin typeface="Arial"/>
-                <a:ea typeface="Arial"/>
-                <a:cs typeface="Arial"/>
-              </a:rPr>
-              <a:t>Ожидаемый эффект: ускорение и качество</a:t>
-            </a:r>
-          </a:p>
-        </p:txBody>
-      </p:sp>
-      <p:sp>
-        <p:nvSpPr>
-          <p:cNvPr id="784" name="lead"/>
-          <p:cNvSpPr txBox="1"/>
-          <p:nvPr/>
-        </p:nvSpPr>
-        <p:spPr>
-          <a:xfrm>
-            <a:off x="677387" y="2825777"/>
-            <a:ext cx="10855878" cy="1637154"/>
-          </a:xfrm>
-          <a:prstGeom prst="rect">
-            <a:avLst/>
-          </a:prstGeom>
-          <a:noFill/>
-        </p:spPr>
-        <p:txBody>
-          <a:bodyPr wrap="square" lIns="76200" rIns="76200" tIns="50800" bIns="50800">
-            <a:spAutoFit/>
-          </a:bodyPr>
-          <a:lstStyle/>
-          <a:p>
-            <a:pPr algn="l">
-              <a:spcAft>
-                <a:spcPts val="300"/>
-              </a:spcAft>
-              <a:defRPr sz="4000">
-                <a:solidFill>
-                  <a:srgbClr val="000000"/>
-                </a:solidFill>
-                <a:latin typeface="Play"/>
-                <a:ea typeface="Play"/>
-                <a:cs typeface="Play"/>
-              </a:defRPr>
-            </a:pPr>
-            <a:r>
-              <a:rPr sz="4000">
-                <a:solidFill>
-                  <a:srgbClr val="000000"/>
-                </a:solidFill>
-                <a:latin typeface="Play"/>
-                <a:ea typeface="Play"/>
-                <a:cs typeface="Play"/>
-              </a:rPr>
-              <a:t>Время сборки сократилось до 4 мин</a:t>
-            </a:r>
-          </a:p>
-        </p:txBody>
-      </p:sp>
-      <p:sp>
-        <p:nvSpPr>
-          <p:cNvPr id="785" name="body"/>
-          <p:cNvSpPr txBox="1"/>
-          <p:nvPr/>
-        </p:nvSpPr>
-        <p:spPr>
-          <a:xfrm>
-            <a:off x="677387" y="4673108"/>
-            <a:ext cx="10855878" cy="1655591"/>
-          </a:xfrm>
-          <a:prstGeom prst="rect">
-            <a:avLst/>
-          </a:prstGeom>
-          <a:noFill/>
-        </p:spPr>
-        <p:txBody>
-          <a:bodyPr wrap="square" lIns="76200" rIns="76200" tIns="50800" bIns="50800">
-            <a:spAutoFit/>
-          </a:bodyPr>
-          <a:lstStyle/>
-          <a:p>
-            <a:pPr algn="l">
-              <a:spcAft>
-                <a:spcPts val="300"/>
-              </a:spcAft>
-              <a:defRPr sz="3200">
-                <a:solidFill>
-                  <a:srgbClr val="000000"/>
-                </a:solidFill>
-                <a:latin typeface="Play"/>
-                <a:ea typeface="Play"/>
-                <a:cs typeface="Play"/>
-              </a:defRPr>
-            </a:pPr>
-            <a:r>
-              <a:rPr sz="3200">
-                <a:solidFill>
-                  <a:srgbClr val="000000"/>
-                </a:solidFill>
-                <a:latin typeface="Play"/>
-                <a:ea typeface="Play"/>
-                <a:cs typeface="Play"/>
-              </a:rPr>
-              <a:t>• Первый вариант готов за 1 день</a:t>
-            </a:r>
-          </a:p>
-          <a:p>
-            <a:pPr algn="l">
-              <a:spcAft>
-                <a:spcPts val="300"/>
-              </a:spcAft>
-              <a:defRPr sz="3200">
-                <a:solidFill>
-                  <a:srgbClr val="000000"/>
-                </a:solidFill>
-                <a:latin typeface="Play"/>
-                <a:ea typeface="Play"/>
-                <a:cs typeface="Play"/>
-              </a:defRPr>
-            </a:pPr>
-            <a:r>
-              <a:rPr sz="3200">
-                <a:solidFill>
-                  <a:srgbClr val="000000"/>
-                </a:solidFill>
-                <a:latin typeface="Play"/>
-                <a:ea typeface="Play"/>
-                <a:cs typeface="Play"/>
-              </a:rPr>
-              <a:t>• Стиль-нарушения упали до 2 из 68</a:t>
-            </a:r>
-          </a:p>
-        </p:txBody>
-      </p:sp>
-    </p:spTree>
-  </p:cSld>
-  <p:clrMapOvr>
-    <a:masterClrMapping/>
-  </p:clrMapOvr>
-</p:sld>
-</file>
-
-<file path=ppt/slides/slide60.xml><?xml version="1.0" encoding="utf-8"?>
-<p:sld xmlns:a="http://schemas.openxmlformats.org/drawingml/2006/main" xmlns:p="http://schemas.openxmlformats.org/presentationml/2006/main" xmlns:r="http://schemas.openxmlformats.org/officeDocument/2006/relationships">
-  <p:cSld>
-    <p:bg>
-      <p:bgPr>
-        <a:solidFill>
-          <a:schemeClr val="lt2"/>
-        </a:solidFill>
-      </p:bgPr>
-    </p:bg>
-    <p:spTree>
-      <p:nvGrpSpPr>
-        <p:cNvPr id="1" name=""/>
-        <p:cNvGrpSpPr/>
-        <p:nvPr/>
-      </p:nvGrpSpPr>
-      <p:grpSpPr/>
-      <p:sp>
-        <p:nvSpPr>
-          <p:cNvPr id="795" name="Google Shape;795;p60"/>
-          <p:cNvSpPr txBox="1"/>
-          <p:nvPr/>
-        </p:nvSpPr>
-        <p:spPr>
-          <a:xfrm>
-            <a:off x="18692059" y="4674436"/>
-            <a:ext cx="4304330" cy="678198"/>
-          </a:xfrm>
-          <a:prstGeom prst="rect">
-            <a:avLst/>
-          </a:prstGeom>
-          <a:noFill/>
-          <a:ln>
-            <a:noFill/>
-          </a:ln>
-        </p:spPr>
-        <p:txBody>
-          <a:bodyPr anchorCtr="0" anchor="t" bIns="45700" lIns="91425" spcFirstLastPara="1" rIns="91425" wrap="square" tIns="45700">
-            <a:noAutofit/>
-          </a:bodyPr>
-          <a:lstStyle/>
-          <a:p>
-            <a:pPr indent="0" lvl="0" marL="0" marR="0" rtl="0" algn="l">
-              <a:lnSpc>
-                <a:spcPct val="110000"/>
-              </a:lnSpc>
-              <a:spcBef>
-                <a:spcPts val="0"/>
-              </a:spcBef>
-              <a:spcAft>
-                <a:spcPts val="0"/>
-              </a:spcAft>
-              <a:buClr>
-                <a:schemeClr val="dk1"/>
-              </a:buClr>
-              <a:buSzPts val="1600"/>
-              <a:buFont typeface="Arial"/>
-              <a:buNone/>
-            </a:pPr>
-            <a:r>
-              <a:t/>
-            </a:r>
-            <a:endParaRPr sz="1600">
-              <a:solidFill>
-                <a:schemeClr val="dk1"/>
-              </a:solidFill>
-              <a:latin typeface="Arial"/>
-              <a:ea typeface="Arial"/>
-              <a:cs typeface="Arial"/>
-              <a:sym typeface="Arial"/>
-            </a:endParaRPr>
-          </a:p>
-        </p:txBody>
-      </p:sp>
-      <p:sp>
-        <p:nvSpPr>
-          <p:cNvPr id="796" name="title"/>
-          <p:cNvSpPr txBox="1"/>
-          <p:nvPr/>
-        </p:nvSpPr>
-        <p:spPr>
-          <a:xfrm>
-            <a:off x="677387" y="692177"/>
-            <a:ext cx="10855878" cy="1447800"/>
-          </a:xfrm>
-          <a:prstGeom prst="rect">
-            <a:avLst/>
-          </a:prstGeom>
-          <a:noFill/>
-        </p:spPr>
-        <p:txBody>
-          <a:bodyPr wrap="square" lIns="76200" rIns="76200" tIns="50800" bIns="50800">
-            <a:spAutoFit/>
-          </a:bodyPr>
-          <a:lstStyle/>
-          <a:p>
-            <a:pPr algn="l">
-              <a:spcAft>
-                <a:spcPts val="300"/>
-              </a:spcAft>
-              <a:defRPr sz="4000">
-                <a:solidFill>
-                  <a:srgbClr val="000000"/>
-                </a:solidFill>
-                <a:latin typeface="Arial"/>
-                <a:ea typeface="Arial"/>
-                <a:cs typeface="Arial"/>
-              </a:defRPr>
-            </a:pPr>
-            <a:r>
-              <a:rPr sz="4000">
-                <a:solidFill>
-                  <a:srgbClr val="000000"/>
-                </a:solidFill>
-                <a:latin typeface="Arial"/>
-                <a:ea typeface="Arial"/>
-                <a:cs typeface="Arial"/>
-              </a:rPr>
-              <a:t>Ресурсы и сроки: инфраструктура и стоимость</a:t>
-            </a:r>
-          </a:p>
-        </p:txBody>
-      </p:sp>
-      <p:sp>
-        <p:nvSpPr>
-          <p:cNvPr id="797" name="lead"/>
-          <p:cNvSpPr txBox="1"/>
-          <p:nvPr/>
-        </p:nvSpPr>
-        <p:spPr>
-          <a:xfrm>
-            <a:off x="677387" y="2825777"/>
-            <a:ext cx="10855878" cy="1445595"/>
-          </a:xfrm>
-          <a:prstGeom prst="rect">
-            <a:avLst/>
-          </a:prstGeom>
-          <a:noFill/>
-        </p:spPr>
-        <p:txBody>
-          <a:bodyPr wrap="square" lIns="76200" rIns="76200" tIns="50800" bIns="50800">
-            <a:spAutoFit/>
-          </a:bodyPr>
-          <a:lstStyle/>
-          <a:p>
-            <a:pPr algn="l">
-              <a:spcAft>
-                <a:spcPts val="300"/>
-              </a:spcAft>
-              <a:defRPr sz="4000">
-                <a:solidFill>
-                  <a:srgbClr val="000000"/>
-                </a:solidFill>
-                <a:latin typeface="Play"/>
-                <a:ea typeface="Play"/>
-                <a:cs typeface="Play"/>
-              </a:defRPr>
-            </a:pPr>
-            <a:r>
-              <a:rPr sz="4000">
-                <a:solidFill>
-                  <a:srgbClr val="000000"/>
-                </a:solidFill>
-                <a:latin typeface="Play"/>
-                <a:ea typeface="Play"/>
-                <a:cs typeface="Play"/>
-              </a:rPr>
-              <a:t>Сервис работает на 2 vCPU / 2 GB RAM</a:t>
-            </a:r>
-          </a:p>
-        </p:txBody>
-      </p:sp>
-      <p:sp>
-        <p:nvSpPr>
-          <p:cNvPr id="798" name="body"/>
-          <p:cNvSpPr txBox="1"/>
-          <p:nvPr/>
-        </p:nvSpPr>
-        <p:spPr>
-          <a:xfrm>
-            <a:off x="677387" y="4481549"/>
-            <a:ext cx="10855878" cy="1847150"/>
-          </a:xfrm>
-          <a:prstGeom prst="rect">
-            <a:avLst/>
-          </a:prstGeom>
-          <a:noFill/>
-        </p:spPr>
-        <p:txBody>
-          <a:bodyPr wrap="square" lIns="76200" rIns="76200" tIns="50800" bIns="50800">
-            <a:spAutoFit/>
-          </a:bodyPr>
-          <a:lstStyle/>
-          <a:p>
-            <a:pPr algn="l">
-              <a:spcAft>
-                <a:spcPts val="300"/>
-              </a:spcAft>
-              <a:defRPr sz="3200">
-                <a:solidFill>
-                  <a:srgbClr val="000000"/>
-                </a:solidFill>
-                <a:latin typeface="Play"/>
-                <a:ea typeface="Play"/>
-                <a:cs typeface="Play"/>
-              </a:defRPr>
-            </a:pPr>
-            <a:r>
-              <a:rPr sz="3200">
-                <a:solidFill>
-                  <a:srgbClr val="000000"/>
-                </a:solidFill>
-                <a:latin typeface="Play"/>
-                <a:ea typeface="Play"/>
-                <a:cs typeface="Play"/>
-              </a:rPr>
-              <a:t>• Модель gpt-oss-20b, инференс 1400 руб за 6 недель</a:t>
-            </a:r>
-          </a:p>
-          <a:p>
-            <a:pPr algn="l">
-              <a:spcAft>
-                <a:spcPts val="300"/>
-              </a:spcAft>
-              <a:defRPr sz="3200">
-                <a:solidFill>
-                  <a:srgbClr val="000000"/>
-                </a:solidFill>
-                <a:latin typeface="Play"/>
-                <a:ea typeface="Play"/>
-                <a:cs typeface="Play"/>
-              </a:defRPr>
-            </a:pPr>
-            <a:r>
-              <a:rPr sz="3200">
-                <a:solidFill>
-                  <a:srgbClr val="000000"/>
-                </a:solidFill>
-                <a:latin typeface="Play"/>
-                <a:ea typeface="Play"/>
-                <a:cs typeface="Play"/>
-              </a:rPr>
-              <a:t>• Параллельность до 20 задач без очереди</a:t>
-            </a:r>
-          </a:p>
-        </p:txBody>
-      </p:sp>
-    </p:spTree>
-  </p:cSld>
-  <p:clrMapOvr>
-    <a:masterClrMapping/>
-  </p:clrMapOvr>
-</p:sld>
-</file>
-
-<file path=ppt/slides/slide61.xml><?xml version="1.0" encoding="utf-8"?>
 <p:sld xmlns:a="http://schemas.openxmlformats.org/drawingml/2006/main" xmlns:p="http://schemas.openxmlformats.org/presentationml/2006/main" xmlns:r="http://schemas.openxmlformats.org/officeDocument/2006/relationships">
   <p:cSld>
     <p:spTree>
@@ -8759,7 +7642,7 @@
         <p:spPr>
           <a:xfrm>
             <a:off x="677387" y="692177"/>
-            <a:ext cx="10855878" cy="1447800"/>
+            <a:ext cx="10855878" cy="822960"/>
           </a:xfrm>
           <a:prstGeom prst="rect">
             <a:avLst/>
@@ -8794,107 +7677,21 @@
                 <a:ea typeface="Arial"/>
                 <a:cs typeface="Arial"/>
               </a:rPr>
-              <a:t>Пилотный план: 6 недель, 2 команды, 68 колод</a:t>
+              <a:t>Контекст и возможность</a:t>
             </a:r>
           </a:p>
         </p:txBody>
       </p:sp>
       <p:sp>
         <p:nvSpPr>
-          <p:cNvPr id="988" name="Rectangle 987"/>
-          <p:cNvSpPr/>
-          <p:nvPr/>
-        </p:nvSpPr>
-        <p:spPr>
-          <a:xfrm>
-            <a:off x="677387" y="3859031"/>
-            <a:ext cx="10855878" cy="17445"/>
-          </a:xfrm>
-          <a:prstGeom prst="rect">
-            <a:avLst/>
-          </a:prstGeom>
-          <a:solidFill>
-            <a:srgbClr val="0077FF"/>
-          </a:solidFill>
-          <a:ln>
-            <a:noFill/>
-          </a:ln>
-        </p:spPr>
-        <p:style>
-          <a:lnRef idx="1">
-            <a:schemeClr val="accent1"/>
-          </a:lnRef>
-          <a:fillRef idx="3">
-            <a:schemeClr val="accent1"/>
-          </a:fillRef>
-          <a:effectRef idx="2">
-            <a:schemeClr val="accent1"/>
-          </a:effectRef>
-          <a:fontRef idx="minor">
-            <a:schemeClr val="lt1"/>
-          </a:fontRef>
-        </p:style>
-        <p:txBody>
-          <a:bodyPr rtlCol="0" anchor="ctr"/>
-          <a:lstStyle/>
-          <a:p>
-            <a:pPr algn="ctr"/>
-          </a:p>
-        </p:txBody>
-      </p:sp>
-      <p:sp>
-        <p:nvSpPr>
-          <p:cNvPr id="989" name="Oval 988"/>
-          <p:cNvSpPr/>
-          <p:nvPr/>
-        </p:nvSpPr>
-        <p:spPr>
-          <a:xfrm>
-            <a:off x="2422733" y="3803787"/>
-            <a:ext cx="127933" cy="127933"/>
-          </a:xfrm>
-          <a:prstGeom prst="ellipse">
-            <a:avLst/>
-          </a:prstGeom>
-          <a:solidFill>
-            <a:srgbClr val="0077FF"/>
-          </a:solidFill>
-          <a:ln>
-            <a:noFill/>
-          </a:ln>
-        </p:spPr>
-        <p:style>
-          <a:lnRef idx="1">
-            <a:schemeClr val="accent1"/>
-          </a:lnRef>
-          <a:fillRef idx="3">
-            <a:schemeClr val="accent1"/>
-          </a:fillRef>
-          <a:effectRef idx="2">
-            <a:schemeClr val="accent1"/>
-          </a:effectRef>
-          <a:fontRef idx="minor">
-            <a:schemeClr val="lt1"/>
-          </a:fontRef>
-        </p:style>
-        <p:txBody>
-          <a:bodyPr rtlCol="0" anchor="ctr"/>
-          <a:lstStyle/>
-          <a:p>
-            <a:pPr algn="ctr"/>
-          </a:p>
-        </p:txBody>
-      </p:sp>
-      <p:sp>
-        <p:nvSpPr>
-          <p:cNvPr id="990" name="TextBox 989"/>
+          <p:cNvPr id="988" name="lead"/>
           <p:cNvSpPr txBox="1"/>
           <p:nvPr/>
         </p:nvSpPr>
         <p:spPr>
           <a:xfrm>
-            <a:off x="677387" y="3591534"/>
-            <a:ext cx="5427939" cy="220976"/>
+            <a:off x="677387" y="2200937"/>
+            <a:ext cx="10855878" cy="509172"/>
           </a:xfrm>
           <a:prstGeom prst="rect">
             <a:avLst/>
@@ -8902,13 +7699,16 @@
           <a:noFill/>
         </p:spPr>
         <p:txBody>
-          <a:bodyPr wrap="square" lIns="12700" rIns="12700" tIns="12700" bIns="12700">
+          <a:bodyPr wrap="square" lIns="76200" rIns="76200" tIns="50800" bIns="50800">
             <a:spAutoFit/>
           </a:bodyPr>
           <a:lstStyle/>
           <a:p>
             <a:pPr algn="ctr">
-              <a:defRPr sz="1400" b="0">
+              <a:spcAft>
+                <a:spcPts val="300"/>
+              </a:spcAft>
+              <a:defRPr sz="1800">
                 <a:solidFill>
                   <a:srgbClr val="000000"/>
                 </a:solidFill>
@@ -8918,7 +7718,7 @@
               </a:defRPr>
             </a:pPr>
             <a:r>
-              <a:rPr sz="1400" b="0">
+              <a:rPr sz="1800">
                 <a:solidFill>
                   <a:srgbClr val="000000"/>
                 </a:solidFill>
@@ -8926,199 +7726,21 @@
                 <a:ea typeface="Play"/>
                 <a:cs typeface="Play"/>
               </a:rPr>
-              <a:t>Третий квартал 2026</a:t>
+              <a:t>Отделы собирают презентации вручную, затрачивая 186 минут на 12-слайдовую колоду</a:t>
             </a:r>
           </a:p>
         </p:txBody>
       </p:sp>
       <p:sp>
         <p:nvSpPr>
-          <p:cNvPr id="991" name="Oval 990"/>
-          <p:cNvSpPr/>
-          <p:nvPr/>
-        </p:nvSpPr>
-        <p:spPr>
-          <a:xfrm>
-            <a:off x="6041359" y="3803787"/>
-            <a:ext cx="127933" cy="127933"/>
-          </a:xfrm>
-          <a:prstGeom prst="ellipse">
-            <a:avLst/>
-          </a:prstGeom>
-          <a:solidFill>
-            <a:srgbClr val="0077FF"/>
-          </a:solidFill>
-          <a:ln>
-            <a:noFill/>
-          </a:ln>
-        </p:spPr>
-        <p:style>
-          <a:lnRef idx="1">
-            <a:schemeClr val="accent1"/>
-          </a:lnRef>
-          <a:fillRef idx="3">
-            <a:schemeClr val="accent1"/>
-          </a:fillRef>
-          <a:effectRef idx="2">
-            <a:schemeClr val="accent1"/>
-          </a:effectRef>
-          <a:fontRef idx="minor">
-            <a:schemeClr val="lt1"/>
-          </a:fontRef>
-        </p:style>
-        <p:txBody>
-          <a:bodyPr rtlCol="0" anchor="ctr"/>
-          <a:lstStyle/>
-          <a:p>
-            <a:pPr algn="ctr"/>
-          </a:p>
-        </p:txBody>
-      </p:sp>
-      <p:sp>
-        <p:nvSpPr>
-          <p:cNvPr id="992" name="TextBox 991"/>
+          <p:cNvPr id="989" name="body"/>
           <p:cNvSpPr txBox="1"/>
           <p:nvPr/>
         </p:nvSpPr>
         <p:spPr>
           <a:xfrm>
-            <a:off x="3391356" y="3986965"/>
-            <a:ext cx="5427939" cy="220976"/>
-          </a:xfrm>
-          <a:prstGeom prst="rect">
-            <a:avLst/>
-          </a:prstGeom>
-          <a:noFill/>
-        </p:spPr>
-        <p:txBody>
-          <a:bodyPr wrap="square" lIns="12700" rIns="12700" tIns="12700" bIns="12700">
-            <a:spAutoFit/>
-          </a:bodyPr>
-          <a:lstStyle/>
-          <a:p>
-            <a:pPr algn="ctr">
-              <a:defRPr sz="1400" b="0">
-                <a:solidFill>
-                  <a:srgbClr val="000000"/>
-                </a:solidFill>
-                <a:latin typeface="Play"/>
-                <a:ea typeface="Play"/>
-                <a:cs typeface="Play"/>
-              </a:defRPr>
-            </a:pPr>
-            <a:r>
-              <a:rPr sz="1400" b="0">
-                <a:solidFill>
-                  <a:srgbClr val="000000"/>
-                </a:solidFill>
-                <a:latin typeface="Play"/>
-                <a:ea typeface="Play"/>
-                <a:cs typeface="Play"/>
-              </a:rPr>
-              <a:t>Четвёртый квартал 2026</a:t>
-            </a:r>
-          </a:p>
-        </p:txBody>
-      </p:sp>
-      <p:sp>
-        <p:nvSpPr>
-          <p:cNvPr id="993" name="Oval 992"/>
-          <p:cNvSpPr/>
-          <p:nvPr/>
-        </p:nvSpPr>
-        <p:spPr>
-          <a:xfrm>
-            <a:off x="9659985" y="3803787"/>
-            <a:ext cx="127933" cy="127933"/>
-          </a:xfrm>
-          <a:prstGeom prst="ellipse">
-            <a:avLst/>
-          </a:prstGeom>
-          <a:solidFill>
-            <a:srgbClr val="0077FF"/>
-          </a:solidFill>
-          <a:ln>
-            <a:noFill/>
-          </a:ln>
-        </p:spPr>
-        <p:style>
-          <a:lnRef idx="1">
-            <a:schemeClr val="accent1"/>
-          </a:lnRef>
-          <a:fillRef idx="3">
-            <a:schemeClr val="accent1"/>
-          </a:fillRef>
-          <a:effectRef idx="2">
-            <a:schemeClr val="accent1"/>
-          </a:effectRef>
-          <a:fontRef idx="minor">
-            <a:schemeClr val="lt1"/>
-          </a:fontRef>
-        </p:style>
-        <p:txBody>
-          <a:bodyPr rtlCol="0" anchor="ctr"/>
-          <a:lstStyle/>
-          <a:p>
-            <a:pPr algn="ctr"/>
-          </a:p>
-        </p:txBody>
-      </p:sp>
-      <p:sp>
-        <p:nvSpPr>
-          <p:cNvPr id="994" name="TextBox 993"/>
-          <p:cNvSpPr txBox="1"/>
-          <p:nvPr/>
-        </p:nvSpPr>
-        <p:spPr>
-          <a:xfrm>
-            <a:off x="6105326" y="3591534"/>
-            <a:ext cx="5427939" cy="220976"/>
-          </a:xfrm>
-          <a:prstGeom prst="rect">
-            <a:avLst/>
-          </a:prstGeom>
-          <a:noFill/>
-        </p:spPr>
-        <p:txBody>
-          <a:bodyPr wrap="square" lIns="12700" rIns="12700" tIns="12700" bIns="12700">
-            <a:spAutoFit/>
-          </a:bodyPr>
-          <a:lstStyle/>
-          <a:p>
-            <a:pPr algn="ctr">
-              <a:defRPr sz="1400" b="0">
-                <a:solidFill>
-                  <a:srgbClr val="000000"/>
-                </a:solidFill>
-                <a:latin typeface="Play"/>
-                <a:ea typeface="Play"/>
-                <a:cs typeface="Play"/>
-              </a:defRPr>
-            </a:pPr>
-            <a:r>
-              <a:rPr sz="1400" b="0">
-                <a:solidFill>
-                  <a:srgbClr val="000000"/>
-                </a:solidFill>
-                <a:latin typeface="Play"/>
-                <a:ea typeface="Play"/>
-                <a:cs typeface="Play"/>
-              </a:rPr>
-              <a:t>Первый квартал 2027</a:t>
-            </a:r>
-          </a:p>
-        </p:txBody>
-      </p:sp>
-      <p:sp>
-        <p:nvSpPr>
-          <p:cNvPr id="995" name="body"/>
-          <p:cNvSpPr txBox="1"/>
-          <p:nvPr/>
-        </p:nvSpPr>
-        <p:spPr>
-          <a:xfrm>
-            <a:off x="677387" y="4173051"/>
-            <a:ext cx="10855878" cy="673428"/>
+            <a:off x="677387" y="2710110"/>
+            <a:ext cx="10855878" cy="881424"/>
           </a:xfrm>
           <a:prstGeom prst="rect">
             <a:avLst/>
@@ -9153,7 +7775,7 @@
                 <a:ea typeface="Play"/>
                 <a:cs typeface="Play"/>
               </a:rPr>
-              <a:t>• Пилот 6 недель, 2 команды, 68 презентаций</a:t>
+              <a:t>• После ревью дизайнеров добавляется 74 минуты правок</a:t>
             </a:r>
           </a:p>
           <a:p>
@@ -9179,7 +7801,7 @@
                 <a:ea typeface="Play"/>
                 <a:cs typeface="Play"/>
               </a:rPr>
-              <a:t>• Дизайнеры закрыли 38 запросов вместо 11</a:t>
+              <a:t>• 19 из 42 колод нарушают фирменный стиль: чужие гарнитуры и цвета</a:t>
             </a:r>
           </a:p>
           <a:p>
@@ -9205,7 +7827,33 @@
                 <a:ea typeface="Play"/>
                 <a:cs typeface="Play"/>
               </a:rPr>
-              <a:t>• План расширения: 4 команды в 3-м квартале</a:t>
+              <a:t>• Дизайнеры закрывают 11 запросов в неделю из 27 поступающих, ожидание 6 дней</a:t>
+            </a:r>
+          </a:p>
+          <a:p>
+            <a:pPr algn="l">
+              <a:spcAft>
+                <a:spcPts val="300"/>
+              </a:spcAft>
+              <a:defRPr sz="1200">
+                <a:solidFill>
+                  <a:srgbClr val="000000"/>
+                </a:solidFill>
+                <a:latin typeface="Play"/>
+                <a:ea typeface="Play"/>
+                <a:cs typeface="Play"/>
+              </a:defRPr>
+            </a:pPr>
+            <a:r>
+              <a:rPr sz="1200">
+                <a:solidFill>
+                  <a:srgbClr val="000000"/>
+                </a:solidFill>
+                <a:latin typeface="Play"/>
+                <a:ea typeface="Play"/>
+                <a:cs typeface="Play"/>
+              </a:rPr>
+              <a:t>• Время до первой версии колоды составляет 6 рабочих дней</a:t>
             </a:r>
           </a:p>
         </p:txBody>
@@ -9218,262 +7866,7 @@
 </p:sld>
 </file>
 
-<file path=ppt/slides/slide62.xml><?xml version="1.0" encoding="utf-8"?>
-<p:sld xmlns:a="http://schemas.openxmlformats.org/drawingml/2006/main" xmlns:p="http://schemas.openxmlformats.org/presentationml/2006/main" xmlns:r="http://schemas.openxmlformats.org/officeDocument/2006/relationships">
-  <p:cSld>
-    <p:bg>
-      <p:bgPr>
-        <a:solidFill>
-          <a:schemeClr val="lt2"/>
-        </a:solidFill>
-      </p:bgPr>
-    </p:bg>
-    <p:spTree>
-      <p:nvGrpSpPr>
-        <p:cNvPr id="1" name=""/>
-        <p:cNvGrpSpPr/>
-        <p:nvPr/>
-      </p:nvGrpSpPr>
-      <p:grpSpPr/>
-      <p:sp>
-        <p:nvSpPr>
-          <p:cNvPr id="764" name="Google Shape;764;p58"/>
-          <p:cNvSpPr txBox="1"/>
-          <p:nvPr/>
-        </p:nvSpPr>
-        <p:spPr>
-          <a:xfrm>
-            <a:off x="18692059" y="4674436"/>
-            <a:ext cx="4304330" cy="678198"/>
-          </a:xfrm>
-          <a:prstGeom prst="rect">
-            <a:avLst/>
-          </a:prstGeom>
-          <a:noFill/>
-          <a:ln>
-            <a:noFill/>
-          </a:ln>
-        </p:spPr>
-        <p:txBody>
-          <a:bodyPr anchorCtr="0" anchor="t" bIns="45700" lIns="91425" spcFirstLastPara="1" rIns="91425" wrap="square" tIns="45700">
-            <a:noAutofit/>
-          </a:bodyPr>
-          <a:lstStyle/>
-          <a:p>
-            <a:pPr indent="0" lvl="0" marL="0" marR="0" rtl="0" algn="l">
-              <a:lnSpc>
-                <a:spcPct val="110000"/>
-              </a:lnSpc>
-              <a:spcBef>
-                <a:spcPts val="0"/>
-              </a:spcBef>
-              <a:spcAft>
-                <a:spcPts val="0"/>
-              </a:spcAft>
-              <a:buClr>
-                <a:schemeClr val="dk1"/>
-              </a:buClr>
-              <a:buSzPts val="1600"/>
-              <a:buFont typeface="Arial"/>
-              <a:buNone/>
-            </a:pPr>
-            <a:r>
-              <a:t/>
-            </a:r>
-            <a:endParaRPr sz="1600">
-              <a:solidFill>
-                <a:schemeClr val="dk1"/>
-              </a:solidFill>
-              <a:latin typeface="Arial"/>
-              <a:ea typeface="Arial"/>
-              <a:cs typeface="Arial"/>
-              <a:sym typeface="Arial"/>
-            </a:endParaRPr>
-          </a:p>
-        </p:txBody>
-      </p:sp>
-      <p:sp>
-        <p:nvSpPr>
-          <p:cNvPr id="765" name="title"/>
-          <p:cNvSpPr txBox="1"/>
-          <p:nvPr/>
-        </p:nvSpPr>
-        <p:spPr>
-          <a:xfrm>
-            <a:off x="677387" y="692177"/>
-            <a:ext cx="10855878" cy="1447800"/>
-          </a:xfrm>
-          <a:prstGeom prst="rect">
-            <a:avLst/>
-          </a:prstGeom>
-          <a:noFill/>
-        </p:spPr>
-        <p:txBody>
-          <a:bodyPr wrap="square" lIns="76200" rIns="76200" tIns="50800" bIns="50800">
-            <a:spAutoFit/>
-          </a:bodyPr>
-          <a:lstStyle/>
-          <a:p>
-            <a:pPr algn="l">
-              <a:spcAft>
-                <a:spcPts val="300"/>
-              </a:spcAft>
-              <a:defRPr sz="4000">
-                <a:solidFill>
-                  <a:srgbClr val="000000"/>
-                </a:solidFill>
-                <a:latin typeface="Arial"/>
-                <a:ea typeface="Arial"/>
-                <a:cs typeface="Arial"/>
-              </a:defRPr>
-            </a:pPr>
-            <a:r>
-              <a:rPr sz="4000">
-                <a:solidFill>
-                  <a:srgbClr val="000000"/>
-                </a:solidFill>
-                <a:latin typeface="Arial"/>
-                <a:ea typeface="Arial"/>
-                <a:cs typeface="Arial"/>
-              </a:rPr>
-              <a:t>Запрос к руководству: одобрение и интеграцию</a:t>
-            </a:r>
-          </a:p>
-        </p:txBody>
-      </p:sp>
-      <p:sp>
-        <p:nvSpPr>
-          <p:cNvPr id="766" name="lead"/>
-          <p:cNvSpPr txBox="1"/>
-          <p:nvPr/>
-        </p:nvSpPr>
-        <p:spPr>
-          <a:xfrm>
-            <a:off x="677387" y="2825777"/>
-            <a:ext cx="10855878" cy="1506256"/>
-          </a:xfrm>
-          <a:prstGeom prst="rect">
-            <a:avLst/>
-          </a:prstGeom>
-          <a:noFill/>
-        </p:spPr>
-        <p:txBody>
-          <a:bodyPr wrap="square" lIns="76200" rIns="76200" tIns="50800" bIns="50800">
-            <a:spAutoFit/>
-          </a:bodyPr>
-          <a:lstStyle/>
-          <a:p>
-            <a:pPr algn="l">
-              <a:spcAft>
-                <a:spcPts val="300"/>
-              </a:spcAft>
-              <a:defRPr sz="4800">
-                <a:solidFill>
-                  <a:srgbClr val="000000"/>
-                </a:solidFill>
-                <a:latin typeface="Play"/>
-                <a:ea typeface="Play"/>
-                <a:cs typeface="Play"/>
-              </a:defRPr>
-            </a:pPr>
-            <a:r>
-              <a:rPr sz="4800">
-                <a:solidFill>
-                  <a:srgbClr val="000000"/>
-                </a:solidFill>
-                <a:latin typeface="Play"/>
-                <a:ea typeface="Play"/>
-                <a:cs typeface="Play"/>
-              </a:rPr>
-              <a:t>Одобрить запуск на всю компанию</a:t>
-            </a:r>
-          </a:p>
-        </p:txBody>
-      </p:sp>
-      <p:sp>
-        <p:nvSpPr>
-          <p:cNvPr id="767" name="body"/>
-          <p:cNvSpPr txBox="1"/>
-          <p:nvPr/>
-        </p:nvSpPr>
-        <p:spPr>
-          <a:xfrm>
-            <a:off x="677387" y="4542209"/>
-            <a:ext cx="10855878" cy="1786490"/>
-          </a:xfrm>
-          <a:prstGeom prst="rect">
-            <a:avLst/>
-          </a:prstGeom>
-          <a:noFill/>
-        </p:spPr>
-        <p:txBody>
-          <a:bodyPr wrap="square" lIns="76200" rIns="76200" tIns="50800" bIns="50800">
-            <a:spAutoFit/>
-          </a:bodyPr>
-          <a:lstStyle/>
-          <a:p>
-            <a:pPr algn="l">
-              <a:spcAft>
-                <a:spcPts val="300"/>
-              </a:spcAft>
-              <a:defRPr sz="3200">
-                <a:solidFill>
-                  <a:srgbClr val="000000"/>
-                </a:solidFill>
-                <a:latin typeface="Play"/>
-                <a:ea typeface="Play"/>
-                <a:cs typeface="Play"/>
-              </a:defRPr>
-            </a:pPr>
-            <a:r>
-              <a:rPr sz="3200">
-                <a:solidFill>
-                  <a:srgbClr val="000000"/>
-                </a:solidFill>
-                <a:latin typeface="Play"/>
-                <a:ea typeface="Play"/>
-                <a:cs typeface="Play"/>
-              </a:rPr>
-              <a:t>• Интеграцию с хранилищем документов</a:t>
-            </a:r>
-          </a:p>
-          <a:p>
-            <a:pPr algn="l">
-              <a:spcAft>
-                <a:spcPts val="300"/>
-              </a:spcAft>
-              <a:defRPr sz="3200">
-                <a:solidFill>
-                  <a:srgbClr val="000000"/>
-                </a:solidFill>
-                <a:latin typeface="Play"/>
-                <a:ea typeface="Play"/>
-                <a:cs typeface="Play"/>
-              </a:defRPr>
-            </a:pPr>
-            <a:r>
-              <a:rPr sz="3200">
-                <a:solidFill>
-                  <a:srgbClr val="000000"/>
-                </a:solidFill>
-                <a:latin typeface="Play"/>
-                <a:ea typeface="Play"/>
-                <a:cs typeface="Play"/>
-              </a:rPr>
-              <a:t>• Финансирование дальнейшего развития</a:t>
-            </a:r>
-          </a:p>
-        </p:txBody>
-      </p:sp>
-    </p:spTree>
-  </p:cSld>
-  <p:clrMapOvr>
-    <a:masterClrMapping/>
-  </p:clrMapOvr>
-</p:sld>
-</file>
-
-<file path=ppt/slides/slide63.xml><?xml version="1.0" encoding="utf-8"?>
+<file path=ppt/slides/slide58.xml><?xml version="1.0" encoding="utf-8"?>
 <p:sld xmlns:a="http://schemas.openxmlformats.org/drawingml/2006/main" xmlns:p="http://schemas.openxmlformats.org/presentationml/2006/main" xmlns:r="http://schemas.openxmlformats.org/officeDocument/2006/relationships">
   <p:cSld>
     <p:bg>
@@ -9499,7 +7892,7 @@
         <p:spPr>
           <a:xfrm>
             <a:off x="677387" y="692177"/>
-            <a:ext cx="10855878" cy="1447800"/>
+            <a:ext cx="10855878" cy="822960"/>
           </a:xfrm>
           <a:prstGeom prst="rect">
             <a:avLst/>
@@ -9534,64 +7927,336 @@
                 <a:ea typeface="Arial"/>
                 <a:cs typeface="Arial"/>
               </a:rPr>
-              <a:t>Текущее время сборки: 186 мин + 74 мин правок</a:t>
+              <a:t>Предложение</a:t>
             </a:r>
           </a:p>
         </p:txBody>
       </p:sp>
-      <p:graphicFrame>
-        <p:nvGraphicFramePr>
-          <p:cNvPr id="3" name="Chart 2"/>
-          <p:cNvGraphicFramePr>
-            <a:graphicFrameLocks noGrp="1"/>
-          </p:cNvGraphicFramePr>
-          <p:nvPr/>
-        </p:nvGraphicFramePr>
-        <p:xfrm>
-          <a:off x="677387" y="2277137"/>
-          <a:ext cx="10855878" cy="3923659"/>
-        </p:xfrm>
-        <a:graphic>
-          <a:graphicData uri="http://schemas.openxmlformats.org/drawingml/2006/chart">
-            <c:chart xmlns:c="http://schemas.openxmlformats.org/drawingml/2006/chart" r:id="rId2"/>
-          </a:graphicData>
-        </a:graphic>
-      </p:graphicFrame>
-    </p:spTree>
-  </p:cSld>
-  <p:clrMapOvr>
-    <a:masterClrMapping/>
-  </p:clrMapOvr>
-</p:sld>
-</file>
-
-<file path=ppt/slides/slide64.xml><?xml version="1.0" encoding="utf-8"?>
-<p:sld xmlns:a="http://schemas.openxmlformats.org/drawingml/2006/main" xmlns:p="http://schemas.openxmlformats.org/presentationml/2006/main" xmlns:r="http://schemas.openxmlformats.org/officeDocument/2006/relationships">
-  <p:cSld>
-    <p:bg>
-      <p:bgPr>
-        <a:solidFill>
-          <a:schemeClr val="lt2"/>
-        </a:solidFill>
-      </p:bgPr>
-    </p:bg>
-    <p:spTree>
-      <p:nvGrpSpPr>
-        <p:cNvPr id="1" name=""/>
-        <p:cNvGrpSpPr/>
-        <p:nvPr/>
-      </p:nvGrpSpPr>
-      <p:grpSpPr/>
       <p:sp>
         <p:nvSpPr>
-          <p:cNvPr id="2" name="title"/>
+          <p:cNvPr id="3" name="Pentagon 2"/>
+          <p:cNvSpPr/>
+          <p:nvPr/>
+        </p:nvSpPr>
+        <p:spPr>
+          <a:xfrm>
+            <a:off x="677387" y="2391838"/>
+            <a:ext cx="2066959" cy="1281514"/>
+          </a:xfrm>
+          <a:prstGeom prst="homePlate">
+            <a:avLst/>
+          </a:prstGeom>
+          <a:solidFill>
+            <a:srgbClr val="0077FF"/>
+          </a:solidFill>
+          <a:ln>
+            <a:noFill/>
+          </a:ln>
+        </p:spPr>
+        <p:style>
+          <a:lnRef idx="1">
+            <a:schemeClr val="accent1"/>
+          </a:lnRef>
+          <a:fillRef idx="3">
+            <a:schemeClr val="accent1"/>
+          </a:fillRef>
+          <a:effectRef idx="2">
+            <a:schemeClr val="accent1"/>
+          </a:effectRef>
+          <a:fontRef idx="minor">
+            <a:schemeClr val="lt1"/>
+          </a:fontRef>
+        </p:style>
+        <p:txBody>
+          <a:bodyPr rtlCol="0" anchor="ctr" wrap="square" lIns="12700" rIns="12700" tIns="12700" bIns="12700"/>
+          <a:lstStyle/>
+          <a:p>
+            <a:pPr algn="ctr">
+              <a:defRPr sz="1096" b="0">
+                <a:solidFill>
+                  <a:srgbClr val="FFFFFF"/>
+                </a:solidFill>
+                <a:latin typeface="Play"/>
+                <a:ea typeface="Play"/>
+                <a:cs typeface="Play"/>
+              </a:defRPr>
+            </a:pPr>
+            <a:r>
+              <a:rPr sz="1096" b="0">
+                <a:solidFill>
+                  <a:srgbClr val="FFFFFF"/>
+                </a:solidFill>
+                <a:latin typeface="Play"/>
+                <a:ea typeface="Play"/>
+                <a:cs typeface="Play"/>
+              </a:rPr>
+              <a:t>Шаблон</a:t>
+            </a:r>
+          </a:p>
+        </p:txBody>
+      </p:sp>
+      <p:sp>
+        <p:nvSpPr>
+          <p:cNvPr id="4" name="Chevron 3"/>
+          <p:cNvSpPr/>
+          <p:nvPr/>
+        </p:nvSpPr>
+        <p:spPr>
+          <a:xfrm>
+            <a:off x="2874616" y="2391838"/>
+            <a:ext cx="2066959" cy="1281514"/>
+          </a:xfrm>
+          <a:prstGeom prst="chevron">
+            <a:avLst/>
+          </a:prstGeom>
+          <a:solidFill>
+            <a:srgbClr val="0077FF"/>
+          </a:solidFill>
+          <a:ln>
+            <a:noFill/>
+          </a:ln>
+        </p:spPr>
+        <p:style>
+          <a:lnRef idx="1">
+            <a:schemeClr val="accent1"/>
+          </a:lnRef>
+          <a:fillRef idx="3">
+            <a:schemeClr val="accent1"/>
+          </a:fillRef>
+          <a:effectRef idx="2">
+            <a:schemeClr val="accent1"/>
+          </a:effectRef>
+          <a:fontRef idx="minor">
+            <a:schemeClr val="lt1"/>
+          </a:fontRef>
+        </p:style>
+        <p:txBody>
+          <a:bodyPr rtlCol="0" anchor="ctr" wrap="square" lIns="12700" rIns="12700" tIns="12700" bIns="12700"/>
+          <a:lstStyle/>
+          <a:p>
+            <a:pPr algn="ctr">
+              <a:defRPr sz="1096" b="0">
+                <a:solidFill>
+                  <a:srgbClr val="FFFFFF"/>
+                </a:solidFill>
+                <a:latin typeface="Play"/>
+                <a:ea typeface="Play"/>
+                <a:cs typeface="Play"/>
+              </a:defRPr>
+            </a:pPr>
+            <a:r>
+              <a:rPr sz="1096" b="0">
+                <a:solidFill>
+                  <a:srgbClr val="FFFFFF"/>
+                </a:solidFill>
+                <a:latin typeface="Play"/>
+                <a:ea typeface="Play"/>
+                <a:cs typeface="Play"/>
+              </a:rPr>
+              <a:t>План</a:t>
+            </a:r>
+          </a:p>
+        </p:txBody>
+      </p:sp>
+      <p:sp>
+        <p:nvSpPr>
+          <p:cNvPr id="5" name="Chevron 4"/>
+          <p:cNvSpPr/>
+          <p:nvPr/>
+        </p:nvSpPr>
+        <p:spPr>
+          <a:xfrm>
+            <a:off x="5071846" y="2391838"/>
+            <a:ext cx="2066959" cy="1281514"/>
+          </a:xfrm>
+          <a:prstGeom prst="chevron">
+            <a:avLst/>
+          </a:prstGeom>
+          <a:solidFill>
+            <a:srgbClr val="0077FF"/>
+          </a:solidFill>
+          <a:ln>
+            <a:noFill/>
+          </a:ln>
+        </p:spPr>
+        <p:style>
+          <a:lnRef idx="1">
+            <a:schemeClr val="accent1"/>
+          </a:lnRef>
+          <a:fillRef idx="3">
+            <a:schemeClr val="accent1"/>
+          </a:fillRef>
+          <a:effectRef idx="2">
+            <a:schemeClr val="accent1"/>
+          </a:effectRef>
+          <a:fontRef idx="minor">
+            <a:schemeClr val="lt1"/>
+          </a:fontRef>
+        </p:style>
+        <p:txBody>
+          <a:bodyPr rtlCol="0" anchor="ctr" wrap="square" lIns="12700" rIns="12700" tIns="12700" bIns="12700"/>
+          <a:lstStyle/>
+          <a:p>
+            <a:pPr algn="ctr">
+              <a:defRPr sz="1096" b="0">
+                <a:solidFill>
+                  <a:srgbClr val="FFFFFF"/>
+                </a:solidFill>
+                <a:latin typeface="Play"/>
+                <a:ea typeface="Play"/>
+                <a:cs typeface="Play"/>
+              </a:defRPr>
+            </a:pPr>
+            <a:r>
+              <a:rPr sz="1096" b="0">
+                <a:solidFill>
+                  <a:srgbClr val="FFFFFF"/>
+                </a:solidFill>
+                <a:latin typeface="Play"/>
+                <a:ea typeface="Play"/>
+                <a:cs typeface="Play"/>
+              </a:rPr>
+              <a:t>Вёрстка</a:t>
+            </a:r>
+          </a:p>
+        </p:txBody>
+      </p:sp>
+      <p:sp>
+        <p:nvSpPr>
+          <p:cNvPr id="6" name="Chevron 5"/>
+          <p:cNvSpPr/>
+          <p:nvPr/>
+        </p:nvSpPr>
+        <p:spPr>
+          <a:xfrm>
+            <a:off x="7269076" y="2391838"/>
+            <a:ext cx="2066959" cy="1281514"/>
+          </a:xfrm>
+          <a:prstGeom prst="chevron">
+            <a:avLst/>
+          </a:prstGeom>
+          <a:solidFill>
+            <a:srgbClr val="0077FF"/>
+          </a:solidFill>
+          <a:ln>
+            <a:noFill/>
+          </a:ln>
+        </p:spPr>
+        <p:style>
+          <a:lnRef idx="1">
+            <a:schemeClr val="accent1"/>
+          </a:lnRef>
+          <a:fillRef idx="3">
+            <a:schemeClr val="accent1"/>
+          </a:fillRef>
+          <a:effectRef idx="2">
+            <a:schemeClr val="accent1"/>
+          </a:effectRef>
+          <a:fontRef idx="minor">
+            <a:schemeClr val="lt1"/>
+          </a:fontRef>
+        </p:style>
+        <p:txBody>
+          <a:bodyPr rtlCol="0" anchor="ctr" wrap="square" lIns="12700" rIns="12700" tIns="12700" bIns="12700"/>
+          <a:lstStyle/>
+          <a:p>
+            <a:pPr algn="ctr">
+              <a:defRPr sz="1096" b="0">
+                <a:solidFill>
+                  <a:srgbClr val="FFFFFF"/>
+                </a:solidFill>
+                <a:latin typeface="Play"/>
+                <a:ea typeface="Play"/>
+                <a:cs typeface="Play"/>
+              </a:defRPr>
+            </a:pPr>
+            <a:r>
+              <a:rPr sz="1096" b="0">
+                <a:solidFill>
+                  <a:srgbClr val="FFFFFF"/>
+                </a:solidFill>
+                <a:latin typeface="Play"/>
+                <a:ea typeface="Play"/>
+                <a:cs typeface="Play"/>
+              </a:rPr>
+              <a:t>Аудит</a:t>
+            </a:r>
+          </a:p>
+        </p:txBody>
+      </p:sp>
+      <p:sp>
+        <p:nvSpPr>
+          <p:cNvPr id="7" name="Chevron 6"/>
+          <p:cNvSpPr/>
+          <p:nvPr/>
+        </p:nvSpPr>
+        <p:spPr>
+          <a:xfrm>
+            <a:off x="9466305" y="2391838"/>
+            <a:ext cx="2066959" cy="1281514"/>
+          </a:xfrm>
+          <a:prstGeom prst="chevron">
+            <a:avLst/>
+          </a:prstGeom>
+          <a:solidFill>
+            <a:srgbClr val="0077FF"/>
+          </a:solidFill>
+          <a:ln>
+            <a:noFill/>
+          </a:ln>
+        </p:spPr>
+        <p:style>
+          <a:lnRef idx="1">
+            <a:schemeClr val="accent1"/>
+          </a:lnRef>
+          <a:fillRef idx="3">
+            <a:schemeClr val="accent1"/>
+          </a:fillRef>
+          <a:effectRef idx="2">
+            <a:schemeClr val="accent1"/>
+          </a:effectRef>
+          <a:fontRef idx="minor">
+            <a:schemeClr val="lt1"/>
+          </a:fontRef>
+        </p:style>
+        <p:txBody>
+          <a:bodyPr rtlCol="0" anchor="ctr" wrap="square" lIns="12700" rIns="12700" tIns="12700" bIns="12700"/>
+          <a:lstStyle/>
+          <a:p>
+            <a:pPr algn="ctr">
+              <a:defRPr sz="1096" b="0">
+                <a:solidFill>
+                  <a:srgbClr val="FFFFFF"/>
+                </a:solidFill>
+                <a:latin typeface="Play"/>
+                <a:ea typeface="Play"/>
+                <a:cs typeface="Play"/>
+              </a:defRPr>
+            </a:pPr>
+            <a:r>
+              <a:rPr sz="1096" b="0">
+                <a:solidFill>
+                  <a:srgbClr val="FFFFFF"/>
+                </a:solidFill>
+                <a:latin typeface="Play"/>
+                <a:ea typeface="Play"/>
+                <a:cs typeface="Play"/>
+              </a:rPr>
+              <a:t>Экспорт</a:t>
+            </a:r>
+          </a:p>
+        </p:txBody>
+      </p:sp>
+      <p:sp>
+        <p:nvSpPr>
+          <p:cNvPr id="8" name="body"/>
           <p:cNvSpPr txBox="1"/>
           <p:nvPr/>
         </p:nvSpPr>
         <p:spPr>
           <a:xfrm>
-            <a:off x="677387" y="692177"/>
-            <a:ext cx="10855878" cy="1447800"/>
+            <a:off x="677387" y="4463437"/>
+            <a:ext cx="10855878" cy="1737360"/>
           </a:xfrm>
           <a:prstGeom prst="rect">
             <a:avLst/>
@@ -9608,47 +8273,107 @@
               <a:spcAft>
                 <a:spcPts val="300"/>
               </a:spcAft>
-              <a:defRPr sz="4000">
+              <a:defRPr sz="1800">
                 <a:solidFill>
                   <a:srgbClr val="000000"/>
                 </a:solidFill>
-                <a:latin typeface="Arial"/>
-                <a:ea typeface="Arial"/>
-                <a:cs typeface="Arial"/>
+                <a:latin typeface="Play"/>
+                <a:ea typeface="Play"/>
+                <a:cs typeface="Play"/>
               </a:defRPr>
             </a:pPr>
             <a:r>
-              <a:rPr sz="4000">
+              <a:rPr sz="1800">
                 <a:solidFill>
                   <a:srgbClr val="000000"/>
                 </a:solidFill>
-                <a:latin typeface="Arial"/>
-                <a:ea typeface="Arial"/>
-                <a:cs typeface="Arial"/>
+                <a:latin typeface="Play"/>
+                <a:ea typeface="Play"/>
+                <a:cs typeface="Play"/>
               </a:rPr>
-              <a:t>Улучшения в пилоте: 4 мин сборки, 38 запросов</a:t>
+              <a:t>• Сервис принимает pptx-шаблон, документы, таблицы, заметки.</a:t>
+            </a:r>
+          </a:p>
+          <a:p>
+            <a:pPr algn="l">
+              <a:spcAft>
+                <a:spcPts val="300"/>
+              </a:spcAft>
+              <a:defRPr sz="1800">
+                <a:solidFill>
+                  <a:srgbClr val="000000"/>
+                </a:solidFill>
+                <a:latin typeface="Play"/>
+                <a:ea typeface="Play"/>
+                <a:cs typeface="Play"/>
+              </a:defRPr>
+            </a:pPr>
+            <a:r>
+              <a:rPr sz="1800">
+                <a:solidFill>
+                  <a:srgbClr val="000000"/>
+                </a:solidFill>
+                <a:latin typeface="Play"/>
+                <a:ea typeface="Play"/>
+                <a:cs typeface="Play"/>
+              </a:rPr>
+              <a:t>• Шабл превращается:гарнитуры, шкала кеглей, палитра</a:t>
+            </a:r>
+          </a:p>
+          <a:p>
+            <a:pPr algn="l">
+              <a:spcAft>
+                <a:spcPts val="300"/>
+              </a:spcAft>
+              <a:defRPr sz="1800">
+                <a:solidFill>
+                  <a:srgbClr val="000000"/>
+                </a:solidFill>
+                <a:latin typeface="Play"/>
+                <a:ea typeface="Play"/>
+                <a:cs typeface="Play"/>
+              </a:defRPr>
+            </a:pPr>
+            <a:r>
+              <a:rPr sz="1800">
+                <a:solidFill>
+                  <a:srgbClr val="000000"/>
+                </a:solidFill>
+                <a:latin typeface="Play"/>
+                <a:ea typeface="Play"/>
+                <a:cs typeface="Play"/>
+              </a:rPr>
+              <a:t>• Бриф генерирует колоду, автоматическая вёрстка</a:t>
+            </a:r>
+          </a:p>
+          <a:p>
+            <a:pPr algn="l">
+              <a:spcAft>
+                <a:spcPts val="300"/>
+              </a:spcAft>
+              <a:defRPr sz="1800">
+                <a:solidFill>
+                  <a:srgbClr val="000000"/>
+                </a:solidFill>
+                <a:latin typeface="Play"/>
+                <a:ea typeface="Play"/>
+                <a:cs typeface="Play"/>
+              </a:defRPr>
+            </a:pPr>
+            <a:r>
+              <a:rPr sz="1800">
+                <a:solidFill>
+                  <a:srgbClr val="000000"/>
+                </a:solidFill>
+                <a:latin typeface="Play"/>
+                <a:ea typeface="Play"/>
+                <a:cs typeface="Play"/>
+              </a:rPr>
+              <a:t>• Экспорт в pptx, pdf, html; слайды редактируемы.</a:t>
             </a:r>
           </a:p>
         </p:txBody>
       </p:sp>
-      <p:graphicFrame>
-        <p:nvGraphicFramePr>
-          <p:cNvPr id="3" name="Chart 2"/>
-          <p:cNvGraphicFramePr>
-            <a:graphicFrameLocks noGrp="1"/>
-          </p:cNvGraphicFramePr>
-          <p:nvPr/>
-        </p:nvGraphicFramePr>
-        <p:xfrm>
-          <a:off x="677387" y="2277137"/>
-          <a:ext cx="10855878" cy="3923659"/>
-        </p:xfrm>
-        <a:graphic>
-          <a:graphicData uri="http://schemas.openxmlformats.org/drawingml/2006/chart">
-            <c:chart xmlns:c="http://schemas.openxmlformats.org/drawingml/2006/chart" r:id="rId2"/>
-          </a:graphicData>
-        </a:graphic>
-      </p:graphicFrame>
     </p:spTree>
   </p:cSld>
   <p:clrMapOvr>
@@ -9657,7 +8382,7 @@
 </p:sld>
 </file>
 
-<file path=ppt/slides/slide65.xml><?xml version="1.0" encoding="utf-8"?>
+<file path=ppt/slides/slide59.xml><?xml version="1.0" encoding="utf-8"?>
 <p:sld xmlns:a="http://schemas.openxmlformats.org/drawingml/2006/main" xmlns:p="http://schemas.openxmlformats.org/presentationml/2006/main" xmlns:r="http://schemas.openxmlformats.org/officeDocument/2006/relationships">
   <p:cSld>
     <p:spTree>
@@ -9728,7 +8453,7 @@
         <p:spPr>
           <a:xfrm>
             <a:off x="677387" y="692177"/>
-            <a:ext cx="10855878" cy="1447800"/>
+            <a:ext cx="10855878" cy="822960"/>
           </a:xfrm>
           <a:prstGeom prst="rect">
             <a:avLst/>
@@ -9763,7 +8488,1937 @@
                 <a:ea typeface="Arial"/>
                 <a:cs typeface="Arial"/>
               </a:rPr>
-              <a:t>Риски и меры: модель, шаблон, нагрузка</a:t>
+              <a:t>Ожидаемый эффект</a:t>
+            </a:r>
+          </a:p>
+        </p:txBody>
+      </p:sp>
+      <p:sp>
+        <p:nvSpPr>
+          <p:cNvPr id="921" name="lead"/>
+          <p:cNvSpPr txBox="1"/>
+          <p:nvPr/>
+        </p:nvSpPr>
+        <p:spPr>
+          <a:xfrm>
+            <a:off x="677387" y="2200937"/>
+            <a:ext cx="10855878" cy="731110"/>
+          </a:xfrm>
+          <a:prstGeom prst="rect">
+            <a:avLst/>
+          </a:prstGeom>
+          <a:noFill/>
+        </p:spPr>
+        <p:txBody>
+          <a:bodyPr wrap="square" lIns="76200" rIns="76200" tIns="50800" bIns="50800">
+            <a:spAutoFit/>
+          </a:bodyPr>
+          <a:lstStyle/>
+          <a:p>
+            <a:pPr algn="l">
+              <a:spcAft>
+                <a:spcPts val="300"/>
+              </a:spcAft>
+              <a:defRPr sz="2800">
+                <a:solidFill>
+                  <a:srgbClr val="000000"/>
+                </a:solidFill>
+                <a:latin typeface="Play"/>
+                <a:ea typeface="Play"/>
+                <a:cs typeface="Play"/>
+              </a:defRPr>
+            </a:pPr>
+            <a:r>
+              <a:rPr sz="2800">
+                <a:solidFill>
+                  <a:srgbClr val="000000"/>
+                </a:solidFill>
+                <a:latin typeface="Play"/>
+                <a:ea typeface="Play"/>
+                <a:cs typeface="Play"/>
+              </a:rPr>
+              <a:t>Время сборки колоды сократилось с 186 до 4 минут</a:t>
+            </a:r>
+          </a:p>
+        </p:txBody>
+      </p:sp>
+      <p:sp>
+        <p:nvSpPr>
+          <p:cNvPr id="922" name="body"/>
+          <p:cNvSpPr txBox="1"/>
+          <p:nvPr/>
+        </p:nvSpPr>
+        <p:spPr>
+          <a:xfrm>
+            <a:off x="677387" y="3061068"/>
+            <a:ext cx="10855878" cy="1290195"/>
+          </a:xfrm>
+          <a:prstGeom prst="rect">
+            <a:avLst/>
+          </a:prstGeom>
+          <a:noFill/>
+        </p:spPr>
+        <p:txBody>
+          <a:bodyPr wrap="square" lIns="76200" rIns="76200" tIns="50800" bIns="50800">
+            <a:spAutoFit/>
+          </a:bodyPr>
+          <a:lstStyle/>
+          <a:p>
+            <a:pPr algn="l">
+              <a:spcAft>
+                <a:spcPts val="300"/>
+              </a:spcAft>
+              <a:defRPr sz="1800">
+                <a:solidFill>
+                  <a:srgbClr val="000000"/>
+                </a:solidFill>
+                <a:latin typeface="Play"/>
+                <a:ea typeface="Play"/>
+                <a:cs typeface="Play"/>
+              </a:defRPr>
+            </a:pPr>
+            <a:r>
+              <a:rPr sz="1800">
+                <a:solidFill>
+                  <a:srgbClr val="000000"/>
+                </a:solidFill>
+                <a:latin typeface="Play"/>
+                <a:ea typeface="Play"/>
+                <a:cs typeface="Play"/>
+              </a:rPr>
+              <a:t>• Первая версия готова за 1 день вместо 6 рабочих дней</a:t>
+            </a:r>
+          </a:p>
+          <a:p>
+            <a:pPr algn="l">
+              <a:spcAft>
+                <a:spcPts val="300"/>
+              </a:spcAft>
+              <a:defRPr sz="1800">
+                <a:solidFill>
+                  <a:srgbClr val="000000"/>
+                </a:solidFill>
+                <a:latin typeface="Play"/>
+                <a:ea typeface="Play"/>
+                <a:cs typeface="Play"/>
+              </a:defRPr>
+            </a:pPr>
+            <a:r>
+              <a:rPr sz="1800">
+                <a:solidFill>
+                  <a:srgbClr val="000000"/>
+                </a:solidFill>
+                <a:latin typeface="Play"/>
+                <a:ea typeface="Play"/>
+                <a:cs typeface="Play"/>
+              </a:rPr>
+              <a:t>• Нарушений фирменного стиля в пилоте 2 из 68 колод, исправлены автоматически</a:t>
+            </a:r>
+          </a:p>
+          <a:p>
+            <a:pPr algn="l">
+              <a:spcAft>
+                <a:spcPts val="300"/>
+              </a:spcAft>
+              <a:defRPr sz="1800">
+                <a:solidFill>
+                  <a:srgbClr val="000000"/>
+                </a:solidFill>
+                <a:latin typeface="Play"/>
+                <a:ea typeface="Play"/>
+                <a:cs typeface="Play"/>
+              </a:defRPr>
+            </a:pPr>
+            <a:r>
+              <a:rPr sz="1800">
+                <a:solidFill>
+                  <a:srgbClr val="000000"/>
+                </a:solidFill>
+                <a:latin typeface="Play"/>
+                <a:ea typeface="Play"/>
+                <a:cs typeface="Play"/>
+              </a:rPr>
+              <a:t>• Дизайнеры закрыли 38 запросов вместо 11 в неделю, рутина ушла в сервис</a:t>
+            </a:r>
+          </a:p>
+        </p:txBody>
+      </p:sp>
+    </p:spTree>
+  </p:cSld>
+  <p:clrMapOvr>
+    <a:masterClrMapping/>
+  </p:clrMapOvr>
+</p:sld>
+</file>
+
+<file path=ppt/slides/slide60.xml><?xml version="1.0" encoding="utf-8"?>
+<p:sld xmlns:a="http://schemas.openxmlformats.org/drawingml/2006/main" xmlns:p="http://schemas.openxmlformats.org/presentationml/2006/main" xmlns:r="http://schemas.openxmlformats.org/officeDocument/2006/relationships">
+  <p:cSld>
+    <p:bg>
+      <p:bgPr>
+        <a:solidFill>
+          <a:schemeClr val="lt2"/>
+        </a:solidFill>
+      </p:bgPr>
+    </p:bg>
+    <p:spTree>
+      <p:nvGrpSpPr>
+        <p:cNvPr id="1" name=""/>
+        <p:cNvGrpSpPr/>
+        <p:nvPr/>
+      </p:nvGrpSpPr>
+      <p:grpSpPr/>
+      <p:sp>
+        <p:nvSpPr>
+          <p:cNvPr id="2" name="title"/>
+          <p:cNvSpPr txBox="1"/>
+          <p:nvPr/>
+        </p:nvSpPr>
+        <p:spPr>
+          <a:xfrm>
+            <a:off x="677387" y="692177"/>
+            <a:ext cx="10855878" cy="822960"/>
+          </a:xfrm>
+          <a:prstGeom prst="rect">
+            <a:avLst/>
+          </a:prstGeom>
+          <a:noFill/>
+        </p:spPr>
+        <p:txBody>
+          <a:bodyPr wrap="square" lIns="76200" rIns="76200" tIns="50800" bIns="50800">
+            <a:spAutoFit/>
+          </a:bodyPr>
+          <a:lstStyle/>
+          <a:p>
+            <a:pPr algn="l">
+              <a:spcAft>
+                <a:spcPts val="300"/>
+              </a:spcAft>
+              <a:defRPr sz="4000">
+                <a:solidFill>
+                  <a:srgbClr val="000000"/>
+                </a:solidFill>
+                <a:latin typeface="Arial"/>
+                <a:ea typeface="Arial"/>
+                <a:cs typeface="Arial"/>
+              </a:defRPr>
+            </a:pPr>
+            <a:r>
+              <a:rPr sz="4000">
+                <a:solidFill>
+                  <a:srgbClr val="000000"/>
+                </a:solidFill>
+                <a:latin typeface="Arial"/>
+                <a:ea typeface="Arial"/>
+                <a:cs typeface="Arial"/>
+              </a:rPr>
+              <a:t>Что потребуется: ресурсы и сроки</a:t>
+            </a:r>
+          </a:p>
+        </p:txBody>
+      </p:sp>
+      <p:sp>
+        <p:nvSpPr>
+          <p:cNvPr id="3" name="Rectangle 2"/>
+          <p:cNvSpPr/>
+          <p:nvPr/>
+        </p:nvSpPr>
+        <p:spPr>
+          <a:xfrm>
+            <a:off x="677387" y="2931844"/>
+            <a:ext cx="10855878" cy="75563"/>
+          </a:xfrm>
+          <a:prstGeom prst="rect">
+            <a:avLst/>
+          </a:prstGeom>
+          <a:solidFill>
+            <a:srgbClr val="0077FF"/>
+          </a:solidFill>
+          <a:ln>
+            <a:noFill/>
+          </a:ln>
+        </p:spPr>
+        <p:style>
+          <a:lnRef idx="1">
+            <a:schemeClr val="accent1"/>
+          </a:lnRef>
+          <a:fillRef idx="3">
+            <a:schemeClr val="accent1"/>
+          </a:fillRef>
+          <a:effectRef idx="2">
+            <a:schemeClr val="accent1"/>
+          </a:effectRef>
+          <a:fontRef idx="minor">
+            <a:schemeClr val="lt1"/>
+          </a:fontRef>
+        </p:style>
+        <p:txBody>
+          <a:bodyPr rtlCol="0" anchor="ctr"/>
+          <a:lstStyle/>
+          <a:p>
+            <a:pPr algn="ctr"/>
+          </a:p>
+        </p:txBody>
+      </p:sp>
+      <p:sp>
+        <p:nvSpPr>
+          <p:cNvPr id="4" name="Oval 3"/>
+          <p:cNvSpPr/>
+          <p:nvPr/>
+        </p:nvSpPr>
+        <p:spPr>
+          <a:xfrm>
+            <a:off x="1757305" y="2692559"/>
+            <a:ext cx="554132" cy="554132"/>
+          </a:xfrm>
+          <a:prstGeom prst="ellipse">
+            <a:avLst/>
+          </a:prstGeom>
+          <a:solidFill>
+            <a:srgbClr val="0077FF"/>
+          </a:solidFill>
+          <a:ln>
+            <a:noFill/>
+          </a:ln>
+        </p:spPr>
+        <p:style>
+          <a:lnRef idx="1">
+            <a:schemeClr val="accent1"/>
+          </a:lnRef>
+          <a:fillRef idx="3">
+            <a:schemeClr val="accent1"/>
+          </a:fillRef>
+          <a:effectRef idx="2">
+            <a:schemeClr val="accent1"/>
+          </a:effectRef>
+          <a:fontRef idx="minor">
+            <a:schemeClr val="lt1"/>
+          </a:fontRef>
+        </p:style>
+        <p:txBody>
+          <a:bodyPr rtlCol="0" anchor="ctr"/>
+          <a:lstStyle/>
+          <a:p>
+            <a:pPr algn="ctr"/>
+          </a:p>
+        </p:txBody>
+      </p:sp>
+      <p:sp>
+        <p:nvSpPr>
+          <p:cNvPr id="5" name="TextBox 4"/>
+          <p:cNvSpPr txBox="1"/>
+          <p:nvPr/>
+        </p:nvSpPr>
+        <p:spPr>
+          <a:xfrm>
+            <a:off x="677387" y="1773204"/>
+            <a:ext cx="4070954" cy="957137"/>
+          </a:xfrm>
+          <a:prstGeom prst="rect">
+            <a:avLst/>
+          </a:prstGeom>
+          <a:noFill/>
+        </p:spPr>
+        <p:txBody>
+          <a:bodyPr wrap="square" lIns="12700" rIns="12700" tIns="12700" bIns="12700">
+            <a:spAutoFit/>
+          </a:bodyPr>
+          <a:lstStyle/>
+          <a:p>
+            <a:pPr algn="ctr">
+              <a:defRPr sz="1400" b="0">
+                <a:solidFill>
+                  <a:srgbClr val="000000"/>
+                </a:solidFill>
+                <a:latin typeface="Play"/>
+                <a:ea typeface="Play"/>
+                <a:cs typeface="Play"/>
+              </a:defRPr>
+            </a:pPr>
+            <a:r>
+              <a:rPr sz="1400" b="0">
+                <a:solidFill>
+                  <a:srgbClr val="000000"/>
+                </a:solidFill>
+                <a:latin typeface="Play"/>
+                <a:ea typeface="Play"/>
+                <a:cs typeface="Play"/>
+              </a:rPr>
+              <a:t>Подключение 4 команд</a:t>
+            </a:r>
+          </a:p>
+        </p:txBody>
+      </p:sp>
+      <p:sp>
+        <p:nvSpPr>
+          <p:cNvPr id="6" name="Oval 5"/>
+          <p:cNvSpPr/>
+          <p:nvPr/>
+        </p:nvSpPr>
+        <p:spPr>
+          <a:xfrm>
+            <a:off x="4471275" y="2692559"/>
+            <a:ext cx="554132" cy="554132"/>
+          </a:xfrm>
+          <a:prstGeom prst="ellipse">
+            <a:avLst/>
+          </a:prstGeom>
+          <a:solidFill>
+            <a:srgbClr val="0077FF"/>
+          </a:solidFill>
+          <a:ln>
+            <a:noFill/>
+          </a:ln>
+        </p:spPr>
+        <p:style>
+          <a:lnRef idx="1">
+            <a:schemeClr val="accent1"/>
+          </a:lnRef>
+          <a:fillRef idx="3">
+            <a:schemeClr val="accent1"/>
+          </a:fillRef>
+          <a:effectRef idx="2">
+            <a:schemeClr val="accent1"/>
+          </a:effectRef>
+          <a:fontRef idx="minor">
+            <a:schemeClr val="lt1"/>
+          </a:fontRef>
+        </p:style>
+        <p:txBody>
+          <a:bodyPr rtlCol="0" anchor="ctr"/>
+          <a:lstStyle/>
+          <a:p>
+            <a:pPr algn="ctr"/>
+          </a:p>
+        </p:txBody>
+      </p:sp>
+      <p:sp>
+        <p:nvSpPr>
+          <p:cNvPr id="7" name="TextBox 6"/>
+          <p:cNvSpPr txBox="1"/>
+          <p:nvPr/>
+        </p:nvSpPr>
+        <p:spPr>
+          <a:xfrm>
+            <a:off x="2712864" y="3485976"/>
+            <a:ext cx="4070954" cy="957137"/>
+          </a:xfrm>
+          <a:prstGeom prst="rect">
+            <a:avLst/>
+          </a:prstGeom>
+          <a:noFill/>
+        </p:spPr>
+        <p:txBody>
+          <a:bodyPr wrap="square" lIns="12700" rIns="12700" tIns="12700" bIns="12700">
+            <a:spAutoFit/>
+          </a:bodyPr>
+          <a:lstStyle/>
+          <a:p>
+            <a:pPr algn="ctr">
+              <a:defRPr sz="1400" b="0">
+                <a:solidFill>
+                  <a:srgbClr val="000000"/>
+                </a:solidFill>
+                <a:latin typeface="Play"/>
+                <a:ea typeface="Play"/>
+                <a:cs typeface="Play"/>
+              </a:defRPr>
+            </a:pPr>
+            <a:r>
+              <a:rPr sz="1400" b="0">
+                <a:solidFill>
+                  <a:srgbClr val="000000"/>
+                </a:solidFill>
+                <a:latin typeface="Play"/>
+                <a:ea typeface="Play"/>
+                <a:cs typeface="Play"/>
+              </a:rPr>
+              <a:t>Домен и HTTPS</a:t>
+            </a:r>
+          </a:p>
+        </p:txBody>
+      </p:sp>
+      <p:sp>
+        <p:nvSpPr>
+          <p:cNvPr id="8" name="Oval 7"/>
+          <p:cNvSpPr/>
+          <p:nvPr/>
+        </p:nvSpPr>
+        <p:spPr>
+          <a:xfrm>
+            <a:off x="7185244" y="2692559"/>
+            <a:ext cx="554132" cy="554132"/>
+          </a:xfrm>
+          <a:prstGeom prst="ellipse">
+            <a:avLst/>
+          </a:prstGeom>
+          <a:solidFill>
+            <a:srgbClr val="0077FF"/>
+          </a:solidFill>
+          <a:ln>
+            <a:noFill/>
+          </a:ln>
+        </p:spPr>
+        <p:style>
+          <a:lnRef idx="1">
+            <a:schemeClr val="accent1"/>
+          </a:lnRef>
+          <a:fillRef idx="3">
+            <a:schemeClr val="accent1"/>
+          </a:fillRef>
+          <a:effectRef idx="2">
+            <a:schemeClr val="accent1"/>
+          </a:effectRef>
+          <a:fontRef idx="minor">
+            <a:schemeClr val="lt1"/>
+          </a:fontRef>
+        </p:style>
+        <p:txBody>
+          <a:bodyPr rtlCol="0" anchor="ctr"/>
+          <a:lstStyle/>
+          <a:p>
+            <a:pPr algn="ctr"/>
+          </a:p>
+        </p:txBody>
+      </p:sp>
+      <p:sp>
+        <p:nvSpPr>
+          <p:cNvPr id="9" name="TextBox 8"/>
+          <p:cNvSpPr txBox="1"/>
+          <p:nvPr/>
+        </p:nvSpPr>
+        <p:spPr>
+          <a:xfrm>
+            <a:off x="5426833" y="1773204"/>
+            <a:ext cx="4070954" cy="957137"/>
+          </a:xfrm>
+          <a:prstGeom prst="rect">
+            <a:avLst/>
+          </a:prstGeom>
+          <a:noFill/>
+        </p:spPr>
+        <p:txBody>
+          <a:bodyPr wrap="square" lIns="12700" rIns="12700" tIns="12700" bIns="12700">
+            <a:spAutoFit/>
+          </a:bodyPr>
+          <a:lstStyle/>
+          <a:p>
+            <a:pPr algn="ctr">
+              <a:defRPr sz="1400" b="0">
+                <a:solidFill>
+                  <a:srgbClr val="000000"/>
+                </a:solidFill>
+                <a:latin typeface="Play"/>
+                <a:ea typeface="Play"/>
+                <a:cs typeface="Play"/>
+              </a:defRPr>
+            </a:pPr>
+            <a:r>
+              <a:rPr sz="1400" b="0">
+                <a:solidFill>
+                  <a:srgbClr val="000000"/>
+                </a:solidFill>
+                <a:latin typeface="Play"/>
+                <a:ea typeface="Play"/>
+                <a:cs typeface="Play"/>
+              </a:rPr>
+              <a:t>Доступ для всей компании</a:t>
+            </a:r>
+          </a:p>
+        </p:txBody>
+      </p:sp>
+      <p:sp>
+        <p:nvSpPr>
+          <p:cNvPr id="10" name="Oval 9"/>
+          <p:cNvSpPr/>
+          <p:nvPr/>
+        </p:nvSpPr>
+        <p:spPr>
+          <a:xfrm>
+            <a:off x="9899214" y="2692559"/>
+            <a:ext cx="554132" cy="554132"/>
+          </a:xfrm>
+          <a:prstGeom prst="ellipse">
+            <a:avLst/>
+          </a:prstGeom>
+          <a:solidFill>
+            <a:srgbClr val="0077FF"/>
+          </a:solidFill>
+          <a:ln>
+            <a:noFill/>
+          </a:ln>
+        </p:spPr>
+        <p:style>
+          <a:lnRef idx="1">
+            <a:schemeClr val="accent1"/>
+          </a:lnRef>
+          <a:fillRef idx="3">
+            <a:schemeClr val="accent1"/>
+          </a:fillRef>
+          <a:effectRef idx="2">
+            <a:schemeClr val="accent1"/>
+          </a:effectRef>
+          <a:fontRef idx="minor">
+            <a:schemeClr val="lt1"/>
+          </a:fontRef>
+        </p:style>
+        <p:txBody>
+          <a:bodyPr rtlCol="0" anchor="ctr"/>
+          <a:lstStyle/>
+          <a:p>
+            <a:pPr algn="ctr"/>
+          </a:p>
+        </p:txBody>
+      </p:sp>
+      <p:sp>
+        <p:nvSpPr>
+          <p:cNvPr id="11" name="TextBox 10"/>
+          <p:cNvSpPr txBox="1"/>
+          <p:nvPr/>
+        </p:nvSpPr>
+        <p:spPr>
+          <a:xfrm>
+            <a:off x="7462310" y="3485976"/>
+            <a:ext cx="4070954" cy="957137"/>
+          </a:xfrm>
+          <a:prstGeom prst="rect">
+            <a:avLst/>
+          </a:prstGeom>
+          <a:noFill/>
+        </p:spPr>
+        <p:txBody>
+          <a:bodyPr wrap="square" lIns="12700" rIns="12700" tIns="12700" bIns="12700">
+            <a:spAutoFit/>
+          </a:bodyPr>
+          <a:lstStyle/>
+          <a:p>
+            <a:pPr algn="ctr">
+              <a:defRPr sz="1400" b="0">
+                <a:solidFill>
+                  <a:srgbClr val="000000"/>
+                </a:solidFill>
+                <a:latin typeface="Play"/>
+                <a:ea typeface="Play"/>
+                <a:cs typeface="Play"/>
+              </a:defRPr>
+            </a:pPr>
+            <a:r>
+              <a:rPr sz="1400" b="0">
+                <a:solidFill>
+                  <a:srgbClr val="000000"/>
+                </a:solidFill>
+                <a:latin typeface="Play"/>
+                <a:ea typeface="Play"/>
+                <a:cs typeface="Play"/>
+              </a:rPr>
+              <a:t>Генерация иллюстраций</a:t>
+            </a:r>
+          </a:p>
+        </p:txBody>
+      </p:sp>
+      <p:sp>
+        <p:nvSpPr>
+          <p:cNvPr id="12" name="body"/>
+          <p:cNvSpPr txBox="1"/>
+          <p:nvPr/>
+        </p:nvSpPr>
+        <p:spPr>
+          <a:xfrm>
+            <a:off x="677387" y="4463437"/>
+            <a:ext cx="10855878" cy="1737360"/>
+          </a:xfrm>
+          <a:prstGeom prst="rect">
+            <a:avLst/>
+          </a:prstGeom>
+          <a:noFill/>
+        </p:spPr>
+        <p:txBody>
+          <a:bodyPr wrap="square" lIns="76200" rIns="76200" tIns="50800" bIns="50800">
+            <a:spAutoFit/>
+          </a:bodyPr>
+          <a:lstStyle/>
+          <a:p>
+            <a:pPr algn="l">
+              <a:spcAft>
+                <a:spcPts val="300"/>
+              </a:spcAft>
+              <a:defRPr sz="1600">
+                <a:solidFill>
+                  <a:srgbClr val="000000"/>
+                </a:solidFill>
+                <a:latin typeface="Play"/>
+                <a:ea typeface="Play"/>
+                <a:cs typeface="Play"/>
+              </a:defRPr>
+            </a:pPr>
+            <a:r>
+              <a:rPr sz="1600">
+                <a:solidFill>
+                  <a:srgbClr val="000000"/>
+                </a:solidFill>
+                <a:latin typeface="Play"/>
+                <a:ea typeface="Play"/>
+                <a:cs typeface="Play"/>
+              </a:rPr>
+              <a:t>• Сервис на машине 2 vCPU / 2 ГБ RAM</a:t>
+            </a:r>
+          </a:p>
+          <a:p>
+            <a:pPr algn="l">
+              <a:spcAft>
+                <a:spcPts val="300"/>
+              </a:spcAft>
+              <a:defRPr sz="1600">
+                <a:solidFill>
+                  <a:srgbClr val="000000"/>
+                </a:solidFill>
+                <a:latin typeface="Play"/>
+                <a:ea typeface="Play"/>
+                <a:cs typeface="Play"/>
+              </a:defRPr>
+            </a:pPr>
+            <a:r>
+              <a:rPr sz="1600">
+                <a:solidFill>
+                  <a:srgbClr val="000000"/>
+                </a:solidFill>
+                <a:latin typeface="Play"/>
+                <a:ea typeface="Play"/>
+                <a:cs typeface="Play"/>
+              </a:rPr>
+              <a:t>• Модель gpt-oss-20b подключена через OpenAI-протокол</a:t>
+            </a:r>
+          </a:p>
+          <a:p>
+            <a:pPr algn="l">
+              <a:spcAft>
+                <a:spcPts val="300"/>
+              </a:spcAft>
+              <a:defRPr sz="1600">
+                <a:solidFill>
+                  <a:srgbClr val="000000"/>
+                </a:solidFill>
+                <a:latin typeface="Play"/>
+                <a:ea typeface="Play"/>
+                <a:cs typeface="Play"/>
+              </a:defRPr>
+            </a:pPr>
+            <a:r>
+              <a:rPr sz="1600">
+                <a:solidFill>
+                  <a:srgbClr val="000000"/>
+                </a:solidFill>
+                <a:latin typeface="Play"/>
+                <a:ea typeface="Play"/>
+                <a:cs typeface="Play"/>
+              </a:rPr>
+              <a:t>• Стоимость инференса за 6 недель 1 400 руб.</a:t>
+            </a:r>
+          </a:p>
+          <a:p>
+            <a:pPr algn="l">
+              <a:spcAft>
+                <a:spcPts val="300"/>
+              </a:spcAft>
+              <a:defRPr sz="1600">
+                <a:solidFill>
+                  <a:srgbClr val="000000"/>
+                </a:solidFill>
+                <a:latin typeface="Play"/>
+                <a:ea typeface="Play"/>
+                <a:cs typeface="Play"/>
+              </a:defRPr>
+            </a:pPr>
+            <a:r>
+              <a:rPr sz="1600">
+                <a:solidFill>
+                  <a:srgbClr val="000000"/>
+                </a:solidFill>
+                <a:latin typeface="Play"/>
+                <a:ea typeface="Play"/>
+                <a:cs typeface="Play"/>
+              </a:rPr>
+              <a:t>• Нагрузка выше 20 задач требует внешней очереди.</a:t>
+            </a:r>
+          </a:p>
+        </p:txBody>
+      </p:sp>
+    </p:spTree>
+  </p:cSld>
+  <p:clrMapOvr>
+    <a:masterClrMapping/>
+  </p:clrMapOvr>
+</p:sld>
+</file>
+
+<file path=ppt/slides/slide61.xml><?xml version="1.0" encoding="utf-8"?>
+<p:sld xmlns:a="http://schemas.openxmlformats.org/drawingml/2006/main" xmlns:p="http://schemas.openxmlformats.org/presentationml/2006/main" xmlns:r="http://schemas.openxmlformats.org/officeDocument/2006/relationships">
+  <p:cSld>
+    <p:bg>
+      <p:bgPr>
+        <a:solidFill>
+          <a:schemeClr val="lt2"/>
+        </a:solidFill>
+      </p:bgPr>
+    </p:bg>
+    <p:spTree>
+      <p:nvGrpSpPr>
+        <p:cNvPr id="1" name=""/>
+        <p:cNvGrpSpPr/>
+        <p:nvPr/>
+      </p:nvGrpSpPr>
+      <p:grpSpPr/>
+      <p:sp>
+        <p:nvSpPr>
+          <p:cNvPr id="2" name="title"/>
+          <p:cNvSpPr txBox="1"/>
+          <p:nvPr/>
+        </p:nvSpPr>
+        <p:spPr>
+          <a:xfrm>
+            <a:off x="677387" y="692177"/>
+            <a:ext cx="10855878" cy="822960"/>
+          </a:xfrm>
+          <a:prstGeom prst="rect">
+            <a:avLst/>
+          </a:prstGeom>
+          <a:noFill/>
+        </p:spPr>
+        <p:txBody>
+          <a:bodyPr wrap="square" lIns="76200" rIns="76200" tIns="50800" bIns="50800">
+            <a:spAutoFit/>
+          </a:bodyPr>
+          <a:lstStyle/>
+          <a:p>
+            <a:pPr algn="l">
+              <a:spcAft>
+                <a:spcPts val="300"/>
+              </a:spcAft>
+              <a:defRPr sz="4000">
+                <a:solidFill>
+                  <a:srgbClr val="000000"/>
+                </a:solidFill>
+                <a:latin typeface="Arial"/>
+                <a:ea typeface="Arial"/>
+                <a:cs typeface="Arial"/>
+              </a:defRPr>
+            </a:pPr>
+            <a:r>
+              <a:rPr sz="4000">
+                <a:solidFill>
+                  <a:srgbClr val="000000"/>
+                </a:solidFill>
+                <a:latin typeface="Arial"/>
+                <a:ea typeface="Arial"/>
+                <a:cs typeface="Arial"/>
+              </a:rPr>
+              <a:t>План пилота</a:t>
+            </a:r>
+          </a:p>
+        </p:txBody>
+      </p:sp>
+      <p:sp>
+        <p:nvSpPr>
+          <p:cNvPr id="3" name="lead"/>
+          <p:cNvSpPr txBox="1"/>
+          <p:nvPr/>
+        </p:nvSpPr>
+        <p:spPr>
+          <a:xfrm>
+            <a:off x="677387" y="1773204"/>
+            <a:ext cx="10855878" cy="1505381"/>
+          </a:xfrm>
+          <a:prstGeom prst="rect">
+            <a:avLst/>
+          </a:prstGeom>
+          <a:noFill/>
+        </p:spPr>
+        <p:txBody>
+          <a:bodyPr wrap="square" lIns="76200" rIns="76200" tIns="50800" bIns="50800">
+            <a:spAutoFit/>
+          </a:bodyPr>
+          <a:lstStyle/>
+          <a:p>
+            <a:pPr algn="l">
+              <a:spcAft>
+                <a:spcPts val="300"/>
+              </a:spcAft>
+              <a:defRPr sz="4000">
+                <a:solidFill>
+                  <a:srgbClr val="000000"/>
+                </a:solidFill>
+                <a:latin typeface="Play"/>
+                <a:ea typeface="Play"/>
+                <a:cs typeface="Play"/>
+              </a:defRPr>
+            </a:pPr>
+            <a:r>
+              <a:rPr sz="4000">
+                <a:solidFill>
+                  <a:srgbClr val="000000"/>
+                </a:solidFill>
+                <a:latin typeface="Play"/>
+                <a:ea typeface="Play"/>
+                <a:cs typeface="Play"/>
+              </a:rPr>
+              <a:t>Пилот длился 6 недель, включал 2 команды и 68 презентаций</a:t>
+            </a:r>
+          </a:p>
+        </p:txBody>
+      </p:sp>
+      <p:sp>
+        <p:nvSpPr>
+          <p:cNvPr id="4" name="body"/>
+          <p:cNvSpPr txBox="1"/>
+          <p:nvPr/>
+        </p:nvSpPr>
+        <p:spPr>
+          <a:xfrm>
+            <a:off x="677387" y="3544241"/>
+            <a:ext cx="10855878" cy="2656556"/>
+          </a:xfrm>
+          <a:prstGeom prst="rect">
+            <a:avLst/>
+          </a:prstGeom>
+          <a:noFill/>
+        </p:spPr>
+        <p:txBody>
+          <a:bodyPr wrap="square" lIns="76200" rIns="76200" tIns="50800" bIns="50800">
+            <a:spAutoFit/>
+          </a:bodyPr>
+          <a:lstStyle/>
+          <a:p>
+            <a:pPr algn="l">
+              <a:spcAft>
+                <a:spcPts val="300"/>
+              </a:spcAft>
+              <a:defRPr sz="2400">
+                <a:solidFill>
+                  <a:srgbClr val="000000"/>
+                </a:solidFill>
+                <a:latin typeface="Play"/>
+                <a:ea typeface="Play"/>
+                <a:cs typeface="Play"/>
+              </a:defRPr>
+            </a:pPr>
+            <a:r>
+              <a:rPr sz="2400">
+                <a:solidFill>
+                  <a:srgbClr val="000000"/>
+                </a:solidFill>
+                <a:latin typeface="Play"/>
+                <a:ea typeface="Play"/>
+                <a:cs typeface="Play"/>
+              </a:rPr>
+              <a:t>• Средняя сборка колоды 4 минуты вместо 186, первая версия 1 день вместо 6</a:t>
+            </a:r>
+          </a:p>
+          <a:p>
+            <a:pPr algn="l">
+              <a:spcAft>
+                <a:spcPts val="300"/>
+              </a:spcAft>
+              <a:defRPr sz="2400">
+                <a:solidFill>
+                  <a:srgbClr val="000000"/>
+                </a:solidFill>
+                <a:latin typeface="Play"/>
+                <a:ea typeface="Play"/>
+                <a:cs typeface="Play"/>
+              </a:defRPr>
+            </a:pPr>
+            <a:r>
+              <a:rPr sz="2400">
+                <a:solidFill>
+                  <a:srgbClr val="000000"/>
+                </a:solidFill>
+                <a:latin typeface="Play"/>
+                <a:ea typeface="Play"/>
+                <a:cs typeface="Play"/>
+              </a:rPr>
+              <a:t>• Нарушений стиля 2 из 68 колод, обе исправлены автоматическими правками</a:t>
+            </a:r>
+          </a:p>
+          <a:p>
+            <a:pPr algn="l">
+              <a:spcAft>
+                <a:spcPts val="300"/>
+              </a:spcAft>
+              <a:defRPr sz="2400">
+                <a:solidFill>
+                  <a:srgbClr val="000000"/>
+                </a:solidFill>
+                <a:latin typeface="Play"/>
+                <a:ea typeface="Play"/>
+                <a:cs typeface="Play"/>
+              </a:defRPr>
+            </a:pPr>
+            <a:r>
+              <a:rPr sz="2400">
+                <a:solidFill>
+                  <a:srgbClr val="000000"/>
+                </a:solidFill>
+                <a:latin typeface="Play"/>
+                <a:ea typeface="Play"/>
+                <a:cs typeface="Play"/>
+              </a:rPr>
+              <a:t>• Дизайнеры закрыли 38 запросов вместо 11 в неделю, рутина ушла в сервис</a:t>
+            </a:r>
+          </a:p>
+        </p:txBody>
+      </p:sp>
+    </p:spTree>
+  </p:cSld>
+  <p:clrMapOvr>
+    <a:masterClrMapping/>
+  </p:clrMapOvr>
+</p:sld>
+</file>
+
+<file path=ppt/slides/slide62.xml><?xml version="1.0" encoding="utf-8"?>
+<p:sld xmlns:a="http://schemas.openxmlformats.org/drawingml/2006/main" xmlns:p="http://schemas.openxmlformats.org/presentationml/2006/main" xmlns:r="http://schemas.openxmlformats.org/officeDocument/2006/relationships">
+  <p:cSld>
+    <p:bg>
+      <p:bgPr>
+        <a:solidFill>
+          <a:schemeClr val="lt2"/>
+        </a:solidFill>
+      </p:bgPr>
+    </p:bg>
+    <p:spTree>
+      <p:nvGrpSpPr>
+        <p:cNvPr id="1" name=""/>
+        <p:cNvGrpSpPr/>
+        <p:nvPr/>
+      </p:nvGrpSpPr>
+      <p:grpSpPr/>
+      <p:sp>
+        <p:nvSpPr>
+          <p:cNvPr id="795" name="Google Shape;795;p60"/>
+          <p:cNvSpPr txBox="1"/>
+          <p:nvPr/>
+        </p:nvSpPr>
+        <p:spPr>
+          <a:xfrm>
+            <a:off x="18692059" y="4674436"/>
+            <a:ext cx="4304330" cy="678198"/>
+          </a:xfrm>
+          <a:prstGeom prst="rect">
+            <a:avLst/>
+          </a:prstGeom>
+          <a:noFill/>
+          <a:ln>
+            <a:noFill/>
+          </a:ln>
+        </p:spPr>
+        <p:txBody>
+          <a:bodyPr anchorCtr="0" anchor="t" bIns="45700" lIns="91425" spcFirstLastPara="1" rIns="91425" wrap="square" tIns="45700">
+            <a:noAutofit/>
+          </a:bodyPr>
+          <a:lstStyle/>
+          <a:p>
+            <a:pPr indent="0" lvl="0" marL="0" marR="0" rtl="0" algn="l">
+              <a:lnSpc>
+                <a:spcPct val="110000"/>
+              </a:lnSpc>
+              <a:spcBef>
+                <a:spcPts val="0"/>
+              </a:spcBef>
+              <a:spcAft>
+                <a:spcPts val="0"/>
+              </a:spcAft>
+              <a:buClr>
+                <a:schemeClr val="dk1"/>
+              </a:buClr>
+              <a:buSzPts val="1600"/>
+              <a:buFont typeface="Arial"/>
+              <a:buNone/>
+            </a:pPr>
+            <a:r>
+              <a:t/>
+            </a:r>
+            <a:endParaRPr sz="1600">
+              <a:solidFill>
+                <a:schemeClr val="dk1"/>
+              </a:solidFill>
+              <a:latin typeface="Arial"/>
+              <a:ea typeface="Arial"/>
+              <a:cs typeface="Arial"/>
+              <a:sym typeface="Arial"/>
+            </a:endParaRPr>
+          </a:p>
+        </p:txBody>
+      </p:sp>
+      <p:sp>
+        <p:nvSpPr>
+          <p:cNvPr id="796" name="title"/>
+          <p:cNvSpPr txBox="1"/>
+          <p:nvPr/>
+        </p:nvSpPr>
+        <p:spPr>
+          <a:xfrm>
+            <a:off x="677387" y="692177"/>
+            <a:ext cx="10855878" cy="822960"/>
+          </a:xfrm>
+          <a:prstGeom prst="rect">
+            <a:avLst/>
+          </a:prstGeom>
+          <a:noFill/>
+        </p:spPr>
+        <p:txBody>
+          <a:bodyPr wrap="square" lIns="76200" rIns="76200" tIns="50800" bIns="50800">
+            <a:spAutoFit/>
+          </a:bodyPr>
+          <a:lstStyle/>
+          <a:p>
+            <a:pPr algn="l">
+              <a:spcAft>
+                <a:spcPts val="300"/>
+              </a:spcAft>
+              <a:defRPr sz="4000">
+                <a:solidFill>
+                  <a:srgbClr val="000000"/>
+                </a:solidFill>
+                <a:latin typeface="Arial"/>
+                <a:ea typeface="Arial"/>
+                <a:cs typeface="Arial"/>
+              </a:defRPr>
+            </a:pPr>
+            <a:r>
+              <a:rPr sz="4000">
+                <a:solidFill>
+                  <a:srgbClr val="000000"/>
+                </a:solidFill>
+                <a:latin typeface="Arial"/>
+                <a:ea typeface="Arial"/>
+                <a:cs typeface="Arial"/>
+              </a:rPr>
+              <a:t>Что мы просим решить</a:t>
+            </a:r>
+          </a:p>
+        </p:txBody>
+      </p:sp>
+      <p:sp>
+        <p:nvSpPr>
+          <p:cNvPr id="797" name="lead"/>
+          <p:cNvSpPr txBox="1"/>
+          <p:nvPr/>
+        </p:nvSpPr>
+        <p:spPr>
+          <a:xfrm>
+            <a:off x="677387" y="2200937"/>
+            <a:ext cx="10855878" cy="1621084"/>
+          </a:xfrm>
+          <a:prstGeom prst="rect">
+            <a:avLst/>
+          </a:prstGeom>
+          <a:noFill/>
+        </p:spPr>
+        <p:txBody>
+          <a:bodyPr wrap="square" lIns="76200" rIns="76200" tIns="50800" bIns="50800">
+            <a:spAutoFit/>
+          </a:bodyPr>
+          <a:lstStyle/>
+          <a:p>
+            <a:pPr algn="l">
+              <a:spcAft>
+                <a:spcPts val="300"/>
+              </a:spcAft>
+              <a:defRPr sz="4000">
+                <a:solidFill>
+                  <a:srgbClr val="000000"/>
+                </a:solidFill>
+                <a:latin typeface="Play"/>
+                <a:ea typeface="Play"/>
+                <a:cs typeface="Play"/>
+              </a:defRPr>
+            </a:pPr>
+            <a:r>
+              <a:rPr sz="4000">
+                <a:solidFill>
+                  <a:srgbClr val="000000"/>
+                </a:solidFill>
+                <a:latin typeface="Play"/>
+                <a:ea typeface="Play"/>
+                <a:cs typeface="Play"/>
+              </a:rPr>
+              <a:t>Одобрить запуск сервиса на всю компанию</a:t>
+            </a:r>
+          </a:p>
+        </p:txBody>
+      </p:sp>
+      <p:sp>
+        <p:nvSpPr>
+          <p:cNvPr id="798" name="body"/>
+          <p:cNvSpPr txBox="1"/>
+          <p:nvPr/>
+        </p:nvSpPr>
+        <p:spPr>
+          <a:xfrm>
+            <a:off x="677387" y="4069688"/>
+            <a:ext cx="10855878" cy="2259011"/>
+          </a:xfrm>
+          <a:prstGeom prst="rect">
+            <a:avLst/>
+          </a:prstGeom>
+          <a:noFill/>
+        </p:spPr>
+        <p:txBody>
+          <a:bodyPr wrap="square" lIns="76200" rIns="76200" tIns="50800" bIns="50800">
+            <a:spAutoFit/>
+          </a:bodyPr>
+          <a:lstStyle/>
+          <a:p>
+            <a:pPr algn="l">
+              <a:spcAft>
+                <a:spcPts val="300"/>
+              </a:spcAft>
+              <a:defRPr sz="3200">
+                <a:solidFill>
+                  <a:srgbClr val="000000"/>
+                </a:solidFill>
+                <a:latin typeface="Play"/>
+                <a:ea typeface="Play"/>
+                <a:cs typeface="Play"/>
+              </a:defRPr>
+            </a:pPr>
+            <a:r>
+              <a:rPr sz="3200">
+                <a:solidFill>
+                  <a:srgbClr val="000000"/>
+                </a:solidFill>
+                <a:latin typeface="Play"/>
+                <a:ea typeface="Play"/>
+                <a:cs typeface="Play"/>
+              </a:rPr>
+              <a:t>• Интеграция с корпоративным хранилищем документов</a:t>
+            </a:r>
+          </a:p>
+          <a:p>
+            <a:pPr algn="l">
+              <a:spcAft>
+                <a:spcPts val="300"/>
+              </a:spcAft>
+              <a:defRPr sz="3200">
+                <a:solidFill>
+                  <a:srgbClr val="000000"/>
+                </a:solidFill>
+                <a:latin typeface="Play"/>
+                <a:ea typeface="Play"/>
+                <a:cs typeface="Play"/>
+              </a:defRPr>
+            </a:pPr>
+            <a:r>
+              <a:rPr sz="3200">
+                <a:solidFill>
+                  <a:srgbClr val="000000"/>
+                </a:solidFill>
+                <a:latin typeface="Play"/>
+                <a:ea typeface="Play"/>
+                <a:cs typeface="Play"/>
+              </a:rPr>
+              <a:t>• Обеспечить поддержку очереди для нагрузки более 20 задач</a:t>
+            </a:r>
+          </a:p>
+        </p:txBody>
+      </p:sp>
+    </p:spTree>
+  </p:cSld>
+  <p:clrMapOvr>
+    <a:masterClrMapping/>
+  </p:clrMapOvr>
+</p:sld>
+</file>
+
+<file path=ppt/slides/slide63.xml><?xml version="1.0" encoding="utf-8"?>
+<p:sld xmlns:a="http://schemas.openxmlformats.org/drawingml/2006/main" xmlns:p="http://schemas.openxmlformats.org/presentationml/2006/main" xmlns:r="http://schemas.openxmlformats.org/officeDocument/2006/relationships">
+  <p:cSld>
+    <p:bg>
+      <p:bgPr>
+        <a:solidFill>
+          <a:schemeClr val="lt2"/>
+        </a:solidFill>
+      </p:bgPr>
+    </p:bg>
+    <p:spTree>
+      <p:nvGrpSpPr>
+        <p:cNvPr id="1" name=""/>
+        <p:cNvGrpSpPr/>
+        <p:nvPr/>
+      </p:nvGrpSpPr>
+      <p:grpSpPr/>
+      <p:sp>
+        <p:nvSpPr>
+          <p:cNvPr id="764" name="Google Shape;764;p58"/>
+          <p:cNvSpPr txBox="1"/>
+          <p:nvPr/>
+        </p:nvSpPr>
+        <p:spPr>
+          <a:xfrm>
+            <a:off x="18692059" y="4674436"/>
+            <a:ext cx="4304330" cy="678198"/>
+          </a:xfrm>
+          <a:prstGeom prst="rect">
+            <a:avLst/>
+          </a:prstGeom>
+          <a:noFill/>
+          <a:ln>
+            <a:noFill/>
+          </a:ln>
+        </p:spPr>
+        <p:txBody>
+          <a:bodyPr anchorCtr="0" anchor="t" bIns="45700" lIns="91425" spcFirstLastPara="1" rIns="91425" wrap="square" tIns="45700">
+            <a:noAutofit/>
+          </a:bodyPr>
+          <a:lstStyle/>
+          <a:p>
+            <a:pPr indent="0" lvl="0" marL="0" marR="0" rtl="0" algn="l">
+              <a:lnSpc>
+                <a:spcPct val="110000"/>
+              </a:lnSpc>
+              <a:spcBef>
+                <a:spcPts val="0"/>
+              </a:spcBef>
+              <a:spcAft>
+                <a:spcPts val="0"/>
+              </a:spcAft>
+              <a:buClr>
+                <a:schemeClr val="dk1"/>
+              </a:buClr>
+              <a:buSzPts val="1600"/>
+              <a:buFont typeface="Arial"/>
+              <a:buNone/>
+            </a:pPr>
+            <a:r>
+              <a:t/>
+            </a:r>
+            <a:endParaRPr sz="1600">
+              <a:solidFill>
+                <a:schemeClr val="dk1"/>
+              </a:solidFill>
+              <a:latin typeface="Arial"/>
+              <a:ea typeface="Arial"/>
+              <a:cs typeface="Arial"/>
+              <a:sym typeface="Arial"/>
+            </a:endParaRPr>
+          </a:p>
+        </p:txBody>
+      </p:sp>
+      <p:sp>
+        <p:nvSpPr>
+          <p:cNvPr id="765" name="title"/>
+          <p:cNvSpPr txBox="1"/>
+          <p:nvPr/>
+        </p:nvSpPr>
+        <p:spPr>
+          <a:xfrm>
+            <a:off x="677387" y="692177"/>
+            <a:ext cx="10855878" cy="822960"/>
+          </a:xfrm>
+          <a:prstGeom prst="rect">
+            <a:avLst/>
+          </a:prstGeom>
+          <a:noFill/>
+        </p:spPr>
+        <p:txBody>
+          <a:bodyPr wrap="square" lIns="76200" rIns="76200" tIns="50800" bIns="50800">
+            <a:spAutoFit/>
+          </a:bodyPr>
+          <a:lstStyle/>
+          <a:p>
+            <a:pPr algn="l">
+              <a:spcAft>
+                <a:spcPts val="300"/>
+              </a:spcAft>
+              <a:defRPr sz="4000">
+                <a:solidFill>
+                  <a:srgbClr val="000000"/>
+                </a:solidFill>
+                <a:latin typeface="Arial"/>
+                <a:ea typeface="Arial"/>
+                <a:cs typeface="Arial"/>
+              </a:defRPr>
+            </a:pPr>
+            <a:r>
+              <a:rPr sz="4000">
+                <a:solidFill>
+                  <a:srgbClr val="000000"/>
+                </a:solidFill>
+                <a:latin typeface="Arial"/>
+                <a:ea typeface="Arial"/>
+                <a:cs typeface="Arial"/>
+              </a:rPr>
+              <a:t>Риски</a:t>
+            </a:r>
+          </a:p>
+        </p:txBody>
+      </p:sp>
+      <p:sp>
+        <p:nvSpPr>
+          <p:cNvPr id="766" name="lead"/>
+          <p:cNvSpPr txBox="1"/>
+          <p:nvPr/>
+        </p:nvSpPr>
+        <p:spPr>
+          <a:xfrm>
+            <a:off x="677387" y="2200937"/>
+            <a:ext cx="10855878" cy="1925976"/>
+          </a:xfrm>
+          <a:prstGeom prst="rect">
+            <a:avLst/>
+          </a:prstGeom>
+          <a:noFill/>
+        </p:spPr>
+        <p:txBody>
+          <a:bodyPr wrap="square" lIns="76200" rIns="76200" tIns="50800" bIns="50800">
+            <a:spAutoFit/>
+          </a:bodyPr>
+          <a:lstStyle/>
+          <a:p>
+            <a:pPr algn="l">
+              <a:spcAft>
+                <a:spcPts val="300"/>
+              </a:spcAft>
+              <a:defRPr sz="4800">
+                <a:solidFill>
+                  <a:srgbClr val="000000"/>
+                </a:solidFill>
+                <a:latin typeface="Play"/>
+                <a:ea typeface="Play"/>
+                <a:cs typeface="Play"/>
+              </a:defRPr>
+            </a:pPr>
+            <a:r>
+              <a:rPr sz="4800">
+                <a:solidFill>
+                  <a:srgbClr val="000000"/>
+                </a:solidFill>
+                <a:latin typeface="Play"/>
+                <a:ea typeface="Play"/>
+                <a:cs typeface="Play"/>
+              </a:rPr>
+              <a:t>Модель может выдумать цифры, которые отсутствуют в материалах</a:t>
+            </a:r>
+          </a:p>
+        </p:txBody>
+      </p:sp>
+      <p:sp>
+        <p:nvSpPr>
+          <p:cNvPr id="767" name="body"/>
+          <p:cNvSpPr txBox="1"/>
+          <p:nvPr/>
+        </p:nvSpPr>
+        <p:spPr>
+          <a:xfrm>
+            <a:off x="677387" y="4374579"/>
+            <a:ext cx="10855878" cy="1954119"/>
+          </a:xfrm>
+          <a:prstGeom prst="rect">
+            <a:avLst/>
+          </a:prstGeom>
+          <a:noFill/>
+        </p:spPr>
+        <p:txBody>
+          <a:bodyPr wrap="square" lIns="76200" rIns="76200" tIns="50800" bIns="50800">
+            <a:spAutoFit/>
+          </a:bodyPr>
+          <a:lstStyle/>
+          <a:p>
+            <a:pPr algn="l">
+              <a:spcAft>
+                <a:spcPts val="300"/>
+              </a:spcAft>
+              <a:defRPr sz="2800">
+                <a:solidFill>
+                  <a:srgbClr val="000000"/>
+                </a:solidFill>
+                <a:latin typeface="Play"/>
+                <a:ea typeface="Play"/>
+                <a:cs typeface="Play"/>
+              </a:defRPr>
+            </a:pPr>
+            <a:r>
+              <a:rPr sz="2800">
+                <a:solidFill>
+                  <a:srgbClr val="000000"/>
+                </a:solidFill>
+                <a:latin typeface="Play"/>
+                <a:ea typeface="Play"/>
+                <a:cs typeface="Play"/>
+              </a:rPr>
+              <a:t>• Неполный шаблон приводит к ошибкам, сервис использует рабочую область</a:t>
+            </a:r>
+          </a:p>
+          <a:p>
+            <a:pPr algn="l">
+              <a:spcAft>
+                <a:spcPts val="300"/>
+              </a:spcAft>
+              <a:defRPr sz="2800">
+                <a:solidFill>
+                  <a:srgbClr val="000000"/>
+                </a:solidFill>
+                <a:latin typeface="Play"/>
+                <a:ea typeface="Play"/>
+                <a:cs typeface="Play"/>
+              </a:defRPr>
+            </a:pPr>
+            <a:r>
+              <a:rPr sz="2800">
+                <a:solidFill>
+                  <a:srgbClr val="000000"/>
+                </a:solidFill>
+                <a:latin typeface="Play"/>
+                <a:ea typeface="Play"/>
+                <a:cs typeface="Play"/>
+              </a:rPr>
+              <a:t>• Нагрузка выше 20 задач требует внешней очереди</a:t>
+            </a:r>
+          </a:p>
+        </p:txBody>
+      </p:sp>
+    </p:spTree>
+  </p:cSld>
+  <p:clrMapOvr>
+    <a:masterClrMapping/>
+  </p:clrMapOvr>
+</p:sld>
+</file>
+
+<file path=ppt/slides/slide64.xml><?xml version="1.0" encoding="utf-8"?>
+<p:sld xmlns:a="http://schemas.openxmlformats.org/drawingml/2006/main" xmlns:p="http://schemas.openxmlformats.org/presentationml/2006/main" xmlns:r="http://schemas.openxmlformats.org/officeDocument/2006/relationships">
+  <p:cSld>
+    <p:bg>
+      <p:bgPr>
+        <a:solidFill>
+          <a:schemeClr val="lt2"/>
+        </a:solidFill>
+      </p:bgPr>
+    </p:bg>
+    <p:spTree>
+      <p:nvGrpSpPr>
+        <p:cNvPr id="1" name=""/>
+        <p:cNvGrpSpPr/>
+        <p:nvPr/>
+      </p:nvGrpSpPr>
+      <p:grpSpPr/>
+      <p:sp>
+        <p:nvSpPr>
+          <p:cNvPr id="782" name="Google Shape;782;p59"/>
+          <p:cNvSpPr txBox="1"/>
+          <p:nvPr/>
+        </p:nvSpPr>
+        <p:spPr>
+          <a:xfrm>
+            <a:off x="18692059" y="4674436"/>
+            <a:ext cx="4304330" cy="678198"/>
+          </a:xfrm>
+          <a:prstGeom prst="rect">
+            <a:avLst/>
+          </a:prstGeom>
+          <a:noFill/>
+          <a:ln>
+            <a:noFill/>
+          </a:ln>
+        </p:spPr>
+        <p:txBody>
+          <a:bodyPr anchorCtr="0" anchor="t" bIns="45700" lIns="91425" spcFirstLastPara="1" rIns="91425" wrap="square" tIns="45700">
+            <a:noAutofit/>
+          </a:bodyPr>
+          <a:lstStyle/>
+          <a:p>
+            <a:pPr indent="0" lvl="0" marL="0" marR="0" rtl="0" algn="l">
+              <a:lnSpc>
+                <a:spcPct val="110000"/>
+              </a:lnSpc>
+              <a:spcBef>
+                <a:spcPts val="0"/>
+              </a:spcBef>
+              <a:spcAft>
+                <a:spcPts val="0"/>
+              </a:spcAft>
+              <a:buClr>
+                <a:schemeClr val="dk1"/>
+              </a:buClr>
+              <a:buSzPts val="1600"/>
+              <a:buFont typeface="Arial"/>
+              <a:buNone/>
+            </a:pPr>
+            <a:r>
+              <a:t/>
+            </a:r>
+            <a:endParaRPr sz="1600">
+              <a:solidFill>
+                <a:schemeClr val="dk1"/>
+              </a:solidFill>
+              <a:latin typeface="Arial"/>
+              <a:ea typeface="Arial"/>
+              <a:cs typeface="Arial"/>
+              <a:sym typeface="Arial"/>
+            </a:endParaRPr>
+          </a:p>
+        </p:txBody>
+      </p:sp>
+      <p:sp>
+        <p:nvSpPr>
+          <p:cNvPr id="783" name="title"/>
+          <p:cNvSpPr txBox="1"/>
+          <p:nvPr/>
+        </p:nvSpPr>
+        <p:spPr>
+          <a:xfrm>
+            <a:off x="677387" y="692177"/>
+            <a:ext cx="10855878" cy="822960"/>
+          </a:xfrm>
+          <a:prstGeom prst="rect">
+            <a:avLst/>
+          </a:prstGeom>
+          <a:noFill/>
+        </p:spPr>
+        <p:txBody>
+          <a:bodyPr wrap="square" lIns="76200" rIns="76200" tIns="50800" bIns="50800">
+            <a:spAutoFit/>
+          </a:bodyPr>
+          <a:lstStyle/>
+          <a:p>
+            <a:pPr algn="l">
+              <a:spcAft>
+                <a:spcPts val="300"/>
+              </a:spcAft>
+              <a:defRPr sz="4000">
+                <a:solidFill>
+                  <a:srgbClr val="000000"/>
+                </a:solidFill>
+                <a:latin typeface="Arial"/>
+                <a:ea typeface="Arial"/>
+                <a:cs typeface="Arial"/>
+              </a:defRPr>
+            </a:pPr>
+            <a:r>
+              <a:rPr sz="4000">
+                <a:solidFill>
+                  <a:srgbClr val="000000"/>
+                </a:solidFill>
+                <a:latin typeface="Arial"/>
+                <a:ea typeface="Arial"/>
+                <a:cs typeface="Arial"/>
+              </a:rPr>
+              <a:t>Вопросы к руководству</a:t>
+            </a:r>
+          </a:p>
+        </p:txBody>
+      </p:sp>
+      <p:sp>
+        <p:nvSpPr>
+          <p:cNvPr id="784" name="lead"/>
+          <p:cNvSpPr txBox="1"/>
+          <p:nvPr/>
+        </p:nvSpPr>
+        <p:spPr>
+          <a:xfrm>
+            <a:off x="677387" y="2200937"/>
+            <a:ext cx="10855878" cy="1852008"/>
+          </a:xfrm>
+          <a:prstGeom prst="rect">
+            <a:avLst/>
+          </a:prstGeom>
+          <a:noFill/>
+        </p:spPr>
+        <p:txBody>
+          <a:bodyPr wrap="square" lIns="76200" rIns="76200" tIns="50800" bIns="50800">
+            <a:spAutoFit/>
+          </a:bodyPr>
+          <a:lstStyle/>
+          <a:p>
+            <a:pPr algn="l">
+              <a:spcAft>
+                <a:spcPts val="300"/>
+              </a:spcAft>
+              <a:defRPr sz="4800">
+                <a:solidFill>
+                  <a:srgbClr val="000000"/>
+                </a:solidFill>
+                <a:latin typeface="Play"/>
+                <a:ea typeface="Play"/>
+                <a:cs typeface="Play"/>
+              </a:defRPr>
+            </a:pPr>
+            <a:r>
+              <a:rPr sz="4800">
+                <a:solidFill>
+                  <a:srgbClr val="000000"/>
+                </a:solidFill>
+                <a:latin typeface="Play"/>
+                <a:ea typeface="Play"/>
+                <a:cs typeface="Play"/>
+              </a:rPr>
+              <a:t>Какие ресурсы нужны для масштабирования сервиса</a:t>
+            </a:r>
+          </a:p>
+        </p:txBody>
+      </p:sp>
+      <p:sp>
+        <p:nvSpPr>
+          <p:cNvPr id="785" name="body"/>
+          <p:cNvSpPr txBox="1"/>
+          <p:nvPr/>
+        </p:nvSpPr>
+        <p:spPr>
+          <a:xfrm>
+            <a:off x="677387" y="4300611"/>
+            <a:ext cx="10855878" cy="2028087"/>
+          </a:xfrm>
+          <a:prstGeom prst="rect">
+            <a:avLst/>
+          </a:prstGeom>
+          <a:noFill/>
+        </p:spPr>
+        <p:txBody>
+          <a:bodyPr wrap="square" lIns="76200" rIns="76200" tIns="50800" bIns="50800">
+            <a:spAutoFit/>
+          </a:bodyPr>
+          <a:lstStyle/>
+          <a:p>
+            <a:pPr algn="l">
+              <a:spcAft>
+                <a:spcPts val="300"/>
+              </a:spcAft>
+              <a:defRPr sz="3200">
+                <a:solidFill>
+                  <a:srgbClr val="000000"/>
+                </a:solidFill>
+                <a:latin typeface="Play"/>
+                <a:ea typeface="Play"/>
+                <a:cs typeface="Play"/>
+              </a:defRPr>
+            </a:pPr>
+            <a:r>
+              <a:rPr sz="3200">
+                <a:solidFill>
+                  <a:srgbClr val="000000"/>
+                </a:solidFill>
+                <a:latin typeface="Play"/>
+                <a:ea typeface="Play"/>
+                <a:cs typeface="Play"/>
+              </a:rPr>
+              <a:t>• Как обеспечить качество и проверку данных</a:t>
+            </a:r>
+          </a:p>
+          <a:p>
+            <a:pPr algn="l">
+              <a:spcAft>
+                <a:spcPts val="300"/>
+              </a:spcAft>
+              <a:defRPr sz="3200">
+                <a:solidFill>
+                  <a:srgbClr val="000000"/>
+                </a:solidFill>
+                <a:latin typeface="Play"/>
+                <a:ea typeface="Play"/>
+                <a:cs typeface="Play"/>
+              </a:defRPr>
+            </a:pPr>
+            <a:r>
+              <a:rPr sz="3200">
+                <a:solidFill>
+                  <a:srgbClr val="000000"/>
+                </a:solidFill>
+                <a:latin typeface="Play"/>
+                <a:ea typeface="Play"/>
+                <a:cs typeface="Play"/>
+              </a:rPr>
+              <a:t>• Как быстро интегрировать сервис в существующие процессы</a:t>
+            </a:r>
+          </a:p>
+        </p:txBody>
+      </p:sp>
+    </p:spTree>
+  </p:cSld>
+  <p:clrMapOvr>
+    <a:masterClrMapping/>
+  </p:clrMapOvr>
+</p:sld>
+</file>
+
+<file path=ppt/slides/slide65.xml><?xml version="1.0" encoding="utf-8"?>
+<p:sld xmlns:a="http://schemas.openxmlformats.org/drawingml/2006/main" xmlns:p="http://schemas.openxmlformats.org/presentationml/2006/main" xmlns:r="http://schemas.openxmlformats.org/officeDocument/2006/relationships">
+  <p:cSld>
+    <p:spTree>
+      <p:nvGrpSpPr>
+        <p:cNvPr id="1" name=""/>
+        <p:cNvGrpSpPr/>
+        <p:nvPr/>
+      </p:nvGrpSpPr>
+      <p:grpSpPr/>
+      <p:sp>
+        <p:nvSpPr>
+          <p:cNvPr id="2" name="title"/>
+          <p:cNvSpPr txBox="1"/>
+          <p:nvPr/>
+        </p:nvSpPr>
+        <p:spPr>
+          <a:xfrm>
+            <a:off x="658855" y="692177"/>
+            <a:ext cx="5242438" cy="1447800"/>
+          </a:xfrm>
+          <a:prstGeom prst="rect">
+            <a:avLst/>
+          </a:prstGeom>
+          <a:noFill/>
+        </p:spPr>
+        <p:txBody>
+          <a:bodyPr wrap="square" lIns="76200" rIns="76200" tIns="50800" bIns="50800">
+            <a:spAutoFit/>
+          </a:bodyPr>
+          <a:lstStyle/>
+          <a:p>
+            <a:pPr algn="l">
+              <a:spcAft>
+                <a:spcPts val="300"/>
+              </a:spcAft>
+              <a:defRPr sz="4000">
+                <a:solidFill>
+                  <a:srgbClr val="FFFFFF"/>
+                </a:solidFill>
+                <a:latin typeface="Arial"/>
+                <a:ea typeface="Arial"/>
+                <a:cs typeface="Arial"/>
+              </a:defRPr>
+            </a:pPr>
+            <a:r>
+              <a:rPr sz="4000">
+                <a:solidFill>
+                  <a:srgbClr val="FFFFFF"/>
+                </a:solidFill>
+                <a:latin typeface="Arial"/>
+                <a:ea typeface="Arial"/>
+                <a:cs typeface="Arial"/>
+              </a:rPr>
+              <a:t>Следующие шаги после одобрения</a:t>
+            </a:r>
+          </a:p>
+        </p:txBody>
+      </p:sp>
+      <p:sp>
+        <p:nvSpPr>
+          <p:cNvPr id="3" name="lead"/>
+          <p:cNvSpPr txBox="1"/>
+          <p:nvPr/>
+        </p:nvSpPr>
+        <p:spPr>
+          <a:xfrm>
+            <a:off x="658855" y="2380007"/>
+            <a:ext cx="5242438" cy="1306610"/>
+          </a:xfrm>
+          <a:prstGeom prst="rect">
+            <a:avLst/>
+          </a:prstGeom>
+          <a:noFill/>
+        </p:spPr>
+        <p:txBody>
+          <a:bodyPr wrap="square" lIns="76200" rIns="76200" tIns="50800" bIns="50800">
+            <a:spAutoFit/>
+          </a:bodyPr>
+          <a:lstStyle/>
+          <a:p>
+            <a:pPr algn="l">
+              <a:spcAft>
+                <a:spcPts val="300"/>
+              </a:spcAft>
+              <a:defRPr sz="2800">
+                <a:solidFill>
+                  <a:srgbClr val="FFFFFF"/>
+                </a:solidFill>
+                <a:latin typeface="Play"/>
+                <a:ea typeface="Play"/>
+                <a:cs typeface="Play"/>
+              </a:defRPr>
+            </a:pPr>
+            <a:r>
+              <a:rPr sz="2800">
+                <a:solidFill>
+                  <a:srgbClr val="FFFFFF"/>
+                </a:solidFill>
+                <a:latin typeface="Play"/>
+                <a:ea typeface="Play"/>
+                <a:cs typeface="Play"/>
+              </a:rPr>
+              <a:t>После одобрения подключить 4 команды в Q3 2026</a:t>
+            </a:r>
+          </a:p>
+        </p:txBody>
+      </p:sp>
+      <p:sp>
+        <p:nvSpPr>
+          <p:cNvPr id="4" name="body"/>
+          <p:cNvSpPr txBox="1"/>
+          <p:nvPr/>
+        </p:nvSpPr>
+        <p:spPr>
+          <a:xfrm>
+            <a:off x="658855" y="3882371"/>
+            <a:ext cx="5242438" cy="1760184"/>
+          </a:xfrm>
+          <a:prstGeom prst="rect">
+            <a:avLst/>
+          </a:prstGeom>
+          <a:noFill/>
+        </p:spPr>
+        <p:txBody>
+          <a:bodyPr wrap="square" lIns="76200" rIns="76200" tIns="50800" bIns="50800">
+            <a:spAutoFit/>
+          </a:bodyPr>
+          <a:lstStyle/>
+          <a:p>
+            <a:pPr algn="l">
+              <a:spcAft>
+                <a:spcPts val="300"/>
+              </a:spcAft>
+              <a:defRPr sz="1800">
+                <a:solidFill>
+                  <a:srgbClr val="FFFFFF"/>
+                </a:solidFill>
+                <a:latin typeface="Play"/>
+                <a:ea typeface="Play"/>
+                <a:cs typeface="Play"/>
+              </a:defRPr>
+            </a:pPr>
+            <a:r>
+              <a:rPr sz="1800">
+                <a:solidFill>
+                  <a:srgbClr val="FFFFFF"/>
+                </a:solidFill>
+                <a:latin typeface="Play"/>
+                <a:ea typeface="Play"/>
+                <a:cs typeface="Play"/>
+              </a:rPr>
+              <a:t>• В Q4 2026 обеспечить домен, HTTPS и доступ для всей компании</a:t>
+            </a:r>
+          </a:p>
+          <a:p>
+            <a:pPr algn="l">
+              <a:spcAft>
+                <a:spcPts val="300"/>
+              </a:spcAft>
+              <a:defRPr sz="1800">
+                <a:solidFill>
+                  <a:srgbClr val="FFFFFF"/>
+                </a:solidFill>
+                <a:latin typeface="Play"/>
+                <a:ea typeface="Play"/>
+                <a:cs typeface="Play"/>
+              </a:defRPr>
+            </a:pPr>
+            <a:r>
+              <a:rPr sz="1800">
+                <a:solidFill>
+                  <a:srgbClr val="FFFFFF"/>
+                </a:solidFill>
+                <a:latin typeface="Play"/>
+                <a:ea typeface="Play"/>
+                <a:cs typeface="Play"/>
+              </a:rPr>
+              <a:t>• В Q1 2027 добавить генерацию иллюстраций под стиль шаблона</a:t>
             </a:r>
           </a:p>
         </p:txBody>

--- a/samples/Шаблон_презентации_VK_Education__focus.pptx
+++ b/samples/Шаблон_презентации_VK_Education__focus.pptx
@@ -7566,7 +7566,7 @@
               <a:spcAft>
                 <a:spcPts val="300"/>
               </a:spcAft>
-              <a:defRPr sz="3200" b="0">
+              <a:defRPr sz="4000" b="0">
                 <a:solidFill>
                   <a:srgbClr val="000000"/>
                 </a:solidFill>
@@ -7576,7 +7576,7 @@
               </a:defRPr>
             </a:pPr>
             <a:r>
-              <a:rPr sz="3200" b="0">
+              <a:rPr sz="4000" b="0">
                 <a:solidFill>
                   <a:srgbClr val="000000"/>
                 </a:solidFill>
@@ -7584,7 +7584,7 @@
                 <a:ea typeface="Arial"/>
                 <a:cs typeface="Arial"/>
               </a:rPr>
-              <a:t>Защита инициативы: сервис автоматической вёрстки презентаций</a:t>
+              <a:t>Автоматическая вёрстка презентаций</a:t>
             </a:r>
           </a:p>
         </p:txBody>
@@ -7691,7 +7691,7 @@
         <p:spPr>
           <a:xfrm>
             <a:off x="677387" y="2200937"/>
-            <a:ext cx="10855878" cy="509172"/>
+            <a:ext cx="10855878" cy="472802"/>
           </a:xfrm>
           <a:prstGeom prst="rect">
             <a:avLst/>
@@ -7726,7 +7726,7 @@
                 <a:ea typeface="Play"/>
                 <a:cs typeface="Play"/>
               </a:rPr>
-              <a:t>Отделы собирают презентации вручную, затрачивая 186 минут на 12-слайдовую колоду</a:t>
+              <a:t>Сборка одной колоды 12 слайдов занимает 186 минут</a:t>
             </a:r>
           </a:p>
         </p:txBody>
@@ -7739,8 +7739,8 @@
         </p:nvSpPr>
         <p:spPr>
           <a:xfrm>
-            <a:off x="677387" y="2710110"/>
-            <a:ext cx="10855878" cy="881424"/>
+            <a:off x="677387" y="2691104"/>
+            <a:ext cx="10855878" cy="900430"/>
           </a:xfrm>
           <a:prstGeom prst="rect">
             <a:avLst/>
@@ -7775,7 +7775,7 @@
                 <a:ea typeface="Play"/>
                 <a:cs typeface="Play"/>
               </a:rPr>
-              <a:t>• После ревью дизайнеров добавляется 74 минуты правок</a:t>
+              <a:t>• 74 минуты уходит на правки после ревью дизайнера</a:t>
             </a:r>
           </a:p>
           <a:p>
@@ -7801,7 +7801,7 @@
                 <a:ea typeface="Play"/>
                 <a:cs typeface="Play"/>
               </a:rPr>
-              <a:t>• 19 из 42 колод нарушают фирменный стиль: чужие гарнитуры и цвета</a:t>
+              <a:t>• 19 из 42 колод нарушают фирменный стиль</a:t>
             </a:r>
           </a:p>
           <a:p>
@@ -7827,7 +7827,7 @@
                 <a:ea typeface="Play"/>
                 <a:cs typeface="Play"/>
               </a:rPr>
-              <a:t>• Дизайнеры закрывают 11 запросов в неделю из 27 поступающих, ожидание 6 дней</a:t>
+              <a:t>• Дизайн-отдел из 4 человек закрывает 11 запросов в неделю из 27</a:t>
             </a:r>
           </a:p>
           <a:p>
@@ -7853,7 +7853,7 @@
                 <a:ea typeface="Play"/>
                 <a:cs typeface="Play"/>
               </a:rPr>
-              <a:t>• Время до первой версии колоды составляет 6 рабочих дней</a:t>
+              <a:t>• Средний срок ожидания в очереди — 6 рабочих дней</a:t>
             </a:r>
           </a:p>
         </p:txBody>
@@ -7940,8 +7940,8 @@
         </p:nvSpPr>
         <p:spPr>
           <a:xfrm>
-            <a:off x="677387" y="2391838"/>
-            <a:ext cx="2066959" cy="1281514"/>
+            <a:off x="677387" y="1824859"/>
+            <a:ext cx="10855878" cy="634621"/>
           </a:xfrm>
           <a:prstGeom prst="homePlate">
             <a:avLst/>
@@ -7972,7 +7972,7 @@
           <a:lstStyle/>
           <a:p>
             <a:pPr algn="ctr">
-              <a:defRPr sz="1096" b="0">
+              <a:defRPr sz="1400" b="0">
                 <a:solidFill>
                   <a:srgbClr val="FFFFFF"/>
                 </a:solidFill>
@@ -7982,7 +7982,7 @@
               </a:defRPr>
             </a:pPr>
             <a:r>
-              <a:rPr sz="1096" b="0">
+              <a:rPr sz="1400" b="0">
                 <a:solidFill>
                   <a:srgbClr val="FFFFFF"/>
                 </a:solidFill>
@@ -7990,7 +7990,7 @@
                 <a:ea typeface="Play"/>
                 <a:cs typeface="Play"/>
               </a:rPr>
-              <a:t>Шаблон</a:t>
+              <a:t>Загрузка шаблона</a:t>
             </a:r>
           </a:p>
         </p:txBody>
@@ -8003,8 +8003,8 @@
         </p:nvSpPr>
         <p:spPr>
           <a:xfrm>
-            <a:off x="2874616" y="2391838"/>
-            <a:ext cx="2066959" cy="1281514"/>
+            <a:off x="677387" y="2562791"/>
+            <a:ext cx="10855878" cy="634621"/>
           </a:xfrm>
           <a:prstGeom prst="chevron">
             <a:avLst/>
@@ -8035,7 +8035,7 @@
           <a:lstStyle/>
           <a:p>
             <a:pPr algn="ctr">
-              <a:defRPr sz="1096" b="0">
+              <a:defRPr sz="1400" b="0">
                 <a:solidFill>
                   <a:srgbClr val="FFFFFF"/>
                 </a:solidFill>
@@ -8045,7 +8045,7 @@
               </a:defRPr>
             </a:pPr>
             <a:r>
-              <a:rPr sz="1096" b="0">
+              <a:rPr sz="1400" b="0">
                 <a:solidFill>
                   <a:srgbClr val="FFFFFF"/>
                 </a:solidFill>
@@ -8053,7 +8053,7 @@
                 <a:ea typeface="Play"/>
                 <a:cs typeface="Play"/>
               </a:rPr>
-              <a:t>План</a:t>
+              <a:t>Анализ дизайна</a:t>
             </a:r>
           </a:p>
         </p:txBody>
@@ -8066,8 +8066,8 @@
         </p:nvSpPr>
         <p:spPr>
           <a:xfrm>
-            <a:off x="5071846" y="2391838"/>
-            <a:ext cx="2066959" cy="1281514"/>
+            <a:off x="677387" y="3300723"/>
+            <a:ext cx="10855878" cy="634621"/>
           </a:xfrm>
           <a:prstGeom prst="chevron">
             <a:avLst/>
@@ -8098,7 +8098,7 @@
           <a:lstStyle/>
           <a:p>
             <a:pPr algn="ctr">
-              <a:defRPr sz="1096" b="0">
+              <a:defRPr sz="1400" b="0">
                 <a:solidFill>
                   <a:srgbClr val="FFFFFF"/>
                 </a:solidFill>
@@ -8108,7 +8108,7 @@
               </a:defRPr>
             </a:pPr>
             <a:r>
-              <a:rPr sz="1096" b="0">
+              <a:rPr sz="1400" b="0">
                 <a:solidFill>
                   <a:srgbClr val="FFFFFF"/>
                 </a:solidFill>
@@ -8116,7 +8116,7 @@
                 <a:ea typeface="Play"/>
                 <a:cs typeface="Play"/>
               </a:rPr>
-              <a:t>Вёрстка</a:t>
+              <a:t>План колоды</a:t>
             </a:r>
           </a:p>
         </p:txBody>
@@ -8129,8 +8129,8 @@
         </p:nvSpPr>
         <p:spPr>
           <a:xfrm>
-            <a:off x="7269076" y="2391838"/>
-            <a:ext cx="2066959" cy="1281514"/>
+            <a:off x="677387" y="4038655"/>
+            <a:ext cx="10855878" cy="634621"/>
           </a:xfrm>
           <a:prstGeom prst="chevron">
             <a:avLst/>
@@ -8161,7 +8161,7 @@
           <a:lstStyle/>
           <a:p>
             <a:pPr algn="ctr">
-              <a:defRPr sz="1096" b="0">
+              <a:defRPr sz="1400" b="0">
                 <a:solidFill>
                   <a:srgbClr val="FFFFFF"/>
                 </a:solidFill>
@@ -8171,7 +8171,7 @@
               </a:defRPr>
             </a:pPr>
             <a:r>
-              <a:rPr sz="1096" b="0">
+              <a:rPr sz="1400" b="0">
                 <a:solidFill>
                   <a:srgbClr val="FFFFFF"/>
                 </a:solidFill>
@@ -8179,7 +8179,7 @@
                 <a:ea typeface="Play"/>
                 <a:cs typeface="Play"/>
               </a:rPr>
-              <a:t>Аудит</a:t>
+              <a:t>Авто-верстка</a:t>
             </a:r>
           </a:p>
         </p:txBody>
@@ -8192,8 +8192,8 @@
         </p:nvSpPr>
         <p:spPr>
           <a:xfrm>
-            <a:off x="9466305" y="2391838"/>
-            <a:ext cx="2066959" cy="1281514"/>
+            <a:off x="677387" y="4776587"/>
+            <a:ext cx="10855878" cy="634621"/>
           </a:xfrm>
           <a:prstGeom prst="chevron">
             <a:avLst/>
@@ -8224,7 +8224,7 @@
           <a:lstStyle/>
           <a:p>
             <a:pPr algn="ctr">
-              <a:defRPr sz="1096" b="0">
+              <a:defRPr sz="1400" b="0">
                 <a:solidFill>
                   <a:srgbClr val="FFFFFF"/>
                 </a:solidFill>
@@ -8234,7 +8234,7 @@
               </a:defRPr>
             </a:pPr>
             <a:r>
-              <a:rPr sz="1096" b="0">
+              <a:rPr sz="1400" b="0">
                 <a:solidFill>
                   <a:srgbClr val="FFFFFF"/>
                 </a:solidFill>
@@ -8242,40 +8242,54 @@
                 <a:ea typeface="Play"/>
                 <a:cs typeface="Play"/>
               </a:rPr>
-              <a:t>Экспорт</a:t>
+              <a:t>Аудит качества</a:t>
             </a:r>
           </a:p>
         </p:txBody>
       </p:sp>
       <p:sp>
         <p:nvSpPr>
-          <p:cNvPr id="8" name="body"/>
-          <p:cNvSpPr txBox="1"/>
+          <p:cNvPr id="8" name="Chevron 7"/>
+          <p:cNvSpPr/>
           <p:nvPr/>
         </p:nvSpPr>
         <p:spPr>
           <a:xfrm>
-            <a:off x="677387" y="4463437"/>
-            <a:ext cx="10855878" cy="1737360"/>
+            <a:off x="677387" y="5514520"/>
+            <a:ext cx="10855878" cy="634621"/>
           </a:xfrm>
-          <a:prstGeom prst="rect">
+          <a:prstGeom prst="chevron">
             <a:avLst/>
           </a:prstGeom>
-          <a:noFill/>
+          <a:solidFill>
+            <a:srgbClr val="0077FF"/>
+          </a:solidFill>
+          <a:ln>
+            <a:noFill/>
+          </a:ln>
         </p:spPr>
+        <p:style>
+          <a:lnRef idx="1">
+            <a:schemeClr val="accent1"/>
+          </a:lnRef>
+          <a:fillRef idx="3">
+            <a:schemeClr val="accent1"/>
+          </a:fillRef>
+          <a:effectRef idx="2">
+            <a:schemeClr val="accent1"/>
+          </a:effectRef>
+          <a:fontRef idx="minor">
+            <a:schemeClr val="lt1"/>
+          </a:fontRef>
+        </p:style>
         <p:txBody>
-          <a:bodyPr wrap="square" lIns="76200" rIns="76200" tIns="50800" bIns="50800">
-            <a:spAutoFit/>
-          </a:bodyPr>
+          <a:bodyPr rtlCol="0" anchor="ctr" wrap="square" lIns="12700" rIns="12700" tIns="12700" bIns="12700"/>
           <a:lstStyle/>
           <a:p>
-            <a:pPr algn="l">
-              <a:spcAft>
-                <a:spcPts val="300"/>
-              </a:spcAft>
-              <a:defRPr sz="1800">
-                <a:solidFill>
-                  <a:srgbClr val="000000"/>
+            <a:pPr algn="ctr">
+              <a:defRPr sz="1400" b="0">
+                <a:solidFill>
+                  <a:srgbClr val="FFFFFF"/>
                 </a:solidFill>
                 <a:latin typeface="Play"/>
                 <a:ea typeface="Play"/>
@@ -8283,93 +8297,15 @@
               </a:defRPr>
             </a:pPr>
             <a:r>
-              <a:rPr sz="1800">
-                <a:solidFill>
-                  <a:srgbClr val="000000"/>
+              <a:rPr sz="1400" b="0">
+                <a:solidFill>
+                  <a:srgbClr val="FFFFFF"/>
                 </a:solidFill>
                 <a:latin typeface="Play"/>
                 <a:ea typeface="Play"/>
                 <a:cs typeface="Play"/>
               </a:rPr>
-              <a:t>• Сервис принимает pptx-шаблон, документы, таблицы, заметки.</a:t>
-            </a:r>
-          </a:p>
-          <a:p>
-            <a:pPr algn="l">
-              <a:spcAft>
-                <a:spcPts val="300"/>
-              </a:spcAft>
-              <a:defRPr sz="1800">
-                <a:solidFill>
-                  <a:srgbClr val="000000"/>
-                </a:solidFill>
-                <a:latin typeface="Play"/>
-                <a:ea typeface="Play"/>
-                <a:cs typeface="Play"/>
-              </a:defRPr>
-            </a:pPr>
-            <a:r>
-              <a:rPr sz="1800">
-                <a:solidFill>
-                  <a:srgbClr val="000000"/>
-                </a:solidFill>
-                <a:latin typeface="Play"/>
-                <a:ea typeface="Play"/>
-                <a:cs typeface="Play"/>
-              </a:rPr>
-              <a:t>• Шабл превращается:гарнитуры, шкала кеглей, палитра</a:t>
-            </a:r>
-          </a:p>
-          <a:p>
-            <a:pPr algn="l">
-              <a:spcAft>
-                <a:spcPts val="300"/>
-              </a:spcAft>
-              <a:defRPr sz="1800">
-                <a:solidFill>
-                  <a:srgbClr val="000000"/>
-                </a:solidFill>
-                <a:latin typeface="Play"/>
-                <a:ea typeface="Play"/>
-                <a:cs typeface="Play"/>
-              </a:defRPr>
-            </a:pPr>
-            <a:r>
-              <a:rPr sz="1800">
-                <a:solidFill>
-                  <a:srgbClr val="000000"/>
-                </a:solidFill>
-                <a:latin typeface="Play"/>
-                <a:ea typeface="Play"/>
-                <a:cs typeface="Play"/>
-              </a:rPr>
-              <a:t>• Бриф генерирует колоду, автоматическая вёрстка</a:t>
-            </a:r>
-          </a:p>
-          <a:p>
-            <a:pPr algn="l">
-              <a:spcAft>
-                <a:spcPts val="300"/>
-              </a:spcAft>
-              <a:defRPr sz="1800">
-                <a:solidFill>
-                  <a:srgbClr val="000000"/>
-                </a:solidFill>
-                <a:latin typeface="Play"/>
-                <a:ea typeface="Play"/>
-                <a:cs typeface="Play"/>
-              </a:defRPr>
-            </a:pPr>
-            <a:r>
-              <a:rPr sz="1800">
-                <a:solidFill>
-                  <a:srgbClr val="000000"/>
-                </a:solidFill>
-                <a:latin typeface="Play"/>
-                <a:ea typeface="Play"/>
-                <a:cs typeface="Play"/>
-              </a:rPr>
-              <a:t>• Экспорт в pptx, pdf, html; слайды редактируемы.</a:t>
+              <a:t>Экспорт</a:t>
             </a:r>
           </a:p>
         </p:txBody>
@@ -8502,7 +8438,7 @@
         <p:spPr>
           <a:xfrm>
             <a:off x="677387" y="2200937"/>
-            <a:ext cx="10855878" cy="731110"/>
+            <a:ext cx="10855878" cy="783458"/>
           </a:xfrm>
           <a:prstGeom prst="rect">
             <a:avLst/>
@@ -8537,7 +8473,7 @@
                 <a:ea typeface="Play"/>
                 <a:cs typeface="Play"/>
               </a:rPr>
-              <a:t>Время сборки колоды сократилось с 186 до 4 минут</a:t>
+              <a:t>Средняя сборка колоды 12 слайдов — 4 минуты вместо 186</a:t>
             </a:r>
           </a:p>
         </p:txBody>
@@ -8550,8 +8486,8 @@
         </p:nvSpPr>
         <p:spPr>
           <a:xfrm>
-            <a:off x="677387" y="3061068"/>
-            <a:ext cx="10855878" cy="1290195"/>
+            <a:off x="677387" y="3113415"/>
+            <a:ext cx="10855878" cy="1237848"/>
           </a:xfrm>
           <a:prstGeom prst="rect">
             <a:avLst/>
@@ -8586,7 +8522,7 @@
                 <a:ea typeface="Play"/>
                 <a:cs typeface="Play"/>
               </a:rPr>
-              <a:t>• Первая версия готова за 1 день вместо 6 рабочих дней</a:t>
+              <a:t>• Время до первой версии сократилось с 6 рабочих дней до 1</a:t>
             </a:r>
           </a:p>
           <a:p>
@@ -8612,7 +8548,7 @@
                 <a:ea typeface="Play"/>
                 <a:cs typeface="Play"/>
               </a:rPr>
-              <a:t>• Нарушений фирменного стиля в пилоте 2 из 68 колод, исправлены автоматически</a:t>
+              <a:t>• Нарушений фирменного стиля в пилоте — 2 из 68 колод</a:t>
             </a:r>
           </a:p>
           <a:p>
@@ -8638,7 +8574,7 @@
                 <a:ea typeface="Play"/>
                 <a:cs typeface="Play"/>
               </a:rPr>
-              <a:t>• Дизайнеры закрыли 38 запросов вместо 11 в неделю, рутина ушла в сервис</a:t>
+              <a:t>• Дизайнеры закрыли 38 запросов за 6 недель вместо 11 в неделю</a:t>
             </a:r>
           </a:p>
         </p:txBody>
@@ -8725,8 +8661,8 @@
         </p:nvSpPr>
         <p:spPr>
           <a:xfrm>
-            <a:off x="677387" y="2931844"/>
-            <a:ext cx="10855878" cy="75563"/>
+            <a:off x="677387" y="2916352"/>
+            <a:ext cx="10855878" cy="74553"/>
           </a:xfrm>
           <a:prstGeom prst="rect">
             <a:avLst/>
@@ -8768,8 +8704,8 @@
         </p:nvSpPr>
         <p:spPr>
           <a:xfrm>
-            <a:off x="1757305" y="2692559"/>
-            <a:ext cx="554132" cy="554132"/>
+            <a:off x="2213338" y="2680267"/>
+            <a:ext cx="546723" cy="546723"/>
           </a:xfrm>
           <a:prstGeom prst="ellipse">
             <a:avLst/>
@@ -8812,7 +8748,7 @@
         <p:spPr>
           <a:xfrm>
             <a:off x="677387" y="1773204"/>
-            <a:ext cx="4070954" cy="957137"/>
+            <a:ext cx="5427939" cy="944340"/>
           </a:xfrm>
           <a:prstGeom prst="rect">
             <a:avLst/>
@@ -8844,7 +8780,7 @@
                 <a:ea typeface="Play"/>
                 <a:cs typeface="Play"/>
               </a:rPr>
-              <a:t>Подключение 4 команд</a:t>
+              <a:t>Третий квартал 2026: подключение 4 команд</a:t>
             </a:r>
           </a:p>
         </p:txBody>
@@ -8857,8 +8793,8 @@
         </p:nvSpPr>
         <p:spPr>
           <a:xfrm>
-            <a:off x="4471275" y="2692559"/>
-            <a:ext cx="554132" cy="554132"/>
+            <a:off x="5831964" y="2680267"/>
+            <a:ext cx="546723" cy="546723"/>
           </a:xfrm>
           <a:prstGeom prst="ellipse">
             <a:avLst/>
@@ -8900,8 +8836,8 @@
         </p:nvSpPr>
         <p:spPr>
           <a:xfrm>
-            <a:off x="2712864" y="3485976"/>
-            <a:ext cx="4070954" cy="957137"/>
+            <a:off x="3391356" y="3463076"/>
+            <a:ext cx="5427939" cy="944340"/>
           </a:xfrm>
           <a:prstGeom prst="rect">
             <a:avLst/>
@@ -8933,7 +8869,7 @@
                 <a:ea typeface="Play"/>
                 <a:cs typeface="Play"/>
               </a:rPr>
-              <a:t>Домен и HTTPS</a:t>
+              <a:t>Четвёртый квартал 2026: доступ для всей компании</a:t>
             </a:r>
           </a:p>
         </p:txBody>
@@ -8946,8 +8882,8 @@
         </p:nvSpPr>
         <p:spPr>
           <a:xfrm>
-            <a:off x="7185244" y="2692559"/>
-            <a:ext cx="554132" cy="554132"/>
+            <a:off x="9450590" y="2680267"/>
+            <a:ext cx="546723" cy="546723"/>
           </a:xfrm>
           <a:prstGeom prst="ellipse">
             <a:avLst/>
@@ -8989,8 +8925,8 @@
         </p:nvSpPr>
         <p:spPr>
           <a:xfrm>
-            <a:off x="5426833" y="1773204"/>
-            <a:ext cx="4070954" cy="957137"/>
+            <a:off x="6105326" y="1773204"/>
+            <a:ext cx="5427939" cy="944340"/>
           </a:xfrm>
           <a:prstGeom prst="rect">
             <a:avLst/>
@@ -9022,110 +8958,21 @@
                 <a:ea typeface="Play"/>
                 <a:cs typeface="Play"/>
               </a:rPr>
-              <a:t>Доступ для всей компании</a:t>
+              <a:t>Первый квартал 2027: генерация иллюстраций</a:t>
             </a:r>
           </a:p>
         </p:txBody>
       </p:sp>
       <p:sp>
         <p:nvSpPr>
-          <p:cNvPr id="10" name="Oval 9"/>
-          <p:cNvSpPr/>
-          <p:nvPr/>
-        </p:nvSpPr>
-        <p:spPr>
-          <a:xfrm>
-            <a:off x="9899214" y="2692559"/>
-            <a:ext cx="554132" cy="554132"/>
-          </a:xfrm>
-          <a:prstGeom prst="ellipse">
-            <a:avLst/>
-          </a:prstGeom>
-          <a:solidFill>
-            <a:srgbClr val="0077FF"/>
-          </a:solidFill>
-          <a:ln>
-            <a:noFill/>
-          </a:ln>
-        </p:spPr>
-        <p:style>
-          <a:lnRef idx="1">
-            <a:schemeClr val="accent1"/>
-          </a:lnRef>
-          <a:fillRef idx="3">
-            <a:schemeClr val="accent1"/>
-          </a:fillRef>
-          <a:effectRef idx="2">
-            <a:schemeClr val="accent1"/>
-          </a:effectRef>
-          <a:fontRef idx="minor">
-            <a:schemeClr val="lt1"/>
-          </a:fontRef>
-        </p:style>
-        <p:txBody>
-          <a:bodyPr rtlCol="0" anchor="ctr"/>
-          <a:lstStyle/>
-          <a:p>
-            <a:pPr algn="ctr"/>
-          </a:p>
-        </p:txBody>
-      </p:sp>
-      <p:sp>
-        <p:nvSpPr>
-          <p:cNvPr id="11" name="TextBox 10"/>
+          <p:cNvPr id="10" name="body"/>
           <p:cNvSpPr txBox="1"/>
           <p:nvPr/>
         </p:nvSpPr>
         <p:spPr>
           <a:xfrm>
-            <a:off x="7462310" y="3485976"/>
-            <a:ext cx="4070954" cy="957137"/>
-          </a:xfrm>
-          <a:prstGeom prst="rect">
-            <a:avLst/>
-          </a:prstGeom>
-          <a:noFill/>
-        </p:spPr>
-        <p:txBody>
-          <a:bodyPr wrap="square" lIns="12700" rIns="12700" tIns="12700" bIns="12700">
-            <a:spAutoFit/>
-          </a:bodyPr>
-          <a:lstStyle/>
-          <a:p>
-            <a:pPr algn="ctr">
-              <a:defRPr sz="1400" b="0">
-                <a:solidFill>
-                  <a:srgbClr val="000000"/>
-                </a:solidFill>
-                <a:latin typeface="Play"/>
-                <a:ea typeface="Play"/>
-                <a:cs typeface="Play"/>
-              </a:defRPr>
-            </a:pPr>
-            <a:r>
-              <a:rPr sz="1400" b="0">
-                <a:solidFill>
-                  <a:srgbClr val="000000"/>
-                </a:solidFill>
-                <a:latin typeface="Play"/>
-                <a:ea typeface="Play"/>
-                <a:cs typeface="Play"/>
-              </a:rPr>
-              <a:t>Генерация иллюстраций</a:t>
-            </a:r>
-          </a:p>
-        </p:txBody>
-      </p:sp>
-      <p:sp>
-        <p:nvSpPr>
-          <p:cNvPr id="12" name="body"/>
-          <p:cNvSpPr txBox="1"/>
-          <p:nvPr/>
-        </p:nvSpPr>
-        <p:spPr>
-          <a:xfrm>
-            <a:off x="677387" y="4463437"/>
-            <a:ext cx="10855878" cy="1737360"/>
+            <a:off x="677387" y="4429760"/>
+            <a:ext cx="10855878" cy="1771037"/>
           </a:xfrm>
           <a:prstGeom prst="rect">
             <a:avLst/>
@@ -9160,7 +9007,7 @@
                 <a:ea typeface="Play"/>
                 <a:cs typeface="Play"/>
               </a:rPr>
-              <a:t>• Сервис на машине 2 vCPU / 2 ГБ RAM</a:t>
+              <a:t>• Сервис на 1 машине: 2 vCPU / 2 ГБ RAM</a:t>
             </a:r>
           </a:p>
           <a:p>
@@ -9186,7 +9033,7 @@
                 <a:ea typeface="Play"/>
                 <a:cs typeface="Play"/>
               </a:rPr>
-              <a:t>• Модель gpt-oss-20b подключена через OpenAI-протокол</a:t>
+              <a:t>• Инференс 6 недель: 1 400 руб.</a:t>
             </a:r>
           </a:p>
           <a:p>
@@ -9212,7 +9059,7 @@
                 <a:ea typeface="Play"/>
                 <a:cs typeface="Play"/>
               </a:rPr>
-              <a:t>• Стоимость инференса за 6 недель 1 400 руб.</a:t>
+              <a:t>• Подключение 4 команд: 3й квартал 2026</a:t>
             </a:r>
           </a:p>
           <a:p>
@@ -9238,7 +9085,33 @@
                 <a:ea typeface="Play"/>
                 <a:cs typeface="Play"/>
               </a:rPr>
-              <a:t>• Нагрузка выше 20 задач требует внешней очереди.</a:t>
+              <a:t>• Доступ всей компании: 4й квартал 2026</a:t>
+            </a:r>
+          </a:p>
+          <a:p>
+            <a:pPr algn="l">
+              <a:spcAft>
+                <a:spcPts val="300"/>
+              </a:spcAft>
+              <a:defRPr sz="1600">
+                <a:solidFill>
+                  <a:srgbClr val="000000"/>
+                </a:solidFill>
+                <a:latin typeface="Play"/>
+                <a:ea typeface="Play"/>
+                <a:cs typeface="Play"/>
+              </a:defRPr>
+            </a:pPr>
+            <a:r>
+              <a:rPr sz="1600">
+                <a:solidFill>
+                  <a:srgbClr val="000000"/>
+                </a:solidFill>
+                <a:latin typeface="Play"/>
+                <a:ea typeface="Play"/>
+                <a:cs typeface="Play"/>
+              </a:rPr>
+              <a:t>• Иллюстрации в стиле шаблона: 1й квартал 2027</a:t>
             </a:r>
           </a:p>
         </p:txBody>
@@ -9252,230 +9125,6 @@
 </file>
 
 <file path=ppt/slides/slide61.xml><?xml version="1.0" encoding="utf-8"?>
-<p:sld xmlns:a="http://schemas.openxmlformats.org/drawingml/2006/main" xmlns:p="http://schemas.openxmlformats.org/presentationml/2006/main" xmlns:r="http://schemas.openxmlformats.org/officeDocument/2006/relationships">
-  <p:cSld>
-    <p:bg>
-      <p:bgPr>
-        <a:solidFill>
-          <a:schemeClr val="lt2"/>
-        </a:solidFill>
-      </p:bgPr>
-    </p:bg>
-    <p:spTree>
-      <p:nvGrpSpPr>
-        <p:cNvPr id="1" name=""/>
-        <p:cNvGrpSpPr/>
-        <p:nvPr/>
-      </p:nvGrpSpPr>
-      <p:grpSpPr/>
-      <p:sp>
-        <p:nvSpPr>
-          <p:cNvPr id="2" name="title"/>
-          <p:cNvSpPr txBox="1"/>
-          <p:nvPr/>
-        </p:nvSpPr>
-        <p:spPr>
-          <a:xfrm>
-            <a:off x="677387" y="692177"/>
-            <a:ext cx="10855878" cy="822960"/>
-          </a:xfrm>
-          <a:prstGeom prst="rect">
-            <a:avLst/>
-          </a:prstGeom>
-          <a:noFill/>
-        </p:spPr>
-        <p:txBody>
-          <a:bodyPr wrap="square" lIns="76200" rIns="76200" tIns="50800" bIns="50800">
-            <a:spAutoFit/>
-          </a:bodyPr>
-          <a:lstStyle/>
-          <a:p>
-            <a:pPr algn="l">
-              <a:spcAft>
-                <a:spcPts val="300"/>
-              </a:spcAft>
-              <a:defRPr sz="4000">
-                <a:solidFill>
-                  <a:srgbClr val="000000"/>
-                </a:solidFill>
-                <a:latin typeface="Arial"/>
-                <a:ea typeface="Arial"/>
-                <a:cs typeface="Arial"/>
-              </a:defRPr>
-            </a:pPr>
-            <a:r>
-              <a:rPr sz="4000">
-                <a:solidFill>
-                  <a:srgbClr val="000000"/>
-                </a:solidFill>
-                <a:latin typeface="Arial"/>
-                <a:ea typeface="Arial"/>
-                <a:cs typeface="Arial"/>
-              </a:rPr>
-              <a:t>План пилота</a:t>
-            </a:r>
-          </a:p>
-        </p:txBody>
-      </p:sp>
-      <p:sp>
-        <p:nvSpPr>
-          <p:cNvPr id="3" name="lead"/>
-          <p:cNvSpPr txBox="1"/>
-          <p:nvPr/>
-        </p:nvSpPr>
-        <p:spPr>
-          <a:xfrm>
-            <a:off x="677387" y="1773204"/>
-            <a:ext cx="10855878" cy="1505381"/>
-          </a:xfrm>
-          <a:prstGeom prst="rect">
-            <a:avLst/>
-          </a:prstGeom>
-          <a:noFill/>
-        </p:spPr>
-        <p:txBody>
-          <a:bodyPr wrap="square" lIns="76200" rIns="76200" tIns="50800" bIns="50800">
-            <a:spAutoFit/>
-          </a:bodyPr>
-          <a:lstStyle/>
-          <a:p>
-            <a:pPr algn="l">
-              <a:spcAft>
-                <a:spcPts val="300"/>
-              </a:spcAft>
-              <a:defRPr sz="4000">
-                <a:solidFill>
-                  <a:srgbClr val="000000"/>
-                </a:solidFill>
-                <a:latin typeface="Play"/>
-                <a:ea typeface="Play"/>
-                <a:cs typeface="Play"/>
-              </a:defRPr>
-            </a:pPr>
-            <a:r>
-              <a:rPr sz="4000">
-                <a:solidFill>
-                  <a:srgbClr val="000000"/>
-                </a:solidFill>
-                <a:latin typeface="Play"/>
-                <a:ea typeface="Play"/>
-                <a:cs typeface="Play"/>
-              </a:rPr>
-              <a:t>Пилот длился 6 недель, включал 2 команды и 68 презентаций</a:t>
-            </a:r>
-          </a:p>
-        </p:txBody>
-      </p:sp>
-      <p:sp>
-        <p:nvSpPr>
-          <p:cNvPr id="4" name="body"/>
-          <p:cNvSpPr txBox="1"/>
-          <p:nvPr/>
-        </p:nvSpPr>
-        <p:spPr>
-          <a:xfrm>
-            <a:off x="677387" y="3544241"/>
-            <a:ext cx="10855878" cy="2656556"/>
-          </a:xfrm>
-          <a:prstGeom prst="rect">
-            <a:avLst/>
-          </a:prstGeom>
-          <a:noFill/>
-        </p:spPr>
-        <p:txBody>
-          <a:bodyPr wrap="square" lIns="76200" rIns="76200" tIns="50800" bIns="50800">
-            <a:spAutoFit/>
-          </a:bodyPr>
-          <a:lstStyle/>
-          <a:p>
-            <a:pPr algn="l">
-              <a:spcAft>
-                <a:spcPts val="300"/>
-              </a:spcAft>
-              <a:defRPr sz="2400">
-                <a:solidFill>
-                  <a:srgbClr val="000000"/>
-                </a:solidFill>
-                <a:latin typeface="Play"/>
-                <a:ea typeface="Play"/>
-                <a:cs typeface="Play"/>
-              </a:defRPr>
-            </a:pPr>
-            <a:r>
-              <a:rPr sz="2400">
-                <a:solidFill>
-                  <a:srgbClr val="000000"/>
-                </a:solidFill>
-                <a:latin typeface="Play"/>
-                <a:ea typeface="Play"/>
-                <a:cs typeface="Play"/>
-              </a:rPr>
-              <a:t>• Средняя сборка колоды 4 минуты вместо 186, первая версия 1 день вместо 6</a:t>
-            </a:r>
-          </a:p>
-          <a:p>
-            <a:pPr algn="l">
-              <a:spcAft>
-                <a:spcPts val="300"/>
-              </a:spcAft>
-              <a:defRPr sz="2400">
-                <a:solidFill>
-                  <a:srgbClr val="000000"/>
-                </a:solidFill>
-                <a:latin typeface="Play"/>
-                <a:ea typeface="Play"/>
-                <a:cs typeface="Play"/>
-              </a:defRPr>
-            </a:pPr>
-            <a:r>
-              <a:rPr sz="2400">
-                <a:solidFill>
-                  <a:srgbClr val="000000"/>
-                </a:solidFill>
-                <a:latin typeface="Play"/>
-                <a:ea typeface="Play"/>
-                <a:cs typeface="Play"/>
-              </a:rPr>
-              <a:t>• Нарушений стиля 2 из 68 колод, обе исправлены автоматическими правками</a:t>
-            </a:r>
-          </a:p>
-          <a:p>
-            <a:pPr algn="l">
-              <a:spcAft>
-                <a:spcPts val="300"/>
-              </a:spcAft>
-              <a:defRPr sz="2400">
-                <a:solidFill>
-                  <a:srgbClr val="000000"/>
-                </a:solidFill>
-                <a:latin typeface="Play"/>
-                <a:ea typeface="Play"/>
-                <a:cs typeface="Play"/>
-              </a:defRPr>
-            </a:pPr>
-            <a:r>
-              <a:rPr sz="2400">
-                <a:solidFill>
-                  <a:srgbClr val="000000"/>
-                </a:solidFill>
-                <a:latin typeface="Play"/>
-                <a:ea typeface="Play"/>
-                <a:cs typeface="Play"/>
-              </a:rPr>
-              <a:t>• Дизайнеры закрыли 38 запросов вместо 11 в неделю, рутина ушла в сервис</a:t>
-            </a:r>
-          </a:p>
-        </p:txBody>
-      </p:sp>
-    </p:spTree>
-  </p:cSld>
-  <p:clrMapOvr>
-    <a:masterClrMapping/>
-  </p:clrMapOvr>
-</p:sld>
-</file>
-
-<file path=ppt/slides/slide62.xml><?xml version="1.0" encoding="utf-8"?>
 <p:sld xmlns:a="http://schemas.openxmlformats.org/drawingml/2006/main" xmlns:p="http://schemas.openxmlformats.org/presentationml/2006/main" xmlns:r="http://schemas.openxmlformats.org/officeDocument/2006/relationships">
   <p:cSld>
     <p:bg>
@@ -9593,135 +9242,438 @@
                 <a:ea typeface="Arial"/>
                 <a:cs typeface="Arial"/>
               </a:rPr>
-              <a:t>Что мы просим решить</a:t>
+              <a:t>План пилота</a:t>
             </a:r>
           </a:p>
         </p:txBody>
       </p:sp>
-      <p:sp>
-        <p:nvSpPr>
-          <p:cNvPr id="797" name="lead"/>
-          <p:cNvSpPr txBox="1"/>
+      <p:graphicFrame>
+        <p:nvGraphicFramePr>
+          <p:cNvPr id="797" name="Table 796"/>
+          <p:cNvGraphicFramePr>
+            <a:graphicFrameLocks noGrp="1"/>
+          </p:cNvGraphicFramePr>
           <p:nvPr/>
-        </p:nvSpPr>
-        <p:spPr>
-          <a:xfrm>
-            <a:off x="677387" y="2200937"/>
-            <a:ext cx="10855878" cy="1621084"/>
-          </a:xfrm>
-          <a:prstGeom prst="rect">
-            <a:avLst/>
-          </a:prstGeom>
-          <a:noFill/>
-        </p:spPr>
-        <p:txBody>
-          <a:bodyPr wrap="square" lIns="76200" rIns="76200" tIns="50800" bIns="50800">
-            <a:spAutoFit/>
-          </a:bodyPr>
-          <a:lstStyle/>
-          <a:p>
-            <a:pPr algn="l">
-              <a:spcAft>
-                <a:spcPts val="300"/>
-              </a:spcAft>
-              <a:defRPr sz="4000">
-                <a:solidFill>
-                  <a:srgbClr val="000000"/>
-                </a:solidFill>
-                <a:latin typeface="Play"/>
-                <a:ea typeface="Play"/>
-                <a:cs typeface="Play"/>
-              </a:defRPr>
-            </a:pPr>
-            <a:r>
-              <a:rPr sz="4000">
-                <a:solidFill>
-                  <a:srgbClr val="000000"/>
-                </a:solidFill>
-                <a:latin typeface="Play"/>
-                <a:ea typeface="Play"/>
-                <a:cs typeface="Play"/>
-              </a:rPr>
-              <a:t>Одобрить запуск сервиса на всю компанию</a:t>
-            </a:r>
-          </a:p>
-        </p:txBody>
-      </p:sp>
-      <p:sp>
-        <p:nvSpPr>
-          <p:cNvPr id="798" name="body"/>
-          <p:cNvSpPr txBox="1"/>
-          <p:nvPr/>
-        </p:nvSpPr>
-        <p:spPr>
-          <a:xfrm>
-            <a:off x="677387" y="4069688"/>
-            <a:ext cx="10855878" cy="2259011"/>
-          </a:xfrm>
-          <a:prstGeom prst="rect">
-            <a:avLst/>
-          </a:prstGeom>
-          <a:noFill/>
-        </p:spPr>
-        <p:txBody>
-          <a:bodyPr wrap="square" lIns="76200" rIns="76200" tIns="50800" bIns="50800">
-            <a:spAutoFit/>
-          </a:bodyPr>
-          <a:lstStyle/>
-          <a:p>
-            <a:pPr algn="l">
-              <a:spcAft>
-                <a:spcPts val="300"/>
-              </a:spcAft>
-              <a:defRPr sz="3200">
-                <a:solidFill>
-                  <a:srgbClr val="000000"/>
-                </a:solidFill>
-                <a:latin typeface="Play"/>
-                <a:ea typeface="Play"/>
-                <a:cs typeface="Play"/>
-              </a:defRPr>
-            </a:pPr>
-            <a:r>
-              <a:rPr sz="3200">
-                <a:solidFill>
-                  <a:srgbClr val="000000"/>
-                </a:solidFill>
-                <a:latin typeface="Play"/>
-                <a:ea typeface="Play"/>
-                <a:cs typeface="Play"/>
-              </a:rPr>
-              <a:t>• Интеграция с корпоративным хранилищем документов</a:t>
-            </a:r>
-          </a:p>
-          <a:p>
-            <a:pPr algn="l">
-              <a:spcAft>
-                <a:spcPts val="300"/>
-              </a:spcAft>
-              <a:defRPr sz="3200">
-                <a:solidFill>
-                  <a:srgbClr val="000000"/>
-                </a:solidFill>
-                <a:latin typeface="Play"/>
-                <a:ea typeface="Play"/>
-                <a:cs typeface="Play"/>
-              </a:defRPr>
-            </a:pPr>
-            <a:r>
-              <a:rPr sz="3200">
-                <a:solidFill>
-                  <a:srgbClr val="000000"/>
-                </a:solidFill>
-                <a:latin typeface="Play"/>
-                <a:ea typeface="Play"/>
-                <a:cs typeface="Play"/>
-              </a:rPr>
-              <a:t>• Обеспечить поддержку очереди для нагрузки более 20 задач</a:t>
-            </a:r>
-          </a:p>
-        </p:txBody>
-      </p:sp>
+        </p:nvGraphicFramePr>
+        <p:xfrm>
+          <a:off x="677387" y="2200937"/>
+          <a:ext cx="10855878" cy="4127761"/>
+        </p:xfrm>
+        <a:graphic>
+          <a:graphicData uri="http://schemas.openxmlformats.org/drawingml/2006/table">
+            <a:tbl>
+              <a:tblPr firstRow="1" bandRow="1">
+                <a:tableStyleId>{5C22544A-7EE6-4342-B048-85BDC9FD1C3A}</a:tableStyleId>
+              </a:tblPr>
+              <a:tblGrid>
+                <a:gridCol w="3618626"/>
+                <a:gridCol w="3618626"/>
+                <a:gridCol w="3618626"/>
+              </a:tblGrid>
+              <a:tr h="825552">
+                <a:tc>
+                  <a:txBody>
+                    <a:bodyPr/>
+                    <a:lstStyle/>
+                    <a:p>
+                      <a:pPr>
+                        <a:defRPr sz="1300" b="1">
+                          <a:solidFill>
+                            <a:srgbClr val="FFFFFF"/>
+                          </a:solidFill>
+                          <a:latin typeface="Play"/>
+                          <a:ea typeface="Play"/>
+                          <a:cs typeface="Play"/>
+                        </a:defRPr>
+                      </a:pPr>
+                      <a:r>
+                        <a:t>Метрика</a:t>
+                      </a:r>
+                    </a:p>
+                  </a:txBody>
+                  <a:tcPr>
+                    <a:solidFill>
+                      <a:srgbClr val="0077FF"/>
+                    </a:solidFill>
+                  </a:tcPr>
+                </a:tc>
+                <a:tc>
+                  <a:txBody>
+                    <a:bodyPr/>
+                    <a:lstStyle/>
+                    <a:p>
+                      <a:pPr>
+                        <a:defRPr sz="1300" b="1">
+                          <a:solidFill>
+                            <a:srgbClr val="FFFFFF"/>
+                          </a:solidFill>
+                          <a:latin typeface="Play"/>
+                          <a:ea typeface="Play"/>
+                          <a:cs typeface="Play"/>
+                        </a:defRPr>
+                      </a:pPr>
+                      <a:r>
+                        <a:t>До</a:t>
+                      </a:r>
+                    </a:p>
+                  </a:txBody>
+                  <a:tcPr>
+                    <a:solidFill>
+                      <a:srgbClr val="0077FF"/>
+                    </a:solidFill>
+                  </a:tcPr>
+                </a:tc>
+                <a:tc>
+                  <a:txBody>
+                    <a:bodyPr/>
+                    <a:lstStyle/>
+                    <a:p>
+                      <a:pPr>
+                        <a:defRPr sz="1300" b="1">
+                          <a:solidFill>
+                            <a:srgbClr val="FFFFFF"/>
+                          </a:solidFill>
+                          <a:latin typeface="Play"/>
+                          <a:ea typeface="Play"/>
+                          <a:cs typeface="Play"/>
+                        </a:defRPr>
+                      </a:pPr>
+                      <a:r>
+                        <a:t>После</a:t>
+                      </a:r>
+                    </a:p>
+                  </a:txBody>
+                  <a:tcPr>
+                    <a:solidFill>
+                      <a:srgbClr val="0077FF"/>
+                    </a:solidFill>
+                  </a:tcPr>
+                </a:tc>
+              </a:tr>
+              <a:tr h="825552">
+                <a:tc>
+                  <a:txBody>
+                    <a:bodyPr/>
+                    <a:lstStyle/>
+                    <a:p>
+                      <a:pPr>
+                        <a:defRPr sz="1300" b="0">
+                          <a:solidFill>
+                            <a:srgbClr val="000000"/>
+                          </a:solidFill>
+                          <a:latin typeface="Play"/>
+                          <a:ea typeface="Play"/>
+                          <a:cs typeface="Play"/>
+                        </a:defRPr>
+                      </a:pPr>
+                      <a:r>
+                        <a:t>Время сборки (мин)</a:t>
+                      </a:r>
+                    </a:p>
+                  </a:txBody>
+                  <a:tcPr>
+                    <a:solidFill>
+                      <a:srgbClr val="FFFFFF"/>
+                    </a:solidFill>
+                  </a:tcPr>
+                </a:tc>
+                <a:tc>
+                  <a:txBody>
+                    <a:bodyPr/>
+                    <a:lstStyle/>
+                    <a:p>
+                      <a:pPr>
+                        <a:defRPr sz="1300" b="0">
+                          <a:solidFill>
+                            <a:srgbClr val="000000"/>
+                          </a:solidFill>
+                          <a:latin typeface="Play"/>
+                          <a:ea typeface="Play"/>
+                          <a:cs typeface="Play"/>
+                        </a:defRPr>
+                      </a:pPr>
+                      <a:r>
+                        <a:t>186</a:t>
+                      </a:r>
+                    </a:p>
+                  </a:txBody>
+                  <a:tcPr>
+                    <a:solidFill>
+                      <a:srgbClr val="FFFFFF"/>
+                    </a:solidFill>
+                  </a:tcPr>
+                </a:tc>
+                <a:tc>
+                  <a:txBody>
+                    <a:bodyPr/>
+                    <a:lstStyle/>
+                    <a:p>
+                      <a:pPr>
+                        <a:defRPr sz="1300" b="0">
+                          <a:solidFill>
+                            <a:srgbClr val="000000"/>
+                          </a:solidFill>
+                          <a:latin typeface="Play"/>
+                          <a:ea typeface="Play"/>
+                          <a:cs typeface="Play"/>
+                        </a:defRPr>
+                      </a:pPr>
+                      <a:r>
+                        <a:t>4</a:t>
+                      </a:r>
+                    </a:p>
+                  </a:txBody>
+                  <a:tcPr>
+                    <a:solidFill>
+                      <a:srgbClr val="FFFFFF"/>
+                    </a:solidFill>
+                  </a:tcPr>
+                </a:tc>
+              </a:tr>
+              <a:tr h="825552">
+                <a:tc>
+                  <a:txBody>
+                    <a:bodyPr/>
+                    <a:lstStyle/>
+                    <a:p>
+                      <a:pPr>
+                        <a:defRPr sz="1300" b="0">
+                          <a:solidFill>
+                            <a:srgbClr val="000000"/>
+                          </a:solidFill>
+                          <a:latin typeface="Play"/>
+                          <a:ea typeface="Play"/>
+                          <a:cs typeface="Play"/>
+                        </a:defRPr>
+                      </a:pPr>
+                      <a:r>
+                        <a:t>Время первой версии (дней)</a:t>
+                      </a:r>
+                    </a:p>
+                  </a:txBody>
+                  <a:tcPr>
+                    <a:solidFill>
+                      <a:srgbClr val="FFFFFF"/>
+                    </a:solidFill>
+                  </a:tcPr>
+                </a:tc>
+                <a:tc>
+                  <a:txBody>
+                    <a:bodyPr/>
+                    <a:lstStyle/>
+                    <a:p>
+                      <a:pPr>
+                        <a:defRPr sz="1300" b="0">
+                          <a:solidFill>
+                            <a:srgbClr val="000000"/>
+                          </a:solidFill>
+                          <a:latin typeface="Play"/>
+                          <a:ea typeface="Play"/>
+                          <a:cs typeface="Play"/>
+                        </a:defRPr>
+                      </a:pPr>
+                      <a:r>
+                        <a:t>6</a:t>
+                      </a:r>
+                    </a:p>
+                  </a:txBody>
+                  <a:tcPr>
+                    <a:solidFill>
+                      <a:srgbClr val="FFFFFF"/>
+                    </a:solidFill>
+                  </a:tcPr>
+                </a:tc>
+                <a:tc>
+                  <a:txBody>
+                    <a:bodyPr/>
+                    <a:lstStyle/>
+                    <a:p>
+                      <a:pPr>
+                        <a:defRPr sz="1300" b="0">
+                          <a:solidFill>
+                            <a:srgbClr val="000000"/>
+                          </a:solidFill>
+                          <a:latin typeface="Play"/>
+                          <a:ea typeface="Play"/>
+                          <a:cs typeface="Play"/>
+                        </a:defRPr>
+                      </a:pPr>
+                      <a:r>
+                        <a:t>1</a:t>
+                      </a:r>
+                    </a:p>
+                  </a:txBody>
+                  <a:tcPr>
+                    <a:solidFill>
+                      <a:srgbClr val="FFFFFF"/>
+                    </a:solidFill>
+                  </a:tcPr>
+                </a:tc>
+              </a:tr>
+              <a:tr h="825552">
+                <a:tc>
+                  <a:txBody>
+                    <a:bodyPr/>
+                    <a:lstStyle/>
+                    <a:p>
+                      <a:pPr>
+                        <a:defRPr sz="1300" b="0">
+                          <a:solidFill>
+                            <a:srgbClr val="000000"/>
+                          </a:solidFill>
+                          <a:latin typeface="Play"/>
+                          <a:ea typeface="Play"/>
+                          <a:cs typeface="Play"/>
+                        </a:defRPr>
+                      </a:pPr>
+                      <a:r>
+                        <a:t>Нарушения стиля</a:t>
+                      </a:r>
+                    </a:p>
+                  </a:txBody>
+                  <a:tcPr>
+                    <a:solidFill>
+                      <a:srgbClr val="FFFFFF"/>
+                    </a:solidFill>
+                  </a:tcPr>
+                </a:tc>
+                <a:tc>
+                  <a:txBody>
+                    <a:bodyPr/>
+                    <a:lstStyle/>
+                    <a:p>
+                      <a:pPr>
+                        <a:defRPr sz="1300" b="0">
+                          <a:solidFill>
+                            <a:srgbClr val="000000"/>
+                          </a:solidFill>
+                          <a:latin typeface="Play"/>
+                          <a:ea typeface="Play"/>
+                          <a:cs typeface="Play"/>
+                        </a:defRPr>
+                      </a:pPr>
+                      <a:r>
+                        <a:t>19</a:t>
+                      </a:r>
+                    </a:p>
+                  </a:txBody>
+                  <a:tcPr>
+                    <a:solidFill>
+                      <a:srgbClr val="FFFFFF"/>
+                    </a:solidFill>
+                  </a:tcPr>
+                </a:tc>
+                <a:tc>
+                  <a:txBody>
+                    <a:bodyPr/>
+                    <a:lstStyle/>
+                    <a:p>
+                      <a:pPr>
+                        <a:defRPr sz="1300" b="0">
+                          <a:solidFill>
+                            <a:srgbClr val="000000"/>
+                          </a:solidFill>
+                          <a:latin typeface="Play"/>
+                          <a:ea typeface="Play"/>
+                          <a:cs typeface="Play"/>
+                        </a:defRPr>
+                      </a:pPr>
+                      <a:r>
+                        <a:t>2</a:t>
+                      </a:r>
+                    </a:p>
+                  </a:txBody>
+                  <a:tcPr>
+                    <a:solidFill>
+                      <a:srgbClr val="FFFFFF"/>
+                    </a:solidFill>
+                  </a:tcPr>
+                </a:tc>
+              </a:tr>
+              <a:tr h="825553">
+                <a:tc>
+                  <a:txBody>
+                    <a:bodyPr/>
+                    <a:lstStyle/>
+                    <a:p>
+                      <a:pPr>
+                        <a:defRPr sz="1300" b="0">
+                          <a:solidFill>
+                            <a:srgbClr val="000000"/>
+                          </a:solidFill>
+                          <a:latin typeface="Play"/>
+                          <a:ea typeface="Play"/>
+                          <a:cs typeface="Play"/>
+                        </a:defRPr>
+                      </a:pPr>
+                      <a:r>
+                        <a:t>Запросы закрыты в неделю</a:t>
+                      </a:r>
+                    </a:p>
+                  </a:txBody>
+                  <a:tcPr>
+                    <a:solidFill>
+                      <a:srgbClr val="FFFFFF"/>
+                    </a:solidFill>
+                  </a:tcPr>
+                </a:tc>
+                <a:tc>
+                  <a:txBody>
+                    <a:bodyPr/>
+                    <a:lstStyle/>
+                    <a:p>
+                      <a:pPr>
+                        <a:defRPr sz="1300" b="0">
+                          <a:solidFill>
+                            <a:srgbClr val="000000"/>
+                          </a:solidFill>
+                          <a:latin typeface="Play"/>
+                          <a:ea typeface="Play"/>
+                          <a:cs typeface="Play"/>
+                        </a:defRPr>
+                      </a:pPr>
+                      <a:r>
+                        <a:t>11</a:t>
+                      </a:r>
+                    </a:p>
+                  </a:txBody>
+                  <a:tcPr>
+                    <a:solidFill>
+                      <a:srgbClr val="FFFFFF"/>
+                    </a:solidFill>
+                  </a:tcPr>
+                </a:tc>
+                <a:tc>
+                  <a:txBody>
+                    <a:bodyPr/>
+                    <a:lstStyle/>
+                    <a:p>
+                      <a:pPr>
+                        <a:defRPr sz="1300" b="0">
+                          <a:solidFill>
+                            <a:srgbClr val="000000"/>
+                          </a:solidFill>
+                          <a:latin typeface="Play"/>
+                          <a:ea typeface="Play"/>
+                          <a:cs typeface="Play"/>
+                        </a:defRPr>
+                      </a:pPr>
+                      <a:r>
+                        <a:t>38</a:t>
+                      </a:r>
+                    </a:p>
+                  </a:txBody>
+                  <a:tcPr>
+                    <a:solidFill>
+                      <a:srgbClr val="FFFFFF"/>
+                    </a:solidFill>
+                  </a:tcPr>
+                </a:tc>
+              </a:tr>
+            </a:tbl>
+          </a:graphicData>
+        </a:graphic>
+      </p:graphicFrame>
     </p:spTree>
   </p:cSld>
   <p:clrMapOvr>
@@ -9730,7 +9682,7 @@
 </p:sld>
 </file>
 
-<file path=ppt/slides/slide63.xml><?xml version="1.0" encoding="utf-8"?>
+<file path=ppt/slides/slide62.xml><?xml version="1.0" encoding="utf-8"?>
 <p:sld xmlns:a="http://schemas.openxmlformats.org/drawingml/2006/main" xmlns:p="http://schemas.openxmlformats.org/presentationml/2006/main" xmlns:r="http://schemas.openxmlformats.org/officeDocument/2006/relationships">
   <p:cSld>
     <p:bg>
@@ -9848,7 +9800,7 @@
                 <a:ea typeface="Arial"/>
                 <a:cs typeface="Arial"/>
               </a:rPr>
-              <a:t>Риски</a:t>
+              <a:t>Что мы просим решить</a:t>
             </a:r>
           </a:p>
         </p:txBody>
@@ -9862,7 +9814,7 @@
         <p:spPr>
           <a:xfrm>
             <a:off x="677387" y="2200937"/>
-            <a:ext cx="10855878" cy="1925976"/>
+            <a:ext cx="10855878" cy="1940047"/>
           </a:xfrm>
           <a:prstGeom prst="rect">
             <a:avLst/>
@@ -9897,7 +9849,7 @@
                 <a:ea typeface="Play"/>
                 <a:cs typeface="Play"/>
               </a:rPr>
-              <a:t>Модель может выдумать цифры, которые отсутствуют в материалах</a:t>
+              <a:t>Запуск сервиса на всю компанию в четвертом квартале 2026</a:t>
             </a:r>
           </a:p>
         </p:txBody>
@@ -9910,8 +9862,8 @@
         </p:nvSpPr>
         <p:spPr>
           <a:xfrm>
-            <a:off x="677387" y="4374579"/>
-            <a:ext cx="10855878" cy="1954119"/>
+            <a:off x="677387" y="4388651"/>
+            <a:ext cx="10855878" cy="1940047"/>
           </a:xfrm>
           <a:prstGeom prst="rect">
             <a:avLst/>
@@ -9946,7 +9898,7 @@
                 <a:ea typeface="Play"/>
                 <a:cs typeface="Play"/>
               </a:rPr>
-              <a:t>• Неполный шаблон приводит к ошибкам, сервис использует рабочую область</a:t>
+              <a:t>• Интеграция с хранилищем документов в четвертом квартале 2026</a:t>
             </a:r>
           </a:p>
           <a:p>
@@ -9972,7 +9924,7 @@
                 <a:ea typeface="Play"/>
                 <a:cs typeface="Play"/>
               </a:rPr>
-              <a:t>• Нагрузка выше 20 задач требует внешней очереди</a:t>
+              <a:t>• Подключение 4 команд в третьем квартале 2026</a:t>
             </a:r>
           </a:p>
         </p:txBody>
@@ -9985,7 +9937,7 @@
 </p:sld>
 </file>
 
-<file path=ppt/slides/slide64.xml><?xml version="1.0" encoding="utf-8"?>
+<file path=ppt/slides/slide63.xml><?xml version="1.0" encoding="utf-8"?>
 <p:sld xmlns:a="http://schemas.openxmlformats.org/drawingml/2006/main" xmlns:p="http://schemas.openxmlformats.org/presentationml/2006/main" xmlns:r="http://schemas.openxmlformats.org/officeDocument/2006/relationships">
   <p:cSld>
     <p:bg>
@@ -10103,7 +10055,7 @@
                 <a:ea typeface="Arial"/>
                 <a:cs typeface="Arial"/>
               </a:rPr>
-              <a:t>Вопросы к руководству</a:t>
+              <a:t>Риски</a:t>
             </a:r>
           </a:p>
         </p:txBody>
@@ -10117,7 +10069,7 @@
         <p:spPr>
           <a:xfrm>
             <a:off x="677387" y="2200937"/>
-            <a:ext cx="10855878" cy="1852008"/>
+            <a:ext cx="10855878" cy="1871251"/>
           </a:xfrm>
           <a:prstGeom prst="rect">
             <a:avLst/>
@@ -10152,7 +10104,7 @@
                 <a:ea typeface="Play"/>
                 <a:cs typeface="Play"/>
               </a:rPr>
-              <a:t>Какие ресурсы нужны для масштабирования сервиса</a:t>
+              <a:t>Модель может выдумать цифры, аудит проверяет</a:t>
             </a:r>
           </a:p>
         </p:txBody>
@@ -10165,8 +10117,8 @@
         </p:nvSpPr>
         <p:spPr>
           <a:xfrm>
-            <a:off x="677387" y="4300611"/>
-            <a:ext cx="10855878" cy="2028087"/>
+            <a:off x="677387" y="4319855"/>
+            <a:ext cx="10855878" cy="2008843"/>
           </a:xfrm>
           <a:prstGeom prst="rect">
             <a:avLst/>
@@ -10201,7 +10153,7 @@
                 <a:ea typeface="Play"/>
                 <a:cs typeface="Play"/>
               </a:rPr>
-              <a:t>• Как обеспечить качество и проверку данных</a:t>
+              <a:t>• Неизвестный шаблон может быть плохо сделан</a:t>
             </a:r>
           </a:p>
           <a:p>
@@ -10227,7 +10179,231 @@
                 <a:ea typeface="Play"/>
                 <a:cs typeface="Play"/>
               </a:rPr>
-              <a:t>• Как быстро интегрировать сервис в существующие процессы</a:t>
+              <a:t>• Нагрузка выше 20 задач требует внешней очереди</a:t>
+            </a:r>
+          </a:p>
+        </p:txBody>
+      </p:sp>
+    </p:spTree>
+  </p:cSld>
+  <p:clrMapOvr>
+    <a:masterClrMapping/>
+  </p:clrMapOvr>
+</p:sld>
+</file>
+
+<file path=ppt/slides/slide64.xml><?xml version="1.0" encoding="utf-8"?>
+<p:sld xmlns:a="http://schemas.openxmlformats.org/drawingml/2006/main" xmlns:p="http://schemas.openxmlformats.org/presentationml/2006/main" xmlns:r="http://schemas.openxmlformats.org/officeDocument/2006/relationships">
+  <p:cSld>
+    <p:bg>
+      <p:bgPr>
+        <a:solidFill>
+          <a:schemeClr val="lt2"/>
+        </a:solidFill>
+      </p:bgPr>
+    </p:bg>
+    <p:spTree>
+      <p:nvGrpSpPr>
+        <p:cNvPr id="1" name=""/>
+        <p:cNvGrpSpPr/>
+        <p:nvPr/>
+      </p:nvGrpSpPr>
+      <p:grpSpPr/>
+      <p:sp>
+        <p:nvSpPr>
+          <p:cNvPr id="2" name="title"/>
+          <p:cNvSpPr txBox="1"/>
+          <p:nvPr/>
+        </p:nvSpPr>
+        <p:spPr>
+          <a:xfrm>
+            <a:off x="677387" y="692177"/>
+            <a:ext cx="10855878" cy="822960"/>
+          </a:xfrm>
+          <a:prstGeom prst="rect">
+            <a:avLst/>
+          </a:prstGeom>
+          <a:noFill/>
+        </p:spPr>
+        <p:txBody>
+          <a:bodyPr wrap="square" lIns="76200" rIns="76200" tIns="50800" bIns="50800">
+            <a:spAutoFit/>
+          </a:bodyPr>
+          <a:lstStyle/>
+          <a:p>
+            <a:pPr algn="l">
+              <a:spcAft>
+                <a:spcPts val="300"/>
+              </a:spcAft>
+              <a:defRPr sz="4000">
+                <a:solidFill>
+                  <a:srgbClr val="000000"/>
+                </a:solidFill>
+                <a:latin typeface="Arial"/>
+                <a:ea typeface="Arial"/>
+                <a:cs typeface="Arial"/>
+              </a:defRPr>
+            </a:pPr>
+            <a:r>
+              <a:rPr sz="4000">
+                <a:solidFill>
+                  <a:srgbClr val="000000"/>
+                </a:solidFill>
+                <a:latin typeface="Arial"/>
+                <a:ea typeface="Arial"/>
+                <a:cs typeface="Arial"/>
+              </a:rPr>
+              <a:t>Преимущества</a:t>
+            </a:r>
+          </a:p>
+        </p:txBody>
+      </p:sp>
+      <p:sp>
+        <p:nvSpPr>
+          <p:cNvPr id="3" name="lead"/>
+          <p:cNvSpPr txBox="1"/>
+          <p:nvPr/>
+        </p:nvSpPr>
+        <p:spPr>
+          <a:xfrm>
+            <a:off x="677387" y="1773204"/>
+            <a:ext cx="10855878" cy="1509184"/>
+          </a:xfrm>
+          <a:prstGeom prst="rect">
+            <a:avLst/>
+          </a:prstGeom>
+          <a:noFill/>
+        </p:spPr>
+        <p:txBody>
+          <a:bodyPr wrap="square" lIns="76200" rIns="76200" tIns="50800" bIns="50800">
+            <a:spAutoFit/>
+          </a:bodyPr>
+          <a:lstStyle/>
+          <a:p>
+            <a:pPr algn="l">
+              <a:spcAft>
+                <a:spcPts val="300"/>
+              </a:spcAft>
+              <a:defRPr sz="4000">
+                <a:solidFill>
+                  <a:srgbClr val="000000"/>
+                </a:solidFill>
+                <a:latin typeface="Play"/>
+                <a:ea typeface="Play"/>
+                <a:cs typeface="Play"/>
+              </a:defRPr>
+            </a:pPr>
+            <a:r>
+              <a:rPr sz="4000">
+                <a:solidFill>
+                  <a:srgbClr val="000000"/>
+                </a:solidFill>
+                <a:latin typeface="Play"/>
+                <a:ea typeface="Play"/>
+                <a:cs typeface="Play"/>
+              </a:rPr>
+              <a:t>Сокращение времени сборки до 4 минут</a:t>
+            </a:r>
+          </a:p>
+        </p:txBody>
+      </p:sp>
+      <p:sp>
+        <p:nvSpPr>
+          <p:cNvPr id="4" name="body"/>
+          <p:cNvSpPr txBox="1"/>
+          <p:nvPr/>
+        </p:nvSpPr>
+        <p:spPr>
+          <a:xfrm>
+            <a:off x="677387" y="3548044"/>
+            <a:ext cx="10855878" cy="2652753"/>
+          </a:xfrm>
+          <a:prstGeom prst="rect">
+            <a:avLst/>
+          </a:prstGeom>
+          <a:noFill/>
+        </p:spPr>
+        <p:txBody>
+          <a:bodyPr wrap="square" lIns="76200" rIns="76200" tIns="50800" bIns="50800">
+            <a:spAutoFit/>
+          </a:bodyPr>
+          <a:lstStyle/>
+          <a:p>
+            <a:pPr algn="l">
+              <a:spcAft>
+                <a:spcPts val="300"/>
+              </a:spcAft>
+              <a:defRPr sz="3200">
+                <a:solidFill>
+                  <a:srgbClr val="000000"/>
+                </a:solidFill>
+                <a:latin typeface="Play"/>
+                <a:ea typeface="Play"/>
+                <a:cs typeface="Play"/>
+              </a:defRPr>
+            </a:pPr>
+            <a:r>
+              <a:rPr sz="3200">
+                <a:solidFill>
+                  <a:srgbClr val="000000"/>
+                </a:solidFill>
+                <a:latin typeface="Play"/>
+                <a:ea typeface="Play"/>
+                <a:cs typeface="Play"/>
+              </a:rPr>
+              <a:t>• Уменьшение нарушений фирменного стиля до 2 из 68</a:t>
+            </a:r>
+          </a:p>
+          <a:p>
+            <a:pPr algn="l">
+              <a:spcAft>
+                <a:spcPts val="300"/>
+              </a:spcAft>
+              <a:defRPr sz="3200">
+                <a:solidFill>
+                  <a:srgbClr val="000000"/>
+                </a:solidFill>
+                <a:latin typeface="Play"/>
+                <a:ea typeface="Play"/>
+                <a:cs typeface="Play"/>
+              </a:defRPr>
+            </a:pPr>
+            <a:r>
+              <a:rPr sz="3200">
+                <a:solidFill>
+                  <a:srgbClr val="000000"/>
+                </a:solidFill>
+                <a:latin typeface="Play"/>
+                <a:ea typeface="Play"/>
+                <a:cs typeface="Play"/>
+              </a:rPr>
+              <a:t>• Экономия 1 400 рублей за 6 недель пилота</a:t>
+            </a:r>
+          </a:p>
+          <a:p>
+            <a:pPr algn="l">
+              <a:spcAft>
+                <a:spcPts val="300"/>
+              </a:spcAft>
+              <a:defRPr sz="3200">
+                <a:solidFill>
+                  <a:srgbClr val="000000"/>
+                </a:solidFill>
+                <a:latin typeface="Play"/>
+                <a:ea typeface="Play"/>
+                <a:cs typeface="Play"/>
+              </a:defRPr>
+            </a:pPr>
+            <a:r>
+              <a:rPr sz="3200">
+                <a:solidFill>
+                  <a:srgbClr val="000000"/>
+                </a:solidFill>
+                <a:latin typeface="Play"/>
+                <a:ea typeface="Play"/>
+                <a:cs typeface="Play"/>
+              </a:rPr>
+              <a:t>• Повышение производительности дизайнеров</a:t>
             </a:r>
           </a:p>
         </p:txBody>
@@ -10259,7 +10435,7 @@
         <p:spPr>
           <a:xfrm>
             <a:off x="658855" y="692177"/>
-            <a:ext cx="5242438" cy="1447800"/>
+            <a:ext cx="5242438" cy="822960"/>
           </a:xfrm>
           <a:prstGeom prst="rect">
             <a:avLst/>
@@ -10294,7 +10470,7 @@
                 <a:ea typeface="Arial"/>
                 <a:cs typeface="Arial"/>
               </a:rPr>
-              <a:t>Следующие шаги после одобрения</a:t>
+              <a:t>Следующие шаги</a:t>
             </a:r>
           </a:p>
         </p:txBody>
@@ -10307,8 +10483,8 @@
         </p:nvSpPr>
         <p:spPr>
           <a:xfrm>
-            <a:off x="658855" y="2380007"/>
-            <a:ext cx="5242438" cy="1306610"/>
+            <a:off x="658855" y="1783080"/>
+            <a:ext cx="5242438" cy="1722257"/>
           </a:xfrm>
           <a:prstGeom prst="rect">
             <a:avLst/>
@@ -10325,7 +10501,7 @@
               <a:spcAft>
                 <a:spcPts val="300"/>
               </a:spcAft>
-              <a:defRPr sz="2800">
+              <a:defRPr sz="3200">
                 <a:solidFill>
                   <a:srgbClr val="FFFFFF"/>
                 </a:solidFill>
@@ -10335,7 +10511,7 @@
               </a:defRPr>
             </a:pPr>
             <a:r>
-              <a:rPr sz="2800">
+              <a:rPr sz="3200">
                 <a:solidFill>
                   <a:srgbClr val="FFFFFF"/>
                 </a:solidFill>
@@ -10343,7 +10519,7 @@
                 <a:ea typeface="Play"/>
                 <a:cs typeface="Play"/>
               </a:rPr>
-              <a:t>После одобрения подключить 4 команды в Q3 2026</a:t>
+              <a:t>Сервис готов к масштабированию на всю компанию</a:t>
             </a:r>
           </a:p>
         </p:txBody>
@@ -10356,8 +10532,8 @@
         </p:nvSpPr>
         <p:spPr>
           <a:xfrm>
-            <a:off x="658855" y="3882371"/>
-            <a:ext cx="5242438" cy="1760184"/>
+            <a:off x="658855" y="3736905"/>
+            <a:ext cx="5242438" cy="1905650"/>
           </a:xfrm>
           <a:prstGeom prst="rect">
             <a:avLst/>
@@ -10374,7 +10550,7 @@
               <a:spcAft>
                 <a:spcPts val="300"/>
               </a:spcAft>
-              <a:defRPr sz="1800">
+              <a:defRPr sz="2400">
                 <a:solidFill>
                   <a:srgbClr val="FFFFFF"/>
                 </a:solidFill>
@@ -10384,7 +10560,7 @@
               </a:defRPr>
             </a:pPr>
             <a:r>
-              <a:rPr sz="1800">
+              <a:rPr sz="2400">
                 <a:solidFill>
                   <a:srgbClr val="FFFFFF"/>
                 </a:solidFill>
@@ -10392,7 +10568,7 @@
                 <a:ea typeface="Play"/>
                 <a:cs typeface="Play"/>
               </a:rPr>
-              <a:t>• В Q4 2026 обеспечить домен, HTTPS и доступ для всей компании</a:t>
+              <a:t>• Ожидаем решение о запуске в четвертом квартале 2026</a:t>
             </a:r>
           </a:p>
           <a:p>
@@ -10400,7 +10576,7 @@
               <a:spcAft>
                 <a:spcPts val="300"/>
               </a:spcAft>
-              <a:defRPr sz="1800">
+              <a:defRPr sz="2400">
                 <a:solidFill>
                   <a:srgbClr val="FFFFFF"/>
                 </a:solidFill>
@@ -10410,7 +10586,7 @@
               </a:defRPr>
             </a:pPr>
             <a:r>
-              <a:rPr sz="1800">
+              <a:rPr sz="2400">
                 <a:solidFill>
                   <a:srgbClr val="FFFFFF"/>
                 </a:solidFill>
@@ -10418,7 +10594,7 @@
                 <a:ea typeface="Play"/>
                 <a:cs typeface="Play"/>
               </a:rPr>
-              <a:t>• В Q1 2027 добавить генерацию иллюстраций под стиль шаблона</a:t>
+              <a:t>• Планируем интеграцию с хранилищем документов</a:t>
             </a:r>
           </a:p>
         </p:txBody>

--- a/samples/Шаблон_презентации_VK_Education__focus.pptx
+++ b/samples/Шаблон_презентации_VK_Education__focus.pptx
@@ -19,6 +19,8 @@
     <p:sldId id="318" r:id="rId71"/>
     <p:sldId id="319" r:id="rId72"/>
     <p:sldId id="320" r:id="rId73"/>
+    <p:sldId id="321" r:id="rId74"/>
+    <p:sldId id="322" r:id="rId75"/>
   </p:sldIdLst>
   <p:sldSz cy="6858000" cx="12192000"/>
   <p:notesSz cx="6858000" cy="9144000"/>
@@ -259,6 +261,434 @@
     </a:lvl9pPr>
   </p:defaultTextStyle>
 </p:presentation>
+</file>
+
+<file path=ppt/charts/chart1.xml><?xml version="1.0" encoding="utf-8"?>
+<c:chartSpace xmlns:c="http://schemas.openxmlformats.org/drawingml/2006/chart" xmlns:a="http://schemas.openxmlformats.org/drawingml/2006/main" xmlns:r="http://schemas.openxmlformats.org/officeDocument/2006/relationships">
+  <c:date1904 val="0"/>
+  <c:chart>
+    <c:autoTitleDeleted val="1"/>
+    <c:plotArea>
+      <c:barChart>
+        <c:barDir val="col"/>
+        <c:grouping val="clustered"/>
+        <c:ser>
+          <c:idx val="0"/>
+          <c:order val="0"/>
+          <c:tx>
+            <c:strRef>
+              <c:f>Sheet1!$B$1</c:f>
+              <c:strCache>
+                <c:ptCount val="1"/>
+                <c:pt idx="0">
+                  <c:v>Время (мин)</c:v>
+                </c:pt>
+              </c:strCache>
+            </c:strRef>
+          </c:tx>
+          <c:spPr>
+            <a:solidFill>
+              <a:srgbClr val="0077FF"/>
+            </a:solidFill>
+            <a:ln>
+              <a:solidFill>
+                <a:srgbClr val="0077FF"/>
+              </a:solidFill>
+            </a:ln>
+          </c:spPr>
+          <c:cat>
+            <c:strRef>
+              <c:f>Sheet1!$A$2:$A$3</c:f>
+              <c:strCache>
+                <c:ptCount val="2"/>
+                <c:pt idx="0">
+                  <c:v>Текущий процесс</c:v>
+                </c:pt>
+                <c:pt idx="1">
+                  <c:v>Пилот</c:v>
+                </c:pt>
+              </c:strCache>
+            </c:strRef>
+          </c:cat>
+          <c:val>
+            <c:numRef>
+              <c:f>Sheet1!$B$2:$B$3</c:f>
+              <c:numCache>
+                <c:formatCode>General</c:formatCode>
+                <c:ptCount val="2"/>
+                <c:pt idx="0">
+                  <c:v>186.0</c:v>
+                </c:pt>
+                <c:pt idx="1">
+                  <c:v>4.0</c:v>
+                </c:pt>
+              </c:numCache>
+            </c:numRef>
+          </c:val>
+        </c:ser>
+        <c:dLbls>
+          <c:numFmt formatCode="0&quot; мин&quot;" sourceLinked="0"/>
+          <c:txPr>
+            <a:bodyPr wrap="none"/>
+            <a:lstStyle/>
+            <a:p>
+              <a:pPr>
+                <a:defRPr sz="1100" b="0">
+                  <a:solidFill>
+                    <a:srgbClr val="000000"/>
+                  </a:solidFill>
+                  <a:latin typeface="Play"/>
+                  <a:ea typeface="Play"/>
+                  <a:cs typeface="Play"/>
+                </a:defRPr>
+              </a:pPr>
+            </a:p>
+          </c:txPr>
+          <c:dLblPos val="outEnd"/>
+          <c:showLegendKey val="0"/>
+          <c:showVal val="1"/>
+          <c:showCatName val="0"/>
+          <c:showSerName val="0"/>
+          <c:showPercent val="0"/>
+          <c:showBubbleSize val="0"/>
+          <c:showLeaderLines val="1"/>
+        </c:dLbls>
+        <c:gapWidth val="60"/>
+        <c:axId val="-2068027336"/>
+        <c:axId val="-2113994440"/>
+      </c:barChart>
+      <c:catAx>
+        <c:axId val="-2068027336"/>
+        <c:scaling>
+          <c:orientation val="minMax"/>
+        </c:scaling>
+        <c:delete val="0"/>
+        <c:axPos val="b"/>
+        <c:majorTickMark val="out"/>
+        <c:minorTickMark val="none"/>
+        <c:tickLblPos val="nextTo"/>
+        <c:txPr>
+          <a:bodyPr/>
+          <a:lstStyle/>
+          <a:p>
+            <a:pPr>
+              <a:defRPr sz="1100" b="0">
+                <a:solidFill>
+                  <a:srgbClr val="000000"/>
+                </a:solidFill>
+                <a:latin typeface="Play"/>
+                <a:ea typeface="Play"/>
+                <a:cs typeface="Play"/>
+              </a:defRPr>
+            </a:pPr>
+          </a:p>
+        </c:txPr>
+        <c:crossAx val="-2113994440"/>
+        <c:crosses val="autoZero"/>
+        <c:auto val="1"/>
+        <c:lblAlgn val="ctr"/>
+        <c:lblOffset val="100"/>
+        <c:noMultiLvlLbl val="0"/>
+      </c:catAx>
+      <c:valAx>
+        <c:axId val="-2113994440"/>
+        <c:scaling/>
+        <c:delete val="0"/>
+        <c:axPos val="l"/>
+        <c:majorGridlines>
+          <c:spPr>
+            <a:ln w="9525">
+              <a:solidFill>
+                <a:srgbClr val="D1D1D1"/>
+              </a:solidFill>
+            </a:ln>
+          </c:spPr>
+        </c:majorGridlines>
+        <c:title>
+          <c:tx>
+            <c:rich>
+              <a:bodyPr rot="0" vert="horz"/>
+              <a:lstStyle/>
+              <a:p>
+                <a:pPr>
+                  <a:defRPr sz="1100" b="0">
+                    <a:solidFill>
+                      <a:srgbClr val="000000"/>
+                    </a:solidFill>
+                    <a:latin typeface="Play"/>
+                    <a:ea typeface="Play"/>
+                    <a:cs typeface="Play"/>
+                  </a:defRPr>
+                </a:pPr>
+                <a:r>
+                  <a:t>Время (мин), мин</a:t>
+                </a:r>
+              </a:p>
+            </c:rich>
+          </c:tx>
+          <c:layout/>
+          <c:overlay val="0"/>
+        </c:title>
+        <c:majorTickMark val="out"/>
+        <c:minorTickMark val="none"/>
+        <c:tickLblPos val="nextTo"/>
+        <c:txPr>
+          <a:bodyPr/>
+          <a:lstStyle/>
+          <a:p>
+            <a:pPr>
+              <a:defRPr sz="1100" b="0">
+                <a:solidFill>
+                  <a:srgbClr val="000000"/>
+                </a:solidFill>
+                <a:latin typeface="Play"/>
+                <a:ea typeface="Play"/>
+                <a:cs typeface="Play"/>
+              </a:defRPr>
+            </a:pPr>
+          </a:p>
+        </c:txPr>
+        <c:crossAx val="-2068027336"/>
+        <c:crosses val="autoZero"/>
+      </c:valAx>
+    </c:plotArea>
+    <c:dispBlanksAs val="gap"/>
+  </c:chart>
+  <c:txPr>
+    <a:bodyPr/>
+    <a:lstStyle/>
+    <a:p>
+      <a:pPr>
+        <a:defRPr sz="1200" b="0">
+          <a:solidFill>
+            <a:srgbClr val="000000"/>
+          </a:solidFill>
+          <a:latin typeface="Play"/>
+          <a:ea typeface="Play"/>
+          <a:cs typeface="Play"/>
+        </a:defRPr>
+      </a:pPr>
+      <a:endParaRPr lang="en-US"/>
+    </a:p>
+  </c:txPr>
+  <c:externalData r:id="rId1">
+    <c:autoUpdate val="0"/>
+  </c:externalData>
+</c:chartSpace>
+</file>
+
+<file path=ppt/charts/chart2.xml><?xml version="1.0" encoding="utf-8"?>
+<c:chartSpace xmlns:c="http://schemas.openxmlformats.org/drawingml/2006/chart" xmlns:a="http://schemas.openxmlformats.org/drawingml/2006/main" xmlns:r="http://schemas.openxmlformats.org/officeDocument/2006/relationships">
+  <c:date1904 val="0"/>
+  <c:chart>
+    <c:autoTitleDeleted val="1"/>
+    <c:plotArea>
+      <c:barChart>
+        <c:barDir val="col"/>
+        <c:grouping val="clustered"/>
+        <c:ser>
+          <c:idx val="0"/>
+          <c:order val="0"/>
+          <c:tx>
+            <c:strRef>
+              <c:f>Sheet1!$B$1</c:f>
+              <c:strCache>
+                <c:ptCount val="1"/>
+                <c:pt idx="0">
+                  <c:v>Запросы закрыты</c:v>
+                </c:pt>
+              </c:strCache>
+            </c:strRef>
+          </c:tx>
+          <c:spPr>
+            <a:solidFill>
+              <a:srgbClr val="0077FF"/>
+            </a:solidFill>
+            <a:ln>
+              <a:solidFill>
+                <a:srgbClr val="0077FF"/>
+              </a:solidFill>
+            </a:ln>
+          </c:spPr>
+          <c:cat>
+            <c:strRef>
+              <c:f>Sheet1!$A$2:$A$3</c:f>
+              <c:strCache>
+                <c:ptCount val="2"/>
+                <c:pt idx="0">
+                  <c:v>Текущий процесс</c:v>
+                </c:pt>
+                <c:pt idx="1">
+                  <c:v>Пилот</c:v>
+                </c:pt>
+              </c:strCache>
+            </c:strRef>
+          </c:cat>
+          <c:val>
+            <c:numRef>
+              <c:f>Sheet1!$B$2:$B$3</c:f>
+              <c:numCache>
+                <c:formatCode>General</c:formatCode>
+                <c:ptCount val="2"/>
+                <c:pt idx="0">
+                  <c:v>11.0</c:v>
+                </c:pt>
+                <c:pt idx="1">
+                  <c:v>38.0</c:v>
+                </c:pt>
+              </c:numCache>
+            </c:numRef>
+          </c:val>
+        </c:ser>
+        <c:dLbls>
+          <c:numFmt formatCode="0&quot; запросов&quot;" sourceLinked="0"/>
+          <c:txPr>
+            <a:bodyPr wrap="none"/>
+            <a:lstStyle/>
+            <a:p>
+              <a:pPr>
+                <a:defRPr sz="1100" b="0">
+                  <a:solidFill>
+                    <a:srgbClr val="000000"/>
+                  </a:solidFill>
+                  <a:latin typeface="Play"/>
+                  <a:ea typeface="Play"/>
+                  <a:cs typeface="Play"/>
+                </a:defRPr>
+              </a:pPr>
+            </a:p>
+          </c:txPr>
+          <c:dLblPos val="outEnd"/>
+          <c:showLegendKey val="0"/>
+          <c:showVal val="1"/>
+          <c:showCatName val="0"/>
+          <c:showSerName val="0"/>
+          <c:showPercent val="0"/>
+          <c:showBubbleSize val="0"/>
+          <c:showLeaderLines val="1"/>
+        </c:dLbls>
+        <c:gapWidth val="60"/>
+        <c:axId val="-2068027336"/>
+        <c:axId val="-2113994440"/>
+      </c:barChart>
+      <c:catAx>
+        <c:axId val="-2068027336"/>
+        <c:scaling>
+          <c:orientation val="minMax"/>
+        </c:scaling>
+        <c:delete val="0"/>
+        <c:axPos val="b"/>
+        <c:majorTickMark val="out"/>
+        <c:minorTickMark val="none"/>
+        <c:tickLblPos val="nextTo"/>
+        <c:txPr>
+          <a:bodyPr/>
+          <a:lstStyle/>
+          <a:p>
+            <a:pPr>
+              <a:defRPr sz="1100" b="0">
+                <a:solidFill>
+                  <a:srgbClr val="000000"/>
+                </a:solidFill>
+                <a:latin typeface="Play"/>
+                <a:ea typeface="Play"/>
+                <a:cs typeface="Play"/>
+              </a:defRPr>
+            </a:pPr>
+          </a:p>
+        </c:txPr>
+        <c:crossAx val="-2113994440"/>
+        <c:crosses val="autoZero"/>
+        <c:auto val="1"/>
+        <c:lblAlgn val="ctr"/>
+        <c:lblOffset val="100"/>
+        <c:noMultiLvlLbl val="0"/>
+      </c:catAx>
+      <c:valAx>
+        <c:axId val="-2113994440"/>
+        <c:scaling/>
+        <c:delete val="0"/>
+        <c:axPos val="l"/>
+        <c:majorGridlines>
+          <c:spPr>
+            <a:ln w="9525">
+              <a:solidFill>
+                <a:srgbClr val="D1D1D1"/>
+              </a:solidFill>
+            </a:ln>
+          </c:spPr>
+        </c:majorGridlines>
+        <c:title>
+          <c:tx>
+            <c:rich>
+              <a:bodyPr rot="0" vert="horz"/>
+              <a:lstStyle/>
+              <a:p>
+                <a:pPr>
+                  <a:defRPr sz="1100" b="0">
+                    <a:solidFill>
+                      <a:srgbClr val="000000"/>
+                    </a:solidFill>
+                    <a:latin typeface="Play"/>
+                    <a:ea typeface="Play"/>
+                    <a:cs typeface="Play"/>
+                  </a:defRPr>
+                </a:pPr>
+                <a:r>
+                  <a:t>Запросы закрыты, запросов</a:t>
+                </a:r>
+              </a:p>
+            </c:rich>
+          </c:tx>
+          <c:layout/>
+          <c:overlay val="0"/>
+        </c:title>
+        <c:majorTickMark val="out"/>
+        <c:minorTickMark val="none"/>
+        <c:tickLblPos val="nextTo"/>
+        <c:txPr>
+          <a:bodyPr/>
+          <a:lstStyle/>
+          <a:p>
+            <a:pPr>
+              <a:defRPr sz="1100" b="0">
+                <a:solidFill>
+                  <a:srgbClr val="000000"/>
+                </a:solidFill>
+                <a:latin typeface="Play"/>
+                <a:ea typeface="Play"/>
+                <a:cs typeface="Play"/>
+              </a:defRPr>
+            </a:pPr>
+          </a:p>
+        </c:txPr>
+        <c:crossAx val="-2068027336"/>
+        <c:crosses val="autoZero"/>
+      </c:valAx>
+    </c:plotArea>
+    <c:dispBlanksAs val="gap"/>
+  </c:chart>
+  <c:txPr>
+    <a:bodyPr/>
+    <a:lstStyle/>
+    <a:p>
+      <a:pPr>
+        <a:defRPr sz="1200" b="0">
+          <a:solidFill>
+            <a:srgbClr val="000000"/>
+          </a:solidFill>
+          <a:latin typeface="Play"/>
+          <a:ea typeface="Play"/>
+          <a:cs typeface="Play"/>
+        </a:defRPr>
+      </a:pPr>
+      <a:endParaRPr lang="en-US"/>
+    </a:p>
+  </c:txPr>
+  <c:externalData r:id="rId1">
+    <c:autoUpdate val="0"/>
+  </c:externalData>
+</c:chartSpace>
 </file>
 
 <file path=ppt/notesMasters/notesMaster1.xml><?xml version="1.0" encoding="utf-8"?>
@@ -2087,6 +2517,700 @@
     <a:masterClrMapping/>
   </p:clrMapOvr>
 </p:notes>
+</file>
+
+<file path=ppt/notesSlides/notesSlide66.xml><?xml version="1.0" encoding="utf-8"?>
+<p:notes xmlns:a="http://schemas.openxmlformats.org/drawingml/2006/main" xmlns:p="http://schemas.openxmlformats.org/presentationml/2006/main" xmlns:r="http://schemas.openxmlformats.org/officeDocument/2006/relationships">
+  <p:cSld>
+    <p:spTree>
+      <p:nvGrpSpPr>
+        <p:cNvPr id="1" name=""/>
+        <p:cNvGrpSpPr/>
+        <p:nvPr/>
+      </p:nvGrpSpPr>
+      <p:grpSpPr>
+        <a:xfrm>
+          <a:off x="0" y="0"/>
+          <a:ext cx="0" cy="0"/>
+          <a:chOff x="0" y="0"/>
+          <a:chExt cx="0" cy="0"/>
+        </a:xfrm>
+      </p:grpSpPr>
+      <p:sp>
+        <p:nvSpPr>
+          <p:cNvPr id="2" name="Slide Image Placeholder 1"/>
+          <p:cNvSpPr>
+            <a:spLocks noGrp="1"/>
+          </p:cNvSpPr>
+          <p:nvPr>
+            <p:ph type="sldImg" idx="3"/>
+          </p:nvPr>
+        </p:nvSpPr>
+        <p:spPr/>
+      </p:sp>
+      <p:sp>
+        <p:nvSpPr>
+          <p:cNvPr id="3" name="Notes Placeholder 2"/>
+          <p:cNvSpPr>
+            <a:spLocks noGrp="1"/>
+          </p:cNvSpPr>
+          <p:nvPr>
+            <p:ph type="body" idx="1"/>
+          </p:nvPr>
+        </p:nvSpPr>
+        <p:spPr/>
+        <p:txBody>
+          <a:bodyPr/>
+          <a:lstStyle/>
+          <a:p/>
+        </p:txBody>
+      </p:sp>
+      <p:sp>
+        <p:nvSpPr>
+          <p:cNvPr id="4" name="Slide Number Placeholder 3"/>
+          <p:cNvSpPr>
+            <a:spLocks noGrp="1"/>
+          </p:cNvSpPr>
+          <p:nvPr>
+            <p:ph type="sldNum" idx="12"/>
+          </p:nvPr>
+        </p:nvSpPr>
+        <p:spPr/>
+      </p:sp>
+    </p:spTree>
+  </p:cSld>
+  <p:clrMapOvr>
+    <a:masterClrMapping/>
+  </p:clrMapOvr>
+</p:notes>
+</file>
+
+<file path=ppt/notesSlides/notesSlide67.xml><?xml version="1.0" encoding="utf-8"?>
+<p:notes xmlns:a="http://schemas.openxmlformats.org/drawingml/2006/main" xmlns:p="http://schemas.openxmlformats.org/presentationml/2006/main" xmlns:r="http://schemas.openxmlformats.org/officeDocument/2006/relationships">
+  <p:cSld>
+    <p:spTree>
+      <p:nvGrpSpPr>
+        <p:cNvPr id="1" name=""/>
+        <p:cNvGrpSpPr/>
+        <p:nvPr/>
+      </p:nvGrpSpPr>
+      <p:grpSpPr>
+        <a:xfrm>
+          <a:off x="0" y="0"/>
+          <a:ext cx="0" cy="0"/>
+          <a:chOff x="0" y="0"/>
+          <a:chExt cx="0" cy="0"/>
+        </a:xfrm>
+      </p:grpSpPr>
+      <p:sp>
+        <p:nvSpPr>
+          <p:cNvPr id="2" name="Slide Image Placeholder 1"/>
+          <p:cNvSpPr>
+            <a:spLocks noGrp="1"/>
+          </p:cNvSpPr>
+          <p:nvPr>
+            <p:ph type="sldImg" idx="3"/>
+          </p:nvPr>
+        </p:nvSpPr>
+        <p:spPr/>
+      </p:sp>
+      <p:sp>
+        <p:nvSpPr>
+          <p:cNvPr id="3" name="Notes Placeholder 2"/>
+          <p:cNvSpPr>
+            <a:spLocks noGrp="1"/>
+          </p:cNvSpPr>
+          <p:nvPr>
+            <p:ph type="body" idx="1"/>
+          </p:nvPr>
+        </p:nvSpPr>
+        <p:spPr/>
+        <p:txBody>
+          <a:bodyPr/>
+          <a:lstStyle/>
+          <a:p/>
+        </p:txBody>
+      </p:sp>
+      <p:sp>
+        <p:nvSpPr>
+          <p:cNvPr id="4" name="Slide Number Placeholder 3"/>
+          <p:cNvSpPr>
+            <a:spLocks noGrp="1"/>
+          </p:cNvSpPr>
+          <p:nvPr>
+            <p:ph type="sldNum" idx="12"/>
+          </p:nvPr>
+        </p:nvSpPr>
+        <p:spPr/>
+      </p:sp>
+    </p:spTree>
+  </p:cSld>
+  <p:clrMapOvr>
+    <a:masterClrMapping/>
+  </p:clrMapOvr>
+</p:notes>
+</file>
+
+<file path=ppt/slideLayouts/slideLayout12.xml><?xml version="1.0" encoding="utf-8"?>
+<p:sldLayout xmlns:a="http://schemas.openxmlformats.org/drawingml/2006/main" xmlns:r="http://schemas.openxmlformats.org/officeDocument/2006/relationships" xmlns:mc="http://schemas.openxmlformats.org/markup-compatibility/2006" xmlns:mv="urn:schemas-microsoft-com:mac:vml" xmlns:p="http://schemas.openxmlformats.org/presentationml/2006/main" xmlns:c="http://schemas.openxmlformats.org/drawingml/2006/chart" xmlns:dgm="http://schemas.openxmlformats.org/drawingml/2006/diagram" xmlns:o="urn:schemas-microsoft-com:office:office" xmlns:v="urn:schemas-microsoft-com:vml" xmlns:pvml="urn:schemas-microsoft-com:office:powerpoint" xmlns:com="http://schemas.openxmlformats.org/drawingml/2006/compatibility" xmlns:p14="http://schemas.microsoft.com/office/powerpoint/2010/main" xmlns:p15="http://schemas.microsoft.com/office/powerpoint/2012/main" xmlns:ahyp="http://schemas.microsoft.com/office/drawing/2018/hyperlinkcolor" matchingName="2_Заголовок + текст в две колонки">
+  <p:cSld name="2_Заголовок + текст в две колонки">
+    <p:bg>
+      <p:bgPr>
+        <a:solidFill>
+          <a:schemeClr val="lt2"/>
+        </a:solidFill>
+      </p:bgPr>
+    </p:bg>
+    <p:spTree>
+      <p:nvGrpSpPr>
+        <p:cNvPr id="107" name="Shape 107"/>
+        <p:cNvGrpSpPr/>
+        <p:nvPr/>
+      </p:nvGrpSpPr>
+      <p:grpSpPr>
+        <a:xfrm>
+          <a:off x="0" y="0"/>
+          <a:ext cx="0" cy="0"/>
+          <a:chOff x="0" y="0"/>
+          <a:chExt cx="0" cy="0"/>
+        </a:xfrm>
+      </p:grpSpPr>
+      <p:sp>
+        <p:nvSpPr>
+          <p:cNvPr id="108" name="Google Shape;108;p13"/>
+          <p:cNvSpPr txBox="1"/>
+          <p:nvPr>
+            <p:ph idx="1" type="body"/>
+          </p:nvPr>
+        </p:nvSpPr>
+        <p:spPr>
+          <a:xfrm>
+            <a:off x="677334" y="1773238"/>
+            <a:ext cx="5304365" cy="4427537"/>
+          </a:xfrm>
+          <a:prstGeom prst="rect">
+            <a:avLst/>
+          </a:prstGeom>
+          <a:noFill/>
+          <a:ln>
+            <a:noFill/>
+          </a:ln>
+        </p:spPr>
+        <p:txBody>
+          <a:bodyPr anchorCtr="0" anchor="t" bIns="0" lIns="0" spcFirstLastPara="1" rIns="0" wrap="square" tIns="0">
+            <a:normAutofit/>
+          </a:bodyPr>
+          <a:lstStyle>
+            <a:lvl1pPr indent="-228600" lvl="0" marL="457200" algn="l">
+              <a:lnSpc>
+                <a:spcPct val="110000"/>
+              </a:lnSpc>
+              <a:spcBef>
+                <a:spcPts val="1000"/>
+              </a:spcBef>
+              <a:spcAft>
+                <a:spcPts val="0"/>
+              </a:spcAft>
+              <a:buClr>
+                <a:schemeClr val="dk1"/>
+              </a:buClr>
+              <a:buSzPts val="1600"/>
+              <a:buNone/>
+              <a:defRPr b="0" i="0">
+                <a:latin typeface="Play"/>
+                <a:ea typeface="Play"/>
+                <a:cs typeface="Play"/>
+                <a:sym typeface="Play"/>
+              </a:defRPr>
+            </a:lvl1pPr>
+            <a:lvl2pPr indent="-317500" lvl="1" marL="914400" algn="l">
+              <a:lnSpc>
+                <a:spcPct val="110000"/>
+              </a:lnSpc>
+              <a:spcBef>
+                <a:spcPts val="500"/>
+              </a:spcBef>
+              <a:spcAft>
+                <a:spcPts val="0"/>
+              </a:spcAft>
+              <a:buSzPts val="1400"/>
+              <a:buChar char="•"/>
+              <a:defRPr b="0" i="0">
+                <a:latin typeface="Play"/>
+                <a:ea typeface="Play"/>
+                <a:cs typeface="Play"/>
+                <a:sym typeface="Play"/>
+              </a:defRPr>
+            </a:lvl2pPr>
+            <a:lvl3pPr indent="-304800" lvl="2" marL="1371600" algn="l">
+              <a:lnSpc>
+                <a:spcPct val="110000"/>
+              </a:lnSpc>
+              <a:spcBef>
+                <a:spcPts val="500"/>
+              </a:spcBef>
+              <a:spcAft>
+                <a:spcPts val="0"/>
+              </a:spcAft>
+              <a:buClr>
+                <a:schemeClr val="dk1"/>
+              </a:buClr>
+              <a:buSzPts val="1200"/>
+              <a:buChar char="−"/>
+              <a:defRPr b="0" i="0">
+                <a:latin typeface="Play"/>
+                <a:ea typeface="Play"/>
+                <a:cs typeface="Play"/>
+                <a:sym typeface="Play"/>
+              </a:defRPr>
+            </a:lvl3pPr>
+            <a:lvl4pPr indent="-342900" lvl="3" marL="1828800" algn="l">
+              <a:lnSpc>
+                <a:spcPct val="90000"/>
+              </a:lnSpc>
+              <a:spcBef>
+                <a:spcPts val="500"/>
+              </a:spcBef>
+              <a:spcAft>
+                <a:spcPts val="0"/>
+              </a:spcAft>
+              <a:buClr>
+                <a:schemeClr val="dk1"/>
+              </a:buClr>
+              <a:buSzPts val="1800"/>
+              <a:buChar char="•"/>
+              <a:defRPr/>
+            </a:lvl4pPr>
+            <a:lvl5pPr indent="-342900" lvl="4" marL="2286000" algn="l">
+              <a:lnSpc>
+                <a:spcPct val="90000"/>
+              </a:lnSpc>
+              <a:spcBef>
+                <a:spcPts val="500"/>
+              </a:spcBef>
+              <a:spcAft>
+                <a:spcPts val="0"/>
+              </a:spcAft>
+              <a:buClr>
+                <a:schemeClr val="dk1"/>
+              </a:buClr>
+              <a:buSzPts val="1800"/>
+              <a:buChar char="•"/>
+              <a:defRPr/>
+            </a:lvl5pPr>
+            <a:lvl6pPr indent="-342900" lvl="5" marL="2743200" algn="l">
+              <a:lnSpc>
+                <a:spcPct val="90000"/>
+              </a:lnSpc>
+              <a:spcBef>
+                <a:spcPts val="500"/>
+              </a:spcBef>
+              <a:spcAft>
+                <a:spcPts val="0"/>
+              </a:spcAft>
+              <a:buClr>
+                <a:schemeClr val="dk1"/>
+              </a:buClr>
+              <a:buSzPts val="1800"/>
+              <a:buChar char="•"/>
+              <a:defRPr/>
+            </a:lvl6pPr>
+            <a:lvl7pPr indent="-342900" lvl="6" marL="3200400" algn="l">
+              <a:lnSpc>
+                <a:spcPct val="90000"/>
+              </a:lnSpc>
+              <a:spcBef>
+                <a:spcPts val="500"/>
+              </a:spcBef>
+              <a:spcAft>
+                <a:spcPts val="0"/>
+              </a:spcAft>
+              <a:buClr>
+                <a:schemeClr val="dk1"/>
+              </a:buClr>
+              <a:buSzPts val="1800"/>
+              <a:buChar char="•"/>
+              <a:defRPr/>
+            </a:lvl7pPr>
+            <a:lvl8pPr indent="-342900" lvl="7" marL="3657600" algn="l">
+              <a:lnSpc>
+                <a:spcPct val="90000"/>
+              </a:lnSpc>
+              <a:spcBef>
+                <a:spcPts val="500"/>
+              </a:spcBef>
+              <a:spcAft>
+                <a:spcPts val="0"/>
+              </a:spcAft>
+              <a:buClr>
+                <a:schemeClr val="dk1"/>
+              </a:buClr>
+              <a:buSzPts val="1800"/>
+              <a:buChar char="•"/>
+              <a:defRPr/>
+            </a:lvl8pPr>
+            <a:lvl9pPr indent="-342900" lvl="8" marL="4114800" algn="l">
+              <a:lnSpc>
+                <a:spcPct val="90000"/>
+              </a:lnSpc>
+              <a:spcBef>
+                <a:spcPts val="500"/>
+              </a:spcBef>
+              <a:spcAft>
+                <a:spcPts val="0"/>
+              </a:spcAft>
+              <a:buClr>
+                <a:schemeClr val="dk1"/>
+              </a:buClr>
+              <a:buSzPts val="1800"/>
+              <a:buChar char="•"/>
+              <a:defRPr/>
+            </a:lvl9pPr>
+          </a:lstStyle>
+          <a:p/>
+        </p:txBody>
+      </p:sp>
+      <p:sp>
+        <p:nvSpPr>
+          <p:cNvPr id="109" name="Google Shape;109;p13"/>
+          <p:cNvSpPr txBox="1"/>
+          <p:nvPr>
+            <p:ph idx="2" type="body"/>
+          </p:nvPr>
+        </p:nvSpPr>
+        <p:spPr>
+          <a:xfrm>
+            <a:off x="6228824" y="1773239"/>
+            <a:ext cx="5304364" cy="4427537"/>
+          </a:xfrm>
+          <a:prstGeom prst="rect">
+            <a:avLst/>
+          </a:prstGeom>
+          <a:noFill/>
+          <a:ln>
+            <a:noFill/>
+          </a:ln>
+        </p:spPr>
+        <p:txBody>
+          <a:bodyPr anchorCtr="0" anchor="t" bIns="0" lIns="0" spcFirstLastPara="1" rIns="0" wrap="square" tIns="0">
+            <a:normAutofit/>
+          </a:bodyPr>
+          <a:lstStyle>
+            <a:lvl1pPr indent="-228600" lvl="0" marL="457200" algn="l">
+              <a:lnSpc>
+                <a:spcPct val="110000"/>
+              </a:lnSpc>
+              <a:spcBef>
+                <a:spcPts val="1000"/>
+              </a:spcBef>
+              <a:spcAft>
+                <a:spcPts val="0"/>
+              </a:spcAft>
+              <a:buClr>
+                <a:schemeClr val="dk1"/>
+              </a:buClr>
+              <a:buSzPts val="1600"/>
+              <a:buNone/>
+              <a:defRPr b="0" i="0">
+                <a:latin typeface="Play"/>
+                <a:ea typeface="Play"/>
+                <a:cs typeface="Play"/>
+                <a:sym typeface="Play"/>
+              </a:defRPr>
+            </a:lvl1pPr>
+            <a:lvl2pPr indent="-317500" lvl="1" marL="914400" algn="l">
+              <a:lnSpc>
+                <a:spcPct val="110000"/>
+              </a:lnSpc>
+              <a:spcBef>
+                <a:spcPts val="500"/>
+              </a:spcBef>
+              <a:spcAft>
+                <a:spcPts val="0"/>
+              </a:spcAft>
+              <a:buSzPts val="1400"/>
+              <a:buChar char="•"/>
+              <a:defRPr b="0" i="0">
+                <a:latin typeface="Play"/>
+                <a:ea typeface="Play"/>
+                <a:cs typeface="Play"/>
+                <a:sym typeface="Play"/>
+              </a:defRPr>
+            </a:lvl2pPr>
+            <a:lvl3pPr indent="-304800" lvl="2" marL="1371600" algn="l">
+              <a:lnSpc>
+                <a:spcPct val="110000"/>
+              </a:lnSpc>
+              <a:spcBef>
+                <a:spcPts val="500"/>
+              </a:spcBef>
+              <a:spcAft>
+                <a:spcPts val="0"/>
+              </a:spcAft>
+              <a:buClr>
+                <a:schemeClr val="dk1"/>
+              </a:buClr>
+              <a:buSzPts val="1200"/>
+              <a:buChar char="−"/>
+              <a:defRPr b="0" i="0">
+                <a:latin typeface="Play"/>
+                <a:ea typeface="Play"/>
+                <a:cs typeface="Play"/>
+                <a:sym typeface="Play"/>
+              </a:defRPr>
+            </a:lvl3pPr>
+            <a:lvl4pPr indent="-342900" lvl="3" marL="1828800" algn="l">
+              <a:lnSpc>
+                <a:spcPct val="90000"/>
+              </a:lnSpc>
+              <a:spcBef>
+                <a:spcPts val="500"/>
+              </a:spcBef>
+              <a:spcAft>
+                <a:spcPts val="0"/>
+              </a:spcAft>
+              <a:buClr>
+                <a:schemeClr val="dk1"/>
+              </a:buClr>
+              <a:buSzPts val="1800"/>
+              <a:buChar char="•"/>
+              <a:defRPr/>
+            </a:lvl4pPr>
+            <a:lvl5pPr indent="-342900" lvl="4" marL="2286000" algn="l">
+              <a:lnSpc>
+                <a:spcPct val="90000"/>
+              </a:lnSpc>
+              <a:spcBef>
+                <a:spcPts val="500"/>
+              </a:spcBef>
+              <a:spcAft>
+                <a:spcPts val="0"/>
+              </a:spcAft>
+              <a:buClr>
+                <a:schemeClr val="dk1"/>
+              </a:buClr>
+              <a:buSzPts val="1800"/>
+              <a:buChar char="•"/>
+              <a:defRPr/>
+            </a:lvl5pPr>
+            <a:lvl6pPr indent="-342900" lvl="5" marL="2743200" algn="l">
+              <a:lnSpc>
+                <a:spcPct val="90000"/>
+              </a:lnSpc>
+              <a:spcBef>
+                <a:spcPts val="500"/>
+              </a:spcBef>
+              <a:spcAft>
+                <a:spcPts val="0"/>
+              </a:spcAft>
+              <a:buClr>
+                <a:schemeClr val="dk1"/>
+              </a:buClr>
+              <a:buSzPts val="1800"/>
+              <a:buChar char="•"/>
+              <a:defRPr/>
+            </a:lvl6pPr>
+            <a:lvl7pPr indent="-342900" lvl="6" marL="3200400" algn="l">
+              <a:lnSpc>
+                <a:spcPct val="90000"/>
+              </a:lnSpc>
+              <a:spcBef>
+                <a:spcPts val="500"/>
+              </a:spcBef>
+              <a:spcAft>
+                <a:spcPts val="0"/>
+              </a:spcAft>
+              <a:buClr>
+                <a:schemeClr val="dk1"/>
+              </a:buClr>
+              <a:buSzPts val="1800"/>
+              <a:buChar char="•"/>
+              <a:defRPr/>
+            </a:lvl7pPr>
+            <a:lvl8pPr indent="-342900" lvl="7" marL="3657600" algn="l">
+              <a:lnSpc>
+                <a:spcPct val="90000"/>
+              </a:lnSpc>
+              <a:spcBef>
+                <a:spcPts val="500"/>
+              </a:spcBef>
+              <a:spcAft>
+                <a:spcPts val="0"/>
+              </a:spcAft>
+              <a:buClr>
+                <a:schemeClr val="dk1"/>
+              </a:buClr>
+              <a:buSzPts val="1800"/>
+              <a:buChar char="•"/>
+              <a:defRPr/>
+            </a:lvl8pPr>
+            <a:lvl9pPr indent="-342900" lvl="8" marL="4114800" algn="l">
+              <a:lnSpc>
+                <a:spcPct val="90000"/>
+              </a:lnSpc>
+              <a:spcBef>
+                <a:spcPts val="500"/>
+              </a:spcBef>
+              <a:spcAft>
+                <a:spcPts val="0"/>
+              </a:spcAft>
+              <a:buClr>
+                <a:schemeClr val="dk1"/>
+              </a:buClr>
+              <a:buSzPts val="1800"/>
+              <a:buChar char="•"/>
+              <a:defRPr/>
+            </a:lvl9pPr>
+          </a:lstStyle>
+          <a:p/>
+        </p:txBody>
+      </p:sp>
+      <p:sp>
+        <p:nvSpPr>
+          <p:cNvPr id="110" name="Google Shape;110;p13"/>
+          <p:cNvSpPr txBox="1"/>
+          <p:nvPr>
+            <p:ph type="title"/>
+          </p:nvPr>
+        </p:nvSpPr>
+        <p:spPr>
+          <a:xfrm>
+            <a:off x="677334" y="692150"/>
+            <a:ext cx="10855854" cy="644241"/>
+          </a:xfrm>
+          <a:prstGeom prst="rect">
+            <a:avLst/>
+          </a:prstGeom>
+          <a:noFill/>
+          <a:ln>
+            <a:noFill/>
+          </a:ln>
+        </p:spPr>
+        <p:txBody>
+          <a:bodyPr anchorCtr="0" anchor="t" bIns="0" lIns="0" spcFirstLastPara="1" rIns="0" wrap="square" tIns="0">
+            <a:noAutofit/>
+          </a:bodyPr>
+          <a:lstStyle>
+            <a:lvl1pPr lvl="0" algn="l">
+              <a:lnSpc>
+                <a:spcPct val="90000"/>
+              </a:lnSpc>
+              <a:spcBef>
+                <a:spcPts val="0"/>
+              </a:spcBef>
+              <a:spcAft>
+                <a:spcPts val="0"/>
+              </a:spcAft>
+              <a:buClr>
+                <a:schemeClr val="accent1"/>
+              </a:buClr>
+              <a:buSzPts val="3600"/>
+              <a:buFont typeface="Play"/>
+              <a:buNone/>
+              <a:defRPr>
+                <a:solidFill>
+                  <a:schemeClr val="accent1"/>
+                </a:solidFill>
+              </a:defRPr>
+            </a:lvl1pPr>
+            <a:lvl2pPr lvl="1">
+              <a:spcBef>
+                <a:spcPts val="0"/>
+              </a:spcBef>
+              <a:spcAft>
+                <a:spcPts val="0"/>
+              </a:spcAft>
+              <a:buSzPts val="1400"/>
+              <a:buNone/>
+              <a:defRPr/>
+            </a:lvl2pPr>
+            <a:lvl3pPr lvl="2">
+              <a:spcBef>
+                <a:spcPts val="0"/>
+              </a:spcBef>
+              <a:spcAft>
+                <a:spcPts val="0"/>
+              </a:spcAft>
+              <a:buSzPts val="1400"/>
+              <a:buNone/>
+              <a:defRPr/>
+            </a:lvl3pPr>
+            <a:lvl4pPr lvl="3">
+              <a:spcBef>
+                <a:spcPts val="0"/>
+              </a:spcBef>
+              <a:spcAft>
+                <a:spcPts val="0"/>
+              </a:spcAft>
+              <a:buSzPts val="1400"/>
+              <a:buNone/>
+              <a:defRPr/>
+            </a:lvl4pPr>
+            <a:lvl5pPr lvl="4">
+              <a:spcBef>
+                <a:spcPts val="0"/>
+              </a:spcBef>
+              <a:spcAft>
+                <a:spcPts val="0"/>
+              </a:spcAft>
+              <a:buSzPts val="1400"/>
+              <a:buNone/>
+              <a:defRPr/>
+            </a:lvl5pPr>
+            <a:lvl6pPr lvl="5">
+              <a:spcBef>
+                <a:spcPts val="0"/>
+              </a:spcBef>
+              <a:spcAft>
+                <a:spcPts val="0"/>
+              </a:spcAft>
+              <a:buSzPts val="1400"/>
+              <a:buNone/>
+              <a:defRPr/>
+            </a:lvl6pPr>
+            <a:lvl7pPr lvl="6">
+              <a:spcBef>
+                <a:spcPts val="0"/>
+              </a:spcBef>
+              <a:spcAft>
+                <a:spcPts val="0"/>
+              </a:spcAft>
+              <a:buSzPts val="1400"/>
+              <a:buNone/>
+              <a:defRPr/>
+            </a:lvl7pPr>
+            <a:lvl8pPr lvl="7">
+              <a:spcBef>
+                <a:spcPts val="0"/>
+              </a:spcBef>
+              <a:spcAft>
+                <a:spcPts val="0"/>
+              </a:spcAft>
+              <a:buSzPts val="1400"/>
+              <a:buNone/>
+              <a:defRPr/>
+            </a:lvl8pPr>
+            <a:lvl9pPr lvl="8">
+              <a:spcBef>
+                <a:spcPts val="0"/>
+              </a:spcBef>
+              <a:spcAft>
+                <a:spcPts val="0"/>
+              </a:spcAft>
+              <a:buSzPts val="1400"/>
+              <a:buNone/>
+              <a:defRPr/>
+            </a:lvl9pPr>
+          </a:lstStyle>
+          <a:p/>
+        </p:txBody>
+      </p:sp>
+    </p:spTree>
+  </p:cSld>
+  <p:clrMapOvr>
+    <a:masterClrMapping/>
+  </p:clrMapOvr>
+</p:sldLayout>
 </file>
 
 <file path=ppt/slideLayouts/slideLayout18.xml><?xml version="1.0" encoding="utf-8"?>
@@ -4616,6 +5740,7 @@
   <p:sldLayoutIdLst>
     <p:sldLayoutId id="2147483649" r:id="rId2"/>
     <p:sldLayoutId id="2147483653" r:id="rId6"/>
+    <p:sldLayoutId id="2147483659" r:id="rId12"/>
     <p:sldLayoutId id="2147483665" r:id="rId18"/>
   </p:sldLayoutIdLst>
   <p:hf dt="0" ftr="0" hdr="0" sldNum="0"/>
@@ -7584,7 +8709,7 @@
                 <a:ea typeface="Arial"/>
                 <a:cs typeface="Arial"/>
               </a:rPr>
-              <a:t>Автоматическая вёрстка презентаций</a:t>
+              <a:t>Защита инициативы: сервис автоматической вёрстки</a:t>
             </a:r>
           </a:p>
         </p:txBody>
@@ -7607,35 +8732,9 @@
         <p:nvPr/>
       </p:nvGrpSpPr>
       <p:grpSpPr/>
-      <p:cxnSp>
-        <p:nvCxnSpPr>
-          <p:cNvPr id="986" name="Google Shape;986;p76"/>
-          <p:cNvCxnSpPr/>
-          <p:nvPr/>
-        </p:nvCxnSpPr>
-        <p:spPr>
-          <a:xfrm rot="10800000">
-            <a:off x="-42658" y="3591512"/>
-            <a:ext cx="12234658" cy="0"/>
-          </a:xfrm>
-          <a:prstGeom prst="straightConnector1">
-            <a:avLst/>
-          </a:prstGeom>
-          <a:noFill/>
-          <a:ln cap="flat" cmpd="sng" w="12700">
-            <a:solidFill>
-              <a:srgbClr val="E1E1E2"/>
-            </a:solidFill>
-            <a:prstDash val="solid"/>
-            <a:miter lim="8000"/>
-            <a:headEnd len="sm" w="sm" type="none"/>
-            <a:tailEnd len="sm" w="sm" type="none"/>
-          </a:ln>
-        </p:spPr>
-      </p:cxnSp>
       <p:sp>
         <p:nvSpPr>
-          <p:cNvPr id="987" name="title"/>
+          <p:cNvPr id="2" name="title"/>
           <p:cNvSpPr txBox="1"/>
           <p:nvPr/>
         </p:nvSpPr>
@@ -7682,65 +8781,34 @@
           </a:p>
         </p:txBody>
       </p:sp>
+      <p:graphicFrame>
+        <p:nvGraphicFramePr>
+          <p:cNvPr id="3" name="Chart 2"/>
+          <p:cNvGraphicFramePr>
+            <a:graphicFrameLocks noGrp="1"/>
+          </p:cNvGraphicFramePr>
+          <p:nvPr/>
+        </p:nvGraphicFramePr>
+        <p:xfrm>
+          <a:off x="677387" y="1783080"/>
+          <a:ext cx="10855878" cy="2905147"/>
+        </p:xfrm>
+        <a:graphic>
+          <a:graphicData uri="http://schemas.openxmlformats.org/drawingml/2006/chart">
+            <c:chart xmlns:c="http://schemas.openxmlformats.org/drawingml/2006/chart" r:id="rId2"/>
+          </a:graphicData>
+        </a:graphic>
+      </p:graphicFrame>
       <p:sp>
         <p:nvSpPr>
-          <p:cNvPr id="988" name="lead"/>
+          <p:cNvPr id="4" name="body"/>
           <p:cNvSpPr txBox="1"/>
           <p:nvPr/>
         </p:nvSpPr>
         <p:spPr>
           <a:xfrm>
-            <a:off x="677387" y="2200937"/>
-            <a:ext cx="10855878" cy="472802"/>
-          </a:xfrm>
-          <a:prstGeom prst="rect">
-            <a:avLst/>
-          </a:prstGeom>
-          <a:noFill/>
-        </p:spPr>
-        <p:txBody>
-          <a:bodyPr wrap="square" lIns="76200" rIns="76200" tIns="50800" bIns="50800">
-            <a:spAutoFit/>
-          </a:bodyPr>
-          <a:lstStyle/>
-          <a:p>
-            <a:pPr algn="ctr">
-              <a:spcAft>
-                <a:spcPts val="300"/>
-              </a:spcAft>
-              <a:defRPr sz="1800">
-                <a:solidFill>
-                  <a:srgbClr val="000000"/>
-                </a:solidFill>
-                <a:latin typeface="Play"/>
-                <a:ea typeface="Play"/>
-                <a:cs typeface="Play"/>
-              </a:defRPr>
-            </a:pPr>
-            <a:r>
-              <a:rPr sz="1800">
-                <a:solidFill>
-                  <a:srgbClr val="000000"/>
-                </a:solidFill>
-                <a:latin typeface="Play"/>
-                <a:ea typeface="Play"/>
-                <a:cs typeface="Play"/>
-              </a:rPr>
-              <a:t>Сборка одной колоды 12 слайдов занимает 186 минут</a:t>
-            </a:r>
-          </a:p>
-        </p:txBody>
-      </p:sp>
-      <p:sp>
-        <p:nvSpPr>
-          <p:cNvPr id="989" name="body"/>
-          <p:cNvSpPr txBox="1"/>
-          <p:nvPr/>
-        </p:nvSpPr>
-        <p:spPr>
-          <a:xfrm>
-            <a:off x="677387" y="2691104"/>
-            <a:ext cx="10855878" cy="900430"/>
+            <a:off x="677387" y="4859677"/>
+            <a:ext cx="10855878" cy="1341120"/>
           </a:xfrm>
           <a:prstGeom prst="rect">
             <a:avLst/>
@@ -7757,7 +8825,7 @@
               <a:spcAft>
                 <a:spcPts val="300"/>
               </a:spcAft>
-              <a:defRPr sz="1200">
+              <a:defRPr sz="2400">
                 <a:solidFill>
                   <a:srgbClr val="000000"/>
                 </a:solidFill>
@@ -7767,7 +8835,7 @@
               </a:defRPr>
             </a:pPr>
             <a:r>
-              <a:rPr sz="1200">
+              <a:rPr sz="2400">
                 <a:solidFill>
                   <a:srgbClr val="000000"/>
                 </a:solidFill>
@@ -7775,7 +8843,7 @@
                 <a:ea typeface="Play"/>
                 <a:cs typeface="Play"/>
               </a:rPr>
-              <a:t>• 74 минуты уходит на правки после ревью дизайнера</a:t>
+              <a:t>• Сборка одной презентации занимает 186 мин</a:t>
             </a:r>
           </a:p>
           <a:p>
@@ -7783,7 +8851,7 @@
               <a:spcAft>
                 <a:spcPts val="300"/>
               </a:spcAft>
-              <a:defRPr sz="1200">
+              <a:defRPr sz="2400">
                 <a:solidFill>
                   <a:srgbClr val="000000"/>
                 </a:solidFill>
@@ -7793,7 +8861,7 @@
               </a:defRPr>
             </a:pPr>
             <a:r>
-              <a:rPr sz="1200">
+              <a:rPr sz="2400">
                 <a:solidFill>
                   <a:srgbClr val="000000"/>
                 </a:solidFill>
@@ -7801,7 +8869,7 @@
                 <a:ea typeface="Play"/>
                 <a:cs typeface="Play"/>
               </a:rPr>
-              <a:t>• 19 из 42 колод нарушают фирменный стиль</a:t>
+              <a:t>• 74 мин уходит на правки после ревью</a:t>
             </a:r>
           </a:p>
           <a:p>
@@ -7809,7 +8877,7 @@
               <a:spcAft>
                 <a:spcPts val="300"/>
               </a:spcAft>
-              <a:defRPr sz="1200">
+              <a:defRPr sz="2400">
                 <a:solidFill>
                   <a:srgbClr val="000000"/>
                 </a:solidFill>
@@ -7819,7 +8887,7 @@
               </a:defRPr>
             </a:pPr>
             <a:r>
-              <a:rPr sz="1200">
+              <a:rPr sz="2400">
                 <a:solidFill>
                   <a:srgbClr val="000000"/>
                 </a:solidFill>
@@ -7827,33 +8895,7 @@
                 <a:ea typeface="Play"/>
                 <a:cs typeface="Play"/>
               </a:rPr>
-              <a:t>• Дизайн-отдел из 4 человек закрывает 11 запросов в неделю из 27</a:t>
-            </a:r>
-          </a:p>
-          <a:p>
-            <a:pPr algn="l">
-              <a:spcAft>
-                <a:spcPts val="300"/>
-              </a:spcAft>
-              <a:defRPr sz="1200">
-                <a:solidFill>
-                  <a:srgbClr val="000000"/>
-                </a:solidFill>
-                <a:latin typeface="Play"/>
-                <a:ea typeface="Play"/>
-                <a:cs typeface="Play"/>
-              </a:defRPr>
-            </a:pPr>
-            <a:r>
-              <a:rPr sz="1200">
-                <a:solidFill>
-                  <a:srgbClr val="000000"/>
-                </a:solidFill>
-                <a:latin typeface="Play"/>
-                <a:ea typeface="Play"/>
-                <a:cs typeface="Play"/>
-              </a:rPr>
-              <a:t>• Средний срок ожидания в очереди — 6 рабочих дней</a:t>
+              <a:t>• 19 из 42 колод нарушают фирменный стиль</a:t>
             </a:r>
           </a:p>
         </p:txBody>
@@ -7867,6 +8909,261 @@
 </file>
 
 <file path=ppt/slides/slide58.xml><?xml version="1.0" encoding="utf-8"?>
+<p:sld xmlns:a="http://schemas.openxmlformats.org/drawingml/2006/main" xmlns:p="http://schemas.openxmlformats.org/presentationml/2006/main" xmlns:r="http://schemas.openxmlformats.org/officeDocument/2006/relationships">
+  <p:cSld>
+    <p:bg>
+      <p:bgPr>
+        <a:solidFill>
+          <a:schemeClr val="lt2"/>
+        </a:solidFill>
+      </p:bgPr>
+    </p:bg>
+    <p:spTree>
+      <p:nvGrpSpPr>
+        <p:cNvPr id="1" name=""/>
+        <p:cNvGrpSpPr/>
+        <p:nvPr/>
+      </p:nvGrpSpPr>
+      <p:grpSpPr/>
+      <p:sp>
+        <p:nvSpPr>
+          <p:cNvPr id="795" name="Google Shape;795;p60"/>
+          <p:cNvSpPr txBox="1"/>
+          <p:nvPr/>
+        </p:nvSpPr>
+        <p:spPr>
+          <a:xfrm>
+            <a:off x="18692059" y="4674436"/>
+            <a:ext cx="4304330" cy="678198"/>
+          </a:xfrm>
+          <a:prstGeom prst="rect">
+            <a:avLst/>
+          </a:prstGeom>
+          <a:noFill/>
+          <a:ln>
+            <a:noFill/>
+          </a:ln>
+        </p:spPr>
+        <p:txBody>
+          <a:bodyPr anchorCtr="0" anchor="t" bIns="45700" lIns="91425" spcFirstLastPara="1" rIns="91425" wrap="square" tIns="45700">
+            <a:noAutofit/>
+          </a:bodyPr>
+          <a:lstStyle/>
+          <a:p>
+            <a:pPr indent="0" lvl="0" marL="0" marR="0" rtl="0" algn="l">
+              <a:lnSpc>
+                <a:spcPct val="110000"/>
+              </a:lnSpc>
+              <a:spcBef>
+                <a:spcPts val="0"/>
+              </a:spcBef>
+              <a:spcAft>
+                <a:spcPts val="0"/>
+              </a:spcAft>
+              <a:buClr>
+                <a:schemeClr val="dk1"/>
+              </a:buClr>
+              <a:buSzPts val="1600"/>
+              <a:buFont typeface="Arial"/>
+              <a:buNone/>
+            </a:pPr>
+            <a:r>
+              <a:t/>
+            </a:r>
+            <a:endParaRPr sz="1600">
+              <a:solidFill>
+                <a:schemeClr val="dk1"/>
+              </a:solidFill>
+              <a:latin typeface="Arial"/>
+              <a:ea typeface="Arial"/>
+              <a:cs typeface="Arial"/>
+              <a:sym typeface="Arial"/>
+            </a:endParaRPr>
+          </a:p>
+        </p:txBody>
+      </p:sp>
+      <p:sp>
+        <p:nvSpPr>
+          <p:cNvPr id="796" name="title"/>
+          <p:cNvSpPr txBox="1"/>
+          <p:nvPr/>
+        </p:nvSpPr>
+        <p:spPr>
+          <a:xfrm>
+            <a:off x="677387" y="692177"/>
+            <a:ext cx="10855878" cy="822960"/>
+          </a:xfrm>
+          <a:prstGeom prst="rect">
+            <a:avLst/>
+          </a:prstGeom>
+          <a:noFill/>
+        </p:spPr>
+        <p:txBody>
+          <a:bodyPr wrap="square" lIns="76200" rIns="76200" tIns="50800" bIns="50800">
+            <a:spAutoFit/>
+          </a:bodyPr>
+          <a:lstStyle/>
+          <a:p>
+            <a:pPr algn="l">
+              <a:spcAft>
+                <a:spcPts val="300"/>
+              </a:spcAft>
+              <a:defRPr sz="4000">
+                <a:solidFill>
+                  <a:srgbClr val="000000"/>
+                </a:solidFill>
+                <a:latin typeface="Arial"/>
+                <a:ea typeface="Arial"/>
+                <a:cs typeface="Arial"/>
+              </a:defRPr>
+            </a:pPr>
+            <a:r>
+              <a:rPr sz="4000">
+                <a:solidFill>
+                  <a:srgbClr val="000000"/>
+                </a:solidFill>
+                <a:latin typeface="Arial"/>
+                <a:ea typeface="Arial"/>
+                <a:cs typeface="Arial"/>
+              </a:rPr>
+              <a:t>Предложение</a:t>
+            </a:r>
+          </a:p>
+        </p:txBody>
+      </p:sp>
+      <p:sp>
+        <p:nvSpPr>
+          <p:cNvPr id="797" name="lead"/>
+          <p:cNvSpPr txBox="1"/>
+          <p:nvPr/>
+        </p:nvSpPr>
+        <p:spPr>
+          <a:xfrm>
+            <a:off x="677387" y="2200937"/>
+            <a:ext cx="10855878" cy="1718371"/>
+          </a:xfrm>
+          <a:prstGeom prst="rect">
+            <a:avLst/>
+          </a:prstGeom>
+          <a:noFill/>
+        </p:spPr>
+        <p:txBody>
+          <a:bodyPr wrap="square" lIns="76200" rIns="76200" tIns="50800" bIns="50800">
+            <a:spAutoFit/>
+          </a:bodyPr>
+          <a:lstStyle/>
+          <a:p>
+            <a:pPr algn="l">
+              <a:spcAft>
+                <a:spcPts val="300"/>
+              </a:spcAft>
+              <a:defRPr sz="4800">
+                <a:solidFill>
+                  <a:srgbClr val="000000"/>
+                </a:solidFill>
+                <a:latin typeface="Play"/>
+                <a:ea typeface="Play"/>
+                <a:cs typeface="Play"/>
+              </a:defRPr>
+            </a:pPr>
+            <a:r>
+              <a:rPr sz="4800">
+                <a:solidFill>
+                  <a:srgbClr val="000000"/>
+                </a:solidFill>
+                <a:latin typeface="Play"/>
+                <a:ea typeface="Play"/>
+                <a:cs typeface="Play"/>
+              </a:rPr>
+              <a:t>Сервис принимает шаблон pptx и материалы</a:t>
+            </a:r>
+          </a:p>
+        </p:txBody>
+      </p:sp>
+      <p:sp>
+        <p:nvSpPr>
+          <p:cNvPr id="798" name="body"/>
+          <p:cNvSpPr txBox="1"/>
+          <p:nvPr/>
+        </p:nvSpPr>
+        <p:spPr>
+          <a:xfrm>
+            <a:off x="677387" y="4166975"/>
+            <a:ext cx="10855878" cy="2161724"/>
+          </a:xfrm>
+          <a:prstGeom prst="rect">
+            <a:avLst/>
+          </a:prstGeom>
+          <a:noFill/>
+        </p:spPr>
+        <p:txBody>
+          <a:bodyPr wrap="square" lIns="76200" rIns="76200" tIns="50800" bIns="50800">
+            <a:spAutoFit/>
+          </a:bodyPr>
+          <a:lstStyle/>
+          <a:p>
+            <a:pPr algn="l">
+              <a:spcAft>
+                <a:spcPts val="300"/>
+              </a:spcAft>
+              <a:defRPr sz="3200">
+                <a:solidFill>
+                  <a:srgbClr val="000000"/>
+                </a:solidFill>
+                <a:latin typeface="Play"/>
+                <a:ea typeface="Play"/>
+                <a:cs typeface="Play"/>
+              </a:defRPr>
+            </a:pPr>
+            <a:r>
+              <a:rPr sz="3200">
+                <a:solidFill>
+                  <a:srgbClr val="000000"/>
+                </a:solidFill>
+                <a:latin typeface="Play"/>
+                <a:ea typeface="Play"/>
+                <a:cs typeface="Play"/>
+              </a:rPr>
+              <a:t>• Генерирует колоду по дизайн-системе и аудиту</a:t>
+            </a:r>
+          </a:p>
+          <a:p>
+            <a:pPr algn="l">
+              <a:spcAft>
+                <a:spcPts val="300"/>
+              </a:spcAft>
+              <a:defRPr sz="3200">
+                <a:solidFill>
+                  <a:srgbClr val="000000"/>
+                </a:solidFill>
+                <a:latin typeface="Play"/>
+                <a:ea typeface="Play"/>
+                <a:cs typeface="Play"/>
+              </a:defRPr>
+            </a:pPr>
+            <a:r>
+              <a:rPr sz="3200">
+                <a:solidFill>
+                  <a:srgbClr val="000000"/>
+                </a:solidFill>
+                <a:latin typeface="Play"/>
+                <a:ea typeface="Play"/>
+                <a:cs typeface="Play"/>
+              </a:rPr>
+              <a:t>• Экспорт в pptx, pdf, html с редактируемыми слайдами</a:t>
+            </a:r>
+          </a:p>
+        </p:txBody>
+      </p:sp>
+    </p:spTree>
+  </p:cSld>
+  <p:clrMapOvr>
+    <a:masterClrMapping/>
+  </p:clrMapOvr>
+</p:sld>
+</file>
+
+<file path=ppt/slides/slide59.xml><?xml version="1.0" encoding="utf-8"?>
 <p:sld xmlns:a="http://schemas.openxmlformats.org/drawingml/2006/main" xmlns:p="http://schemas.openxmlformats.org/presentationml/2006/main" xmlns:r="http://schemas.openxmlformats.org/officeDocument/2006/relationships">
   <p:cSld>
     <p:bg>
@@ -7927,469 +9224,39 @@
                 <a:ea typeface="Arial"/>
                 <a:cs typeface="Arial"/>
               </a:rPr>
-              <a:t>Предложение</a:t>
+              <a:t>Ожидаемый эффект</a:t>
             </a:r>
           </a:p>
         </p:txBody>
       </p:sp>
+      <p:graphicFrame>
+        <p:nvGraphicFramePr>
+          <p:cNvPr id="3" name="Chart 2"/>
+          <p:cNvGraphicFramePr>
+            <a:graphicFrameLocks noGrp="1"/>
+          </p:cNvGraphicFramePr>
+          <p:nvPr/>
+        </p:nvGraphicFramePr>
+        <p:xfrm>
+          <a:off x="677387" y="1783080"/>
+          <a:ext cx="10855878" cy="2508907"/>
+        </p:xfrm>
+        <a:graphic>
+          <a:graphicData uri="http://schemas.openxmlformats.org/drawingml/2006/chart">
+            <c:chart xmlns:c="http://schemas.openxmlformats.org/drawingml/2006/chart" r:id="rId2"/>
+          </a:graphicData>
+        </a:graphic>
+      </p:graphicFrame>
       <p:sp>
         <p:nvSpPr>
-          <p:cNvPr id="3" name="Pentagon 2"/>
-          <p:cNvSpPr/>
-          <p:nvPr/>
-        </p:nvSpPr>
-        <p:spPr>
-          <a:xfrm>
-            <a:off x="677387" y="1824859"/>
-            <a:ext cx="10855878" cy="634621"/>
-          </a:xfrm>
-          <a:prstGeom prst="homePlate">
-            <a:avLst/>
-          </a:prstGeom>
-          <a:solidFill>
-            <a:srgbClr val="0077FF"/>
-          </a:solidFill>
-          <a:ln>
-            <a:noFill/>
-          </a:ln>
-        </p:spPr>
-        <p:style>
-          <a:lnRef idx="1">
-            <a:schemeClr val="accent1"/>
-          </a:lnRef>
-          <a:fillRef idx="3">
-            <a:schemeClr val="accent1"/>
-          </a:fillRef>
-          <a:effectRef idx="2">
-            <a:schemeClr val="accent1"/>
-          </a:effectRef>
-          <a:fontRef idx="minor">
-            <a:schemeClr val="lt1"/>
-          </a:fontRef>
-        </p:style>
-        <p:txBody>
-          <a:bodyPr rtlCol="0" anchor="ctr" wrap="square" lIns="12700" rIns="12700" tIns="12700" bIns="12700"/>
-          <a:lstStyle/>
-          <a:p>
-            <a:pPr algn="ctr">
-              <a:defRPr sz="1400" b="0">
-                <a:solidFill>
-                  <a:srgbClr val="FFFFFF"/>
-                </a:solidFill>
-                <a:latin typeface="Play"/>
-                <a:ea typeface="Play"/>
-                <a:cs typeface="Play"/>
-              </a:defRPr>
-            </a:pPr>
-            <a:r>
-              <a:rPr sz="1400" b="0">
-                <a:solidFill>
-                  <a:srgbClr val="FFFFFF"/>
-                </a:solidFill>
-                <a:latin typeface="Play"/>
-                <a:ea typeface="Play"/>
-                <a:cs typeface="Play"/>
-              </a:rPr>
-              <a:t>Загрузка шаблона</a:t>
-            </a:r>
-          </a:p>
-        </p:txBody>
-      </p:sp>
-      <p:sp>
-        <p:nvSpPr>
-          <p:cNvPr id="4" name="Chevron 3"/>
-          <p:cNvSpPr/>
-          <p:nvPr/>
-        </p:nvSpPr>
-        <p:spPr>
-          <a:xfrm>
-            <a:off x="677387" y="2562791"/>
-            <a:ext cx="10855878" cy="634621"/>
-          </a:xfrm>
-          <a:prstGeom prst="chevron">
-            <a:avLst/>
-          </a:prstGeom>
-          <a:solidFill>
-            <a:srgbClr val="0077FF"/>
-          </a:solidFill>
-          <a:ln>
-            <a:noFill/>
-          </a:ln>
-        </p:spPr>
-        <p:style>
-          <a:lnRef idx="1">
-            <a:schemeClr val="accent1"/>
-          </a:lnRef>
-          <a:fillRef idx="3">
-            <a:schemeClr val="accent1"/>
-          </a:fillRef>
-          <a:effectRef idx="2">
-            <a:schemeClr val="accent1"/>
-          </a:effectRef>
-          <a:fontRef idx="minor">
-            <a:schemeClr val="lt1"/>
-          </a:fontRef>
-        </p:style>
-        <p:txBody>
-          <a:bodyPr rtlCol="0" anchor="ctr" wrap="square" lIns="12700" rIns="12700" tIns="12700" bIns="12700"/>
-          <a:lstStyle/>
-          <a:p>
-            <a:pPr algn="ctr">
-              <a:defRPr sz="1400" b="0">
-                <a:solidFill>
-                  <a:srgbClr val="FFFFFF"/>
-                </a:solidFill>
-                <a:latin typeface="Play"/>
-                <a:ea typeface="Play"/>
-                <a:cs typeface="Play"/>
-              </a:defRPr>
-            </a:pPr>
-            <a:r>
-              <a:rPr sz="1400" b="0">
-                <a:solidFill>
-                  <a:srgbClr val="FFFFFF"/>
-                </a:solidFill>
-                <a:latin typeface="Play"/>
-                <a:ea typeface="Play"/>
-                <a:cs typeface="Play"/>
-              </a:rPr>
-              <a:t>Анализ дизайна</a:t>
-            </a:r>
-          </a:p>
-        </p:txBody>
-      </p:sp>
-      <p:sp>
-        <p:nvSpPr>
-          <p:cNvPr id="5" name="Chevron 4"/>
-          <p:cNvSpPr/>
-          <p:nvPr/>
-        </p:nvSpPr>
-        <p:spPr>
-          <a:xfrm>
-            <a:off x="677387" y="3300723"/>
-            <a:ext cx="10855878" cy="634621"/>
-          </a:xfrm>
-          <a:prstGeom prst="chevron">
-            <a:avLst/>
-          </a:prstGeom>
-          <a:solidFill>
-            <a:srgbClr val="0077FF"/>
-          </a:solidFill>
-          <a:ln>
-            <a:noFill/>
-          </a:ln>
-        </p:spPr>
-        <p:style>
-          <a:lnRef idx="1">
-            <a:schemeClr val="accent1"/>
-          </a:lnRef>
-          <a:fillRef idx="3">
-            <a:schemeClr val="accent1"/>
-          </a:fillRef>
-          <a:effectRef idx="2">
-            <a:schemeClr val="accent1"/>
-          </a:effectRef>
-          <a:fontRef idx="minor">
-            <a:schemeClr val="lt1"/>
-          </a:fontRef>
-        </p:style>
-        <p:txBody>
-          <a:bodyPr rtlCol="0" anchor="ctr" wrap="square" lIns="12700" rIns="12700" tIns="12700" bIns="12700"/>
-          <a:lstStyle/>
-          <a:p>
-            <a:pPr algn="ctr">
-              <a:defRPr sz="1400" b="0">
-                <a:solidFill>
-                  <a:srgbClr val="FFFFFF"/>
-                </a:solidFill>
-                <a:latin typeface="Play"/>
-                <a:ea typeface="Play"/>
-                <a:cs typeface="Play"/>
-              </a:defRPr>
-            </a:pPr>
-            <a:r>
-              <a:rPr sz="1400" b="0">
-                <a:solidFill>
-                  <a:srgbClr val="FFFFFF"/>
-                </a:solidFill>
-                <a:latin typeface="Play"/>
-                <a:ea typeface="Play"/>
-                <a:cs typeface="Play"/>
-              </a:rPr>
-              <a:t>План колоды</a:t>
-            </a:r>
-          </a:p>
-        </p:txBody>
-      </p:sp>
-      <p:sp>
-        <p:nvSpPr>
-          <p:cNvPr id="6" name="Chevron 5"/>
-          <p:cNvSpPr/>
-          <p:nvPr/>
-        </p:nvSpPr>
-        <p:spPr>
-          <a:xfrm>
-            <a:off x="677387" y="4038655"/>
-            <a:ext cx="10855878" cy="634621"/>
-          </a:xfrm>
-          <a:prstGeom prst="chevron">
-            <a:avLst/>
-          </a:prstGeom>
-          <a:solidFill>
-            <a:srgbClr val="0077FF"/>
-          </a:solidFill>
-          <a:ln>
-            <a:noFill/>
-          </a:ln>
-        </p:spPr>
-        <p:style>
-          <a:lnRef idx="1">
-            <a:schemeClr val="accent1"/>
-          </a:lnRef>
-          <a:fillRef idx="3">
-            <a:schemeClr val="accent1"/>
-          </a:fillRef>
-          <a:effectRef idx="2">
-            <a:schemeClr val="accent1"/>
-          </a:effectRef>
-          <a:fontRef idx="minor">
-            <a:schemeClr val="lt1"/>
-          </a:fontRef>
-        </p:style>
-        <p:txBody>
-          <a:bodyPr rtlCol="0" anchor="ctr" wrap="square" lIns="12700" rIns="12700" tIns="12700" bIns="12700"/>
-          <a:lstStyle/>
-          <a:p>
-            <a:pPr algn="ctr">
-              <a:defRPr sz="1400" b="0">
-                <a:solidFill>
-                  <a:srgbClr val="FFFFFF"/>
-                </a:solidFill>
-                <a:latin typeface="Play"/>
-                <a:ea typeface="Play"/>
-                <a:cs typeface="Play"/>
-              </a:defRPr>
-            </a:pPr>
-            <a:r>
-              <a:rPr sz="1400" b="0">
-                <a:solidFill>
-                  <a:srgbClr val="FFFFFF"/>
-                </a:solidFill>
-                <a:latin typeface="Play"/>
-                <a:ea typeface="Play"/>
-                <a:cs typeface="Play"/>
-              </a:rPr>
-              <a:t>Авто-верстка</a:t>
-            </a:r>
-          </a:p>
-        </p:txBody>
-      </p:sp>
-      <p:sp>
-        <p:nvSpPr>
-          <p:cNvPr id="7" name="Chevron 6"/>
-          <p:cNvSpPr/>
-          <p:nvPr/>
-        </p:nvSpPr>
-        <p:spPr>
-          <a:xfrm>
-            <a:off x="677387" y="4776587"/>
-            <a:ext cx="10855878" cy="634621"/>
-          </a:xfrm>
-          <a:prstGeom prst="chevron">
-            <a:avLst/>
-          </a:prstGeom>
-          <a:solidFill>
-            <a:srgbClr val="0077FF"/>
-          </a:solidFill>
-          <a:ln>
-            <a:noFill/>
-          </a:ln>
-        </p:spPr>
-        <p:style>
-          <a:lnRef idx="1">
-            <a:schemeClr val="accent1"/>
-          </a:lnRef>
-          <a:fillRef idx="3">
-            <a:schemeClr val="accent1"/>
-          </a:fillRef>
-          <a:effectRef idx="2">
-            <a:schemeClr val="accent1"/>
-          </a:effectRef>
-          <a:fontRef idx="minor">
-            <a:schemeClr val="lt1"/>
-          </a:fontRef>
-        </p:style>
-        <p:txBody>
-          <a:bodyPr rtlCol="0" anchor="ctr" wrap="square" lIns="12700" rIns="12700" tIns="12700" bIns="12700"/>
-          <a:lstStyle/>
-          <a:p>
-            <a:pPr algn="ctr">
-              <a:defRPr sz="1400" b="0">
-                <a:solidFill>
-                  <a:srgbClr val="FFFFFF"/>
-                </a:solidFill>
-                <a:latin typeface="Play"/>
-                <a:ea typeface="Play"/>
-                <a:cs typeface="Play"/>
-              </a:defRPr>
-            </a:pPr>
-            <a:r>
-              <a:rPr sz="1400" b="0">
-                <a:solidFill>
-                  <a:srgbClr val="FFFFFF"/>
-                </a:solidFill>
-                <a:latin typeface="Play"/>
-                <a:ea typeface="Play"/>
-                <a:cs typeface="Play"/>
-              </a:rPr>
-              <a:t>Аудит качества</a:t>
-            </a:r>
-          </a:p>
-        </p:txBody>
-      </p:sp>
-      <p:sp>
-        <p:nvSpPr>
-          <p:cNvPr id="8" name="Chevron 7"/>
-          <p:cNvSpPr/>
-          <p:nvPr/>
-        </p:nvSpPr>
-        <p:spPr>
-          <a:xfrm>
-            <a:off x="677387" y="5514520"/>
-            <a:ext cx="10855878" cy="634621"/>
-          </a:xfrm>
-          <a:prstGeom prst="chevron">
-            <a:avLst/>
-          </a:prstGeom>
-          <a:solidFill>
-            <a:srgbClr val="0077FF"/>
-          </a:solidFill>
-          <a:ln>
-            <a:noFill/>
-          </a:ln>
-        </p:spPr>
-        <p:style>
-          <a:lnRef idx="1">
-            <a:schemeClr val="accent1"/>
-          </a:lnRef>
-          <a:fillRef idx="3">
-            <a:schemeClr val="accent1"/>
-          </a:fillRef>
-          <a:effectRef idx="2">
-            <a:schemeClr val="accent1"/>
-          </a:effectRef>
-          <a:fontRef idx="minor">
-            <a:schemeClr val="lt1"/>
-          </a:fontRef>
-        </p:style>
-        <p:txBody>
-          <a:bodyPr rtlCol="0" anchor="ctr" wrap="square" lIns="12700" rIns="12700" tIns="12700" bIns="12700"/>
-          <a:lstStyle/>
-          <a:p>
-            <a:pPr algn="ctr">
-              <a:defRPr sz="1400" b="0">
-                <a:solidFill>
-                  <a:srgbClr val="FFFFFF"/>
-                </a:solidFill>
-                <a:latin typeface="Play"/>
-                <a:ea typeface="Play"/>
-                <a:cs typeface="Play"/>
-              </a:defRPr>
-            </a:pPr>
-            <a:r>
-              <a:rPr sz="1400" b="0">
-                <a:solidFill>
-                  <a:srgbClr val="FFFFFF"/>
-                </a:solidFill>
-                <a:latin typeface="Play"/>
-                <a:ea typeface="Play"/>
-                <a:cs typeface="Play"/>
-              </a:rPr>
-              <a:t>Экспорт</a:t>
-            </a:r>
-          </a:p>
-        </p:txBody>
-      </p:sp>
-    </p:spTree>
-  </p:cSld>
-  <p:clrMapOvr>
-    <a:masterClrMapping/>
-  </p:clrMapOvr>
-</p:sld>
-</file>
-
-<file path=ppt/slides/slide59.xml><?xml version="1.0" encoding="utf-8"?>
-<p:sld xmlns:a="http://schemas.openxmlformats.org/drawingml/2006/main" xmlns:p="http://schemas.openxmlformats.org/presentationml/2006/main" xmlns:r="http://schemas.openxmlformats.org/officeDocument/2006/relationships">
-  <p:cSld>
-    <p:spTree>
-      <p:nvGrpSpPr>
-        <p:cNvPr id="1" name=""/>
-        <p:cNvGrpSpPr/>
-        <p:nvPr/>
-      </p:nvGrpSpPr>
-      <p:grpSpPr/>
-      <p:cxnSp>
-        <p:nvCxnSpPr>
-          <p:cNvPr id="918" name="Google Shape;918;p74"/>
-          <p:cNvCxnSpPr/>
-          <p:nvPr/>
-        </p:nvCxnSpPr>
-        <p:spPr>
-          <a:xfrm rot="10800000">
-            <a:off x="658813" y="2199500"/>
-            <a:ext cx="11533187" cy="0"/>
-          </a:xfrm>
-          <a:prstGeom prst="straightConnector1">
-            <a:avLst/>
-          </a:prstGeom>
-          <a:noFill/>
-          <a:ln cap="flat" cmpd="sng" w="19050">
-            <a:solidFill>
-              <a:schemeClr val="accent4"/>
-            </a:solidFill>
-            <a:prstDash val="solid"/>
-            <a:miter lim="8000"/>
-            <a:headEnd len="sm" w="sm" type="none"/>
-            <a:tailEnd len="sm" w="sm" type="none"/>
-          </a:ln>
-        </p:spPr>
-      </p:cxnSp>
-      <p:cxnSp>
-        <p:nvCxnSpPr>
-          <p:cNvPr id="919" name="Google Shape;919;p74"/>
-          <p:cNvCxnSpPr/>
-          <p:nvPr/>
-        </p:nvCxnSpPr>
-        <p:spPr>
-          <a:xfrm flipH="1">
-            <a:off x="1" y="4351265"/>
-            <a:ext cx="8112124" cy="42098"/>
-          </a:xfrm>
-          <a:prstGeom prst="straightConnector1">
-            <a:avLst/>
-          </a:prstGeom>
-          <a:noFill/>
-          <a:ln cap="flat" cmpd="sng" w="19050">
-            <a:solidFill>
-              <a:schemeClr val="accent4"/>
-            </a:solidFill>
-            <a:prstDash val="solid"/>
-            <a:miter lim="8000"/>
-            <a:headEnd len="lg" w="lg" type="stealth"/>
-            <a:tailEnd len="sm" w="sm" type="none"/>
-          </a:ln>
-        </p:spPr>
-      </p:cxnSp>
-      <p:sp>
-        <p:nvSpPr>
-          <p:cNvPr id="920" name="title"/>
+          <p:cNvPr id="4" name="body"/>
           <p:cNvSpPr txBox="1"/>
           <p:nvPr/>
         </p:nvSpPr>
         <p:spPr>
           <a:xfrm>
-            <a:off x="677387" y="692177"/>
-            <a:ext cx="10855878" cy="822960"/>
+            <a:off x="677387" y="4463437"/>
+            <a:ext cx="10855878" cy="1737360"/>
           </a:xfrm>
           <a:prstGeom prst="rect">
             <a:avLst/>
@@ -8406,104 +9273,6 @@
               <a:spcAft>
                 <a:spcPts val="300"/>
               </a:spcAft>
-              <a:defRPr sz="4000">
-                <a:solidFill>
-                  <a:srgbClr val="000000"/>
-                </a:solidFill>
-                <a:latin typeface="Arial"/>
-                <a:ea typeface="Arial"/>
-                <a:cs typeface="Arial"/>
-              </a:defRPr>
-            </a:pPr>
-            <a:r>
-              <a:rPr sz="4000">
-                <a:solidFill>
-                  <a:srgbClr val="000000"/>
-                </a:solidFill>
-                <a:latin typeface="Arial"/>
-                <a:ea typeface="Arial"/>
-                <a:cs typeface="Arial"/>
-              </a:rPr>
-              <a:t>Ожидаемый эффект</a:t>
-            </a:r>
-          </a:p>
-        </p:txBody>
-      </p:sp>
-      <p:sp>
-        <p:nvSpPr>
-          <p:cNvPr id="921" name="lead"/>
-          <p:cNvSpPr txBox="1"/>
-          <p:nvPr/>
-        </p:nvSpPr>
-        <p:spPr>
-          <a:xfrm>
-            <a:off x="677387" y="2200937"/>
-            <a:ext cx="10855878" cy="783458"/>
-          </a:xfrm>
-          <a:prstGeom prst="rect">
-            <a:avLst/>
-          </a:prstGeom>
-          <a:noFill/>
-        </p:spPr>
-        <p:txBody>
-          <a:bodyPr wrap="square" lIns="76200" rIns="76200" tIns="50800" bIns="50800">
-            <a:spAutoFit/>
-          </a:bodyPr>
-          <a:lstStyle/>
-          <a:p>
-            <a:pPr algn="l">
-              <a:spcAft>
-                <a:spcPts val="300"/>
-              </a:spcAft>
-              <a:defRPr sz="2800">
-                <a:solidFill>
-                  <a:srgbClr val="000000"/>
-                </a:solidFill>
-                <a:latin typeface="Play"/>
-                <a:ea typeface="Play"/>
-                <a:cs typeface="Play"/>
-              </a:defRPr>
-            </a:pPr>
-            <a:r>
-              <a:rPr sz="2800">
-                <a:solidFill>
-                  <a:srgbClr val="000000"/>
-                </a:solidFill>
-                <a:latin typeface="Play"/>
-                <a:ea typeface="Play"/>
-                <a:cs typeface="Play"/>
-              </a:rPr>
-              <a:t>Средняя сборка колоды 12 слайдов — 4 минуты вместо 186</a:t>
-            </a:r>
-          </a:p>
-        </p:txBody>
-      </p:sp>
-      <p:sp>
-        <p:nvSpPr>
-          <p:cNvPr id="922" name="body"/>
-          <p:cNvSpPr txBox="1"/>
-          <p:nvPr/>
-        </p:nvSpPr>
-        <p:spPr>
-          <a:xfrm>
-            <a:off x="677387" y="3113415"/>
-            <a:ext cx="10855878" cy="1237848"/>
-          </a:xfrm>
-          <a:prstGeom prst="rect">
-            <a:avLst/>
-          </a:prstGeom>
-          <a:noFill/>
-        </p:spPr>
-        <p:txBody>
-          <a:bodyPr wrap="square" lIns="76200" rIns="76200" tIns="50800" bIns="50800">
-            <a:spAutoFit/>
-          </a:bodyPr>
-          <a:lstStyle/>
-          <a:p>
-            <a:pPr algn="l">
-              <a:spcAft>
-                <a:spcPts val="300"/>
-              </a:spcAft>
               <a:defRPr sz="1800">
                 <a:solidFill>
                   <a:srgbClr val="000000"/>
@@ -8522,7 +9291,7 @@
                 <a:ea typeface="Play"/>
                 <a:cs typeface="Play"/>
               </a:rPr>
-              <a:t>• Время до первой версии сократилось с 6 рабочих дней до 1</a:t>
+              <a:t>• Сборка колоды 4 мин вместо 186</a:t>
             </a:r>
           </a:p>
           <a:p>
@@ -8548,7 +9317,7 @@
                 <a:ea typeface="Play"/>
                 <a:cs typeface="Play"/>
               </a:rPr>
-              <a:t>• Нарушений фирменного стиля в пилоте — 2 из 68 колод</a:t>
+              <a:t>• Время до первой версии сократилось с 6 дней до 1</a:t>
             </a:r>
           </a:p>
           <a:p>
@@ -8574,7 +9343,33 @@
                 <a:ea typeface="Play"/>
                 <a:cs typeface="Play"/>
               </a:rPr>
-              <a:t>• Дизайнеры закрыли 38 запросов за 6 недель вместо 11 в неделю</a:t>
+              <a:t>• Нарушений стиля 2 из 68 колод</a:t>
+            </a:r>
+          </a:p>
+          <a:p>
+            <a:pPr algn="l">
+              <a:spcAft>
+                <a:spcPts val="300"/>
+              </a:spcAft>
+              <a:defRPr sz="1800">
+                <a:solidFill>
+                  <a:srgbClr val="000000"/>
+                </a:solidFill>
+                <a:latin typeface="Play"/>
+                <a:ea typeface="Play"/>
+                <a:cs typeface="Play"/>
+              </a:defRPr>
+            </a:pPr>
+            <a:r>
+              <a:rPr sz="1800">
+                <a:solidFill>
+                  <a:srgbClr val="000000"/>
+                </a:solidFill>
+                <a:latin typeface="Play"/>
+                <a:ea typeface="Play"/>
+                <a:cs typeface="Play"/>
+              </a:rPr>
+              <a:t>• Дизайнеры закрыли 38 запросов вместо 11 в неделю</a:t>
             </a:r>
           </a:p>
         </p:txBody>
@@ -8655,14 +9450,14 @@
       </p:sp>
       <p:sp>
         <p:nvSpPr>
-          <p:cNvPr id="3" name="Rectangle 2"/>
+          <p:cNvPr id="3" name="stat_0:bar"/>
           <p:cNvSpPr/>
           <p:nvPr/>
         </p:nvSpPr>
         <p:spPr>
           <a:xfrm>
-            <a:off x="677387" y="2916352"/>
-            <a:ext cx="10855878" cy="74553"/>
+            <a:off x="677387" y="1892808"/>
+            <a:ext cx="50800" cy="1150112"/>
           </a:xfrm>
           <a:prstGeom prst="rect">
             <a:avLst/>
@@ -8673,6 +9468,7 @@
           <a:ln>
             <a:noFill/>
           </a:ln>
+          <a:effectLst/>
         </p:spPr>
         <p:style>
           <a:lnRef idx="1">
@@ -8698,57 +9494,14 @@
       </p:sp>
       <p:sp>
         <p:nvSpPr>
-          <p:cNvPr id="4" name="Oval 3"/>
-          <p:cNvSpPr/>
-          <p:nvPr/>
-        </p:nvSpPr>
-        <p:spPr>
-          <a:xfrm>
-            <a:off x="2213338" y="2680267"/>
-            <a:ext cx="546723" cy="546723"/>
-          </a:xfrm>
-          <a:prstGeom prst="ellipse">
-            <a:avLst/>
-          </a:prstGeom>
-          <a:solidFill>
-            <a:srgbClr val="0077FF"/>
-          </a:solidFill>
-          <a:ln>
-            <a:noFill/>
-          </a:ln>
-        </p:spPr>
-        <p:style>
-          <a:lnRef idx="1">
-            <a:schemeClr val="accent1"/>
-          </a:lnRef>
-          <a:fillRef idx="3">
-            <a:schemeClr val="accent1"/>
-          </a:fillRef>
-          <a:effectRef idx="2">
-            <a:schemeClr val="accent1"/>
-          </a:effectRef>
-          <a:fontRef idx="minor">
-            <a:schemeClr val="lt1"/>
-          </a:fontRef>
-        </p:style>
-        <p:txBody>
-          <a:bodyPr rtlCol="0" anchor="ctr"/>
-          <a:lstStyle/>
-          <a:p>
-            <a:pPr algn="ctr"/>
-          </a:p>
-        </p:txBody>
-      </p:sp>
-      <p:sp>
-        <p:nvSpPr>
-          <p:cNvPr id="5" name="TextBox 4"/>
+          <p:cNvPr id="4" name="stat_0"/>
           <p:cNvSpPr txBox="1"/>
           <p:nvPr/>
         </p:nvSpPr>
         <p:spPr>
           <a:xfrm>
-            <a:off x="677387" y="1773204"/>
-            <a:ext cx="5427939" cy="944340"/>
+            <a:off x="855187" y="1783080"/>
+            <a:ext cx="10678078" cy="1259840"/>
           </a:xfrm>
           <a:prstGeom prst="rect">
             <a:avLst/>
@@ -8756,15 +9509,21 @@
           <a:noFill/>
         </p:spPr>
         <p:txBody>
-          <a:bodyPr wrap="square" lIns="12700" rIns="12700" tIns="12700" bIns="12700">
+          <a:bodyPr wrap="square" lIns="76200" rIns="76200" tIns="0" bIns="0">
             <a:spAutoFit/>
           </a:bodyPr>
           <a:lstStyle/>
           <a:p>
-            <a:pPr algn="ctr">
-              <a:defRPr sz="1400" b="0">
-                <a:solidFill>
-                  <a:srgbClr val="000000"/>
+            <a:pPr>
+              <a:lnSpc>
+                <a:spcPct val="100000"/>
+              </a:lnSpc>
+              <a:spcAft>
+                <a:spcPts val="200"/>
+              </a:spcAft>
+              <a:defRPr sz="4800" b="1">
+                <a:solidFill>
+                  <a:srgbClr val="0077FF"/>
                 </a:solidFill>
                 <a:latin typeface="Play"/>
                 <a:ea typeface="Play"/>
@@ -8772,207 +9531,55 @@
               </a:defRPr>
             </a:pPr>
             <a:r>
-              <a:rPr sz="1400" b="0">
-                <a:solidFill>
-                  <a:srgbClr val="000000"/>
+              <a:rPr sz="4800" b="1">
+                <a:solidFill>
+                  <a:srgbClr val="0077FF"/>
                 </a:solidFill>
                 <a:latin typeface="Play"/>
                 <a:ea typeface="Play"/>
                 <a:cs typeface="Play"/>
               </a:rPr>
-              <a:t>Третий квартал 2026: подключение 4 команд</a:t>
+              <a:t>2 vCPU</a:t>
+            </a:r>
+          </a:p>
+          <a:p>
+            <a:pPr>
+              <a:spcAft>
+                <a:spcPts val="300"/>
+              </a:spcAft>
+              <a:defRPr sz="2400" b="0">
+                <a:solidFill>
+                  <a:srgbClr val="000000"/>
+                </a:solidFill>
+                <a:latin typeface="Play"/>
+                <a:ea typeface="Play"/>
+                <a:cs typeface="Play"/>
+              </a:defRPr>
+            </a:pPr>
+            <a:r>
+              <a:rPr sz="2400" b="0">
+                <a:solidFill>
+                  <a:srgbClr val="000000"/>
+                </a:solidFill>
+                <a:latin typeface="Play"/>
+                <a:ea typeface="Play"/>
+                <a:cs typeface="Play"/>
+              </a:rPr>
+              <a:t>Сервис работает на 2 vCPU / 2 GB RAM</a:t>
             </a:r>
           </a:p>
         </p:txBody>
       </p:sp>
       <p:sp>
         <p:nvSpPr>
-          <p:cNvPr id="6" name="Oval 5"/>
-          <p:cNvSpPr/>
-          <p:nvPr/>
-        </p:nvSpPr>
-        <p:spPr>
-          <a:xfrm>
-            <a:off x="5831964" y="2680267"/>
-            <a:ext cx="546723" cy="546723"/>
-          </a:xfrm>
-          <a:prstGeom prst="ellipse">
-            <a:avLst/>
-          </a:prstGeom>
-          <a:solidFill>
-            <a:srgbClr val="0077FF"/>
-          </a:solidFill>
-          <a:ln>
-            <a:noFill/>
-          </a:ln>
-        </p:spPr>
-        <p:style>
-          <a:lnRef idx="1">
-            <a:schemeClr val="accent1"/>
-          </a:lnRef>
-          <a:fillRef idx="3">
-            <a:schemeClr val="accent1"/>
-          </a:fillRef>
-          <a:effectRef idx="2">
-            <a:schemeClr val="accent1"/>
-          </a:effectRef>
-          <a:fontRef idx="minor">
-            <a:schemeClr val="lt1"/>
-          </a:fontRef>
-        </p:style>
-        <p:txBody>
-          <a:bodyPr rtlCol="0" anchor="ctr"/>
-          <a:lstStyle/>
-          <a:p>
-            <a:pPr algn="ctr"/>
-          </a:p>
-        </p:txBody>
-      </p:sp>
-      <p:sp>
-        <p:nvSpPr>
-          <p:cNvPr id="7" name="TextBox 6"/>
+          <p:cNvPr id="5" name="body"/>
           <p:cNvSpPr txBox="1"/>
           <p:nvPr/>
         </p:nvSpPr>
         <p:spPr>
           <a:xfrm>
-            <a:off x="3391356" y="3463076"/>
-            <a:ext cx="5427939" cy="944340"/>
-          </a:xfrm>
-          <a:prstGeom prst="rect">
-            <a:avLst/>
-          </a:prstGeom>
-          <a:noFill/>
-        </p:spPr>
-        <p:txBody>
-          <a:bodyPr wrap="square" lIns="12700" rIns="12700" tIns="12700" bIns="12700">
-            <a:spAutoFit/>
-          </a:bodyPr>
-          <a:lstStyle/>
-          <a:p>
-            <a:pPr algn="ctr">
-              <a:defRPr sz="1400" b="0">
-                <a:solidFill>
-                  <a:srgbClr val="000000"/>
-                </a:solidFill>
-                <a:latin typeface="Play"/>
-                <a:ea typeface="Play"/>
-                <a:cs typeface="Play"/>
-              </a:defRPr>
-            </a:pPr>
-            <a:r>
-              <a:rPr sz="1400" b="0">
-                <a:solidFill>
-                  <a:srgbClr val="000000"/>
-                </a:solidFill>
-                <a:latin typeface="Play"/>
-                <a:ea typeface="Play"/>
-                <a:cs typeface="Play"/>
-              </a:rPr>
-              <a:t>Четвёртый квартал 2026: доступ для всей компании</a:t>
-            </a:r>
-          </a:p>
-        </p:txBody>
-      </p:sp>
-      <p:sp>
-        <p:nvSpPr>
-          <p:cNvPr id="8" name="Oval 7"/>
-          <p:cNvSpPr/>
-          <p:nvPr/>
-        </p:nvSpPr>
-        <p:spPr>
-          <a:xfrm>
-            <a:off x="9450590" y="2680267"/>
-            <a:ext cx="546723" cy="546723"/>
-          </a:xfrm>
-          <a:prstGeom prst="ellipse">
-            <a:avLst/>
-          </a:prstGeom>
-          <a:solidFill>
-            <a:srgbClr val="0077FF"/>
-          </a:solidFill>
-          <a:ln>
-            <a:noFill/>
-          </a:ln>
-        </p:spPr>
-        <p:style>
-          <a:lnRef idx="1">
-            <a:schemeClr val="accent1"/>
-          </a:lnRef>
-          <a:fillRef idx="3">
-            <a:schemeClr val="accent1"/>
-          </a:fillRef>
-          <a:effectRef idx="2">
-            <a:schemeClr val="accent1"/>
-          </a:effectRef>
-          <a:fontRef idx="minor">
-            <a:schemeClr val="lt1"/>
-          </a:fontRef>
-        </p:style>
-        <p:txBody>
-          <a:bodyPr rtlCol="0" anchor="ctr"/>
-          <a:lstStyle/>
-          <a:p>
-            <a:pPr algn="ctr"/>
-          </a:p>
-        </p:txBody>
-      </p:sp>
-      <p:sp>
-        <p:nvSpPr>
-          <p:cNvPr id="9" name="TextBox 8"/>
-          <p:cNvSpPr txBox="1"/>
-          <p:nvPr/>
-        </p:nvSpPr>
-        <p:spPr>
-          <a:xfrm>
-            <a:off x="6105326" y="1773204"/>
-            <a:ext cx="5427939" cy="944340"/>
-          </a:xfrm>
-          <a:prstGeom prst="rect">
-            <a:avLst/>
-          </a:prstGeom>
-          <a:noFill/>
-        </p:spPr>
-        <p:txBody>
-          <a:bodyPr wrap="square" lIns="12700" rIns="12700" tIns="12700" bIns="12700">
-            <a:spAutoFit/>
-          </a:bodyPr>
-          <a:lstStyle/>
-          <a:p>
-            <a:pPr algn="ctr">
-              <a:defRPr sz="1400" b="0">
-                <a:solidFill>
-                  <a:srgbClr val="000000"/>
-                </a:solidFill>
-                <a:latin typeface="Play"/>
-                <a:ea typeface="Play"/>
-                <a:cs typeface="Play"/>
-              </a:defRPr>
-            </a:pPr>
-            <a:r>
-              <a:rPr sz="1400" b="0">
-                <a:solidFill>
-                  <a:srgbClr val="000000"/>
-                </a:solidFill>
-                <a:latin typeface="Play"/>
-                <a:ea typeface="Play"/>
-                <a:cs typeface="Play"/>
-              </a:rPr>
-              <a:t>Первый квартал 2027: генерация иллюстраций</a:t>
-            </a:r>
-          </a:p>
-        </p:txBody>
-      </p:sp>
-      <p:sp>
-        <p:nvSpPr>
-          <p:cNvPr id="10" name="body"/>
-          <p:cNvSpPr txBox="1"/>
-          <p:nvPr/>
-        </p:nvSpPr>
-        <p:spPr>
-          <a:xfrm>
-            <a:off x="677387" y="4429760"/>
-            <a:ext cx="10855878" cy="1771037"/>
+            <a:off x="677387" y="4345356"/>
+            <a:ext cx="10855878" cy="1855441"/>
           </a:xfrm>
           <a:prstGeom prst="rect">
             <a:avLst/>
@@ -8989,7 +9596,7 @@
               <a:spcAft>
                 <a:spcPts val="300"/>
               </a:spcAft>
-              <a:defRPr sz="1600">
+              <a:defRPr sz="3200">
                 <a:solidFill>
                   <a:srgbClr val="000000"/>
                 </a:solidFill>
@@ -8999,7 +9606,7 @@
               </a:defRPr>
             </a:pPr>
             <a:r>
-              <a:rPr sz="1600">
+              <a:rPr sz="3200">
                 <a:solidFill>
                   <a:srgbClr val="000000"/>
                 </a:solidFill>
@@ -9007,7 +9614,7 @@
                 <a:ea typeface="Play"/>
                 <a:cs typeface="Play"/>
               </a:rPr>
-              <a:t>• Сервис на 1 машине: 2 vCPU / 2 ГБ RAM</a:t>
+              <a:t>• Инференс за 6 недель пилота стоит 1 400 руб</a:t>
             </a:r>
           </a:p>
           <a:p>
@@ -9015,7 +9622,7 @@
               <a:spcAft>
                 <a:spcPts val="300"/>
               </a:spcAft>
-              <a:defRPr sz="1600">
+              <a:defRPr sz="3200">
                 <a:solidFill>
                   <a:srgbClr val="000000"/>
                 </a:solidFill>
@@ -9025,7 +9632,7 @@
               </a:defRPr>
             </a:pPr>
             <a:r>
-              <a:rPr sz="1600">
+              <a:rPr sz="3200">
                 <a:solidFill>
                   <a:srgbClr val="000000"/>
                 </a:solidFill>
@@ -9033,85 +9640,7 @@
                 <a:ea typeface="Play"/>
                 <a:cs typeface="Play"/>
               </a:rPr>
-              <a:t>• Инференс 6 недель: 1 400 руб.</a:t>
-            </a:r>
-          </a:p>
-          <a:p>
-            <a:pPr algn="l">
-              <a:spcAft>
-                <a:spcPts val="300"/>
-              </a:spcAft>
-              <a:defRPr sz="1600">
-                <a:solidFill>
-                  <a:srgbClr val="000000"/>
-                </a:solidFill>
-                <a:latin typeface="Play"/>
-                <a:ea typeface="Play"/>
-                <a:cs typeface="Play"/>
-              </a:defRPr>
-            </a:pPr>
-            <a:r>
-              <a:rPr sz="1600">
-                <a:solidFill>
-                  <a:srgbClr val="000000"/>
-                </a:solidFill>
-                <a:latin typeface="Play"/>
-                <a:ea typeface="Play"/>
-                <a:cs typeface="Play"/>
-              </a:rPr>
-              <a:t>• Подключение 4 команд: 3й квартал 2026</a:t>
-            </a:r>
-          </a:p>
-          <a:p>
-            <a:pPr algn="l">
-              <a:spcAft>
-                <a:spcPts val="300"/>
-              </a:spcAft>
-              <a:defRPr sz="1600">
-                <a:solidFill>
-                  <a:srgbClr val="000000"/>
-                </a:solidFill>
-                <a:latin typeface="Play"/>
-                <a:ea typeface="Play"/>
-                <a:cs typeface="Play"/>
-              </a:defRPr>
-            </a:pPr>
-            <a:r>
-              <a:rPr sz="1600">
-                <a:solidFill>
-                  <a:srgbClr val="000000"/>
-                </a:solidFill>
-                <a:latin typeface="Play"/>
-                <a:ea typeface="Play"/>
-                <a:cs typeface="Play"/>
-              </a:rPr>
-              <a:t>• Доступ всей компании: 4й квартал 2026</a:t>
-            </a:r>
-          </a:p>
-          <a:p>
-            <a:pPr algn="l">
-              <a:spcAft>
-                <a:spcPts val="300"/>
-              </a:spcAft>
-              <a:defRPr sz="1600">
-                <a:solidFill>
-                  <a:srgbClr val="000000"/>
-                </a:solidFill>
-                <a:latin typeface="Play"/>
-                <a:ea typeface="Play"/>
-                <a:cs typeface="Play"/>
-              </a:defRPr>
-            </a:pPr>
-            <a:r>
-              <a:rPr sz="1600">
-                <a:solidFill>
-                  <a:srgbClr val="000000"/>
-                </a:solidFill>
-                <a:latin typeface="Play"/>
-                <a:ea typeface="Play"/>
-                <a:cs typeface="Play"/>
-              </a:rPr>
-              <a:t>• Иллюстрации в стиле шаблона: 1й квартал 2027</a:t>
+              <a:t>• Нагрузка выше 20 задач требует внешней очереди</a:t>
             </a:r>
           </a:p>
         </p:txBody>
@@ -9127,13 +9656,6 @@
 <file path=ppt/slides/slide61.xml><?xml version="1.0" encoding="utf-8"?>
 <p:sld xmlns:a="http://schemas.openxmlformats.org/drawingml/2006/main" xmlns:p="http://schemas.openxmlformats.org/presentationml/2006/main" xmlns:r="http://schemas.openxmlformats.org/officeDocument/2006/relationships">
   <p:cSld>
-    <p:bg>
-      <p:bgPr>
-        <a:solidFill>
-          <a:schemeClr val="lt2"/>
-        </a:solidFill>
-      </p:bgPr>
-    </p:bg>
     <p:spTree>
       <p:nvGrpSpPr>
         <p:cNvPr id="1" name=""/>
@@ -9143,64 +9665,7 @@
       <p:grpSpPr/>
       <p:sp>
         <p:nvSpPr>
-          <p:cNvPr id="795" name="Google Shape;795;p60"/>
-          <p:cNvSpPr txBox="1"/>
-          <p:nvPr/>
-        </p:nvSpPr>
-        <p:spPr>
-          <a:xfrm>
-            <a:off x="18692059" y="4674436"/>
-            <a:ext cx="4304330" cy="678198"/>
-          </a:xfrm>
-          <a:prstGeom prst="rect">
-            <a:avLst/>
-          </a:prstGeom>
-          <a:noFill/>
-          <a:ln>
-            <a:noFill/>
-          </a:ln>
-        </p:spPr>
-        <p:txBody>
-          <a:bodyPr anchorCtr="0" anchor="t" bIns="45700" lIns="91425" spcFirstLastPara="1" rIns="91425" wrap="square" tIns="45700">
-            <a:noAutofit/>
-          </a:bodyPr>
-          <a:lstStyle/>
-          <a:p>
-            <a:pPr indent="0" lvl="0" marL="0" marR="0" rtl="0" algn="l">
-              <a:lnSpc>
-                <a:spcPct val="110000"/>
-              </a:lnSpc>
-              <a:spcBef>
-                <a:spcPts val="0"/>
-              </a:spcBef>
-              <a:spcAft>
-                <a:spcPts val="0"/>
-              </a:spcAft>
-              <a:buClr>
-                <a:schemeClr val="dk1"/>
-              </a:buClr>
-              <a:buSzPts val="1600"/>
-              <a:buFont typeface="Arial"/>
-              <a:buNone/>
-            </a:pPr>
-            <a:r>
-              <a:t/>
-            </a:r>
-            <a:endParaRPr sz="1600">
-              <a:solidFill>
-                <a:schemeClr val="dk1"/>
-              </a:solidFill>
-              <a:latin typeface="Arial"/>
-              <a:ea typeface="Arial"/>
-              <a:cs typeface="Arial"/>
-              <a:sym typeface="Arial"/>
-            </a:endParaRPr>
-          </a:p>
-        </p:txBody>
-      </p:sp>
-      <p:sp>
-        <p:nvSpPr>
-          <p:cNvPr id="796" name="title"/>
+          <p:cNvPr id="2" name="title"/>
           <p:cNvSpPr txBox="1"/>
           <p:nvPr/>
         </p:nvSpPr>
@@ -9249,15 +9714,15 @@
       </p:sp>
       <p:graphicFrame>
         <p:nvGraphicFramePr>
-          <p:cNvPr id="797" name="Table 796"/>
+          <p:cNvPr id="3" name="Table 2"/>
           <p:cNvGraphicFramePr>
             <a:graphicFrameLocks noGrp="1"/>
           </p:cNvGraphicFramePr>
           <p:nvPr/>
         </p:nvGraphicFramePr>
         <p:xfrm>
-          <a:off x="677387" y="2200937"/>
-          <a:ext cx="10855878" cy="4127761"/>
+          <a:off x="677387" y="1783080"/>
+          <a:ext cx="10855878" cy="3301387"/>
         </p:xfrm>
         <a:graphic>
           <a:graphicData uri="http://schemas.openxmlformats.org/drawingml/2006/table">
@@ -9270,7 +9735,7 @@
                 <a:gridCol w="3618626"/>
                 <a:gridCol w="3618626"/>
               </a:tblGrid>
-              <a:tr h="825552">
+              <a:tr h="660277">
                 <a:tc>
                   <a:txBody>
                     <a:bodyPr/>
@@ -9313,7 +9778,7 @@
                         </a:defRPr>
                       </a:pPr>
                       <a:r>
-                        <a:t>До</a:t>
+                        <a:t>Текущий процесс</a:t>
                       </a:r>
                     </a:p>
                   </a:txBody>
@@ -9339,7 +9804,7 @@
                         </a:defRPr>
                       </a:pPr>
                       <a:r>
-                        <a:t>После</a:t>
+                        <a:t>Пилот</a:t>
                       </a:r>
                     </a:p>
                   </a:txBody>
@@ -9350,7 +9815,7 @@
                   </a:tcPr>
                 </a:tc>
               </a:tr>
-              <a:tr h="825552">
+              <a:tr h="660277">
                 <a:tc>
                   <a:txBody>
                     <a:bodyPr/>
@@ -9430,7 +9895,7 @@
                   </a:tcPr>
                 </a:tc>
               </a:tr>
-              <a:tr h="825552">
+              <a:tr h="660277">
                 <a:tc>
                   <a:txBody>
                     <a:bodyPr/>
@@ -9447,7 +9912,7 @@
                         </a:defRPr>
                       </a:pPr>
                       <a:r>
-                        <a:t>Время первой версии (дней)</a:t>
+                        <a:t>Время до первой версии (дней)</a:t>
                       </a:r>
                     </a:p>
                   </a:txBody>
@@ -9510,7 +9975,7 @@
                   </a:tcPr>
                 </a:tc>
               </a:tr>
-              <a:tr h="825552">
+              <a:tr h="660277">
                 <a:tc>
                   <a:txBody>
                     <a:bodyPr/>
@@ -9553,7 +10018,7 @@
                         </a:defRPr>
                       </a:pPr>
                       <a:r>
-                        <a:t>19</a:t>
+                        <a:t>19/42</a:t>
                       </a:r>
                     </a:p>
                   </a:txBody>
@@ -9579,7 +10044,7 @@
                         </a:defRPr>
                       </a:pPr>
                       <a:r>
-                        <a:t>2</a:t>
+                        <a:t>2/68</a:t>
                       </a:r>
                     </a:p>
                   </a:txBody>
@@ -9590,7 +10055,7 @@
                   </a:tcPr>
                 </a:tc>
               </a:tr>
-              <a:tr h="825553">
+              <a:tr h="660279">
                 <a:tc>
                   <a:txBody>
                     <a:bodyPr/>
@@ -9607,7 +10072,7 @@
                         </a:defRPr>
                       </a:pPr>
                       <a:r>
-                        <a:t>Запросы закрыты в неделю</a:t>
+                        <a:t>Запросы закрыты</a:t>
                       </a:r>
                     </a:p>
                   </a:txBody>
@@ -9633,7 +10098,7 @@
                         </a:defRPr>
                       </a:pPr>
                       <a:r>
-                        <a:t>11</a:t>
+                        <a:t>11/нед</a:t>
                       </a:r>
                     </a:p>
                   </a:txBody>
@@ -9659,7 +10124,7 @@
                         </a:defRPr>
                       </a:pPr>
                       <a:r>
-                        <a:t>38</a:t>
+                        <a:t>38/нед</a:t>
                       </a:r>
                     </a:p>
                   </a:txBody>
@@ -9674,6 +10139,81 @@
           </a:graphicData>
         </a:graphic>
       </p:graphicFrame>
+      <p:sp>
+        <p:nvSpPr>
+          <p:cNvPr id="4" name="body"/>
+          <p:cNvSpPr txBox="1"/>
+          <p:nvPr/>
+        </p:nvSpPr>
+        <p:spPr>
+          <a:xfrm>
+            <a:off x="677387" y="5255917"/>
+            <a:ext cx="10855878" cy="944880"/>
+          </a:xfrm>
+          <a:prstGeom prst="rect">
+            <a:avLst/>
+          </a:prstGeom>
+          <a:noFill/>
+        </p:spPr>
+        <p:txBody>
+          <a:bodyPr wrap="square" lIns="76200" rIns="76200" tIns="50800" bIns="50800">
+            <a:spAutoFit/>
+          </a:bodyPr>
+          <a:lstStyle/>
+          <a:p>
+            <a:pPr algn="l">
+              <a:spcAft>
+                <a:spcPts val="300"/>
+              </a:spcAft>
+              <a:defRPr sz="2400">
+                <a:solidFill>
+                  <a:srgbClr val="000000"/>
+                </a:solidFill>
+                <a:latin typeface="Play"/>
+                <a:ea typeface="Play"/>
+                <a:cs typeface="Play"/>
+              </a:defRPr>
+            </a:pPr>
+            <a:r>
+              <a:rPr sz="2400">
+                <a:solidFill>
+                  <a:srgbClr val="000000"/>
+                </a:solidFill>
+                <a:latin typeface="Play"/>
+                <a:ea typeface="Play"/>
+                <a:cs typeface="Play"/>
+              </a:rPr>
+              <a:t>• Пилот 6 недель на двух командах, 68 презентаций</a:t>
+            </a:r>
+          </a:p>
+          <a:p>
+            <a:pPr algn="l">
+              <a:spcAft>
+                <a:spcPts val="300"/>
+              </a:spcAft>
+              <a:defRPr sz="2400">
+                <a:solidFill>
+                  <a:srgbClr val="000000"/>
+                </a:solidFill>
+                <a:latin typeface="Play"/>
+                <a:ea typeface="Play"/>
+                <a:cs typeface="Play"/>
+              </a:defRPr>
+            </a:pPr>
+            <a:r>
+              <a:rPr sz="2400">
+                <a:solidFill>
+                  <a:srgbClr val="000000"/>
+                </a:solidFill>
+                <a:latin typeface="Play"/>
+                <a:ea typeface="Play"/>
+                <a:cs typeface="Play"/>
+              </a:rPr>
+              <a:t>• Сборка 4 мин, 1 день до первой версии, 2 нарушения стиля</a:t>
+            </a:r>
+          </a:p>
+        </p:txBody>
+      </p:sp>
     </p:spTree>
   </p:cSld>
   <p:clrMapOvr>
@@ -9800,7 +10340,7 @@
                 <a:ea typeface="Arial"/>
                 <a:cs typeface="Arial"/>
               </a:rPr>
-              <a:t>Что мы просим решить</a:t>
+              <a:t>Риски</a:t>
             </a:r>
           </a:p>
         </p:txBody>
@@ -9814,7 +10354,7 @@
         <p:spPr>
           <a:xfrm>
             <a:off x="677387" y="2200937"/>
-            <a:ext cx="10855878" cy="1940047"/>
+            <a:ext cx="10855878" cy="2009833"/>
           </a:xfrm>
           <a:prstGeom prst="rect">
             <a:avLst/>
@@ -9849,7 +10389,7 @@
                 <a:ea typeface="Play"/>
                 <a:cs typeface="Play"/>
               </a:rPr>
-              <a:t>Запуск сервиса на всю компанию в четвертом квартале 2026</a:t>
+              <a:t>Слабая модель может выдумать неподтверждённые цифры</a:t>
             </a:r>
           </a:p>
         </p:txBody>
@@ -9862,8 +10402,8 @@
         </p:nvSpPr>
         <p:spPr>
           <a:xfrm>
-            <a:off x="677387" y="4388651"/>
-            <a:ext cx="10855878" cy="1940047"/>
+            <a:off x="677387" y="4458437"/>
+            <a:ext cx="10855878" cy="1870262"/>
           </a:xfrm>
           <a:prstGeom prst="rect">
             <a:avLst/>
@@ -9880,7 +10420,7 @@
               <a:spcAft>
                 <a:spcPts val="300"/>
               </a:spcAft>
-              <a:defRPr sz="2800">
+              <a:defRPr sz="3200">
                 <a:solidFill>
                   <a:srgbClr val="000000"/>
                 </a:solidFill>
@@ -9890,7 +10430,7 @@
               </a:defRPr>
             </a:pPr>
             <a:r>
-              <a:rPr sz="2800">
+              <a:rPr sz="3200">
                 <a:solidFill>
                   <a:srgbClr val="000000"/>
                 </a:solidFill>
@@ -9898,7 +10438,7 @@
                 <a:ea typeface="Play"/>
                 <a:cs typeface="Play"/>
               </a:rPr>
-              <a:t>• Интеграция с хранилищем документов в четвертом квартале 2026</a:t>
+              <a:t>• Некачественный шаблон приводит к ошибкам стиля</a:t>
             </a:r>
           </a:p>
           <a:p>
@@ -9906,7 +10446,7 @@
               <a:spcAft>
                 <a:spcPts val="300"/>
               </a:spcAft>
-              <a:defRPr sz="2800">
+              <a:defRPr sz="3200">
                 <a:solidFill>
                   <a:srgbClr val="000000"/>
                 </a:solidFill>
@@ -9916,7 +10456,7 @@
               </a:defRPr>
             </a:pPr>
             <a:r>
-              <a:rPr sz="2800">
+              <a:rPr sz="3200">
                 <a:solidFill>
                   <a:srgbClr val="000000"/>
                 </a:solidFill>
@@ -9924,7 +10464,7 @@
                 <a:ea typeface="Play"/>
                 <a:cs typeface="Play"/>
               </a:rPr>
-              <a:t>• Подключение 4 команд в третьем квартале 2026</a:t>
+              <a:t>• Нагрузка &gt;20 задач требует внешней очереди</a:t>
             </a:r>
           </a:p>
         </p:txBody>
@@ -9938,6 +10478,885 @@
 </file>
 
 <file path=ppt/slides/slide63.xml><?xml version="1.0" encoding="utf-8"?>
+<p:sld xmlns:a="http://schemas.openxmlformats.org/drawingml/2006/main" xmlns:p="http://schemas.openxmlformats.org/presentationml/2006/main" xmlns:r="http://schemas.openxmlformats.org/officeDocument/2006/relationships">
+  <p:cSld>
+    <p:bg>
+      <p:bgPr>
+        <a:solidFill>
+          <a:schemeClr val="lt2"/>
+        </a:solidFill>
+      </p:bgPr>
+    </p:bg>
+    <p:spTree>
+      <p:nvGrpSpPr>
+        <p:cNvPr id="1" name=""/>
+        <p:cNvGrpSpPr/>
+        <p:nvPr/>
+      </p:nvGrpSpPr>
+      <p:grpSpPr/>
+      <p:sp>
+        <p:nvSpPr>
+          <p:cNvPr id="2" name="title"/>
+          <p:cNvSpPr txBox="1"/>
+          <p:nvPr/>
+        </p:nvSpPr>
+        <p:spPr>
+          <a:xfrm>
+            <a:off x="677387" y="692177"/>
+            <a:ext cx="10855878" cy="822960"/>
+          </a:xfrm>
+          <a:prstGeom prst="rect">
+            <a:avLst/>
+          </a:prstGeom>
+          <a:noFill/>
+        </p:spPr>
+        <p:txBody>
+          <a:bodyPr wrap="square" lIns="76200" rIns="76200" tIns="50800" bIns="50800">
+            <a:spAutoFit/>
+          </a:bodyPr>
+          <a:lstStyle/>
+          <a:p>
+            <a:pPr algn="l">
+              <a:spcAft>
+                <a:spcPts val="300"/>
+              </a:spcAft>
+              <a:defRPr sz="4000">
+                <a:solidFill>
+                  <a:srgbClr val="000000"/>
+                </a:solidFill>
+                <a:latin typeface="Arial"/>
+                <a:ea typeface="Arial"/>
+                <a:cs typeface="Arial"/>
+              </a:defRPr>
+            </a:pPr>
+            <a:r>
+              <a:rPr sz="4000">
+                <a:solidFill>
+                  <a:srgbClr val="000000"/>
+                </a:solidFill>
+                <a:latin typeface="Arial"/>
+                <a:ea typeface="Arial"/>
+                <a:cs typeface="Arial"/>
+              </a:rPr>
+              <a:t>Стоимость и ресурсы</a:t>
+            </a:r>
+          </a:p>
+        </p:txBody>
+      </p:sp>
+      <p:sp>
+        <p:nvSpPr>
+          <p:cNvPr id="3" name="stat_0:bar"/>
+          <p:cNvSpPr/>
+          <p:nvPr/>
+        </p:nvSpPr>
+        <p:spPr>
+          <a:xfrm>
+            <a:off x="677387" y="1892808"/>
+            <a:ext cx="50800" cy="1150112"/>
+          </a:xfrm>
+          <a:prstGeom prst="rect">
+            <a:avLst/>
+          </a:prstGeom>
+          <a:solidFill>
+            <a:srgbClr val="0077FF"/>
+          </a:solidFill>
+          <a:ln>
+            <a:noFill/>
+          </a:ln>
+          <a:effectLst/>
+        </p:spPr>
+        <p:style>
+          <a:lnRef idx="1">
+            <a:schemeClr val="accent1"/>
+          </a:lnRef>
+          <a:fillRef idx="3">
+            <a:schemeClr val="accent1"/>
+          </a:fillRef>
+          <a:effectRef idx="2">
+            <a:schemeClr val="accent1"/>
+          </a:effectRef>
+          <a:fontRef idx="minor">
+            <a:schemeClr val="lt1"/>
+          </a:fontRef>
+        </p:style>
+        <p:txBody>
+          <a:bodyPr rtlCol="0" anchor="ctr"/>
+          <a:lstStyle/>
+          <a:p>
+            <a:pPr algn="ctr"/>
+          </a:p>
+        </p:txBody>
+      </p:sp>
+      <p:sp>
+        <p:nvSpPr>
+          <p:cNvPr id="4" name="stat_0"/>
+          <p:cNvSpPr txBox="1"/>
+          <p:nvPr/>
+        </p:nvSpPr>
+        <p:spPr>
+          <a:xfrm>
+            <a:off x="855187" y="1783080"/>
+            <a:ext cx="10678078" cy="1259840"/>
+          </a:xfrm>
+          <a:prstGeom prst="rect">
+            <a:avLst/>
+          </a:prstGeom>
+          <a:noFill/>
+        </p:spPr>
+        <p:txBody>
+          <a:bodyPr wrap="square" lIns="76200" rIns="76200" tIns="0" bIns="0">
+            <a:spAutoFit/>
+          </a:bodyPr>
+          <a:lstStyle/>
+          <a:p>
+            <a:pPr>
+              <a:lnSpc>
+                <a:spcPct val="100000"/>
+              </a:lnSpc>
+              <a:spcAft>
+                <a:spcPts val="200"/>
+              </a:spcAft>
+              <a:defRPr sz="4800" b="1">
+                <a:solidFill>
+                  <a:srgbClr val="0077FF"/>
+                </a:solidFill>
+                <a:latin typeface="Play"/>
+                <a:ea typeface="Play"/>
+                <a:cs typeface="Play"/>
+              </a:defRPr>
+            </a:pPr>
+            <a:r>
+              <a:rPr sz="4800" b="1">
+                <a:solidFill>
+                  <a:srgbClr val="0077FF"/>
+                </a:solidFill>
+                <a:latin typeface="Play"/>
+                <a:ea typeface="Play"/>
+                <a:cs typeface="Play"/>
+              </a:rPr>
+              <a:t>2 vCPU</a:t>
+            </a:r>
+          </a:p>
+          <a:p>
+            <a:pPr>
+              <a:spcAft>
+                <a:spcPts val="300"/>
+              </a:spcAft>
+              <a:defRPr sz="2400" b="0">
+                <a:solidFill>
+                  <a:srgbClr val="000000"/>
+                </a:solidFill>
+                <a:latin typeface="Play"/>
+                <a:ea typeface="Play"/>
+                <a:cs typeface="Play"/>
+              </a:defRPr>
+            </a:pPr>
+            <a:r>
+              <a:rPr sz="2400" b="0">
+                <a:solidFill>
+                  <a:srgbClr val="000000"/>
+                </a:solidFill>
+                <a:latin typeface="Play"/>
+                <a:ea typeface="Play"/>
+                <a:cs typeface="Play"/>
+              </a:rPr>
+              <a:t>Сервис использует 2 vCPU / 2 GB RAM</a:t>
+            </a:r>
+          </a:p>
+        </p:txBody>
+      </p:sp>
+      <p:sp>
+        <p:nvSpPr>
+          <p:cNvPr id="5" name="body"/>
+          <p:cNvSpPr txBox="1"/>
+          <p:nvPr/>
+        </p:nvSpPr>
+        <p:spPr>
+          <a:xfrm>
+            <a:off x="677387" y="4345356"/>
+            <a:ext cx="10855878" cy="1855441"/>
+          </a:xfrm>
+          <a:prstGeom prst="rect">
+            <a:avLst/>
+          </a:prstGeom>
+          <a:noFill/>
+        </p:spPr>
+        <p:txBody>
+          <a:bodyPr wrap="square" lIns="76200" rIns="76200" tIns="50800" bIns="50800">
+            <a:spAutoFit/>
+          </a:bodyPr>
+          <a:lstStyle/>
+          <a:p>
+            <a:pPr algn="l">
+              <a:spcAft>
+                <a:spcPts val="300"/>
+              </a:spcAft>
+              <a:defRPr sz="2400">
+                <a:solidFill>
+                  <a:srgbClr val="000000"/>
+                </a:solidFill>
+                <a:latin typeface="Play"/>
+                <a:ea typeface="Play"/>
+                <a:cs typeface="Play"/>
+              </a:defRPr>
+            </a:pPr>
+            <a:r>
+              <a:rPr sz="2400">
+                <a:solidFill>
+                  <a:srgbClr val="000000"/>
+                </a:solidFill>
+                <a:latin typeface="Play"/>
+                <a:ea typeface="Play"/>
+                <a:cs typeface="Play"/>
+              </a:rPr>
+              <a:t>• Инференс за 6 недель пилота 1 400 руб</a:t>
+            </a:r>
+          </a:p>
+          <a:p>
+            <a:pPr algn="l">
+              <a:spcAft>
+                <a:spcPts val="300"/>
+              </a:spcAft>
+              <a:defRPr sz="2400">
+                <a:solidFill>
+                  <a:srgbClr val="000000"/>
+                </a:solidFill>
+                <a:latin typeface="Play"/>
+                <a:ea typeface="Play"/>
+                <a:cs typeface="Play"/>
+              </a:defRPr>
+            </a:pPr>
+            <a:r>
+              <a:rPr sz="2400">
+                <a:solidFill>
+                  <a:srgbClr val="000000"/>
+                </a:solidFill>
+                <a:latin typeface="Play"/>
+                <a:ea typeface="Play"/>
+                <a:cs typeface="Play"/>
+              </a:rPr>
+              <a:t>• Модель gpt-oss-20b подключается по OpenAI-совместимому протоколу</a:t>
+            </a:r>
+          </a:p>
+        </p:txBody>
+      </p:sp>
+    </p:spTree>
+  </p:cSld>
+  <p:clrMapOvr>
+    <a:masterClrMapping/>
+  </p:clrMapOvr>
+</p:sld>
+</file>
+
+<file path=ppt/slides/slide64.xml><?xml version="1.0" encoding="utf-8"?>
+<p:sld xmlns:a="http://schemas.openxmlformats.org/drawingml/2006/main" xmlns:p="http://schemas.openxmlformats.org/presentationml/2006/main" xmlns:r="http://schemas.openxmlformats.org/officeDocument/2006/relationships">
+  <p:cSld>
+    <p:bg>
+      <p:bgPr>
+        <a:solidFill>
+          <a:schemeClr val="lt2"/>
+        </a:solidFill>
+      </p:bgPr>
+    </p:bg>
+    <p:spTree>
+      <p:nvGrpSpPr>
+        <p:cNvPr id="1" name=""/>
+        <p:cNvGrpSpPr/>
+        <p:nvPr/>
+      </p:nvGrpSpPr>
+      <p:grpSpPr/>
+      <p:sp>
+        <p:nvSpPr>
+          <p:cNvPr id="2" name="title"/>
+          <p:cNvSpPr txBox="1"/>
+          <p:nvPr/>
+        </p:nvSpPr>
+        <p:spPr>
+          <a:xfrm>
+            <a:off x="677875" y="692177"/>
+            <a:ext cx="10855391" cy="822960"/>
+          </a:xfrm>
+          <a:prstGeom prst="rect">
+            <a:avLst/>
+          </a:prstGeom>
+          <a:noFill/>
+        </p:spPr>
+        <p:txBody>
+          <a:bodyPr wrap="square" lIns="76200" rIns="76200" tIns="50800" bIns="50800">
+            <a:spAutoFit/>
+          </a:bodyPr>
+          <a:lstStyle/>
+          <a:p>
+            <a:pPr algn="l">
+              <a:spcAft>
+                <a:spcPts val="300"/>
+              </a:spcAft>
+              <a:defRPr sz="4000">
+                <a:solidFill>
+                  <a:srgbClr val="000000"/>
+                </a:solidFill>
+                <a:latin typeface="Arial"/>
+                <a:ea typeface="Arial"/>
+                <a:cs typeface="Arial"/>
+              </a:defRPr>
+            </a:pPr>
+            <a:r>
+              <a:rPr sz="4000">
+                <a:solidFill>
+                  <a:srgbClr val="000000"/>
+                </a:solidFill>
+                <a:latin typeface="Arial"/>
+                <a:ea typeface="Arial"/>
+                <a:cs typeface="Arial"/>
+              </a:rPr>
+              <a:t>План развития</a:t>
+            </a:r>
+          </a:p>
+        </p:txBody>
+      </p:sp>
+      <p:sp>
+        <p:nvSpPr>
+          <p:cNvPr id="3" name="Rectangle 2"/>
+          <p:cNvSpPr/>
+          <p:nvPr/>
+        </p:nvSpPr>
+        <p:spPr>
+          <a:xfrm>
+            <a:off x="677875" y="3815229"/>
+            <a:ext cx="10855391" cy="132531"/>
+          </a:xfrm>
+          <a:prstGeom prst="rect">
+            <a:avLst/>
+          </a:prstGeom>
+          <a:solidFill>
+            <a:srgbClr val="0077FF"/>
+          </a:solidFill>
+          <a:ln>
+            <a:noFill/>
+          </a:ln>
+        </p:spPr>
+        <p:style>
+          <a:lnRef idx="1">
+            <a:schemeClr val="accent1"/>
+          </a:lnRef>
+          <a:fillRef idx="3">
+            <a:schemeClr val="accent1"/>
+          </a:fillRef>
+          <a:effectRef idx="2">
+            <a:schemeClr val="accent1"/>
+          </a:effectRef>
+          <a:fontRef idx="minor">
+            <a:schemeClr val="lt1"/>
+          </a:fontRef>
+        </p:style>
+        <p:txBody>
+          <a:bodyPr rtlCol="0" anchor="ctr"/>
+          <a:lstStyle/>
+          <a:p>
+            <a:pPr algn="ctr"/>
+          </a:p>
+        </p:txBody>
+      </p:sp>
+      <p:sp>
+        <p:nvSpPr>
+          <p:cNvPr id="4" name="Oval 3"/>
+          <p:cNvSpPr/>
+          <p:nvPr/>
+        </p:nvSpPr>
+        <p:spPr>
+          <a:xfrm>
+            <a:off x="2001157" y="3395546"/>
+            <a:ext cx="971897" cy="971897"/>
+          </a:xfrm>
+          <a:prstGeom prst="ellipse">
+            <a:avLst/>
+          </a:prstGeom>
+          <a:solidFill>
+            <a:srgbClr val="0077FF"/>
+          </a:solidFill>
+          <a:ln>
+            <a:noFill/>
+          </a:ln>
+        </p:spPr>
+        <p:style>
+          <a:lnRef idx="1">
+            <a:schemeClr val="accent1"/>
+          </a:lnRef>
+          <a:fillRef idx="3">
+            <a:schemeClr val="accent1"/>
+          </a:fillRef>
+          <a:effectRef idx="2">
+            <a:schemeClr val="accent1"/>
+          </a:effectRef>
+          <a:fontRef idx="minor">
+            <a:schemeClr val="lt1"/>
+          </a:fontRef>
+        </p:style>
+        <p:txBody>
+          <a:bodyPr rtlCol="0" anchor="ctr"/>
+          <a:lstStyle/>
+          <a:p>
+            <a:pPr algn="ctr"/>
+          </a:p>
+        </p:txBody>
+      </p:sp>
+      <p:sp>
+        <p:nvSpPr>
+          <p:cNvPr id="5" name="TextBox 4"/>
+          <p:cNvSpPr txBox="1"/>
+          <p:nvPr/>
+        </p:nvSpPr>
+        <p:spPr>
+          <a:xfrm>
+            <a:off x="677875" y="1783080"/>
+            <a:ext cx="5427695" cy="1678732"/>
+          </a:xfrm>
+          <a:prstGeom prst="rect">
+            <a:avLst/>
+          </a:prstGeom>
+          <a:noFill/>
+        </p:spPr>
+        <p:txBody>
+          <a:bodyPr wrap="square" lIns="12700" rIns="12700" tIns="12700" bIns="12700">
+            <a:spAutoFit/>
+          </a:bodyPr>
+          <a:lstStyle/>
+          <a:p>
+            <a:pPr algn="ctr">
+              <a:defRPr sz="1400" b="0">
+                <a:solidFill>
+                  <a:srgbClr val="000000"/>
+                </a:solidFill>
+                <a:latin typeface="Play"/>
+                <a:ea typeface="Play"/>
+                <a:cs typeface="Play"/>
+              </a:defRPr>
+            </a:pPr>
+            <a:r>
+              <a:rPr sz="1400" b="0">
+                <a:solidFill>
+                  <a:srgbClr val="000000"/>
+                </a:solidFill>
+                <a:latin typeface="Play"/>
+                <a:ea typeface="Play"/>
+                <a:cs typeface="Play"/>
+              </a:rPr>
+              <a:t>Третий квартал 2026</a:t>
+            </a:r>
+          </a:p>
+        </p:txBody>
+      </p:sp>
+      <p:sp>
+        <p:nvSpPr>
+          <p:cNvPr id="6" name="Oval 5"/>
+          <p:cNvSpPr/>
+          <p:nvPr/>
+        </p:nvSpPr>
+        <p:spPr>
+          <a:xfrm>
+            <a:off x="5619621" y="3395546"/>
+            <a:ext cx="971897" cy="971897"/>
+          </a:xfrm>
+          <a:prstGeom prst="ellipse">
+            <a:avLst/>
+          </a:prstGeom>
+          <a:solidFill>
+            <a:srgbClr val="0077FF"/>
+          </a:solidFill>
+          <a:ln>
+            <a:noFill/>
+          </a:ln>
+        </p:spPr>
+        <p:style>
+          <a:lnRef idx="1">
+            <a:schemeClr val="accent1"/>
+          </a:lnRef>
+          <a:fillRef idx="3">
+            <a:schemeClr val="accent1"/>
+          </a:fillRef>
+          <a:effectRef idx="2">
+            <a:schemeClr val="accent1"/>
+          </a:effectRef>
+          <a:fontRef idx="minor">
+            <a:schemeClr val="lt1"/>
+          </a:fontRef>
+        </p:style>
+        <p:txBody>
+          <a:bodyPr rtlCol="0" anchor="ctr"/>
+          <a:lstStyle/>
+          <a:p>
+            <a:pPr algn="ctr"/>
+          </a:p>
+        </p:txBody>
+      </p:sp>
+      <p:sp>
+        <p:nvSpPr>
+          <p:cNvPr id="7" name="TextBox 6"/>
+          <p:cNvSpPr txBox="1"/>
+          <p:nvPr/>
+        </p:nvSpPr>
+        <p:spPr>
+          <a:xfrm>
+            <a:off x="3391722" y="4787127"/>
+            <a:ext cx="5427695" cy="1678732"/>
+          </a:xfrm>
+          <a:prstGeom prst="rect">
+            <a:avLst/>
+          </a:prstGeom>
+          <a:noFill/>
+        </p:spPr>
+        <p:txBody>
+          <a:bodyPr wrap="square" lIns="12700" rIns="12700" tIns="12700" bIns="12700">
+            <a:spAutoFit/>
+          </a:bodyPr>
+          <a:lstStyle/>
+          <a:p>
+            <a:pPr algn="ctr">
+              <a:defRPr sz="1400" b="0">
+                <a:solidFill>
+                  <a:srgbClr val="000000"/>
+                </a:solidFill>
+                <a:latin typeface="Play"/>
+                <a:ea typeface="Play"/>
+                <a:cs typeface="Play"/>
+              </a:defRPr>
+            </a:pPr>
+            <a:r>
+              <a:rPr sz="1400" b="0">
+                <a:solidFill>
+                  <a:srgbClr val="000000"/>
+                </a:solidFill>
+                <a:latin typeface="Play"/>
+                <a:ea typeface="Play"/>
+                <a:cs typeface="Play"/>
+              </a:rPr>
+              <a:t>Четвёртый квартал 2026</a:t>
+            </a:r>
+          </a:p>
+        </p:txBody>
+      </p:sp>
+      <p:sp>
+        <p:nvSpPr>
+          <p:cNvPr id="8" name="Oval 7"/>
+          <p:cNvSpPr/>
+          <p:nvPr/>
+        </p:nvSpPr>
+        <p:spPr>
+          <a:xfrm>
+            <a:off x="9238085" y="3395546"/>
+            <a:ext cx="971897" cy="971897"/>
+          </a:xfrm>
+          <a:prstGeom prst="ellipse">
+            <a:avLst/>
+          </a:prstGeom>
+          <a:solidFill>
+            <a:srgbClr val="0077FF"/>
+          </a:solidFill>
+          <a:ln>
+            <a:noFill/>
+          </a:ln>
+        </p:spPr>
+        <p:style>
+          <a:lnRef idx="1">
+            <a:schemeClr val="accent1"/>
+          </a:lnRef>
+          <a:fillRef idx="3">
+            <a:schemeClr val="accent1"/>
+          </a:fillRef>
+          <a:effectRef idx="2">
+            <a:schemeClr val="accent1"/>
+          </a:effectRef>
+          <a:fontRef idx="minor">
+            <a:schemeClr val="lt1"/>
+          </a:fontRef>
+        </p:style>
+        <p:txBody>
+          <a:bodyPr rtlCol="0" anchor="ctr"/>
+          <a:lstStyle/>
+          <a:p>
+            <a:pPr algn="ctr"/>
+          </a:p>
+        </p:txBody>
+      </p:sp>
+      <p:sp>
+        <p:nvSpPr>
+          <p:cNvPr id="9" name="TextBox 8"/>
+          <p:cNvSpPr txBox="1"/>
+          <p:nvPr/>
+        </p:nvSpPr>
+        <p:spPr>
+          <a:xfrm>
+            <a:off x="6105570" y="1783080"/>
+            <a:ext cx="5427695" cy="1678732"/>
+          </a:xfrm>
+          <a:prstGeom prst="rect">
+            <a:avLst/>
+          </a:prstGeom>
+          <a:noFill/>
+        </p:spPr>
+        <p:txBody>
+          <a:bodyPr wrap="square" lIns="12700" rIns="12700" tIns="12700" bIns="12700">
+            <a:spAutoFit/>
+          </a:bodyPr>
+          <a:lstStyle/>
+          <a:p>
+            <a:pPr algn="ctr">
+              <a:defRPr sz="1400" b="0">
+                <a:solidFill>
+                  <a:srgbClr val="000000"/>
+                </a:solidFill>
+                <a:latin typeface="Play"/>
+                <a:ea typeface="Play"/>
+                <a:cs typeface="Play"/>
+              </a:defRPr>
+            </a:pPr>
+            <a:r>
+              <a:rPr sz="1400" b="0">
+                <a:solidFill>
+                  <a:srgbClr val="000000"/>
+                </a:solidFill>
+                <a:latin typeface="Play"/>
+                <a:ea typeface="Play"/>
+                <a:cs typeface="Play"/>
+              </a:rPr>
+              <a:t>Первый квартал 2027</a:t>
+            </a:r>
+          </a:p>
+        </p:txBody>
+      </p:sp>
+    </p:spTree>
+  </p:cSld>
+  <p:clrMapOvr>
+    <a:masterClrMapping/>
+  </p:clrMapOvr>
+</p:sld>
+</file>
+
+<file path=ppt/slides/slide65.xml><?xml version="1.0" encoding="utf-8"?>
+<p:sld xmlns:a="http://schemas.openxmlformats.org/drawingml/2006/main" xmlns:p="http://schemas.openxmlformats.org/presentationml/2006/main" xmlns:r="http://schemas.openxmlformats.org/officeDocument/2006/relationships">
+  <p:cSld>
+    <p:bg>
+      <p:bgPr>
+        <a:solidFill>
+          <a:schemeClr val="lt2"/>
+        </a:solidFill>
+      </p:bgPr>
+    </p:bg>
+    <p:spTree>
+      <p:nvGrpSpPr>
+        <p:cNvPr id="1" name=""/>
+        <p:cNvGrpSpPr/>
+        <p:nvPr/>
+      </p:nvGrpSpPr>
+      <p:grpSpPr/>
+      <p:sp>
+        <p:nvSpPr>
+          <p:cNvPr id="2" name="title"/>
+          <p:cNvSpPr txBox="1"/>
+          <p:nvPr/>
+        </p:nvSpPr>
+        <p:spPr>
+          <a:xfrm>
+            <a:off x="677387" y="692177"/>
+            <a:ext cx="10855878" cy="822960"/>
+          </a:xfrm>
+          <a:prstGeom prst="rect">
+            <a:avLst/>
+          </a:prstGeom>
+          <a:noFill/>
+        </p:spPr>
+        <p:txBody>
+          <a:bodyPr wrap="square" lIns="76200" rIns="76200" tIns="50800" bIns="50800">
+            <a:spAutoFit/>
+          </a:bodyPr>
+          <a:lstStyle/>
+          <a:p>
+            <a:pPr algn="l">
+              <a:spcAft>
+                <a:spcPts val="300"/>
+              </a:spcAft>
+              <a:defRPr sz="4000">
+                <a:solidFill>
+                  <a:srgbClr val="000000"/>
+                </a:solidFill>
+                <a:latin typeface="Arial"/>
+                <a:ea typeface="Arial"/>
+                <a:cs typeface="Arial"/>
+              </a:defRPr>
+            </a:pPr>
+            <a:r>
+              <a:rPr sz="4000">
+                <a:solidFill>
+                  <a:srgbClr val="000000"/>
+                </a:solidFill>
+                <a:latin typeface="Arial"/>
+                <a:ea typeface="Arial"/>
+                <a:cs typeface="Arial"/>
+              </a:rPr>
+              <a:t>Преимущества для компании</a:t>
+            </a:r>
+          </a:p>
+        </p:txBody>
+      </p:sp>
+      <p:sp>
+        <p:nvSpPr>
+          <p:cNvPr id="3" name="lead"/>
+          <p:cNvSpPr txBox="1"/>
+          <p:nvPr/>
+        </p:nvSpPr>
+        <p:spPr>
+          <a:xfrm>
+            <a:off x="677387" y="1773204"/>
+            <a:ext cx="10855878" cy="1674861"/>
+          </a:xfrm>
+          <a:prstGeom prst="rect">
+            <a:avLst/>
+          </a:prstGeom>
+          <a:noFill/>
+        </p:spPr>
+        <p:txBody>
+          <a:bodyPr wrap="square" lIns="76200" rIns="76200" tIns="50800" bIns="50800">
+            <a:spAutoFit/>
+          </a:bodyPr>
+          <a:lstStyle/>
+          <a:p>
+            <a:pPr algn="l">
+              <a:spcAft>
+                <a:spcPts val="300"/>
+              </a:spcAft>
+              <a:defRPr sz="4000">
+                <a:solidFill>
+                  <a:srgbClr val="000000"/>
+                </a:solidFill>
+                <a:latin typeface="Play"/>
+                <a:ea typeface="Play"/>
+                <a:cs typeface="Play"/>
+              </a:defRPr>
+            </a:pPr>
+            <a:r>
+              <a:rPr sz="4000">
+                <a:solidFill>
+                  <a:srgbClr val="000000"/>
+                </a:solidFill>
+                <a:latin typeface="Play"/>
+                <a:ea typeface="Play"/>
+                <a:cs typeface="Play"/>
+              </a:rPr>
+              <a:t>Ускорение создания презентаций до 4 мин</a:t>
+            </a:r>
+          </a:p>
+        </p:txBody>
+      </p:sp>
+      <p:sp>
+        <p:nvSpPr>
+          <p:cNvPr id="4" name="body"/>
+          <p:cNvSpPr txBox="1"/>
+          <p:nvPr/>
+        </p:nvSpPr>
+        <p:spPr>
+          <a:xfrm>
+            <a:off x="677387" y="3713721"/>
+            <a:ext cx="10855878" cy="2487075"/>
+          </a:xfrm>
+          <a:prstGeom prst="rect">
+            <a:avLst/>
+          </a:prstGeom>
+          <a:noFill/>
+        </p:spPr>
+        <p:txBody>
+          <a:bodyPr wrap="square" lIns="76200" rIns="76200" tIns="50800" bIns="50800">
+            <a:spAutoFit/>
+          </a:bodyPr>
+          <a:lstStyle/>
+          <a:p>
+            <a:pPr algn="l">
+              <a:spcAft>
+                <a:spcPts val="300"/>
+              </a:spcAft>
+              <a:defRPr sz="3200">
+                <a:solidFill>
+                  <a:srgbClr val="000000"/>
+                </a:solidFill>
+                <a:latin typeface="Play"/>
+                <a:ea typeface="Play"/>
+                <a:cs typeface="Play"/>
+              </a:defRPr>
+            </a:pPr>
+            <a:r>
+              <a:rPr sz="3200">
+                <a:solidFill>
+                  <a:srgbClr val="000000"/>
+                </a:solidFill>
+                <a:latin typeface="Play"/>
+                <a:ea typeface="Play"/>
+                <a:cs typeface="Play"/>
+              </a:rPr>
+              <a:t>• Снижение ошибок стиля до 2 из 68 колод</a:t>
+            </a:r>
+          </a:p>
+          <a:p>
+            <a:pPr algn="l">
+              <a:spcAft>
+                <a:spcPts val="300"/>
+              </a:spcAft>
+              <a:defRPr sz="3200">
+                <a:solidFill>
+                  <a:srgbClr val="000000"/>
+                </a:solidFill>
+                <a:latin typeface="Play"/>
+                <a:ea typeface="Play"/>
+                <a:cs typeface="Play"/>
+              </a:defRPr>
+            </a:pPr>
+            <a:r>
+              <a:rPr sz="3200">
+                <a:solidFill>
+                  <a:srgbClr val="000000"/>
+                </a:solidFill>
+                <a:latin typeface="Play"/>
+                <a:ea typeface="Play"/>
+                <a:cs typeface="Play"/>
+              </a:rPr>
+              <a:t>• Экономия времени дизайнеров</a:t>
+            </a:r>
+          </a:p>
+          <a:p>
+            <a:pPr algn="l">
+              <a:spcAft>
+                <a:spcPts val="300"/>
+              </a:spcAft>
+              <a:defRPr sz="3200">
+                <a:solidFill>
+                  <a:srgbClr val="000000"/>
+                </a:solidFill>
+                <a:latin typeface="Play"/>
+                <a:ea typeface="Play"/>
+                <a:cs typeface="Play"/>
+              </a:defRPr>
+            </a:pPr>
+            <a:r>
+              <a:rPr sz="3200">
+                <a:solidFill>
+                  <a:srgbClr val="000000"/>
+                </a:solidFill>
+                <a:latin typeface="Play"/>
+                <a:ea typeface="Play"/>
+                <a:cs typeface="Play"/>
+              </a:rPr>
+              <a:t>• Масштабируемость без дополнительных сотрудников</a:t>
+            </a:r>
+          </a:p>
+        </p:txBody>
+      </p:sp>
+    </p:spTree>
+  </p:cSld>
+  <p:clrMapOvr>
+    <a:masterClrMapping/>
+  </p:clrMapOvr>
+</p:sld>
+</file>
+
+<file path=ppt/slides/slide66.xml><?xml version="1.0" encoding="utf-8"?>
 <p:sld xmlns:a="http://schemas.openxmlformats.org/drawingml/2006/main" xmlns:p="http://schemas.openxmlformats.org/presentationml/2006/main" xmlns:r="http://schemas.openxmlformats.org/officeDocument/2006/relationships">
   <p:cSld>
     <p:bg>
@@ -10055,7 +11474,7 @@
                 <a:ea typeface="Arial"/>
                 <a:cs typeface="Arial"/>
               </a:rPr>
-              <a:t>Риски</a:t>
+              <a:t>Что мы просим решить</a:t>
             </a:r>
           </a:p>
         </p:txBody>
@@ -10069,7 +11488,7 @@
         <p:spPr>
           <a:xfrm>
             <a:off x="677387" y="2200937"/>
-            <a:ext cx="10855878" cy="1871251"/>
+            <a:ext cx="10855878" cy="1825766"/>
           </a:xfrm>
           <a:prstGeom prst="rect">
             <a:avLst/>
@@ -10104,7 +11523,7 @@
                 <a:ea typeface="Play"/>
                 <a:cs typeface="Play"/>
               </a:rPr>
-              <a:t>Модель может выдумать цифры, аудит проверяет</a:t>
+              <a:t>Одобрить запуск сервиса на всю компанию</a:t>
             </a:r>
           </a:p>
         </p:txBody>
@@ -10117,8 +11536,8 @@
         </p:nvSpPr>
         <p:spPr>
           <a:xfrm>
-            <a:off x="677387" y="4319855"/>
-            <a:ext cx="10855878" cy="2008843"/>
+            <a:off x="677387" y="4274370"/>
+            <a:ext cx="10855878" cy="2054328"/>
           </a:xfrm>
           <a:prstGeom prst="rect">
             <a:avLst/>
@@ -10153,7 +11572,7 @@
                 <a:ea typeface="Play"/>
                 <a:cs typeface="Play"/>
               </a:rPr>
-              <a:t>• Неизвестный шаблон может быть плохо сделан</a:t>
+              <a:t>• Выделить бюджет на инфраструктуру и интеграцию</a:t>
             </a:r>
           </a:p>
           <a:p>
@@ -10179,7 +11598,7 @@
                 <a:ea typeface="Play"/>
                 <a:cs typeface="Play"/>
               </a:rPr>
-              <a:t>• Нагрузка выше 20 задач требует внешней очереди</a:t>
+              <a:t>• Назначить ответственных за внедрение</a:t>
             </a:r>
           </a:p>
         </p:txBody>
@@ -10192,231 +11611,7 @@
 </p:sld>
 </file>
 
-<file path=ppt/slides/slide64.xml><?xml version="1.0" encoding="utf-8"?>
-<p:sld xmlns:a="http://schemas.openxmlformats.org/drawingml/2006/main" xmlns:p="http://schemas.openxmlformats.org/presentationml/2006/main" xmlns:r="http://schemas.openxmlformats.org/officeDocument/2006/relationships">
-  <p:cSld>
-    <p:bg>
-      <p:bgPr>
-        <a:solidFill>
-          <a:schemeClr val="lt2"/>
-        </a:solidFill>
-      </p:bgPr>
-    </p:bg>
-    <p:spTree>
-      <p:nvGrpSpPr>
-        <p:cNvPr id="1" name=""/>
-        <p:cNvGrpSpPr/>
-        <p:nvPr/>
-      </p:nvGrpSpPr>
-      <p:grpSpPr/>
-      <p:sp>
-        <p:nvSpPr>
-          <p:cNvPr id="2" name="title"/>
-          <p:cNvSpPr txBox="1"/>
-          <p:nvPr/>
-        </p:nvSpPr>
-        <p:spPr>
-          <a:xfrm>
-            <a:off x="677387" y="692177"/>
-            <a:ext cx="10855878" cy="822960"/>
-          </a:xfrm>
-          <a:prstGeom prst="rect">
-            <a:avLst/>
-          </a:prstGeom>
-          <a:noFill/>
-        </p:spPr>
-        <p:txBody>
-          <a:bodyPr wrap="square" lIns="76200" rIns="76200" tIns="50800" bIns="50800">
-            <a:spAutoFit/>
-          </a:bodyPr>
-          <a:lstStyle/>
-          <a:p>
-            <a:pPr algn="l">
-              <a:spcAft>
-                <a:spcPts val="300"/>
-              </a:spcAft>
-              <a:defRPr sz="4000">
-                <a:solidFill>
-                  <a:srgbClr val="000000"/>
-                </a:solidFill>
-                <a:latin typeface="Arial"/>
-                <a:ea typeface="Arial"/>
-                <a:cs typeface="Arial"/>
-              </a:defRPr>
-            </a:pPr>
-            <a:r>
-              <a:rPr sz="4000">
-                <a:solidFill>
-                  <a:srgbClr val="000000"/>
-                </a:solidFill>
-                <a:latin typeface="Arial"/>
-                <a:ea typeface="Arial"/>
-                <a:cs typeface="Arial"/>
-              </a:rPr>
-              <a:t>Преимущества</a:t>
-            </a:r>
-          </a:p>
-        </p:txBody>
-      </p:sp>
-      <p:sp>
-        <p:nvSpPr>
-          <p:cNvPr id="3" name="lead"/>
-          <p:cNvSpPr txBox="1"/>
-          <p:nvPr/>
-        </p:nvSpPr>
-        <p:spPr>
-          <a:xfrm>
-            <a:off x="677387" y="1773204"/>
-            <a:ext cx="10855878" cy="1509184"/>
-          </a:xfrm>
-          <a:prstGeom prst="rect">
-            <a:avLst/>
-          </a:prstGeom>
-          <a:noFill/>
-        </p:spPr>
-        <p:txBody>
-          <a:bodyPr wrap="square" lIns="76200" rIns="76200" tIns="50800" bIns="50800">
-            <a:spAutoFit/>
-          </a:bodyPr>
-          <a:lstStyle/>
-          <a:p>
-            <a:pPr algn="l">
-              <a:spcAft>
-                <a:spcPts val="300"/>
-              </a:spcAft>
-              <a:defRPr sz="4000">
-                <a:solidFill>
-                  <a:srgbClr val="000000"/>
-                </a:solidFill>
-                <a:latin typeface="Play"/>
-                <a:ea typeface="Play"/>
-                <a:cs typeface="Play"/>
-              </a:defRPr>
-            </a:pPr>
-            <a:r>
-              <a:rPr sz="4000">
-                <a:solidFill>
-                  <a:srgbClr val="000000"/>
-                </a:solidFill>
-                <a:latin typeface="Play"/>
-                <a:ea typeface="Play"/>
-                <a:cs typeface="Play"/>
-              </a:rPr>
-              <a:t>Сокращение времени сборки до 4 минут</a:t>
-            </a:r>
-          </a:p>
-        </p:txBody>
-      </p:sp>
-      <p:sp>
-        <p:nvSpPr>
-          <p:cNvPr id="4" name="body"/>
-          <p:cNvSpPr txBox="1"/>
-          <p:nvPr/>
-        </p:nvSpPr>
-        <p:spPr>
-          <a:xfrm>
-            <a:off x="677387" y="3548044"/>
-            <a:ext cx="10855878" cy="2652753"/>
-          </a:xfrm>
-          <a:prstGeom prst="rect">
-            <a:avLst/>
-          </a:prstGeom>
-          <a:noFill/>
-        </p:spPr>
-        <p:txBody>
-          <a:bodyPr wrap="square" lIns="76200" rIns="76200" tIns="50800" bIns="50800">
-            <a:spAutoFit/>
-          </a:bodyPr>
-          <a:lstStyle/>
-          <a:p>
-            <a:pPr algn="l">
-              <a:spcAft>
-                <a:spcPts val="300"/>
-              </a:spcAft>
-              <a:defRPr sz="3200">
-                <a:solidFill>
-                  <a:srgbClr val="000000"/>
-                </a:solidFill>
-                <a:latin typeface="Play"/>
-                <a:ea typeface="Play"/>
-                <a:cs typeface="Play"/>
-              </a:defRPr>
-            </a:pPr>
-            <a:r>
-              <a:rPr sz="3200">
-                <a:solidFill>
-                  <a:srgbClr val="000000"/>
-                </a:solidFill>
-                <a:latin typeface="Play"/>
-                <a:ea typeface="Play"/>
-                <a:cs typeface="Play"/>
-              </a:rPr>
-              <a:t>• Уменьшение нарушений фирменного стиля до 2 из 68</a:t>
-            </a:r>
-          </a:p>
-          <a:p>
-            <a:pPr algn="l">
-              <a:spcAft>
-                <a:spcPts val="300"/>
-              </a:spcAft>
-              <a:defRPr sz="3200">
-                <a:solidFill>
-                  <a:srgbClr val="000000"/>
-                </a:solidFill>
-                <a:latin typeface="Play"/>
-                <a:ea typeface="Play"/>
-                <a:cs typeface="Play"/>
-              </a:defRPr>
-            </a:pPr>
-            <a:r>
-              <a:rPr sz="3200">
-                <a:solidFill>
-                  <a:srgbClr val="000000"/>
-                </a:solidFill>
-                <a:latin typeface="Play"/>
-                <a:ea typeface="Play"/>
-                <a:cs typeface="Play"/>
-              </a:rPr>
-              <a:t>• Экономия 1 400 рублей за 6 недель пилота</a:t>
-            </a:r>
-          </a:p>
-          <a:p>
-            <a:pPr algn="l">
-              <a:spcAft>
-                <a:spcPts val="300"/>
-              </a:spcAft>
-              <a:defRPr sz="3200">
-                <a:solidFill>
-                  <a:srgbClr val="000000"/>
-                </a:solidFill>
-                <a:latin typeface="Play"/>
-                <a:ea typeface="Play"/>
-                <a:cs typeface="Play"/>
-              </a:defRPr>
-            </a:pPr>
-            <a:r>
-              <a:rPr sz="3200">
-                <a:solidFill>
-                  <a:srgbClr val="000000"/>
-                </a:solidFill>
-                <a:latin typeface="Play"/>
-                <a:ea typeface="Play"/>
-                <a:cs typeface="Play"/>
-              </a:rPr>
-              <a:t>• Повышение производительности дизайнеров</a:t>
-            </a:r>
-          </a:p>
-        </p:txBody>
-      </p:sp>
-    </p:spTree>
-  </p:cSld>
-  <p:clrMapOvr>
-    <a:masterClrMapping/>
-  </p:clrMapOvr>
-</p:sld>
-</file>
-
-<file path=ppt/slides/slide65.xml><?xml version="1.0" encoding="utf-8"?>
+<file path=ppt/slides/slide67.xml><?xml version="1.0" encoding="utf-8"?>
 <p:sld xmlns:a="http://schemas.openxmlformats.org/drawingml/2006/main" xmlns:p="http://schemas.openxmlformats.org/presentationml/2006/main" xmlns:r="http://schemas.openxmlformats.org/officeDocument/2006/relationships">
   <p:cSld>
     <p:spTree>
@@ -10435,7 +11630,7 @@
         <p:spPr>
           <a:xfrm>
             <a:off x="658855" y="692177"/>
-            <a:ext cx="5242438" cy="822960"/>
+            <a:ext cx="5242438" cy="919480"/>
           </a:xfrm>
           <a:prstGeom prst="rect">
             <a:avLst/>
@@ -10452,7 +11647,7 @@
               <a:spcAft>
                 <a:spcPts val="300"/>
               </a:spcAft>
-              <a:defRPr sz="4000">
+              <a:defRPr sz="4800">
                 <a:solidFill>
                   <a:srgbClr val="FFFFFF"/>
                 </a:solidFill>
@@ -10462,7 +11657,7 @@
               </a:defRPr>
             </a:pPr>
             <a:r>
-              <a:rPr sz="4000">
+              <a:rPr sz="4800">
                 <a:solidFill>
                   <a:srgbClr val="FFFFFF"/>
                 </a:solidFill>
@@ -10470,7 +11665,7 @@
                 <a:ea typeface="Arial"/>
                 <a:cs typeface="Arial"/>
               </a:rPr>
-              <a:t>Следующие шаги</a:t>
+              <a:t>Заключение</a:t>
             </a:r>
           </a:p>
         </p:txBody>
@@ -10483,8 +11678,8 @@
         </p:nvSpPr>
         <p:spPr>
           <a:xfrm>
-            <a:off x="658855" y="1783080"/>
-            <a:ext cx="5242438" cy="1722257"/>
+            <a:off x="658855" y="1851687"/>
+            <a:ext cx="5242438" cy="1971251"/>
           </a:xfrm>
           <a:prstGeom prst="rect">
             <a:avLst/>
@@ -10519,7 +11714,7 @@
                 <a:ea typeface="Play"/>
                 <a:cs typeface="Play"/>
               </a:rPr>
-              <a:t>Сервис готов к масштабированию на всю компанию</a:t>
+              <a:t>Одобрить запуск сервиса на всю компанию</a:t>
             </a:r>
           </a:p>
         </p:txBody>
@@ -10532,8 +11727,8 @@
         </p:nvSpPr>
         <p:spPr>
           <a:xfrm>
-            <a:off x="658855" y="3736905"/>
-            <a:ext cx="5242438" cy="1905650"/>
+            <a:off x="658855" y="4050391"/>
+            <a:ext cx="5242438" cy="1592164"/>
           </a:xfrm>
           <a:prstGeom prst="rect">
             <a:avLst/>
@@ -10550,7 +11745,7 @@
               <a:spcAft>
                 <a:spcPts val="300"/>
               </a:spcAft>
-              <a:defRPr sz="2400">
+              <a:defRPr sz="2800">
                 <a:solidFill>
                   <a:srgbClr val="FFFFFF"/>
                 </a:solidFill>
@@ -10560,7 +11755,7 @@
               </a:defRPr>
             </a:pPr>
             <a:r>
-              <a:rPr sz="2400">
+              <a:rPr sz="2800">
                 <a:solidFill>
                   <a:srgbClr val="FFFFFF"/>
                 </a:solidFill>
@@ -10568,33 +11763,7 @@
                 <a:ea typeface="Play"/>
                 <a:cs typeface="Play"/>
               </a:rPr>
-              <a:t>• Ожидаем решение о запуске в четвертом квартале 2026</a:t>
-            </a:r>
-          </a:p>
-          <a:p>
-            <a:pPr algn="l">
-              <a:spcAft>
-                <a:spcPts val="300"/>
-              </a:spcAft>
-              <a:defRPr sz="2400">
-                <a:solidFill>
-                  <a:srgbClr val="FFFFFF"/>
-                </a:solidFill>
-                <a:latin typeface="Play"/>
-                <a:ea typeface="Play"/>
-                <a:cs typeface="Play"/>
-              </a:defRPr>
-            </a:pPr>
-            <a:r>
-              <a:rPr sz="2400">
-                <a:solidFill>
-                  <a:srgbClr val="FFFFFF"/>
-                </a:solidFill>
-                <a:latin typeface="Play"/>
-                <a:ea typeface="Play"/>
-                <a:cs typeface="Play"/>
-              </a:rPr>
-              <a:t>• Планируем интеграцию с хранилищем документов</a:t>
+              <a:t>Назначить ответственных и выделить бюджет</a:t>
             </a:r>
           </a:p>
         </p:txBody>

--- a/samples/Шаблон_презентации_VK_Education__focus.pptx
+++ b/samples/Шаблон_презентации_VK_Education__focus.pptx
@@ -261,434 +261,6 @@
     </a:lvl9pPr>
   </p:defaultTextStyle>
 </p:presentation>
-</file>
-
-<file path=ppt/charts/chart1.xml><?xml version="1.0" encoding="utf-8"?>
-<c:chartSpace xmlns:c="http://schemas.openxmlformats.org/drawingml/2006/chart" xmlns:a="http://schemas.openxmlformats.org/drawingml/2006/main" xmlns:r="http://schemas.openxmlformats.org/officeDocument/2006/relationships">
-  <c:date1904 val="0"/>
-  <c:chart>
-    <c:autoTitleDeleted val="1"/>
-    <c:plotArea>
-      <c:barChart>
-        <c:barDir val="col"/>
-        <c:grouping val="clustered"/>
-        <c:ser>
-          <c:idx val="0"/>
-          <c:order val="0"/>
-          <c:tx>
-            <c:strRef>
-              <c:f>Sheet1!$B$1</c:f>
-              <c:strCache>
-                <c:ptCount val="1"/>
-                <c:pt idx="0">
-                  <c:v>Время (мин)</c:v>
-                </c:pt>
-              </c:strCache>
-            </c:strRef>
-          </c:tx>
-          <c:spPr>
-            <a:solidFill>
-              <a:srgbClr val="0077FF"/>
-            </a:solidFill>
-            <a:ln>
-              <a:solidFill>
-                <a:srgbClr val="0077FF"/>
-              </a:solidFill>
-            </a:ln>
-          </c:spPr>
-          <c:cat>
-            <c:strRef>
-              <c:f>Sheet1!$A$2:$A$3</c:f>
-              <c:strCache>
-                <c:ptCount val="2"/>
-                <c:pt idx="0">
-                  <c:v>Текущий процесс</c:v>
-                </c:pt>
-                <c:pt idx="1">
-                  <c:v>Пилот</c:v>
-                </c:pt>
-              </c:strCache>
-            </c:strRef>
-          </c:cat>
-          <c:val>
-            <c:numRef>
-              <c:f>Sheet1!$B$2:$B$3</c:f>
-              <c:numCache>
-                <c:formatCode>General</c:formatCode>
-                <c:ptCount val="2"/>
-                <c:pt idx="0">
-                  <c:v>186.0</c:v>
-                </c:pt>
-                <c:pt idx="1">
-                  <c:v>4.0</c:v>
-                </c:pt>
-              </c:numCache>
-            </c:numRef>
-          </c:val>
-        </c:ser>
-        <c:dLbls>
-          <c:numFmt formatCode="0&quot; мин&quot;" sourceLinked="0"/>
-          <c:txPr>
-            <a:bodyPr wrap="none"/>
-            <a:lstStyle/>
-            <a:p>
-              <a:pPr>
-                <a:defRPr sz="1100" b="0">
-                  <a:solidFill>
-                    <a:srgbClr val="000000"/>
-                  </a:solidFill>
-                  <a:latin typeface="Play"/>
-                  <a:ea typeface="Play"/>
-                  <a:cs typeface="Play"/>
-                </a:defRPr>
-              </a:pPr>
-            </a:p>
-          </c:txPr>
-          <c:dLblPos val="outEnd"/>
-          <c:showLegendKey val="0"/>
-          <c:showVal val="1"/>
-          <c:showCatName val="0"/>
-          <c:showSerName val="0"/>
-          <c:showPercent val="0"/>
-          <c:showBubbleSize val="0"/>
-          <c:showLeaderLines val="1"/>
-        </c:dLbls>
-        <c:gapWidth val="60"/>
-        <c:axId val="-2068027336"/>
-        <c:axId val="-2113994440"/>
-      </c:barChart>
-      <c:catAx>
-        <c:axId val="-2068027336"/>
-        <c:scaling>
-          <c:orientation val="minMax"/>
-        </c:scaling>
-        <c:delete val="0"/>
-        <c:axPos val="b"/>
-        <c:majorTickMark val="out"/>
-        <c:minorTickMark val="none"/>
-        <c:tickLblPos val="nextTo"/>
-        <c:txPr>
-          <a:bodyPr/>
-          <a:lstStyle/>
-          <a:p>
-            <a:pPr>
-              <a:defRPr sz="1100" b="0">
-                <a:solidFill>
-                  <a:srgbClr val="000000"/>
-                </a:solidFill>
-                <a:latin typeface="Play"/>
-                <a:ea typeface="Play"/>
-                <a:cs typeface="Play"/>
-              </a:defRPr>
-            </a:pPr>
-          </a:p>
-        </c:txPr>
-        <c:crossAx val="-2113994440"/>
-        <c:crosses val="autoZero"/>
-        <c:auto val="1"/>
-        <c:lblAlgn val="ctr"/>
-        <c:lblOffset val="100"/>
-        <c:noMultiLvlLbl val="0"/>
-      </c:catAx>
-      <c:valAx>
-        <c:axId val="-2113994440"/>
-        <c:scaling/>
-        <c:delete val="0"/>
-        <c:axPos val="l"/>
-        <c:majorGridlines>
-          <c:spPr>
-            <a:ln w="9525">
-              <a:solidFill>
-                <a:srgbClr val="D1D1D1"/>
-              </a:solidFill>
-            </a:ln>
-          </c:spPr>
-        </c:majorGridlines>
-        <c:title>
-          <c:tx>
-            <c:rich>
-              <a:bodyPr rot="0" vert="horz"/>
-              <a:lstStyle/>
-              <a:p>
-                <a:pPr>
-                  <a:defRPr sz="1100" b="0">
-                    <a:solidFill>
-                      <a:srgbClr val="000000"/>
-                    </a:solidFill>
-                    <a:latin typeface="Play"/>
-                    <a:ea typeface="Play"/>
-                    <a:cs typeface="Play"/>
-                  </a:defRPr>
-                </a:pPr>
-                <a:r>
-                  <a:t>Время (мин), мин</a:t>
-                </a:r>
-              </a:p>
-            </c:rich>
-          </c:tx>
-          <c:layout/>
-          <c:overlay val="0"/>
-        </c:title>
-        <c:majorTickMark val="out"/>
-        <c:minorTickMark val="none"/>
-        <c:tickLblPos val="nextTo"/>
-        <c:txPr>
-          <a:bodyPr/>
-          <a:lstStyle/>
-          <a:p>
-            <a:pPr>
-              <a:defRPr sz="1100" b="0">
-                <a:solidFill>
-                  <a:srgbClr val="000000"/>
-                </a:solidFill>
-                <a:latin typeface="Play"/>
-                <a:ea typeface="Play"/>
-                <a:cs typeface="Play"/>
-              </a:defRPr>
-            </a:pPr>
-          </a:p>
-        </c:txPr>
-        <c:crossAx val="-2068027336"/>
-        <c:crosses val="autoZero"/>
-      </c:valAx>
-    </c:plotArea>
-    <c:dispBlanksAs val="gap"/>
-  </c:chart>
-  <c:txPr>
-    <a:bodyPr/>
-    <a:lstStyle/>
-    <a:p>
-      <a:pPr>
-        <a:defRPr sz="1200" b="0">
-          <a:solidFill>
-            <a:srgbClr val="000000"/>
-          </a:solidFill>
-          <a:latin typeface="Play"/>
-          <a:ea typeface="Play"/>
-          <a:cs typeface="Play"/>
-        </a:defRPr>
-      </a:pPr>
-      <a:endParaRPr lang="en-US"/>
-    </a:p>
-  </c:txPr>
-  <c:externalData r:id="rId1">
-    <c:autoUpdate val="0"/>
-  </c:externalData>
-</c:chartSpace>
-</file>
-
-<file path=ppt/charts/chart2.xml><?xml version="1.0" encoding="utf-8"?>
-<c:chartSpace xmlns:c="http://schemas.openxmlformats.org/drawingml/2006/chart" xmlns:a="http://schemas.openxmlformats.org/drawingml/2006/main" xmlns:r="http://schemas.openxmlformats.org/officeDocument/2006/relationships">
-  <c:date1904 val="0"/>
-  <c:chart>
-    <c:autoTitleDeleted val="1"/>
-    <c:plotArea>
-      <c:barChart>
-        <c:barDir val="col"/>
-        <c:grouping val="clustered"/>
-        <c:ser>
-          <c:idx val="0"/>
-          <c:order val="0"/>
-          <c:tx>
-            <c:strRef>
-              <c:f>Sheet1!$B$1</c:f>
-              <c:strCache>
-                <c:ptCount val="1"/>
-                <c:pt idx="0">
-                  <c:v>Запросы закрыты</c:v>
-                </c:pt>
-              </c:strCache>
-            </c:strRef>
-          </c:tx>
-          <c:spPr>
-            <a:solidFill>
-              <a:srgbClr val="0077FF"/>
-            </a:solidFill>
-            <a:ln>
-              <a:solidFill>
-                <a:srgbClr val="0077FF"/>
-              </a:solidFill>
-            </a:ln>
-          </c:spPr>
-          <c:cat>
-            <c:strRef>
-              <c:f>Sheet1!$A$2:$A$3</c:f>
-              <c:strCache>
-                <c:ptCount val="2"/>
-                <c:pt idx="0">
-                  <c:v>Текущий процесс</c:v>
-                </c:pt>
-                <c:pt idx="1">
-                  <c:v>Пилот</c:v>
-                </c:pt>
-              </c:strCache>
-            </c:strRef>
-          </c:cat>
-          <c:val>
-            <c:numRef>
-              <c:f>Sheet1!$B$2:$B$3</c:f>
-              <c:numCache>
-                <c:formatCode>General</c:formatCode>
-                <c:ptCount val="2"/>
-                <c:pt idx="0">
-                  <c:v>11.0</c:v>
-                </c:pt>
-                <c:pt idx="1">
-                  <c:v>38.0</c:v>
-                </c:pt>
-              </c:numCache>
-            </c:numRef>
-          </c:val>
-        </c:ser>
-        <c:dLbls>
-          <c:numFmt formatCode="0&quot; запросов&quot;" sourceLinked="0"/>
-          <c:txPr>
-            <a:bodyPr wrap="none"/>
-            <a:lstStyle/>
-            <a:p>
-              <a:pPr>
-                <a:defRPr sz="1100" b="0">
-                  <a:solidFill>
-                    <a:srgbClr val="000000"/>
-                  </a:solidFill>
-                  <a:latin typeface="Play"/>
-                  <a:ea typeface="Play"/>
-                  <a:cs typeface="Play"/>
-                </a:defRPr>
-              </a:pPr>
-            </a:p>
-          </c:txPr>
-          <c:dLblPos val="outEnd"/>
-          <c:showLegendKey val="0"/>
-          <c:showVal val="1"/>
-          <c:showCatName val="0"/>
-          <c:showSerName val="0"/>
-          <c:showPercent val="0"/>
-          <c:showBubbleSize val="0"/>
-          <c:showLeaderLines val="1"/>
-        </c:dLbls>
-        <c:gapWidth val="60"/>
-        <c:axId val="-2068027336"/>
-        <c:axId val="-2113994440"/>
-      </c:barChart>
-      <c:catAx>
-        <c:axId val="-2068027336"/>
-        <c:scaling>
-          <c:orientation val="minMax"/>
-        </c:scaling>
-        <c:delete val="0"/>
-        <c:axPos val="b"/>
-        <c:majorTickMark val="out"/>
-        <c:minorTickMark val="none"/>
-        <c:tickLblPos val="nextTo"/>
-        <c:txPr>
-          <a:bodyPr/>
-          <a:lstStyle/>
-          <a:p>
-            <a:pPr>
-              <a:defRPr sz="1100" b="0">
-                <a:solidFill>
-                  <a:srgbClr val="000000"/>
-                </a:solidFill>
-                <a:latin typeface="Play"/>
-                <a:ea typeface="Play"/>
-                <a:cs typeface="Play"/>
-              </a:defRPr>
-            </a:pPr>
-          </a:p>
-        </c:txPr>
-        <c:crossAx val="-2113994440"/>
-        <c:crosses val="autoZero"/>
-        <c:auto val="1"/>
-        <c:lblAlgn val="ctr"/>
-        <c:lblOffset val="100"/>
-        <c:noMultiLvlLbl val="0"/>
-      </c:catAx>
-      <c:valAx>
-        <c:axId val="-2113994440"/>
-        <c:scaling/>
-        <c:delete val="0"/>
-        <c:axPos val="l"/>
-        <c:majorGridlines>
-          <c:spPr>
-            <a:ln w="9525">
-              <a:solidFill>
-                <a:srgbClr val="D1D1D1"/>
-              </a:solidFill>
-            </a:ln>
-          </c:spPr>
-        </c:majorGridlines>
-        <c:title>
-          <c:tx>
-            <c:rich>
-              <a:bodyPr rot="0" vert="horz"/>
-              <a:lstStyle/>
-              <a:p>
-                <a:pPr>
-                  <a:defRPr sz="1100" b="0">
-                    <a:solidFill>
-                      <a:srgbClr val="000000"/>
-                    </a:solidFill>
-                    <a:latin typeface="Play"/>
-                    <a:ea typeface="Play"/>
-                    <a:cs typeface="Play"/>
-                  </a:defRPr>
-                </a:pPr>
-                <a:r>
-                  <a:t>Запросы закрыты, запросов</a:t>
-                </a:r>
-              </a:p>
-            </c:rich>
-          </c:tx>
-          <c:layout/>
-          <c:overlay val="0"/>
-        </c:title>
-        <c:majorTickMark val="out"/>
-        <c:minorTickMark val="none"/>
-        <c:tickLblPos val="nextTo"/>
-        <c:txPr>
-          <a:bodyPr/>
-          <a:lstStyle/>
-          <a:p>
-            <a:pPr>
-              <a:defRPr sz="1100" b="0">
-                <a:solidFill>
-                  <a:srgbClr val="000000"/>
-                </a:solidFill>
-                <a:latin typeface="Play"/>
-                <a:ea typeface="Play"/>
-                <a:cs typeface="Play"/>
-              </a:defRPr>
-            </a:pPr>
-          </a:p>
-        </c:txPr>
-        <c:crossAx val="-2068027336"/>
-        <c:crosses val="autoZero"/>
-      </c:valAx>
-    </c:plotArea>
-    <c:dispBlanksAs val="gap"/>
-  </c:chart>
-  <c:txPr>
-    <a:bodyPr/>
-    <a:lstStyle/>
-    <a:p>
-      <a:pPr>
-        <a:defRPr sz="1200" b="0">
-          <a:solidFill>
-            <a:srgbClr val="000000"/>
-          </a:solidFill>
-          <a:latin typeface="Play"/>
-          <a:ea typeface="Play"/>
-          <a:cs typeface="Play"/>
-        </a:defRPr>
-      </a:pPr>
-      <a:endParaRPr lang="en-US"/>
-    </a:p>
-  </c:txPr>
-  <c:externalData r:id="rId1">
-    <c:autoUpdate val="0"/>
-  </c:externalData>
-</c:chartSpace>
 </file>
 
 <file path=ppt/notesMasters/notesMaster1.xml><?xml version="1.0" encoding="utf-8"?>
@@ -2651,6 +2223,1288 @@
 </p:notes>
 </file>
 
+<file path=ppt/slideLayouts/slideLayout10.xml><?xml version="1.0" encoding="utf-8"?>
+<p:sldLayout xmlns:a="http://schemas.openxmlformats.org/drawingml/2006/main" xmlns:r="http://schemas.openxmlformats.org/officeDocument/2006/relationships" xmlns:mc="http://schemas.openxmlformats.org/markup-compatibility/2006" xmlns:mv="urn:schemas-microsoft-com:mac:vml" xmlns:p="http://schemas.openxmlformats.org/presentationml/2006/main" xmlns:c="http://schemas.openxmlformats.org/drawingml/2006/chart" xmlns:dgm="http://schemas.openxmlformats.org/drawingml/2006/diagram" xmlns:o="urn:schemas-microsoft-com:office:office" xmlns:v="urn:schemas-microsoft-com:vml" xmlns:pvml="urn:schemas-microsoft-com:office:powerpoint" xmlns:com="http://schemas.openxmlformats.org/drawingml/2006/compatibility" xmlns:p14="http://schemas.microsoft.com/office/powerpoint/2010/main" xmlns:p15="http://schemas.microsoft.com/office/powerpoint/2012/main" xmlns:ahyp="http://schemas.microsoft.com/office/drawing/2018/hyperlinkcolor" matchingName="2 фактоида + текст">
+  <p:cSld name="2 фактоида + текст">
+    <p:spTree>
+      <p:nvGrpSpPr>
+        <p:cNvPr id="93" name="Shape 93"/>
+        <p:cNvGrpSpPr/>
+        <p:nvPr/>
+      </p:nvGrpSpPr>
+      <p:grpSpPr>
+        <a:xfrm>
+          <a:off x="0" y="0"/>
+          <a:ext cx="0" cy="0"/>
+          <a:chOff x="0" y="0"/>
+          <a:chExt cx="0" cy="0"/>
+        </a:xfrm>
+      </p:grpSpPr>
+      <p:sp>
+        <p:nvSpPr>
+          <p:cNvPr id="94" name="Google Shape;94;p11"/>
+          <p:cNvSpPr txBox="1"/>
+          <p:nvPr>
+            <p:ph idx="1" type="body"/>
+          </p:nvPr>
+        </p:nvSpPr>
+        <p:spPr>
+          <a:xfrm>
+            <a:off x="671514" y="1773238"/>
+            <a:ext cx="5135728" cy="4427537"/>
+          </a:xfrm>
+          <a:prstGeom prst="rect">
+            <a:avLst/>
+          </a:prstGeom>
+          <a:noFill/>
+          <a:ln>
+            <a:noFill/>
+          </a:ln>
+        </p:spPr>
+        <p:txBody>
+          <a:bodyPr anchorCtr="0" anchor="t" bIns="0" lIns="0" spcFirstLastPara="1" rIns="0" wrap="square" tIns="0">
+            <a:normAutofit/>
+          </a:bodyPr>
+          <a:lstStyle>
+            <a:lvl1pPr indent="-228600" lvl="0" marL="457200" algn="l">
+              <a:lnSpc>
+                <a:spcPct val="110000"/>
+              </a:lnSpc>
+              <a:spcBef>
+                <a:spcPts val="1000"/>
+              </a:spcBef>
+              <a:spcAft>
+                <a:spcPts val="0"/>
+              </a:spcAft>
+              <a:buClr>
+                <a:schemeClr val="dk1"/>
+              </a:buClr>
+              <a:buSzPts val="1800"/>
+              <a:buNone/>
+              <a:defRPr/>
+            </a:lvl1pPr>
+            <a:lvl2pPr indent="-342900" lvl="1" marL="914400" algn="l">
+              <a:lnSpc>
+                <a:spcPct val="110000"/>
+              </a:lnSpc>
+              <a:spcBef>
+                <a:spcPts val="500"/>
+              </a:spcBef>
+              <a:spcAft>
+                <a:spcPts val="0"/>
+              </a:spcAft>
+              <a:buSzPts val="1800"/>
+              <a:buChar char="•"/>
+              <a:defRPr/>
+            </a:lvl2pPr>
+            <a:lvl3pPr indent="-342900" lvl="2" marL="1371600" algn="l">
+              <a:lnSpc>
+                <a:spcPct val="110000"/>
+              </a:lnSpc>
+              <a:spcBef>
+                <a:spcPts val="500"/>
+              </a:spcBef>
+              <a:spcAft>
+                <a:spcPts val="0"/>
+              </a:spcAft>
+              <a:buClr>
+                <a:schemeClr val="dk1"/>
+              </a:buClr>
+              <a:buSzPts val="1800"/>
+              <a:buChar char="−"/>
+              <a:defRPr/>
+            </a:lvl3pPr>
+            <a:lvl4pPr indent="-342900" lvl="3" marL="1828800" algn="l">
+              <a:lnSpc>
+                <a:spcPct val="90000"/>
+              </a:lnSpc>
+              <a:spcBef>
+                <a:spcPts val="500"/>
+              </a:spcBef>
+              <a:spcAft>
+                <a:spcPts val="0"/>
+              </a:spcAft>
+              <a:buClr>
+                <a:schemeClr val="dk1"/>
+              </a:buClr>
+              <a:buSzPts val="1800"/>
+              <a:buChar char="•"/>
+              <a:defRPr/>
+            </a:lvl4pPr>
+            <a:lvl5pPr indent="-342900" lvl="4" marL="2286000" algn="l">
+              <a:lnSpc>
+                <a:spcPct val="90000"/>
+              </a:lnSpc>
+              <a:spcBef>
+                <a:spcPts val="500"/>
+              </a:spcBef>
+              <a:spcAft>
+                <a:spcPts val="0"/>
+              </a:spcAft>
+              <a:buClr>
+                <a:schemeClr val="dk1"/>
+              </a:buClr>
+              <a:buSzPts val="1800"/>
+              <a:buChar char="•"/>
+              <a:defRPr/>
+            </a:lvl5pPr>
+            <a:lvl6pPr indent="-342900" lvl="5" marL="2743200" algn="l">
+              <a:lnSpc>
+                <a:spcPct val="90000"/>
+              </a:lnSpc>
+              <a:spcBef>
+                <a:spcPts val="500"/>
+              </a:spcBef>
+              <a:spcAft>
+                <a:spcPts val="0"/>
+              </a:spcAft>
+              <a:buClr>
+                <a:schemeClr val="dk1"/>
+              </a:buClr>
+              <a:buSzPts val="1800"/>
+              <a:buChar char="•"/>
+              <a:defRPr/>
+            </a:lvl6pPr>
+            <a:lvl7pPr indent="-342900" lvl="6" marL="3200400" algn="l">
+              <a:lnSpc>
+                <a:spcPct val="90000"/>
+              </a:lnSpc>
+              <a:spcBef>
+                <a:spcPts val="500"/>
+              </a:spcBef>
+              <a:spcAft>
+                <a:spcPts val="0"/>
+              </a:spcAft>
+              <a:buClr>
+                <a:schemeClr val="dk1"/>
+              </a:buClr>
+              <a:buSzPts val="1800"/>
+              <a:buChar char="•"/>
+              <a:defRPr/>
+            </a:lvl7pPr>
+            <a:lvl8pPr indent="-342900" lvl="7" marL="3657600" algn="l">
+              <a:lnSpc>
+                <a:spcPct val="90000"/>
+              </a:lnSpc>
+              <a:spcBef>
+                <a:spcPts val="500"/>
+              </a:spcBef>
+              <a:spcAft>
+                <a:spcPts val="0"/>
+              </a:spcAft>
+              <a:buClr>
+                <a:schemeClr val="dk1"/>
+              </a:buClr>
+              <a:buSzPts val="1800"/>
+              <a:buChar char="•"/>
+              <a:defRPr/>
+            </a:lvl8pPr>
+            <a:lvl9pPr indent="-342900" lvl="8" marL="4114800" algn="l">
+              <a:lnSpc>
+                <a:spcPct val="90000"/>
+              </a:lnSpc>
+              <a:spcBef>
+                <a:spcPts val="500"/>
+              </a:spcBef>
+              <a:spcAft>
+                <a:spcPts val="0"/>
+              </a:spcAft>
+              <a:buClr>
+                <a:schemeClr val="dk1"/>
+              </a:buClr>
+              <a:buSzPts val="1800"/>
+              <a:buChar char="•"/>
+              <a:defRPr/>
+            </a:lvl9pPr>
+          </a:lstStyle>
+          <a:p/>
+        </p:txBody>
+      </p:sp>
+      <p:sp>
+        <p:nvSpPr>
+          <p:cNvPr id="95" name="Google Shape;95;p11"/>
+          <p:cNvSpPr txBox="1"/>
+          <p:nvPr>
+            <p:ph type="title"/>
+          </p:nvPr>
+        </p:nvSpPr>
+        <p:spPr>
+          <a:xfrm>
+            <a:off x="677334" y="692150"/>
+            <a:ext cx="10855854" cy="644241"/>
+          </a:xfrm>
+          <a:prstGeom prst="rect">
+            <a:avLst/>
+          </a:prstGeom>
+          <a:noFill/>
+          <a:ln>
+            <a:noFill/>
+          </a:ln>
+        </p:spPr>
+        <p:txBody>
+          <a:bodyPr anchorCtr="0" anchor="t" bIns="0" lIns="0" spcFirstLastPara="1" rIns="0" wrap="square" tIns="0">
+            <a:noAutofit/>
+          </a:bodyPr>
+          <a:lstStyle>
+            <a:lvl1pPr lvl="0" algn="l">
+              <a:lnSpc>
+                <a:spcPct val="90000"/>
+              </a:lnSpc>
+              <a:spcBef>
+                <a:spcPts val="0"/>
+              </a:spcBef>
+              <a:spcAft>
+                <a:spcPts val="0"/>
+              </a:spcAft>
+              <a:buClr>
+                <a:schemeClr val="accent1"/>
+              </a:buClr>
+              <a:buSzPts val="3600"/>
+              <a:buFont typeface="Play"/>
+              <a:buNone/>
+              <a:defRPr>
+                <a:solidFill>
+                  <a:schemeClr val="accent1"/>
+                </a:solidFill>
+              </a:defRPr>
+            </a:lvl1pPr>
+            <a:lvl2pPr lvl="1">
+              <a:spcBef>
+                <a:spcPts val="0"/>
+              </a:spcBef>
+              <a:spcAft>
+                <a:spcPts val="0"/>
+              </a:spcAft>
+              <a:buSzPts val="1400"/>
+              <a:buNone/>
+              <a:defRPr/>
+            </a:lvl2pPr>
+            <a:lvl3pPr lvl="2">
+              <a:spcBef>
+                <a:spcPts val="0"/>
+              </a:spcBef>
+              <a:spcAft>
+                <a:spcPts val="0"/>
+              </a:spcAft>
+              <a:buSzPts val="1400"/>
+              <a:buNone/>
+              <a:defRPr/>
+            </a:lvl3pPr>
+            <a:lvl4pPr lvl="3">
+              <a:spcBef>
+                <a:spcPts val="0"/>
+              </a:spcBef>
+              <a:spcAft>
+                <a:spcPts val="0"/>
+              </a:spcAft>
+              <a:buSzPts val="1400"/>
+              <a:buNone/>
+              <a:defRPr/>
+            </a:lvl4pPr>
+            <a:lvl5pPr lvl="4">
+              <a:spcBef>
+                <a:spcPts val="0"/>
+              </a:spcBef>
+              <a:spcAft>
+                <a:spcPts val="0"/>
+              </a:spcAft>
+              <a:buSzPts val="1400"/>
+              <a:buNone/>
+              <a:defRPr/>
+            </a:lvl5pPr>
+            <a:lvl6pPr lvl="5">
+              <a:spcBef>
+                <a:spcPts val="0"/>
+              </a:spcBef>
+              <a:spcAft>
+                <a:spcPts val="0"/>
+              </a:spcAft>
+              <a:buSzPts val="1400"/>
+              <a:buNone/>
+              <a:defRPr/>
+            </a:lvl6pPr>
+            <a:lvl7pPr lvl="6">
+              <a:spcBef>
+                <a:spcPts val="0"/>
+              </a:spcBef>
+              <a:spcAft>
+                <a:spcPts val="0"/>
+              </a:spcAft>
+              <a:buSzPts val="1400"/>
+              <a:buNone/>
+              <a:defRPr/>
+            </a:lvl7pPr>
+            <a:lvl8pPr lvl="7">
+              <a:spcBef>
+                <a:spcPts val="0"/>
+              </a:spcBef>
+              <a:spcAft>
+                <a:spcPts val="0"/>
+              </a:spcAft>
+              <a:buSzPts val="1400"/>
+              <a:buNone/>
+              <a:defRPr/>
+            </a:lvl8pPr>
+            <a:lvl9pPr lvl="8">
+              <a:spcBef>
+                <a:spcPts val="0"/>
+              </a:spcBef>
+              <a:spcAft>
+                <a:spcPts val="0"/>
+              </a:spcAft>
+              <a:buSzPts val="1400"/>
+              <a:buNone/>
+              <a:defRPr/>
+            </a:lvl9pPr>
+          </a:lstStyle>
+          <a:p/>
+        </p:txBody>
+      </p:sp>
+      <p:sp>
+        <p:nvSpPr>
+          <p:cNvPr id="96" name="Google Shape;96;p11"/>
+          <p:cNvSpPr txBox="1"/>
+          <p:nvPr>
+            <p:ph idx="11" type="ftr"/>
+          </p:nvPr>
+        </p:nvSpPr>
+        <p:spPr>
+          <a:xfrm>
+            <a:off x="671513" y="167981"/>
+            <a:ext cx="10874375" cy="241437"/>
+          </a:xfrm>
+          <a:prstGeom prst="rect">
+            <a:avLst/>
+          </a:prstGeom>
+          <a:noFill/>
+          <a:ln>
+            <a:noFill/>
+          </a:ln>
+        </p:spPr>
+        <p:txBody>
+          <a:bodyPr anchorCtr="0" anchor="t" bIns="45700" lIns="0" spcFirstLastPara="1" rIns="91425" wrap="square" tIns="45700">
+            <a:noAutofit/>
+          </a:bodyPr>
+          <a:lstStyle>
+            <a:lvl1pPr lvl="0" marR="0" rtl="0" algn="l">
+              <a:spcBef>
+                <a:spcPts val="0"/>
+              </a:spcBef>
+              <a:spcAft>
+                <a:spcPts val="0"/>
+              </a:spcAft>
+              <a:buSzPts val="1400"/>
+              <a:buNone/>
+              <a:defRPr b="0" i="0" sz="1800" u="none" cap="none" strike="noStrike">
+                <a:solidFill>
+                  <a:schemeClr val="dk1"/>
+                </a:solidFill>
+                <a:latin typeface="Arial"/>
+                <a:ea typeface="Arial"/>
+                <a:cs typeface="Arial"/>
+                <a:sym typeface="Arial"/>
+              </a:defRPr>
+            </a:lvl1pPr>
+            <a:lvl2pPr lvl="1" marR="0" rtl="0" algn="l">
+              <a:spcBef>
+                <a:spcPts val="0"/>
+              </a:spcBef>
+              <a:spcAft>
+                <a:spcPts val="0"/>
+              </a:spcAft>
+              <a:buSzPts val="1400"/>
+              <a:buNone/>
+              <a:defRPr b="0" i="0" sz="1800" u="none" cap="none" strike="noStrike">
+                <a:solidFill>
+                  <a:schemeClr val="dk1"/>
+                </a:solidFill>
+                <a:latin typeface="Arial"/>
+                <a:ea typeface="Arial"/>
+                <a:cs typeface="Arial"/>
+                <a:sym typeface="Arial"/>
+              </a:defRPr>
+            </a:lvl2pPr>
+            <a:lvl3pPr lvl="2" marR="0" rtl="0" algn="l">
+              <a:spcBef>
+                <a:spcPts val="0"/>
+              </a:spcBef>
+              <a:spcAft>
+                <a:spcPts val="0"/>
+              </a:spcAft>
+              <a:buSzPts val="1400"/>
+              <a:buNone/>
+              <a:defRPr b="0" i="0" sz="1800" u="none" cap="none" strike="noStrike">
+                <a:solidFill>
+                  <a:schemeClr val="dk1"/>
+                </a:solidFill>
+                <a:latin typeface="Arial"/>
+                <a:ea typeface="Arial"/>
+                <a:cs typeface="Arial"/>
+                <a:sym typeface="Arial"/>
+              </a:defRPr>
+            </a:lvl3pPr>
+            <a:lvl4pPr lvl="3" marR="0" rtl="0" algn="l">
+              <a:spcBef>
+                <a:spcPts val="0"/>
+              </a:spcBef>
+              <a:spcAft>
+                <a:spcPts val="0"/>
+              </a:spcAft>
+              <a:buSzPts val="1400"/>
+              <a:buNone/>
+              <a:defRPr b="0" i="0" sz="1800" u="none" cap="none" strike="noStrike">
+                <a:solidFill>
+                  <a:schemeClr val="dk1"/>
+                </a:solidFill>
+                <a:latin typeface="Arial"/>
+                <a:ea typeface="Arial"/>
+                <a:cs typeface="Arial"/>
+                <a:sym typeface="Arial"/>
+              </a:defRPr>
+            </a:lvl4pPr>
+            <a:lvl5pPr lvl="4" marR="0" rtl="0" algn="l">
+              <a:spcBef>
+                <a:spcPts val="0"/>
+              </a:spcBef>
+              <a:spcAft>
+                <a:spcPts val="0"/>
+              </a:spcAft>
+              <a:buSzPts val="1400"/>
+              <a:buNone/>
+              <a:defRPr b="0" i="0" sz="1800" u="none" cap="none" strike="noStrike">
+                <a:solidFill>
+                  <a:schemeClr val="dk1"/>
+                </a:solidFill>
+                <a:latin typeface="Arial"/>
+                <a:ea typeface="Arial"/>
+                <a:cs typeface="Arial"/>
+                <a:sym typeface="Arial"/>
+              </a:defRPr>
+            </a:lvl5pPr>
+            <a:lvl6pPr lvl="5" marR="0" rtl="0" algn="l">
+              <a:spcBef>
+                <a:spcPts val="0"/>
+              </a:spcBef>
+              <a:spcAft>
+                <a:spcPts val="0"/>
+              </a:spcAft>
+              <a:buSzPts val="1400"/>
+              <a:buNone/>
+              <a:defRPr b="0" i="0" sz="1800" u="none" cap="none" strike="noStrike">
+                <a:solidFill>
+                  <a:schemeClr val="dk1"/>
+                </a:solidFill>
+                <a:latin typeface="Arial"/>
+                <a:ea typeface="Arial"/>
+                <a:cs typeface="Arial"/>
+                <a:sym typeface="Arial"/>
+              </a:defRPr>
+            </a:lvl6pPr>
+            <a:lvl7pPr lvl="6" marR="0" rtl="0" algn="l">
+              <a:spcBef>
+                <a:spcPts val="0"/>
+              </a:spcBef>
+              <a:spcAft>
+                <a:spcPts val="0"/>
+              </a:spcAft>
+              <a:buSzPts val="1400"/>
+              <a:buNone/>
+              <a:defRPr b="0" i="0" sz="1800" u="none" cap="none" strike="noStrike">
+                <a:solidFill>
+                  <a:schemeClr val="dk1"/>
+                </a:solidFill>
+                <a:latin typeface="Arial"/>
+                <a:ea typeface="Arial"/>
+                <a:cs typeface="Arial"/>
+                <a:sym typeface="Arial"/>
+              </a:defRPr>
+            </a:lvl7pPr>
+            <a:lvl8pPr lvl="7" marR="0" rtl="0" algn="l">
+              <a:spcBef>
+                <a:spcPts val="0"/>
+              </a:spcBef>
+              <a:spcAft>
+                <a:spcPts val="0"/>
+              </a:spcAft>
+              <a:buSzPts val="1400"/>
+              <a:buNone/>
+              <a:defRPr b="0" i="0" sz="1800" u="none" cap="none" strike="noStrike">
+                <a:solidFill>
+                  <a:schemeClr val="dk1"/>
+                </a:solidFill>
+                <a:latin typeface="Arial"/>
+                <a:ea typeface="Arial"/>
+                <a:cs typeface="Arial"/>
+                <a:sym typeface="Arial"/>
+              </a:defRPr>
+            </a:lvl8pPr>
+            <a:lvl9pPr lvl="8" marR="0" rtl="0" algn="l">
+              <a:spcBef>
+                <a:spcPts val="0"/>
+              </a:spcBef>
+              <a:spcAft>
+                <a:spcPts val="0"/>
+              </a:spcAft>
+              <a:buSzPts val="1400"/>
+              <a:buNone/>
+              <a:defRPr b="0" i="0" sz="1800" u="none" cap="none" strike="noStrike">
+                <a:solidFill>
+                  <a:schemeClr val="dk1"/>
+                </a:solidFill>
+                <a:latin typeface="Arial"/>
+                <a:ea typeface="Arial"/>
+                <a:cs typeface="Arial"/>
+                <a:sym typeface="Arial"/>
+              </a:defRPr>
+            </a:lvl9pPr>
+          </a:lstStyle>
+          <a:p/>
+        </p:txBody>
+      </p:sp>
+      <p:sp>
+        <p:nvSpPr>
+          <p:cNvPr id="97" name="Google Shape;97;p11"/>
+          <p:cNvSpPr txBox="1"/>
+          <p:nvPr>
+            <p:ph idx="2" type="body"/>
+          </p:nvPr>
+        </p:nvSpPr>
+        <p:spPr>
+          <a:xfrm>
+            <a:off x="6097339" y="3864033"/>
+            <a:ext cx="5417327" cy="1080000"/>
+          </a:xfrm>
+          <a:prstGeom prst="rect">
+            <a:avLst/>
+          </a:prstGeom>
+          <a:noFill/>
+          <a:ln>
+            <a:noFill/>
+          </a:ln>
+        </p:spPr>
+        <p:txBody>
+          <a:bodyPr anchorCtr="0" anchor="b" bIns="0" lIns="0" spcFirstLastPara="1" rIns="0" wrap="square" tIns="0">
+            <a:noAutofit/>
+          </a:bodyPr>
+          <a:lstStyle>
+            <a:lvl1pPr indent="-228600" lvl="0" marL="457200" algn="l">
+              <a:lnSpc>
+                <a:spcPct val="100000"/>
+              </a:lnSpc>
+              <a:spcBef>
+                <a:spcPts val="1000"/>
+              </a:spcBef>
+              <a:spcAft>
+                <a:spcPts val="0"/>
+              </a:spcAft>
+              <a:buClr>
+                <a:schemeClr val="dk1"/>
+              </a:buClr>
+              <a:buSzPts val="8800"/>
+              <a:buNone/>
+              <a:defRPr b="1" i="0" sz="8800">
+                <a:solidFill>
+                  <a:schemeClr val="dk1"/>
+                </a:solidFill>
+                <a:latin typeface="Play"/>
+                <a:ea typeface="Play"/>
+                <a:cs typeface="Play"/>
+                <a:sym typeface="Play"/>
+              </a:defRPr>
+            </a:lvl1pPr>
+            <a:lvl2pPr indent="-342900" lvl="1" marL="914400" algn="l">
+              <a:lnSpc>
+                <a:spcPct val="110000"/>
+              </a:lnSpc>
+              <a:spcBef>
+                <a:spcPts val="500"/>
+              </a:spcBef>
+              <a:spcAft>
+                <a:spcPts val="0"/>
+              </a:spcAft>
+              <a:buSzPts val="1800"/>
+              <a:buChar char="•"/>
+              <a:defRPr/>
+            </a:lvl2pPr>
+            <a:lvl3pPr indent="-342900" lvl="2" marL="1371600" algn="l">
+              <a:lnSpc>
+                <a:spcPct val="110000"/>
+              </a:lnSpc>
+              <a:spcBef>
+                <a:spcPts val="500"/>
+              </a:spcBef>
+              <a:spcAft>
+                <a:spcPts val="0"/>
+              </a:spcAft>
+              <a:buClr>
+                <a:schemeClr val="dk1"/>
+              </a:buClr>
+              <a:buSzPts val="1800"/>
+              <a:buChar char="−"/>
+              <a:defRPr/>
+            </a:lvl3pPr>
+            <a:lvl4pPr indent="-342900" lvl="3" marL="1828800" algn="l">
+              <a:lnSpc>
+                <a:spcPct val="90000"/>
+              </a:lnSpc>
+              <a:spcBef>
+                <a:spcPts val="500"/>
+              </a:spcBef>
+              <a:spcAft>
+                <a:spcPts val="0"/>
+              </a:spcAft>
+              <a:buClr>
+                <a:schemeClr val="dk1"/>
+              </a:buClr>
+              <a:buSzPts val="1800"/>
+              <a:buChar char="•"/>
+              <a:defRPr/>
+            </a:lvl4pPr>
+            <a:lvl5pPr indent="-342900" lvl="4" marL="2286000" algn="l">
+              <a:lnSpc>
+                <a:spcPct val="90000"/>
+              </a:lnSpc>
+              <a:spcBef>
+                <a:spcPts val="500"/>
+              </a:spcBef>
+              <a:spcAft>
+                <a:spcPts val="0"/>
+              </a:spcAft>
+              <a:buClr>
+                <a:schemeClr val="dk1"/>
+              </a:buClr>
+              <a:buSzPts val="1800"/>
+              <a:buChar char="•"/>
+              <a:defRPr/>
+            </a:lvl5pPr>
+            <a:lvl6pPr indent="-342900" lvl="5" marL="2743200" algn="l">
+              <a:lnSpc>
+                <a:spcPct val="90000"/>
+              </a:lnSpc>
+              <a:spcBef>
+                <a:spcPts val="500"/>
+              </a:spcBef>
+              <a:spcAft>
+                <a:spcPts val="0"/>
+              </a:spcAft>
+              <a:buClr>
+                <a:schemeClr val="dk1"/>
+              </a:buClr>
+              <a:buSzPts val="1800"/>
+              <a:buChar char="•"/>
+              <a:defRPr/>
+            </a:lvl6pPr>
+            <a:lvl7pPr indent="-342900" lvl="6" marL="3200400" algn="l">
+              <a:lnSpc>
+                <a:spcPct val="90000"/>
+              </a:lnSpc>
+              <a:spcBef>
+                <a:spcPts val="500"/>
+              </a:spcBef>
+              <a:spcAft>
+                <a:spcPts val="0"/>
+              </a:spcAft>
+              <a:buClr>
+                <a:schemeClr val="dk1"/>
+              </a:buClr>
+              <a:buSzPts val="1800"/>
+              <a:buChar char="•"/>
+              <a:defRPr/>
+            </a:lvl7pPr>
+            <a:lvl8pPr indent="-342900" lvl="7" marL="3657600" algn="l">
+              <a:lnSpc>
+                <a:spcPct val="90000"/>
+              </a:lnSpc>
+              <a:spcBef>
+                <a:spcPts val="500"/>
+              </a:spcBef>
+              <a:spcAft>
+                <a:spcPts val="0"/>
+              </a:spcAft>
+              <a:buClr>
+                <a:schemeClr val="dk1"/>
+              </a:buClr>
+              <a:buSzPts val="1800"/>
+              <a:buChar char="•"/>
+              <a:defRPr/>
+            </a:lvl8pPr>
+            <a:lvl9pPr indent="-342900" lvl="8" marL="4114800" algn="l">
+              <a:lnSpc>
+                <a:spcPct val="90000"/>
+              </a:lnSpc>
+              <a:spcBef>
+                <a:spcPts val="500"/>
+              </a:spcBef>
+              <a:spcAft>
+                <a:spcPts val="0"/>
+              </a:spcAft>
+              <a:buClr>
+                <a:schemeClr val="dk1"/>
+              </a:buClr>
+              <a:buSzPts val="1800"/>
+              <a:buChar char="•"/>
+              <a:defRPr/>
+            </a:lvl9pPr>
+          </a:lstStyle>
+          <a:p/>
+        </p:txBody>
+      </p:sp>
+      <p:sp>
+        <p:nvSpPr>
+          <p:cNvPr id="98" name="Google Shape;98;p11"/>
+          <p:cNvSpPr txBox="1"/>
+          <p:nvPr>
+            <p:ph idx="3" type="body"/>
+          </p:nvPr>
+        </p:nvSpPr>
+        <p:spPr>
+          <a:xfrm>
+            <a:off x="6097338" y="5058095"/>
+            <a:ext cx="5417327" cy="356617"/>
+          </a:xfrm>
+          <a:prstGeom prst="rect">
+            <a:avLst/>
+          </a:prstGeom>
+          <a:noFill/>
+          <a:ln>
+            <a:noFill/>
+          </a:ln>
+        </p:spPr>
+        <p:txBody>
+          <a:bodyPr anchorCtr="0" anchor="t" bIns="0" lIns="0" spcFirstLastPara="1" rIns="0" wrap="square" tIns="0">
+            <a:normAutofit/>
+          </a:bodyPr>
+          <a:lstStyle>
+            <a:lvl1pPr indent="-228600" lvl="0" marL="457200" algn="l">
+              <a:lnSpc>
+                <a:spcPct val="110000"/>
+              </a:lnSpc>
+              <a:spcBef>
+                <a:spcPts val="1000"/>
+              </a:spcBef>
+              <a:spcAft>
+                <a:spcPts val="0"/>
+              </a:spcAft>
+              <a:buClr>
+                <a:schemeClr val="dk1"/>
+              </a:buClr>
+              <a:buSzPts val="1800"/>
+              <a:buNone/>
+              <a:defRPr sz="1800"/>
+            </a:lvl1pPr>
+            <a:lvl2pPr indent="-342900" lvl="1" marL="914400" algn="l">
+              <a:lnSpc>
+                <a:spcPct val="110000"/>
+              </a:lnSpc>
+              <a:spcBef>
+                <a:spcPts val="500"/>
+              </a:spcBef>
+              <a:spcAft>
+                <a:spcPts val="0"/>
+              </a:spcAft>
+              <a:buSzPts val="1800"/>
+              <a:buChar char="•"/>
+              <a:defRPr/>
+            </a:lvl2pPr>
+            <a:lvl3pPr indent="-342900" lvl="2" marL="1371600" algn="l">
+              <a:lnSpc>
+                <a:spcPct val="110000"/>
+              </a:lnSpc>
+              <a:spcBef>
+                <a:spcPts val="500"/>
+              </a:spcBef>
+              <a:spcAft>
+                <a:spcPts val="0"/>
+              </a:spcAft>
+              <a:buClr>
+                <a:schemeClr val="dk1"/>
+              </a:buClr>
+              <a:buSzPts val="1800"/>
+              <a:buChar char="−"/>
+              <a:defRPr/>
+            </a:lvl3pPr>
+            <a:lvl4pPr indent="-342900" lvl="3" marL="1828800" algn="l">
+              <a:lnSpc>
+                <a:spcPct val="90000"/>
+              </a:lnSpc>
+              <a:spcBef>
+                <a:spcPts val="500"/>
+              </a:spcBef>
+              <a:spcAft>
+                <a:spcPts val="0"/>
+              </a:spcAft>
+              <a:buClr>
+                <a:schemeClr val="dk1"/>
+              </a:buClr>
+              <a:buSzPts val="1800"/>
+              <a:buChar char="•"/>
+              <a:defRPr/>
+            </a:lvl4pPr>
+            <a:lvl5pPr indent="-342900" lvl="4" marL="2286000" algn="l">
+              <a:lnSpc>
+                <a:spcPct val="90000"/>
+              </a:lnSpc>
+              <a:spcBef>
+                <a:spcPts val="500"/>
+              </a:spcBef>
+              <a:spcAft>
+                <a:spcPts val="0"/>
+              </a:spcAft>
+              <a:buClr>
+                <a:schemeClr val="dk1"/>
+              </a:buClr>
+              <a:buSzPts val="1800"/>
+              <a:buChar char="•"/>
+              <a:defRPr/>
+            </a:lvl5pPr>
+            <a:lvl6pPr indent="-342900" lvl="5" marL="2743200" algn="l">
+              <a:lnSpc>
+                <a:spcPct val="90000"/>
+              </a:lnSpc>
+              <a:spcBef>
+                <a:spcPts val="500"/>
+              </a:spcBef>
+              <a:spcAft>
+                <a:spcPts val="0"/>
+              </a:spcAft>
+              <a:buClr>
+                <a:schemeClr val="dk1"/>
+              </a:buClr>
+              <a:buSzPts val="1800"/>
+              <a:buChar char="•"/>
+              <a:defRPr/>
+            </a:lvl6pPr>
+            <a:lvl7pPr indent="-342900" lvl="6" marL="3200400" algn="l">
+              <a:lnSpc>
+                <a:spcPct val="90000"/>
+              </a:lnSpc>
+              <a:spcBef>
+                <a:spcPts val="500"/>
+              </a:spcBef>
+              <a:spcAft>
+                <a:spcPts val="0"/>
+              </a:spcAft>
+              <a:buClr>
+                <a:schemeClr val="dk1"/>
+              </a:buClr>
+              <a:buSzPts val="1800"/>
+              <a:buChar char="•"/>
+              <a:defRPr/>
+            </a:lvl7pPr>
+            <a:lvl8pPr indent="-342900" lvl="7" marL="3657600" algn="l">
+              <a:lnSpc>
+                <a:spcPct val="90000"/>
+              </a:lnSpc>
+              <a:spcBef>
+                <a:spcPts val="500"/>
+              </a:spcBef>
+              <a:spcAft>
+                <a:spcPts val="0"/>
+              </a:spcAft>
+              <a:buClr>
+                <a:schemeClr val="dk1"/>
+              </a:buClr>
+              <a:buSzPts val="1800"/>
+              <a:buChar char="•"/>
+              <a:defRPr/>
+            </a:lvl8pPr>
+            <a:lvl9pPr indent="-342900" lvl="8" marL="4114800" algn="l">
+              <a:lnSpc>
+                <a:spcPct val="90000"/>
+              </a:lnSpc>
+              <a:spcBef>
+                <a:spcPts val="500"/>
+              </a:spcBef>
+              <a:spcAft>
+                <a:spcPts val="0"/>
+              </a:spcAft>
+              <a:buClr>
+                <a:schemeClr val="dk1"/>
+              </a:buClr>
+              <a:buSzPts val="1800"/>
+              <a:buChar char="•"/>
+              <a:defRPr/>
+            </a:lvl9pPr>
+          </a:lstStyle>
+          <a:p/>
+        </p:txBody>
+      </p:sp>
+      <p:sp>
+        <p:nvSpPr>
+          <p:cNvPr id="99" name="Google Shape;99;p11"/>
+          <p:cNvSpPr txBox="1"/>
+          <p:nvPr>
+            <p:ph idx="4" type="body"/>
+          </p:nvPr>
+        </p:nvSpPr>
+        <p:spPr>
+          <a:xfrm>
+            <a:off x="6096000" y="1773238"/>
+            <a:ext cx="5417327" cy="1080000"/>
+          </a:xfrm>
+          <a:prstGeom prst="rect">
+            <a:avLst/>
+          </a:prstGeom>
+          <a:noFill/>
+          <a:ln>
+            <a:noFill/>
+          </a:ln>
+        </p:spPr>
+        <p:txBody>
+          <a:bodyPr anchorCtr="0" anchor="b" bIns="0" lIns="0" spcFirstLastPara="1" rIns="0" wrap="square" tIns="0">
+            <a:noAutofit/>
+          </a:bodyPr>
+          <a:lstStyle>
+            <a:lvl1pPr indent="-228600" lvl="0" marL="457200" algn="l">
+              <a:lnSpc>
+                <a:spcPct val="100000"/>
+              </a:lnSpc>
+              <a:spcBef>
+                <a:spcPts val="1000"/>
+              </a:spcBef>
+              <a:spcAft>
+                <a:spcPts val="0"/>
+              </a:spcAft>
+              <a:buClr>
+                <a:schemeClr val="dk1"/>
+              </a:buClr>
+              <a:buSzPts val="8800"/>
+              <a:buNone/>
+              <a:defRPr b="1" i="0" sz="8800">
+                <a:solidFill>
+                  <a:schemeClr val="dk1"/>
+                </a:solidFill>
+                <a:latin typeface="Play"/>
+                <a:ea typeface="Play"/>
+                <a:cs typeface="Play"/>
+                <a:sym typeface="Play"/>
+              </a:defRPr>
+            </a:lvl1pPr>
+            <a:lvl2pPr indent="-342900" lvl="1" marL="914400" algn="l">
+              <a:lnSpc>
+                <a:spcPct val="110000"/>
+              </a:lnSpc>
+              <a:spcBef>
+                <a:spcPts val="500"/>
+              </a:spcBef>
+              <a:spcAft>
+                <a:spcPts val="0"/>
+              </a:spcAft>
+              <a:buSzPts val="1800"/>
+              <a:buChar char="•"/>
+              <a:defRPr/>
+            </a:lvl2pPr>
+            <a:lvl3pPr indent="-342900" lvl="2" marL="1371600" algn="l">
+              <a:lnSpc>
+                <a:spcPct val="110000"/>
+              </a:lnSpc>
+              <a:spcBef>
+                <a:spcPts val="500"/>
+              </a:spcBef>
+              <a:spcAft>
+                <a:spcPts val="0"/>
+              </a:spcAft>
+              <a:buClr>
+                <a:schemeClr val="dk1"/>
+              </a:buClr>
+              <a:buSzPts val="1800"/>
+              <a:buChar char="−"/>
+              <a:defRPr/>
+            </a:lvl3pPr>
+            <a:lvl4pPr indent="-342900" lvl="3" marL="1828800" algn="l">
+              <a:lnSpc>
+                <a:spcPct val="90000"/>
+              </a:lnSpc>
+              <a:spcBef>
+                <a:spcPts val="500"/>
+              </a:spcBef>
+              <a:spcAft>
+                <a:spcPts val="0"/>
+              </a:spcAft>
+              <a:buClr>
+                <a:schemeClr val="dk1"/>
+              </a:buClr>
+              <a:buSzPts val="1800"/>
+              <a:buChar char="•"/>
+              <a:defRPr/>
+            </a:lvl4pPr>
+            <a:lvl5pPr indent="-342900" lvl="4" marL="2286000" algn="l">
+              <a:lnSpc>
+                <a:spcPct val="90000"/>
+              </a:lnSpc>
+              <a:spcBef>
+                <a:spcPts val="500"/>
+              </a:spcBef>
+              <a:spcAft>
+                <a:spcPts val="0"/>
+              </a:spcAft>
+              <a:buClr>
+                <a:schemeClr val="dk1"/>
+              </a:buClr>
+              <a:buSzPts val="1800"/>
+              <a:buChar char="•"/>
+              <a:defRPr/>
+            </a:lvl5pPr>
+            <a:lvl6pPr indent="-342900" lvl="5" marL="2743200" algn="l">
+              <a:lnSpc>
+                <a:spcPct val="90000"/>
+              </a:lnSpc>
+              <a:spcBef>
+                <a:spcPts val="500"/>
+              </a:spcBef>
+              <a:spcAft>
+                <a:spcPts val="0"/>
+              </a:spcAft>
+              <a:buClr>
+                <a:schemeClr val="dk1"/>
+              </a:buClr>
+              <a:buSzPts val="1800"/>
+              <a:buChar char="•"/>
+              <a:defRPr/>
+            </a:lvl6pPr>
+            <a:lvl7pPr indent="-342900" lvl="6" marL="3200400" algn="l">
+              <a:lnSpc>
+                <a:spcPct val="90000"/>
+              </a:lnSpc>
+              <a:spcBef>
+                <a:spcPts val="500"/>
+              </a:spcBef>
+              <a:spcAft>
+                <a:spcPts val="0"/>
+              </a:spcAft>
+              <a:buClr>
+                <a:schemeClr val="dk1"/>
+              </a:buClr>
+              <a:buSzPts val="1800"/>
+              <a:buChar char="•"/>
+              <a:defRPr/>
+            </a:lvl7pPr>
+            <a:lvl8pPr indent="-342900" lvl="7" marL="3657600" algn="l">
+              <a:lnSpc>
+                <a:spcPct val="90000"/>
+              </a:lnSpc>
+              <a:spcBef>
+                <a:spcPts val="500"/>
+              </a:spcBef>
+              <a:spcAft>
+                <a:spcPts val="0"/>
+              </a:spcAft>
+              <a:buClr>
+                <a:schemeClr val="dk1"/>
+              </a:buClr>
+              <a:buSzPts val="1800"/>
+              <a:buChar char="•"/>
+              <a:defRPr/>
+            </a:lvl8pPr>
+            <a:lvl9pPr indent="-342900" lvl="8" marL="4114800" algn="l">
+              <a:lnSpc>
+                <a:spcPct val="90000"/>
+              </a:lnSpc>
+              <a:spcBef>
+                <a:spcPts val="500"/>
+              </a:spcBef>
+              <a:spcAft>
+                <a:spcPts val="0"/>
+              </a:spcAft>
+              <a:buClr>
+                <a:schemeClr val="dk1"/>
+              </a:buClr>
+              <a:buSzPts val="1800"/>
+              <a:buChar char="•"/>
+              <a:defRPr/>
+            </a:lvl9pPr>
+          </a:lstStyle>
+          <a:p/>
+        </p:txBody>
+      </p:sp>
+      <p:sp>
+        <p:nvSpPr>
+          <p:cNvPr id="100" name="Google Shape;100;p11"/>
+          <p:cNvSpPr txBox="1"/>
+          <p:nvPr>
+            <p:ph idx="5" type="body"/>
+          </p:nvPr>
+        </p:nvSpPr>
+        <p:spPr>
+          <a:xfrm>
+            <a:off x="6096000" y="2967300"/>
+            <a:ext cx="5417327" cy="356617"/>
+          </a:xfrm>
+          <a:prstGeom prst="rect">
+            <a:avLst/>
+          </a:prstGeom>
+          <a:noFill/>
+          <a:ln>
+            <a:noFill/>
+          </a:ln>
+        </p:spPr>
+        <p:txBody>
+          <a:bodyPr anchorCtr="0" anchor="t" bIns="0" lIns="0" spcFirstLastPara="1" rIns="0" wrap="square" tIns="0">
+            <a:normAutofit/>
+          </a:bodyPr>
+          <a:lstStyle>
+            <a:lvl1pPr indent="-228600" lvl="0" marL="457200" algn="l">
+              <a:lnSpc>
+                <a:spcPct val="110000"/>
+              </a:lnSpc>
+              <a:spcBef>
+                <a:spcPts val="1000"/>
+              </a:spcBef>
+              <a:spcAft>
+                <a:spcPts val="0"/>
+              </a:spcAft>
+              <a:buClr>
+                <a:schemeClr val="dk1"/>
+              </a:buClr>
+              <a:buSzPts val="1800"/>
+              <a:buNone/>
+              <a:defRPr sz="1800"/>
+            </a:lvl1pPr>
+            <a:lvl2pPr indent="-342900" lvl="1" marL="914400" algn="l">
+              <a:lnSpc>
+                <a:spcPct val="110000"/>
+              </a:lnSpc>
+              <a:spcBef>
+                <a:spcPts val="500"/>
+              </a:spcBef>
+              <a:spcAft>
+                <a:spcPts val="0"/>
+              </a:spcAft>
+              <a:buSzPts val="1800"/>
+              <a:buChar char="•"/>
+              <a:defRPr/>
+            </a:lvl2pPr>
+            <a:lvl3pPr indent="-342900" lvl="2" marL="1371600" algn="l">
+              <a:lnSpc>
+                <a:spcPct val="110000"/>
+              </a:lnSpc>
+              <a:spcBef>
+                <a:spcPts val="500"/>
+              </a:spcBef>
+              <a:spcAft>
+                <a:spcPts val="0"/>
+              </a:spcAft>
+              <a:buClr>
+                <a:schemeClr val="dk1"/>
+              </a:buClr>
+              <a:buSzPts val="1800"/>
+              <a:buChar char="−"/>
+              <a:defRPr/>
+            </a:lvl3pPr>
+            <a:lvl4pPr indent="-342900" lvl="3" marL="1828800" algn="l">
+              <a:lnSpc>
+                <a:spcPct val="90000"/>
+              </a:lnSpc>
+              <a:spcBef>
+                <a:spcPts val="500"/>
+              </a:spcBef>
+              <a:spcAft>
+                <a:spcPts val="0"/>
+              </a:spcAft>
+              <a:buClr>
+                <a:schemeClr val="dk1"/>
+              </a:buClr>
+              <a:buSzPts val="1800"/>
+              <a:buChar char="•"/>
+              <a:defRPr/>
+            </a:lvl4pPr>
+            <a:lvl5pPr indent="-342900" lvl="4" marL="2286000" algn="l">
+              <a:lnSpc>
+                <a:spcPct val="90000"/>
+              </a:lnSpc>
+              <a:spcBef>
+                <a:spcPts val="500"/>
+              </a:spcBef>
+              <a:spcAft>
+                <a:spcPts val="0"/>
+              </a:spcAft>
+              <a:buClr>
+                <a:schemeClr val="dk1"/>
+              </a:buClr>
+              <a:buSzPts val="1800"/>
+              <a:buChar char="•"/>
+              <a:defRPr/>
+            </a:lvl5pPr>
+            <a:lvl6pPr indent="-342900" lvl="5" marL="2743200" algn="l">
+              <a:lnSpc>
+                <a:spcPct val="90000"/>
+              </a:lnSpc>
+              <a:spcBef>
+                <a:spcPts val="500"/>
+              </a:spcBef>
+              <a:spcAft>
+                <a:spcPts val="0"/>
+              </a:spcAft>
+              <a:buClr>
+                <a:schemeClr val="dk1"/>
+              </a:buClr>
+              <a:buSzPts val="1800"/>
+              <a:buChar char="•"/>
+              <a:defRPr/>
+            </a:lvl6pPr>
+            <a:lvl7pPr indent="-342900" lvl="6" marL="3200400" algn="l">
+              <a:lnSpc>
+                <a:spcPct val="90000"/>
+              </a:lnSpc>
+              <a:spcBef>
+                <a:spcPts val="500"/>
+              </a:spcBef>
+              <a:spcAft>
+                <a:spcPts val="0"/>
+              </a:spcAft>
+              <a:buClr>
+                <a:schemeClr val="dk1"/>
+              </a:buClr>
+              <a:buSzPts val="1800"/>
+              <a:buChar char="•"/>
+              <a:defRPr/>
+            </a:lvl7pPr>
+            <a:lvl8pPr indent="-342900" lvl="7" marL="3657600" algn="l">
+              <a:lnSpc>
+                <a:spcPct val="90000"/>
+              </a:lnSpc>
+              <a:spcBef>
+                <a:spcPts val="500"/>
+              </a:spcBef>
+              <a:spcAft>
+                <a:spcPts val="0"/>
+              </a:spcAft>
+              <a:buClr>
+                <a:schemeClr val="dk1"/>
+              </a:buClr>
+              <a:buSzPts val="1800"/>
+              <a:buChar char="•"/>
+              <a:defRPr/>
+            </a:lvl8pPr>
+            <a:lvl9pPr indent="-342900" lvl="8" marL="4114800" algn="l">
+              <a:lnSpc>
+                <a:spcPct val="90000"/>
+              </a:lnSpc>
+              <a:spcBef>
+                <a:spcPts val="500"/>
+              </a:spcBef>
+              <a:spcAft>
+                <a:spcPts val="0"/>
+              </a:spcAft>
+              <a:buClr>
+                <a:schemeClr val="dk1"/>
+              </a:buClr>
+              <a:buSzPts val="1800"/>
+              <a:buChar char="•"/>
+              <a:defRPr/>
+            </a:lvl9pPr>
+          </a:lstStyle>
+          <a:p/>
+        </p:txBody>
+      </p:sp>
+    </p:spTree>
+  </p:cSld>
+  <p:clrMapOvr>
+    <a:masterClrMapping/>
+  </p:clrMapOvr>
+</p:sldLayout>
+</file>
+
 <file path=ppt/slideLayouts/slideLayout12.xml><?xml version="1.0" encoding="utf-8"?>
 <p:sldLayout xmlns:a="http://schemas.openxmlformats.org/drawingml/2006/main" xmlns:r="http://schemas.openxmlformats.org/officeDocument/2006/relationships" xmlns:mc="http://schemas.openxmlformats.org/markup-compatibility/2006" xmlns:mv="urn:schemas-microsoft-com:mac:vml" xmlns:p="http://schemas.openxmlformats.org/presentationml/2006/main" xmlns:c="http://schemas.openxmlformats.org/drawingml/2006/chart" xmlns:dgm="http://schemas.openxmlformats.org/drawingml/2006/diagram" xmlns:o="urn:schemas-microsoft-com:office:office" xmlns:v="urn:schemas-microsoft-com:vml" xmlns:pvml="urn:schemas-microsoft-com:office:powerpoint" xmlns:com="http://schemas.openxmlformats.org/drawingml/2006/compatibility" xmlns:p14="http://schemas.microsoft.com/office/powerpoint/2010/main" xmlns:p15="http://schemas.microsoft.com/office/powerpoint/2012/main" xmlns:ahyp="http://schemas.microsoft.com/office/drawing/2018/hyperlinkcolor" matchingName="2_Заголовок + текст в две колонки">
   <p:cSld name="2_Заголовок + текст в две колонки">
@@ -5740,6 +6594,7 @@
   <p:sldLayoutIdLst>
     <p:sldLayoutId id="2147483649" r:id="rId2"/>
     <p:sldLayoutId id="2147483653" r:id="rId6"/>
+    <p:sldLayoutId id="2147483657" r:id="rId10"/>
     <p:sldLayoutId id="2147483659" r:id="rId12"/>
     <p:sldLayoutId id="2147483665" r:id="rId18"/>
   </p:sldLayoutIdLst>
@@ -8674,7 +9529,7 @@
         <p:spPr>
           <a:xfrm>
             <a:off x="622279" y="2598016"/>
-            <a:ext cx="7535387" cy="1661967"/>
+            <a:ext cx="7535387" cy="1686560"/>
           </a:xfrm>
           <a:prstGeom prst="rect">
             <a:avLst/>
@@ -8691,7 +9546,7 @@
               <a:spcAft>
                 <a:spcPts val="300"/>
               </a:spcAft>
-              <a:defRPr sz="4000" b="0">
+              <a:defRPr sz="4800" b="0">
                 <a:solidFill>
                   <a:srgbClr val="000000"/>
                 </a:solidFill>
@@ -8701,7 +9556,7 @@
               </a:defRPr>
             </a:pPr>
             <a:r>
-              <a:rPr sz="4000" b="0">
+              <a:rPr sz="4800" b="0">
                 <a:solidFill>
                   <a:srgbClr val="000000"/>
                 </a:solidFill>
@@ -8709,7 +9564,7 @@
                 <a:ea typeface="Arial"/>
                 <a:cs typeface="Arial"/>
               </a:rPr>
-              <a:t>Защита инициативы: сервис автоматической вёрстки</a:t>
+              <a:t>Автоматическая вёрстка презентаций</a:t>
             </a:r>
           </a:p>
         </p:txBody>
@@ -8741,7 +9596,7 @@
         <p:spPr>
           <a:xfrm>
             <a:off x="677387" y="692177"/>
-            <a:ext cx="10855878" cy="822960"/>
+            <a:ext cx="10855878" cy="1447800"/>
           </a:xfrm>
           <a:prstGeom prst="rect">
             <a:avLst/>
@@ -8776,39 +9631,143 @@
                 <a:ea typeface="Arial"/>
                 <a:cs typeface="Arial"/>
               </a:rPr>
-              <a:t>Контекст и возможность</a:t>
+              <a:t>42 колоды за квартал 2026: 186 минут на сборку</a:t>
             </a:r>
           </a:p>
         </p:txBody>
       </p:sp>
-      <p:graphicFrame>
-        <p:nvGraphicFramePr>
-          <p:cNvPr id="3" name="Chart 2"/>
-          <p:cNvGraphicFramePr>
-            <a:graphicFrameLocks noGrp="1"/>
-          </p:cNvGraphicFramePr>
-          <p:nvPr/>
-        </p:nvGraphicFramePr>
-        <p:xfrm>
-          <a:off x="677387" y="1783080"/>
-          <a:ext cx="10855878" cy="2905147"/>
-        </p:xfrm>
-        <a:graphic>
-          <a:graphicData uri="http://schemas.openxmlformats.org/drawingml/2006/chart">
-            <c:chart xmlns:c="http://schemas.openxmlformats.org/drawingml/2006/chart" r:id="rId2"/>
-          </a:graphicData>
-        </a:graphic>
-      </p:graphicFrame>
       <p:sp>
         <p:nvSpPr>
-          <p:cNvPr id="4" name="body"/>
+          <p:cNvPr id="3" name="stat_0:bar"/>
+          <p:cNvSpPr/>
+          <p:nvPr/>
+        </p:nvSpPr>
+        <p:spPr>
+          <a:xfrm>
+            <a:off x="677387" y="2489735"/>
+            <a:ext cx="50800" cy="1282192"/>
+          </a:xfrm>
+          <a:prstGeom prst="rect">
+            <a:avLst/>
+          </a:prstGeom>
+          <a:solidFill>
+            <a:srgbClr val="0077FF"/>
+          </a:solidFill>
+          <a:ln>
+            <a:noFill/>
+          </a:ln>
+          <a:effectLst/>
+        </p:spPr>
+        <p:style>
+          <a:lnRef idx="1">
+            <a:schemeClr val="accent1"/>
+          </a:lnRef>
+          <a:fillRef idx="3">
+            <a:schemeClr val="accent1"/>
+          </a:fillRef>
+          <a:effectRef idx="2">
+            <a:schemeClr val="accent1"/>
+          </a:effectRef>
+          <a:fontRef idx="minor">
+            <a:schemeClr val="lt1"/>
+          </a:fontRef>
+        </p:style>
+        <p:txBody>
+          <a:bodyPr rtlCol="0" anchor="ctr"/>
+          <a:lstStyle/>
+          <a:p>
+            <a:pPr algn="ctr"/>
+          </a:p>
+        </p:txBody>
+      </p:sp>
+      <p:sp>
+        <p:nvSpPr>
+          <p:cNvPr id="4" name="stat_0"/>
           <p:cNvSpPr txBox="1"/>
           <p:nvPr/>
         </p:nvSpPr>
         <p:spPr>
           <a:xfrm>
-            <a:off x="677387" y="4859677"/>
-            <a:ext cx="10855878" cy="1341120"/>
+            <a:off x="855187" y="2380007"/>
+            <a:ext cx="10678078" cy="1391920"/>
+          </a:xfrm>
+          <a:prstGeom prst="rect">
+            <a:avLst/>
+          </a:prstGeom>
+          <a:noFill/>
+        </p:spPr>
+        <p:txBody>
+          <a:bodyPr wrap="square" lIns="76200" rIns="76200" tIns="0" bIns="0">
+            <a:spAutoFit/>
+          </a:bodyPr>
+          <a:lstStyle/>
+          <a:p>
+            <a:pPr>
+              <a:lnSpc>
+                <a:spcPct val="100000"/>
+              </a:lnSpc>
+              <a:spcAft>
+                <a:spcPts val="200"/>
+              </a:spcAft>
+              <a:defRPr sz="4800" b="1">
+                <a:solidFill>
+                  <a:srgbClr val="0077FF"/>
+                </a:solidFill>
+                <a:latin typeface="Play"/>
+                <a:ea typeface="Play"/>
+                <a:cs typeface="Play"/>
+              </a:defRPr>
+            </a:pPr>
+            <a:r>
+              <a:rPr sz="4800" b="1">
+                <a:solidFill>
+                  <a:srgbClr val="0077FF"/>
+                </a:solidFill>
+                <a:latin typeface="Play"/>
+                <a:ea typeface="Play"/>
+                <a:cs typeface="Play"/>
+              </a:rPr>
+              <a:t>12</a:t>
+            </a:r>
+          </a:p>
+          <a:p>
+            <a:pPr>
+              <a:spcAft>
+                <a:spcPts val="300"/>
+              </a:spcAft>
+              <a:defRPr sz="3200" b="0">
+                <a:solidFill>
+                  <a:srgbClr val="000000"/>
+                </a:solidFill>
+                <a:latin typeface="Play"/>
+                <a:ea typeface="Play"/>
+                <a:cs typeface="Play"/>
+              </a:defRPr>
+            </a:pPr>
+            <a:r>
+              <a:rPr sz="3200" b="0">
+                <a:solidFill>
+                  <a:srgbClr val="000000"/>
+                </a:solidFill>
+                <a:latin typeface="Play"/>
+                <a:ea typeface="Play"/>
+                <a:cs typeface="Play"/>
+              </a:rPr>
+              <a:t>12 слайдов в каждой колоде</a:t>
+            </a:r>
+          </a:p>
+        </p:txBody>
+      </p:sp>
+      <p:sp>
+        <p:nvSpPr>
+          <p:cNvPr id="5" name="body"/>
+          <p:cNvSpPr txBox="1"/>
+          <p:nvPr/>
+        </p:nvSpPr>
+        <p:spPr>
+          <a:xfrm>
+            <a:off x="677387" y="4596066"/>
+            <a:ext cx="10855878" cy="1604731"/>
           </a:xfrm>
           <a:prstGeom prst="rect">
             <a:avLst/>
@@ -8825,7 +9784,7 @@
               <a:spcAft>
                 <a:spcPts val="300"/>
               </a:spcAft>
-              <a:defRPr sz="2400">
+              <a:defRPr sz="2800">
                 <a:solidFill>
                   <a:srgbClr val="000000"/>
                 </a:solidFill>
@@ -8835,7 +9794,7 @@
               </a:defRPr>
             </a:pPr>
             <a:r>
-              <a:rPr sz="2400">
+              <a:rPr sz="2800">
                 <a:solidFill>
                   <a:srgbClr val="000000"/>
                 </a:solidFill>
@@ -8843,7 +9802,7 @@
                 <a:ea typeface="Play"/>
                 <a:cs typeface="Play"/>
               </a:rPr>
-              <a:t>• Сборка одной презентации занимает 186 мин</a:t>
+              <a:t>• 74 минуты на правки</a:t>
             </a:r>
           </a:p>
           <a:p>
@@ -8851,7 +9810,7 @@
               <a:spcAft>
                 <a:spcPts val="300"/>
               </a:spcAft>
-              <a:defRPr sz="2400">
+              <a:defRPr sz="2800">
                 <a:solidFill>
                   <a:srgbClr val="000000"/>
                 </a:solidFill>
@@ -8861,7 +9820,7 @@
               </a:defRPr>
             </a:pPr>
             <a:r>
-              <a:rPr sz="2400">
+              <a:rPr sz="2800">
                 <a:solidFill>
                   <a:srgbClr val="000000"/>
                 </a:solidFill>
@@ -8869,7 +9828,7 @@
                 <a:ea typeface="Play"/>
                 <a:cs typeface="Play"/>
               </a:rPr>
-              <a:t>• 74 мин уходит на правки после ревью</a:t>
+              <a:t>• 19 из 42 нарушили стиль</a:t>
             </a:r>
           </a:p>
           <a:p>
@@ -8877,7 +9836,7 @@
               <a:spcAft>
                 <a:spcPts val="300"/>
               </a:spcAft>
-              <a:defRPr sz="2400">
+              <a:defRPr sz="2800">
                 <a:solidFill>
                   <a:srgbClr val="000000"/>
                 </a:solidFill>
@@ -8887,7 +9846,7 @@
               </a:defRPr>
             </a:pPr>
             <a:r>
-              <a:rPr sz="2400">
+              <a:rPr sz="2800">
                 <a:solidFill>
                   <a:srgbClr val="000000"/>
                 </a:solidFill>
@@ -8895,7 +9854,7 @@
                 <a:ea typeface="Play"/>
                 <a:cs typeface="Play"/>
               </a:rPr>
-              <a:t>• 19 из 42 колод нарушают фирменный стиль</a:t>
+              <a:t>• Сборка 186 минут</a:t>
             </a:r>
           </a:p>
         </p:txBody>
@@ -8909,6 +9868,1325 @@
 </file>
 
 <file path=ppt/slides/slide58.xml><?xml version="1.0" encoding="utf-8"?>
+<p:sld xmlns:a="http://schemas.openxmlformats.org/drawingml/2006/main" xmlns:p="http://schemas.openxmlformats.org/presentationml/2006/main" xmlns:r="http://schemas.openxmlformats.org/officeDocument/2006/relationships">
+  <p:cSld>
+    <p:bg>
+      <p:bgPr>
+        <a:solidFill>
+          <a:schemeClr val="lt2"/>
+        </a:solidFill>
+      </p:bgPr>
+    </p:bg>
+    <p:spTree>
+      <p:nvGrpSpPr>
+        <p:cNvPr id="1" name=""/>
+        <p:cNvGrpSpPr/>
+        <p:nvPr/>
+      </p:nvGrpSpPr>
+      <p:grpSpPr/>
+      <p:sp>
+        <p:nvSpPr>
+          <p:cNvPr id="2" name="title"/>
+          <p:cNvSpPr txBox="1"/>
+          <p:nvPr/>
+        </p:nvSpPr>
+        <p:spPr>
+          <a:xfrm>
+            <a:off x="677387" y="692177"/>
+            <a:ext cx="10855878" cy="1447800"/>
+          </a:xfrm>
+          <a:prstGeom prst="rect">
+            <a:avLst/>
+          </a:prstGeom>
+          <a:noFill/>
+        </p:spPr>
+        <p:txBody>
+          <a:bodyPr wrap="square" lIns="76200" rIns="76200" tIns="50800" bIns="50800">
+            <a:spAutoFit/>
+          </a:bodyPr>
+          <a:lstStyle/>
+          <a:p>
+            <a:pPr algn="l">
+              <a:spcAft>
+                <a:spcPts val="300"/>
+              </a:spcAft>
+              <a:defRPr sz="4000">
+                <a:solidFill>
+                  <a:srgbClr val="000000"/>
+                </a:solidFill>
+                <a:latin typeface="Arial"/>
+                <a:ea typeface="Arial"/>
+                <a:cs typeface="Arial"/>
+              </a:defRPr>
+            </a:pPr>
+            <a:r>
+              <a:rPr sz="4000">
+                <a:solidFill>
+                  <a:srgbClr val="000000"/>
+                </a:solidFill>
+                <a:latin typeface="Arial"/>
+                <a:ea typeface="Arial"/>
+                <a:cs typeface="Arial"/>
+              </a:rPr>
+              <a:t>Дизайн-отдел из 4 человек обслуживает 11 запросов в неделю</a:t>
+            </a:r>
+          </a:p>
+        </p:txBody>
+      </p:sp>
+      <p:sp>
+        <p:nvSpPr>
+          <p:cNvPr id="3" name="stat_0:bar"/>
+          <p:cNvSpPr/>
+          <p:nvPr/>
+        </p:nvSpPr>
+        <p:spPr>
+          <a:xfrm>
+            <a:off x="677387" y="2489735"/>
+            <a:ext cx="50800" cy="1150112"/>
+          </a:xfrm>
+          <a:prstGeom prst="rect">
+            <a:avLst/>
+          </a:prstGeom>
+          <a:solidFill>
+            <a:srgbClr val="0077FF"/>
+          </a:solidFill>
+          <a:ln>
+            <a:noFill/>
+          </a:ln>
+          <a:effectLst/>
+        </p:spPr>
+        <p:style>
+          <a:lnRef idx="1">
+            <a:schemeClr val="accent1"/>
+          </a:lnRef>
+          <a:fillRef idx="3">
+            <a:schemeClr val="accent1"/>
+          </a:fillRef>
+          <a:effectRef idx="2">
+            <a:schemeClr val="accent1"/>
+          </a:effectRef>
+          <a:fontRef idx="minor">
+            <a:schemeClr val="lt1"/>
+          </a:fontRef>
+        </p:style>
+        <p:txBody>
+          <a:bodyPr rtlCol="0" anchor="ctr"/>
+          <a:lstStyle/>
+          <a:p>
+            <a:pPr algn="ctr"/>
+          </a:p>
+        </p:txBody>
+      </p:sp>
+      <p:sp>
+        <p:nvSpPr>
+          <p:cNvPr id="4" name="stat_0"/>
+          <p:cNvSpPr txBox="1"/>
+          <p:nvPr/>
+        </p:nvSpPr>
+        <p:spPr>
+          <a:xfrm>
+            <a:off x="855187" y="2380007"/>
+            <a:ext cx="10678078" cy="1259840"/>
+          </a:xfrm>
+          <a:prstGeom prst="rect">
+            <a:avLst/>
+          </a:prstGeom>
+          <a:noFill/>
+        </p:spPr>
+        <p:txBody>
+          <a:bodyPr wrap="square" lIns="76200" rIns="76200" tIns="0" bIns="0">
+            <a:spAutoFit/>
+          </a:bodyPr>
+          <a:lstStyle/>
+          <a:p>
+            <a:pPr>
+              <a:lnSpc>
+                <a:spcPct val="100000"/>
+              </a:lnSpc>
+              <a:spcAft>
+                <a:spcPts val="200"/>
+              </a:spcAft>
+              <a:defRPr sz="4800" b="1">
+                <a:solidFill>
+                  <a:srgbClr val="0077FF"/>
+                </a:solidFill>
+                <a:latin typeface="Play"/>
+                <a:ea typeface="Play"/>
+                <a:cs typeface="Play"/>
+              </a:defRPr>
+            </a:pPr>
+            <a:r>
+              <a:rPr sz="4800" b="1">
+                <a:solidFill>
+                  <a:srgbClr val="0077FF"/>
+                </a:solidFill>
+                <a:latin typeface="Play"/>
+                <a:ea typeface="Play"/>
+                <a:cs typeface="Play"/>
+              </a:rPr>
+              <a:t>11</a:t>
+            </a:r>
+          </a:p>
+          <a:p>
+            <a:pPr>
+              <a:spcAft>
+                <a:spcPts val="300"/>
+              </a:spcAft>
+              <a:defRPr sz="2400" b="0">
+                <a:solidFill>
+                  <a:srgbClr val="000000"/>
+                </a:solidFill>
+                <a:latin typeface="Play"/>
+                <a:ea typeface="Play"/>
+                <a:cs typeface="Play"/>
+              </a:defRPr>
+            </a:pPr>
+            <a:r>
+              <a:rPr sz="2400" b="0">
+                <a:solidFill>
+                  <a:srgbClr val="000000"/>
+                </a:solidFill>
+                <a:latin typeface="Play"/>
+                <a:ea typeface="Play"/>
+                <a:cs typeface="Play"/>
+              </a:rPr>
+              <a:t>4 человека обслуживают 11 запросов в неделю</a:t>
+            </a:r>
+          </a:p>
+        </p:txBody>
+      </p:sp>
+      <p:sp>
+        <p:nvSpPr>
+          <p:cNvPr id="5" name="body"/>
+          <p:cNvSpPr txBox="1"/>
+          <p:nvPr/>
+        </p:nvSpPr>
+        <p:spPr>
+          <a:xfrm>
+            <a:off x="677387" y="4596066"/>
+            <a:ext cx="10855878" cy="1604731"/>
+          </a:xfrm>
+          <a:prstGeom prst="rect">
+            <a:avLst/>
+          </a:prstGeom>
+          <a:noFill/>
+        </p:spPr>
+        <p:txBody>
+          <a:bodyPr wrap="square" lIns="76200" rIns="76200" tIns="50800" bIns="50800">
+            <a:spAutoFit/>
+          </a:bodyPr>
+          <a:lstStyle/>
+          <a:p>
+            <a:pPr algn="l">
+              <a:spcAft>
+                <a:spcPts val="300"/>
+              </a:spcAft>
+              <a:defRPr sz="2400">
+                <a:solidFill>
+                  <a:srgbClr val="000000"/>
+                </a:solidFill>
+                <a:latin typeface="Play"/>
+                <a:ea typeface="Play"/>
+                <a:cs typeface="Play"/>
+              </a:defRPr>
+            </a:pPr>
+            <a:r>
+              <a:rPr sz="2400">
+                <a:solidFill>
+                  <a:srgbClr val="000000"/>
+                </a:solidFill>
+                <a:latin typeface="Play"/>
+                <a:ea typeface="Play"/>
+                <a:cs typeface="Play"/>
+              </a:rPr>
+              <a:t>• 27 поступающих запросов</a:t>
+            </a:r>
+          </a:p>
+          <a:p>
+            <a:pPr algn="l">
+              <a:spcAft>
+                <a:spcPts val="300"/>
+              </a:spcAft>
+              <a:defRPr sz="2400">
+                <a:solidFill>
+                  <a:srgbClr val="000000"/>
+                </a:solidFill>
+                <a:latin typeface="Play"/>
+                <a:ea typeface="Play"/>
+                <a:cs typeface="Play"/>
+              </a:defRPr>
+            </a:pPr>
+            <a:r>
+              <a:rPr sz="2400">
+                <a:solidFill>
+                  <a:srgbClr val="000000"/>
+                </a:solidFill>
+                <a:latin typeface="Play"/>
+                <a:ea typeface="Play"/>
+                <a:cs typeface="Play"/>
+              </a:rPr>
+              <a:t>• Средний срок ожидания 6 дней</a:t>
+            </a:r>
+          </a:p>
+        </p:txBody>
+      </p:sp>
+    </p:spTree>
+  </p:cSld>
+  <p:clrMapOvr>
+    <a:masterClrMapping/>
+  </p:clrMapOvr>
+</p:sld>
+</file>
+
+<file path=ppt/slides/slide59.xml><?xml version="1.0" encoding="utf-8"?>
+<p:sld xmlns:a="http://schemas.openxmlformats.org/drawingml/2006/main" xmlns:p="http://schemas.openxmlformats.org/presentationml/2006/main" xmlns:r="http://schemas.openxmlformats.org/officeDocument/2006/relationships">
+  <p:cSld>
+    <p:spTree>
+      <p:nvGrpSpPr>
+        <p:cNvPr id="1" name=""/>
+        <p:cNvGrpSpPr/>
+        <p:nvPr/>
+      </p:nvGrpSpPr>
+      <p:grpSpPr/>
+      <p:cxnSp>
+        <p:nvCxnSpPr>
+          <p:cNvPr id="918" name="Google Shape;918;p74"/>
+          <p:cNvCxnSpPr/>
+          <p:nvPr/>
+        </p:nvCxnSpPr>
+        <p:spPr>
+          <a:xfrm rot="10800000">
+            <a:off x="658813" y="2199500"/>
+            <a:ext cx="11533187" cy="0"/>
+          </a:xfrm>
+          <a:prstGeom prst="straightConnector1">
+            <a:avLst/>
+          </a:prstGeom>
+          <a:noFill/>
+          <a:ln cap="flat" cmpd="sng" w="19050">
+            <a:solidFill>
+              <a:schemeClr val="accent4"/>
+            </a:solidFill>
+            <a:prstDash val="solid"/>
+            <a:miter lim="8000"/>
+            <a:headEnd len="sm" w="sm" type="none"/>
+            <a:tailEnd len="sm" w="sm" type="none"/>
+          </a:ln>
+        </p:spPr>
+      </p:cxnSp>
+      <p:cxnSp>
+        <p:nvCxnSpPr>
+          <p:cNvPr id="919" name="Google Shape;919;p74"/>
+          <p:cNvCxnSpPr/>
+          <p:nvPr/>
+        </p:nvCxnSpPr>
+        <p:spPr>
+          <a:xfrm flipH="1">
+            <a:off x="1" y="4351265"/>
+            <a:ext cx="8112124" cy="42098"/>
+          </a:xfrm>
+          <a:prstGeom prst="straightConnector1">
+            <a:avLst/>
+          </a:prstGeom>
+          <a:noFill/>
+          <a:ln cap="flat" cmpd="sng" w="19050">
+            <a:solidFill>
+              <a:schemeClr val="accent4"/>
+            </a:solidFill>
+            <a:prstDash val="solid"/>
+            <a:miter lim="8000"/>
+            <a:headEnd len="lg" w="lg" type="stealth"/>
+            <a:tailEnd len="sm" w="sm" type="none"/>
+          </a:ln>
+        </p:spPr>
+      </p:cxnSp>
+      <p:sp>
+        <p:nvSpPr>
+          <p:cNvPr id="920" name="title"/>
+          <p:cNvSpPr txBox="1"/>
+          <p:nvPr/>
+        </p:nvSpPr>
+        <p:spPr>
+          <a:xfrm>
+            <a:off x="677387" y="692177"/>
+            <a:ext cx="10855878" cy="1447800"/>
+          </a:xfrm>
+          <a:prstGeom prst="rect">
+            <a:avLst/>
+          </a:prstGeom>
+          <a:noFill/>
+        </p:spPr>
+        <p:txBody>
+          <a:bodyPr wrap="square" lIns="76200" rIns="76200" tIns="50800" bIns="50800">
+            <a:spAutoFit/>
+          </a:bodyPr>
+          <a:lstStyle/>
+          <a:p>
+            <a:pPr algn="l">
+              <a:spcAft>
+                <a:spcPts val="300"/>
+              </a:spcAft>
+              <a:defRPr sz="4000">
+                <a:solidFill>
+                  <a:srgbClr val="000000"/>
+                </a:solidFill>
+                <a:latin typeface="Arial"/>
+                <a:ea typeface="Arial"/>
+                <a:cs typeface="Arial"/>
+              </a:defRPr>
+            </a:pPr>
+            <a:r>
+              <a:rPr sz="4000">
+                <a:solidFill>
+                  <a:srgbClr val="000000"/>
+                </a:solidFill>
+                <a:latin typeface="Arial"/>
+                <a:ea typeface="Arial"/>
+                <a:cs typeface="Arial"/>
+              </a:rPr>
+              <a:t>Сервис автоматической вёрстки: 4 минуты вместо 186</a:t>
+            </a:r>
+          </a:p>
+        </p:txBody>
+      </p:sp>
+      <p:sp>
+        <p:nvSpPr>
+          <p:cNvPr id="921" name="lead"/>
+          <p:cNvSpPr txBox="1"/>
+          <p:nvPr/>
+        </p:nvSpPr>
+        <p:spPr>
+          <a:xfrm>
+            <a:off x="677387" y="2434452"/>
+            <a:ext cx="10855878" cy="780058"/>
+          </a:xfrm>
+          <a:prstGeom prst="rect">
+            <a:avLst/>
+          </a:prstGeom>
+          <a:noFill/>
+        </p:spPr>
+        <p:txBody>
+          <a:bodyPr wrap="square" lIns="76200" rIns="76200" tIns="50800" bIns="50800">
+            <a:spAutoFit/>
+          </a:bodyPr>
+          <a:lstStyle/>
+          <a:p>
+            <a:pPr algn="l">
+              <a:spcAft>
+                <a:spcPts val="300"/>
+              </a:spcAft>
+              <a:defRPr sz="4000">
+                <a:solidFill>
+                  <a:srgbClr val="000000"/>
+                </a:solidFill>
+                <a:latin typeface="Play"/>
+                <a:ea typeface="Play"/>
+                <a:cs typeface="Play"/>
+              </a:defRPr>
+            </a:pPr>
+            <a:r>
+              <a:rPr sz="4000">
+                <a:solidFill>
+                  <a:srgbClr val="000000"/>
+                </a:solidFill>
+                <a:latin typeface="Play"/>
+                <a:ea typeface="Play"/>
+                <a:cs typeface="Play"/>
+              </a:rPr>
+              <a:t>Принимает шаблон pptx и материалы</a:t>
+            </a:r>
+          </a:p>
+        </p:txBody>
+      </p:sp>
+      <p:sp>
+        <p:nvSpPr>
+          <p:cNvPr id="922" name="body"/>
+          <p:cNvSpPr txBox="1"/>
+          <p:nvPr/>
+        </p:nvSpPr>
+        <p:spPr>
+          <a:xfrm>
+            <a:off x="677387" y="3329520"/>
+            <a:ext cx="10855878" cy="1021743"/>
+          </a:xfrm>
+          <a:prstGeom prst="rect">
+            <a:avLst/>
+          </a:prstGeom>
+          <a:noFill/>
+        </p:spPr>
+        <p:txBody>
+          <a:bodyPr wrap="square" lIns="76200" rIns="76200" tIns="50800" bIns="50800">
+            <a:spAutoFit/>
+          </a:bodyPr>
+          <a:lstStyle/>
+          <a:p>
+            <a:pPr algn="l">
+              <a:spcAft>
+                <a:spcPts val="300"/>
+              </a:spcAft>
+              <a:defRPr sz="1800">
+                <a:solidFill>
+                  <a:srgbClr val="000000"/>
+                </a:solidFill>
+                <a:latin typeface="Play"/>
+                <a:ea typeface="Play"/>
+                <a:cs typeface="Play"/>
+              </a:defRPr>
+            </a:pPr>
+            <a:r>
+              <a:rPr sz="1800">
+                <a:solidFill>
+                  <a:srgbClr val="000000"/>
+                </a:solidFill>
+                <a:latin typeface="Play"/>
+                <a:ea typeface="Play"/>
+                <a:cs typeface="Play"/>
+              </a:rPr>
+              <a:t>• Автоматически строит план колоды</a:t>
+            </a:r>
+          </a:p>
+          <a:p>
+            <a:pPr algn="l">
+              <a:spcAft>
+                <a:spcPts val="300"/>
+              </a:spcAft>
+              <a:defRPr sz="1800">
+                <a:solidFill>
+                  <a:srgbClr val="000000"/>
+                </a:solidFill>
+                <a:latin typeface="Play"/>
+                <a:ea typeface="Play"/>
+                <a:cs typeface="Play"/>
+              </a:defRPr>
+            </a:pPr>
+            <a:r>
+              <a:rPr sz="1800">
+                <a:solidFill>
+                  <a:srgbClr val="000000"/>
+                </a:solidFill>
+                <a:latin typeface="Play"/>
+                <a:ea typeface="Play"/>
+                <a:cs typeface="Play"/>
+              </a:rPr>
+              <a:t>• Встроенный аудит качества</a:t>
+            </a:r>
+          </a:p>
+          <a:p>
+            <a:pPr algn="l">
+              <a:spcAft>
+                <a:spcPts val="300"/>
+              </a:spcAft>
+              <a:defRPr sz="1800">
+                <a:solidFill>
+                  <a:srgbClr val="000000"/>
+                </a:solidFill>
+                <a:latin typeface="Play"/>
+                <a:ea typeface="Play"/>
+                <a:cs typeface="Play"/>
+              </a:defRPr>
+            </a:pPr>
+            <a:r>
+              <a:rPr sz="1800">
+                <a:solidFill>
+                  <a:srgbClr val="000000"/>
+                </a:solidFill>
+                <a:latin typeface="Play"/>
+                <a:ea typeface="Play"/>
+                <a:cs typeface="Play"/>
+              </a:rPr>
+              <a:t>• Экспорт в pptx, pdf, html</a:t>
+            </a:r>
+          </a:p>
+        </p:txBody>
+      </p:sp>
+    </p:spTree>
+  </p:cSld>
+  <p:clrMapOvr>
+    <a:masterClrMapping/>
+  </p:clrMapOvr>
+</p:sld>
+</file>
+
+<file path=ppt/slides/slide60.xml><?xml version="1.0" encoding="utf-8"?>
+<p:sld xmlns:a="http://schemas.openxmlformats.org/drawingml/2006/main" xmlns:p="http://schemas.openxmlformats.org/presentationml/2006/main" xmlns:r="http://schemas.openxmlformats.org/officeDocument/2006/relationships">
+  <p:cSld>
+    <p:bg>
+      <p:bgPr>
+        <a:solidFill>
+          <a:schemeClr val="lt2"/>
+        </a:solidFill>
+      </p:bgPr>
+    </p:bg>
+    <p:spTree>
+      <p:nvGrpSpPr>
+        <p:cNvPr id="1" name=""/>
+        <p:cNvGrpSpPr/>
+        <p:nvPr/>
+      </p:nvGrpSpPr>
+      <p:grpSpPr/>
+      <p:sp>
+        <p:nvSpPr>
+          <p:cNvPr id="2" name="title"/>
+          <p:cNvSpPr txBox="1"/>
+          <p:nvPr/>
+        </p:nvSpPr>
+        <p:spPr>
+          <a:xfrm>
+            <a:off x="677387" y="692177"/>
+            <a:ext cx="10855878" cy="1447800"/>
+          </a:xfrm>
+          <a:prstGeom prst="rect">
+            <a:avLst/>
+          </a:prstGeom>
+          <a:noFill/>
+        </p:spPr>
+        <p:txBody>
+          <a:bodyPr wrap="square" lIns="76200" rIns="76200" tIns="50800" bIns="50800">
+            <a:spAutoFit/>
+          </a:bodyPr>
+          <a:lstStyle/>
+          <a:p>
+            <a:pPr algn="l">
+              <a:spcAft>
+                <a:spcPts val="300"/>
+              </a:spcAft>
+              <a:defRPr sz="4000">
+                <a:solidFill>
+                  <a:srgbClr val="000000"/>
+                </a:solidFill>
+                <a:latin typeface="Arial"/>
+                <a:ea typeface="Arial"/>
+                <a:cs typeface="Arial"/>
+              </a:defRPr>
+            </a:pPr>
+            <a:r>
+              <a:rPr sz="4000">
+                <a:solidFill>
+                  <a:srgbClr val="000000"/>
+                </a:solidFill>
+                <a:latin typeface="Arial"/>
+                <a:ea typeface="Arial"/>
+                <a:cs typeface="Arial"/>
+              </a:rPr>
+              <a:t>Слайды остаются редактируемыми без картинок</a:t>
+            </a:r>
+          </a:p>
+        </p:txBody>
+      </p:sp>
+      <p:sp>
+        <p:nvSpPr>
+          <p:cNvPr id="3" name="lead"/>
+          <p:cNvSpPr txBox="1"/>
+          <p:nvPr/>
+        </p:nvSpPr>
+        <p:spPr>
+          <a:xfrm>
+            <a:off x="677387" y="2895245"/>
+            <a:ext cx="5454861" cy="2082800"/>
+          </a:xfrm>
+          <a:prstGeom prst="rect">
+            <a:avLst/>
+          </a:prstGeom>
+          <a:noFill/>
+        </p:spPr>
+        <p:txBody>
+          <a:bodyPr wrap="square" lIns="76200" rIns="76200" tIns="50800" bIns="50800">
+            <a:spAutoFit/>
+          </a:bodyPr>
+          <a:lstStyle/>
+          <a:p>
+            <a:pPr algn="l">
+              <a:spcAft>
+                <a:spcPts val="300"/>
+              </a:spcAft>
+              <a:defRPr sz="4000">
+                <a:solidFill>
+                  <a:srgbClr val="000000"/>
+                </a:solidFill>
+                <a:latin typeface="Play"/>
+                <a:ea typeface="Play"/>
+                <a:cs typeface="Play"/>
+              </a:defRPr>
+            </a:pPr>
+            <a:r>
+              <a:rPr sz="4000">
+                <a:solidFill>
+                  <a:srgbClr val="000000"/>
+                </a:solidFill>
+                <a:latin typeface="Play"/>
+                <a:ea typeface="Play"/>
+                <a:cs typeface="Play"/>
+              </a:rPr>
+              <a:t>Нативные объекты, таблицы, диаграммы, фигуры</a:t>
+            </a:r>
+          </a:p>
+        </p:txBody>
+      </p:sp>
+      <p:sp>
+        <p:nvSpPr>
+          <p:cNvPr id="4" name="body"/>
+          <p:cNvSpPr txBox="1"/>
+          <p:nvPr/>
+        </p:nvSpPr>
+        <p:spPr>
+          <a:xfrm>
+            <a:off x="677387" y="5187719"/>
+            <a:ext cx="5454861" cy="497840"/>
+          </a:xfrm>
+          <a:prstGeom prst="rect">
+            <a:avLst/>
+          </a:prstGeom>
+          <a:noFill/>
+        </p:spPr>
+        <p:txBody>
+          <a:bodyPr wrap="square" lIns="76200" rIns="76200" tIns="50800" bIns="50800">
+            <a:spAutoFit/>
+          </a:bodyPr>
+          <a:lstStyle/>
+          <a:p>
+            <a:pPr algn="l">
+              <a:spcAft>
+                <a:spcPts val="300"/>
+              </a:spcAft>
+              <a:defRPr sz="2400">
+                <a:solidFill>
+                  <a:srgbClr val="000000"/>
+                </a:solidFill>
+                <a:latin typeface="Play"/>
+                <a:ea typeface="Play"/>
+                <a:cs typeface="Play"/>
+              </a:defRPr>
+            </a:pPr>
+            <a:r>
+              <a:rPr sz="2400">
+                <a:solidFill>
+                  <a:srgbClr val="000000"/>
+                </a:solidFill>
+                <a:latin typeface="Play"/>
+                <a:ea typeface="Play"/>
+                <a:cs typeface="Play"/>
+              </a:rPr>
+              <a:t>Готовые страницы с ролями</a:t>
+            </a:r>
+          </a:p>
+        </p:txBody>
+      </p:sp>
+      <p:grpSp>
+        <p:nvGrpSpPr>
+          <p:cNvPr id="5" name="illustration:builtin-presentation"/>
+          <p:cNvGrpSpPr/>
+          <p:nvPr/>
+        </p:nvGrpSpPr>
+        <p:grpSpPr>
+          <a:xfrm>
+            <a:off x="7429531" y="2704296"/>
+            <a:ext cx="3172211" cy="3172211"/>
+            <a:chOff x="7429531" y="2704296"/>
+            <a:chExt cx="3172211" cy="3172211"/>
+          </a:xfrm>
+        </p:grpSpPr>
+        <p:sp>
+          <p:nvSpPr>
+            <p:cNvPr id="6" name="Oval 5"/>
+            <p:cNvSpPr/>
+            <p:nvPr/>
+          </p:nvSpPr>
+          <p:spPr>
+            <a:xfrm>
+              <a:off x="7429531" y="2704296"/>
+              <a:ext cx="3172211" cy="3172211"/>
+            </a:xfrm>
+            <a:prstGeom prst="ellipse">
+              <a:avLst/>
+            </a:prstGeom>
+            <a:solidFill>
+              <a:srgbClr val="D6E9FF"/>
+            </a:solidFill>
+            <a:ln>
+              <a:noFill/>
+            </a:ln>
+            <a:effectLst/>
+          </p:spPr>
+          <p:style>
+            <a:lnRef idx="1">
+              <a:schemeClr val="accent1"/>
+            </a:lnRef>
+            <a:fillRef idx="3">
+              <a:schemeClr val="accent1"/>
+            </a:fillRef>
+            <a:effectRef idx="2">
+              <a:schemeClr val="accent1"/>
+            </a:effectRef>
+            <a:fontRef idx="minor">
+              <a:schemeClr val="lt1"/>
+            </a:fontRef>
+          </p:style>
+          <p:txBody>
+            <a:bodyPr rtlCol="0" anchor="ctr"/>
+            <a:lstStyle/>
+            <a:p>
+              <a:pPr algn="ctr"/>
+            </a:p>
+          </p:txBody>
+        </p:sp>
+        <p:sp>
+          <p:nvSpPr>
+            <p:cNvPr id="7" name="Rounded Rectangle 6"/>
+            <p:cNvSpPr/>
+            <p:nvPr/>
+          </p:nvSpPr>
+          <p:spPr>
+            <a:xfrm>
+              <a:off x="7555412" y="3132293"/>
+              <a:ext cx="2920448" cy="1888221"/>
+            </a:xfrm>
+            <a:prstGeom prst="roundRect">
+              <a:avLst>
+                <a:gd name="adj" fmla="val 9333"/>
+              </a:avLst>
+            </a:prstGeom>
+            <a:solidFill>
+              <a:srgbClr val="FFFFFF"/>
+            </a:solidFill>
+            <a:ln>
+              <a:noFill/>
+            </a:ln>
+            <a:effectLst/>
+          </p:spPr>
+          <p:style>
+            <a:lnRef idx="1">
+              <a:schemeClr val="accent1"/>
+            </a:lnRef>
+            <a:fillRef idx="3">
+              <a:schemeClr val="accent1"/>
+            </a:fillRef>
+            <a:effectRef idx="2">
+              <a:schemeClr val="accent1"/>
+            </a:effectRef>
+            <a:fontRef idx="minor">
+              <a:schemeClr val="lt1"/>
+            </a:fontRef>
+          </p:style>
+          <p:txBody>
+            <a:bodyPr rtlCol="0" anchor="ctr"/>
+            <a:lstStyle/>
+            <a:p>
+              <a:pPr algn="ctr"/>
+            </a:p>
+          </p:txBody>
+        </p:sp>
+        <p:sp>
+          <p:nvSpPr>
+            <p:cNvPr id="8" name="Rounded Rectangle 7"/>
+            <p:cNvSpPr/>
+            <p:nvPr/>
+          </p:nvSpPr>
+          <p:spPr>
+            <a:xfrm>
+              <a:off x="7555412" y="3132293"/>
+              <a:ext cx="2920448" cy="377644"/>
+            </a:xfrm>
+            <a:prstGeom prst="roundRect">
+              <a:avLst>
+                <a:gd name="adj" fmla="val 46666"/>
+              </a:avLst>
+            </a:prstGeom>
+            <a:solidFill>
+              <a:srgbClr val="0077FF"/>
+            </a:solidFill>
+            <a:ln>
+              <a:noFill/>
+            </a:ln>
+            <a:effectLst/>
+          </p:spPr>
+          <p:style>
+            <a:lnRef idx="1">
+              <a:schemeClr val="accent1"/>
+            </a:lnRef>
+            <a:fillRef idx="3">
+              <a:schemeClr val="accent1"/>
+            </a:fillRef>
+            <a:effectRef idx="2">
+              <a:schemeClr val="accent1"/>
+            </a:effectRef>
+            <a:fontRef idx="minor">
+              <a:schemeClr val="lt1"/>
+            </a:fontRef>
+          </p:style>
+          <p:txBody>
+            <a:bodyPr rtlCol="0" anchor="ctr"/>
+            <a:lstStyle/>
+            <a:p>
+              <a:pPr algn="ctr"/>
+            </a:p>
+          </p:txBody>
+        </p:sp>
+        <p:sp>
+          <p:nvSpPr>
+            <p:cNvPr id="9" name="Rectangle 8"/>
+            <p:cNvSpPr/>
+            <p:nvPr/>
+          </p:nvSpPr>
+          <p:spPr>
+            <a:xfrm>
+              <a:off x="7555412" y="3333703"/>
+              <a:ext cx="2920448" cy="176233"/>
+            </a:xfrm>
+            <a:prstGeom prst="rect">
+              <a:avLst/>
+            </a:prstGeom>
+            <a:solidFill>
+              <a:srgbClr val="0077FF"/>
+            </a:solidFill>
+            <a:ln>
+              <a:noFill/>
+            </a:ln>
+            <a:effectLst/>
+          </p:spPr>
+          <p:style>
+            <a:lnRef idx="1">
+              <a:schemeClr val="accent1"/>
+            </a:lnRef>
+            <a:fillRef idx="3">
+              <a:schemeClr val="accent1"/>
+            </a:fillRef>
+            <a:effectRef idx="2">
+              <a:schemeClr val="accent1"/>
+            </a:effectRef>
+            <a:fontRef idx="minor">
+              <a:schemeClr val="lt1"/>
+            </a:fontRef>
+          </p:style>
+          <p:txBody>
+            <a:bodyPr rtlCol="0" anchor="ctr"/>
+            <a:lstStyle/>
+            <a:p>
+              <a:pPr algn="ctr"/>
+            </a:p>
+          </p:txBody>
+        </p:sp>
+        <p:sp>
+          <p:nvSpPr>
+            <p:cNvPr id="10" name="Rounded Rectangle 9"/>
+            <p:cNvSpPr/>
+            <p:nvPr/>
+          </p:nvSpPr>
+          <p:spPr>
+            <a:xfrm>
+              <a:off x="7857528" y="3761700"/>
+              <a:ext cx="1057403" cy="125881"/>
+            </a:xfrm>
+            <a:prstGeom prst="roundRect">
+              <a:avLst>
+                <a:gd name="adj" fmla="val 50000"/>
+              </a:avLst>
+            </a:prstGeom>
+            <a:solidFill>
+              <a:srgbClr val="000000"/>
+            </a:solidFill>
+            <a:ln>
+              <a:noFill/>
+            </a:ln>
+            <a:effectLst/>
+          </p:spPr>
+          <p:style>
+            <a:lnRef idx="1">
+              <a:schemeClr val="accent1"/>
+            </a:lnRef>
+            <a:fillRef idx="3">
+              <a:schemeClr val="accent1"/>
+            </a:fillRef>
+            <a:effectRef idx="2">
+              <a:schemeClr val="accent1"/>
+            </a:effectRef>
+            <a:fontRef idx="minor">
+              <a:schemeClr val="lt1"/>
+            </a:fontRef>
+          </p:style>
+          <p:txBody>
+            <a:bodyPr rtlCol="0" anchor="ctr"/>
+            <a:lstStyle/>
+            <a:p>
+              <a:pPr algn="ctr"/>
+            </a:p>
+          </p:txBody>
+        </p:sp>
+        <p:sp>
+          <p:nvSpPr>
+            <p:cNvPr id="11" name="Rounded Rectangle 10"/>
+            <p:cNvSpPr/>
+            <p:nvPr/>
+          </p:nvSpPr>
+          <p:spPr>
+            <a:xfrm>
+              <a:off x="7857528" y="4013463"/>
+              <a:ext cx="805640" cy="100705"/>
+            </a:xfrm>
+            <a:prstGeom prst="roundRect">
+              <a:avLst>
+                <a:gd name="adj" fmla="val 50000"/>
+              </a:avLst>
+            </a:prstGeom>
+            <a:solidFill>
+              <a:srgbClr val="B2B2B2"/>
+            </a:solidFill>
+            <a:ln>
+              <a:noFill/>
+            </a:ln>
+            <a:effectLst/>
+          </p:spPr>
+          <p:style>
+            <a:lnRef idx="1">
+              <a:schemeClr val="accent1"/>
+            </a:lnRef>
+            <a:fillRef idx="3">
+              <a:schemeClr val="accent1"/>
+            </a:fillRef>
+            <a:effectRef idx="2">
+              <a:schemeClr val="accent1"/>
+            </a:effectRef>
+            <a:fontRef idx="minor">
+              <a:schemeClr val="lt1"/>
+            </a:fontRef>
+          </p:style>
+          <p:txBody>
+            <a:bodyPr rtlCol="0" anchor="ctr"/>
+            <a:lstStyle/>
+            <a:p>
+              <a:pPr algn="ctr"/>
+            </a:p>
+          </p:txBody>
+        </p:sp>
+        <p:sp>
+          <p:nvSpPr>
+            <p:cNvPr id="12" name="Rounded Rectangle 11"/>
+            <p:cNvSpPr/>
+            <p:nvPr/>
+          </p:nvSpPr>
+          <p:spPr>
+            <a:xfrm>
+              <a:off x="7857528" y="4214873"/>
+              <a:ext cx="931522" cy="100705"/>
+            </a:xfrm>
+            <a:prstGeom prst="roundRect">
+              <a:avLst>
+                <a:gd name="adj" fmla="val 50000"/>
+              </a:avLst>
+            </a:prstGeom>
+            <a:solidFill>
+              <a:srgbClr val="B2B2B2"/>
+            </a:solidFill>
+            <a:ln>
+              <a:noFill/>
+            </a:ln>
+            <a:effectLst/>
+          </p:spPr>
+          <p:style>
+            <a:lnRef idx="1">
+              <a:schemeClr val="accent1"/>
+            </a:lnRef>
+            <a:fillRef idx="3">
+              <a:schemeClr val="accent1"/>
+            </a:fillRef>
+            <a:effectRef idx="2">
+              <a:schemeClr val="accent1"/>
+            </a:effectRef>
+            <a:fontRef idx="minor">
+              <a:schemeClr val="lt1"/>
+            </a:fontRef>
+          </p:style>
+          <p:txBody>
+            <a:bodyPr rtlCol="0" anchor="ctr"/>
+            <a:lstStyle/>
+            <a:p>
+              <a:pPr algn="ctr"/>
+            </a:p>
+          </p:txBody>
+        </p:sp>
+        <p:sp>
+          <p:nvSpPr>
+            <p:cNvPr id="13" name="Rounded Rectangle 12"/>
+            <p:cNvSpPr/>
+            <p:nvPr/>
+          </p:nvSpPr>
+          <p:spPr>
+            <a:xfrm>
+              <a:off x="7857528" y="4416283"/>
+              <a:ext cx="704935" cy="100705"/>
+            </a:xfrm>
+            <a:prstGeom prst="roundRect">
+              <a:avLst>
+                <a:gd name="adj" fmla="val 50000"/>
+              </a:avLst>
+            </a:prstGeom>
+            <a:solidFill>
+              <a:srgbClr val="B2B2B2"/>
+            </a:solidFill>
+            <a:ln>
+              <a:noFill/>
+            </a:ln>
+            <a:effectLst/>
+          </p:spPr>
+          <p:style>
+            <a:lnRef idx="1">
+              <a:schemeClr val="accent1"/>
+            </a:lnRef>
+            <a:fillRef idx="3">
+              <a:schemeClr val="accent1"/>
+            </a:fillRef>
+            <a:effectRef idx="2">
+              <a:schemeClr val="accent1"/>
+            </a:effectRef>
+            <a:fontRef idx="minor">
+              <a:schemeClr val="lt1"/>
+            </a:fontRef>
+          </p:style>
+          <p:txBody>
+            <a:bodyPr rtlCol="0" anchor="ctr"/>
+            <a:lstStyle/>
+            <a:p>
+              <a:pPr algn="ctr"/>
+            </a:p>
+          </p:txBody>
+        </p:sp>
+        <p:sp>
+          <p:nvSpPr>
+            <p:cNvPr id="14" name="Rounded Rectangle 13"/>
+            <p:cNvSpPr/>
+            <p:nvPr/>
+          </p:nvSpPr>
+          <p:spPr>
+            <a:xfrm>
+              <a:off x="9191870" y="4290402"/>
+              <a:ext cx="226586" cy="478349"/>
+            </a:xfrm>
+            <a:prstGeom prst="roundRect">
+              <a:avLst>
+                <a:gd name="adj" fmla="val 22222"/>
+              </a:avLst>
+            </a:prstGeom>
+            <a:solidFill>
+              <a:srgbClr val="B2B2B2"/>
+            </a:solidFill>
+            <a:ln>
+              <a:noFill/>
+            </a:ln>
+            <a:effectLst/>
+          </p:spPr>
+          <p:style>
+            <a:lnRef idx="1">
+              <a:schemeClr val="accent1"/>
+            </a:lnRef>
+            <a:fillRef idx="3">
+              <a:schemeClr val="accent1"/>
+            </a:fillRef>
+            <a:effectRef idx="2">
+              <a:schemeClr val="accent1"/>
+            </a:effectRef>
+            <a:fontRef idx="minor">
+              <a:schemeClr val="lt1"/>
+            </a:fontRef>
+          </p:style>
+          <p:txBody>
+            <a:bodyPr rtlCol="0" anchor="ctr"/>
+            <a:lstStyle/>
+            <a:p>
+              <a:pPr algn="ctr"/>
+            </a:p>
+          </p:txBody>
+        </p:sp>
+        <p:sp>
+          <p:nvSpPr>
+            <p:cNvPr id="15" name="Rounded Rectangle 14"/>
+            <p:cNvSpPr/>
+            <p:nvPr/>
+          </p:nvSpPr>
+          <p:spPr>
+            <a:xfrm>
+              <a:off x="9519162" y="4038639"/>
+              <a:ext cx="226586" cy="730112"/>
+            </a:xfrm>
+            <a:prstGeom prst="roundRect">
+              <a:avLst>
+                <a:gd name="adj" fmla="val 22222"/>
+              </a:avLst>
+            </a:prstGeom>
+            <a:solidFill>
+              <a:srgbClr val="FF3885"/>
+            </a:solidFill>
+            <a:ln>
+              <a:noFill/>
+            </a:ln>
+            <a:effectLst/>
+          </p:spPr>
+          <p:style>
+            <a:lnRef idx="1">
+              <a:schemeClr val="accent1"/>
+            </a:lnRef>
+            <a:fillRef idx="3">
+              <a:schemeClr val="accent1"/>
+            </a:fillRef>
+            <a:effectRef idx="2">
+              <a:schemeClr val="accent1"/>
+            </a:effectRef>
+            <a:fontRef idx="minor">
+              <a:schemeClr val="lt1"/>
+            </a:fontRef>
+          </p:style>
+          <p:txBody>
+            <a:bodyPr rtlCol="0" anchor="ctr"/>
+            <a:lstStyle/>
+            <a:p>
+              <a:pPr algn="ctr"/>
+            </a:p>
+          </p:txBody>
+        </p:sp>
+        <p:sp>
+          <p:nvSpPr>
+            <p:cNvPr id="16" name="Rounded Rectangle 15"/>
+            <p:cNvSpPr/>
+            <p:nvPr/>
+          </p:nvSpPr>
+          <p:spPr>
+            <a:xfrm>
+              <a:off x="9846454" y="3786876"/>
+              <a:ext cx="226586" cy="981874"/>
+            </a:xfrm>
+            <a:prstGeom prst="roundRect">
+              <a:avLst>
+                <a:gd name="adj" fmla="val 22222"/>
+              </a:avLst>
+            </a:prstGeom>
+            <a:solidFill>
+              <a:srgbClr val="0077FF"/>
+            </a:solidFill>
+            <a:ln>
+              <a:noFill/>
+            </a:ln>
+            <a:effectLst/>
+          </p:spPr>
+          <p:style>
+            <a:lnRef idx="1">
+              <a:schemeClr val="accent1"/>
+            </a:lnRef>
+            <a:fillRef idx="3">
+              <a:schemeClr val="accent1"/>
+            </a:fillRef>
+            <a:effectRef idx="2">
+              <a:schemeClr val="accent1"/>
+            </a:effectRef>
+            <a:fontRef idx="minor">
+              <a:schemeClr val="lt1"/>
+            </a:fontRef>
+          </p:style>
+          <p:txBody>
+            <a:bodyPr rtlCol="0" anchor="ctr"/>
+            <a:lstStyle/>
+            <a:p>
+              <a:pPr algn="ctr"/>
+            </a:p>
+          </p:txBody>
+        </p:sp>
+        <p:sp>
+          <p:nvSpPr>
+            <p:cNvPr id="17" name="Rectangle 16"/>
+            <p:cNvSpPr/>
+            <p:nvPr/>
+          </p:nvSpPr>
+          <p:spPr>
+            <a:xfrm>
+              <a:off x="8940108" y="5020514"/>
+              <a:ext cx="151057" cy="453173"/>
+            </a:xfrm>
+            <a:prstGeom prst="rect">
+              <a:avLst/>
+            </a:prstGeom>
+            <a:solidFill>
+              <a:srgbClr val="000000"/>
+            </a:solidFill>
+            <a:ln>
+              <a:noFill/>
+            </a:ln>
+            <a:effectLst/>
+          </p:spPr>
+          <p:style>
+            <a:lnRef idx="1">
+              <a:schemeClr val="accent1"/>
+            </a:lnRef>
+            <a:fillRef idx="3">
+              <a:schemeClr val="accent1"/>
+            </a:fillRef>
+            <a:effectRef idx="2">
+              <a:schemeClr val="accent1"/>
+            </a:effectRef>
+            <a:fontRef idx="minor">
+              <a:schemeClr val="lt1"/>
+            </a:fontRef>
+          </p:style>
+          <p:txBody>
+            <a:bodyPr rtlCol="0" anchor="ctr"/>
+            <a:lstStyle/>
+            <a:p>
+              <a:pPr algn="ctr"/>
+            </a:p>
+          </p:txBody>
+        </p:sp>
+        <p:sp>
+          <p:nvSpPr>
+            <p:cNvPr id="18" name="Rounded Rectangle 17"/>
+            <p:cNvSpPr/>
+            <p:nvPr/>
+          </p:nvSpPr>
+          <p:spPr>
+            <a:xfrm>
+              <a:off x="8386230" y="5423335"/>
+              <a:ext cx="1258814" cy="151057"/>
+            </a:xfrm>
+            <a:prstGeom prst="roundRect">
+              <a:avLst>
+                <a:gd name="adj" fmla="val 50000"/>
+              </a:avLst>
+            </a:prstGeom>
+            <a:solidFill>
+              <a:srgbClr val="000000"/>
+            </a:solidFill>
+            <a:ln>
+              <a:noFill/>
+            </a:ln>
+            <a:effectLst/>
+          </p:spPr>
+          <p:style>
+            <a:lnRef idx="1">
+              <a:schemeClr val="accent1"/>
+            </a:lnRef>
+            <a:fillRef idx="3">
+              <a:schemeClr val="accent1"/>
+            </a:fillRef>
+            <a:effectRef idx="2">
+              <a:schemeClr val="accent1"/>
+            </a:effectRef>
+            <a:fontRef idx="minor">
+              <a:schemeClr val="lt1"/>
+            </a:fontRef>
+          </p:style>
+          <p:txBody>
+            <a:bodyPr rtlCol="0" anchor="ctr"/>
+            <a:lstStyle/>
+            <a:p>
+              <a:pPr algn="ctr"/>
+            </a:p>
+          </p:txBody>
+        </p:sp>
+      </p:grpSp>
+    </p:spTree>
+  </p:cSld>
+  <p:clrMapOvr>
+    <a:masterClrMapping/>
+  </p:clrMapOvr>
+</p:sld>
+</file>
+
+<file path=ppt/slides/slide61.xml><?xml version="1.0" encoding="utf-8"?>
 <p:sld xmlns:a="http://schemas.openxmlformats.org/drawingml/2006/main" xmlns:p="http://schemas.openxmlformats.org/presentationml/2006/main" xmlns:r="http://schemas.openxmlformats.org/officeDocument/2006/relationships">
   <p:cSld>
     <p:bg>
@@ -8991,7 +11269,7 @@
         <p:spPr>
           <a:xfrm>
             <a:off x="677387" y="692177"/>
-            <a:ext cx="10855878" cy="822960"/>
+            <a:ext cx="10855878" cy="1447800"/>
           </a:xfrm>
           <a:prstGeom prst="rect">
             <a:avLst/>
@@ -9026,437 +11304,20 @@
                 <a:ea typeface="Arial"/>
                 <a:cs typeface="Arial"/>
               </a:rPr>
-              <a:t>Предложение</a:t>
+              <a:t>68 презентаций за 6 недель: 4 минуты на сборку</a:t>
             </a:r>
           </a:p>
         </p:txBody>
       </p:sp>
       <p:sp>
         <p:nvSpPr>
-          <p:cNvPr id="797" name="lead"/>
-          <p:cNvSpPr txBox="1"/>
-          <p:nvPr/>
-        </p:nvSpPr>
-        <p:spPr>
-          <a:xfrm>
-            <a:off x="677387" y="2200937"/>
-            <a:ext cx="10855878" cy="1718371"/>
-          </a:xfrm>
-          <a:prstGeom prst="rect">
-            <a:avLst/>
-          </a:prstGeom>
-          <a:noFill/>
-        </p:spPr>
-        <p:txBody>
-          <a:bodyPr wrap="square" lIns="76200" rIns="76200" tIns="50800" bIns="50800">
-            <a:spAutoFit/>
-          </a:bodyPr>
-          <a:lstStyle/>
-          <a:p>
-            <a:pPr algn="l">
-              <a:spcAft>
-                <a:spcPts val="300"/>
-              </a:spcAft>
-              <a:defRPr sz="4800">
-                <a:solidFill>
-                  <a:srgbClr val="000000"/>
-                </a:solidFill>
-                <a:latin typeface="Play"/>
-                <a:ea typeface="Play"/>
-                <a:cs typeface="Play"/>
-              </a:defRPr>
-            </a:pPr>
-            <a:r>
-              <a:rPr sz="4800">
-                <a:solidFill>
-                  <a:srgbClr val="000000"/>
-                </a:solidFill>
-                <a:latin typeface="Play"/>
-                <a:ea typeface="Play"/>
-                <a:cs typeface="Play"/>
-              </a:rPr>
-              <a:t>Сервис принимает шаблон pptx и материалы</a:t>
-            </a:r>
-          </a:p>
-        </p:txBody>
-      </p:sp>
-      <p:sp>
-        <p:nvSpPr>
-          <p:cNvPr id="798" name="body"/>
-          <p:cNvSpPr txBox="1"/>
-          <p:nvPr/>
-        </p:nvSpPr>
-        <p:spPr>
-          <a:xfrm>
-            <a:off x="677387" y="4166975"/>
-            <a:ext cx="10855878" cy="2161724"/>
-          </a:xfrm>
-          <a:prstGeom prst="rect">
-            <a:avLst/>
-          </a:prstGeom>
-          <a:noFill/>
-        </p:spPr>
-        <p:txBody>
-          <a:bodyPr wrap="square" lIns="76200" rIns="76200" tIns="50800" bIns="50800">
-            <a:spAutoFit/>
-          </a:bodyPr>
-          <a:lstStyle/>
-          <a:p>
-            <a:pPr algn="l">
-              <a:spcAft>
-                <a:spcPts val="300"/>
-              </a:spcAft>
-              <a:defRPr sz="3200">
-                <a:solidFill>
-                  <a:srgbClr val="000000"/>
-                </a:solidFill>
-                <a:latin typeface="Play"/>
-                <a:ea typeface="Play"/>
-                <a:cs typeface="Play"/>
-              </a:defRPr>
-            </a:pPr>
-            <a:r>
-              <a:rPr sz="3200">
-                <a:solidFill>
-                  <a:srgbClr val="000000"/>
-                </a:solidFill>
-                <a:latin typeface="Play"/>
-                <a:ea typeface="Play"/>
-                <a:cs typeface="Play"/>
-              </a:rPr>
-              <a:t>• Генерирует колоду по дизайн-системе и аудиту</a:t>
-            </a:r>
-          </a:p>
-          <a:p>
-            <a:pPr algn="l">
-              <a:spcAft>
-                <a:spcPts val="300"/>
-              </a:spcAft>
-              <a:defRPr sz="3200">
-                <a:solidFill>
-                  <a:srgbClr val="000000"/>
-                </a:solidFill>
-                <a:latin typeface="Play"/>
-                <a:ea typeface="Play"/>
-                <a:cs typeface="Play"/>
-              </a:defRPr>
-            </a:pPr>
-            <a:r>
-              <a:rPr sz="3200">
-                <a:solidFill>
-                  <a:srgbClr val="000000"/>
-                </a:solidFill>
-                <a:latin typeface="Play"/>
-                <a:ea typeface="Play"/>
-                <a:cs typeface="Play"/>
-              </a:rPr>
-              <a:t>• Экспорт в pptx, pdf, html с редактируемыми слайдами</a:t>
-            </a:r>
-          </a:p>
-        </p:txBody>
-      </p:sp>
-    </p:spTree>
-  </p:cSld>
-  <p:clrMapOvr>
-    <a:masterClrMapping/>
-  </p:clrMapOvr>
-</p:sld>
-</file>
-
-<file path=ppt/slides/slide59.xml><?xml version="1.0" encoding="utf-8"?>
-<p:sld xmlns:a="http://schemas.openxmlformats.org/drawingml/2006/main" xmlns:p="http://schemas.openxmlformats.org/presentationml/2006/main" xmlns:r="http://schemas.openxmlformats.org/officeDocument/2006/relationships">
-  <p:cSld>
-    <p:bg>
-      <p:bgPr>
-        <a:solidFill>
-          <a:schemeClr val="lt2"/>
-        </a:solidFill>
-      </p:bgPr>
-    </p:bg>
-    <p:spTree>
-      <p:nvGrpSpPr>
-        <p:cNvPr id="1" name=""/>
-        <p:cNvGrpSpPr/>
-        <p:nvPr/>
-      </p:nvGrpSpPr>
-      <p:grpSpPr/>
-      <p:sp>
-        <p:nvSpPr>
-          <p:cNvPr id="2" name="title"/>
-          <p:cNvSpPr txBox="1"/>
-          <p:nvPr/>
-        </p:nvSpPr>
-        <p:spPr>
-          <a:xfrm>
-            <a:off x="677387" y="692177"/>
-            <a:ext cx="10855878" cy="822960"/>
-          </a:xfrm>
-          <a:prstGeom prst="rect">
-            <a:avLst/>
-          </a:prstGeom>
-          <a:noFill/>
-        </p:spPr>
-        <p:txBody>
-          <a:bodyPr wrap="square" lIns="76200" rIns="76200" tIns="50800" bIns="50800">
-            <a:spAutoFit/>
-          </a:bodyPr>
-          <a:lstStyle/>
-          <a:p>
-            <a:pPr algn="l">
-              <a:spcAft>
-                <a:spcPts val="300"/>
-              </a:spcAft>
-              <a:defRPr sz="4000">
-                <a:solidFill>
-                  <a:srgbClr val="000000"/>
-                </a:solidFill>
-                <a:latin typeface="Arial"/>
-                <a:ea typeface="Arial"/>
-                <a:cs typeface="Arial"/>
-              </a:defRPr>
-            </a:pPr>
-            <a:r>
-              <a:rPr sz="4000">
-                <a:solidFill>
-                  <a:srgbClr val="000000"/>
-                </a:solidFill>
-                <a:latin typeface="Arial"/>
-                <a:ea typeface="Arial"/>
-                <a:cs typeface="Arial"/>
-              </a:rPr>
-              <a:t>Ожидаемый эффект</a:t>
-            </a:r>
-          </a:p>
-        </p:txBody>
-      </p:sp>
-      <p:graphicFrame>
-        <p:nvGraphicFramePr>
-          <p:cNvPr id="3" name="Chart 2"/>
-          <p:cNvGraphicFramePr>
-            <a:graphicFrameLocks noGrp="1"/>
-          </p:cNvGraphicFramePr>
-          <p:nvPr/>
-        </p:nvGraphicFramePr>
-        <p:xfrm>
-          <a:off x="677387" y="1783080"/>
-          <a:ext cx="10855878" cy="2508907"/>
-        </p:xfrm>
-        <a:graphic>
-          <a:graphicData uri="http://schemas.openxmlformats.org/drawingml/2006/chart">
-            <c:chart xmlns:c="http://schemas.openxmlformats.org/drawingml/2006/chart" r:id="rId2"/>
-          </a:graphicData>
-        </a:graphic>
-      </p:graphicFrame>
-      <p:sp>
-        <p:nvSpPr>
-          <p:cNvPr id="4" name="body"/>
-          <p:cNvSpPr txBox="1"/>
-          <p:nvPr/>
-        </p:nvSpPr>
-        <p:spPr>
-          <a:xfrm>
-            <a:off x="677387" y="4463437"/>
-            <a:ext cx="10855878" cy="1737360"/>
-          </a:xfrm>
-          <a:prstGeom prst="rect">
-            <a:avLst/>
-          </a:prstGeom>
-          <a:noFill/>
-        </p:spPr>
-        <p:txBody>
-          <a:bodyPr wrap="square" lIns="76200" rIns="76200" tIns="50800" bIns="50800">
-            <a:spAutoFit/>
-          </a:bodyPr>
-          <a:lstStyle/>
-          <a:p>
-            <a:pPr algn="l">
-              <a:spcAft>
-                <a:spcPts val="300"/>
-              </a:spcAft>
-              <a:defRPr sz="1800">
-                <a:solidFill>
-                  <a:srgbClr val="000000"/>
-                </a:solidFill>
-                <a:latin typeface="Play"/>
-                <a:ea typeface="Play"/>
-                <a:cs typeface="Play"/>
-              </a:defRPr>
-            </a:pPr>
-            <a:r>
-              <a:rPr sz="1800">
-                <a:solidFill>
-                  <a:srgbClr val="000000"/>
-                </a:solidFill>
-                <a:latin typeface="Play"/>
-                <a:ea typeface="Play"/>
-                <a:cs typeface="Play"/>
-              </a:rPr>
-              <a:t>• Сборка колоды 4 мин вместо 186</a:t>
-            </a:r>
-          </a:p>
-          <a:p>
-            <a:pPr algn="l">
-              <a:spcAft>
-                <a:spcPts val="300"/>
-              </a:spcAft>
-              <a:defRPr sz="1800">
-                <a:solidFill>
-                  <a:srgbClr val="000000"/>
-                </a:solidFill>
-                <a:latin typeface="Play"/>
-                <a:ea typeface="Play"/>
-                <a:cs typeface="Play"/>
-              </a:defRPr>
-            </a:pPr>
-            <a:r>
-              <a:rPr sz="1800">
-                <a:solidFill>
-                  <a:srgbClr val="000000"/>
-                </a:solidFill>
-                <a:latin typeface="Play"/>
-                <a:ea typeface="Play"/>
-                <a:cs typeface="Play"/>
-              </a:rPr>
-              <a:t>• Время до первой версии сократилось с 6 дней до 1</a:t>
-            </a:r>
-          </a:p>
-          <a:p>
-            <a:pPr algn="l">
-              <a:spcAft>
-                <a:spcPts val="300"/>
-              </a:spcAft>
-              <a:defRPr sz="1800">
-                <a:solidFill>
-                  <a:srgbClr val="000000"/>
-                </a:solidFill>
-                <a:latin typeface="Play"/>
-                <a:ea typeface="Play"/>
-                <a:cs typeface="Play"/>
-              </a:defRPr>
-            </a:pPr>
-            <a:r>
-              <a:rPr sz="1800">
-                <a:solidFill>
-                  <a:srgbClr val="000000"/>
-                </a:solidFill>
-                <a:latin typeface="Play"/>
-                <a:ea typeface="Play"/>
-                <a:cs typeface="Play"/>
-              </a:rPr>
-              <a:t>• Нарушений стиля 2 из 68 колод</a:t>
-            </a:r>
-          </a:p>
-          <a:p>
-            <a:pPr algn="l">
-              <a:spcAft>
-                <a:spcPts val="300"/>
-              </a:spcAft>
-              <a:defRPr sz="1800">
-                <a:solidFill>
-                  <a:srgbClr val="000000"/>
-                </a:solidFill>
-                <a:latin typeface="Play"/>
-                <a:ea typeface="Play"/>
-                <a:cs typeface="Play"/>
-              </a:defRPr>
-            </a:pPr>
-            <a:r>
-              <a:rPr sz="1800">
-                <a:solidFill>
-                  <a:srgbClr val="000000"/>
-                </a:solidFill>
-                <a:latin typeface="Play"/>
-                <a:ea typeface="Play"/>
-                <a:cs typeface="Play"/>
-              </a:rPr>
-              <a:t>• Дизайнеры закрыли 38 запросов вместо 11 в неделю</a:t>
-            </a:r>
-          </a:p>
-        </p:txBody>
-      </p:sp>
-    </p:spTree>
-  </p:cSld>
-  <p:clrMapOvr>
-    <a:masterClrMapping/>
-  </p:clrMapOvr>
-</p:sld>
-</file>
-
-<file path=ppt/slides/slide60.xml><?xml version="1.0" encoding="utf-8"?>
-<p:sld xmlns:a="http://schemas.openxmlformats.org/drawingml/2006/main" xmlns:p="http://schemas.openxmlformats.org/presentationml/2006/main" xmlns:r="http://schemas.openxmlformats.org/officeDocument/2006/relationships">
-  <p:cSld>
-    <p:bg>
-      <p:bgPr>
-        <a:solidFill>
-          <a:schemeClr val="lt2"/>
-        </a:solidFill>
-      </p:bgPr>
-    </p:bg>
-    <p:spTree>
-      <p:nvGrpSpPr>
-        <p:cNvPr id="1" name=""/>
-        <p:cNvGrpSpPr/>
-        <p:nvPr/>
-      </p:nvGrpSpPr>
-      <p:grpSpPr/>
-      <p:sp>
-        <p:nvSpPr>
-          <p:cNvPr id="2" name="title"/>
-          <p:cNvSpPr txBox="1"/>
-          <p:nvPr/>
-        </p:nvSpPr>
-        <p:spPr>
-          <a:xfrm>
-            <a:off x="677387" y="692177"/>
-            <a:ext cx="10855878" cy="822960"/>
-          </a:xfrm>
-          <a:prstGeom prst="rect">
-            <a:avLst/>
-          </a:prstGeom>
-          <a:noFill/>
-        </p:spPr>
-        <p:txBody>
-          <a:bodyPr wrap="square" lIns="76200" rIns="76200" tIns="50800" bIns="50800">
-            <a:spAutoFit/>
-          </a:bodyPr>
-          <a:lstStyle/>
-          <a:p>
-            <a:pPr algn="l">
-              <a:spcAft>
-                <a:spcPts val="300"/>
-              </a:spcAft>
-              <a:defRPr sz="4000">
-                <a:solidFill>
-                  <a:srgbClr val="000000"/>
-                </a:solidFill>
-                <a:latin typeface="Arial"/>
-                <a:ea typeface="Arial"/>
-                <a:cs typeface="Arial"/>
-              </a:defRPr>
-            </a:pPr>
-            <a:r>
-              <a:rPr sz="4000">
-                <a:solidFill>
-                  <a:srgbClr val="000000"/>
-                </a:solidFill>
-                <a:latin typeface="Arial"/>
-                <a:ea typeface="Arial"/>
-                <a:cs typeface="Arial"/>
-              </a:rPr>
-              <a:t>Что потребуется: ресурсы и сроки</a:t>
-            </a:r>
-          </a:p>
-        </p:txBody>
-      </p:sp>
-      <p:sp>
-        <p:nvSpPr>
-          <p:cNvPr id="3" name="stat_0:bar"/>
+          <p:cNvPr id="797" name="stat_0:bar"/>
           <p:cNvSpPr/>
           <p:nvPr/>
         </p:nvSpPr>
         <p:spPr>
           <a:xfrm>
-            <a:off x="677387" y="1892808"/>
+            <a:off x="677387" y="2489735"/>
             <a:ext cx="50800" cy="1150112"/>
           </a:xfrm>
           <a:prstGeom prst="rect">
@@ -9494,13 +11355,13 @@
       </p:sp>
       <p:sp>
         <p:nvSpPr>
-          <p:cNvPr id="4" name="stat_0"/>
+          <p:cNvPr id="798" name="stat_0"/>
           <p:cNvSpPr txBox="1"/>
           <p:nvPr/>
         </p:nvSpPr>
         <p:spPr>
           <a:xfrm>
-            <a:off x="855187" y="1783080"/>
+            <a:off x="855187" y="2380007"/>
             <a:ext cx="10678078" cy="1259840"/>
           </a:xfrm>
           <a:prstGeom prst="rect">
@@ -9539,7 +11400,7 @@
                 <a:ea typeface="Play"/>
                 <a:cs typeface="Play"/>
               </a:rPr>
-              <a:t>2 vCPU</a:t>
+              <a:t>4 мин</a:t>
             </a:r>
           </a:p>
           <a:p>
@@ -9565,21 +11426,21 @@
                 <a:ea typeface="Play"/>
                 <a:cs typeface="Play"/>
               </a:rPr>
-              <a:t>Сервис работает на 2 vCPU / 2 GB RAM</a:t>
+              <a:t>4 минуты на сборку</a:t>
             </a:r>
           </a:p>
         </p:txBody>
       </p:sp>
       <p:sp>
         <p:nvSpPr>
-          <p:cNvPr id="5" name="body"/>
+          <p:cNvPr id="799" name="body"/>
           <p:cNvSpPr txBox="1"/>
           <p:nvPr/>
         </p:nvSpPr>
         <p:spPr>
           <a:xfrm>
-            <a:off x="677387" y="4345356"/>
-            <a:ext cx="10855878" cy="1855441"/>
+            <a:off x="677387" y="4596066"/>
+            <a:ext cx="10855878" cy="1604731"/>
           </a:xfrm>
           <a:prstGeom prst="rect">
             <a:avLst/>
@@ -9596,7 +11457,7 @@
               <a:spcAft>
                 <a:spcPts val="300"/>
               </a:spcAft>
-              <a:defRPr sz="3200">
+              <a:defRPr sz="2400">
                 <a:solidFill>
                   <a:srgbClr val="000000"/>
                 </a:solidFill>
@@ -9606,7 +11467,7 @@
               </a:defRPr>
             </a:pPr>
             <a:r>
-              <a:rPr sz="3200">
+              <a:rPr sz="2400">
                 <a:solidFill>
                   <a:srgbClr val="000000"/>
                 </a:solidFill>
@@ -9614,7 +11475,7 @@
                 <a:ea typeface="Play"/>
                 <a:cs typeface="Play"/>
               </a:rPr>
-              <a:t>• Инференс за 6 недель пилота стоит 1 400 руб</a:t>
+              <a:t>• Время до первой версии 1 день</a:t>
             </a:r>
           </a:p>
           <a:p>
@@ -9622,7 +11483,7 @@
               <a:spcAft>
                 <a:spcPts val="300"/>
               </a:spcAft>
-              <a:defRPr sz="3200">
+              <a:defRPr sz="2400">
                 <a:solidFill>
                   <a:srgbClr val="000000"/>
                 </a:solidFill>
@@ -9632,7 +11493,7 @@
               </a:defRPr>
             </a:pPr>
             <a:r>
-              <a:rPr sz="3200">
+              <a:rPr sz="2400">
                 <a:solidFill>
                   <a:srgbClr val="000000"/>
                 </a:solidFill>
@@ -9640,7 +11501,33 @@
                 <a:ea typeface="Play"/>
                 <a:cs typeface="Play"/>
               </a:rPr>
-              <a:t>• Нагрузка выше 20 задач требует внешней очереди</a:t>
+              <a:t>• Нарушений стиля 2 из 68</a:t>
+            </a:r>
+          </a:p>
+          <a:p>
+            <a:pPr algn="l">
+              <a:spcAft>
+                <a:spcPts val="300"/>
+              </a:spcAft>
+              <a:defRPr sz="2400">
+                <a:solidFill>
+                  <a:srgbClr val="000000"/>
+                </a:solidFill>
+                <a:latin typeface="Play"/>
+                <a:ea typeface="Play"/>
+                <a:cs typeface="Play"/>
+              </a:defRPr>
+            </a:pPr>
+            <a:r>
+              <a:rPr sz="2400">
+                <a:solidFill>
+                  <a:srgbClr val="000000"/>
+                </a:solidFill>
+                <a:latin typeface="Play"/>
+                <a:ea typeface="Play"/>
+                <a:cs typeface="Play"/>
+              </a:rPr>
+              <a:t>• Дизайнеры закрыли 38 запросов</a:t>
             </a:r>
           </a:p>
         </p:txBody>
@@ -9653,9 +11540,16 @@
 </p:sld>
 </file>
 
-<file path=ppt/slides/slide61.xml><?xml version="1.0" encoding="utf-8"?>
+<file path=ppt/slides/slide62.xml><?xml version="1.0" encoding="utf-8"?>
 <p:sld xmlns:a="http://schemas.openxmlformats.org/drawingml/2006/main" xmlns:p="http://schemas.openxmlformats.org/presentationml/2006/main" xmlns:r="http://schemas.openxmlformats.org/officeDocument/2006/relationships">
   <p:cSld>
+    <p:bg>
+      <p:bgPr>
+        <a:solidFill>
+          <a:schemeClr val="lt2"/>
+        </a:solidFill>
+      </p:bgPr>
+    </p:bg>
     <p:spTree>
       <p:nvGrpSpPr>
         <p:cNvPr id="1" name=""/>
@@ -9672,7 +11566,7 @@
         <p:spPr>
           <a:xfrm>
             <a:off x="677387" y="692177"/>
-            <a:ext cx="10855878" cy="822960"/>
+            <a:ext cx="10855878" cy="919480"/>
           </a:xfrm>
           <a:prstGeom prst="rect">
             <a:avLst/>
@@ -9689,7 +11583,7 @@
               <a:spcAft>
                 <a:spcPts val="300"/>
               </a:spcAft>
-              <a:defRPr sz="4000">
+              <a:defRPr sz="4800">
                 <a:solidFill>
                   <a:srgbClr val="000000"/>
                 </a:solidFill>
@@ -9699,7 +11593,7 @@
               </a:defRPr>
             </a:pPr>
             <a:r>
-              <a:rPr sz="4000">
+              <a:rPr sz="4800">
                 <a:solidFill>
                   <a:srgbClr val="000000"/>
                 </a:solidFill>
@@ -9707,448 +11601,21 @@
                 <a:ea typeface="Arial"/>
                 <a:cs typeface="Arial"/>
               </a:rPr>
-              <a:t>План пилота</a:t>
+              <a:t>Рутина ушла в сервис</a:t>
             </a:r>
           </a:p>
         </p:txBody>
       </p:sp>
-      <p:graphicFrame>
-        <p:nvGraphicFramePr>
-          <p:cNvPr id="3" name="Table 2"/>
-          <p:cNvGraphicFramePr>
-            <a:graphicFrameLocks noGrp="1"/>
-          </p:cNvGraphicFramePr>
-          <p:nvPr/>
-        </p:nvGraphicFramePr>
-        <p:xfrm>
-          <a:off x="677387" y="1783080"/>
-          <a:ext cx="10855878" cy="3301387"/>
-        </p:xfrm>
-        <a:graphic>
-          <a:graphicData uri="http://schemas.openxmlformats.org/drawingml/2006/table">
-            <a:tbl>
-              <a:tblPr firstRow="1" bandRow="1">
-                <a:tableStyleId>{5C22544A-7EE6-4342-B048-85BDC9FD1C3A}</a:tableStyleId>
-              </a:tblPr>
-              <a:tblGrid>
-                <a:gridCol w="3618626"/>
-                <a:gridCol w="3618626"/>
-                <a:gridCol w="3618626"/>
-              </a:tblGrid>
-              <a:tr h="660277">
-                <a:tc>
-                  <a:txBody>
-                    <a:bodyPr/>
-                    <a:lstStyle/>
-                    <a:p>
-                      <a:pPr>
-                        <a:defRPr sz="1300" b="1">
-                          <a:solidFill>
-                            <a:srgbClr val="FFFFFF"/>
-                          </a:solidFill>
-                          <a:latin typeface="Play"/>
-                          <a:ea typeface="Play"/>
-                          <a:cs typeface="Play"/>
-                        </a:defRPr>
-                      </a:pPr>
-                      <a:r>
-                        <a:t>Метрика</a:t>
-                      </a:r>
-                    </a:p>
-                  </a:txBody>
-                  <a:tcPr>
-                    <a:solidFill>
-                      <a:srgbClr val="0077FF"/>
-                    </a:solidFill>
-                  </a:tcPr>
-                </a:tc>
-                <a:tc>
-                  <a:txBody>
-                    <a:bodyPr/>
-                    <a:lstStyle/>
-                    <a:p>
-                      <a:pPr>
-                        <a:defRPr sz="1300" b="1">
-                          <a:solidFill>
-                            <a:srgbClr val="FFFFFF"/>
-                          </a:solidFill>
-                          <a:latin typeface="Play"/>
-                          <a:ea typeface="Play"/>
-                          <a:cs typeface="Play"/>
-                        </a:defRPr>
-                      </a:pPr>
-                      <a:r>
-                        <a:t>Текущий процесс</a:t>
-                      </a:r>
-                    </a:p>
-                  </a:txBody>
-                  <a:tcPr>
-                    <a:solidFill>
-                      <a:srgbClr val="0077FF"/>
-                    </a:solidFill>
-                  </a:tcPr>
-                </a:tc>
-                <a:tc>
-                  <a:txBody>
-                    <a:bodyPr/>
-                    <a:lstStyle/>
-                    <a:p>
-                      <a:pPr>
-                        <a:defRPr sz="1300" b="1">
-                          <a:solidFill>
-                            <a:srgbClr val="FFFFFF"/>
-                          </a:solidFill>
-                          <a:latin typeface="Play"/>
-                          <a:ea typeface="Play"/>
-                          <a:cs typeface="Play"/>
-                        </a:defRPr>
-                      </a:pPr>
-                      <a:r>
-                        <a:t>Пилот</a:t>
-                      </a:r>
-                    </a:p>
-                  </a:txBody>
-                  <a:tcPr>
-                    <a:solidFill>
-                      <a:srgbClr val="0077FF"/>
-                    </a:solidFill>
-                  </a:tcPr>
-                </a:tc>
-              </a:tr>
-              <a:tr h="660277">
-                <a:tc>
-                  <a:txBody>
-                    <a:bodyPr/>
-                    <a:lstStyle/>
-                    <a:p>
-                      <a:pPr>
-                        <a:defRPr sz="1300" b="0">
-                          <a:solidFill>
-                            <a:srgbClr val="000000"/>
-                          </a:solidFill>
-                          <a:latin typeface="Play"/>
-                          <a:ea typeface="Play"/>
-                          <a:cs typeface="Play"/>
-                        </a:defRPr>
-                      </a:pPr>
-                      <a:r>
-                        <a:t>Время сборки (мин)</a:t>
-                      </a:r>
-                    </a:p>
-                  </a:txBody>
-                  <a:tcPr>
-                    <a:solidFill>
-                      <a:srgbClr val="FFFFFF"/>
-                    </a:solidFill>
-                  </a:tcPr>
-                </a:tc>
-                <a:tc>
-                  <a:txBody>
-                    <a:bodyPr/>
-                    <a:lstStyle/>
-                    <a:p>
-                      <a:pPr>
-                        <a:defRPr sz="1300" b="0">
-                          <a:solidFill>
-                            <a:srgbClr val="000000"/>
-                          </a:solidFill>
-                          <a:latin typeface="Play"/>
-                          <a:ea typeface="Play"/>
-                          <a:cs typeface="Play"/>
-                        </a:defRPr>
-                      </a:pPr>
-                      <a:r>
-                        <a:t>186</a:t>
-                      </a:r>
-                    </a:p>
-                  </a:txBody>
-                  <a:tcPr>
-                    <a:solidFill>
-                      <a:srgbClr val="FFFFFF"/>
-                    </a:solidFill>
-                  </a:tcPr>
-                </a:tc>
-                <a:tc>
-                  <a:txBody>
-                    <a:bodyPr/>
-                    <a:lstStyle/>
-                    <a:p>
-                      <a:pPr>
-                        <a:defRPr sz="1300" b="0">
-                          <a:solidFill>
-                            <a:srgbClr val="000000"/>
-                          </a:solidFill>
-                          <a:latin typeface="Play"/>
-                          <a:ea typeface="Play"/>
-                          <a:cs typeface="Play"/>
-                        </a:defRPr>
-                      </a:pPr>
-                      <a:r>
-                        <a:t>4</a:t>
-                      </a:r>
-                    </a:p>
-                  </a:txBody>
-                  <a:tcPr>
-                    <a:solidFill>
-                      <a:srgbClr val="FFFFFF"/>
-                    </a:solidFill>
-                  </a:tcPr>
-                </a:tc>
-              </a:tr>
-              <a:tr h="660277">
-                <a:tc>
-                  <a:txBody>
-                    <a:bodyPr/>
-                    <a:lstStyle/>
-                    <a:p>
-                      <a:pPr>
-                        <a:defRPr sz="1300" b="0">
-                          <a:solidFill>
-                            <a:srgbClr val="000000"/>
-                          </a:solidFill>
-                          <a:latin typeface="Play"/>
-                          <a:ea typeface="Play"/>
-                          <a:cs typeface="Play"/>
-                        </a:defRPr>
-                      </a:pPr>
-                      <a:r>
-                        <a:t>Время до первой версии (дней)</a:t>
-                      </a:r>
-                    </a:p>
-                  </a:txBody>
-                  <a:tcPr>
-                    <a:solidFill>
-                      <a:srgbClr val="FFFFFF"/>
-                    </a:solidFill>
-                  </a:tcPr>
-                </a:tc>
-                <a:tc>
-                  <a:txBody>
-                    <a:bodyPr/>
-                    <a:lstStyle/>
-                    <a:p>
-                      <a:pPr>
-                        <a:defRPr sz="1300" b="0">
-                          <a:solidFill>
-                            <a:srgbClr val="000000"/>
-                          </a:solidFill>
-                          <a:latin typeface="Play"/>
-                          <a:ea typeface="Play"/>
-                          <a:cs typeface="Play"/>
-                        </a:defRPr>
-                      </a:pPr>
-                      <a:r>
-                        <a:t>6</a:t>
-                      </a:r>
-                    </a:p>
-                  </a:txBody>
-                  <a:tcPr>
-                    <a:solidFill>
-                      <a:srgbClr val="FFFFFF"/>
-                    </a:solidFill>
-                  </a:tcPr>
-                </a:tc>
-                <a:tc>
-                  <a:txBody>
-                    <a:bodyPr/>
-                    <a:lstStyle/>
-                    <a:p>
-                      <a:pPr>
-                        <a:defRPr sz="1300" b="0">
-                          <a:solidFill>
-                            <a:srgbClr val="000000"/>
-                          </a:solidFill>
-                          <a:latin typeface="Play"/>
-                          <a:ea typeface="Play"/>
-                          <a:cs typeface="Play"/>
-                        </a:defRPr>
-                      </a:pPr>
-                      <a:r>
-                        <a:t>1</a:t>
-                      </a:r>
-                    </a:p>
-                  </a:txBody>
-                  <a:tcPr>
-                    <a:solidFill>
-                      <a:srgbClr val="FFFFFF"/>
-                    </a:solidFill>
-                  </a:tcPr>
-                </a:tc>
-              </a:tr>
-              <a:tr h="660277">
-                <a:tc>
-                  <a:txBody>
-                    <a:bodyPr/>
-                    <a:lstStyle/>
-                    <a:p>
-                      <a:pPr>
-                        <a:defRPr sz="1300" b="0">
-                          <a:solidFill>
-                            <a:srgbClr val="000000"/>
-                          </a:solidFill>
-                          <a:latin typeface="Play"/>
-                          <a:ea typeface="Play"/>
-                          <a:cs typeface="Play"/>
-                        </a:defRPr>
-                      </a:pPr>
-                      <a:r>
-                        <a:t>Нарушения стиля</a:t>
-                      </a:r>
-                    </a:p>
-                  </a:txBody>
-                  <a:tcPr>
-                    <a:solidFill>
-                      <a:srgbClr val="FFFFFF"/>
-                    </a:solidFill>
-                  </a:tcPr>
-                </a:tc>
-                <a:tc>
-                  <a:txBody>
-                    <a:bodyPr/>
-                    <a:lstStyle/>
-                    <a:p>
-                      <a:pPr>
-                        <a:defRPr sz="1300" b="0">
-                          <a:solidFill>
-                            <a:srgbClr val="000000"/>
-                          </a:solidFill>
-                          <a:latin typeface="Play"/>
-                          <a:ea typeface="Play"/>
-                          <a:cs typeface="Play"/>
-                        </a:defRPr>
-                      </a:pPr>
-                      <a:r>
-                        <a:t>19/42</a:t>
-                      </a:r>
-                    </a:p>
-                  </a:txBody>
-                  <a:tcPr>
-                    <a:solidFill>
-                      <a:srgbClr val="FFFFFF"/>
-                    </a:solidFill>
-                  </a:tcPr>
-                </a:tc>
-                <a:tc>
-                  <a:txBody>
-                    <a:bodyPr/>
-                    <a:lstStyle/>
-                    <a:p>
-                      <a:pPr>
-                        <a:defRPr sz="1300" b="0">
-                          <a:solidFill>
-                            <a:srgbClr val="000000"/>
-                          </a:solidFill>
-                          <a:latin typeface="Play"/>
-                          <a:ea typeface="Play"/>
-                          <a:cs typeface="Play"/>
-                        </a:defRPr>
-                      </a:pPr>
-                      <a:r>
-                        <a:t>2/68</a:t>
-                      </a:r>
-                    </a:p>
-                  </a:txBody>
-                  <a:tcPr>
-                    <a:solidFill>
-                      <a:srgbClr val="FFFFFF"/>
-                    </a:solidFill>
-                  </a:tcPr>
-                </a:tc>
-              </a:tr>
-              <a:tr h="660279">
-                <a:tc>
-                  <a:txBody>
-                    <a:bodyPr/>
-                    <a:lstStyle/>
-                    <a:p>
-                      <a:pPr>
-                        <a:defRPr sz="1300" b="0">
-                          <a:solidFill>
-                            <a:srgbClr val="000000"/>
-                          </a:solidFill>
-                          <a:latin typeface="Play"/>
-                          <a:ea typeface="Play"/>
-                          <a:cs typeface="Play"/>
-                        </a:defRPr>
-                      </a:pPr>
-                      <a:r>
-                        <a:t>Запросы закрыты</a:t>
-                      </a:r>
-                    </a:p>
-                  </a:txBody>
-                  <a:tcPr>
-                    <a:solidFill>
-                      <a:srgbClr val="FFFFFF"/>
-                    </a:solidFill>
-                  </a:tcPr>
-                </a:tc>
-                <a:tc>
-                  <a:txBody>
-                    <a:bodyPr/>
-                    <a:lstStyle/>
-                    <a:p>
-                      <a:pPr>
-                        <a:defRPr sz="1300" b="0">
-                          <a:solidFill>
-                            <a:srgbClr val="000000"/>
-                          </a:solidFill>
-                          <a:latin typeface="Play"/>
-                          <a:ea typeface="Play"/>
-                          <a:cs typeface="Play"/>
-                        </a:defRPr>
-                      </a:pPr>
-                      <a:r>
-                        <a:t>11/нед</a:t>
-                      </a:r>
-                    </a:p>
-                  </a:txBody>
-                  <a:tcPr>
-                    <a:solidFill>
-                      <a:srgbClr val="FFFFFF"/>
-                    </a:solidFill>
-                  </a:tcPr>
-                </a:tc>
-                <a:tc>
-                  <a:txBody>
-                    <a:bodyPr/>
-                    <a:lstStyle/>
-                    <a:p>
-                      <a:pPr>
-                        <a:defRPr sz="1300" b="0">
-                          <a:solidFill>
-                            <a:srgbClr val="000000"/>
-                          </a:solidFill>
-                          <a:latin typeface="Play"/>
-                          <a:ea typeface="Play"/>
-                          <a:cs typeface="Play"/>
-                        </a:defRPr>
-                      </a:pPr>
-                      <a:r>
-                        <a:t>38/нед</a:t>
-                      </a:r>
-                    </a:p>
-                  </a:txBody>
-                  <a:tcPr>
-                    <a:solidFill>
-                      <a:srgbClr val="FFFFFF"/>
-                    </a:solidFill>
-                  </a:tcPr>
-                </a:tc>
-              </a:tr>
-            </a:tbl>
-          </a:graphicData>
-        </a:graphic>
-      </p:graphicFrame>
       <p:sp>
         <p:nvSpPr>
-          <p:cNvPr id="4" name="body"/>
+          <p:cNvPr id="3" name="lead"/>
           <p:cNvSpPr txBox="1"/>
           <p:nvPr/>
         </p:nvSpPr>
         <p:spPr>
           <a:xfrm>
-            <a:off x="677387" y="5255917"/>
-            <a:ext cx="10855878" cy="944880"/>
+            <a:off x="677387" y="2472589"/>
+            <a:ext cx="5454861" cy="2082800"/>
           </a:xfrm>
           <a:prstGeom prst="rect">
             <a:avLst/>
@@ -10165,6 +11632,55 @@
               <a:spcAft>
                 <a:spcPts val="300"/>
               </a:spcAft>
+              <a:defRPr sz="4000">
+                <a:solidFill>
+                  <a:srgbClr val="000000"/>
+                </a:solidFill>
+                <a:latin typeface="Play"/>
+                <a:ea typeface="Play"/>
+                <a:cs typeface="Play"/>
+              </a:defRPr>
+            </a:pPr>
+            <a:r>
+              <a:rPr sz="4000">
+                <a:solidFill>
+                  <a:srgbClr val="000000"/>
+                </a:solidFill>
+                <a:latin typeface="Play"/>
+                <a:ea typeface="Play"/>
+                <a:cs typeface="Play"/>
+              </a:rPr>
+              <a:t>Дизайнеры сосредоточились на сложных задачах</a:t>
+            </a:r>
+          </a:p>
+        </p:txBody>
+      </p:sp>
+      <p:sp>
+        <p:nvSpPr>
+          <p:cNvPr id="4" name="body"/>
+          <p:cNvSpPr txBox="1"/>
+          <p:nvPr/>
+        </p:nvSpPr>
+        <p:spPr>
+          <a:xfrm>
+            <a:off x="677387" y="5082055"/>
+            <a:ext cx="5454861" cy="497840"/>
+          </a:xfrm>
+          <a:prstGeom prst="rect">
+            <a:avLst/>
+          </a:prstGeom>
+          <a:noFill/>
+        </p:spPr>
+        <p:txBody>
+          <a:bodyPr wrap="square" lIns="76200" rIns="76200" tIns="50800" bIns="50800">
+            <a:spAutoFit/>
+          </a:bodyPr>
+          <a:lstStyle/>
+          <a:p>
+            <a:pPr algn="l">
+              <a:spcAft>
+                <a:spcPts val="300"/>
+              </a:spcAft>
               <a:defRPr sz="2400">
                 <a:solidFill>
                   <a:srgbClr val="000000"/>
@@ -10183,37 +11699,648 @@
                 <a:ea typeface="Play"/>
                 <a:cs typeface="Play"/>
               </a:rPr>
-              <a:t>• Пилот 6 недель на двух командах, 68 презентаций</a:t>
-            </a:r>
-          </a:p>
-          <a:p>
-            <a:pPr algn="l">
-              <a:spcAft>
-                <a:spcPts val="300"/>
-              </a:spcAft>
-              <a:defRPr sz="2400">
-                <a:solidFill>
-                  <a:srgbClr val="000000"/>
-                </a:solidFill>
-                <a:latin typeface="Play"/>
-                <a:ea typeface="Play"/>
-                <a:cs typeface="Play"/>
-              </a:defRPr>
-            </a:pPr>
-            <a:r>
-              <a:rPr sz="2400">
-                <a:solidFill>
-                  <a:srgbClr val="000000"/>
-                </a:solidFill>
-                <a:latin typeface="Play"/>
-                <a:ea typeface="Play"/>
-                <a:cs typeface="Play"/>
-              </a:rPr>
-              <a:t>• Сборка 4 мин, 1 день до первой версии, 2 нарушения стиля</a:t>
+              <a:t>Время на правки сократилось</a:t>
             </a:r>
           </a:p>
         </p:txBody>
       </p:sp>
+      <p:grpSp>
+        <p:nvGrpSpPr>
+          <p:cNvPr id="5" name="illustration:builtin-team"/>
+          <p:cNvGrpSpPr/>
+          <p:nvPr/>
+        </p:nvGrpSpPr>
+        <p:grpSpPr>
+          <a:xfrm>
+            <a:off x="7228121" y="2591194"/>
+            <a:ext cx="3600207" cy="3121858"/>
+            <a:chOff x="7228121" y="2591194"/>
+            <a:chExt cx="3600207" cy="3121858"/>
+          </a:xfrm>
+        </p:grpSpPr>
+        <p:sp>
+          <p:nvSpPr>
+            <p:cNvPr id="6" name="Oval 5"/>
+            <p:cNvSpPr/>
+            <p:nvPr/>
+          </p:nvSpPr>
+          <p:spPr>
+            <a:xfrm>
+              <a:off x="7454707" y="2591194"/>
+              <a:ext cx="3121858" cy="3121858"/>
+            </a:xfrm>
+            <a:prstGeom prst="ellipse">
+              <a:avLst/>
+            </a:prstGeom>
+            <a:solidFill>
+              <a:srgbClr val="D6E9FF"/>
+            </a:solidFill>
+            <a:ln>
+              <a:noFill/>
+            </a:ln>
+            <a:effectLst/>
+          </p:spPr>
+          <p:style>
+            <a:lnRef idx="1">
+              <a:schemeClr val="accent1"/>
+            </a:lnRef>
+            <a:fillRef idx="3">
+              <a:schemeClr val="accent1"/>
+            </a:fillRef>
+            <a:effectRef idx="2">
+              <a:schemeClr val="accent1"/>
+            </a:effectRef>
+            <a:fontRef idx="minor">
+              <a:schemeClr val="lt1"/>
+            </a:fontRef>
+          </p:style>
+          <p:txBody>
+            <a:bodyPr rtlCol="0" anchor="ctr"/>
+            <a:lstStyle/>
+            <a:p>
+              <a:pPr algn="ctr"/>
+            </a:p>
+          </p:txBody>
+        </p:sp>
+        <p:sp>
+          <p:nvSpPr>
+            <p:cNvPr id="7" name="Oval 6"/>
+            <p:cNvSpPr/>
+            <p:nvPr/>
+          </p:nvSpPr>
+          <p:spPr>
+            <a:xfrm>
+              <a:off x="7860045" y="3296130"/>
+              <a:ext cx="498490" cy="498490"/>
+            </a:xfrm>
+            <a:prstGeom prst="ellipse">
+              <a:avLst/>
+            </a:prstGeom>
+            <a:solidFill>
+              <a:srgbClr val="B2B2B2"/>
+            </a:solidFill>
+            <a:ln>
+              <a:noFill/>
+            </a:ln>
+            <a:effectLst/>
+          </p:spPr>
+          <p:style>
+            <a:lnRef idx="1">
+              <a:schemeClr val="accent1"/>
+            </a:lnRef>
+            <a:fillRef idx="3">
+              <a:schemeClr val="accent1"/>
+            </a:fillRef>
+            <a:effectRef idx="2">
+              <a:schemeClr val="accent1"/>
+            </a:effectRef>
+            <a:fontRef idx="minor">
+              <a:schemeClr val="lt1"/>
+            </a:fontRef>
+          </p:style>
+          <p:txBody>
+            <a:bodyPr rtlCol="0" anchor="ctr"/>
+            <a:lstStyle/>
+            <a:p>
+              <a:pPr algn="ctr"/>
+            </a:p>
+          </p:txBody>
+        </p:sp>
+        <p:sp>
+          <p:nvSpPr>
+            <p:cNvPr id="8" name="Freeform 7"/>
+            <p:cNvSpPr/>
+            <p:nvPr/>
+          </p:nvSpPr>
+          <p:spPr>
+            <a:xfrm>
+              <a:off x="7678776" y="3907913"/>
+              <a:ext cx="861029" cy="611784"/>
+            </a:xfrm>
+            <a:custGeom>
+              <a:avLst/>
+              <a:gdLst/>
+              <a:ahLst/>
+              <a:cxnLst/>
+              <a:rect l="l" t="t" r="r" b="b"/>
+              <a:pathLst>
+                <a:path w="861029" h="611784">
+                  <a:moveTo>
+                    <a:pt x="0" y="611784"/>
+                  </a:moveTo>
+                  <a:lnTo>
+                    <a:pt x="8270" y="492436"/>
+                  </a:lnTo>
+                  <a:lnTo>
+                    <a:pt x="32767" y="377670"/>
+                  </a:lnTo>
+                  <a:lnTo>
+                    <a:pt x="72558" y="271892"/>
+                  </a:lnTo>
+                  <a:lnTo>
+                    <a:pt x="126095" y="179193"/>
+                  </a:lnTo>
+                  <a:lnTo>
+                    <a:pt x="191327" y="103110"/>
+                  </a:lnTo>
+                  <a:lnTo>
+                    <a:pt x="265761" y="46564"/>
+                  </a:lnTo>
+                  <a:lnTo>
+                    <a:pt x="346526" y="11758"/>
+                  </a:lnTo>
+                  <a:lnTo>
+                    <a:pt x="430514" y="0"/>
+                  </a:lnTo>
+                  <a:lnTo>
+                    <a:pt x="514502" y="11758"/>
+                  </a:lnTo>
+                  <a:lnTo>
+                    <a:pt x="595268" y="46564"/>
+                  </a:lnTo>
+                  <a:lnTo>
+                    <a:pt x="669702" y="103110"/>
+                  </a:lnTo>
+                  <a:lnTo>
+                    <a:pt x="734933" y="179193"/>
+                  </a:lnTo>
+                  <a:lnTo>
+                    <a:pt x="788471" y="271892"/>
+                  </a:lnTo>
+                  <a:lnTo>
+                    <a:pt x="828262" y="377670"/>
+                  </a:lnTo>
+                  <a:lnTo>
+                    <a:pt x="852758" y="492436"/>
+                  </a:lnTo>
+                  <a:lnTo>
+                    <a:pt x="861029" y="611784"/>
+                  </a:lnTo>
+                  <a:close/>
+                </a:path>
+              </a:pathLst>
+            </a:custGeom>
+            <a:solidFill>
+              <a:srgbClr val="B2B2B2"/>
+            </a:solidFill>
+            <a:ln>
+              <a:noFill/>
+            </a:ln>
+            <a:effectLst/>
+          </p:spPr>
+          <p:style>
+            <a:lnRef idx="1">
+              <a:schemeClr val="accent1"/>
+            </a:lnRef>
+            <a:fillRef idx="3">
+              <a:schemeClr val="accent1"/>
+            </a:fillRef>
+            <a:effectRef idx="2">
+              <a:schemeClr val="accent1"/>
+            </a:effectRef>
+            <a:fontRef idx="minor">
+              <a:schemeClr val="lt1"/>
+            </a:fontRef>
+          </p:style>
+          <p:txBody>
+            <a:bodyPr rtlCol="0" anchor="ctr"/>
+            <a:lstStyle/>
+            <a:p>
+              <a:pPr algn="ctr"/>
+            </a:p>
+          </p:txBody>
+        </p:sp>
+        <p:sp>
+          <p:nvSpPr>
+            <p:cNvPr id="9" name="Oval 8"/>
+            <p:cNvSpPr/>
+            <p:nvPr/>
+          </p:nvSpPr>
+          <p:spPr>
+            <a:xfrm>
+              <a:off x="9672737" y="3296130"/>
+              <a:ext cx="498490" cy="498490"/>
+            </a:xfrm>
+            <a:prstGeom prst="ellipse">
+              <a:avLst/>
+            </a:prstGeom>
+            <a:solidFill>
+              <a:srgbClr val="FF3885"/>
+            </a:solidFill>
+            <a:ln>
+              <a:noFill/>
+            </a:ln>
+            <a:effectLst/>
+          </p:spPr>
+          <p:style>
+            <a:lnRef idx="1">
+              <a:schemeClr val="accent1"/>
+            </a:lnRef>
+            <a:fillRef idx="3">
+              <a:schemeClr val="accent1"/>
+            </a:fillRef>
+            <a:effectRef idx="2">
+              <a:schemeClr val="accent1"/>
+            </a:effectRef>
+            <a:fontRef idx="minor">
+              <a:schemeClr val="lt1"/>
+            </a:fontRef>
+          </p:style>
+          <p:txBody>
+            <a:bodyPr rtlCol="0" anchor="ctr"/>
+            <a:lstStyle/>
+            <a:p>
+              <a:pPr algn="ctr"/>
+            </a:p>
+          </p:txBody>
+        </p:sp>
+        <p:sp>
+          <p:nvSpPr>
+            <p:cNvPr id="10" name="Freeform 9"/>
+            <p:cNvSpPr/>
+            <p:nvPr/>
+          </p:nvSpPr>
+          <p:spPr>
+            <a:xfrm>
+              <a:off x="9491468" y="3907913"/>
+              <a:ext cx="861029" cy="611784"/>
+            </a:xfrm>
+            <a:custGeom>
+              <a:avLst/>
+              <a:gdLst/>
+              <a:ahLst/>
+              <a:cxnLst/>
+              <a:rect l="l" t="t" r="r" b="b"/>
+              <a:pathLst>
+                <a:path w="861029" h="611784">
+                  <a:moveTo>
+                    <a:pt x="0" y="611784"/>
+                  </a:moveTo>
+                  <a:lnTo>
+                    <a:pt x="8271" y="492436"/>
+                  </a:lnTo>
+                  <a:lnTo>
+                    <a:pt x="32767" y="377670"/>
+                  </a:lnTo>
+                  <a:lnTo>
+                    <a:pt x="72558" y="271892"/>
+                  </a:lnTo>
+                  <a:lnTo>
+                    <a:pt x="126096" y="179193"/>
+                  </a:lnTo>
+                  <a:lnTo>
+                    <a:pt x="191327" y="103110"/>
+                  </a:lnTo>
+                  <a:lnTo>
+                    <a:pt x="265761" y="46564"/>
+                  </a:lnTo>
+                  <a:lnTo>
+                    <a:pt x="346527" y="11758"/>
+                  </a:lnTo>
+                  <a:lnTo>
+                    <a:pt x="430515" y="0"/>
+                  </a:lnTo>
+                  <a:lnTo>
+                    <a:pt x="514503" y="11758"/>
+                  </a:lnTo>
+                  <a:lnTo>
+                    <a:pt x="595268" y="46564"/>
+                  </a:lnTo>
+                  <a:lnTo>
+                    <a:pt x="669702" y="103110"/>
+                  </a:lnTo>
+                  <a:lnTo>
+                    <a:pt x="734934" y="179193"/>
+                  </a:lnTo>
+                  <a:lnTo>
+                    <a:pt x="788471" y="271892"/>
+                  </a:lnTo>
+                  <a:lnTo>
+                    <a:pt x="828262" y="377670"/>
+                  </a:lnTo>
+                  <a:lnTo>
+                    <a:pt x="852759" y="492436"/>
+                  </a:lnTo>
+                  <a:lnTo>
+                    <a:pt x="861029" y="611784"/>
+                  </a:lnTo>
+                  <a:close/>
+                </a:path>
+              </a:pathLst>
+            </a:custGeom>
+            <a:solidFill>
+              <a:srgbClr val="FF3885"/>
+            </a:solidFill>
+            <a:ln>
+              <a:noFill/>
+            </a:ln>
+            <a:effectLst/>
+          </p:spPr>
+          <p:style>
+            <a:lnRef idx="1">
+              <a:schemeClr val="accent1"/>
+            </a:lnRef>
+            <a:fillRef idx="3">
+              <a:schemeClr val="accent1"/>
+            </a:fillRef>
+            <a:effectRef idx="2">
+              <a:schemeClr val="accent1"/>
+            </a:effectRef>
+            <a:fontRef idx="minor">
+              <a:schemeClr val="lt1"/>
+            </a:fontRef>
+          </p:style>
+          <p:txBody>
+            <a:bodyPr rtlCol="0" anchor="ctr"/>
+            <a:lstStyle/>
+            <a:p>
+              <a:pPr algn="ctr"/>
+            </a:p>
+          </p:txBody>
+        </p:sp>
+        <p:sp>
+          <p:nvSpPr>
+            <p:cNvPr id="11" name="Oval 10"/>
+            <p:cNvSpPr/>
+            <p:nvPr/>
+          </p:nvSpPr>
+          <p:spPr>
+            <a:xfrm>
+              <a:off x="8697157" y="3019191"/>
+              <a:ext cx="636959" cy="636959"/>
+            </a:xfrm>
+            <a:prstGeom prst="ellipse">
+              <a:avLst/>
+            </a:prstGeom>
+            <a:solidFill>
+              <a:srgbClr val="0077FF"/>
+            </a:solidFill>
+            <a:ln>
+              <a:noFill/>
+            </a:ln>
+            <a:effectLst/>
+          </p:spPr>
+          <p:style>
+            <a:lnRef idx="1">
+              <a:schemeClr val="accent1"/>
+            </a:lnRef>
+            <a:fillRef idx="3">
+              <a:schemeClr val="accent1"/>
+            </a:fillRef>
+            <a:effectRef idx="2">
+              <a:schemeClr val="accent1"/>
+            </a:effectRef>
+            <a:fontRef idx="minor">
+              <a:schemeClr val="lt1"/>
+            </a:fontRef>
+          </p:style>
+          <p:txBody>
+            <a:bodyPr rtlCol="0" anchor="ctr"/>
+            <a:lstStyle/>
+            <a:p>
+              <a:pPr algn="ctr"/>
+            </a:p>
+          </p:txBody>
+        </p:sp>
+        <p:sp>
+          <p:nvSpPr>
+            <p:cNvPr id="12" name="Freeform 11"/>
+            <p:cNvSpPr/>
+            <p:nvPr/>
+          </p:nvSpPr>
+          <p:spPr>
+            <a:xfrm>
+              <a:off x="8465535" y="3800914"/>
+              <a:ext cx="1100203" cy="781724"/>
+            </a:xfrm>
+            <a:custGeom>
+              <a:avLst/>
+              <a:gdLst/>
+              <a:ahLst/>
+              <a:cxnLst/>
+              <a:rect l="l" t="t" r="r" b="b"/>
+              <a:pathLst>
+                <a:path w="1100203" h="781724">
+                  <a:moveTo>
+                    <a:pt x="0" y="781724"/>
+                  </a:moveTo>
+                  <a:lnTo>
+                    <a:pt x="10574" y="629218"/>
+                  </a:lnTo>
+                  <a:lnTo>
+                    <a:pt x="41868" y="482567"/>
+                  </a:lnTo>
+                  <a:lnTo>
+                    <a:pt x="92711" y="347420"/>
+                  </a:lnTo>
+                  <a:lnTo>
+                    <a:pt x="161115" y="228966"/>
+                  </a:lnTo>
+                  <a:lnTo>
+                    <a:pt x="244487" y="131748"/>
+                  </a:lnTo>
+                  <a:lnTo>
+                    <a:pt x="339590" y="59504"/>
+                  </a:lnTo>
+                  <a:lnTo>
+                    <a:pt x="442788" y="15018"/>
+                  </a:lnTo>
+                  <a:lnTo>
+                    <a:pt x="550102" y="0"/>
+                  </a:lnTo>
+                  <a:lnTo>
+                    <a:pt x="657415" y="15018"/>
+                  </a:lnTo>
+                  <a:lnTo>
+                    <a:pt x="760613" y="59504"/>
+                  </a:lnTo>
+                  <a:lnTo>
+                    <a:pt x="855716" y="131748"/>
+                  </a:lnTo>
+                  <a:lnTo>
+                    <a:pt x="939088" y="228966"/>
+                  </a:lnTo>
+                  <a:lnTo>
+                    <a:pt x="1007492" y="347420"/>
+                  </a:lnTo>
+                  <a:lnTo>
+                    <a:pt x="1058335" y="482567"/>
+                  </a:lnTo>
+                  <a:lnTo>
+                    <a:pt x="1089629" y="629218"/>
+                  </a:lnTo>
+                  <a:lnTo>
+                    <a:pt x="1100203" y="781724"/>
+                  </a:lnTo>
+                  <a:close/>
+                </a:path>
+              </a:pathLst>
+            </a:custGeom>
+            <a:solidFill>
+              <a:srgbClr val="0077FF"/>
+            </a:solidFill>
+            <a:ln>
+              <a:noFill/>
+            </a:ln>
+            <a:effectLst/>
+          </p:spPr>
+          <p:style>
+            <a:lnRef idx="1">
+              <a:schemeClr val="accent1"/>
+            </a:lnRef>
+            <a:fillRef idx="3">
+              <a:schemeClr val="accent1"/>
+            </a:fillRef>
+            <a:effectRef idx="2">
+              <a:schemeClr val="accent1"/>
+            </a:effectRef>
+            <a:fontRef idx="minor">
+              <a:schemeClr val="lt1"/>
+            </a:fontRef>
+          </p:style>
+          <p:txBody>
+            <a:bodyPr rtlCol="0" anchor="ctr"/>
+            <a:lstStyle/>
+            <a:p>
+              <a:pPr algn="ctr"/>
+            </a:p>
+          </p:txBody>
+        </p:sp>
+        <p:sp>
+          <p:nvSpPr>
+            <p:cNvPr id="13" name="Rounded Rectangle 12"/>
+            <p:cNvSpPr/>
+            <p:nvPr/>
+          </p:nvSpPr>
+          <p:spPr>
+            <a:xfrm>
+              <a:off x="7706470" y="5058469"/>
+              <a:ext cx="2618333" cy="151057"/>
+            </a:xfrm>
+            <a:prstGeom prst="roundRect">
+              <a:avLst>
+                <a:gd name="adj" fmla="val 50000"/>
+              </a:avLst>
+            </a:prstGeom>
+            <a:solidFill>
+              <a:srgbClr val="000000"/>
+            </a:solidFill>
+            <a:ln>
+              <a:noFill/>
+            </a:ln>
+            <a:effectLst/>
+          </p:spPr>
+          <p:style>
+            <a:lnRef idx="1">
+              <a:schemeClr val="accent1"/>
+            </a:lnRef>
+            <a:fillRef idx="3">
+              <a:schemeClr val="accent1"/>
+            </a:fillRef>
+            <a:effectRef idx="2">
+              <a:schemeClr val="accent1"/>
+            </a:effectRef>
+            <a:fontRef idx="minor">
+              <a:schemeClr val="lt1"/>
+            </a:fontRef>
+          </p:style>
+          <p:txBody>
+            <a:bodyPr rtlCol="0" anchor="ctr"/>
+            <a:lstStyle/>
+            <a:p>
+              <a:pPr algn="ctr"/>
+            </a:p>
+          </p:txBody>
+        </p:sp>
+        <p:sp>
+          <p:nvSpPr>
+            <p:cNvPr id="14" name="Oval 13"/>
+            <p:cNvSpPr/>
+            <p:nvPr/>
+          </p:nvSpPr>
+          <p:spPr>
+            <a:xfrm>
+              <a:off x="10526213" y="3044367"/>
+              <a:ext cx="302115" cy="302115"/>
+            </a:xfrm>
+            <a:prstGeom prst="ellipse">
+              <a:avLst/>
+            </a:prstGeom>
+            <a:solidFill>
+              <a:srgbClr val="0077FF"/>
+            </a:solidFill>
+            <a:ln>
+              <a:noFill/>
+            </a:ln>
+            <a:effectLst/>
+          </p:spPr>
+          <p:style>
+            <a:lnRef idx="1">
+              <a:schemeClr val="accent1"/>
+            </a:lnRef>
+            <a:fillRef idx="3">
+              <a:schemeClr val="accent1"/>
+            </a:fillRef>
+            <a:effectRef idx="2">
+              <a:schemeClr val="accent1"/>
+            </a:effectRef>
+            <a:fontRef idx="minor">
+              <a:schemeClr val="lt1"/>
+            </a:fontRef>
+          </p:style>
+          <p:txBody>
+            <a:bodyPr rtlCol="0" anchor="ctr"/>
+            <a:lstStyle/>
+            <a:p>
+              <a:pPr algn="ctr"/>
+            </a:p>
+          </p:txBody>
+        </p:sp>
+        <p:sp>
+          <p:nvSpPr>
+            <p:cNvPr id="15" name="Oval 14"/>
+            <p:cNvSpPr/>
+            <p:nvPr/>
+          </p:nvSpPr>
+          <p:spPr>
+            <a:xfrm>
+              <a:off x="7228121" y="3422011"/>
+              <a:ext cx="201410" cy="201410"/>
+            </a:xfrm>
+            <a:prstGeom prst="ellipse">
+              <a:avLst/>
+            </a:prstGeom>
+            <a:solidFill>
+              <a:srgbClr val="FF3885"/>
+            </a:solidFill>
+            <a:ln>
+              <a:noFill/>
+            </a:ln>
+            <a:effectLst/>
+          </p:spPr>
+          <p:style>
+            <a:lnRef idx="1">
+              <a:schemeClr val="accent1"/>
+            </a:lnRef>
+            <a:fillRef idx="3">
+              <a:schemeClr val="accent1"/>
+            </a:fillRef>
+            <a:effectRef idx="2">
+              <a:schemeClr val="accent1"/>
+            </a:effectRef>
+            <a:fontRef idx="minor">
+              <a:schemeClr val="lt1"/>
+            </a:fontRef>
+          </p:style>
+          <p:txBody>
+            <a:bodyPr rtlCol="0" anchor="ctr"/>
+            <a:lstStyle/>
+            <a:p>
+              <a:pPr algn="ctr"/>
+            </a:p>
+          </p:txBody>
+        </p:sp>
+      </p:grpSp>
     </p:spTree>
   </p:cSld>
   <p:clrMapOvr>
@@ -10222,7 +12349,766 @@
 </p:sld>
 </file>
 
-<file path=ppt/slides/slide62.xml><?xml version="1.0" encoding="utf-8"?>
+<file path=ppt/slides/slide63.xml><?xml version="1.0" encoding="utf-8"?>
+<p:sld xmlns:a="http://schemas.openxmlformats.org/drawingml/2006/main" xmlns:p="http://schemas.openxmlformats.org/presentationml/2006/main" xmlns:r="http://schemas.openxmlformats.org/officeDocument/2006/relationships">
+  <p:cSld>
+    <p:bg>
+      <p:bgPr>
+        <a:solidFill>
+          <a:schemeClr val="lt2"/>
+        </a:solidFill>
+      </p:bgPr>
+    </p:bg>
+    <p:spTree>
+      <p:nvGrpSpPr>
+        <p:cNvPr id="1" name=""/>
+        <p:cNvGrpSpPr/>
+        <p:nvPr/>
+      </p:nvGrpSpPr>
+      <p:grpSpPr/>
+      <p:sp>
+        <p:nvSpPr>
+          <p:cNvPr id="2" name="title"/>
+          <p:cNvSpPr txBox="1"/>
+          <p:nvPr/>
+        </p:nvSpPr>
+        <p:spPr>
+          <a:xfrm>
+            <a:off x="677875" y="692177"/>
+            <a:ext cx="10855391" cy="1447800"/>
+          </a:xfrm>
+          <a:prstGeom prst="rect">
+            <a:avLst/>
+          </a:prstGeom>
+          <a:noFill/>
+        </p:spPr>
+        <p:txBody>
+          <a:bodyPr wrap="square" lIns="76200" rIns="76200" tIns="50800" bIns="50800">
+            <a:spAutoFit/>
+          </a:bodyPr>
+          <a:lstStyle/>
+          <a:p>
+            <a:pPr algn="l">
+              <a:spcAft>
+                <a:spcPts val="300"/>
+              </a:spcAft>
+              <a:defRPr sz="4000">
+                <a:solidFill>
+                  <a:srgbClr val="000000"/>
+                </a:solidFill>
+                <a:latin typeface="Arial"/>
+                <a:ea typeface="Arial"/>
+                <a:cs typeface="Arial"/>
+              </a:defRPr>
+            </a:pPr>
+            <a:r>
+              <a:rPr sz="4000">
+                <a:solidFill>
+                  <a:srgbClr val="000000"/>
+                </a:solidFill>
+                <a:latin typeface="Arial"/>
+                <a:ea typeface="Arial"/>
+                <a:cs typeface="Arial"/>
+              </a:rPr>
+              <a:t>Инференс за 6 недель стоит 1 400 рублей</a:t>
+            </a:r>
+          </a:p>
+        </p:txBody>
+      </p:sp>
+      <p:sp>
+        <p:nvSpPr>
+          <p:cNvPr id="3" name="lead"/>
+          <p:cNvSpPr txBox="1"/>
+          <p:nvPr/>
+        </p:nvSpPr>
+        <p:spPr>
+          <a:xfrm>
+            <a:off x="677875" y="2829205"/>
+            <a:ext cx="5454608" cy="1686560"/>
+          </a:xfrm>
+          <a:prstGeom prst="rect">
+            <a:avLst/>
+          </a:prstGeom>
+          <a:noFill/>
+        </p:spPr>
+        <p:txBody>
+          <a:bodyPr wrap="square" lIns="76200" rIns="76200" tIns="50800" bIns="50800">
+            <a:spAutoFit/>
+          </a:bodyPr>
+          <a:lstStyle/>
+          <a:p>
+            <a:pPr algn="ctr">
+              <a:spcAft>
+                <a:spcPts val="300"/>
+              </a:spcAft>
+              <a:defRPr sz="4800">
+                <a:solidFill>
+                  <a:srgbClr val="000000"/>
+                </a:solidFill>
+                <a:latin typeface="Play"/>
+                <a:ea typeface="Play"/>
+                <a:cs typeface="Play"/>
+              </a:defRPr>
+            </a:pPr>
+            <a:r>
+              <a:rPr sz="4800">
+                <a:solidFill>
+                  <a:srgbClr val="000000"/>
+                </a:solidFill>
+                <a:latin typeface="Play"/>
+                <a:ea typeface="Play"/>
+                <a:cs typeface="Play"/>
+              </a:rPr>
+              <a:t>Сервис на 2 vCPU / 2 GB RAM</a:t>
+            </a:r>
+          </a:p>
+        </p:txBody>
+      </p:sp>
+      <p:sp>
+        <p:nvSpPr>
+          <p:cNvPr id="4" name="body"/>
+          <p:cNvSpPr txBox="1"/>
+          <p:nvPr/>
+        </p:nvSpPr>
+        <p:spPr>
+          <a:xfrm>
+            <a:off x="677875" y="5121679"/>
+            <a:ext cx="5454608" cy="629920"/>
+          </a:xfrm>
+          <a:prstGeom prst="rect">
+            <a:avLst/>
+          </a:prstGeom>
+          <a:noFill/>
+        </p:spPr>
+        <p:txBody>
+          <a:bodyPr wrap="square" lIns="76200" rIns="76200" tIns="50800" bIns="50800">
+            <a:spAutoFit/>
+          </a:bodyPr>
+          <a:lstStyle/>
+          <a:p>
+            <a:pPr algn="ctr">
+              <a:spcAft>
+                <a:spcPts val="300"/>
+              </a:spcAft>
+              <a:defRPr sz="3200">
+                <a:solidFill>
+                  <a:srgbClr val="000000"/>
+                </a:solidFill>
+                <a:latin typeface="Play"/>
+                <a:ea typeface="Play"/>
+                <a:cs typeface="Play"/>
+              </a:defRPr>
+            </a:pPr>
+            <a:r>
+              <a:rPr sz="3200">
+                <a:solidFill>
+                  <a:srgbClr val="000000"/>
+                </a:solidFill>
+                <a:latin typeface="Play"/>
+                <a:ea typeface="Play"/>
+                <a:cs typeface="Play"/>
+              </a:rPr>
+              <a:t>Модель gpt-oss-20b</a:t>
+            </a:r>
+          </a:p>
+        </p:txBody>
+      </p:sp>
+      <p:grpSp>
+        <p:nvGrpSpPr>
+          <p:cNvPr id="5" name="illustration:builtin-money"/>
+          <p:cNvGrpSpPr/>
+          <p:nvPr/>
+        </p:nvGrpSpPr>
+        <p:grpSpPr>
+          <a:xfrm>
+            <a:off x="7429722" y="2704370"/>
+            <a:ext cx="3172063" cy="3172063"/>
+            <a:chOff x="7429722" y="2704370"/>
+            <a:chExt cx="3172063" cy="3172063"/>
+          </a:xfrm>
+        </p:grpSpPr>
+        <p:sp>
+          <p:nvSpPr>
+            <p:cNvPr id="6" name="Oval 5"/>
+            <p:cNvSpPr/>
+            <p:nvPr/>
+          </p:nvSpPr>
+          <p:spPr>
+            <a:xfrm>
+              <a:off x="7429722" y="2704370"/>
+              <a:ext cx="3172063" cy="3172063"/>
+            </a:xfrm>
+            <a:prstGeom prst="ellipse">
+              <a:avLst/>
+            </a:prstGeom>
+            <a:solidFill>
+              <a:srgbClr val="D6E9FF"/>
+            </a:solidFill>
+            <a:ln>
+              <a:noFill/>
+            </a:ln>
+            <a:effectLst/>
+          </p:spPr>
+          <p:style>
+            <a:lnRef idx="1">
+              <a:schemeClr val="accent1"/>
+            </a:lnRef>
+            <a:fillRef idx="3">
+              <a:schemeClr val="accent1"/>
+            </a:fillRef>
+            <a:effectRef idx="2">
+              <a:schemeClr val="accent1"/>
+            </a:effectRef>
+            <a:fontRef idx="minor">
+              <a:schemeClr val="lt1"/>
+            </a:fontRef>
+          </p:style>
+          <p:txBody>
+            <a:bodyPr rtlCol="0" anchor="ctr"/>
+            <a:lstStyle/>
+            <a:p>
+              <a:pPr algn="ctr"/>
+            </a:p>
+          </p:txBody>
+        </p:sp>
+        <p:sp>
+          <p:nvSpPr>
+            <p:cNvPr id="7" name="Rounded Rectangle 6"/>
+            <p:cNvSpPr/>
+            <p:nvPr/>
+          </p:nvSpPr>
+          <p:spPr>
+            <a:xfrm>
+              <a:off x="7656298" y="3610674"/>
+              <a:ext cx="2215409" cy="1309105"/>
+            </a:xfrm>
+            <a:prstGeom prst="roundRect">
+              <a:avLst>
+                <a:gd name="adj" fmla="val 13461"/>
+              </a:avLst>
+            </a:prstGeom>
+            <a:solidFill>
+              <a:srgbClr val="0077FF"/>
+            </a:solidFill>
+            <a:ln>
+              <a:noFill/>
+            </a:ln>
+            <a:effectLst/>
+          </p:spPr>
+          <p:style>
+            <a:lnRef idx="1">
+              <a:schemeClr val="accent1"/>
+            </a:lnRef>
+            <a:fillRef idx="3">
+              <a:schemeClr val="accent1"/>
+            </a:fillRef>
+            <a:effectRef idx="2">
+              <a:schemeClr val="accent1"/>
+            </a:effectRef>
+            <a:fontRef idx="minor">
+              <a:schemeClr val="lt1"/>
+            </a:fontRef>
+          </p:style>
+          <p:txBody>
+            <a:bodyPr rtlCol="0" anchor="ctr"/>
+            <a:lstStyle/>
+            <a:p>
+              <a:pPr algn="ctr"/>
+            </a:p>
+          </p:txBody>
+        </p:sp>
+        <p:sp>
+          <p:nvSpPr>
+            <p:cNvPr id="8" name="Oval 7"/>
+            <p:cNvSpPr/>
+            <p:nvPr/>
+          </p:nvSpPr>
+          <p:spPr>
+            <a:xfrm>
+              <a:off x="8386376" y="3887600"/>
+              <a:ext cx="755253" cy="755253"/>
+            </a:xfrm>
+            <a:prstGeom prst="ellipse">
+              <a:avLst/>
+            </a:prstGeom>
+            <a:solidFill>
+              <a:srgbClr val="FFFFFF"/>
+            </a:solidFill>
+            <a:ln>
+              <a:noFill/>
+            </a:ln>
+            <a:effectLst/>
+          </p:spPr>
+          <p:style>
+            <a:lnRef idx="1">
+              <a:schemeClr val="accent1"/>
+            </a:lnRef>
+            <a:fillRef idx="3">
+              <a:schemeClr val="accent1"/>
+            </a:fillRef>
+            <a:effectRef idx="2">
+              <a:schemeClr val="accent1"/>
+            </a:effectRef>
+            <a:fontRef idx="minor">
+              <a:schemeClr val="lt1"/>
+            </a:fontRef>
+          </p:style>
+          <p:txBody>
+            <a:bodyPr rtlCol="0" anchor="ctr"/>
+            <a:lstStyle/>
+            <a:p>
+              <a:pPr algn="ctr"/>
+            </a:p>
+          </p:txBody>
+        </p:sp>
+        <p:sp>
+          <p:nvSpPr>
+            <p:cNvPr id="9" name="Freeform 8"/>
+            <p:cNvSpPr/>
+            <p:nvPr/>
+          </p:nvSpPr>
+          <p:spPr>
+            <a:xfrm>
+              <a:off x="8612952" y="4063826"/>
+              <a:ext cx="302101" cy="427977"/>
+            </a:xfrm>
+            <a:custGeom>
+              <a:avLst/>
+              <a:gdLst/>
+              <a:ahLst/>
+              <a:cxnLst/>
+              <a:rect l="l" t="t" r="r" b="b"/>
+              <a:pathLst>
+                <a:path w="302101" h="427977">
+                  <a:moveTo>
+                    <a:pt x="75525" y="427977"/>
+                  </a:moveTo>
+                  <a:lnTo>
+                    <a:pt x="75525" y="0"/>
+                  </a:lnTo>
+                  <a:lnTo>
+                    <a:pt x="201401" y="0"/>
+                  </a:lnTo>
+                  <a:lnTo>
+                    <a:pt x="221050" y="1938"/>
+                  </a:lnTo>
+                  <a:lnTo>
+                    <a:pt x="239931" y="7666"/>
+                  </a:lnTo>
+                  <a:lnTo>
+                    <a:pt x="257352" y="16968"/>
+                  </a:lnTo>
+                  <a:lnTo>
+                    <a:pt x="272608" y="29493"/>
+                  </a:lnTo>
+                  <a:lnTo>
+                    <a:pt x="285133" y="44749"/>
+                  </a:lnTo>
+                  <a:lnTo>
+                    <a:pt x="294435" y="62170"/>
+                  </a:lnTo>
+                  <a:lnTo>
+                    <a:pt x="300163" y="81051"/>
+                  </a:lnTo>
+                  <a:lnTo>
+                    <a:pt x="302101" y="100700"/>
+                  </a:lnTo>
+                  <a:lnTo>
+                    <a:pt x="300163" y="120350"/>
+                  </a:lnTo>
+                  <a:lnTo>
+                    <a:pt x="294435" y="139231"/>
+                  </a:lnTo>
+                  <a:lnTo>
+                    <a:pt x="285133" y="156652"/>
+                  </a:lnTo>
+                  <a:lnTo>
+                    <a:pt x="272608" y="171908"/>
+                  </a:lnTo>
+                  <a:lnTo>
+                    <a:pt x="257352" y="184433"/>
+                  </a:lnTo>
+                  <a:lnTo>
+                    <a:pt x="239931" y="193735"/>
+                  </a:lnTo>
+                  <a:lnTo>
+                    <a:pt x="221050" y="199462"/>
+                  </a:lnTo>
+                  <a:lnTo>
+                    <a:pt x="201401" y="201401"/>
+                  </a:lnTo>
+                  <a:lnTo>
+                    <a:pt x="0" y="201401"/>
+                  </a:lnTo>
+                </a:path>
+              </a:pathLst>
+            </a:custGeom>
+            <a:noFill/>
+            <a:ln w="75525" cap="rnd">
+              <a:solidFill>
+                <a:srgbClr val="0077FF"/>
+              </a:solidFill>
+              <a:round/>
+            </a:ln>
+            <a:effectLst/>
+          </p:spPr>
+          <p:style>
+            <a:lnRef idx="1">
+              <a:schemeClr val="accent1"/>
+            </a:lnRef>
+            <a:fillRef idx="3">
+              <a:schemeClr val="accent1"/>
+            </a:fillRef>
+            <a:effectRef idx="2">
+              <a:schemeClr val="accent1"/>
+            </a:effectRef>
+            <a:fontRef idx="minor">
+              <a:schemeClr val="lt1"/>
+            </a:fontRef>
+          </p:style>
+          <p:txBody>
+            <a:bodyPr rtlCol="0" anchor="ctr"/>
+            <a:lstStyle/>
+            <a:p>
+              <a:pPr algn="ctr"/>
+            </a:p>
+          </p:txBody>
+        </p:sp>
+        <p:sp>
+          <p:nvSpPr>
+            <p:cNvPr id="10" name="Freeform 9"/>
+            <p:cNvSpPr/>
+            <p:nvPr/>
+          </p:nvSpPr>
+          <p:spPr>
+            <a:xfrm>
+              <a:off x="8612952" y="4378515"/>
+              <a:ext cx="226576" cy="0"/>
+            </a:xfrm>
+            <a:custGeom>
+              <a:avLst/>
+              <a:gdLst/>
+              <a:ahLst/>
+              <a:cxnLst/>
+              <a:rect l="l" t="t" r="r" b="b"/>
+              <a:pathLst>
+                <a:path w="226576" h="0">
+                  <a:moveTo>
+                    <a:pt x="0" y="0"/>
+                  </a:moveTo>
+                  <a:lnTo>
+                    <a:pt x="226576" y="0"/>
+                  </a:lnTo>
+                </a:path>
+              </a:pathLst>
+            </a:custGeom>
+            <a:solidFill>
+              <a:srgbClr val="000000"/>
+            </a:solidFill>
+            <a:ln w="75525" cap="rnd">
+              <a:solidFill>
+                <a:srgbClr val="0077FF"/>
+              </a:solidFill>
+              <a:round/>
+            </a:ln>
+            <a:effectLst/>
+          </p:spPr>
+          <p:style>
+            <a:lnRef idx="1">
+              <a:schemeClr val="accent1"/>
+            </a:lnRef>
+            <a:fillRef idx="3">
+              <a:schemeClr val="accent1"/>
+            </a:fillRef>
+            <a:effectRef idx="2">
+              <a:schemeClr val="accent1"/>
+            </a:effectRef>
+            <a:fontRef idx="minor">
+              <a:schemeClr val="lt1"/>
+            </a:fontRef>
+          </p:style>
+          <p:txBody>
+            <a:bodyPr rtlCol="0" anchor="ctr"/>
+            <a:lstStyle/>
+            <a:p>
+              <a:pPr algn="ctr"/>
+            </a:p>
+          </p:txBody>
+        </p:sp>
+        <p:sp>
+          <p:nvSpPr>
+            <p:cNvPr id="11" name="Oval 10"/>
+            <p:cNvSpPr/>
+            <p:nvPr/>
+          </p:nvSpPr>
+          <p:spPr>
+            <a:xfrm>
+              <a:off x="9519256" y="5146356"/>
+              <a:ext cx="1007004" cy="302101"/>
+            </a:xfrm>
+            <a:prstGeom prst="ellipse">
+              <a:avLst/>
+            </a:prstGeom>
+            <a:solidFill>
+              <a:srgbClr val="FF3885"/>
+            </a:solidFill>
+            <a:ln>
+              <a:noFill/>
+            </a:ln>
+            <a:effectLst/>
+          </p:spPr>
+          <p:style>
+            <a:lnRef idx="1">
+              <a:schemeClr val="accent1"/>
+            </a:lnRef>
+            <a:fillRef idx="3">
+              <a:schemeClr val="accent1"/>
+            </a:fillRef>
+            <a:effectRef idx="2">
+              <a:schemeClr val="accent1"/>
+            </a:effectRef>
+            <a:fontRef idx="minor">
+              <a:schemeClr val="lt1"/>
+            </a:fontRef>
+          </p:style>
+          <p:txBody>
+            <a:bodyPr rtlCol="0" anchor="ctr"/>
+            <a:lstStyle/>
+            <a:p>
+              <a:pPr algn="ctr"/>
+            </a:p>
+          </p:txBody>
+        </p:sp>
+        <p:sp>
+          <p:nvSpPr>
+            <p:cNvPr id="12" name="Oval 11"/>
+            <p:cNvSpPr/>
+            <p:nvPr/>
+          </p:nvSpPr>
+          <p:spPr>
+            <a:xfrm>
+              <a:off x="9519256" y="4919780"/>
+              <a:ext cx="1007004" cy="302101"/>
+            </a:xfrm>
+            <a:prstGeom prst="ellipse">
+              <a:avLst/>
+            </a:prstGeom>
+            <a:solidFill>
+              <a:srgbClr val="B2B2B2"/>
+            </a:solidFill>
+            <a:ln>
+              <a:noFill/>
+            </a:ln>
+            <a:effectLst/>
+          </p:spPr>
+          <p:style>
+            <a:lnRef idx="1">
+              <a:schemeClr val="accent1"/>
+            </a:lnRef>
+            <a:fillRef idx="3">
+              <a:schemeClr val="accent1"/>
+            </a:fillRef>
+            <a:effectRef idx="2">
+              <a:schemeClr val="accent1"/>
+            </a:effectRef>
+            <a:fontRef idx="minor">
+              <a:schemeClr val="lt1"/>
+            </a:fontRef>
+          </p:style>
+          <p:txBody>
+            <a:bodyPr rtlCol="0" anchor="ctr"/>
+            <a:lstStyle/>
+            <a:p>
+              <a:pPr algn="ctr"/>
+            </a:p>
+          </p:txBody>
+        </p:sp>
+        <p:sp>
+          <p:nvSpPr>
+            <p:cNvPr id="13" name="Oval 12"/>
+            <p:cNvSpPr/>
+            <p:nvPr/>
+          </p:nvSpPr>
+          <p:spPr>
+            <a:xfrm>
+              <a:off x="9519256" y="4693204"/>
+              <a:ext cx="1007004" cy="302101"/>
+            </a:xfrm>
+            <a:prstGeom prst="ellipse">
+              <a:avLst/>
+            </a:prstGeom>
+            <a:solidFill>
+              <a:srgbClr val="FF3885"/>
+            </a:solidFill>
+            <a:ln>
+              <a:noFill/>
+            </a:ln>
+            <a:effectLst/>
+          </p:spPr>
+          <p:style>
+            <a:lnRef idx="1">
+              <a:schemeClr val="accent1"/>
+            </a:lnRef>
+            <a:fillRef idx="3">
+              <a:schemeClr val="accent1"/>
+            </a:fillRef>
+            <a:effectRef idx="2">
+              <a:schemeClr val="accent1"/>
+            </a:effectRef>
+            <a:fontRef idx="minor">
+              <a:schemeClr val="lt1"/>
+            </a:fontRef>
+          </p:style>
+          <p:txBody>
+            <a:bodyPr rtlCol="0" anchor="ctr"/>
+            <a:lstStyle/>
+            <a:p>
+              <a:pPr algn="ctr"/>
+            </a:p>
+          </p:txBody>
+        </p:sp>
+        <p:sp>
+          <p:nvSpPr>
+            <p:cNvPr id="14" name="Oval 13"/>
+            <p:cNvSpPr/>
+            <p:nvPr/>
+          </p:nvSpPr>
+          <p:spPr>
+            <a:xfrm>
+              <a:off x="9519256" y="4466628"/>
+              <a:ext cx="1007004" cy="302101"/>
+            </a:xfrm>
+            <a:prstGeom prst="ellipse">
+              <a:avLst/>
+            </a:prstGeom>
+            <a:solidFill>
+              <a:srgbClr val="B2B2B2"/>
+            </a:solidFill>
+            <a:ln>
+              <a:noFill/>
+            </a:ln>
+            <a:effectLst/>
+          </p:spPr>
+          <p:style>
+            <a:lnRef idx="1">
+              <a:schemeClr val="accent1"/>
+            </a:lnRef>
+            <a:fillRef idx="3">
+              <a:schemeClr val="accent1"/>
+            </a:fillRef>
+            <a:effectRef idx="2">
+              <a:schemeClr val="accent1"/>
+            </a:effectRef>
+            <a:fontRef idx="minor">
+              <a:schemeClr val="lt1"/>
+            </a:fontRef>
+          </p:style>
+          <p:txBody>
+            <a:bodyPr rtlCol="0" anchor="ctr"/>
+            <a:lstStyle/>
+            <a:p>
+              <a:pPr algn="ctr"/>
+            </a:p>
+          </p:txBody>
+        </p:sp>
+        <p:sp>
+          <p:nvSpPr>
+            <p:cNvPr id="15" name="Oval 14"/>
+            <p:cNvSpPr/>
+            <p:nvPr/>
+          </p:nvSpPr>
+          <p:spPr>
+            <a:xfrm>
+              <a:off x="9519256" y="4240052"/>
+              <a:ext cx="1007004" cy="302101"/>
+            </a:xfrm>
+            <a:prstGeom prst="ellipse">
+              <a:avLst/>
+            </a:prstGeom>
+            <a:solidFill>
+              <a:srgbClr val="FF3885"/>
+            </a:solidFill>
+            <a:ln>
+              <a:noFill/>
+            </a:ln>
+            <a:effectLst/>
+          </p:spPr>
+          <p:style>
+            <a:lnRef idx="1">
+              <a:schemeClr val="accent1"/>
+            </a:lnRef>
+            <a:fillRef idx="3">
+              <a:schemeClr val="accent1"/>
+            </a:fillRef>
+            <a:effectRef idx="2">
+              <a:schemeClr val="accent1"/>
+            </a:effectRef>
+            <a:fontRef idx="minor">
+              <a:schemeClr val="lt1"/>
+            </a:fontRef>
+          </p:style>
+          <p:txBody>
+            <a:bodyPr rtlCol="0" anchor="ctr"/>
+            <a:lstStyle/>
+            <a:p>
+              <a:pPr algn="ctr"/>
+            </a:p>
+          </p:txBody>
+        </p:sp>
+        <p:sp>
+          <p:nvSpPr>
+            <p:cNvPr id="16" name="Oval 15"/>
+            <p:cNvSpPr/>
+            <p:nvPr/>
+          </p:nvSpPr>
+          <p:spPr>
+            <a:xfrm>
+              <a:off x="7555597" y="5171531"/>
+              <a:ext cx="302101" cy="302101"/>
+            </a:xfrm>
+            <a:prstGeom prst="ellipse">
+              <a:avLst/>
+            </a:prstGeom>
+            <a:solidFill>
+              <a:srgbClr val="FF3885"/>
+            </a:solidFill>
+            <a:ln>
+              <a:noFill/>
+            </a:ln>
+            <a:effectLst/>
+          </p:spPr>
+          <p:style>
+            <a:lnRef idx="1">
+              <a:schemeClr val="accent1"/>
+            </a:lnRef>
+            <a:fillRef idx="3">
+              <a:schemeClr val="accent1"/>
+            </a:fillRef>
+            <a:effectRef idx="2">
+              <a:schemeClr val="accent1"/>
+            </a:effectRef>
+            <a:fontRef idx="minor">
+              <a:schemeClr val="lt1"/>
+            </a:fontRef>
+          </p:style>
+          <p:txBody>
+            <a:bodyPr rtlCol="0" anchor="ctr"/>
+            <a:lstStyle/>
+            <a:p>
+              <a:pPr algn="ctr"/>
+            </a:p>
+          </p:txBody>
+        </p:sp>
+      </p:grpSp>
+    </p:spTree>
+  </p:cSld>
+  <p:clrMapOvr>
+    <a:masterClrMapping/>
+  </p:clrMapOvr>
+</p:sld>
+</file>
+
+<file path=ppt/slides/slide64.xml><?xml version="1.0" encoding="utf-8"?>
 <p:sld xmlns:a="http://schemas.openxmlformats.org/drawingml/2006/main" xmlns:p="http://schemas.openxmlformats.org/presentationml/2006/main" xmlns:r="http://schemas.openxmlformats.org/officeDocument/2006/relationships">
   <p:cSld>
     <p:bg>
@@ -10305,7 +13191,7 @@
         <p:spPr>
           <a:xfrm>
             <a:off x="677387" y="692177"/>
-            <a:ext cx="10855878" cy="822960"/>
+            <a:ext cx="10855878" cy="1447800"/>
           </a:xfrm>
           <a:prstGeom prst="rect">
             <a:avLst/>
@@ -10340,7 +13226,7 @@
                 <a:ea typeface="Arial"/>
                 <a:cs typeface="Arial"/>
               </a:rPr>
-              <a:t>Риски</a:t>
+              <a:t>Главный риск — нагрузка выше 20 задач</a:t>
             </a:r>
           </a:p>
         </p:txBody>
@@ -10353,8 +13239,8 @@
         </p:nvSpPr>
         <p:spPr>
           <a:xfrm>
-            <a:off x="677387" y="2200937"/>
-            <a:ext cx="10855878" cy="2009833"/>
+            <a:off x="677387" y="2825777"/>
+            <a:ext cx="10855878" cy="1294229"/>
           </a:xfrm>
           <a:prstGeom prst="rect">
             <a:avLst/>
@@ -10371,7 +13257,7 @@
               <a:spcAft>
                 <a:spcPts val="300"/>
               </a:spcAft>
-              <a:defRPr sz="4800">
+              <a:defRPr sz="3200">
                 <a:solidFill>
                   <a:srgbClr val="000000"/>
                 </a:solidFill>
@@ -10381,7 +13267,7 @@
               </a:defRPr>
             </a:pPr>
             <a:r>
-              <a:rPr sz="4800">
+              <a:rPr sz="3200">
                 <a:solidFill>
                   <a:srgbClr val="000000"/>
                 </a:solidFill>
@@ -10389,7 +13275,7 @@
                 <a:ea typeface="Play"/>
                 <a:cs typeface="Play"/>
               </a:rPr>
-              <a:t>Слабая модель может выдумать неподтверждённые цифры</a:t>
+              <a:t>Модель может выдумать цифры, аудит проверяет</a:t>
             </a:r>
           </a:p>
         </p:txBody>
@@ -10402,8 +13288,8 @@
         </p:nvSpPr>
         <p:spPr>
           <a:xfrm>
-            <a:off x="677387" y="4458437"/>
-            <a:ext cx="10855878" cy="1870262"/>
+            <a:off x="677387" y="4322508"/>
+            <a:ext cx="10855878" cy="1878289"/>
           </a:xfrm>
           <a:prstGeom prst="rect">
             <a:avLst/>
@@ -10420,7 +13306,7 @@
               <a:spcAft>
                 <a:spcPts val="300"/>
               </a:spcAft>
-              <a:defRPr sz="3200">
+              <a:defRPr sz="2800">
                 <a:solidFill>
                   <a:srgbClr val="000000"/>
                 </a:solidFill>
@@ -10430,7 +13316,7 @@
               </a:defRPr>
             </a:pPr>
             <a:r>
-              <a:rPr sz="3200">
+              <a:rPr sz="2800">
                 <a:solidFill>
                   <a:srgbClr val="000000"/>
                 </a:solidFill>
@@ -10438,7 +13324,7 @@
                 <a:ea typeface="Play"/>
                 <a:cs typeface="Play"/>
               </a:rPr>
-              <a:t>• Некачественный шаблон приводит к ошибкам стиля</a:t>
+              <a:t>• Неизвестный шаблон может быть плохо сделан, сервис использует рабочую область</a:t>
             </a:r>
           </a:p>
           <a:p>
@@ -10446,7 +13332,7 @@
               <a:spcAft>
                 <a:spcPts val="300"/>
               </a:spcAft>
-              <a:defRPr sz="3200">
+              <a:defRPr sz="2800">
                 <a:solidFill>
                   <a:srgbClr val="000000"/>
                 </a:solidFill>
@@ -10456,7 +13342,7 @@
               </a:defRPr>
             </a:pPr>
             <a:r>
-              <a:rPr sz="3200">
+              <a:rPr sz="2800">
                 <a:solidFill>
                   <a:srgbClr val="000000"/>
                 </a:solidFill>
@@ -10464,7 +13350,7 @@
                 <a:ea typeface="Play"/>
                 <a:cs typeface="Play"/>
               </a:rPr>
-              <a:t>• Нагрузка &gt;20 задач требует внешней очереди</a:t>
+              <a:t>• Нагрузка выше 20 задач требует внешней очереди</a:t>
             </a:r>
           </a:p>
         </p:txBody>
@@ -10477,16 +13363,9 @@
 </p:sld>
 </file>
 
-<file path=ppt/slides/slide63.xml><?xml version="1.0" encoding="utf-8"?>
+<file path=ppt/slides/slide65.xml><?xml version="1.0" encoding="utf-8"?>
 <p:sld xmlns:a="http://schemas.openxmlformats.org/drawingml/2006/main" xmlns:p="http://schemas.openxmlformats.org/presentationml/2006/main" xmlns:r="http://schemas.openxmlformats.org/officeDocument/2006/relationships">
   <p:cSld>
-    <p:bg>
-      <p:bgPr>
-        <a:solidFill>
-          <a:schemeClr val="lt2"/>
-        </a:solidFill>
-      </p:bgPr>
-    </p:bg>
     <p:spTree>
       <p:nvGrpSpPr>
         <p:cNvPr id="1" name=""/>
@@ -10496,14 +13375,130 @@
       <p:grpSpPr/>
       <p:sp>
         <p:nvSpPr>
-          <p:cNvPr id="2" name="title"/>
+          <p:cNvPr id="443" name="Google Shape;443;p50"/>
+          <p:cNvSpPr/>
+          <p:nvPr/>
+        </p:nvSpPr>
+        <p:spPr>
+          <a:xfrm>
+            <a:off x="658813" y="1794065"/>
+            <a:ext cx="6130294" cy="4406709"/>
+          </a:xfrm>
+          <a:prstGeom prst="roundRect">
+            <a:avLst>
+              <a:gd fmla="val 4444" name="adj"/>
+            </a:avLst>
+          </a:prstGeom>
+          <a:solidFill>
+            <a:schemeClr val="lt2"/>
+          </a:solidFill>
+          <a:ln cap="flat" cmpd="sng" w="19050">
+            <a:solidFill>
+              <a:schemeClr val="dk2"/>
+            </a:solidFill>
+            <a:prstDash val="solid"/>
+            <a:miter lim="8000"/>
+            <a:headEnd len="sm" w="sm" type="none"/>
+            <a:tailEnd len="sm" w="sm" type="none"/>
+          </a:ln>
+        </p:spPr>
+        <p:txBody>
+          <a:bodyPr anchorCtr="0" anchor="ctr" bIns="45700" lIns="91425" spcFirstLastPara="1" rIns="91425" wrap="square" tIns="45700">
+            <a:noAutofit/>
+          </a:bodyPr>
+          <a:lstStyle/>
+          <a:p>
+            <a:pPr indent="0" lvl="0" marL="0" marR="0" rtl="0" algn="ctr">
+              <a:spcBef>
+                <a:spcPts val="0"/>
+              </a:spcBef>
+              <a:spcAft>
+                <a:spcPts val="0"/>
+              </a:spcAft>
+              <a:buNone/>
+            </a:pPr>
+            <a:r>
+              <a:t/>
+            </a:r>
+            <a:endParaRPr b="0" i="0" sz="1800" u="none" cap="none" strike="noStrike">
+              <a:solidFill>
+                <a:schemeClr val="lt1"/>
+              </a:solidFill>
+              <a:latin typeface="Arial"/>
+              <a:ea typeface="Arial"/>
+              <a:cs typeface="Arial"/>
+              <a:sym typeface="Arial"/>
+            </a:endParaRPr>
+          </a:p>
+        </p:txBody>
+      </p:sp>
+      <p:sp>
+        <p:nvSpPr>
+          <p:cNvPr id="449" name="Google Shape;449;p50"/>
+          <p:cNvSpPr txBox="1"/>
+          <p:nvPr/>
+        </p:nvSpPr>
+        <p:spPr>
+          <a:xfrm>
+            <a:off x="18692059" y="4674436"/>
+            <a:ext cx="4304330" cy="678198"/>
+          </a:xfrm>
+          <a:prstGeom prst="rect">
+            <a:avLst/>
+          </a:prstGeom>
+          <a:noFill/>
+          <a:ln>
+            <a:noFill/>
+          </a:ln>
+        </p:spPr>
+        <p:txBody>
+          <a:bodyPr anchorCtr="0" anchor="t" bIns="45700" lIns="91425" spcFirstLastPara="1" rIns="91425" wrap="square" tIns="45700">
+            <a:noAutofit/>
+          </a:bodyPr>
+          <a:lstStyle/>
+          <a:p>
+            <a:pPr indent="0" lvl="0" marL="0" marR="0" rtl="0" algn="l">
+              <a:lnSpc>
+                <a:spcPct val="110000"/>
+              </a:lnSpc>
+              <a:spcBef>
+                <a:spcPts val="0"/>
+              </a:spcBef>
+              <a:spcAft>
+                <a:spcPts val="0"/>
+              </a:spcAft>
+              <a:buClr>
+                <a:schemeClr val="dk1"/>
+              </a:buClr>
+              <a:buSzPts val="1600"/>
+              <a:buFont typeface="Arial"/>
+              <a:buNone/>
+            </a:pPr>
+            <a:r>
+              <a:t/>
+            </a:r>
+            <a:endParaRPr b="0" i="0" sz="1600" u="none" cap="none" strike="noStrike">
+              <a:solidFill>
+                <a:schemeClr val="dk1"/>
+              </a:solidFill>
+              <a:latin typeface="Arial"/>
+              <a:ea typeface="Arial"/>
+              <a:cs typeface="Arial"/>
+              <a:sym typeface="Arial"/>
+            </a:endParaRPr>
+          </a:p>
+        </p:txBody>
+      </p:sp>
+      <p:sp>
+        <p:nvSpPr>
+          <p:cNvPr id="450" name="title"/>
           <p:cNvSpPr txBox="1"/>
           <p:nvPr/>
         </p:nvSpPr>
         <p:spPr>
           <a:xfrm>
             <a:off x="677387" y="692177"/>
-            <a:ext cx="10855878" cy="822960"/>
+            <a:ext cx="10855878" cy="919480"/>
           </a:xfrm>
           <a:prstGeom prst="rect">
             <a:avLst/>
@@ -10520,7 +13515,7 @@
               <a:spcAft>
                 <a:spcPts val="300"/>
               </a:spcAft>
-              <a:defRPr sz="4000">
+              <a:defRPr sz="4800">
                 <a:solidFill>
                   <a:srgbClr val="000000"/>
                 </a:solidFill>
@@ -10530,7 +13525,7 @@
               </a:defRPr>
             </a:pPr>
             <a:r>
-              <a:rPr sz="4000">
+              <a:rPr sz="4800">
                 <a:solidFill>
                   <a:srgbClr val="000000"/>
                 </a:solidFill>
@@ -10538,20 +13533,20 @@
                 <a:ea typeface="Arial"/>
                 <a:cs typeface="Arial"/>
               </a:rPr>
-              <a:t>Стоимость и ресурсы</a:t>
+              <a:t>3Q 2026 – 4Q 2026 – 1Q 2027</a:t>
             </a:r>
           </a:p>
         </p:txBody>
       </p:sp>
       <p:sp>
         <p:nvSpPr>
-          <p:cNvPr id="3" name="stat_0:bar"/>
+          <p:cNvPr id="451" name="stat_0:bar"/>
           <p:cNvSpPr/>
           <p:nvPr/>
         </p:nvSpPr>
         <p:spPr>
           <a:xfrm>
-            <a:off x="677387" y="1892808"/>
+            <a:off x="677387" y="1961415"/>
             <a:ext cx="50800" cy="1150112"/>
           </a:xfrm>
           <a:prstGeom prst="rect">
@@ -10589,13 +13584,13 @@
       </p:sp>
       <p:sp>
         <p:nvSpPr>
-          <p:cNvPr id="4" name="stat_0"/>
+          <p:cNvPr id="452" name="stat_0"/>
           <p:cNvSpPr txBox="1"/>
           <p:nvPr/>
         </p:nvSpPr>
         <p:spPr>
           <a:xfrm>
-            <a:off x="855187" y="1783080"/>
+            <a:off x="855187" y="1851687"/>
             <a:ext cx="10678078" cy="1259840"/>
           </a:xfrm>
           <a:prstGeom prst="rect">
@@ -10634,7 +13629,7 @@
                 <a:ea typeface="Play"/>
                 <a:cs typeface="Play"/>
               </a:rPr>
-              <a:t>2 vCPU</a:t>
+              <a:t>2026</a:t>
             </a:r>
           </a:p>
           <a:p>
@@ -10660,21 +13655,21 @@
                 <a:ea typeface="Play"/>
                 <a:cs typeface="Play"/>
               </a:rPr>
-              <a:t>Сервис использует 2 vCPU / 2 GB RAM</a:t>
+              <a:t>Третий квартал 2026: подключение 4 команд, домен и HTTPS</a:t>
             </a:r>
           </a:p>
         </p:txBody>
       </p:sp>
       <p:sp>
         <p:nvSpPr>
-          <p:cNvPr id="5" name="body"/>
+          <p:cNvPr id="453" name="body"/>
           <p:cNvSpPr txBox="1"/>
           <p:nvPr/>
         </p:nvSpPr>
         <p:spPr>
           <a:xfrm>
-            <a:off x="677387" y="4345356"/>
-            <a:ext cx="10855878" cy="1855441"/>
+            <a:off x="677387" y="4374171"/>
+            <a:ext cx="10855878" cy="1826626"/>
           </a:xfrm>
           <a:prstGeom prst="rect">
             <a:avLst/>
@@ -10709,7 +13704,7 @@
                 <a:ea typeface="Play"/>
                 <a:cs typeface="Play"/>
               </a:rPr>
-              <a:t>• Инференс за 6 недель пилота 1 400 руб</a:t>
+              <a:t>• Четвёртый квартал 2026: доступ для всей компании, интеграция с хранилищем</a:t>
             </a:r>
           </a:p>
           <a:p>
@@ -10735,615 +13730,7 @@
                 <a:ea typeface="Play"/>
                 <a:cs typeface="Play"/>
               </a:rPr>
-              <a:t>• Модель gpt-oss-20b подключается по OpenAI-совместимому протоколу</a:t>
-            </a:r>
-          </a:p>
-        </p:txBody>
-      </p:sp>
-    </p:spTree>
-  </p:cSld>
-  <p:clrMapOvr>
-    <a:masterClrMapping/>
-  </p:clrMapOvr>
-</p:sld>
-</file>
-
-<file path=ppt/slides/slide64.xml><?xml version="1.0" encoding="utf-8"?>
-<p:sld xmlns:a="http://schemas.openxmlformats.org/drawingml/2006/main" xmlns:p="http://schemas.openxmlformats.org/presentationml/2006/main" xmlns:r="http://schemas.openxmlformats.org/officeDocument/2006/relationships">
-  <p:cSld>
-    <p:bg>
-      <p:bgPr>
-        <a:solidFill>
-          <a:schemeClr val="lt2"/>
-        </a:solidFill>
-      </p:bgPr>
-    </p:bg>
-    <p:spTree>
-      <p:nvGrpSpPr>
-        <p:cNvPr id="1" name=""/>
-        <p:cNvGrpSpPr/>
-        <p:nvPr/>
-      </p:nvGrpSpPr>
-      <p:grpSpPr/>
-      <p:sp>
-        <p:nvSpPr>
-          <p:cNvPr id="2" name="title"/>
-          <p:cNvSpPr txBox="1"/>
-          <p:nvPr/>
-        </p:nvSpPr>
-        <p:spPr>
-          <a:xfrm>
-            <a:off x="677875" y="692177"/>
-            <a:ext cx="10855391" cy="822960"/>
-          </a:xfrm>
-          <a:prstGeom prst="rect">
-            <a:avLst/>
-          </a:prstGeom>
-          <a:noFill/>
-        </p:spPr>
-        <p:txBody>
-          <a:bodyPr wrap="square" lIns="76200" rIns="76200" tIns="50800" bIns="50800">
-            <a:spAutoFit/>
-          </a:bodyPr>
-          <a:lstStyle/>
-          <a:p>
-            <a:pPr algn="l">
-              <a:spcAft>
-                <a:spcPts val="300"/>
-              </a:spcAft>
-              <a:defRPr sz="4000">
-                <a:solidFill>
-                  <a:srgbClr val="000000"/>
-                </a:solidFill>
-                <a:latin typeface="Arial"/>
-                <a:ea typeface="Arial"/>
-                <a:cs typeface="Arial"/>
-              </a:defRPr>
-            </a:pPr>
-            <a:r>
-              <a:rPr sz="4000">
-                <a:solidFill>
-                  <a:srgbClr val="000000"/>
-                </a:solidFill>
-                <a:latin typeface="Arial"/>
-                <a:ea typeface="Arial"/>
-                <a:cs typeface="Arial"/>
-              </a:rPr>
-              <a:t>План развития</a:t>
-            </a:r>
-          </a:p>
-        </p:txBody>
-      </p:sp>
-      <p:sp>
-        <p:nvSpPr>
-          <p:cNvPr id="3" name="Rectangle 2"/>
-          <p:cNvSpPr/>
-          <p:nvPr/>
-        </p:nvSpPr>
-        <p:spPr>
-          <a:xfrm>
-            <a:off x="677875" y="3815229"/>
-            <a:ext cx="10855391" cy="132531"/>
-          </a:xfrm>
-          <a:prstGeom prst="rect">
-            <a:avLst/>
-          </a:prstGeom>
-          <a:solidFill>
-            <a:srgbClr val="0077FF"/>
-          </a:solidFill>
-          <a:ln>
-            <a:noFill/>
-          </a:ln>
-        </p:spPr>
-        <p:style>
-          <a:lnRef idx="1">
-            <a:schemeClr val="accent1"/>
-          </a:lnRef>
-          <a:fillRef idx="3">
-            <a:schemeClr val="accent1"/>
-          </a:fillRef>
-          <a:effectRef idx="2">
-            <a:schemeClr val="accent1"/>
-          </a:effectRef>
-          <a:fontRef idx="minor">
-            <a:schemeClr val="lt1"/>
-          </a:fontRef>
-        </p:style>
-        <p:txBody>
-          <a:bodyPr rtlCol="0" anchor="ctr"/>
-          <a:lstStyle/>
-          <a:p>
-            <a:pPr algn="ctr"/>
-          </a:p>
-        </p:txBody>
-      </p:sp>
-      <p:sp>
-        <p:nvSpPr>
-          <p:cNvPr id="4" name="Oval 3"/>
-          <p:cNvSpPr/>
-          <p:nvPr/>
-        </p:nvSpPr>
-        <p:spPr>
-          <a:xfrm>
-            <a:off x="2001157" y="3395546"/>
-            <a:ext cx="971897" cy="971897"/>
-          </a:xfrm>
-          <a:prstGeom prst="ellipse">
-            <a:avLst/>
-          </a:prstGeom>
-          <a:solidFill>
-            <a:srgbClr val="0077FF"/>
-          </a:solidFill>
-          <a:ln>
-            <a:noFill/>
-          </a:ln>
-        </p:spPr>
-        <p:style>
-          <a:lnRef idx="1">
-            <a:schemeClr val="accent1"/>
-          </a:lnRef>
-          <a:fillRef idx="3">
-            <a:schemeClr val="accent1"/>
-          </a:fillRef>
-          <a:effectRef idx="2">
-            <a:schemeClr val="accent1"/>
-          </a:effectRef>
-          <a:fontRef idx="minor">
-            <a:schemeClr val="lt1"/>
-          </a:fontRef>
-        </p:style>
-        <p:txBody>
-          <a:bodyPr rtlCol="0" anchor="ctr"/>
-          <a:lstStyle/>
-          <a:p>
-            <a:pPr algn="ctr"/>
-          </a:p>
-        </p:txBody>
-      </p:sp>
-      <p:sp>
-        <p:nvSpPr>
-          <p:cNvPr id="5" name="TextBox 4"/>
-          <p:cNvSpPr txBox="1"/>
-          <p:nvPr/>
-        </p:nvSpPr>
-        <p:spPr>
-          <a:xfrm>
-            <a:off x="677875" y="1783080"/>
-            <a:ext cx="5427695" cy="1678732"/>
-          </a:xfrm>
-          <a:prstGeom prst="rect">
-            <a:avLst/>
-          </a:prstGeom>
-          <a:noFill/>
-        </p:spPr>
-        <p:txBody>
-          <a:bodyPr wrap="square" lIns="12700" rIns="12700" tIns="12700" bIns="12700">
-            <a:spAutoFit/>
-          </a:bodyPr>
-          <a:lstStyle/>
-          <a:p>
-            <a:pPr algn="ctr">
-              <a:defRPr sz="1400" b="0">
-                <a:solidFill>
-                  <a:srgbClr val="000000"/>
-                </a:solidFill>
-                <a:latin typeface="Play"/>
-                <a:ea typeface="Play"/>
-                <a:cs typeface="Play"/>
-              </a:defRPr>
-            </a:pPr>
-            <a:r>
-              <a:rPr sz="1400" b="0">
-                <a:solidFill>
-                  <a:srgbClr val="000000"/>
-                </a:solidFill>
-                <a:latin typeface="Play"/>
-                <a:ea typeface="Play"/>
-                <a:cs typeface="Play"/>
-              </a:rPr>
-              <a:t>Третий квартал 2026</a:t>
-            </a:r>
-          </a:p>
-        </p:txBody>
-      </p:sp>
-      <p:sp>
-        <p:nvSpPr>
-          <p:cNvPr id="6" name="Oval 5"/>
-          <p:cNvSpPr/>
-          <p:nvPr/>
-        </p:nvSpPr>
-        <p:spPr>
-          <a:xfrm>
-            <a:off x="5619621" y="3395546"/>
-            <a:ext cx="971897" cy="971897"/>
-          </a:xfrm>
-          <a:prstGeom prst="ellipse">
-            <a:avLst/>
-          </a:prstGeom>
-          <a:solidFill>
-            <a:srgbClr val="0077FF"/>
-          </a:solidFill>
-          <a:ln>
-            <a:noFill/>
-          </a:ln>
-        </p:spPr>
-        <p:style>
-          <a:lnRef idx="1">
-            <a:schemeClr val="accent1"/>
-          </a:lnRef>
-          <a:fillRef idx="3">
-            <a:schemeClr val="accent1"/>
-          </a:fillRef>
-          <a:effectRef idx="2">
-            <a:schemeClr val="accent1"/>
-          </a:effectRef>
-          <a:fontRef idx="minor">
-            <a:schemeClr val="lt1"/>
-          </a:fontRef>
-        </p:style>
-        <p:txBody>
-          <a:bodyPr rtlCol="0" anchor="ctr"/>
-          <a:lstStyle/>
-          <a:p>
-            <a:pPr algn="ctr"/>
-          </a:p>
-        </p:txBody>
-      </p:sp>
-      <p:sp>
-        <p:nvSpPr>
-          <p:cNvPr id="7" name="TextBox 6"/>
-          <p:cNvSpPr txBox="1"/>
-          <p:nvPr/>
-        </p:nvSpPr>
-        <p:spPr>
-          <a:xfrm>
-            <a:off x="3391722" y="4787127"/>
-            <a:ext cx="5427695" cy="1678732"/>
-          </a:xfrm>
-          <a:prstGeom prst="rect">
-            <a:avLst/>
-          </a:prstGeom>
-          <a:noFill/>
-        </p:spPr>
-        <p:txBody>
-          <a:bodyPr wrap="square" lIns="12700" rIns="12700" tIns="12700" bIns="12700">
-            <a:spAutoFit/>
-          </a:bodyPr>
-          <a:lstStyle/>
-          <a:p>
-            <a:pPr algn="ctr">
-              <a:defRPr sz="1400" b="0">
-                <a:solidFill>
-                  <a:srgbClr val="000000"/>
-                </a:solidFill>
-                <a:latin typeface="Play"/>
-                <a:ea typeface="Play"/>
-                <a:cs typeface="Play"/>
-              </a:defRPr>
-            </a:pPr>
-            <a:r>
-              <a:rPr sz="1400" b="0">
-                <a:solidFill>
-                  <a:srgbClr val="000000"/>
-                </a:solidFill>
-                <a:latin typeface="Play"/>
-                <a:ea typeface="Play"/>
-                <a:cs typeface="Play"/>
-              </a:rPr>
-              <a:t>Четвёртый квартал 2026</a:t>
-            </a:r>
-          </a:p>
-        </p:txBody>
-      </p:sp>
-      <p:sp>
-        <p:nvSpPr>
-          <p:cNvPr id="8" name="Oval 7"/>
-          <p:cNvSpPr/>
-          <p:nvPr/>
-        </p:nvSpPr>
-        <p:spPr>
-          <a:xfrm>
-            <a:off x="9238085" y="3395546"/>
-            <a:ext cx="971897" cy="971897"/>
-          </a:xfrm>
-          <a:prstGeom prst="ellipse">
-            <a:avLst/>
-          </a:prstGeom>
-          <a:solidFill>
-            <a:srgbClr val="0077FF"/>
-          </a:solidFill>
-          <a:ln>
-            <a:noFill/>
-          </a:ln>
-        </p:spPr>
-        <p:style>
-          <a:lnRef idx="1">
-            <a:schemeClr val="accent1"/>
-          </a:lnRef>
-          <a:fillRef idx="3">
-            <a:schemeClr val="accent1"/>
-          </a:fillRef>
-          <a:effectRef idx="2">
-            <a:schemeClr val="accent1"/>
-          </a:effectRef>
-          <a:fontRef idx="minor">
-            <a:schemeClr val="lt1"/>
-          </a:fontRef>
-        </p:style>
-        <p:txBody>
-          <a:bodyPr rtlCol="0" anchor="ctr"/>
-          <a:lstStyle/>
-          <a:p>
-            <a:pPr algn="ctr"/>
-          </a:p>
-        </p:txBody>
-      </p:sp>
-      <p:sp>
-        <p:nvSpPr>
-          <p:cNvPr id="9" name="TextBox 8"/>
-          <p:cNvSpPr txBox="1"/>
-          <p:nvPr/>
-        </p:nvSpPr>
-        <p:spPr>
-          <a:xfrm>
-            <a:off x="6105570" y="1783080"/>
-            <a:ext cx="5427695" cy="1678732"/>
-          </a:xfrm>
-          <a:prstGeom prst="rect">
-            <a:avLst/>
-          </a:prstGeom>
-          <a:noFill/>
-        </p:spPr>
-        <p:txBody>
-          <a:bodyPr wrap="square" lIns="12700" rIns="12700" tIns="12700" bIns="12700">
-            <a:spAutoFit/>
-          </a:bodyPr>
-          <a:lstStyle/>
-          <a:p>
-            <a:pPr algn="ctr">
-              <a:defRPr sz="1400" b="0">
-                <a:solidFill>
-                  <a:srgbClr val="000000"/>
-                </a:solidFill>
-                <a:latin typeface="Play"/>
-                <a:ea typeface="Play"/>
-                <a:cs typeface="Play"/>
-              </a:defRPr>
-            </a:pPr>
-            <a:r>
-              <a:rPr sz="1400" b="0">
-                <a:solidFill>
-                  <a:srgbClr val="000000"/>
-                </a:solidFill>
-                <a:latin typeface="Play"/>
-                <a:ea typeface="Play"/>
-                <a:cs typeface="Play"/>
-              </a:rPr>
-              <a:t>Первый квартал 2027</a:t>
-            </a:r>
-          </a:p>
-        </p:txBody>
-      </p:sp>
-    </p:spTree>
-  </p:cSld>
-  <p:clrMapOvr>
-    <a:masterClrMapping/>
-  </p:clrMapOvr>
-</p:sld>
-</file>
-
-<file path=ppt/slides/slide65.xml><?xml version="1.0" encoding="utf-8"?>
-<p:sld xmlns:a="http://schemas.openxmlformats.org/drawingml/2006/main" xmlns:p="http://schemas.openxmlformats.org/presentationml/2006/main" xmlns:r="http://schemas.openxmlformats.org/officeDocument/2006/relationships">
-  <p:cSld>
-    <p:bg>
-      <p:bgPr>
-        <a:solidFill>
-          <a:schemeClr val="lt2"/>
-        </a:solidFill>
-      </p:bgPr>
-    </p:bg>
-    <p:spTree>
-      <p:nvGrpSpPr>
-        <p:cNvPr id="1" name=""/>
-        <p:cNvGrpSpPr/>
-        <p:nvPr/>
-      </p:nvGrpSpPr>
-      <p:grpSpPr/>
-      <p:sp>
-        <p:nvSpPr>
-          <p:cNvPr id="2" name="title"/>
-          <p:cNvSpPr txBox="1"/>
-          <p:nvPr/>
-        </p:nvSpPr>
-        <p:spPr>
-          <a:xfrm>
-            <a:off x="677387" y="692177"/>
-            <a:ext cx="10855878" cy="822960"/>
-          </a:xfrm>
-          <a:prstGeom prst="rect">
-            <a:avLst/>
-          </a:prstGeom>
-          <a:noFill/>
-        </p:spPr>
-        <p:txBody>
-          <a:bodyPr wrap="square" lIns="76200" rIns="76200" tIns="50800" bIns="50800">
-            <a:spAutoFit/>
-          </a:bodyPr>
-          <a:lstStyle/>
-          <a:p>
-            <a:pPr algn="l">
-              <a:spcAft>
-                <a:spcPts val="300"/>
-              </a:spcAft>
-              <a:defRPr sz="4000">
-                <a:solidFill>
-                  <a:srgbClr val="000000"/>
-                </a:solidFill>
-                <a:latin typeface="Arial"/>
-                <a:ea typeface="Arial"/>
-                <a:cs typeface="Arial"/>
-              </a:defRPr>
-            </a:pPr>
-            <a:r>
-              <a:rPr sz="4000">
-                <a:solidFill>
-                  <a:srgbClr val="000000"/>
-                </a:solidFill>
-                <a:latin typeface="Arial"/>
-                <a:ea typeface="Arial"/>
-                <a:cs typeface="Arial"/>
-              </a:rPr>
-              <a:t>Преимущества для компании</a:t>
-            </a:r>
-          </a:p>
-        </p:txBody>
-      </p:sp>
-      <p:sp>
-        <p:nvSpPr>
-          <p:cNvPr id="3" name="lead"/>
-          <p:cNvSpPr txBox="1"/>
-          <p:nvPr/>
-        </p:nvSpPr>
-        <p:spPr>
-          <a:xfrm>
-            <a:off x="677387" y="1773204"/>
-            <a:ext cx="10855878" cy="1674861"/>
-          </a:xfrm>
-          <a:prstGeom prst="rect">
-            <a:avLst/>
-          </a:prstGeom>
-          <a:noFill/>
-        </p:spPr>
-        <p:txBody>
-          <a:bodyPr wrap="square" lIns="76200" rIns="76200" tIns="50800" bIns="50800">
-            <a:spAutoFit/>
-          </a:bodyPr>
-          <a:lstStyle/>
-          <a:p>
-            <a:pPr algn="l">
-              <a:spcAft>
-                <a:spcPts val="300"/>
-              </a:spcAft>
-              <a:defRPr sz="4000">
-                <a:solidFill>
-                  <a:srgbClr val="000000"/>
-                </a:solidFill>
-                <a:latin typeface="Play"/>
-                <a:ea typeface="Play"/>
-                <a:cs typeface="Play"/>
-              </a:defRPr>
-            </a:pPr>
-            <a:r>
-              <a:rPr sz="4000">
-                <a:solidFill>
-                  <a:srgbClr val="000000"/>
-                </a:solidFill>
-                <a:latin typeface="Play"/>
-                <a:ea typeface="Play"/>
-                <a:cs typeface="Play"/>
-              </a:rPr>
-              <a:t>Ускорение создания презентаций до 4 мин</a:t>
-            </a:r>
-          </a:p>
-        </p:txBody>
-      </p:sp>
-      <p:sp>
-        <p:nvSpPr>
-          <p:cNvPr id="4" name="body"/>
-          <p:cNvSpPr txBox="1"/>
-          <p:nvPr/>
-        </p:nvSpPr>
-        <p:spPr>
-          <a:xfrm>
-            <a:off x="677387" y="3713721"/>
-            <a:ext cx="10855878" cy="2487075"/>
-          </a:xfrm>
-          <a:prstGeom prst="rect">
-            <a:avLst/>
-          </a:prstGeom>
-          <a:noFill/>
-        </p:spPr>
-        <p:txBody>
-          <a:bodyPr wrap="square" lIns="76200" rIns="76200" tIns="50800" bIns="50800">
-            <a:spAutoFit/>
-          </a:bodyPr>
-          <a:lstStyle/>
-          <a:p>
-            <a:pPr algn="l">
-              <a:spcAft>
-                <a:spcPts val="300"/>
-              </a:spcAft>
-              <a:defRPr sz="3200">
-                <a:solidFill>
-                  <a:srgbClr val="000000"/>
-                </a:solidFill>
-                <a:latin typeface="Play"/>
-                <a:ea typeface="Play"/>
-                <a:cs typeface="Play"/>
-              </a:defRPr>
-            </a:pPr>
-            <a:r>
-              <a:rPr sz="3200">
-                <a:solidFill>
-                  <a:srgbClr val="000000"/>
-                </a:solidFill>
-                <a:latin typeface="Play"/>
-                <a:ea typeface="Play"/>
-                <a:cs typeface="Play"/>
-              </a:rPr>
-              <a:t>• Снижение ошибок стиля до 2 из 68 колод</a:t>
-            </a:r>
-          </a:p>
-          <a:p>
-            <a:pPr algn="l">
-              <a:spcAft>
-                <a:spcPts val="300"/>
-              </a:spcAft>
-              <a:defRPr sz="3200">
-                <a:solidFill>
-                  <a:srgbClr val="000000"/>
-                </a:solidFill>
-                <a:latin typeface="Play"/>
-                <a:ea typeface="Play"/>
-                <a:cs typeface="Play"/>
-              </a:defRPr>
-            </a:pPr>
-            <a:r>
-              <a:rPr sz="3200">
-                <a:solidFill>
-                  <a:srgbClr val="000000"/>
-                </a:solidFill>
-                <a:latin typeface="Play"/>
-                <a:ea typeface="Play"/>
-                <a:cs typeface="Play"/>
-              </a:rPr>
-              <a:t>• Экономия времени дизайнеров</a:t>
-            </a:r>
-          </a:p>
-          <a:p>
-            <a:pPr algn="l">
-              <a:spcAft>
-                <a:spcPts val="300"/>
-              </a:spcAft>
-              <a:defRPr sz="3200">
-                <a:solidFill>
-                  <a:srgbClr val="000000"/>
-                </a:solidFill>
-                <a:latin typeface="Play"/>
-                <a:ea typeface="Play"/>
-                <a:cs typeface="Play"/>
-              </a:defRPr>
-            </a:pPr>
-            <a:r>
-              <a:rPr sz="3200">
-                <a:solidFill>
-                  <a:srgbClr val="000000"/>
-                </a:solidFill>
-                <a:latin typeface="Play"/>
-                <a:ea typeface="Play"/>
-                <a:cs typeface="Play"/>
-              </a:rPr>
-              <a:t>• Масштабируемость без дополнительных сотрудников</a:t>
+              <a:t>• Первый квартал 2027: генерация иллюстраций под стиль шаблона</a:t>
             </a:r>
           </a:p>
         </p:txBody>
@@ -11439,7 +13826,7 @@
         <p:spPr>
           <a:xfrm>
             <a:off x="677387" y="692177"/>
-            <a:ext cx="10855878" cy="822960"/>
+            <a:ext cx="10855878" cy="1447800"/>
           </a:xfrm>
           <a:prstGeom prst="rect">
             <a:avLst/>
@@ -11474,7 +13861,7 @@
                 <a:ea typeface="Arial"/>
                 <a:cs typeface="Arial"/>
               </a:rPr>
-              <a:t>Что мы просим решить</a:t>
+              <a:t>Запрос решения о запуске сервиса на всю компанию</a:t>
             </a:r>
           </a:p>
         </p:txBody>
@@ -11487,8 +13874,8 @@
         </p:nvSpPr>
         <p:spPr>
           <a:xfrm>
-            <a:off x="677387" y="2200937"/>
-            <a:ext cx="10855878" cy="1825766"/>
+            <a:off x="677387" y="2825777"/>
+            <a:ext cx="10855878" cy="1314790"/>
           </a:xfrm>
           <a:prstGeom prst="rect">
             <a:avLst/>
@@ -11523,7 +13910,7 @@
                 <a:ea typeface="Play"/>
                 <a:cs typeface="Play"/>
               </a:rPr>
-              <a:t>Одобрить запуск сервиса на всю компанию</a:t>
+              <a:t>Решить о полном запуске сервиса</a:t>
             </a:r>
           </a:p>
         </p:txBody>
@@ -11536,8 +13923,8 @@
         </p:nvSpPr>
         <p:spPr>
           <a:xfrm>
-            <a:off x="677387" y="4274370"/>
-            <a:ext cx="10855878" cy="2054328"/>
+            <a:off x="677387" y="4343069"/>
+            <a:ext cx="10855878" cy="1857728"/>
           </a:xfrm>
           <a:prstGeom prst="rect">
             <a:avLst/>
@@ -11572,7 +13959,7 @@
                 <a:ea typeface="Play"/>
                 <a:cs typeface="Play"/>
               </a:rPr>
-              <a:t>• Выделить бюджет на инфраструктуру и интеграцию</a:t>
+              <a:t>• Подтвердить план по генерации иллюстраций в 1Q 2027</a:t>
             </a:r>
           </a:p>
           <a:p>
@@ -11598,7 +13985,7 @@
                 <a:ea typeface="Play"/>
                 <a:cs typeface="Play"/>
               </a:rPr>
-              <a:t>• Назначить ответственных за внедрение</a:t>
+              <a:t>• Обеспечить доступ для всех команд</a:t>
             </a:r>
           </a:p>
         </p:txBody>
@@ -11630,7 +14017,7 @@
         <p:spPr>
           <a:xfrm>
             <a:off x="658855" y="692177"/>
-            <a:ext cx="5242438" cy="919480"/>
+            <a:ext cx="5242438" cy="1183640"/>
           </a:xfrm>
           <a:prstGeom prst="rect">
             <a:avLst/>
@@ -11647,7 +14034,7 @@
               <a:spcAft>
                 <a:spcPts val="300"/>
               </a:spcAft>
-              <a:defRPr sz="4800">
+              <a:defRPr sz="3200">
                 <a:solidFill>
                   <a:srgbClr val="FFFFFF"/>
                 </a:solidFill>
@@ -11657,7 +14044,7 @@
               </a:defRPr>
             </a:pPr>
             <a:r>
-              <a:rPr sz="4800">
+              <a:rPr sz="3200">
                 <a:solidFill>
                   <a:srgbClr val="FFFFFF"/>
                 </a:solidFill>
@@ -11665,7 +14052,7 @@
                 <a:ea typeface="Arial"/>
                 <a:cs typeface="Arial"/>
               </a:rPr>
-              <a:t>Заключение</a:t>
+              <a:t>Сервис повышает эффективность компании</a:t>
             </a:r>
           </a:p>
         </p:txBody>
@@ -11678,8 +14065,8 @@
         </p:nvSpPr>
         <p:spPr>
           <a:xfrm>
-            <a:off x="658855" y="1851687"/>
-            <a:ext cx="5242438" cy="1971251"/>
+            <a:off x="658855" y="2115847"/>
+            <a:ext cx="5242438" cy="1382853"/>
           </a:xfrm>
           <a:prstGeom prst="rect">
             <a:avLst/>
@@ -11714,7 +14101,7 @@
                 <a:ea typeface="Play"/>
                 <a:cs typeface="Play"/>
               </a:rPr>
-              <a:t>Одобрить запуск сервиса на всю компанию</a:t>
+              <a:t>Сервис повышает эффективность дизайнеров</a:t>
             </a:r>
           </a:p>
         </p:txBody>
@@ -11727,8 +14114,8 @@
         </p:nvSpPr>
         <p:spPr>
           <a:xfrm>
-            <a:off x="658855" y="4050391"/>
-            <a:ext cx="5242438" cy="1592164"/>
+            <a:off x="658855" y="3710304"/>
+            <a:ext cx="5242438" cy="1932252"/>
           </a:xfrm>
           <a:prstGeom prst="rect">
             <a:avLst/>
@@ -11745,7 +14132,7 @@
               <a:spcAft>
                 <a:spcPts val="300"/>
               </a:spcAft>
-              <a:defRPr sz="2800">
+              <a:defRPr sz="1800">
                 <a:solidFill>
                   <a:srgbClr val="FFFFFF"/>
                 </a:solidFill>
@@ -11755,7 +14142,7 @@
               </a:defRPr>
             </a:pPr>
             <a:r>
-              <a:rPr sz="2800">
+              <a:rPr sz="1800">
                 <a:solidFill>
                   <a:srgbClr val="FFFFFF"/>
                 </a:solidFill>
@@ -11763,7 +14150,33 @@
                 <a:ea typeface="Play"/>
                 <a:cs typeface="Play"/>
               </a:rPr>
-              <a:t>Назначить ответственных и выделить бюджет</a:t>
+              <a:t>• Сокращение времени сборки ускоряет коммуникацию</a:t>
+            </a:r>
+          </a:p>
+          <a:p>
+            <a:pPr algn="l">
+              <a:spcAft>
+                <a:spcPts val="300"/>
+              </a:spcAft>
+              <a:defRPr sz="1800">
+                <a:solidFill>
+                  <a:srgbClr val="FFFFFF"/>
+                </a:solidFill>
+                <a:latin typeface="Play"/>
+                <a:ea typeface="Play"/>
+                <a:cs typeface="Play"/>
+              </a:defRPr>
+            </a:pPr>
+            <a:r>
+              <a:rPr sz="1800">
+                <a:solidFill>
+                  <a:srgbClr val="FFFFFF"/>
+                </a:solidFill>
+                <a:latin typeface="Play"/>
+                <a:ea typeface="Play"/>
+                <a:cs typeface="Play"/>
+              </a:rPr>
+              <a:t>• Уменьшение ошибок стиля снижает риск недовольства заказчиков</a:t>
             </a:r>
           </a:p>
         </p:txBody>
